--- a/I2K_2026_QuPath_Extensions.pptx
+++ b/I2K_2026_QuPath_Extensions.pptx
@@ -56,9 +56,11 @@
     <p:sldId id="304" r:id="rId50"/>
     <p:sldId id="305" r:id="rId51"/>
     <p:sldId id="306" r:id="rId52"/>
+    <p:sldId id="307" r:id="rId53"/>
+    <p:sldId id="308" r:id="rId54"/>
   </p:sldIdLst>
   <p:notesMasterIdLst>
-    <p:notesMasterId r:id="rId53"/>
+    <p:notesMasterId r:id="rId55"/>
   </p:notesMasterIdLst>
   <p:sldSz cx="12192000" cy="6858000"/>
   <p:notesSz cx="6858000" cy="12192000"/>
@@ -4624,6 +4626,182 @@
             <a:fld id="{F7021451-1387-4CA6-816F-3879F97B5CBC}" type="slidenum">
               <a:rPr lang="en-US"/>
               <a:t>51</a:t>
+            </a:fld>
+            <a:endParaRPr lang="en-US"/>
+          </a:p>
+        </p:txBody>
+      </p:sp>
+    </p:spTree>
+    <p:extLst>
+      <p:ext uri="{BB962C8B-B14F-4D97-AF65-F5344CB8AC3E}">
+        <p14:creationId xmlns:p14="http://schemas.microsoft.com/office/powerpoint/2010/main" val="1024086991"/>
+      </p:ext>
+    </p:extLst>
+  </p:cSld>
+  <p:clrMapOvr>
+    <a:masterClrMapping/>
+  </p:clrMapOvr>
+</p:notes>
+</file>
+
+<file path=ppt/notesSlides/notesSlide52.xml><?xml version="1.0" encoding="utf-8"?>
+<p:notes xmlns:a="http://schemas.openxmlformats.org/drawingml/2006/main" xmlns:r="http://schemas.openxmlformats.org/officeDocument/2006/relationships" xmlns:p="http://schemas.openxmlformats.org/presentationml/2006/main">
+  <p:cSld>
+    <p:spTree>
+      <p:nvGrpSpPr>
+        <p:cNvPr id="1" name=""/>
+        <p:cNvGrpSpPr/>
+        <p:nvPr/>
+      </p:nvGrpSpPr>
+      <p:grpSpPr>
+        <a:xfrm>
+          <a:off x="0" y="0"/>
+          <a:ext cx="0" cy="0"/>
+          <a:chOff x="0" y="0"/>
+          <a:chExt cx="0" cy="0"/>
+        </a:xfrm>
+      </p:grpSpPr>
+      <p:sp>
+        <p:nvSpPr>
+          <p:cNvPr id="2" name="Slide Image Placeholder 1"/>
+          <p:cNvSpPr>
+            <a:spLocks noGrp="1" noRot="1" noChangeAspect="1"/>
+          </p:cNvSpPr>
+          <p:nvPr>
+            <p:ph type="sldImg"/>
+          </p:nvPr>
+        </p:nvSpPr>
+        <p:spPr/>
+      </p:sp>
+      <p:sp>
+        <p:nvSpPr>
+          <p:cNvPr id="3" name="Notes Placeholder 2"/>
+          <p:cNvSpPr>
+            <a:spLocks noGrp="1"/>
+          </p:cNvSpPr>
+          <p:nvPr>
+            <p:ph type="body" idx="1"/>
+          </p:nvPr>
+        </p:nvSpPr>
+        <p:spPr/>
+        <p:txBody>
+          <a:bodyPr/>
+          <a:lstStyle/>
+          <a:p>
+            <a:r>
+              <a:rPr lang="en-US" dirty="0"/>
+              <a:t/>
+            </a:r>
+            <a:endParaRPr lang="en-US" dirty="0"/>
+          </a:p>
+        </p:txBody>
+      </p:sp>
+      <p:sp>
+        <p:nvSpPr>
+          <p:cNvPr id="4" name="Slide Number Placeholder 3"/>
+          <p:cNvSpPr>
+            <a:spLocks noGrp="1"/>
+          </p:cNvSpPr>
+          <p:nvPr>
+            <p:ph type="sldNum" sz="quarter" idx="10"/>
+          </p:nvPr>
+        </p:nvSpPr>
+        <p:spPr/>
+        <p:txBody>
+          <a:bodyPr/>
+          <a:lstStyle/>
+          <a:p>
+            <a:fld id="{F7021451-1387-4CA6-816F-3879F97B5CBC}" type="slidenum">
+              <a:rPr lang="en-US"/>
+              <a:t>52</a:t>
+            </a:fld>
+            <a:endParaRPr lang="en-US"/>
+          </a:p>
+        </p:txBody>
+      </p:sp>
+    </p:spTree>
+    <p:extLst>
+      <p:ext uri="{BB962C8B-B14F-4D97-AF65-F5344CB8AC3E}">
+        <p14:creationId xmlns:p14="http://schemas.microsoft.com/office/powerpoint/2010/main" val="1024086991"/>
+      </p:ext>
+    </p:extLst>
+  </p:cSld>
+  <p:clrMapOvr>
+    <a:masterClrMapping/>
+  </p:clrMapOvr>
+</p:notes>
+</file>
+
+<file path=ppt/notesSlides/notesSlide53.xml><?xml version="1.0" encoding="utf-8"?>
+<p:notes xmlns:a="http://schemas.openxmlformats.org/drawingml/2006/main" xmlns:r="http://schemas.openxmlformats.org/officeDocument/2006/relationships" xmlns:p="http://schemas.openxmlformats.org/presentationml/2006/main">
+  <p:cSld>
+    <p:spTree>
+      <p:nvGrpSpPr>
+        <p:cNvPr id="1" name=""/>
+        <p:cNvGrpSpPr/>
+        <p:nvPr/>
+      </p:nvGrpSpPr>
+      <p:grpSpPr>
+        <a:xfrm>
+          <a:off x="0" y="0"/>
+          <a:ext cx="0" cy="0"/>
+          <a:chOff x="0" y="0"/>
+          <a:chExt cx="0" cy="0"/>
+        </a:xfrm>
+      </p:grpSpPr>
+      <p:sp>
+        <p:nvSpPr>
+          <p:cNvPr id="2" name="Slide Image Placeholder 1"/>
+          <p:cNvSpPr>
+            <a:spLocks noGrp="1" noRot="1" noChangeAspect="1"/>
+          </p:cNvSpPr>
+          <p:nvPr>
+            <p:ph type="sldImg"/>
+          </p:nvPr>
+        </p:nvSpPr>
+        <p:spPr/>
+      </p:sp>
+      <p:sp>
+        <p:nvSpPr>
+          <p:cNvPr id="3" name="Notes Placeholder 2"/>
+          <p:cNvSpPr>
+            <a:spLocks noGrp="1"/>
+          </p:cNvSpPr>
+          <p:nvPr>
+            <p:ph type="body" idx="1"/>
+          </p:nvPr>
+        </p:nvSpPr>
+        <p:spPr/>
+        <p:txBody>
+          <a:bodyPr/>
+          <a:lstStyle/>
+          <a:p>
+            <a:r>
+              <a:rPr lang="en-US" dirty="0"/>
+              <a:t/>
+            </a:r>
+            <a:endParaRPr lang="en-US" dirty="0"/>
+          </a:p>
+        </p:txBody>
+      </p:sp>
+      <p:sp>
+        <p:nvSpPr>
+          <p:cNvPr id="4" name="Slide Number Placeholder 3"/>
+          <p:cNvSpPr>
+            <a:spLocks noGrp="1"/>
+          </p:cNvSpPr>
+          <p:nvPr>
+            <p:ph type="sldNum" sz="quarter" idx="10"/>
+          </p:nvPr>
+        </p:nvSpPr>
+        <p:spPr/>
+        <p:txBody>
+          <a:bodyPr/>
+          <a:lstStyle/>
+          <a:p>
+            <a:fld id="{F7021451-1387-4CA6-816F-3879F97B5CBC}" type="slidenum">
+              <a:rPr lang="en-US"/>
+              <a:t>53</a:t>
             </a:fld>
             <a:endParaRPr lang="en-US"/>
           </a:p>
@@ -11888,23 +12066,42 @@
       </p:grpSpPr>
       <p:sp>
         <p:nvSpPr>
-          <p:cNvPr id="2" name="Shape 0"/>
-          <p:cNvSpPr/>
-          <p:nvPr/>
-        </p:nvSpPr>
-        <p:spPr>
-          <a:xfrm>
-            <a:off x="0" y="1417320"/>
-            <a:ext cx="12188952" cy="3108960"/>
-          </a:xfrm>
-          <a:prstGeom prst="rect">
-            <a:avLst/>
-          </a:prstGeom>
-          <a:solidFill>
-            <a:srgbClr val="E8F0FA"/>
-          </a:solidFill>
-          <a:ln/>
-        </p:spPr>
+          <p:cNvPr id="2" name="Text 0"/>
+          <p:cNvSpPr/>
+          <p:nvPr/>
+        </p:nvSpPr>
+        <p:spPr>
+          <a:xfrm>
+            <a:off x="566928" y="384048"/>
+            <a:ext cx="11055096" cy="658368"/>
+          </a:xfrm>
+          <a:prstGeom prst="rect">
+            <a:avLst/>
+          </a:prstGeom>
+          <a:noFill/>
+          <a:ln/>
+        </p:spPr>
+        <p:txBody>
+          <a:bodyPr wrap="square" rtlCol="0" anchor="ctr"/>
+          <a:lstStyle/>
+          <a:p>
+            <a:pPr indent="0" marL="0">
+              <a:buNone/>
+            </a:pPr>
+            <a:r>
+              <a:rPr lang="en-US" sz="3000" b="1" dirty="0">
+                <a:solidFill>
+                  <a:srgbClr val="1F4C86"/>
+                </a:solidFill>
+                <a:latin typeface="Trebuchet MS" pitchFamily="34" charset="0"/>
+                <a:ea typeface="Trebuchet MS" pitchFamily="34" charset="-122"/>
+                <a:cs typeface="Trebuchet MS" pitchFamily="34" charset="-120"/>
+              </a:rPr>
+              <a:t>Tiles to Pyramid: stitching two tiles</a:t>
+            </a:r>
+            <a:endParaRPr lang="en-US" sz="3000" dirty="0"/>
+          </a:p>
+        </p:txBody>
       </p:sp>
       <p:sp>
         <p:nvSpPr>
@@ -11914,8 +12111,8 @@
         </p:nvSpPr>
         <p:spPr>
           <a:xfrm>
-            <a:off x="0" y="1417320"/>
-            <a:ext cx="201168" cy="3108960"/>
+            <a:off x="566928" y="1097280"/>
+            <a:ext cx="1920240" cy="50292"/>
           </a:xfrm>
           <a:prstGeom prst="rect">
             <a:avLst/>
@@ -11934,8 +12131,8 @@
         </p:nvSpPr>
         <p:spPr>
           <a:xfrm>
-            <a:off x="566928" y="1691640"/>
-            <a:ext cx="1828800" cy="914400"/>
+            <a:off x="566928" y="1225296"/>
+            <a:ext cx="11055096" cy="384048"/>
           </a:xfrm>
           <a:prstGeom prst="rect">
             <a:avLst/>
@@ -11951,30 +12148,54 @@
               <a:buNone/>
             </a:pPr>
             <a:r>
-              <a:rPr lang="en-US" sz="5400" b="1" dirty="0">
-                <a:solidFill>
-                  <a:srgbClr val="3674C1"/>
-                </a:solidFill>
-                <a:latin typeface="Trebuchet MS" pitchFamily="34" charset="0"/>
-                <a:ea typeface="Trebuchet MS" pitchFamily="34" charset="-122"/>
-                <a:cs typeface="Trebuchet MS" pitchFamily="34" charset="-120"/>
-              </a:rPr>
-              <a:t>05</a:t>
-            </a:r>
-            <a:endParaRPr lang="en-US" sz="5400" dirty="0"/>
-          </a:p>
-        </p:txBody>
-      </p:sp>
-      <p:sp>
-        <p:nvSpPr>
-          <p:cNvPr id="5" name="Text 3"/>
-          <p:cNvSpPr/>
-          <p:nvPr/>
-        </p:nvSpPr>
-        <p:spPr>
-          <a:xfrm>
-            <a:off x="566928" y="2606040"/>
-            <a:ext cx="11055096" cy="868680"/>
+              <a:rPr lang="en-US" sz="1700" b="1" dirty="0">
+                <a:solidFill>
+                  <a:srgbClr val="1F4C86"/>
+                </a:solidFill>
+                <a:latin typeface="Calibri" pitchFamily="34" charset="0"/>
+                <a:ea typeface="Calibri" pitchFamily="34" charset="-122"/>
+                <a:cs typeface="Calibri" pitchFamily="34" charset="-120"/>
+              </a:rPr>
+              <a:t>As acquired: neighbouring tiles share a strip of the same tissue (shaded)</a:t>
+            </a:r>
+            <a:endParaRPr lang="en-US" sz="1700" dirty="0"/>
+          </a:p>
+        </p:txBody>
+      </p:sp>
+      <p:pic>
+        <p:nvPicPr>
+          <p:cNvPr id="5" name="Image 0" descr="images/stitch_ppm_unstitched.jpg">    </p:cNvPr>
+          <p:cNvPicPr>
+            <a:picLocks noChangeAspect="1"/>
+          </p:cNvPicPr>
+          <p:nvPr/>
+        </p:nvPicPr>
+        <p:blipFill>
+          <a:blip r:embed="rId1"/>
+          <a:stretch>
+            <a:fillRect/>
+          </a:stretch>
+        </p:blipFill>
+        <p:spPr>
+          <a:xfrm>
+            <a:off x="566928" y="1645920"/>
+            <a:ext cx="10058400" cy="1894332"/>
+          </a:xfrm>
+          <a:prstGeom prst="rect">
+            <a:avLst/>
+          </a:prstGeom>
+        </p:spPr>
+      </p:pic>
+      <p:sp>
+        <p:nvSpPr>
+          <p:cNvPr id="6" name="Text 3"/>
+          <p:cNvSpPr/>
+          <p:nvPr/>
+        </p:nvSpPr>
+        <p:spPr>
+          <a:xfrm>
+            <a:off x="566928" y="3631692"/>
+            <a:ext cx="11055096" cy="384048"/>
           </a:xfrm>
           <a:prstGeom prst="rect">
             <a:avLst/>
@@ -11990,46 +12211,70 @@
               <a:buNone/>
             </a:pPr>
             <a:r>
-              <a:rPr lang="en-US" sz="4000" b="1" dirty="0">
+              <a:rPr lang="en-US" sz="1700" b="1" dirty="0">
                 <a:solidFill>
                   <a:srgbClr val="1F4C86"/>
                 </a:solidFill>
-                <a:latin typeface="Trebuchet MS" pitchFamily="34" charset="0"/>
-                <a:ea typeface="Trebuchet MS" pitchFamily="34" charset="-122"/>
-                <a:cs typeface="Trebuchet MS" pitchFamily="34" charset="-120"/>
-              </a:rPr>
-              <a:t>Did it actually work?</a:t>
-            </a:r>
-            <a:endParaRPr lang="en-US" sz="4000" dirty="0"/>
-          </a:p>
-        </p:txBody>
-      </p:sp>
-      <p:sp>
-        <p:nvSpPr>
-          <p:cNvPr id="6" name="Text 4"/>
-          <p:cNvSpPr/>
-          <p:nvPr/>
-        </p:nvSpPr>
-        <p:spPr>
-          <a:xfrm>
-            <a:off x="566928" y="3456432"/>
-            <a:ext cx="10140696" cy="731520"/>
-          </a:xfrm>
-          <a:prstGeom prst="rect">
-            <a:avLst/>
-          </a:prstGeom>
-          <a:noFill/>
-          <a:ln/>
-        </p:spPr>
-        <p:txBody>
-          <a:bodyPr wrap="square" rtlCol="0" anchor="t"/>
+                <a:latin typeface="Calibri" pitchFamily="34" charset="0"/>
+                <a:ea typeface="Calibri" pitchFamily="34" charset="-122"/>
+                <a:cs typeface="Calibri" pitchFamily="34" charset="-120"/>
+              </a:rPr>
+              <a:t>Stitched: the join is placed by matching the image content in that strip</a:t>
+            </a:r>
+            <a:endParaRPr lang="en-US" sz="1700" dirty="0"/>
+          </a:p>
+        </p:txBody>
+      </p:sp>
+      <p:pic>
+        <p:nvPicPr>
+          <p:cNvPr id="7" name="Image 1" descr="images/stitch_ppm_stitched.jpg">    </p:cNvPr>
+          <p:cNvPicPr>
+            <a:picLocks noChangeAspect="1"/>
+          </p:cNvPicPr>
+          <p:nvPr/>
+        </p:nvPicPr>
+        <p:blipFill>
+          <a:blip r:embed="rId2"/>
+          <a:stretch>
+            <a:fillRect/>
+          </a:stretch>
+        </p:blipFill>
+        <p:spPr>
+          <a:xfrm>
+            <a:off x="566928" y="4052316"/>
+            <a:ext cx="9273845" cy="1894332"/>
+          </a:xfrm>
+          <a:prstGeom prst="rect">
+            <a:avLst/>
+          </a:prstGeom>
+        </p:spPr>
+      </p:pic>
+      <p:sp>
+        <p:nvSpPr>
+          <p:cNvPr id="8" name="Text 4"/>
+          <p:cNvSpPr/>
+          <p:nvPr/>
+        </p:nvSpPr>
+        <p:spPr>
+          <a:xfrm>
+            <a:off x="566928" y="5998464"/>
+            <a:ext cx="10140696" cy="512064"/>
+          </a:xfrm>
+          <a:prstGeom prst="rect">
+            <a:avLst/>
+          </a:prstGeom>
+          <a:noFill/>
+          <a:ln/>
+        </p:spPr>
+        <p:txBody>
+          <a:bodyPr wrap="square" rtlCol="0" anchor="ctr"/>
           <a:lstStyle/>
           <a:p>
             <a:pPr indent="0" marL="0">
               <a:buNone/>
             </a:pPr>
             <a:r>
-              <a:rPr lang="en-US" sz="1900" dirty="0">
+              <a:rPr lang="en-US" sz="1500" i="1" dirty="0">
                 <a:solidFill>
                   <a:srgbClr val="5A6675"/>
                 </a:solidFill>
@@ -12037,54 +12282,15 @@
                 <a:ea typeface="Calibri" pitchFamily="34" charset="-122"/>
                 <a:cs typeface="Calibri" pitchFamily="34" charset="-120"/>
               </a:rPr>
-              <a:t>Classifier validation you can put in a paper</a:t>
-            </a:r>
-            <a:endParaRPr lang="en-US" sz="1900" dirty="0"/>
-          </a:p>
-        </p:txBody>
-      </p:sp>
-      <p:sp>
-        <p:nvSpPr>
-          <p:cNvPr id="7" name="Text 5"/>
-          <p:cNvSpPr/>
-          <p:nvPr/>
-        </p:nvSpPr>
-        <p:spPr>
-          <a:xfrm>
-            <a:off x="566928" y="6199632"/>
-            <a:ext cx="8229600" cy="365760"/>
-          </a:xfrm>
-          <a:prstGeom prst="rect">
-            <a:avLst/>
-          </a:prstGeom>
-          <a:noFill/>
-          <a:ln/>
-        </p:spPr>
-        <p:txBody>
-          <a:bodyPr wrap="square" rtlCol="0" anchor="ctr"/>
-          <a:lstStyle/>
-          <a:p>
-            <a:pPr indent="0" marL="0">
-              <a:buNone/>
-            </a:pPr>
-            <a:r>
-              <a:rPr lang="en-US" sz="1400" dirty="0">
-                <a:solidFill>
-                  <a:srgbClr val="A8B2BF"/>
-                </a:solidFill>
-                <a:latin typeface="Calibri" pitchFamily="34" charset="0"/>
-                <a:ea typeface="Calibri" pitchFamily="34" charset="-122"/>
-                <a:cs typeface="Calibri" pitchFamily="34" charset="-120"/>
-              </a:rPr>
-              <a:t>michaelsnelson.github.io/BINA-I2K-2026-QuPath-Extensions</a:t>
-            </a:r>
-            <a:endParaRPr lang="en-US" sz="1400" dirty="0"/>
-          </a:p>
-        </p:txBody>
-      </p:sp>
-      <p:sp>
-        <p:nvSpPr>
-          <p:cNvPr id="8" name="Text 6"/>
+              <a:t>Pancreatic cancer, polarised light. The stage recorded this tile 5 px (0.9 µm) away from where it really was; registration measured that from the overlap and corrected it.</a:t>
+            </a:r>
+            <a:endParaRPr lang="en-US" sz="1500" dirty="0"/>
+          </a:p>
+        </p:txBody>
+      </p:sp>
+      <p:sp>
+        <p:nvSpPr>
+          <p:cNvPr id="9" name="Text 5"/>
           <p:cNvSpPr/>
           <p:nvPr/>
         </p:nvSpPr>
@@ -12186,7 +12392,7 @@
                 <a:ea typeface="Trebuchet MS" pitchFamily="34" charset="-122"/>
                 <a:cs typeface="Trebuchet MS" pitchFamily="34" charset="-120"/>
               </a:rPr>
-              <a:t>The interval, not the estimate</a:t>
+              <a:t>Measure once, on the image with the most contrast</a:t>
             </a:r>
             <a:endParaRPr lang="en-US" sz="3000" dirty="0"/>
           </a:p>
@@ -12220,151 +12426,8 @@
         </p:nvSpPr>
         <p:spPr>
           <a:xfrm>
-            <a:off x="640080" y="1481328"/>
-            <a:ext cx="10963656" cy="4553712"/>
-          </a:xfrm>
-          <a:prstGeom prst="rect">
-            <a:avLst/>
-          </a:prstGeom>
-          <a:noFill/>
-          <a:ln/>
-        </p:spPr>
-        <p:txBody>
-          <a:bodyPr wrap="square" rtlCol="0" anchor="t"/>
-          <a:lstStyle/>
-          <a:p>
-            <a:pPr marL="342900" indent="-342900">
-              <a:lnSpc>
-                <a:spcPct val="105000"/>
-              </a:lnSpc>
-              <a:spcAft>
-                <a:spcPts val="1200"/>
-              </a:spcAft>
-              <a:buSzPct val="100000"/>
-              <a:buChar char="•"/>
-            </a:pPr>
-            <a:r>
-              <a:rPr lang="en-US" sz="2000" dirty="0">
-                <a:solidFill>
-                  <a:srgbClr val="1F2933"/>
-                </a:solidFill>
-                <a:latin typeface="Calibri" pitchFamily="34" charset="0"/>
-                <a:ea typeface="Calibri" pitchFamily="34" charset="-122"/>
-                <a:cs typeface="Calibri" pitchFamily="34" charset="-120"/>
-              </a:rPr>
-              <a:t>"F1 = 0.87, 95% CI [0.82, 0.91]" instead of "87% accurate"</a:t>
-            </a:r>
-            <a:endParaRPr lang="en-US" sz="2000" dirty="0"/>
-          </a:p>
-          <a:p>
-            <a:pPr marL="342900" indent="-342900">
-              <a:lnSpc>
-                <a:spcPct val="105000"/>
-              </a:lnSpc>
-              <a:spcAft>
-                <a:spcPts val="1200"/>
-              </a:spcAft>
-              <a:buSzPct val="100000"/>
-              <a:buChar char="•"/>
-            </a:pPr>
-            <a:r>
-              <a:rPr lang="en-US" sz="2000" dirty="0">
-                <a:solidFill>
-                  <a:srgbClr val="1F2933"/>
-                </a:solidFill>
-                <a:latin typeface="Calibri" pitchFamily="34" charset="0"/>
-                <a:ea typeface="Calibri" pitchFamily="34" charset="-122"/>
-                <a:cs typeface="Calibri" pitchFamily="34" charset="-120"/>
-              </a:rPr>
-              <a:t>95% from forty cells and 95% from four thousand cells are not the same claim</a:t>
-            </a:r>
-            <a:endParaRPr lang="en-US" sz="2000" dirty="0"/>
-          </a:p>
-          <a:p>
-            <a:pPr marL="342900" indent="-342900">
-              <a:lnSpc>
-                <a:spcPct val="105000"/>
-              </a:lnSpc>
-              <a:spcAft>
-                <a:spcPts val="1200"/>
-              </a:spcAft>
-              <a:buSzPct val="100000"/>
-              <a:buChar char="•"/>
-            </a:pPr>
-            <a:r>
-              <a:rPr lang="en-US" sz="2000" dirty="0">
-                <a:solidFill>
-                  <a:srgbClr val="1F2933"/>
-                </a:solidFill>
-                <a:latin typeface="Calibri" pitchFamily="34" charset="0"/>
-                <a:ea typeface="Calibri" pitchFamily="34" charset="-122"/>
-                <a:cs typeface="Calibri" pitchFamily="34" charset="-120"/>
-              </a:rPr>
-              <a:t>Bootstrap confidence intervals on every per-class metric</a:t>
-            </a:r>
-            <a:endParaRPr lang="en-US" sz="2000" dirty="0"/>
-          </a:p>
-          <a:p>
-            <a:pPr marL="342900" indent="-342900">
-              <a:lnSpc>
-                <a:spcPct val="105000"/>
-              </a:lnSpc>
-              <a:spcAft>
-                <a:spcPts val="1200"/>
-              </a:spcAft>
-              <a:buSzPct val="100000"/>
-              <a:buChar char="•"/>
-            </a:pPr>
-            <a:r>
-              <a:rPr lang="en-US" sz="2000" dirty="0">
-                <a:solidFill>
-                  <a:srgbClr val="1F2933"/>
-                </a:solidFill>
-                <a:latin typeface="Calibri" pitchFamily="34" charset="0"/>
-                <a:ea typeface="Calibri" pitchFamily="34" charset="-122"/>
-                <a:cs typeface="Calibri" pitchFamily="34" charset="-120"/>
-              </a:rPr>
-              <a:t>For probability-producing classifiers: is the confidence itself trustworthy, or just the top class?</a:t>
-            </a:r>
-            <a:endParaRPr lang="en-US" sz="2000" dirty="0"/>
-          </a:p>
-        </p:txBody>
-      </p:sp>
-      <p:sp>
-        <p:nvSpPr>
-          <p:cNvPr id="5" name="Shape 3"/>
-          <p:cNvSpPr/>
-          <p:nvPr/>
-        </p:nvSpPr>
-        <p:spPr>
-          <a:xfrm>
-            <a:off x="566928" y="5650992"/>
-            <a:ext cx="11055096" cy="566928"/>
-          </a:xfrm>
-          <a:prstGeom prst="rect">
-            <a:avLst/>
-          </a:prstGeom>
-          <a:solidFill>
-            <a:srgbClr val="F4F8FD"/>
-          </a:solidFill>
-          <a:ln w="9525">
-            <a:solidFill>
-              <a:srgbClr val="3674C1"/>
-            </a:solidFill>
-            <a:prstDash val="solid"/>
-          </a:ln>
-        </p:spPr>
-      </p:sp>
-      <p:sp>
-        <p:nvSpPr>
-          <p:cNvPr id="6" name="Text 4"/>
-          <p:cNvSpPr/>
-          <p:nvPr/>
-        </p:nvSpPr>
-        <p:spPr>
-          <a:xfrm>
-            <a:off x="768096" y="5650992"/>
-            <a:ext cx="10652760" cy="566928"/>
+            <a:off x="566928" y="1225296"/>
+            <a:ext cx="11055096" cy="384048"/>
           </a:xfrm>
           <a:prstGeom prst="rect">
             <a:avLst/>
@@ -12380,7 +12443,7 @@
               <a:buNone/>
             </a:pPr>
             <a:r>
-              <a:rPr lang="en-US" sz="1600" b="1" dirty="0">
+              <a:rPr lang="en-US" sz="1700" b="1" dirty="0">
                 <a:solidFill>
                   <a:srgbClr val="1F4C86"/>
                 </a:solidFill>
@@ -12388,15 +12451,141 @@
                 <a:ea typeface="Calibri" pitchFamily="34" charset="-122"/>
                 <a:cs typeface="Calibri" pitchFamily="34" charset="-120"/>
               </a:rPr>
-              <a:t>A model that is 95% confident and 70% correct is a different problem, needing a different fix.</a:t>
-            </a:r>
-            <a:endParaRPr lang="en-US" sz="1600" dirty="0"/>
-          </a:p>
-        </p:txBody>
-      </p:sp>
-      <p:sp>
-        <p:nvSpPr>
-          <p:cNvPr id="7" name="Text 5"/>
+              <a:t>The same two tiles, imaged for birefringence</a:t>
+            </a:r>
+            <a:endParaRPr lang="en-US" sz="1700" dirty="0"/>
+          </a:p>
+        </p:txBody>
+      </p:sp>
+      <p:pic>
+        <p:nvPicPr>
+          <p:cNvPr id="5" name="Image 0" descr="images/stitch_biref_unstitched.jpg">    </p:cNvPr>
+          <p:cNvPicPr>
+            <a:picLocks noChangeAspect="1"/>
+          </p:cNvPicPr>
+          <p:nvPr/>
+        </p:nvPicPr>
+        <p:blipFill>
+          <a:blip r:embed="rId1"/>
+          <a:stretch>
+            <a:fillRect/>
+          </a:stretch>
+        </p:blipFill>
+        <p:spPr>
+          <a:xfrm>
+            <a:off x="566928" y="1645920"/>
+            <a:ext cx="10058400" cy="1894332"/>
+          </a:xfrm>
+          <a:prstGeom prst="rect">
+            <a:avLst/>
+          </a:prstGeom>
+        </p:spPr>
+      </p:pic>
+      <p:sp>
+        <p:nvSpPr>
+          <p:cNvPr id="6" name="Text 3"/>
+          <p:cNvSpPr/>
+          <p:nvPr/>
+        </p:nvSpPr>
+        <p:spPr>
+          <a:xfrm>
+            <a:off x="566928" y="3631692"/>
+            <a:ext cx="11055096" cy="384048"/>
+          </a:xfrm>
+          <a:prstGeom prst="rect">
+            <a:avLst/>
+          </a:prstGeom>
+          <a:noFill/>
+          <a:ln/>
+        </p:spPr>
+        <p:txBody>
+          <a:bodyPr wrap="square" rtlCol="0" anchor="ctr"/>
+          <a:lstStyle/>
+          <a:p>
+            <a:pPr indent="0" marL="0">
+              <a:buNone/>
+            </a:pPr>
+            <a:r>
+              <a:rPr lang="en-US" sz="1700" b="1" dirty="0">
+                <a:solidFill>
+                  <a:srgbClr val="1F4C86"/>
+                </a:solidFill>
+                <a:latin typeface="Calibri" pitchFamily="34" charset="0"/>
+                <a:ea typeface="Calibri" pitchFamily="34" charset="-122"/>
+                <a:cs typeface="Calibri" pitchFamily="34" charset="-120"/>
+              </a:rPr>
+              <a:t>Stitched with the positions measured once and reused unchanged</a:t>
+            </a:r>
+            <a:endParaRPr lang="en-US" sz="1700" dirty="0"/>
+          </a:p>
+        </p:txBody>
+      </p:sp>
+      <p:pic>
+        <p:nvPicPr>
+          <p:cNvPr id="7" name="Image 1" descr="images/stitch_biref_stitched.jpg">    </p:cNvPr>
+          <p:cNvPicPr>
+            <a:picLocks noChangeAspect="1"/>
+          </p:cNvPicPr>
+          <p:nvPr/>
+        </p:nvPicPr>
+        <p:blipFill>
+          <a:blip r:embed="rId2"/>
+          <a:stretch>
+            <a:fillRect/>
+          </a:stretch>
+        </p:blipFill>
+        <p:spPr>
+          <a:xfrm>
+            <a:off x="566928" y="4052316"/>
+            <a:ext cx="9273845" cy="1894332"/>
+          </a:xfrm>
+          <a:prstGeom prst="rect">
+            <a:avLst/>
+          </a:prstGeom>
+        </p:spPr>
+      </p:pic>
+      <p:sp>
+        <p:nvSpPr>
+          <p:cNvPr id="8" name="Text 4"/>
+          <p:cNvSpPr/>
+          <p:nvPr/>
+        </p:nvSpPr>
+        <p:spPr>
+          <a:xfrm>
+            <a:off x="566928" y="5998464"/>
+            <a:ext cx="10140696" cy="512064"/>
+          </a:xfrm>
+          <a:prstGeom prst="rect">
+            <a:avLst/>
+          </a:prstGeom>
+          <a:noFill/>
+          <a:ln/>
+        </p:spPr>
+        <p:txBody>
+          <a:bodyPr wrap="square" rtlCol="0" anchor="ctr"/>
+          <a:lstStyle/>
+          <a:p>
+            <a:pPr indent="0" marL="0">
+              <a:buNone/>
+            </a:pPr>
+            <a:r>
+              <a:rPr lang="en-US" sz="1500" i="1" dirty="0">
+                <a:solidFill>
+                  <a:srgbClr val="5A6675"/>
+                </a:solidFill>
+                <a:latin typeface="Calibri" pitchFamily="34" charset="0"/>
+                <a:ea typeface="Calibri" pitchFamily="34" charset="-122"/>
+                <a:cs typeface="Calibri" pitchFamily="34" charset="-120"/>
+              </a:rPr>
+              <a:t>Measure the positions on whichever angle or channel carries the most information. Every other image of the same tiles reuses that measurement, so they stay aligned with each other.</a:t>
+            </a:r>
+            <a:endParaRPr lang="en-US" sz="1500" dirty="0"/>
+          </a:p>
+        </p:txBody>
+      </p:sp>
+      <p:sp>
+        <p:nvSpPr>
+          <p:cNvPr id="9" name="Text 5"/>
           <p:cNvSpPr/>
           <p:nvPr/>
         </p:nvSpPr>
@@ -12745,35 +12934,48 @@
         </p:nvSpPr>
         <p:spPr>
           <a:xfrm>
-            <a:off x="566928" y="411480"/>
-            <a:ext cx="2331720" cy="457200"/>
-          </a:xfrm>
-          <a:prstGeom prst="roundRect">
-            <a:avLst>
-              <a:gd name="adj" fmla="val 20000"/>
-            </a:avLst>
+            <a:off x="0" y="1417320"/>
+            <a:ext cx="12188952" cy="3108960"/>
+          </a:xfrm>
+          <a:prstGeom prst="rect">
+            <a:avLst/>
           </a:prstGeom>
           <a:solidFill>
-            <a:srgbClr val="FBF1E0"/>
+            <a:srgbClr val="E8F0FA"/>
           </a:solidFill>
-          <a:ln w="12700">
-            <a:solidFill>
-              <a:srgbClr val="B26A00"/>
-            </a:solidFill>
-            <a:prstDash val="solid"/>
-          </a:ln>
-        </p:spPr>
-      </p:sp>
-      <p:sp>
-        <p:nvSpPr>
-          <p:cNvPr id="3" name="Text 1"/>
-          <p:cNvSpPr/>
-          <p:nvPr/>
-        </p:nvSpPr>
-        <p:spPr>
-          <a:xfrm>
-            <a:off x="566928" y="411480"/>
-            <a:ext cx="2331720" cy="457200"/>
+          <a:ln/>
+        </p:spPr>
+      </p:sp>
+      <p:sp>
+        <p:nvSpPr>
+          <p:cNvPr id="3" name="Shape 1"/>
+          <p:cNvSpPr/>
+          <p:nvPr/>
+        </p:nvSpPr>
+        <p:spPr>
+          <a:xfrm>
+            <a:off x="0" y="1417320"/>
+            <a:ext cx="201168" cy="3108960"/>
+          </a:xfrm>
+          <a:prstGeom prst="rect">
+            <a:avLst/>
+          </a:prstGeom>
+          <a:solidFill>
+            <a:srgbClr val="3674C1"/>
+          </a:solidFill>
+          <a:ln/>
+        </p:spPr>
+      </p:sp>
+      <p:sp>
+        <p:nvSpPr>
+          <p:cNvPr id="4" name="Text 2"/>
+          <p:cNvSpPr/>
+          <p:nvPr/>
+        </p:nvSpPr>
+        <p:spPr>
+          <a:xfrm>
+            <a:off x="566928" y="1691640"/>
+            <a:ext cx="1828800" cy="914400"/>
           </a:xfrm>
           <a:prstGeom prst="rect">
             <a:avLst/>
@@ -12785,34 +12987,34 @@
           <a:bodyPr wrap="square" rtlCol="0" anchor="ctr"/>
           <a:lstStyle/>
           <a:p>
-            <a:pPr algn="ctr" indent="0" marL="0">
+            <a:pPr indent="0" marL="0">
               <a:buNone/>
             </a:pPr>
             <a:r>
-              <a:rPr lang="en-US" sz="1600" b="1" dirty="0">
-                <a:solidFill>
-                  <a:srgbClr val="B26A00"/>
+              <a:rPr lang="en-US" sz="5400" b="1" dirty="0">
+                <a:solidFill>
+                  <a:srgbClr val="3674C1"/>
                 </a:solidFill>
                 <a:latin typeface="Trebuchet MS" pitchFamily="34" charset="0"/>
                 <a:ea typeface="Trebuchet MS" pitchFamily="34" charset="-122"/>
                 <a:cs typeface="Trebuchet MS" pitchFamily="34" charset="-120"/>
               </a:rPr>
-              <a:t>▶  DEMO ONLY</a:t>
-            </a:r>
-            <a:endParaRPr lang="en-US" sz="1600" dirty="0"/>
-          </a:p>
-        </p:txBody>
-      </p:sp>
-      <p:sp>
-        <p:nvSpPr>
-          <p:cNvPr id="4" name="Text 2"/>
-          <p:cNvSpPr/>
-          <p:nvPr/>
-        </p:nvSpPr>
-        <p:spPr>
-          <a:xfrm>
-            <a:off x="566928" y="1024128"/>
-            <a:ext cx="11055096" cy="685800"/>
+              <a:t>05</a:t>
+            </a:r>
+            <a:endParaRPr lang="en-US" sz="5400" dirty="0"/>
+          </a:p>
+        </p:txBody>
+      </p:sp>
+      <p:sp>
+        <p:nvSpPr>
+          <p:cNvPr id="5" name="Text 3"/>
+          <p:cNvSpPr/>
+          <p:nvPr/>
+        </p:nvSpPr>
+        <p:spPr>
+          <a:xfrm>
+            <a:off x="566928" y="2606040"/>
+            <a:ext cx="11055096" cy="868680"/>
           </a:xfrm>
           <a:prstGeom prst="rect">
             <a:avLst/>
@@ -12828,7 +13030,7 @@
               <a:buNone/>
             </a:pPr>
             <a:r>
-              <a:rPr lang="en-US" sz="3200" b="1" dirty="0">
+              <a:rPr lang="en-US" sz="4000" b="1" dirty="0">
                 <a:solidFill>
                   <a:srgbClr val="1F4C86"/>
                 </a:solidFill>
@@ -12836,31 +13038,11 @@
                 <a:ea typeface="Trebuchet MS" pitchFamily="34" charset="-122"/>
                 <a:cs typeface="Trebuchet MS" pitchFamily="34" charset="-120"/>
               </a:rPr>
-              <a:t>Confusion Matrix</a:t>
-            </a:r>
-            <a:endParaRPr lang="en-US" sz="3200" dirty="0"/>
-          </a:p>
-        </p:txBody>
-      </p:sp>
-      <p:sp>
-        <p:nvSpPr>
-          <p:cNvPr id="5" name="Shape 3"/>
-          <p:cNvSpPr/>
-          <p:nvPr/>
-        </p:nvSpPr>
-        <p:spPr>
-          <a:xfrm>
-            <a:off x="566928" y="1783080"/>
-            <a:ext cx="1920240" cy="50292"/>
-          </a:xfrm>
-          <a:prstGeom prst="rect">
-            <a:avLst/>
-          </a:prstGeom>
-          <a:solidFill>
-            <a:srgbClr val="3674C1"/>
-          </a:solidFill>
-          <a:ln/>
-        </p:spPr>
+              <a:t>Did it actually work?</a:t>
+            </a:r>
+            <a:endParaRPr lang="en-US" sz="4000" dirty="0"/>
+          </a:p>
+        </p:txBody>
       </p:sp>
       <p:sp>
         <p:nvSpPr>
@@ -12870,8 +13052,8 @@
         </p:nvSpPr>
         <p:spPr>
           <a:xfrm>
-            <a:off x="640080" y="2103120"/>
-            <a:ext cx="10963656" cy="3017520"/>
+            <a:off x="566928" y="3456432"/>
+            <a:ext cx="10140696" cy="731520"/>
           </a:xfrm>
           <a:prstGeom prst="rect">
             <a:avLst/>
@@ -12881,160 +13063,68 @@
         </p:spPr>
         <p:txBody>
           <a:bodyPr wrap="square" rtlCol="0" anchor="t"/>
-          <a:lstStyle/>
-          <a:p>
-            <a:pPr marL="342900" indent="-342900">
-              <a:spcAft>
-                <a:spcPts val="1400"/>
-              </a:spcAft>
-              <a:buSzPct val="100000"/>
-              <a:buChar char="•"/>
-            </a:pPr>
-            <a:r>
-              <a:rPr lang="en-US" sz="2000" dirty="0">
-                <a:solidFill>
-                  <a:srgbClr val="1F2933"/>
-                </a:solidFill>
-                <a:latin typeface="Calibri" pitchFamily="34" charset="0"/>
-                <a:ea typeface="Calibri" pitchFamily="34" charset="-122"/>
-                <a:cs typeface="Calibri" pitchFamily="34" charset="-120"/>
-              </a:rPr>
-              <a:t>Click the largest off-diagonal cell — those cells highlight on the slide</a:t>
-            </a:r>
-            <a:endParaRPr lang="en-US" sz="2000" dirty="0"/>
-          </a:p>
-          <a:p>
-            <a:pPr marL="342900" indent="-342900">
-              <a:spcAft>
-                <a:spcPts val="1400"/>
-              </a:spcAft>
-              <a:buSzPct val="100000"/>
-              <a:buChar char="•"/>
-            </a:pPr>
-            <a:r>
-              <a:rPr lang="en-US" sz="2000" dirty="0">
-                <a:solidFill>
-                  <a:srgbClr val="1F2933"/>
-                </a:solidFill>
-                <a:latin typeface="Calibri" pitchFamily="34" charset="0"/>
-                <a:ea typeface="Calibri" pitchFamily="34" charset="-122"/>
-                <a:cs typeface="Calibri" pitchFamily="34" charset="-120"/>
-              </a:rPr>
-              <a:t>"The classifier is 87% accurate" becomes "it confuses these two things, for this reason"</a:t>
-            </a:r>
-            <a:endParaRPr lang="en-US" sz="2000" dirty="0"/>
-          </a:p>
-          <a:p>
-            <a:pPr marL="342900" indent="-342900">
-              <a:spcAft>
-                <a:spcPts val="1400"/>
-              </a:spcAft>
-              <a:buSzPct val="100000"/>
-              <a:buChar char="•"/>
-            </a:pPr>
-            <a:r>
-              <a:rPr lang="en-US" sz="2000" dirty="0">
-                <a:solidFill>
-                  <a:srgbClr val="1F2933"/>
-                </a:solidFill>
-                <a:latin typeface="Calibri" pitchFamily="34" charset="0"/>
-                <a:ea typeface="Calibri" pitchFamily="34" charset="-122"/>
-                <a:cs typeface="Calibri" pitchFamily="34" charset="-120"/>
-              </a:rPr>
-              <a:t>Across a project: per-image breakdown, with divergent images flagged automatically</a:t>
-            </a:r>
-            <a:endParaRPr lang="en-US" sz="2000" dirty="0"/>
-          </a:p>
-          <a:p>
-            <a:pPr marL="342900" indent="-342900">
-              <a:spcAft>
-                <a:spcPts val="1400"/>
-              </a:spcAft>
-              <a:buSzPct val="100000"/>
-              <a:buChar char="•"/>
-            </a:pPr>
-            <a:r>
-              <a:rPr lang="en-US" sz="2000" dirty="0">
-                <a:solidFill>
-                  <a:srgbClr val="1F2933"/>
-                </a:solidFill>
-                <a:latin typeface="Calibri" pitchFamily="34" charset="0"/>
-                <a:ea typeface="Calibri" pitchFamily="34" charset="-122"/>
-                <a:cs typeface="Calibri" pitchFamily="34" charset="-120"/>
-              </a:rPr>
-              <a:t>Flagged images usually mean a staining or scanning problem, not a classifier problem</a:t>
-            </a:r>
-            <a:endParaRPr lang="en-US" sz="2000" dirty="0"/>
-          </a:p>
-        </p:txBody>
-      </p:sp>
-      <p:sp>
-        <p:nvSpPr>
-          <p:cNvPr id="7" name="Shape 5"/>
-          <p:cNvSpPr/>
-          <p:nvPr/>
-        </p:nvSpPr>
-        <p:spPr>
-          <a:xfrm>
-            <a:off x="566928" y="5650992"/>
-            <a:ext cx="11055096" cy="566928"/>
-          </a:xfrm>
-          <a:prstGeom prst="rect">
-            <a:avLst/>
-          </a:prstGeom>
-          <a:solidFill>
-            <a:srgbClr val="F4F8FD"/>
-          </a:solidFill>
-          <a:ln w="9525">
-            <a:solidFill>
-              <a:srgbClr val="3674C1"/>
-            </a:solidFill>
-            <a:prstDash val="solid"/>
-          </a:ln>
-        </p:spPr>
-      </p:sp>
-      <p:sp>
-        <p:nvSpPr>
-          <p:cNvPr id="8" name="Text 6"/>
-          <p:cNvSpPr/>
-          <p:nvPr/>
-        </p:nvSpPr>
-        <p:spPr>
-          <a:xfrm>
-            <a:off x="768096" y="5650992"/>
-            <a:ext cx="10652760" cy="566928"/>
-          </a:xfrm>
-          <a:prstGeom prst="rect">
-            <a:avLst/>
-          </a:prstGeom>
-          <a:noFill/>
-          <a:ln/>
-        </p:spPr>
-        <p:txBody>
-          <a:bodyPr wrap="square" rtlCol="0" anchor="ctr"/>
           <a:lstStyle/>
           <a:p>
             <a:pPr indent="0" marL="0">
               <a:buNone/>
             </a:pPr>
             <a:r>
-              <a:rPr lang="en-US" sz="1600" b="1" dirty="0">
-                <a:solidFill>
-                  <a:srgbClr val="1F4C86"/>
-                </a:solidFill>
-                <a:latin typeface="Calibri" pitchFamily="34" charset="0"/>
-                <a:ea typeface="Calibri" pitchFamily="34" charset="-122"/>
-                <a:cs typeface="Calibri" pitchFamily="34" charset="-120"/>
-              </a:rPr>
-              <a:t>Originated by Kristin Gallick — concept and initial scripts; built out at LOCI.  ·  Demo only: the repository is currently private.</a:t>
-            </a:r>
-            <a:endParaRPr lang="en-US" sz="1600" dirty="0"/>
-          </a:p>
-        </p:txBody>
-      </p:sp>
-      <p:sp>
-        <p:nvSpPr>
-          <p:cNvPr id="9" name="Text 7"/>
+              <a:rPr lang="en-US" sz="1900" dirty="0">
+                <a:solidFill>
+                  <a:srgbClr val="5A6675"/>
+                </a:solidFill>
+                <a:latin typeface="Calibri" pitchFamily="34" charset="0"/>
+                <a:ea typeface="Calibri" pitchFamily="34" charset="-122"/>
+                <a:cs typeface="Calibri" pitchFamily="34" charset="-120"/>
+              </a:rPr>
+              <a:t>Classifier validation you can put in a paper</a:t>
+            </a:r>
+            <a:endParaRPr lang="en-US" sz="1900" dirty="0"/>
+          </a:p>
+        </p:txBody>
+      </p:sp>
+      <p:sp>
+        <p:nvSpPr>
+          <p:cNvPr id="7" name="Text 5"/>
+          <p:cNvSpPr/>
+          <p:nvPr/>
+        </p:nvSpPr>
+        <p:spPr>
+          <a:xfrm>
+            <a:off x="566928" y="6199632"/>
+            <a:ext cx="8229600" cy="365760"/>
+          </a:xfrm>
+          <a:prstGeom prst="rect">
+            <a:avLst/>
+          </a:prstGeom>
+          <a:noFill/>
+          <a:ln/>
+        </p:spPr>
+        <p:txBody>
+          <a:bodyPr wrap="square" rtlCol="0" anchor="ctr"/>
+          <a:lstStyle/>
+          <a:p>
+            <a:pPr indent="0" marL="0">
+              <a:buNone/>
+            </a:pPr>
+            <a:r>
+              <a:rPr lang="en-US" sz="1400" dirty="0">
+                <a:solidFill>
+                  <a:srgbClr val="A8B2BF"/>
+                </a:solidFill>
+                <a:latin typeface="Calibri" pitchFamily="34" charset="0"/>
+                <a:ea typeface="Calibri" pitchFamily="34" charset="-122"/>
+                <a:cs typeface="Calibri" pitchFamily="34" charset="-120"/>
+              </a:rPr>
+              <a:t>michaelsnelson.github.io/BINA-I2K-2026-QuPath-Extensions</a:t>
+            </a:r>
+            <a:endParaRPr lang="en-US" sz="1400" dirty="0"/>
+          </a:p>
+        </p:txBody>
+      </p:sp>
+      <p:sp>
+        <p:nvSpPr>
+          <p:cNvPr id="8" name="Text 6"/>
           <p:cNvSpPr/>
           <p:nvPr/>
         </p:nvSpPr>
@@ -13105,23 +13195,42 @@
       </p:grpSpPr>
       <p:sp>
         <p:nvSpPr>
-          <p:cNvPr id="2" name="Shape 0"/>
-          <p:cNvSpPr/>
-          <p:nvPr/>
-        </p:nvSpPr>
-        <p:spPr>
-          <a:xfrm>
-            <a:off x="0" y="1417320"/>
-            <a:ext cx="12188952" cy="3108960"/>
-          </a:xfrm>
-          <a:prstGeom prst="rect">
-            <a:avLst/>
-          </a:prstGeom>
-          <a:solidFill>
-            <a:srgbClr val="E8F0FA"/>
-          </a:solidFill>
-          <a:ln/>
-        </p:spPr>
+          <p:cNvPr id="2" name="Text 0"/>
+          <p:cNvSpPr/>
+          <p:nvPr/>
+        </p:nvSpPr>
+        <p:spPr>
+          <a:xfrm>
+            <a:off x="566928" y="384048"/>
+            <a:ext cx="11055096" cy="658368"/>
+          </a:xfrm>
+          <a:prstGeom prst="rect">
+            <a:avLst/>
+          </a:prstGeom>
+          <a:noFill/>
+          <a:ln/>
+        </p:spPr>
+        <p:txBody>
+          <a:bodyPr wrap="square" rtlCol="0" anchor="ctr"/>
+          <a:lstStyle/>
+          <a:p>
+            <a:pPr indent="0" marL="0">
+              <a:buNone/>
+            </a:pPr>
+            <a:r>
+              <a:rPr lang="en-US" sz="3000" b="1" dirty="0">
+                <a:solidFill>
+                  <a:srgbClr val="1F4C86"/>
+                </a:solidFill>
+                <a:latin typeface="Trebuchet MS" pitchFamily="34" charset="0"/>
+                <a:ea typeface="Trebuchet MS" pitchFamily="34" charset="-122"/>
+                <a:cs typeface="Trebuchet MS" pitchFamily="34" charset="-120"/>
+              </a:rPr>
+              <a:t>The interval, not the estimate</a:t>
+            </a:r>
+            <a:endParaRPr lang="en-US" sz="3000" dirty="0"/>
+          </a:p>
+        </p:txBody>
       </p:sp>
       <p:sp>
         <p:nvSpPr>
@@ -13131,8 +13240,8 @@
         </p:nvSpPr>
         <p:spPr>
           <a:xfrm>
-            <a:off x="0" y="1417320"/>
-            <a:ext cx="201168" cy="3108960"/>
+            <a:off x="566928" y="1097280"/>
+            <a:ext cx="1920240" cy="50292"/>
           </a:xfrm>
           <a:prstGeom prst="rect">
             <a:avLst/>
@@ -13151,8 +13260,151 @@
         </p:nvSpPr>
         <p:spPr>
           <a:xfrm>
-            <a:off x="566928" y="1691640"/>
-            <a:ext cx="1828800" cy="914400"/>
+            <a:off x="640080" y="1481328"/>
+            <a:ext cx="10963656" cy="4553712"/>
+          </a:xfrm>
+          <a:prstGeom prst="rect">
+            <a:avLst/>
+          </a:prstGeom>
+          <a:noFill/>
+          <a:ln/>
+        </p:spPr>
+        <p:txBody>
+          <a:bodyPr wrap="square" rtlCol="0" anchor="t"/>
+          <a:lstStyle/>
+          <a:p>
+            <a:pPr marL="342900" indent="-342900">
+              <a:lnSpc>
+                <a:spcPct val="105000"/>
+              </a:lnSpc>
+              <a:spcAft>
+                <a:spcPts val="1200"/>
+              </a:spcAft>
+              <a:buSzPct val="100000"/>
+              <a:buChar char="•"/>
+            </a:pPr>
+            <a:r>
+              <a:rPr lang="en-US" sz="2000" dirty="0">
+                <a:solidFill>
+                  <a:srgbClr val="1F2933"/>
+                </a:solidFill>
+                <a:latin typeface="Calibri" pitchFamily="34" charset="0"/>
+                <a:ea typeface="Calibri" pitchFamily="34" charset="-122"/>
+                <a:cs typeface="Calibri" pitchFamily="34" charset="-120"/>
+              </a:rPr>
+              <a:t>"F1 = 0.87, 95% CI [0.82, 0.91]" instead of "87% accurate"</a:t>
+            </a:r>
+            <a:endParaRPr lang="en-US" sz="2000" dirty="0"/>
+          </a:p>
+          <a:p>
+            <a:pPr marL="342900" indent="-342900">
+              <a:lnSpc>
+                <a:spcPct val="105000"/>
+              </a:lnSpc>
+              <a:spcAft>
+                <a:spcPts val="1200"/>
+              </a:spcAft>
+              <a:buSzPct val="100000"/>
+              <a:buChar char="•"/>
+            </a:pPr>
+            <a:r>
+              <a:rPr lang="en-US" sz="2000" dirty="0">
+                <a:solidFill>
+                  <a:srgbClr val="1F2933"/>
+                </a:solidFill>
+                <a:latin typeface="Calibri" pitchFamily="34" charset="0"/>
+                <a:ea typeface="Calibri" pitchFamily="34" charset="-122"/>
+                <a:cs typeface="Calibri" pitchFamily="34" charset="-120"/>
+              </a:rPr>
+              <a:t>95% from forty cells and 95% from four thousand cells are not the same claim</a:t>
+            </a:r>
+            <a:endParaRPr lang="en-US" sz="2000" dirty="0"/>
+          </a:p>
+          <a:p>
+            <a:pPr marL="342900" indent="-342900">
+              <a:lnSpc>
+                <a:spcPct val="105000"/>
+              </a:lnSpc>
+              <a:spcAft>
+                <a:spcPts val="1200"/>
+              </a:spcAft>
+              <a:buSzPct val="100000"/>
+              <a:buChar char="•"/>
+            </a:pPr>
+            <a:r>
+              <a:rPr lang="en-US" sz="2000" dirty="0">
+                <a:solidFill>
+                  <a:srgbClr val="1F2933"/>
+                </a:solidFill>
+                <a:latin typeface="Calibri" pitchFamily="34" charset="0"/>
+                <a:ea typeface="Calibri" pitchFamily="34" charset="-122"/>
+                <a:cs typeface="Calibri" pitchFamily="34" charset="-120"/>
+              </a:rPr>
+              <a:t>Bootstrap confidence intervals on every per-class metric</a:t>
+            </a:r>
+            <a:endParaRPr lang="en-US" sz="2000" dirty="0"/>
+          </a:p>
+          <a:p>
+            <a:pPr marL="342900" indent="-342900">
+              <a:lnSpc>
+                <a:spcPct val="105000"/>
+              </a:lnSpc>
+              <a:spcAft>
+                <a:spcPts val="1200"/>
+              </a:spcAft>
+              <a:buSzPct val="100000"/>
+              <a:buChar char="•"/>
+            </a:pPr>
+            <a:r>
+              <a:rPr lang="en-US" sz="2000" dirty="0">
+                <a:solidFill>
+                  <a:srgbClr val="1F2933"/>
+                </a:solidFill>
+                <a:latin typeface="Calibri" pitchFamily="34" charset="0"/>
+                <a:ea typeface="Calibri" pitchFamily="34" charset="-122"/>
+                <a:cs typeface="Calibri" pitchFamily="34" charset="-120"/>
+              </a:rPr>
+              <a:t>For probability-producing classifiers: is the confidence itself trustworthy, or just the top class?</a:t>
+            </a:r>
+            <a:endParaRPr lang="en-US" sz="2000" dirty="0"/>
+          </a:p>
+        </p:txBody>
+      </p:sp>
+      <p:sp>
+        <p:nvSpPr>
+          <p:cNvPr id="5" name="Shape 3"/>
+          <p:cNvSpPr/>
+          <p:nvPr/>
+        </p:nvSpPr>
+        <p:spPr>
+          <a:xfrm>
+            <a:off x="566928" y="5650992"/>
+            <a:ext cx="11055096" cy="566928"/>
+          </a:xfrm>
+          <a:prstGeom prst="rect">
+            <a:avLst/>
+          </a:prstGeom>
+          <a:solidFill>
+            <a:srgbClr val="F4F8FD"/>
+          </a:solidFill>
+          <a:ln w="9525">
+            <a:solidFill>
+              <a:srgbClr val="3674C1"/>
+            </a:solidFill>
+            <a:prstDash val="solid"/>
+          </a:ln>
+        </p:spPr>
+      </p:sp>
+      <p:sp>
+        <p:nvSpPr>
+          <p:cNvPr id="6" name="Text 4"/>
+          <p:cNvSpPr/>
+          <p:nvPr/>
+        </p:nvSpPr>
+        <p:spPr>
+          <a:xfrm>
+            <a:off x="768096" y="5650992"/>
+            <a:ext cx="10652760" cy="566928"/>
           </a:xfrm>
           <a:prstGeom prst="rect">
             <a:avLst/>
@@ -13168,140 +13420,23 @@
               <a:buNone/>
             </a:pPr>
             <a:r>
-              <a:rPr lang="en-US" sz="5400" b="1" dirty="0">
-                <a:solidFill>
-                  <a:srgbClr val="3674C1"/>
-                </a:solidFill>
-                <a:latin typeface="Trebuchet MS" pitchFamily="34" charset="0"/>
-                <a:ea typeface="Trebuchet MS" pitchFamily="34" charset="-122"/>
-                <a:cs typeface="Trebuchet MS" pitchFamily="34" charset="-120"/>
-              </a:rPr>
-              <a:t>06</a:t>
-            </a:r>
-            <a:endParaRPr lang="en-US" sz="5400" dirty="0"/>
-          </a:p>
-        </p:txBody>
-      </p:sp>
-      <p:sp>
-        <p:nvSpPr>
-          <p:cNvPr id="5" name="Text 3"/>
-          <p:cNvSpPr/>
-          <p:nvPr/>
-        </p:nvSpPr>
-        <p:spPr>
-          <a:xfrm>
-            <a:off x="566928" y="2606040"/>
-            <a:ext cx="11055096" cy="868680"/>
-          </a:xfrm>
-          <a:prstGeom prst="rect">
-            <a:avLst/>
-          </a:prstGeom>
-          <a:noFill/>
-          <a:ln/>
-        </p:spPr>
-        <p:txBody>
-          <a:bodyPr wrap="square" rtlCol="0" anchor="ctr"/>
-          <a:lstStyle/>
-          <a:p>
-            <a:pPr indent="0" marL="0">
-              <a:buNone/>
-            </a:pPr>
-            <a:r>
-              <a:rPr lang="en-US" sz="4000" b="1" dirty="0">
+              <a:rPr lang="en-US" sz="1600" b="1" dirty="0">
                 <a:solidFill>
                   <a:srgbClr val="1F4C86"/>
                 </a:solidFill>
-                <a:latin typeface="Trebuchet MS" pitchFamily="34" charset="0"/>
-                <a:ea typeface="Trebuchet MS" pitchFamily="34" charset="-122"/>
-                <a:cs typeface="Trebuchet MS" pitchFamily="34" charset="-120"/>
-              </a:rPr>
-              <a:t>Deep learning</a:t>
-            </a:r>
-            <a:endParaRPr lang="en-US" sz="4000" dirty="0"/>
-          </a:p>
-        </p:txBody>
-      </p:sp>
-      <p:sp>
-        <p:nvSpPr>
-          <p:cNvPr id="6" name="Text 4"/>
-          <p:cNvSpPr/>
-          <p:nvPr/>
-        </p:nvSpPr>
-        <p:spPr>
-          <a:xfrm>
-            <a:off x="566928" y="3456432"/>
-            <a:ext cx="10140696" cy="731520"/>
-          </a:xfrm>
-          <a:prstGeom prst="rect">
-            <a:avLst/>
-          </a:prstGeom>
-          <a:noFill/>
-          <a:ln/>
-        </p:spPr>
-        <p:txBody>
-          <a:bodyPr wrap="square" rtlCol="0" anchor="t"/>
-          <a:lstStyle/>
-          <a:p>
-            <a:pPr indent="0" marL="0">
-              <a:buNone/>
-            </a:pPr>
-            <a:r>
-              <a:rPr lang="en-US" sz="1900" dirty="0">
-                <a:solidFill>
-                  <a:srgbClr val="5A6675"/>
-                </a:solidFill>
-                <a:latin typeface="Calibri" pitchFamily="34" charset="0"/>
-                <a:ea typeface="Calibri" pitchFamily="34" charset="-122"/>
-                <a:cs typeface="Calibri" pitchFamily="34" charset="-120"/>
-              </a:rPr>
-              <a:t>Pixel classifiers, cell classifiers, and knowing when not to trust them</a:t>
-            </a:r>
-            <a:endParaRPr lang="en-US" sz="1900" dirty="0"/>
+                <a:latin typeface="Calibri" pitchFamily="34" charset="0"/>
+                <a:ea typeface="Calibri" pitchFamily="34" charset="-122"/>
+                <a:cs typeface="Calibri" pitchFamily="34" charset="-120"/>
+              </a:rPr>
+              <a:t>A model that is 95% confident and 70% correct is a different problem, needing a different fix.</a:t>
+            </a:r>
+            <a:endParaRPr lang="en-US" sz="1600" dirty="0"/>
           </a:p>
         </p:txBody>
       </p:sp>
       <p:sp>
         <p:nvSpPr>
           <p:cNvPr id="7" name="Text 5"/>
-          <p:cNvSpPr/>
-          <p:nvPr/>
-        </p:nvSpPr>
-        <p:spPr>
-          <a:xfrm>
-            <a:off x="566928" y="6199632"/>
-            <a:ext cx="8229600" cy="365760"/>
-          </a:xfrm>
-          <a:prstGeom prst="rect">
-            <a:avLst/>
-          </a:prstGeom>
-          <a:noFill/>
-          <a:ln/>
-        </p:spPr>
-        <p:txBody>
-          <a:bodyPr wrap="square" rtlCol="0" anchor="ctr"/>
-          <a:lstStyle/>
-          <a:p>
-            <a:pPr indent="0" marL="0">
-              <a:buNone/>
-            </a:pPr>
-            <a:r>
-              <a:rPr lang="en-US" sz="1400" dirty="0">
-                <a:solidFill>
-                  <a:srgbClr val="A8B2BF"/>
-                </a:solidFill>
-                <a:latin typeface="Calibri" pitchFamily="34" charset="0"/>
-                <a:ea typeface="Calibri" pitchFamily="34" charset="-122"/>
-                <a:cs typeface="Calibri" pitchFamily="34" charset="-120"/>
-              </a:rPr>
-              <a:t>michaelsnelson.github.io/BINA-I2K-2026-QuPath-Extensions</a:t>
-            </a:r>
-            <a:endParaRPr lang="en-US" sz="1400" dirty="0"/>
-          </a:p>
-        </p:txBody>
-      </p:sp>
-      <p:sp>
-        <p:nvSpPr>
-          <p:cNvPr id="8" name="Text 6"/>
           <p:cNvSpPr/>
           <p:nvPr/>
         </p:nvSpPr>
@@ -13372,14 +13507,41 @@
       </p:grpSpPr>
       <p:sp>
         <p:nvSpPr>
-          <p:cNvPr id="2" name="Text 0"/>
-          <p:cNvSpPr/>
-          <p:nvPr/>
-        </p:nvSpPr>
-        <p:spPr>
-          <a:xfrm>
-            <a:off x="566928" y="384048"/>
-            <a:ext cx="11055096" cy="658368"/>
+          <p:cNvPr id="2" name="Shape 0"/>
+          <p:cNvSpPr/>
+          <p:nvPr/>
+        </p:nvSpPr>
+        <p:spPr>
+          <a:xfrm>
+            <a:off x="566928" y="411480"/>
+            <a:ext cx="2331720" cy="457200"/>
+          </a:xfrm>
+          <a:prstGeom prst="roundRect">
+            <a:avLst>
+              <a:gd name="adj" fmla="val 20000"/>
+            </a:avLst>
+          </a:prstGeom>
+          <a:solidFill>
+            <a:srgbClr val="FBF1E0"/>
+          </a:solidFill>
+          <a:ln w="12700">
+            <a:solidFill>
+              <a:srgbClr val="B26A00"/>
+            </a:solidFill>
+            <a:prstDash val="solid"/>
+          </a:ln>
+        </p:spPr>
+      </p:sp>
+      <p:sp>
+        <p:nvSpPr>
+          <p:cNvPr id="3" name="Text 1"/>
+          <p:cNvSpPr/>
+          <p:nvPr/>
+        </p:nvSpPr>
+        <p:spPr>
+          <a:xfrm>
+            <a:off x="566928" y="411480"/>
+            <a:ext cx="2331720" cy="457200"/>
           </a:xfrm>
           <a:prstGeom prst="rect">
             <a:avLst/>
@@ -13391,33 +13553,72 @@
           <a:bodyPr wrap="square" rtlCol="0" anchor="ctr"/>
           <a:lstStyle/>
           <a:p>
-            <a:pPr indent="0" marL="0">
+            <a:pPr algn="ctr" indent="0" marL="0">
               <a:buNone/>
             </a:pPr>
             <a:r>
-              <a:rPr lang="en-US" sz="3000" b="1" dirty="0">
-                <a:solidFill>
-                  <a:srgbClr val="1F4C86"/>
+              <a:rPr lang="en-US" sz="1600" b="1" dirty="0">
+                <a:solidFill>
+                  <a:srgbClr val="B26A00"/>
                 </a:solidFill>
                 <a:latin typeface="Trebuchet MS" pitchFamily="34" charset="0"/>
                 <a:ea typeface="Trebuchet MS" pitchFamily="34" charset="-122"/>
                 <a:cs typeface="Trebuchet MS" pitchFamily="34" charset="-120"/>
               </a:rPr>
-              <a:t>Deep learning pixel classification</a:t>
-            </a:r>
-            <a:endParaRPr lang="en-US" sz="3000" dirty="0"/>
-          </a:p>
-        </p:txBody>
-      </p:sp>
-      <p:sp>
-        <p:nvSpPr>
-          <p:cNvPr id="3" name="Shape 1"/>
-          <p:cNvSpPr/>
-          <p:nvPr/>
-        </p:nvSpPr>
-        <p:spPr>
-          <a:xfrm>
-            <a:off x="566928" y="1097280"/>
+              <a:t>▶  DEMO ONLY</a:t>
+            </a:r>
+            <a:endParaRPr lang="en-US" sz="1600" dirty="0"/>
+          </a:p>
+        </p:txBody>
+      </p:sp>
+      <p:sp>
+        <p:nvSpPr>
+          <p:cNvPr id="4" name="Text 2"/>
+          <p:cNvSpPr/>
+          <p:nvPr/>
+        </p:nvSpPr>
+        <p:spPr>
+          <a:xfrm>
+            <a:off x="566928" y="1024128"/>
+            <a:ext cx="11055096" cy="685800"/>
+          </a:xfrm>
+          <a:prstGeom prst="rect">
+            <a:avLst/>
+          </a:prstGeom>
+          <a:noFill/>
+          <a:ln/>
+        </p:spPr>
+        <p:txBody>
+          <a:bodyPr wrap="square" rtlCol="0" anchor="ctr"/>
+          <a:lstStyle/>
+          <a:p>
+            <a:pPr indent="0" marL="0">
+              <a:buNone/>
+            </a:pPr>
+            <a:r>
+              <a:rPr lang="en-US" sz="3200" b="1" dirty="0">
+                <a:solidFill>
+                  <a:srgbClr val="1F4C86"/>
+                </a:solidFill>
+                <a:latin typeface="Trebuchet MS" pitchFamily="34" charset="0"/>
+                <a:ea typeface="Trebuchet MS" pitchFamily="34" charset="-122"/>
+                <a:cs typeface="Trebuchet MS" pitchFamily="34" charset="-120"/>
+              </a:rPr>
+              <a:t>Confusion Matrix</a:t>
+            </a:r>
+            <a:endParaRPr lang="en-US" sz="3200" dirty="0"/>
+          </a:p>
+        </p:txBody>
+      </p:sp>
+      <p:sp>
+        <p:nvSpPr>
+          <p:cNvPr id="5" name="Shape 3"/>
+          <p:cNvSpPr/>
+          <p:nvPr/>
+        </p:nvSpPr>
+        <p:spPr>
+          <a:xfrm>
+            <a:off x="566928" y="1783080"/>
             <a:ext cx="1920240" cy="50292"/>
           </a:xfrm>
           <a:prstGeom prst="rect">
@@ -13431,53 +13632,14 @@
       </p:sp>
       <p:sp>
         <p:nvSpPr>
-          <p:cNvPr id="4" name="Text 2"/>
-          <p:cNvSpPr/>
-          <p:nvPr/>
-        </p:nvSpPr>
-        <p:spPr>
-          <a:xfrm>
-            <a:off x="566928" y="1243584"/>
-            <a:ext cx="11055096" cy="384048"/>
-          </a:xfrm>
-          <a:prstGeom prst="rect">
-            <a:avLst/>
-          </a:prstGeom>
-          <a:noFill/>
-          <a:ln/>
-        </p:spPr>
-        <p:txBody>
-          <a:bodyPr wrap="square" rtlCol="0" anchor="ctr"/>
-          <a:lstStyle/>
-          <a:p>
-            <a:pPr indent="0" marL="0">
-              <a:buNone/>
-            </a:pPr>
-            <a:r>
-              <a:rPr lang="en-US" sz="1700" i="1" dirty="0">
-                <a:solidFill>
-                  <a:srgbClr val="5A6675"/>
-                </a:solidFill>
-                <a:latin typeface="Calibri" pitchFamily="34" charset="0"/>
-                <a:ea typeface="Calibri" pitchFamily="34" charset="-122"/>
-                <a:cs typeface="Calibri" pitchFamily="34" charset="-120"/>
-              </a:rPr>
-              <a:t>For when the built-in classifier is not enough: subtle textures, classes that differ by architecture rather than colour.</a:t>
-            </a:r>
-            <a:endParaRPr lang="en-US" sz="1700" dirty="0"/>
-          </a:p>
-        </p:txBody>
-      </p:sp>
-      <p:sp>
-        <p:nvSpPr>
-          <p:cNvPr id="5" name="Text 3"/>
-          <p:cNvSpPr/>
-          <p:nvPr/>
-        </p:nvSpPr>
-        <p:spPr>
-          <a:xfrm>
-            <a:off x="640080" y="1755648"/>
-            <a:ext cx="10963656" cy="4279392"/>
+          <p:cNvPr id="6" name="Text 4"/>
+          <p:cNvSpPr/>
+          <p:nvPr/>
+        </p:nvSpPr>
+        <p:spPr>
+          <a:xfrm>
+            <a:off x="640080" y="2103120"/>
+            <a:ext cx="10963656" cy="3017520"/>
           </a:xfrm>
           <a:prstGeom prst="rect">
             <a:avLst/>
@@ -13490,11 +13652,8 @@
           <a:lstStyle/>
           <a:p>
             <a:pPr marL="342900" indent="-342900">
-              <a:lnSpc>
-                <a:spcPct val="105000"/>
-              </a:lnSpc>
               <a:spcAft>
-                <a:spcPts val="1200"/>
+                <a:spcPts val="1400"/>
               </a:spcAft>
               <a:buSzPct val="100000"/>
               <a:buChar char="•"/>
@@ -13508,17 +13667,14 @@
                 <a:ea typeface="Calibri" pitchFamily="34" charset="-122"/>
                 <a:cs typeface="Calibri" pitchFamily="34" charset="-120"/>
               </a:rPr>
-              <a:t>Same interaction as the built-in classifier: draw a few sparse regions per class</a:t>
+              <a:t>Click the largest off-diagonal cell — those cells highlight on the slide</a:t>
             </a:r>
             <a:endParaRPr lang="en-US" sz="2000" dirty="0"/>
           </a:p>
           <a:p>
             <a:pPr marL="342900" indent="-342900">
-              <a:lnSpc>
-                <a:spcPct val="105000"/>
-              </a:lnSpc>
               <a:spcAft>
-                <a:spcPts val="1200"/>
+                <a:spcPts val="1400"/>
               </a:spcAft>
               <a:buSzPct val="100000"/>
               <a:buChar char="•"/>
@@ -13532,17 +13688,14 @@
                 <a:ea typeface="Calibri" pitchFamily="34" charset="-122"/>
                 <a:cs typeface="Calibri" pitchFamily="34" charset="-120"/>
               </a:rPr>
-              <a:t>The extension samples training tiles from what you marked — you are steering a sampler</a:t>
+              <a:t>"The classifier is 87% accurate" becomes "it confuses these two things, for this reason"</a:t>
             </a:r>
             <a:endParaRPr lang="en-US" sz="2000" dirty="0"/>
           </a:p>
           <a:p>
             <a:pPr marL="342900" indent="-342900">
-              <a:lnSpc>
-                <a:spcPct val="105000"/>
-              </a:lnSpc>
               <a:spcAft>
-                <a:spcPts val="1200"/>
+                <a:spcPts val="1400"/>
               </a:spcAft>
               <a:buSzPct val="100000"/>
               <a:buChar char="•"/>
@@ -13556,17 +13709,14 @@
                 <a:ea typeface="Calibri" pitchFamily="34" charset="-122"/>
                 <a:cs typeface="Calibri" pitchFamily="34" charset="-120"/>
               </a:rPr>
-              <a:t>Brightfield and multi-channel fluorescence, with per-channel normalisation</a:t>
+              <a:t>Across a project: per-image breakdown, with divergent images flagged automatically</a:t>
             </a:r>
             <a:endParaRPr lang="en-US" sz="2000" dirty="0"/>
           </a:p>
           <a:p>
             <a:pPr marL="342900" indent="-342900">
-              <a:lnSpc>
-                <a:spcPct val="105000"/>
-              </a:lnSpc>
               <a:spcAft>
-                <a:spcPts val="1200"/>
+                <a:spcPts val="1400"/>
               </a:spcAft>
               <a:buSzPct val="100000"/>
               <a:buChar char="•"/>
@@ -13580,7 +13730,7 @@
                 <a:ea typeface="Calibri" pitchFamily="34" charset="-122"/>
                 <a:cs typeface="Calibri" pitchFamily="34" charset="-120"/>
               </a:rPr>
-              <a:t>Train across several project images at once for representative sampling</a:t>
+              <a:t>Flagged images usually mean a staining or scanning problem, not a classifier problem</a:t>
             </a:r>
             <a:endParaRPr lang="en-US" sz="2000" dirty="0"/>
           </a:p>
@@ -13588,7 +13738,71 @@
       </p:sp>
       <p:sp>
         <p:nvSpPr>
-          <p:cNvPr id="6" name="Text 4"/>
+          <p:cNvPr id="7" name="Shape 5"/>
+          <p:cNvSpPr/>
+          <p:nvPr/>
+        </p:nvSpPr>
+        <p:spPr>
+          <a:xfrm>
+            <a:off x="566928" y="5650992"/>
+            <a:ext cx="11055096" cy="566928"/>
+          </a:xfrm>
+          <a:prstGeom prst="rect">
+            <a:avLst/>
+          </a:prstGeom>
+          <a:solidFill>
+            <a:srgbClr val="F4F8FD"/>
+          </a:solidFill>
+          <a:ln w="9525">
+            <a:solidFill>
+              <a:srgbClr val="3674C1"/>
+            </a:solidFill>
+            <a:prstDash val="solid"/>
+          </a:ln>
+        </p:spPr>
+      </p:sp>
+      <p:sp>
+        <p:nvSpPr>
+          <p:cNvPr id="8" name="Text 6"/>
+          <p:cNvSpPr/>
+          <p:nvPr/>
+        </p:nvSpPr>
+        <p:spPr>
+          <a:xfrm>
+            <a:off x="768096" y="5650992"/>
+            <a:ext cx="10652760" cy="566928"/>
+          </a:xfrm>
+          <a:prstGeom prst="rect">
+            <a:avLst/>
+          </a:prstGeom>
+          <a:noFill/>
+          <a:ln/>
+        </p:spPr>
+        <p:txBody>
+          <a:bodyPr wrap="square" rtlCol="0" anchor="ctr"/>
+          <a:lstStyle/>
+          <a:p>
+            <a:pPr indent="0" marL="0">
+              <a:buNone/>
+            </a:pPr>
+            <a:r>
+              <a:rPr lang="en-US" sz="1600" b="1" dirty="0">
+                <a:solidFill>
+                  <a:srgbClr val="1F4C86"/>
+                </a:solidFill>
+                <a:latin typeface="Calibri" pitchFamily="34" charset="0"/>
+                <a:ea typeface="Calibri" pitchFamily="34" charset="-122"/>
+                <a:cs typeface="Calibri" pitchFamily="34" charset="-120"/>
+              </a:rPr>
+              <a:t>Originated by Kristin Gallick — concept and initial scripts; built out at LOCI.  ·  Demo only: the repository is currently private.</a:t>
+            </a:r>
+            <a:endParaRPr lang="en-US" sz="1600" dirty="0"/>
+          </a:p>
+        </p:txBody>
+      </p:sp>
+      <p:sp>
+        <p:nvSpPr>
+          <p:cNvPr id="9" name="Text 7"/>
           <p:cNvSpPr/>
           <p:nvPr/>
         </p:nvSpPr>
@@ -13659,14 +13873,54 @@
       </p:grpSpPr>
       <p:sp>
         <p:nvSpPr>
-          <p:cNvPr id="2" name="Text 0"/>
-          <p:cNvSpPr/>
-          <p:nvPr/>
-        </p:nvSpPr>
-        <p:spPr>
-          <a:xfrm>
-            <a:off x="566928" y="384048"/>
-            <a:ext cx="11055096" cy="658368"/>
+          <p:cNvPr id="2" name="Shape 0"/>
+          <p:cNvSpPr/>
+          <p:nvPr/>
+        </p:nvSpPr>
+        <p:spPr>
+          <a:xfrm>
+            <a:off x="0" y="1417320"/>
+            <a:ext cx="12188952" cy="3108960"/>
+          </a:xfrm>
+          <a:prstGeom prst="rect">
+            <a:avLst/>
+          </a:prstGeom>
+          <a:solidFill>
+            <a:srgbClr val="E8F0FA"/>
+          </a:solidFill>
+          <a:ln/>
+        </p:spPr>
+      </p:sp>
+      <p:sp>
+        <p:nvSpPr>
+          <p:cNvPr id="3" name="Shape 1"/>
+          <p:cNvSpPr/>
+          <p:nvPr/>
+        </p:nvSpPr>
+        <p:spPr>
+          <a:xfrm>
+            <a:off x="0" y="1417320"/>
+            <a:ext cx="201168" cy="3108960"/>
+          </a:xfrm>
+          <a:prstGeom prst="rect">
+            <a:avLst/>
+          </a:prstGeom>
+          <a:solidFill>
+            <a:srgbClr val="3674C1"/>
+          </a:solidFill>
+          <a:ln/>
+        </p:spPr>
+      </p:sp>
+      <p:sp>
+        <p:nvSpPr>
+          <p:cNvPr id="4" name="Text 2"/>
+          <p:cNvSpPr/>
+          <p:nvPr/>
+        </p:nvSpPr>
+        <p:spPr>
+          <a:xfrm>
+            <a:off x="566928" y="1691640"/>
+            <a:ext cx="1828800" cy="914400"/>
           </a:xfrm>
           <a:prstGeom prst="rect">
             <a:avLst/>
@@ -13682,193 +13936,30 @@
               <a:buNone/>
             </a:pPr>
             <a:r>
-              <a:rPr lang="en-US" sz="3000" b="1" dirty="0">
-                <a:solidFill>
-                  <a:srgbClr val="1F4C86"/>
+              <a:rPr lang="en-US" sz="5400" b="1" dirty="0">
+                <a:solidFill>
+                  <a:srgbClr val="3674C1"/>
                 </a:solidFill>
                 <a:latin typeface="Trebuchet MS" pitchFamily="34" charset="0"/>
                 <a:ea typeface="Trebuchet MS" pitchFamily="34" charset="-122"/>
                 <a:cs typeface="Trebuchet MS" pitchFamily="34" charset="-120"/>
               </a:rPr>
-              <a:t>What is underneath</a:t>
-            </a:r>
-            <a:endParaRPr lang="en-US" sz="3000" dirty="0"/>
-          </a:p>
-        </p:txBody>
-      </p:sp>
-      <p:sp>
-        <p:nvSpPr>
-          <p:cNvPr id="3" name="Shape 1"/>
-          <p:cNvSpPr/>
-          <p:nvPr/>
-        </p:nvSpPr>
-        <p:spPr>
-          <a:xfrm>
-            <a:off x="566928" y="1097280"/>
-            <a:ext cx="1920240" cy="50292"/>
-          </a:xfrm>
-          <a:prstGeom prst="rect">
-            <a:avLst/>
-          </a:prstGeom>
-          <a:solidFill>
-            <a:srgbClr val="3674C1"/>
-          </a:solidFill>
-          <a:ln/>
-        </p:spPr>
-      </p:sp>
-      <p:sp>
-        <p:nvSpPr>
-          <p:cNvPr id="4" name="Text 2"/>
-          <p:cNvSpPr/>
-          <p:nvPr/>
-        </p:nvSpPr>
-        <p:spPr>
-          <a:xfrm>
-            <a:off x="640080" y="1481328"/>
-            <a:ext cx="10963656" cy="4553712"/>
-          </a:xfrm>
-          <a:prstGeom prst="rect">
-            <a:avLst/>
-          </a:prstGeom>
-          <a:noFill/>
-          <a:ln/>
-        </p:spPr>
-        <p:txBody>
-          <a:bodyPr wrap="square" rtlCol="0" anchor="t"/>
-          <a:lstStyle/>
-          <a:p>
-            <a:pPr marL="342900" indent="-342900">
-              <a:lnSpc>
-                <a:spcPct val="105000"/>
-              </a:lnSpc>
-              <a:spcAft>
-                <a:spcPts val="1200"/>
-              </a:spcAft>
-              <a:buSzPct val="100000"/>
-              <a:buChar char="•"/>
-            </a:pPr>
-            <a:r>
-              <a:rPr lang="en-US" sz="2000" dirty="0">
-                <a:solidFill>
-                  <a:srgbClr val="1F2933"/>
-                </a:solidFill>
-                <a:latin typeface="Calibri" pitchFamily="34" charset="0"/>
-                <a:ea typeface="Calibri" pitchFamily="34" charset="-122"/>
-                <a:cs typeface="Calibri" pitchFamily="34" charset="-120"/>
-              </a:rPr>
-              <a:t>Your choice of encoder, from lightweight convolutional networks to vision transformers</a:t>
-            </a:r>
-            <a:endParaRPr lang="en-US" sz="2000" dirty="0"/>
-          </a:p>
-          <a:p>
-            <a:pPr marL="342900" indent="-342900">
-              <a:lnSpc>
-                <a:spcPct val="105000"/>
-              </a:lnSpc>
-              <a:spcAft>
-                <a:spcPts val="1200"/>
-              </a:spcAft>
-              <a:buSzPct val="100000"/>
-              <a:buChar char="•"/>
-            </a:pPr>
-            <a:r>
-              <a:rPr lang="en-US" sz="2000" dirty="0">
-                <a:solidFill>
-                  <a:srgbClr val="1F2933"/>
-                </a:solidFill>
-                <a:latin typeface="Calibri" pitchFamily="34" charset="0"/>
-                <a:ea typeface="Calibri" pitchFamily="34" charset="-122"/>
-                <a:cs typeface="Calibri" pitchFamily="34" charset="-120"/>
-              </a:rPr>
-              <a:t>Start from weights pretrained on histology rather than on everyday photographs</a:t>
-            </a:r>
-            <a:endParaRPr lang="en-US" sz="2000" dirty="0"/>
-          </a:p>
-          <a:p>
-            <a:pPr marL="342900" indent="-342900">
-              <a:lnSpc>
-                <a:spcPct val="105000"/>
-              </a:lnSpc>
-              <a:spcAft>
-                <a:spcPts val="1200"/>
-              </a:spcAft>
-              <a:buSzPct val="100000"/>
-              <a:buChar char="•"/>
-            </a:pPr>
-            <a:r>
-              <a:rPr lang="en-US" sz="2000" dirty="0">
-                <a:solidFill>
-                  <a:srgbClr val="1F2933"/>
-                </a:solidFill>
-                <a:latin typeface="Calibri" pitchFamily="34" charset="0"/>
-                <a:ea typeface="Calibri" pitchFamily="34" charset="-122"/>
-                <a:cs typeface="Calibri" pitchFamily="34" charset="-120"/>
-              </a:rPr>
-              <a:t>Or from pathology foundation models, downloaded on demand</a:t>
-            </a:r>
-            <a:endParaRPr lang="en-US" sz="2000" dirty="0"/>
-          </a:p>
-          <a:p>
-            <a:pPr marL="342900" indent="-342900">
-              <a:lnSpc>
-                <a:spcPct val="105000"/>
-              </a:lnSpc>
-              <a:spcAft>
-                <a:spcPts val="1200"/>
-              </a:spcAft>
-              <a:buSzPct val="100000"/>
-              <a:buChar char="•"/>
-            </a:pPr>
-            <a:r>
-              <a:rPr lang="en-US" sz="2000" dirty="0">
-                <a:solidFill>
-                  <a:srgbClr val="1F2933"/>
-                </a:solidFill>
-                <a:latin typeface="Calibri" pitchFamily="34" charset="0"/>
-                <a:ea typeface="Calibri" pitchFamily="34" charset="-122"/>
-                <a:cs typeface="Calibri" pitchFamily="34" charset="-120"/>
-              </a:rPr>
-              <a:t>Normalisation computed over the whole image, which removes tile-boundary artefacts</a:t>
-            </a:r>
-            <a:endParaRPr lang="en-US" sz="2000" dirty="0"/>
-          </a:p>
-        </p:txBody>
-      </p:sp>
-      <p:sp>
-        <p:nvSpPr>
-          <p:cNvPr id="5" name="Shape 3"/>
-          <p:cNvSpPr/>
-          <p:nvPr/>
-        </p:nvSpPr>
-        <p:spPr>
-          <a:xfrm>
-            <a:off x="566928" y="5650992"/>
-            <a:ext cx="11055096" cy="566928"/>
-          </a:xfrm>
-          <a:prstGeom prst="rect">
-            <a:avLst/>
-          </a:prstGeom>
-          <a:solidFill>
-            <a:srgbClr val="F4F8FD"/>
-          </a:solidFill>
-          <a:ln w="9525">
-            <a:solidFill>
-              <a:srgbClr val="3674C1"/>
-            </a:solidFill>
-            <a:prstDash val="solid"/>
-          </a:ln>
-        </p:spPr>
-      </p:sp>
-      <p:sp>
-        <p:nvSpPr>
-          <p:cNvPr id="6" name="Text 4"/>
-          <p:cNvSpPr/>
-          <p:nvPr/>
-        </p:nvSpPr>
-        <p:spPr>
-          <a:xfrm>
-            <a:off x="768096" y="5650992"/>
-            <a:ext cx="10652760" cy="566928"/>
+              <a:t>06</a:t>
+            </a:r>
+            <a:endParaRPr lang="en-US" sz="5400" dirty="0"/>
+          </a:p>
+        </p:txBody>
+      </p:sp>
+      <p:sp>
+        <p:nvSpPr>
+          <p:cNvPr id="5" name="Text 3"/>
+          <p:cNvSpPr/>
+          <p:nvPr/>
+        </p:nvSpPr>
+        <p:spPr>
+          <a:xfrm>
+            <a:off x="566928" y="2606040"/>
+            <a:ext cx="11055096" cy="868680"/>
           </a:xfrm>
           <a:prstGeom prst="rect">
             <a:avLst/>
@@ -13884,23 +13975,101 @@
               <a:buNone/>
             </a:pPr>
             <a:r>
-              <a:rPr lang="en-US" sz="1600" b="1" dirty="0">
+              <a:rPr lang="en-US" sz="4000" b="1" dirty="0">
                 <a:solidFill>
                   <a:srgbClr val="1F4C86"/>
                 </a:solidFill>
-                <a:latin typeface="Calibri" pitchFamily="34" charset="0"/>
-                <a:ea typeface="Calibri" pitchFamily="34" charset="-122"/>
-                <a:cs typeface="Calibri" pitchFamily="34" charset="-120"/>
-              </a:rPr>
-              <a:t>Training needs a dedicated GPU. That is why training is a demonstration and inference is the exercise.</a:t>
-            </a:r>
-            <a:endParaRPr lang="en-US" sz="1600" dirty="0"/>
+                <a:latin typeface="Trebuchet MS" pitchFamily="34" charset="0"/>
+                <a:ea typeface="Trebuchet MS" pitchFamily="34" charset="-122"/>
+                <a:cs typeface="Trebuchet MS" pitchFamily="34" charset="-120"/>
+              </a:rPr>
+              <a:t>Deep learning</a:t>
+            </a:r>
+            <a:endParaRPr lang="en-US" sz="4000" dirty="0"/>
+          </a:p>
+        </p:txBody>
+      </p:sp>
+      <p:sp>
+        <p:nvSpPr>
+          <p:cNvPr id="6" name="Text 4"/>
+          <p:cNvSpPr/>
+          <p:nvPr/>
+        </p:nvSpPr>
+        <p:spPr>
+          <a:xfrm>
+            <a:off x="566928" y="3456432"/>
+            <a:ext cx="10140696" cy="731520"/>
+          </a:xfrm>
+          <a:prstGeom prst="rect">
+            <a:avLst/>
+          </a:prstGeom>
+          <a:noFill/>
+          <a:ln/>
+        </p:spPr>
+        <p:txBody>
+          <a:bodyPr wrap="square" rtlCol="0" anchor="t"/>
+          <a:lstStyle/>
+          <a:p>
+            <a:pPr indent="0" marL="0">
+              <a:buNone/>
+            </a:pPr>
+            <a:r>
+              <a:rPr lang="en-US" sz="1900" dirty="0">
+                <a:solidFill>
+                  <a:srgbClr val="5A6675"/>
+                </a:solidFill>
+                <a:latin typeface="Calibri" pitchFamily="34" charset="0"/>
+                <a:ea typeface="Calibri" pitchFamily="34" charset="-122"/>
+                <a:cs typeface="Calibri" pitchFamily="34" charset="-120"/>
+              </a:rPr>
+              <a:t>Pixel classifiers, cell classifiers, and knowing when not to trust them</a:t>
+            </a:r>
+            <a:endParaRPr lang="en-US" sz="1900" dirty="0"/>
           </a:p>
         </p:txBody>
       </p:sp>
       <p:sp>
         <p:nvSpPr>
           <p:cNvPr id="7" name="Text 5"/>
+          <p:cNvSpPr/>
+          <p:nvPr/>
+        </p:nvSpPr>
+        <p:spPr>
+          <a:xfrm>
+            <a:off x="566928" y="6199632"/>
+            <a:ext cx="8229600" cy="365760"/>
+          </a:xfrm>
+          <a:prstGeom prst="rect">
+            <a:avLst/>
+          </a:prstGeom>
+          <a:noFill/>
+          <a:ln/>
+        </p:spPr>
+        <p:txBody>
+          <a:bodyPr wrap="square" rtlCol="0" anchor="ctr"/>
+          <a:lstStyle/>
+          <a:p>
+            <a:pPr indent="0" marL="0">
+              <a:buNone/>
+            </a:pPr>
+            <a:r>
+              <a:rPr lang="en-US" sz="1400" dirty="0">
+                <a:solidFill>
+                  <a:srgbClr val="A8B2BF"/>
+                </a:solidFill>
+                <a:latin typeface="Calibri" pitchFamily="34" charset="0"/>
+                <a:ea typeface="Calibri" pitchFamily="34" charset="-122"/>
+                <a:cs typeface="Calibri" pitchFamily="34" charset="-120"/>
+              </a:rPr>
+              <a:t>michaelsnelson.github.io/BINA-I2K-2026-QuPath-Extensions</a:t>
+            </a:r>
+            <a:endParaRPr lang="en-US" sz="1400" dirty="0"/>
+          </a:p>
+        </p:txBody>
+      </p:sp>
+      <p:sp>
+        <p:nvSpPr>
+          <p:cNvPr id="8" name="Text 6"/>
           <p:cNvSpPr/>
           <p:nvPr/>
         </p:nvSpPr>
@@ -14002,7 +14171,7 @@
                 <a:ea typeface="Trebuchet MS" pitchFamily="34" charset="-122"/>
                 <a:cs typeface="Trebuchet MS" pitchFamily="34" charset="-120"/>
               </a:rPr>
-              <a:t>The two most important features</a:t>
+              <a:t>Deep learning pixel classification</a:t>
             </a:r>
             <a:endParaRPr lang="en-US" sz="3000" dirty="0"/>
           </a:p>
@@ -14036,8 +14205,47 @@
         </p:nvSpPr>
         <p:spPr>
           <a:xfrm>
-            <a:off x="640080" y="1481328"/>
-            <a:ext cx="10963656" cy="4553712"/>
+            <a:off x="566928" y="1243584"/>
+            <a:ext cx="11055096" cy="384048"/>
+          </a:xfrm>
+          <a:prstGeom prst="rect">
+            <a:avLst/>
+          </a:prstGeom>
+          <a:noFill/>
+          <a:ln/>
+        </p:spPr>
+        <p:txBody>
+          <a:bodyPr wrap="square" rtlCol="0" anchor="ctr"/>
+          <a:lstStyle/>
+          <a:p>
+            <a:pPr indent="0" marL="0">
+              <a:buNone/>
+            </a:pPr>
+            <a:r>
+              <a:rPr lang="en-US" sz="1700" i="1" dirty="0">
+                <a:solidFill>
+                  <a:srgbClr val="5A6675"/>
+                </a:solidFill>
+                <a:latin typeface="Calibri" pitchFamily="34" charset="0"/>
+                <a:ea typeface="Calibri" pitchFamily="34" charset="-122"/>
+                <a:cs typeface="Calibri" pitchFamily="34" charset="-120"/>
+              </a:rPr>
+              <a:t>For when the built-in classifier is not enough: subtle textures, classes that differ by architecture rather than colour.</a:t>
+            </a:r>
+            <a:endParaRPr lang="en-US" sz="1700" dirty="0"/>
+          </a:p>
+        </p:txBody>
+      </p:sp>
+      <p:sp>
+        <p:nvSpPr>
+          <p:cNvPr id="5" name="Text 3"/>
+          <p:cNvSpPr/>
+          <p:nvPr/>
+        </p:nvSpPr>
+        <p:spPr>
+          <a:xfrm>
+            <a:off x="640080" y="1755648"/>
+            <a:ext cx="10963656" cy="4279392"/>
           </a:xfrm>
           <a:prstGeom prst="rect">
             <a:avLst/>
@@ -14068,31 +14276,7 @@
                 <a:ea typeface="Calibri" pitchFamily="34" charset="-122"/>
                 <a:cs typeface="Calibri" pitchFamily="34" charset="-120"/>
               </a:rPr>
-              <a:t>Full per-pixel probability maps, not just the winning class</a:t>
-            </a:r>
-            <a:endParaRPr lang="en-US" sz="2000" dirty="0"/>
-          </a:p>
-          <a:p>
-            <a:pPr lvl="1" marL="685800" indent="-342900">
-              <a:lnSpc>
-                <a:spcPct val="105000"/>
-              </a:lnSpc>
-              <a:spcAft>
-                <a:spcPts val="800"/>
-              </a:spcAft>
-              <a:buSzPct val="100000"/>
-              <a:buChar char="▪"/>
-            </a:pPr>
-            <a:r>
-              <a:rPr lang="en-US" sz="1700" dirty="0">
-                <a:solidFill>
-                  <a:srgbClr val="5A6675"/>
-                </a:solidFill>
-                <a:latin typeface="Calibri" pitchFamily="34" charset="0"/>
-                <a:ea typeface="Calibri" pitchFamily="34" charset="-122"/>
-                <a:cs typeface="Calibri" pitchFamily="34" charset="-120"/>
-              </a:rPr>
-              <a:t>The honest uncertainty is at the boundaries between classes — go and look at it</a:t>
+              <a:t>Same interaction as the built-in classifier: draw a few sparse regions per class</a:t>
             </a:r>
             <a:endParaRPr lang="en-US" sz="2000" dirty="0"/>
           </a:p>
@@ -14116,103 +14300,63 @@
                 <a:ea typeface="Calibri" pitchFamily="34" charset="-122"/>
                 <a:cs typeface="Calibri" pitchFamily="34" charset="-120"/>
               </a:rPr>
-              <a:t>An out-of-distribution warning before inference, when an image no longer resembles the training data</a:t>
+              <a:t>The extension samples training tiles from what you marked — you are steering a sampler</a:t>
             </a:r>
             <a:endParaRPr lang="en-US" sz="2000" dirty="0"/>
           </a:p>
           <a:p>
-            <a:pPr lvl="1" marL="685800" indent="-342900">
+            <a:pPr marL="342900" indent="-342900">
               <a:lnSpc>
                 <a:spcPct val="105000"/>
               </a:lnSpc>
               <a:spcAft>
-                <a:spcPts val="800"/>
+                <a:spcPts val="1200"/>
               </a:spcAft>
               <a:buSzPct val="100000"/>
-              <a:buChar char="▪"/>
-            </a:pPr>
-            <a:r>
-              <a:rPr lang="en-US" sz="1700" dirty="0">
-                <a:solidFill>
-                  <a:srgbClr val="5A6675"/>
-                </a:solidFill>
-                <a:latin typeface="Calibri" pitchFamily="34" charset="0"/>
-                <a:ea typeface="Calibri" pitchFamily="34" charset="-122"/>
-                <a:cs typeface="Calibri" pitchFamily="34" charset="-120"/>
-              </a:rPr>
-              <a:t>Catches stain, exposure and sensor changes that would quietly degrade predictions</a:t>
+              <a:buChar char="•"/>
+            </a:pPr>
+            <a:r>
+              <a:rPr lang="en-US" sz="2000" dirty="0">
+                <a:solidFill>
+                  <a:srgbClr val="1F2933"/>
+                </a:solidFill>
+                <a:latin typeface="Calibri" pitchFamily="34" charset="0"/>
+                <a:ea typeface="Calibri" pitchFamily="34" charset="-122"/>
+                <a:cs typeface="Calibri" pitchFamily="34" charset="-120"/>
+              </a:rPr>
+              <a:t>Brightfield and multi-channel fluorescence, with per-channel normalisation</a:t>
             </a:r>
             <a:endParaRPr lang="en-US" sz="2000" dirty="0"/>
           </a:p>
-        </p:txBody>
-      </p:sp>
-      <p:sp>
-        <p:nvSpPr>
-          <p:cNvPr id="5" name="Shape 3"/>
-          <p:cNvSpPr/>
-          <p:nvPr/>
-        </p:nvSpPr>
-        <p:spPr>
-          <a:xfrm>
-            <a:off x="566928" y="5650992"/>
-            <a:ext cx="11055096" cy="566928"/>
-          </a:xfrm>
-          <a:prstGeom prst="rect">
-            <a:avLst/>
-          </a:prstGeom>
-          <a:solidFill>
-            <a:srgbClr val="F4F8FD"/>
-          </a:solidFill>
-          <a:ln w="9525">
-            <a:solidFill>
-              <a:srgbClr val="3674C1"/>
-            </a:solidFill>
-            <a:prstDash val="solid"/>
-          </a:ln>
-        </p:spPr>
+          <a:p>
+            <a:pPr marL="342900" indent="-342900">
+              <a:lnSpc>
+                <a:spcPct val="105000"/>
+              </a:lnSpc>
+              <a:spcAft>
+                <a:spcPts val="1200"/>
+              </a:spcAft>
+              <a:buSzPct val="100000"/>
+              <a:buChar char="•"/>
+            </a:pPr>
+            <a:r>
+              <a:rPr lang="en-US" sz="2000" dirty="0">
+                <a:solidFill>
+                  <a:srgbClr val="1F2933"/>
+                </a:solidFill>
+                <a:latin typeface="Calibri" pitchFamily="34" charset="0"/>
+                <a:ea typeface="Calibri" pitchFamily="34" charset="-122"/>
+                <a:cs typeface="Calibri" pitchFamily="34" charset="-120"/>
+              </a:rPr>
+              <a:t>Train across several project images at once for representative sampling</a:t>
+            </a:r>
+            <a:endParaRPr lang="en-US" sz="2000" dirty="0"/>
+          </a:p>
+        </p:txBody>
       </p:sp>
       <p:sp>
         <p:nvSpPr>
           <p:cNvPr id="6" name="Text 4"/>
-          <p:cNvSpPr/>
-          <p:nvPr/>
-        </p:nvSpPr>
-        <p:spPr>
-          <a:xfrm>
-            <a:off x="768096" y="5650992"/>
-            <a:ext cx="10652760" cy="566928"/>
-          </a:xfrm>
-          <a:prstGeom prst="rect">
-            <a:avLst/>
-          </a:prstGeom>
-          <a:noFill/>
-          <a:ln/>
-        </p:spPr>
-        <p:txBody>
-          <a:bodyPr wrap="square" rtlCol="0" anchor="ctr"/>
-          <a:lstStyle/>
-          <a:p>
-            <a:pPr indent="0" marL="0">
-              <a:buNone/>
-            </a:pPr>
-            <a:r>
-              <a:rPr lang="en-US" sz="1600" b="1" dirty="0">
-                <a:solidFill>
-                  <a:srgbClr val="1F4C86"/>
-                </a:solidFill>
-                <a:latin typeface="Calibri" pitchFamily="34" charset="0"/>
-                <a:ea typeface="Calibri" pitchFamily="34" charset="-122"/>
-                <a:cs typeface="Calibri" pitchFamily="34" charset="-120"/>
-              </a:rPr>
-              <a:t>These are the features that tell you when not to trust the output, and the easiest to ignore.</a:t>
-            </a:r>
-            <a:endParaRPr lang="en-US" sz="1600" dirty="0"/>
-          </a:p>
-        </p:txBody>
-      </p:sp>
-      <p:sp>
-        <p:nvSpPr>
-          <p:cNvPr id="7" name="Text 5"/>
           <p:cNvSpPr/>
           <p:nvPr/>
         </p:nvSpPr>
@@ -14314,7 +14458,7 @@
                 <a:ea typeface="Trebuchet MS" pitchFamily="34" charset="-122"/>
                 <a:cs typeface="Trebuchet MS" pitchFamily="34" charset="-120"/>
               </a:rPr>
-              <a:t>When the model stops working</a:t>
+              <a:t>What is underneath</a:t>
             </a:r>
             <a:endParaRPr lang="en-US" sz="3000" dirty="0"/>
           </a:p>
@@ -14348,47 +14492,8 @@
         </p:nvSpPr>
         <p:spPr>
           <a:xfrm>
-            <a:off x="566928" y="1243584"/>
-            <a:ext cx="11055096" cy="384048"/>
-          </a:xfrm>
-          <a:prstGeom prst="rect">
-            <a:avLst/>
-          </a:prstGeom>
-          <a:noFill/>
-          <a:ln/>
-        </p:spPr>
-        <p:txBody>
-          <a:bodyPr wrap="square" rtlCol="0" anchor="ctr"/>
-          <a:lstStyle/>
-          <a:p>
-            <a:pPr indent="0" marL="0">
-              <a:buNone/>
-            </a:pPr>
-            <a:r>
-              <a:rPr lang="en-US" sz="1700" i="1" dirty="0">
-                <a:solidFill>
-                  <a:srgbClr val="5A6675"/>
-                </a:solidFill>
-                <a:latin typeface="Calibri" pitchFamily="34" charset="0"/>
-                <a:ea typeface="Calibri" pitchFamily="34" charset="-122"/>
-                <a:cs typeface="Calibri" pitchFamily="34" charset="-120"/>
-              </a:rPr>
-              <a:t>Domain shift is the practical problem, far more often than model architecture.</a:t>
-            </a:r>
-            <a:endParaRPr lang="en-US" sz="1700" dirty="0"/>
-          </a:p>
-        </p:txBody>
-      </p:sp>
-      <p:sp>
-        <p:nvSpPr>
-          <p:cNvPr id="5" name="Text 3"/>
-          <p:cNvSpPr/>
-          <p:nvPr/>
-        </p:nvSpPr>
-        <p:spPr>
-          <a:xfrm>
-            <a:off x="640080" y="1755648"/>
-            <a:ext cx="10963656" cy="4279392"/>
+            <a:off x="640080" y="1481328"/>
+            <a:ext cx="10963656" cy="4553712"/>
           </a:xfrm>
           <a:prstGeom prst="rect">
             <a:avLst/>
@@ -14419,7 +14524,7 @@
                 <a:ea typeface="Calibri" pitchFamily="34" charset="-122"/>
                 <a:cs typeface="Calibri" pitchFamily="34" charset="-120"/>
               </a:rPr>
-              <a:t>A new scanner, a new stain, a new batch — and last month’s model degrades</a:t>
+              <a:t>Your choice of encoder, from lightweight convolutional networks to vision transformers</a:t>
             </a:r>
             <a:endParaRPr lang="en-US" sz="2000" dirty="0"/>
           </a:p>
@@ -14443,7 +14548,7 @@
                 <a:ea typeface="Calibri" pitchFamily="34" charset="-122"/>
                 <a:cs typeface="Calibri" pitchFamily="34" charset="-120"/>
               </a:rPr>
-              <a:t>Recalibrating to the current image takes seconds and no retraining at all</a:t>
+              <a:t>Start from weights pretrained on histology rather than on everyday photographs</a:t>
             </a:r>
             <a:endParaRPr lang="en-US" sz="2000" dirty="0"/>
           </a:p>
@@ -14467,15 +14572,39 @@
                 <a:ea typeface="Calibri" pitchFamily="34" charset="-122"/>
                 <a:cs typeface="Calibri" pitchFamily="34" charset="-120"/>
               </a:rPr>
-              <a:t>Or adapt the model to your own unlabelled data before committing to a full retrain</a:t>
+              <a:t>Or from pathology foundation models, downloaded on demand</a:t>
             </a:r>
             <a:endParaRPr lang="en-US" sz="2000" dirty="0"/>
           </a:p>
-        </p:txBody>
-      </p:sp>
-      <p:sp>
-        <p:nvSpPr>
-          <p:cNvPr id="6" name="Shape 4"/>
+          <a:p>
+            <a:pPr marL="342900" indent="-342900">
+              <a:lnSpc>
+                <a:spcPct val="105000"/>
+              </a:lnSpc>
+              <a:spcAft>
+                <a:spcPts val="1200"/>
+              </a:spcAft>
+              <a:buSzPct val="100000"/>
+              <a:buChar char="•"/>
+            </a:pPr>
+            <a:r>
+              <a:rPr lang="en-US" sz="2000" dirty="0">
+                <a:solidFill>
+                  <a:srgbClr val="1F2933"/>
+                </a:solidFill>
+                <a:latin typeface="Calibri" pitchFamily="34" charset="0"/>
+                <a:ea typeface="Calibri" pitchFamily="34" charset="-122"/>
+                <a:cs typeface="Calibri" pitchFamily="34" charset="-120"/>
+              </a:rPr>
+              <a:t>Normalisation computed over the whole image, which removes tile-boundary artefacts</a:t>
+            </a:r>
+            <a:endParaRPr lang="en-US" sz="2000" dirty="0"/>
+          </a:p>
+        </p:txBody>
+      </p:sp>
+      <p:sp>
+        <p:nvSpPr>
+          <p:cNvPr id="5" name="Shape 3"/>
           <p:cNvSpPr/>
           <p:nvPr/>
         </p:nvSpPr>
@@ -14500,7 +14629,7 @@
       </p:sp>
       <p:sp>
         <p:nvSpPr>
-          <p:cNvPr id="7" name="Text 5"/>
+          <p:cNvPr id="6" name="Text 4"/>
           <p:cNvSpPr/>
           <p:nvPr/>
         </p:nvSpPr>
@@ -14531,7 +14660,7 @@
                 <a:ea typeface="Calibri" pitchFamily="34" charset="-122"/>
                 <a:cs typeface="Calibri" pitchFamily="34" charset="-120"/>
               </a:rPr>
-              <a:t>Try recalibration before you consider retraining. It usually recovers most of the loss.</a:t>
+              <a:t>Training needs a dedicated GPU. That is why training is a demonstration and inference is the exercise.</a:t>
             </a:r>
             <a:endParaRPr lang="en-US" sz="1600" dirty="0"/>
           </a:p>
@@ -14539,7 +14668,7 @@
       </p:sp>
       <p:sp>
         <p:nvSpPr>
-          <p:cNvPr id="8" name="Text 6"/>
+          <p:cNvPr id="7" name="Text 5"/>
           <p:cNvSpPr/>
           <p:nvPr/>
         </p:nvSpPr>
@@ -14641,7 +14770,7 @@
                 <a:ea typeface="Trebuchet MS" pitchFamily="34" charset="-122"/>
                 <a:cs typeface="Trebuchet MS" pitchFamily="34" charset="-120"/>
               </a:rPr>
-              <a:t>What we are not covering</a:t>
+              <a:t>The two most important features</a:t>
             </a:r>
             <a:endParaRPr lang="en-US" sz="3000" dirty="0"/>
           </a:p>
@@ -14675,47 +14804,8 @@
         </p:nvSpPr>
         <p:spPr>
           <a:xfrm>
-            <a:off x="566928" y="1243584"/>
-            <a:ext cx="11055096" cy="384048"/>
-          </a:xfrm>
-          <a:prstGeom prst="rect">
-            <a:avLst/>
-          </a:prstGeom>
-          <a:noFill/>
-          <a:ln/>
-        </p:spPr>
-        <p:txBody>
-          <a:bodyPr wrap="square" rtlCol="0" anchor="ctr"/>
-          <a:lstStyle/>
-          <a:p>
-            <a:pPr indent="0" marL="0">
-              <a:buNone/>
-            </a:pPr>
-            <a:r>
-              <a:rPr lang="en-US" sz="1700" i="1" dirty="0">
-                <a:solidFill>
-                  <a:srgbClr val="5A6675"/>
-                </a:solidFill>
-                <a:latin typeface="Calibri" pitchFamily="34" charset="0"/>
-                <a:ea typeface="Calibri" pitchFamily="34" charset="-122"/>
-                <a:cs typeface="Calibri" pitchFamily="34" charset="-120"/>
-              </a:rPr>
-              <a:t>Two halves of the same workflow, in the right order — hers first, then this.</a:t>
-            </a:r>
-            <a:endParaRPr lang="en-US" sz="1700" dirty="0"/>
-          </a:p>
-        </p:txBody>
-      </p:sp>
-      <p:sp>
-        <p:nvSpPr>
-          <p:cNvPr id="5" name="Text 3"/>
-          <p:cNvSpPr/>
-          <p:nvPr/>
-        </p:nvSpPr>
-        <p:spPr>
-          <a:xfrm>
-            <a:off x="640080" y="1755648"/>
-            <a:ext cx="10963656" cy="4279392"/>
+            <a:off x="640080" y="1481328"/>
+            <a:ext cx="10963656" cy="4553712"/>
           </a:xfrm>
           <a:prstGeom prst="rect">
             <a:avLst/>
@@ -14746,7 +14836,31 @@
                 <a:ea typeface="Calibri" pitchFamily="34" charset="-122"/>
                 <a:cs typeface="Calibri" pitchFamily="34" charset="-120"/>
               </a:rPr>
-              <a:t>QuPath already has object classification — train on measurements, or threshold a single one</a:t>
+              <a:t>Full per-pixel probability maps, not just the winning class</a:t>
+            </a:r>
+            <a:endParaRPr lang="en-US" sz="2000" dirty="0"/>
+          </a:p>
+          <a:p>
+            <a:pPr lvl="1" marL="685800" indent="-342900">
+              <a:lnSpc>
+                <a:spcPct val="105000"/>
+              </a:lnSpc>
+              <a:spcAft>
+                <a:spcPts val="800"/>
+              </a:spcAft>
+              <a:buSzPct val="100000"/>
+              <a:buChar char="▪"/>
+            </a:pPr>
+            <a:r>
+              <a:rPr lang="en-US" sz="1700" dirty="0">
+                <a:solidFill>
+                  <a:srgbClr val="5A6675"/>
+                </a:solidFill>
+                <a:latin typeface="Calibri" pitchFamily="34" charset="0"/>
+                <a:ea typeface="Calibri" pitchFamily="34" charset="-122"/>
+                <a:cs typeface="Calibri" pitchFamily="34" charset="-120"/>
+              </a:rPr>
+              <a:t>The honest uncertainty is at the boundaries between classes — go and look at it</a:t>
             </a:r>
             <a:endParaRPr lang="en-US" sz="2000" dirty="0"/>
           </a:p>
@@ -14770,87 +14884,39 @@
                 <a:ea typeface="Calibri" pitchFamily="34" charset="-122"/>
                 <a:cs typeface="Calibri" pitchFamily="34" charset="-120"/>
               </a:rPr>
-              <a:t>We are not re-teaching it. Sara’s session this morning was the hi-plex classification half</a:t>
+              <a:t>An out-of-distribution warning before inference, when an image no longer resembles the training data</a:t>
             </a:r>
             <a:endParaRPr lang="en-US" sz="2000" dirty="0"/>
           </a:p>
           <a:p>
-            <a:pPr marL="342900" indent="-342900">
+            <a:pPr lvl="1" marL="685800" indent="-342900">
               <a:lnSpc>
                 <a:spcPct val="105000"/>
               </a:lnSpc>
               <a:spcAft>
-                <a:spcPts val="1200"/>
+                <a:spcPts val="800"/>
               </a:spcAft>
               <a:buSzPct val="100000"/>
-              <a:buChar char="•"/>
-            </a:pPr>
-            <a:r>
-              <a:rPr lang="en-US" sz="2000" dirty="0">
-                <a:solidFill>
-                  <a:srgbClr val="1F2933"/>
-                </a:solidFill>
-                <a:latin typeface="Calibri" pitchFamily="34" charset="0"/>
-                <a:ea typeface="Calibri" pitchFamily="34" charset="-122"/>
-                <a:cs typeface="Calibri" pitchFamily="34" charset="-120"/>
-              </a:rPr>
-              <a:t>What follows are alternative mechanisms for getting a class onto a cell:</a:t>
+              <a:buChar char="▪"/>
+            </a:pPr>
+            <a:r>
+              <a:rPr lang="en-US" sz="1700" dirty="0">
+                <a:solidFill>
+                  <a:srgbClr val="5A6675"/>
+                </a:solidFill>
+                <a:latin typeface="Calibri" pitchFamily="34" charset="0"/>
+                <a:ea typeface="Calibri" pitchFamily="34" charset="-122"/>
+                <a:cs typeface="Calibri" pitchFamily="34" charset="-120"/>
+              </a:rPr>
+              <a:t>Catches stain, exposure and sensor changes that would quietly degrade predictions</a:t>
             </a:r>
             <a:endParaRPr lang="en-US" sz="2000" dirty="0"/>
           </a:p>
-          <a:p>
-            <a:pPr marL="342900" indent="-342900">
-              <a:lnSpc>
-                <a:spcPct val="105000"/>
-              </a:lnSpc>
-              <a:spcAft>
-                <a:spcPts val="1200"/>
-              </a:spcAft>
-              <a:buSzPct val="100000"/>
-              <a:buChar char="•"/>
-            </a:pPr>
-            <a:r>
-              <a:rPr lang="en-US" sz="2000" dirty="0">
-                <a:solidFill>
-                  <a:srgbClr val="1F2933"/>
-                </a:solidFill>
-                <a:latin typeface="Calibri" pitchFamily="34" charset="0"/>
-                <a:ea typeface="Calibri" pitchFamily="34" charset="-122"/>
-                <a:cs typeface="Calibri" pitchFamily="34" charset="-120"/>
-              </a:rPr>
-              <a:t>Unsupervised clustering · rule-based marker gating · propagation from a small hand-labelled subset · applying an existing classifier to a chosen subset instead of everything</a:t>
-            </a:r>
-            <a:endParaRPr lang="en-US" sz="2000" dirty="0"/>
-          </a:p>
-          <a:p>
-            <a:pPr marL="342900" indent="-342900">
-              <a:lnSpc>
-                <a:spcPct val="105000"/>
-              </a:lnSpc>
-              <a:spcAft>
-                <a:spcPts val="1200"/>
-              </a:spcAft>
-              <a:buSzPct val="100000"/>
-              <a:buChar char="•"/>
-            </a:pPr>
-            <a:r>
-              <a:rPr lang="en-US" sz="2000" dirty="0">
-                <a:solidFill>
-                  <a:srgbClr val="1F2933"/>
-                </a:solidFill>
-                <a:latin typeface="Calibri" pitchFamily="34" charset="0"/>
-                <a:ea typeface="Calibri" pitchFamily="34" charset="-122"/>
-                <a:cs typeface="Calibri" pitchFamily="34" charset="-120"/>
-              </a:rPr>
-              <a:t>Then: what those classified cells are actually telling you — which sit next to which, and whether that differs between images</a:t>
-            </a:r>
-            <a:endParaRPr lang="en-US" sz="2000" dirty="0"/>
-          </a:p>
-        </p:txBody>
-      </p:sp>
-      <p:sp>
-        <p:nvSpPr>
-          <p:cNvPr id="6" name="Shape 4"/>
+        </p:txBody>
+      </p:sp>
+      <p:sp>
+        <p:nvSpPr>
+          <p:cNvPr id="5" name="Shape 3"/>
           <p:cNvSpPr/>
           <p:nvPr/>
         </p:nvSpPr>
@@ -14875,7 +14941,7 @@
       </p:sp>
       <p:sp>
         <p:nvSpPr>
-          <p:cNvPr id="7" name="Text 5"/>
+          <p:cNvPr id="6" name="Text 4"/>
           <p:cNvSpPr/>
           <p:nvPr/>
         </p:nvSpPr>
@@ -14906,7 +14972,7 @@
                 <a:ea typeface="Calibri" pitchFamily="34" charset="-122"/>
                 <a:cs typeface="Calibri" pitchFamily="34" charset="-120"/>
               </a:rPr>
-              <a:t>If you missed hers, the two extensions she demonstrated are documented on our site too.</a:t>
+              <a:t>These are the features that tell you when not to trust the output, and the easiest to ignore.</a:t>
             </a:r>
             <a:endParaRPr lang="en-US" sz="1600" dirty="0"/>
           </a:p>
@@ -14914,7 +14980,7 @@
       </p:sp>
       <p:sp>
         <p:nvSpPr>
-          <p:cNvPr id="8" name="Text 6"/>
+          <p:cNvPr id="7" name="Text 5"/>
           <p:cNvSpPr/>
           <p:nvPr/>
         </p:nvSpPr>
@@ -15016,7 +15082,7 @@
                 <a:ea typeface="Trebuchet MS" pitchFamily="34" charset="-122"/>
                 <a:cs typeface="Trebuchet MS" pitchFamily="34" charset="-120"/>
               </a:rPr>
-              <a:t>QP-CAT — multiplexed cell analysis</a:t>
+              <a:t>When the model stops working</a:t>
             </a:r>
             <a:endParaRPr lang="en-US" sz="3000" dirty="0"/>
           </a:p>
@@ -15075,7 +15141,7 @@
                 <a:ea typeface="Calibri" pitchFamily="34" charset="-122"/>
                 <a:cs typeface="Calibri" pitchFamily="34" charset="-120"/>
               </a:rPr>
-              <a:t>The usual workflow loses the link back to the tissue. This keeps it.</a:t>
+              <a:t>Domain shift is the practical problem, far more often than model architecture.</a:t>
             </a:r>
             <a:endParaRPr lang="en-US" sz="1700" dirty="0"/>
           </a:p>
@@ -15121,7 +15187,7 @@
                 <a:ea typeface="Calibri" pitchFamily="34" charset="-122"/>
                 <a:cs typeface="Calibri" pitchFamily="34" charset="-120"/>
               </a:rPr>
-              <a:t>The full scientific Python stack embedded in QuPath. No environments to manage</a:t>
+              <a:t>A new scanner, a new stain, a new batch — and last month’s model degrades</a:t>
             </a:r>
             <a:endParaRPr lang="en-US" sz="2000" dirty="0"/>
           </a:p>
@@ -15145,7 +15211,7 @@
                 <a:ea typeface="Calibri" pitchFamily="34" charset="-122"/>
                 <a:cs typeface="Calibri" pitchFamily="34" charset="-120"/>
               </a:rPr>
-              <a:t>Clustering, marker gating with suggested thresholds, spatial statistics, batch correction</a:t>
+              <a:t>Recalibrating to the current image takes seconds and no retraining at all</a:t>
             </a:r>
             <a:endParaRPr lang="en-US" sz="2000" dirty="0"/>
           </a:p>
@@ -15169,55 +15235,7 @@
                 <a:ea typeface="Calibri" pitchFamily="34" charset="-122"/>
                 <a:cs typeface="Calibri" pitchFamily="34" charset="-120"/>
               </a:rPr>
-              <a:t>Label a small subset by hand and have the rest of the project labelled for you — no object classifier involved</a:t>
-            </a:r>
-            <a:endParaRPr lang="en-US" sz="2000" dirty="0"/>
-          </a:p>
-          <a:p>
-            <a:pPr marL="342900" indent="-342900">
-              <a:lnSpc>
-                <a:spcPct val="105000"/>
-              </a:lnSpc>
-              <a:spcAft>
-                <a:spcPts val="1200"/>
-              </a:spcAft>
-              <a:buSzPct val="100000"/>
-              <a:buChar char="•"/>
-            </a:pPr>
-            <a:r>
-              <a:rPr lang="en-US" sz="2000" dirty="0">
-                <a:solidFill>
-                  <a:srgbClr val="1F2933"/>
-                </a:solidFill>
-                <a:latin typeface="Calibri" pitchFamily="34" charset="0"/>
-                <a:ea typeface="Calibri" pitchFamily="34" charset="-122"/>
-                <a:cs typeface="Calibri" pitchFamily="34" charset="-120"/>
-              </a:rPr>
-              <a:t>Brush a region of the embedding and those cells highlight on the slide</a:t>
-            </a:r>
-            <a:endParaRPr lang="en-US" sz="2000" dirty="0"/>
-          </a:p>
-          <a:p>
-            <a:pPr marL="342900" indent="-342900">
-              <a:lnSpc>
-                <a:spcPct val="105000"/>
-              </a:lnSpc>
-              <a:spcAft>
-                <a:spcPts val="1200"/>
-              </a:spcAft>
-              <a:buSzPct val="100000"/>
-              <a:buChar char="•"/>
-            </a:pPr>
-            <a:r>
-              <a:rPr lang="en-US" sz="2000" dirty="0">
-                <a:solidFill>
-                  <a:srgbClr val="1F2933"/>
-                </a:solidFill>
-                <a:latin typeface="Calibri" pitchFamily="34" charset="0"/>
-                <a:ea typeface="Calibri" pitchFamily="34" charset="-122"/>
-                <a:cs typeface="Calibri" pitchFamily="34" charset="-120"/>
-              </a:rPr>
-              <a:t>Separate tissue stays separate — no spatial graph edge ever crosses two TMA cores</a:t>
+              <a:t>Or adapt the model to your own unlabelled data before committing to a full retrain</a:t>
             </a:r>
             <a:endParaRPr lang="en-US" sz="2000" dirty="0"/>
           </a:p>
@@ -15281,7 +15299,7 @@
                 <a:ea typeface="Calibri" pitchFamily="34" charset="-122"/>
                 <a:cs typeface="Calibri" pitchFamily="34" charset="-120"/>
               </a:rPr>
-              <a:t>Author’s own warning: many features are lightly tested. Treat results as a starting point.</a:t>
+              <a:t>Try recalibration before you consider retraining. It usually recovers most of the loss.</a:t>
             </a:r>
             <a:endParaRPr lang="en-US" sz="1600" dirty="0"/>
           </a:p>
@@ -15391,7 +15409,7 @@
                 <a:ea typeface="Trebuchet MS" pitchFamily="34" charset="-122"/>
                 <a:cs typeface="Trebuchet MS" pitchFamily="34" charset="-120"/>
               </a:rPr>
-              <a:t>You can check the answer</a:t>
+              <a:t>What we are not covering</a:t>
             </a:r>
             <a:endParaRPr lang="en-US" sz="3000" dirty="0"/>
           </a:p>
@@ -15450,7 +15468,7 @@
                 <a:ea typeface="Calibri" pitchFamily="34" charset="-122"/>
                 <a:cs typeface="Calibri" pitchFamily="34" charset="-120"/>
               </a:rPr>
-              <a:t>Learn what a correct result looks like, so you can recognise a wrong one later.</a:t>
+              <a:t>Two halves of the same workflow, in the right order — hers first, then this.</a:t>
             </a:r>
             <a:endParaRPr lang="en-US" sz="1700" dirty="0"/>
           </a:p>
@@ -15496,7 +15514,7 @@
                 <a:ea typeface="Calibri" pitchFamily="34" charset="-122"/>
                 <a:cs typeface="Calibri" pitchFamily="34" charset="-120"/>
               </a:rPr>
-              <a:t>Real multiplexed tissue has no ground truth — you never know which cell is really which type</a:t>
+              <a:t>QuPath already has object classification — train on measurements, or threshold a single one</a:t>
             </a:r>
             <a:endParaRPr lang="en-US" sz="2000" dirty="0"/>
           </a:p>
@@ -15520,7 +15538,7 @@
                 <a:ea typeface="Calibri" pitchFamily="34" charset="-122"/>
                 <a:cs typeface="Calibri" pitchFamily="34" charset="-120"/>
               </a:rPr>
-              <a:t>So the exercise uses a synthetic tumour microenvironment where every cell is labelled</a:t>
+              <a:t>We are not re-teaching it. Sara’s session this morning was the hi-plex classification half</a:t>
             </a:r>
             <a:endParaRPr lang="en-US" sz="2000" dirty="0"/>
           </a:p>
@@ -15544,7 +15562,7 @@
                 <a:ea typeface="Calibri" pitchFamily="34" charset="-122"/>
                 <a:cs typeface="Calibri" pitchFamily="34" charset="-120"/>
               </a:rPr>
-              <a:t>Six cell types, tumour nests, an immune-infiltrated boundary, B-cell follicles, a proliferation gradient</a:t>
+              <a:t>What follows are alternative mechanisms for getting a class onto a cell:</a:t>
             </a:r>
             <a:endParaRPr lang="en-US" sz="2000" dirty="0"/>
           </a:p>
@@ -15568,7 +15586,7 @@
                 <a:ea typeface="Calibri" pitchFamily="34" charset="-122"/>
                 <a:cs typeface="Calibri" pitchFamily="34" charset="-120"/>
               </a:rPr>
-              <a:t>Inflamed versus desert: one image is 55% lymphoid, another 14% with no follicles at all</a:t>
+              <a:t>Unsupervised clustering · rule-based marker gating · propagation from a small hand-labelled subset · applying an existing classifier to a chosen subset instead of everything</a:t>
             </a:r>
             <a:endParaRPr lang="en-US" sz="2000" dirty="0"/>
           </a:p>
@@ -15592,7 +15610,7 @@
                 <a:ea typeface="Calibri" pitchFamily="34" charset="-122"/>
                 <a:cs typeface="Calibri" pitchFamily="34" charset="-120"/>
               </a:rPr>
-              <a:t>20 MB, public domain, and it downloads straight from GitHub</a:t>
+              <a:t>Then: what those classified cells are actually telling you — which sit next to which, and whether that differs between images</a:t>
             </a:r>
             <a:endParaRPr lang="en-US" sz="2000" dirty="0"/>
           </a:p>
@@ -15656,7 +15674,7 @@
                 <a:ea typeface="Calibri" pitchFamily="34" charset="-122"/>
                 <a:cs typeface="Calibri" pitchFamily="34" charset="-120"/>
               </a:rPr>
-              <a:t>Cluster it, then click a boundary cell and find out whether the cluster was telling the truth.</a:t>
+              <a:t>If you missed hers, the two extensions she demonstrated are documented on our site too.</a:t>
             </a:r>
             <a:endParaRPr lang="en-US" sz="1600" dirty="0"/>
           </a:p>
@@ -15766,7 +15784,7 @@
                 <a:ea typeface="Trebuchet MS" pitchFamily="34" charset="-122"/>
                 <a:cs typeface="Trebuchet MS" pitchFamily="34" charset="-120"/>
               </a:rPr>
-              <a:t>And getting back to the tissue</a:t>
+              <a:t>QP-CAT — multiplexed cell analysis</a:t>
             </a:r>
             <a:endParaRPr lang="en-US" sz="3000" dirty="0"/>
           </a:p>
@@ -15825,7 +15843,7 @@
                 <a:ea typeface="Calibri" pitchFamily="34" charset="-122"/>
                 <a:cs typeface="Calibri" pitchFamily="34" charset="-120"/>
               </a:rPr>
-              <a:t>A mention rather than a demo — it is the navigation half of the clustering you just saw.</a:t>
+              <a:t>The usual workflow loses the link back to the tissue. This keeps it.</a:t>
             </a:r>
             <a:endParaRPr lang="en-US" sz="1700" dirty="0"/>
           </a:p>
@@ -15871,7 +15889,7 @@
                 <a:ea typeface="Calibri" pitchFamily="34" charset="-122"/>
                 <a:cs typeface="Calibri" pitchFamily="34" charset="-120"/>
               </a:rPr>
-              <a:t>Clustering answers "which cells group together". It does not answer "which cell is that"</a:t>
+              <a:t>The full scientific Python stack embedded in QuPath. No environments to manage</a:t>
             </a:r>
             <a:endParaRPr lang="en-US" sz="2000" dirty="0"/>
           </a:p>
@@ -15895,7 +15913,7 @@
                 <a:ea typeface="Calibri" pitchFamily="34" charset="-122"/>
                 <a:cs typeface="Calibri" pitchFamily="34" charset="-120"/>
               </a:rPr>
-              <a:t>Cluster 3D Navigator: a rotatable point cloud, one point per cell, coloured by class</a:t>
+              <a:t>Clustering, marker gating with suggested thresholds, spatial statistics, batch correction</a:t>
             </a:r>
             <a:endParaRPr lang="en-US" sz="2000" dirty="0"/>
           </a:p>
@@ -15919,7 +15937,7 @@
                 <a:ea typeface="Calibri" pitchFamily="34" charset="-122"/>
                 <a:cs typeface="Calibri" pitchFamily="34" charset="-120"/>
               </a:rPr>
-              <a:t>Click a point in cluster space and land on that cell in the viewer</a:t>
+              <a:t>Label a small subset by hand and have the rest of the project labelled for you — no object classifier involved</a:t>
             </a:r>
             <a:endParaRPr lang="en-US" sz="2000" dirty="0"/>
           </a:p>
@@ -15943,7 +15961,31 @@
                 <a:ea typeface="Calibri" pitchFamily="34" charset="-122"/>
                 <a:cs typeface="Calibri" pitchFamily="34" charset="-120"/>
               </a:rPr>
-              <a:t>Boundary cells are where classification errors live — this makes them one click away</a:t>
+              <a:t>Brush a region of the embedding and those cells highlight on the slide</a:t>
+            </a:r>
+            <a:endParaRPr lang="en-US" sz="2000" dirty="0"/>
+          </a:p>
+          <a:p>
+            <a:pPr marL="342900" indent="-342900">
+              <a:lnSpc>
+                <a:spcPct val="105000"/>
+              </a:lnSpc>
+              <a:spcAft>
+                <a:spcPts val="1200"/>
+              </a:spcAft>
+              <a:buSzPct val="100000"/>
+              <a:buChar char="•"/>
+            </a:pPr>
+            <a:r>
+              <a:rPr lang="en-US" sz="2000" dirty="0">
+                <a:solidFill>
+                  <a:srgbClr val="1F2933"/>
+                </a:solidFill>
+                <a:latin typeface="Calibri" pitchFamily="34" charset="0"/>
+                <a:ea typeface="Calibri" pitchFamily="34" charset="-122"/>
+                <a:cs typeface="Calibri" pitchFamily="34" charset="-120"/>
+              </a:rPr>
+              <a:t>Separate tissue stays separate — no spatial graph edge ever crosses two TMA cores</a:t>
             </a:r>
             <a:endParaRPr lang="en-US" sz="2000" dirty="0"/>
           </a:p>
@@ -16007,7 +16049,7 @@
                 <a:ea typeface="Calibri" pitchFamily="34" charset="-122"/>
                 <a:cs typeface="Calibri" pitchFamily="34" charset="-120"/>
               </a:rPr>
-              <a:t>Works with any clustering tool’s output, not just QP-CAT’s. It only reads; it writes nothing.</a:t>
+              <a:t>Author’s own warning: many features are lightly tested. Treat results as a starting point.</a:t>
             </a:r>
             <a:endParaRPr lang="en-US" sz="1600" dirty="0"/>
           </a:p>
@@ -16398,23 +16440,42 @@
       </p:grpSpPr>
       <p:sp>
         <p:nvSpPr>
-          <p:cNvPr id="2" name="Shape 0"/>
-          <p:cNvSpPr/>
-          <p:nvPr/>
-        </p:nvSpPr>
-        <p:spPr>
-          <a:xfrm>
-            <a:off x="0" y="1417320"/>
-            <a:ext cx="12188952" cy="3108960"/>
-          </a:xfrm>
-          <a:prstGeom prst="rect">
-            <a:avLst/>
-          </a:prstGeom>
-          <a:solidFill>
-            <a:srgbClr val="E8F0FA"/>
-          </a:solidFill>
-          <a:ln/>
-        </p:spPr>
+          <p:cNvPr id="2" name="Text 0"/>
+          <p:cNvSpPr/>
+          <p:nvPr/>
+        </p:nvSpPr>
+        <p:spPr>
+          <a:xfrm>
+            <a:off x="566928" y="384048"/>
+            <a:ext cx="11055096" cy="658368"/>
+          </a:xfrm>
+          <a:prstGeom prst="rect">
+            <a:avLst/>
+          </a:prstGeom>
+          <a:noFill/>
+          <a:ln/>
+        </p:spPr>
+        <p:txBody>
+          <a:bodyPr wrap="square" rtlCol="0" anchor="ctr"/>
+          <a:lstStyle/>
+          <a:p>
+            <a:pPr indent="0" marL="0">
+              <a:buNone/>
+            </a:pPr>
+            <a:r>
+              <a:rPr lang="en-US" sz="3000" b="1" dirty="0">
+                <a:solidFill>
+                  <a:srgbClr val="1F4C86"/>
+                </a:solidFill>
+                <a:latin typeface="Trebuchet MS" pitchFamily="34" charset="0"/>
+                <a:ea typeface="Trebuchet MS" pitchFamily="34" charset="-122"/>
+                <a:cs typeface="Trebuchet MS" pitchFamily="34" charset="-120"/>
+              </a:rPr>
+              <a:t>You can check the answer</a:t>
+            </a:r>
+            <a:endParaRPr lang="en-US" sz="3000" dirty="0"/>
+          </a:p>
+        </p:txBody>
       </p:sp>
       <p:sp>
         <p:nvSpPr>
@@ -16424,8 +16485,8 @@
         </p:nvSpPr>
         <p:spPr>
           <a:xfrm>
-            <a:off x="0" y="1417320"/>
-            <a:ext cx="201168" cy="3108960"/>
+            <a:off x="566928" y="1097280"/>
+            <a:ext cx="1920240" cy="50292"/>
           </a:xfrm>
           <a:prstGeom prst="rect">
             <a:avLst/>
@@ -16444,8 +16505,8 @@
         </p:nvSpPr>
         <p:spPr>
           <a:xfrm>
-            <a:off x="566928" y="1691640"/>
-            <a:ext cx="1828800" cy="914400"/>
+            <a:off x="566928" y="1243584"/>
+            <a:ext cx="11055096" cy="384048"/>
           </a:xfrm>
           <a:prstGeom prst="rect">
             <a:avLst/>
@@ -16461,17 +16522,17 @@
               <a:buNone/>
             </a:pPr>
             <a:r>
-              <a:rPr lang="en-US" sz="5400" b="1" dirty="0">
-                <a:solidFill>
-                  <a:srgbClr val="3674C1"/>
-                </a:solidFill>
-                <a:latin typeface="Trebuchet MS" pitchFamily="34" charset="0"/>
-                <a:ea typeface="Trebuchet MS" pitchFamily="34" charset="-122"/>
-                <a:cs typeface="Trebuchet MS" pitchFamily="34" charset="-120"/>
-              </a:rPr>
-              <a:t>07</a:t>
-            </a:r>
-            <a:endParaRPr lang="en-US" sz="5400" dirty="0"/>
+              <a:rPr lang="en-US" sz="1700" i="1" dirty="0">
+                <a:solidFill>
+                  <a:srgbClr val="5A6675"/>
+                </a:solidFill>
+                <a:latin typeface="Calibri" pitchFamily="34" charset="0"/>
+                <a:ea typeface="Calibri" pitchFamily="34" charset="-122"/>
+                <a:cs typeface="Calibri" pitchFamily="34" charset="-120"/>
+              </a:rPr>
+              <a:t>Learn what a correct result looks like, so you can recognise a wrong one later.</a:t>
+            </a:r>
+            <a:endParaRPr lang="en-US" sz="1700" dirty="0"/>
           </a:p>
         </p:txBody>
       </p:sp>
@@ -16483,8 +16544,175 @@
         </p:nvSpPr>
         <p:spPr>
           <a:xfrm>
-            <a:off x="566928" y="2606040"/>
-            <a:ext cx="11055096" cy="868680"/>
+            <a:off x="640080" y="1755648"/>
+            <a:ext cx="10963656" cy="4279392"/>
+          </a:xfrm>
+          <a:prstGeom prst="rect">
+            <a:avLst/>
+          </a:prstGeom>
+          <a:noFill/>
+          <a:ln/>
+        </p:spPr>
+        <p:txBody>
+          <a:bodyPr wrap="square" rtlCol="0" anchor="t"/>
+          <a:lstStyle/>
+          <a:p>
+            <a:pPr marL="342900" indent="-342900">
+              <a:lnSpc>
+                <a:spcPct val="105000"/>
+              </a:lnSpc>
+              <a:spcAft>
+                <a:spcPts val="1200"/>
+              </a:spcAft>
+              <a:buSzPct val="100000"/>
+              <a:buChar char="•"/>
+            </a:pPr>
+            <a:r>
+              <a:rPr lang="en-US" sz="2000" dirty="0">
+                <a:solidFill>
+                  <a:srgbClr val="1F2933"/>
+                </a:solidFill>
+                <a:latin typeface="Calibri" pitchFamily="34" charset="0"/>
+                <a:ea typeface="Calibri" pitchFamily="34" charset="-122"/>
+                <a:cs typeface="Calibri" pitchFamily="34" charset="-120"/>
+              </a:rPr>
+              <a:t>Real multiplexed tissue has no ground truth — you never know which cell is really which type</a:t>
+            </a:r>
+            <a:endParaRPr lang="en-US" sz="2000" dirty="0"/>
+          </a:p>
+          <a:p>
+            <a:pPr marL="342900" indent="-342900">
+              <a:lnSpc>
+                <a:spcPct val="105000"/>
+              </a:lnSpc>
+              <a:spcAft>
+                <a:spcPts val="1200"/>
+              </a:spcAft>
+              <a:buSzPct val="100000"/>
+              <a:buChar char="•"/>
+            </a:pPr>
+            <a:r>
+              <a:rPr lang="en-US" sz="2000" dirty="0">
+                <a:solidFill>
+                  <a:srgbClr val="1F2933"/>
+                </a:solidFill>
+                <a:latin typeface="Calibri" pitchFamily="34" charset="0"/>
+                <a:ea typeface="Calibri" pitchFamily="34" charset="-122"/>
+                <a:cs typeface="Calibri" pitchFamily="34" charset="-120"/>
+              </a:rPr>
+              <a:t>So the exercise uses a synthetic tumour microenvironment where every cell is labelled</a:t>
+            </a:r>
+            <a:endParaRPr lang="en-US" sz="2000" dirty="0"/>
+          </a:p>
+          <a:p>
+            <a:pPr marL="342900" indent="-342900">
+              <a:lnSpc>
+                <a:spcPct val="105000"/>
+              </a:lnSpc>
+              <a:spcAft>
+                <a:spcPts val="1200"/>
+              </a:spcAft>
+              <a:buSzPct val="100000"/>
+              <a:buChar char="•"/>
+            </a:pPr>
+            <a:r>
+              <a:rPr lang="en-US" sz="2000" dirty="0">
+                <a:solidFill>
+                  <a:srgbClr val="1F2933"/>
+                </a:solidFill>
+                <a:latin typeface="Calibri" pitchFamily="34" charset="0"/>
+                <a:ea typeface="Calibri" pitchFamily="34" charset="-122"/>
+                <a:cs typeface="Calibri" pitchFamily="34" charset="-120"/>
+              </a:rPr>
+              <a:t>Six cell types, tumour nests, an immune-infiltrated boundary, B-cell follicles, a proliferation gradient</a:t>
+            </a:r>
+            <a:endParaRPr lang="en-US" sz="2000" dirty="0"/>
+          </a:p>
+          <a:p>
+            <a:pPr marL="342900" indent="-342900">
+              <a:lnSpc>
+                <a:spcPct val="105000"/>
+              </a:lnSpc>
+              <a:spcAft>
+                <a:spcPts val="1200"/>
+              </a:spcAft>
+              <a:buSzPct val="100000"/>
+              <a:buChar char="•"/>
+            </a:pPr>
+            <a:r>
+              <a:rPr lang="en-US" sz="2000" dirty="0">
+                <a:solidFill>
+                  <a:srgbClr val="1F2933"/>
+                </a:solidFill>
+                <a:latin typeface="Calibri" pitchFamily="34" charset="0"/>
+                <a:ea typeface="Calibri" pitchFamily="34" charset="-122"/>
+                <a:cs typeface="Calibri" pitchFamily="34" charset="-120"/>
+              </a:rPr>
+              <a:t>Inflamed versus desert: one image is 55% lymphoid, another 14% with no follicles at all</a:t>
+            </a:r>
+            <a:endParaRPr lang="en-US" sz="2000" dirty="0"/>
+          </a:p>
+          <a:p>
+            <a:pPr marL="342900" indent="-342900">
+              <a:lnSpc>
+                <a:spcPct val="105000"/>
+              </a:lnSpc>
+              <a:spcAft>
+                <a:spcPts val="1200"/>
+              </a:spcAft>
+              <a:buSzPct val="100000"/>
+              <a:buChar char="•"/>
+            </a:pPr>
+            <a:r>
+              <a:rPr lang="en-US" sz="2000" dirty="0">
+                <a:solidFill>
+                  <a:srgbClr val="1F2933"/>
+                </a:solidFill>
+                <a:latin typeface="Calibri" pitchFamily="34" charset="0"/>
+                <a:ea typeface="Calibri" pitchFamily="34" charset="-122"/>
+                <a:cs typeface="Calibri" pitchFamily="34" charset="-120"/>
+              </a:rPr>
+              <a:t>20 MB, public domain, and it downloads straight from GitHub</a:t>
+            </a:r>
+            <a:endParaRPr lang="en-US" sz="2000" dirty="0"/>
+          </a:p>
+        </p:txBody>
+      </p:sp>
+      <p:sp>
+        <p:nvSpPr>
+          <p:cNvPr id="6" name="Shape 4"/>
+          <p:cNvSpPr/>
+          <p:nvPr/>
+        </p:nvSpPr>
+        <p:spPr>
+          <a:xfrm>
+            <a:off x="566928" y="5650992"/>
+            <a:ext cx="11055096" cy="566928"/>
+          </a:xfrm>
+          <a:prstGeom prst="rect">
+            <a:avLst/>
+          </a:prstGeom>
+          <a:solidFill>
+            <a:srgbClr val="F4F8FD"/>
+          </a:solidFill>
+          <a:ln w="9525">
+            <a:solidFill>
+              <a:srgbClr val="3674C1"/>
+            </a:solidFill>
+            <a:prstDash val="solid"/>
+          </a:ln>
+        </p:spPr>
+      </p:sp>
+      <p:sp>
+        <p:nvSpPr>
+          <p:cNvPr id="7" name="Text 5"/>
+          <p:cNvSpPr/>
+          <p:nvPr/>
+        </p:nvSpPr>
+        <p:spPr>
+          <a:xfrm>
+            <a:off x="768096" y="5650992"/>
+            <a:ext cx="10652760" cy="566928"/>
           </a:xfrm>
           <a:prstGeom prst="rect">
             <a:avLst/>
@@ -16500,95 +16728,17 @@
               <a:buNone/>
             </a:pPr>
             <a:r>
-              <a:rPr lang="en-US" sz="4000" b="1" dirty="0">
+              <a:rPr lang="en-US" sz="1600" b="1" dirty="0">
                 <a:solidFill>
                   <a:srgbClr val="1F4C86"/>
                 </a:solidFill>
-                <a:latin typeface="Trebuchet MS" pitchFamily="34" charset="0"/>
-                <a:ea typeface="Trebuchet MS" pitchFamily="34" charset="-122"/>
-                <a:cs typeface="Trebuchet MS" pitchFamily="34" charset="-120"/>
-              </a:rPr>
-              <a:t>Collagen fibre and texture</a:t>
-            </a:r>
-            <a:endParaRPr lang="en-US" sz="4000" dirty="0"/>
-          </a:p>
-        </p:txBody>
-      </p:sp>
-      <p:sp>
-        <p:nvSpPr>
-          <p:cNvPr id="6" name="Text 4"/>
-          <p:cNvSpPr/>
-          <p:nvPr/>
-        </p:nvSpPr>
-        <p:spPr>
-          <a:xfrm>
-            <a:off x="566928" y="3456432"/>
-            <a:ext cx="10140696" cy="731520"/>
-          </a:xfrm>
-          <a:prstGeom prst="rect">
-            <a:avLst/>
-          </a:prstGeom>
-          <a:noFill/>
-          <a:ln/>
-        </p:spPr>
-        <p:txBody>
-          <a:bodyPr wrap="square" rtlCol="0" anchor="t"/>
-          <a:lstStyle/>
-          <a:p>
-            <a:pPr indent="0" marL="0">
-              <a:buNone/>
-            </a:pPr>
-            <a:r>
-              <a:rPr lang="en-US" sz="1900" dirty="0">
-                <a:solidFill>
-                  <a:srgbClr val="5A6675"/>
-                </a:solidFill>
-                <a:latin typeface="Calibri" pitchFamily="34" charset="0"/>
-                <a:ea typeface="Calibri" pitchFamily="34" charset="-122"/>
-                <a:cs typeface="Calibri" pitchFamily="34" charset="-120"/>
-              </a:rPr>
-              <a:t>Architecture, not just presence</a:t>
-            </a:r>
-            <a:endParaRPr lang="en-US" sz="1900" dirty="0"/>
-          </a:p>
-        </p:txBody>
-      </p:sp>
-      <p:sp>
-        <p:nvSpPr>
-          <p:cNvPr id="7" name="Text 5"/>
-          <p:cNvSpPr/>
-          <p:nvPr/>
-        </p:nvSpPr>
-        <p:spPr>
-          <a:xfrm>
-            <a:off x="566928" y="6199632"/>
-            <a:ext cx="8229600" cy="365760"/>
-          </a:xfrm>
-          <a:prstGeom prst="rect">
-            <a:avLst/>
-          </a:prstGeom>
-          <a:noFill/>
-          <a:ln/>
-        </p:spPr>
-        <p:txBody>
-          <a:bodyPr wrap="square" rtlCol="0" anchor="ctr"/>
-          <a:lstStyle/>
-          <a:p>
-            <a:pPr indent="0" marL="0">
-              <a:buNone/>
-            </a:pPr>
-            <a:r>
-              <a:rPr lang="en-US" sz="1400" dirty="0">
-                <a:solidFill>
-                  <a:srgbClr val="A8B2BF"/>
-                </a:solidFill>
-                <a:latin typeface="Calibri" pitchFamily="34" charset="0"/>
-                <a:ea typeface="Calibri" pitchFamily="34" charset="-122"/>
-                <a:cs typeface="Calibri" pitchFamily="34" charset="-120"/>
-              </a:rPr>
-              <a:t>michaelsnelson.github.io/BINA-I2K-2026-QuPath-Extensions</a:t>
-            </a:r>
-            <a:endParaRPr lang="en-US" sz="1400" dirty="0"/>
+                <a:latin typeface="Calibri" pitchFamily="34" charset="0"/>
+                <a:ea typeface="Calibri" pitchFamily="34" charset="-122"/>
+                <a:cs typeface="Calibri" pitchFamily="34" charset="-120"/>
+              </a:rPr>
+              <a:t>Cluster it, then click a boundary cell and find out whether the cluster was telling the truth.</a:t>
+            </a:r>
+            <a:endParaRPr lang="en-US" sz="1600" dirty="0"/>
           </a:p>
         </p:txBody>
       </p:sp>
@@ -16696,7 +16846,7 @@
                 <a:ea typeface="Trebuchet MS" pitchFamily="34" charset="-122"/>
                 <a:cs typeface="Trebuchet MS" pitchFamily="34" charset="-120"/>
               </a:rPr>
-              <a:t>Why fibre architecture</a:t>
+              <a:t>And getting back to the tissue</a:t>
             </a:r>
             <a:endParaRPr lang="en-US" sz="3000" dirty="0"/>
           </a:p>
@@ -16755,7 +16905,7 @@
                 <a:ea typeface="Calibri" pitchFamily="34" charset="-122"/>
                 <a:cs typeface="Calibri" pitchFamily="34" charset="-120"/>
               </a:rPr>
-              <a:t>Conklin et al. 2011, American Journal of Pathology 178:1221.</a:t>
+              <a:t>A mention rather than a demo — it is the navigation half of the clustering you just saw.</a:t>
             </a:r>
             <a:endParaRPr lang="en-US" sz="1700" dirty="0"/>
           </a:p>
@@ -16801,7 +16951,7 @@
                 <a:ea typeface="Calibri" pitchFamily="34" charset="-122"/>
                 <a:cs typeface="Calibri" pitchFamily="34" charset="-120"/>
               </a:rPr>
-              <a:t>Collagen is not simply present or absent — the arrangement carries the biology</a:t>
+              <a:t>Clustering answers "which cells group together". It does not answer "which cell is that"</a:t>
             </a:r>
             <a:endParaRPr lang="en-US" sz="2000" dirty="0"/>
           </a:p>
@@ -16825,7 +16975,7 @@
                 <a:ea typeface="Calibri" pitchFamily="34" charset="-122"/>
                 <a:cs typeface="Calibri" pitchFamily="34" charset="-120"/>
               </a:rPr>
-              <a:t>Wavy versus straightened; aligned versus isotropic; and how that changes at a boundary</a:t>
+              <a:t>Cluster 3D Navigator: a rotatable point cloud, one point per cell, coloured by class</a:t>
             </a:r>
             <a:endParaRPr lang="en-US" sz="2000" dirty="0"/>
           </a:p>
@@ -16849,7 +16999,7 @@
                 <a:ea typeface="Calibri" pitchFamily="34" charset="-122"/>
                 <a:cs typeface="Calibri" pitchFamily="34" charset="-120"/>
               </a:rPr>
-              <a:t>In breast pathology, straightened fibres running perpendicular to the tumour boundary act as tracks for invading cells</a:t>
+              <a:t>Click a point in cluster space and land on that cell in the viewer</a:t>
             </a:r>
             <a:endParaRPr lang="en-US" sz="2000" dirty="0"/>
           </a:p>
@@ -16873,7 +17023,7 @@
                 <a:ea typeface="Calibri" pitchFamily="34" charset="-122"/>
                 <a:cs typeface="Calibri" pitchFamily="34" charset="-120"/>
               </a:rPr>
-              <a:t>Hazard ratio 3.0–3.9 for disease-free survival, independent of grade, size and receptor status</a:t>
+              <a:t>Boundary cells are where classification errors live — this makes them one click away</a:t>
             </a:r>
             <a:endParaRPr lang="en-US" sz="2000" dirty="0"/>
           </a:p>
@@ -16937,7 +17087,7 @@
                 <a:ea typeface="Calibri" pitchFamily="34" charset="-122"/>
                 <a:cs typeface="Calibri" pitchFamily="34" charset="-120"/>
               </a:rPr>
-              <a:t>The same wavy-to-straight axis recurs in arterial adventitia, sclera, alveolar wall, and cardiac fibrosis.</a:t>
+              <a:t>Works with any clustering tool’s output, not just QP-CAT’s. It only reads; it writes nothing.</a:t>
             </a:r>
             <a:endParaRPr lang="en-US" sz="1600" dirty="0"/>
           </a:p>
@@ -17016,14 +17166,54 @@
       </p:grpSpPr>
       <p:sp>
         <p:nvSpPr>
-          <p:cNvPr id="2" name="Text 0"/>
-          <p:cNvSpPr/>
-          <p:nvPr/>
-        </p:nvSpPr>
-        <p:spPr>
-          <a:xfrm>
-            <a:off x="566928" y="384048"/>
-            <a:ext cx="11055096" cy="658368"/>
+          <p:cNvPr id="2" name="Shape 0"/>
+          <p:cNvSpPr/>
+          <p:nvPr/>
+        </p:nvSpPr>
+        <p:spPr>
+          <a:xfrm>
+            <a:off x="0" y="1417320"/>
+            <a:ext cx="12188952" cy="3108960"/>
+          </a:xfrm>
+          <a:prstGeom prst="rect">
+            <a:avLst/>
+          </a:prstGeom>
+          <a:solidFill>
+            <a:srgbClr val="E8F0FA"/>
+          </a:solidFill>
+          <a:ln/>
+        </p:spPr>
+      </p:sp>
+      <p:sp>
+        <p:nvSpPr>
+          <p:cNvPr id="3" name="Shape 1"/>
+          <p:cNvSpPr/>
+          <p:nvPr/>
+        </p:nvSpPr>
+        <p:spPr>
+          <a:xfrm>
+            <a:off x="0" y="1417320"/>
+            <a:ext cx="201168" cy="3108960"/>
+          </a:xfrm>
+          <a:prstGeom prst="rect">
+            <a:avLst/>
+          </a:prstGeom>
+          <a:solidFill>
+            <a:srgbClr val="3674C1"/>
+          </a:solidFill>
+          <a:ln/>
+        </p:spPr>
+      </p:sp>
+      <p:sp>
+        <p:nvSpPr>
+          <p:cNvPr id="4" name="Text 2"/>
+          <p:cNvSpPr/>
+          <p:nvPr/>
+        </p:nvSpPr>
+        <p:spPr>
+          <a:xfrm>
+            <a:off x="566928" y="1691640"/>
+            <a:ext cx="1828800" cy="914400"/>
           </a:xfrm>
           <a:prstGeom prst="rect">
             <a:avLst/>
@@ -17039,59 +17229,19 @@
               <a:buNone/>
             </a:pPr>
             <a:r>
-              <a:rPr lang="en-US" sz="3000" b="1" dirty="0">
-                <a:solidFill>
-                  <a:srgbClr val="1F4C86"/>
+              <a:rPr lang="en-US" sz="5400" b="1" dirty="0">
+                <a:solidFill>
+                  <a:srgbClr val="3674C1"/>
                 </a:solidFill>
                 <a:latin typeface="Trebuchet MS" pitchFamily="34" charset="0"/>
                 <a:ea typeface="Trebuchet MS" pitchFamily="34" charset="-122"/>
                 <a:cs typeface="Trebuchet MS" pitchFamily="34" charset="-120"/>
               </a:rPr>
-              <a:t>Two complementary tools</a:t>
-            </a:r>
-            <a:endParaRPr lang="en-US" sz="3000" dirty="0"/>
-          </a:p>
-        </p:txBody>
-      </p:sp>
-      <p:sp>
-        <p:nvSpPr>
-          <p:cNvPr id="3" name="Shape 1"/>
-          <p:cNvSpPr/>
-          <p:nvPr/>
-        </p:nvSpPr>
-        <p:spPr>
-          <a:xfrm>
-            <a:off x="566928" y="1097280"/>
-            <a:ext cx="1920240" cy="50292"/>
-          </a:xfrm>
-          <a:prstGeom prst="rect">
-            <a:avLst/>
-          </a:prstGeom>
-          <a:solidFill>
-            <a:srgbClr val="3674C1"/>
-          </a:solidFill>
-          <a:ln/>
-        </p:spPr>
-      </p:sp>
-      <p:sp>
-        <p:nvSpPr>
-          <p:cNvPr id="4" name="Shape 2"/>
-          <p:cNvSpPr/>
-          <p:nvPr/>
-        </p:nvSpPr>
-        <p:spPr>
-          <a:xfrm>
-            <a:off x="566928" y="1554480"/>
-            <a:ext cx="5298948" cy="530352"/>
-          </a:xfrm>
-          <a:prstGeom prst="rect">
-            <a:avLst/>
-          </a:prstGeom>
-          <a:solidFill>
-            <a:srgbClr val="E8F0FA"/>
-          </a:solidFill>
-          <a:ln/>
-        </p:spPr>
+              <a:t>07</a:t>
+            </a:r>
+            <a:endParaRPr lang="en-US" sz="5400" dirty="0"/>
+          </a:p>
+        </p:txBody>
       </p:sp>
       <p:sp>
         <p:nvSpPr>
@@ -17101,8 +17251,8 @@
         </p:nvSpPr>
         <p:spPr>
           <a:xfrm>
-            <a:off x="731520" y="1554480"/>
-            <a:ext cx="4969764" cy="530352"/>
+            <a:off x="566928" y="2606040"/>
+            <a:ext cx="11055096" cy="868680"/>
           </a:xfrm>
           <a:prstGeom prst="rect">
             <a:avLst/>
@@ -17118,7 +17268,7 @@
               <a:buNone/>
             </a:pPr>
             <a:r>
-              <a:rPr lang="en-US" sz="2000" b="1" dirty="0">
+              <a:rPr lang="en-US" sz="4000" b="1" dirty="0">
                 <a:solidFill>
                   <a:srgbClr val="1F4C86"/>
                 </a:solidFill>
@@ -17126,9 +17276,9 @@
                 <a:ea typeface="Trebuchet MS" pitchFamily="34" charset="-122"/>
                 <a:cs typeface="Trebuchet MS" pitchFamily="34" charset="-120"/>
               </a:rPr>
-              <a:t>Fiber Analysis — measure a zone</a:t>
-            </a:r>
-            <a:endParaRPr lang="en-US" sz="2000" dirty="0"/>
+              <a:t>Collagen fibre and texture</a:t>
+            </a:r>
+            <a:endParaRPr lang="en-US" sz="4000" dirty="0"/>
           </a:p>
         </p:txBody>
       </p:sp>
@@ -17140,8 +17290,8 @@
         </p:nvSpPr>
         <p:spPr>
           <a:xfrm>
-            <a:off x="658368" y="2240280"/>
-            <a:ext cx="5116068" cy="3566160"/>
+            <a:off x="566928" y="3456432"/>
+            <a:ext cx="10140696" cy="731520"/>
           </a:xfrm>
           <a:prstGeom prst="rect">
             <a:avLst/>
@@ -17151,261 +17301,68 @@
         </p:spPr>
         <p:txBody>
           <a:bodyPr wrap="square" rtlCol="0" anchor="t"/>
-          <a:lstStyle/>
-          <a:p>
-            <a:pPr marL="342900" indent="-342900">
-              <a:spcAft>
-                <a:spcPts val="1100"/>
-              </a:spcAft>
-              <a:buSzPct val="100000"/>
-              <a:buChar char="•"/>
-            </a:pPr>
-            <a:r>
-              <a:rPr lang="en-US" sz="1800" dirty="0">
-                <a:solidFill>
-                  <a:srgbClr val="1F2933"/>
-                </a:solidFill>
-                <a:latin typeface="Calibri" pitchFamily="34" charset="0"/>
-                <a:ea typeface="Calibri" pitchFamily="34" charset="-122"/>
-                <a:cs typeface="Calibri" pitchFamily="34" charset="-120"/>
-              </a:rPr>
-              <a:t>A band of chosen width inside, outside, or across an annotation boundary</a:t>
-            </a:r>
-            <a:endParaRPr lang="en-US" sz="1800" dirty="0"/>
-          </a:p>
-          <a:p>
-            <a:pPr marL="342900" indent="-342900">
-              <a:spcAft>
-                <a:spcPts val="1100"/>
-              </a:spcAft>
-              <a:buSzPct val="100000"/>
-              <a:buChar char="•"/>
-            </a:pPr>
-            <a:r>
-              <a:rPr lang="en-US" sz="1800" dirty="0">
-                <a:solidFill>
-                  <a:srgbClr val="1F2933"/>
-                </a:solidFill>
-                <a:latin typeface="Calibri" pitchFamily="34" charset="0"/>
-                <a:ea typeface="Calibri" pitchFamily="34" charset="-122"/>
-                <a:cs typeface="Calibri" pitchFamily="34" charset="-120"/>
-              </a:rPr>
-              <a:t>Straightness and persistence: wavy versus straightened fibres</a:t>
-            </a:r>
-            <a:endParaRPr lang="en-US" sz="1800" dirty="0"/>
-          </a:p>
-          <a:p>
-            <a:pPr marL="342900" indent="-342900">
-              <a:spcAft>
-                <a:spcPts val="1100"/>
-              </a:spcAft>
-              <a:buSzPct val="100000"/>
-              <a:buChar char="•"/>
-            </a:pPr>
-            <a:r>
-              <a:rPr lang="en-US" sz="1800" dirty="0">
-                <a:solidFill>
-                  <a:srgbClr val="1F2933"/>
-                </a:solidFill>
-                <a:latin typeface="Calibri" pitchFamily="34" charset="0"/>
-                <a:ea typeface="Calibri" pitchFamily="34" charset="-122"/>
-                <a:cs typeface="Calibri" pitchFamily="34" charset="-120"/>
-              </a:rPr>
-              <a:t>Morphometrics: coverage, length, branching, fractal dimension, gaps</a:t>
-            </a:r>
-            <a:endParaRPr lang="en-US" sz="1800" dirty="0"/>
-          </a:p>
-          <a:p>
-            <a:pPr marL="342900" indent="-342900">
-              <a:spcAft>
-                <a:spcPts val="1100"/>
-              </a:spcAft>
-              <a:buSzPct val="100000"/>
-              <a:buChar char="•"/>
-            </a:pPr>
-            <a:r>
-              <a:rPr lang="en-US" sz="1800" dirty="0">
-                <a:solidFill>
-                  <a:srgbClr val="1F2933"/>
-                </a:solidFill>
-                <a:latin typeface="Calibri" pitchFamily="34" charset="0"/>
-                <a:ea typeface="Calibri" pitchFamily="34" charset="-122"/>
-                <a:cs typeface="Calibri" pitchFamily="34" charset="-120"/>
-              </a:rPr>
-              <a:t>Texture: the information fibre-tracing misses entirely</a:t>
-            </a:r>
-            <a:endParaRPr lang="en-US" sz="1800" dirty="0"/>
-          </a:p>
-        </p:txBody>
-      </p:sp>
-      <p:sp>
-        <p:nvSpPr>
-          <p:cNvPr id="7" name="Shape 5"/>
-          <p:cNvSpPr/>
-          <p:nvPr/>
-        </p:nvSpPr>
-        <p:spPr>
-          <a:xfrm>
-            <a:off x="6323076" y="1554480"/>
-            <a:ext cx="5298948" cy="530352"/>
-          </a:xfrm>
-          <a:prstGeom prst="rect">
-            <a:avLst/>
-          </a:prstGeom>
-          <a:solidFill>
-            <a:srgbClr val="E8F0FA"/>
-          </a:solidFill>
-          <a:ln/>
-        </p:spPr>
-      </p:sp>
-      <p:sp>
-        <p:nvSpPr>
-          <p:cNvPr id="8" name="Text 6"/>
-          <p:cNvSpPr/>
-          <p:nvPr/>
-        </p:nvSpPr>
-        <p:spPr>
-          <a:xfrm>
-            <a:off x="6487668" y="1554480"/>
-            <a:ext cx="4969764" cy="530352"/>
-          </a:xfrm>
-          <a:prstGeom prst="rect">
-            <a:avLst/>
-          </a:prstGeom>
-          <a:noFill/>
-          <a:ln/>
-        </p:spPr>
-        <p:txBody>
-          <a:bodyPr wrap="square" rtlCol="0" anchor="ctr"/>
           <a:lstStyle/>
           <a:p>
             <a:pPr indent="0" marL="0">
               <a:buNone/>
             </a:pPr>
             <a:r>
-              <a:rPr lang="en-US" sz="2000" b="1" dirty="0">
-                <a:solidFill>
-                  <a:srgbClr val="B26A00"/>
-                </a:solidFill>
-                <a:latin typeface="Trebuchet MS" pitchFamily="34" charset="0"/>
-                <a:ea typeface="Trebuchet MS" pitchFamily="34" charset="-122"/>
-                <a:cs typeface="Trebuchet MS" pitchFamily="34" charset="-120"/>
-              </a:rPr>
-              <a:t>TME-Quant — trace the fibres</a:t>
-            </a:r>
-            <a:endParaRPr lang="en-US" sz="2000" dirty="0"/>
-          </a:p>
-        </p:txBody>
-      </p:sp>
-      <p:sp>
-        <p:nvSpPr>
-          <p:cNvPr id="9" name="Text 7"/>
-          <p:cNvSpPr/>
-          <p:nvPr/>
-        </p:nvSpPr>
-        <p:spPr>
-          <a:xfrm>
-            <a:off x="6414516" y="2240280"/>
-            <a:ext cx="5116068" cy="3566160"/>
-          </a:xfrm>
-          <a:prstGeom prst="rect">
-            <a:avLst/>
-          </a:prstGeom>
-          <a:noFill/>
-          <a:ln/>
-        </p:spPr>
-        <p:txBody>
-          <a:bodyPr wrap="square" rtlCol="0" anchor="t"/>
-          <a:lstStyle/>
-          <a:p>
-            <a:pPr marL="342900" indent="-342900">
-              <a:spcAft>
-                <a:spcPts val="1100"/>
-              </a:spcAft>
-              <a:buSzPct val="100000"/>
-              <a:buChar char="•"/>
-            </a:pPr>
-            <a:r>
-              <a:rPr lang="en-US" sz="1800" dirty="0">
-                <a:solidFill>
-                  <a:srgbClr val="1F2933"/>
-                </a:solidFill>
-                <a:latin typeface="Calibri" pitchFamily="34" charset="0"/>
-                <a:ea typeface="Calibri" pitchFamily="34" charset="-122"/>
-                <a:cs typeface="Calibri" pitchFamily="34" charset="-120"/>
-              </a:rPr>
-              <a:t>Individual fibres extracted and committed back as objects</a:t>
-            </a:r>
-            <a:endParaRPr lang="en-US" sz="1800" dirty="0"/>
-          </a:p>
-          <a:p>
-            <a:pPr marL="342900" indent="-342900">
-              <a:spcAft>
-                <a:spcPts val="1100"/>
-              </a:spcAft>
-              <a:buSzPct val="100000"/>
-              <a:buChar char="•"/>
-            </a:pPr>
-            <a:r>
-              <a:rPr lang="en-US" sz="1800" dirty="0">
-                <a:solidFill>
-                  <a:srgbClr val="1F2933"/>
-                </a:solidFill>
-                <a:latin typeface="Calibri" pitchFamily="34" charset="0"/>
-                <a:ea typeface="Calibri" pitchFamily="34" charset="-122"/>
-                <a:cs typeface="Calibri" pitchFamily="34" charset="-120"/>
-              </a:rPr>
-              <a:t>Set the threshold by eye, with the mask shown before you commit</a:t>
-            </a:r>
-            <a:endParaRPr lang="en-US" sz="1800" dirty="0"/>
-          </a:p>
-          <a:p>
-            <a:pPr marL="342900" indent="-342900">
-              <a:spcAft>
-                <a:spcPts val="1100"/>
-              </a:spcAft>
-              <a:buSzPct val="100000"/>
-              <a:buChar char="•"/>
-            </a:pPr>
-            <a:r>
-              <a:rPr lang="en-US" sz="1800" dirty="0">
-                <a:solidFill>
-                  <a:srgbClr val="1F2933"/>
-                </a:solidFill>
-                <a:latin typeface="Calibri" pitchFamily="34" charset="0"/>
-                <a:ea typeface="Calibri" pitchFamily="34" charset="-122"/>
-                <a:cs typeface="Calibri" pitchFamily="34" charset="-120"/>
-              </a:rPr>
-              <a:t>Trace a few real fibres yourself, and it tunes its own parameters to match</a:t>
-            </a:r>
-            <a:endParaRPr lang="en-US" sz="1800" dirty="0"/>
-          </a:p>
-          <a:p>
-            <a:pPr marL="342900" indent="-342900">
-              <a:spcAft>
-                <a:spcPts val="1100"/>
-              </a:spcAft>
-              <a:buSzPct val="100000"/>
-              <a:buChar char="•"/>
-            </a:pPr>
-            <a:r>
-              <a:rPr lang="en-US" sz="1800" dirty="0">
-                <a:solidFill>
-                  <a:srgbClr val="1F2933"/>
-                </a:solidFill>
-                <a:latin typeface="Calibri" pitchFamily="34" charset="0"/>
-                <a:ea typeface="Calibri" pitchFamily="34" charset="-122"/>
-                <a:cs typeface="Calibri" pitchFamily="34" charset="-120"/>
-              </a:rPr>
-              <a:t>Fibres classified by orientation relative to a tumour boundary</a:t>
-            </a:r>
-            <a:endParaRPr lang="en-US" sz="1800" dirty="0"/>
-          </a:p>
-        </p:txBody>
-      </p:sp>
-      <p:sp>
-        <p:nvSpPr>
-          <p:cNvPr id="10" name="Text 8"/>
+              <a:rPr lang="en-US" sz="1900" dirty="0">
+                <a:solidFill>
+                  <a:srgbClr val="5A6675"/>
+                </a:solidFill>
+                <a:latin typeface="Calibri" pitchFamily="34" charset="0"/>
+                <a:ea typeface="Calibri" pitchFamily="34" charset="-122"/>
+                <a:cs typeface="Calibri" pitchFamily="34" charset="-120"/>
+              </a:rPr>
+              <a:t>Architecture, not just presence</a:t>
+            </a:r>
+            <a:endParaRPr lang="en-US" sz="1900" dirty="0"/>
+          </a:p>
+        </p:txBody>
+      </p:sp>
+      <p:sp>
+        <p:nvSpPr>
+          <p:cNvPr id="7" name="Text 5"/>
+          <p:cNvSpPr/>
+          <p:nvPr/>
+        </p:nvSpPr>
+        <p:spPr>
+          <a:xfrm>
+            <a:off x="566928" y="6199632"/>
+            <a:ext cx="8229600" cy="365760"/>
+          </a:xfrm>
+          <a:prstGeom prst="rect">
+            <a:avLst/>
+          </a:prstGeom>
+          <a:noFill/>
+          <a:ln/>
+        </p:spPr>
+        <p:txBody>
+          <a:bodyPr wrap="square" rtlCol="0" anchor="ctr"/>
+          <a:lstStyle/>
+          <a:p>
+            <a:pPr indent="0" marL="0">
+              <a:buNone/>
+            </a:pPr>
+            <a:r>
+              <a:rPr lang="en-US" sz="1400" dirty="0">
+                <a:solidFill>
+                  <a:srgbClr val="A8B2BF"/>
+                </a:solidFill>
+                <a:latin typeface="Calibri" pitchFamily="34" charset="0"/>
+                <a:ea typeface="Calibri" pitchFamily="34" charset="-122"/>
+                <a:cs typeface="Calibri" pitchFamily="34" charset="-120"/>
+              </a:rPr>
+              <a:t>michaelsnelson.github.io/BINA-I2K-2026-QuPath-Extensions</a:t>
+            </a:r>
+            <a:endParaRPr lang="en-US" sz="1400" dirty="0"/>
+          </a:p>
+        </p:txBody>
+      </p:sp>
+      <p:sp>
+        <p:nvSpPr>
+          <p:cNvPr id="8" name="Text 6"/>
           <p:cNvSpPr/>
           <p:nvPr/>
         </p:nvSpPr>
@@ -17507,7 +17464,7 @@
                 <a:ea typeface="Trebuchet MS" pitchFamily="34" charset="-122"/>
                 <a:cs typeface="Trebuchet MS" pitchFamily="34" charset="-120"/>
               </a:rPr>
-              <a:t>A dense mat and a sparse clump</a:t>
+              <a:t>Why fibre architecture</a:t>
             </a:r>
             <a:endParaRPr lang="en-US" sz="3000" dirty="0"/>
           </a:p>
@@ -17541,8 +17498,47 @@
         </p:nvSpPr>
         <p:spPr>
           <a:xfrm>
-            <a:off x="640080" y="1481328"/>
-            <a:ext cx="10963656" cy="4553712"/>
+            <a:off x="566928" y="1243584"/>
+            <a:ext cx="11055096" cy="384048"/>
+          </a:xfrm>
+          <a:prstGeom prst="rect">
+            <a:avLst/>
+          </a:prstGeom>
+          <a:noFill/>
+          <a:ln/>
+        </p:spPr>
+        <p:txBody>
+          <a:bodyPr wrap="square" rtlCol="0" anchor="ctr"/>
+          <a:lstStyle/>
+          <a:p>
+            <a:pPr indent="0" marL="0">
+              <a:buNone/>
+            </a:pPr>
+            <a:r>
+              <a:rPr lang="en-US" sz="1700" i="1" dirty="0">
+                <a:solidFill>
+                  <a:srgbClr val="5A6675"/>
+                </a:solidFill>
+                <a:latin typeface="Calibri" pitchFamily="34" charset="0"/>
+                <a:ea typeface="Calibri" pitchFamily="34" charset="-122"/>
+                <a:cs typeface="Calibri" pitchFamily="34" charset="-120"/>
+              </a:rPr>
+              <a:t>Conklin et al. 2011, American Journal of Pathology 178:1221.</a:t>
+            </a:r>
+            <a:endParaRPr lang="en-US" sz="1700" dirty="0"/>
+          </a:p>
+        </p:txBody>
+      </p:sp>
+      <p:sp>
+        <p:nvSpPr>
+          <p:cNvPr id="5" name="Text 3"/>
+          <p:cNvSpPr/>
+          <p:nvPr/>
+        </p:nvSpPr>
+        <p:spPr>
+          <a:xfrm>
+            <a:off x="640080" y="1755648"/>
+            <a:ext cx="10963656" cy="4279392"/>
           </a:xfrm>
           <a:prstGeom prst="rect">
             <a:avLst/>
@@ -17573,7 +17569,7 @@
                 <a:ea typeface="Calibri" pitchFamily="34" charset="-122"/>
                 <a:cs typeface="Calibri" pitchFamily="34" charset="-120"/>
               </a:rPr>
-              <a:t>Two fields can share the same mean fibre alignment and be completely different tissue</a:t>
+              <a:t>Collagen is not simply present or absent — the arrangement carries the biology</a:t>
             </a:r>
             <a:endParaRPr lang="en-US" sz="2000" dirty="0"/>
           </a:p>
@@ -17597,7 +17593,7 @@
                 <a:ea typeface="Calibri" pitchFamily="34" charset="-122"/>
                 <a:cs typeface="Calibri" pitchFamily="34" charset="-120"/>
               </a:rPr>
-              <a:t>Texture measures the spatial heterogeneity that alignment averages away</a:t>
+              <a:t>Wavy versus straightened; aligned versus isotropic; and how that changes at a boundary</a:t>
             </a:r>
             <a:endParaRPr lang="en-US" sz="2000" dirty="0"/>
           </a:p>
@@ -17621,15 +17617,39 @@
                 <a:ea typeface="Calibri" pitchFamily="34" charset="-122"/>
                 <a:cs typeface="Calibri" pitchFamily="34" charset="-120"/>
               </a:rPr>
-              <a:t>Which is why both tools are worth running, on the same region</a:t>
+              <a:t>In breast pathology, straightened fibres running perpendicular to the tumour boundary act as tracks for invading cells</a:t>
             </a:r>
             <a:endParaRPr lang="en-US" sz="2000" dirty="0"/>
           </a:p>
-        </p:txBody>
-      </p:sp>
-      <p:sp>
-        <p:nvSpPr>
-          <p:cNvPr id="5" name="Shape 3"/>
+          <a:p>
+            <a:pPr marL="342900" indent="-342900">
+              <a:lnSpc>
+                <a:spcPct val="105000"/>
+              </a:lnSpc>
+              <a:spcAft>
+                <a:spcPts val="1200"/>
+              </a:spcAft>
+              <a:buSzPct val="100000"/>
+              <a:buChar char="•"/>
+            </a:pPr>
+            <a:r>
+              <a:rPr lang="en-US" sz="2000" dirty="0">
+                <a:solidFill>
+                  <a:srgbClr val="1F2933"/>
+                </a:solidFill>
+                <a:latin typeface="Calibri" pitchFamily="34" charset="0"/>
+                <a:ea typeface="Calibri" pitchFamily="34" charset="-122"/>
+                <a:cs typeface="Calibri" pitchFamily="34" charset="-120"/>
+              </a:rPr>
+              <a:t>Hazard ratio 3.0–3.9 for disease-free survival, independent of grade, size and receptor status</a:t>
+            </a:r>
+            <a:endParaRPr lang="en-US" sz="2000" dirty="0"/>
+          </a:p>
+        </p:txBody>
+      </p:sp>
+      <p:sp>
+        <p:nvSpPr>
+          <p:cNvPr id="6" name="Shape 4"/>
           <p:cNvSpPr/>
           <p:nvPr/>
         </p:nvSpPr>
@@ -17654,7 +17674,7 @@
       </p:sp>
       <p:sp>
         <p:nvSpPr>
-          <p:cNvPr id="6" name="Text 4"/>
+          <p:cNvPr id="7" name="Text 5"/>
           <p:cNvSpPr/>
           <p:nvPr/>
         </p:nvSpPr>
@@ -17685,7 +17705,7 @@
                 <a:ea typeface="Calibri" pitchFamily="34" charset="-122"/>
                 <a:cs typeface="Calibri" pitchFamily="34" charset="-120"/>
               </a:rPr>
-              <a:t>Demo only today: one needs a long environment build, the other a dedicated analysis server.</a:t>
+              <a:t>The same wavy-to-straight axis recurs in arterial adventitia, sclera, alveolar wall, and cardiac fibrosis.</a:t>
             </a:r>
             <a:endParaRPr lang="en-US" sz="1600" dirty="0"/>
           </a:p>
@@ -17693,7 +17713,7 @@
       </p:sp>
       <p:sp>
         <p:nvSpPr>
-          <p:cNvPr id="7" name="Text 5"/>
+          <p:cNvPr id="8" name="Text 6"/>
           <p:cNvSpPr/>
           <p:nvPr/>
         </p:nvSpPr>
@@ -17795,7 +17815,7 @@
                 <a:ea typeface="Trebuchet MS" pitchFamily="34" charset="-122"/>
                 <a:cs typeface="Trebuchet MS" pitchFamily="34" charset="-120"/>
               </a:rPr>
-              <a:t>Please cite the methods</a:t>
+              <a:t>Two complementary tools</a:t>
             </a:r>
             <a:endParaRPr lang="en-US" sz="3000" dirty="0"/>
           </a:p>
@@ -17823,14 +17843,73 @@
       </p:sp>
       <p:sp>
         <p:nvSpPr>
-          <p:cNvPr id="4" name="Text 2"/>
-          <p:cNvSpPr/>
-          <p:nvPr/>
-        </p:nvSpPr>
-        <p:spPr>
-          <a:xfrm>
-            <a:off x="640080" y="1481328"/>
-            <a:ext cx="10963656" cy="4553712"/>
+          <p:cNvPr id="4" name="Shape 2"/>
+          <p:cNvSpPr/>
+          <p:nvPr/>
+        </p:nvSpPr>
+        <p:spPr>
+          <a:xfrm>
+            <a:off x="566928" y="1554480"/>
+            <a:ext cx="5298948" cy="530352"/>
+          </a:xfrm>
+          <a:prstGeom prst="rect">
+            <a:avLst/>
+          </a:prstGeom>
+          <a:solidFill>
+            <a:srgbClr val="E8F0FA"/>
+          </a:solidFill>
+          <a:ln/>
+        </p:spPr>
+      </p:sp>
+      <p:sp>
+        <p:nvSpPr>
+          <p:cNvPr id="5" name="Text 3"/>
+          <p:cNvSpPr/>
+          <p:nvPr/>
+        </p:nvSpPr>
+        <p:spPr>
+          <a:xfrm>
+            <a:off x="731520" y="1554480"/>
+            <a:ext cx="4969764" cy="530352"/>
+          </a:xfrm>
+          <a:prstGeom prst="rect">
+            <a:avLst/>
+          </a:prstGeom>
+          <a:noFill/>
+          <a:ln/>
+        </p:spPr>
+        <p:txBody>
+          <a:bodyPr wrap="square" rtlCol="0" anchor="ctr"/>
+          <a:lstStyle/>
+          <a:p>
+            <a:pPr indent="0" marL="0">
+              <a:buNone/>
+            </a:pPr>
+            <a:r>
+              <a:rPr lang="en-US" sz="2000" b="1" dirty="0">
+                <a:solidFill>
+                  <a:srgbClr val="1F4C86"/>
+                </a:solidFill>
+                <a:latin typeface="Trebuchet MS" pitchFamily="34" charset="0"/>
+                <a:ea typeface="Trebuchet MS" pitchFamily="34" charset="-122"/>
+                <a:cs typeface="Trebuchet MS" pitchFamily="34" charset="-120"/>
+              </a:rPr>
+              <a:t>Fiber Analysis — measure a zone</a:t>
+            </a:r>
+            <a:endParaRPr lang="en-US" sz="2000" dirty="0"/>
+          </a:p>
+        </p:txBody>
+      </p:sp>
+      <p:sp>
+        <p:nvSpPr>
+          <p:cNvPr id="6" name="Text 4"/>
+          <p:cNvSpPr/>
+          <p:nvPr/>
+        </p:nvSpPr>
+        <p:spPr>
+          <a:xfrm>
+            <a:off x="658368" y="2240280"/>
+            <a:ext cx="5116068" cy="3566160"/>
           </a:xfrm>
           <a:prstGeom prst="rect">
             <a:avLst/>
@@ -17843,17 +17922,14 @@
           <a:lstStyle/>
           <a:p>
             <a:pPr marL="342900" indent="-342900">
-              <a:lnSpc>
-                <a:spcPct val="105000"/>
-              </a:lnSpc>
               <a:spcAft>
-                <a:spcPts val="1200"/>
+                <a:spcPts val="1100"/>
               </a:spcAft>
               <a:buSzPct val="100000"/>
               <a:buChar char="•"/>
             </a:pPr>
             <a:r>
-              <a:rPr lang="en-US" sz="2000" dirty="0">
+              <a:rPr lang="en-US" sz="1800" dirty="0">
                 <a:solidFill>
                   <a:srgbClr val="1F2933"/>
                 </a:solidFill>
@@ -17861,23 +17937,20 @@
                 <a:ea typeface="Calibri" pitchFamily="34" charset="-122"/>
                 <a:cs typeface="Calibri" pitchFamily="34" charset="-120"/>
               </a:rPr>
-              <a:t>Both tools are thin wrappers over other people’s science</a:t>
-            </a:r>
-            <a:endParaRPr lang="en-US" sz="2000" dirty="0"/>
+              <a:t>A band of chosen width inside, outside, or across an annotation boundary</a:t>
+            </a:r>
+            <a:endParaRPr lang="en-US" sz="1800" dirty="0"/>
           </a:p>
           <a:p>
             <a:pPr marL="342900" indent="-342900">
-              <a:lnSpc>
-                <a:spcPct val="105000"/>
-              </a:lnSpc>
               <a:spcAft>
-                <a:spcPts val="1200"/>
+                <a:spcPts val="1100"/>
               </a:spcAft>
               <a:buSzPct val="100000"/>
               <a:buChar char="•"/>
             </a:pPr>
             <a:r>
-              <a:rPr lang="en-US" sz="2000" dirty="0">
+              <a:rPr lang="en-US" sz="1800" dirty="0">
                 <a:solidFill>
                   <a:srgbClr val="1F2933"/>
                 </a:solidFill>
@@ -17885,23 +17958,20 @@
                 <a:ea typeface="Calibri" pitchFamily="34" charset="-122"/>
                 <a:cs typeface="Calibri" pitchFamily="34" charset="-120"/>
               </a:rPr>
-              <a:t>CT-FIRE — Bredfeldt et al. 2014, Journal of Biomedical Optics 19(1):016007</a:t>
-            </a:r>
-            <a:endParaRPr lang="en-US" sz="2000" dirty="0"/>
+              <a:t>Straightness and persistence: wavy versus straightened fibres</a:t>
+            </a:r>
+            <a:endParaRPr lang="en-US" sz="1800" dirty="0"/>
           </a:p>
           <a:p>
             <a:pPr marL="342900" indent="-342900">
-              <a:lnSpc>
-                <a:spcPct val="105000"/>
-              </a:lnSpc>
               <a:spcAft>
-                <a:spcPts val="1200"/>
+                <a:spcPts val="1100"/>
               </a:spcAft>
               <a:buSzPct val="100000"/>
               <a:buChar char="•"/>
             </a:pPr>
             <a:r>
-              <a:rPr lang="en-US" sz="2000" dirty="0">
+              <a:rPr lang="en-US" sz="1800" dirty="0">
                 <a:solidFill>
                   <a:srgbClr val="1F2933"/>
                 </a:solidFill>
@@ -17909,23 +17979,20 @@
                 <a:ea typeface="Calibri" pitchFamily="34" charset="-122"/>
                 <a:cs typeface="Calibri" pitchFamily="34" charset="-120"/>
               </a:rPr>
-              <a:t>CurveAlign — LOCI, University of Wisconsin–Madison</a:t>
-            </a:r>
-            <a:endParaRPr lang="en-US" sz="2000" dirty="0"/>
+              <a:t>Morphometrics: coverage, length, branching, fractal dimension, gaps</a:t>
+            </a:r>
+            <a:endParaRPr lang="en-US" sz="1800" dirty="0"/>
           </a:p>
           <a:p>
             <a:pPr marL="342900" indent="-342900">
-              <a:lnSpc>
-                <a:spcPct val="105000"/>
-              </a:lnSpc>
               <a:spcAft>
-                <a:spcPts val="1200"/>
+                <a:spcPts val="1100"/>
               </a:spcAft>
               <a:buSzPct val="100000"/>
               <a:buChar char="•"/>
             </a:pPr>
             <a:r>
-              <a:rPr lang="en-US" sz="2000" dirty="0">
+              <a:rPr lang="en-US" sz="1800" dirty="0">
                 <a:solidFill>
                   <a:srgbClr val="1F2933"/>
                 </a:solidFill>
@@ -17933,23 +18000,101 @@
                 <a:ea typeface="Calibri" pitchFamily="34" charset="-122"/>
                 <a:cs typeface="Calibri" pitchFamily="34" charset="-120"/>
               </a:rPr>
-              <a:t>TACS — Conklin et al. 2011; Provenzano et al. 2008, BMC Medicine 6:11</a:t>
+              <a:t>Texture: the information fibre-tracing misses entirely</a:t>
+            </a:r>
+            <a:endParaRPr lang="en-US" sz="1800" dirty="0"/>
+          </a:p>
+        </p:txBody>
+      </p:sp>
+      <p:sp>
+        <p:nvSpPr>
+          <p:cNvPr id="7" name="Shape 5"/>
+          <p:cNvSpPr/>
+          <p:nvPr/>
+        </p:nvSpPr>
+        <p:spPr>
+          <a:xfrm>
+            <a:off x="6323076" y="1554480"/>
+            <a:ext cx="5298948" cy="530352"/>
+          </a:xfrm>
+          <a:prstGeom prst="rect">
+            <a:avLst/>
+          </a:prstGeom>
+          <a:solidFill>
+            <a:srgbClr val="E8F0FA"/>
+          </a:solidFill>
+          <a:ln/>
+        </p:spPr>
+      </p:sp>
+      <p:sp>
+        <p:nvSpPr>
+          <p:cNvPr id="8" name="Text 6"/>
+          <p:cNvSpPr/>
+          <p:nvPr/>
+        </p:nvSpPr>
+        <p:spPr>
+          <a:xfrm>
+            <a:off x="6487668" y="1554480"/>
+            <a:ext cx="4969764" cy="530352"/>
+          </a:xfrm>
+          <a:prstGeom prst="rect">
+            <a:avLst/>
+          </a:prstGeom>
+          <a:noFill/>
+          <a:ln/>
+        </p:spPr>
+        <p:txBody>
+          <a:bodyPr wrap="square" rtlCol="0" anchor="ctr"/>
+          <a:lstStyle/>
+          <a:p>
+            <a:pPr indent="0" marL="0">
+              <a:buNone/>
+            </a:pPr>
+            <a:r>
+              <a:rPr lang="en-US" sz="2000" b="1" dirty="0">
+                <a:solidFill>
+                  <a:srgbClr val="B26A00"/>
+                </a:solidFill>
+                <a:latin typeface="Trebuchet MS" pitchFamily="34" charset="0"/>
+                <a:ea typeface="Trebuchet MS" pitchFamily="34" charset="-122"/>
+                <a:cs typeface="Trebuchet MS" pitchFamily="34" charset="-120"/>
+              </a:rPr>
+              <a:t>TME-Quant — trace the fibres</a:t>
             </a:r>
             <a:endParaRPr lang="en-US" sz="2000" dirty="0"/>
           </a:p>
+        </p:txBody>
+      </p:sp>
+      <p:sp>
+        <p:nvSpPr>
+          <p:cNvPr id="9" name="Text 7"/>
+          <p:cNvSpPr/>
+          <p:nvPr/>
+        </p:nvSpPr>
+        <p:spPr>
+          <a:xfrm>
+            <a:off x="6414516" y="2240280"/>
+            <a:ext cx="5116068" cy="3566160"/>
+          </a:xfrm>
+          <a:prstGeom prst="rect">
+            <a:avLst/>
+          </a:prstGeom>
+          <a:noFill/>
+          <a:ln/>
+        </p:spPr>
+        <p:txBody>
+          <a:bodyPr wrap="square" rtlCol="0" anchor="t"/>
+          <a:lstStyle/>
           <a:p>
             <a:pPr marL="342900" indent="-342900">
-              <a:lnSpc>
-                <a:spcPct val="105000"/>
-              </a:lnSpc>
               <a:spcAft>
-                <a:spcPts val="1200"/>
+                <a:spcPts val="1100"/>
               </a:spcAft>
               <a:buSzPct val="100000"/>
               <a:buChar char="•"/>
             </a:pPr>
             <a:r>
-              <a:rPr lang="en-US" sz="2000" dirty="0">
+              <a:rPr lang="en-US" sz="1800" dirty="0">
                 <a:solidFill>
                   <a:srgbClr val="1F2933"/>
                 </a:solidFill>
@@ -17957,15 +18102,78 @@
                 <a:ea typeface="Calibri" pitchFamily="34" charset="-122"/>
                 <a:cs typeface="Calibri" pitchFamily="34" charset="-120"/>
               </a:rPr>
-              <a:t>TWOMBLI — Wershof et al. 2021, Life Science Alliance 4(3)</a:t>
-            </a:r>
-            <a:endParaRPr lang="en-US" sz="2000" dirty="0"/>
-          </a:p>
-        </p:txBody>
-      </p:sp>
-      <p:sp>
-        <p:nvSpPr>
-          <p:cNvPr id="5" name="Text 3"/>
+              <a:t>Individual fibres extracted and committed back as objects</a:t>
+            </a:r>
+            <a:endParaRPr lang="en-US" sz="1800" dirty="0"/>
+          </a:p>
+          <a:p>
+            <a:pPr marL="342900" indent="-342900">
+              <a:spcAft>
+                <a:spcPts val="1100"/>
+              </a:spcAft>
+              <a:buSzPct val="100000"/>
+              <a:buChar char="•"/>
+            </a:pPr>
+            <a:r>
+              <a:rPr lang="en-US" sz="1800" dirty="0">
+                <a:solidFill>
+                  <a:srgbClr val="1F2933"/>
+                </a:solidFill>
+                <a:latin typeface="Calibri" pitchFamily="34" charset="0"/>
+                <a:ea typeface="Calibri" pitchFamily="34" charset="-122"/>
+                <a:cs typeface="Calibri" pitchFamily="34" charset="-120"/>
+              </a:rPr>
+              <a:t>Set the threshold by eye, with the mask shown before you commit</a:t>
+            </a:r>
+            <a:endParaRPr lang="en-US" sz="1800" dirty="0"/>
+          </a:p>
+          <a:p>
+            <a:pPr marL="342900" indent="-342900">
+              <a:spcAft>
+                <a:spcPts val="1100"/>
+              </a:spcAft>
+              <a:buSzPct val="100000"/>
+              <a:buChar char="•"/>
+            </a:pPr>
+            <a:r>
+              <a:rPr lang="en-US" sz="1800" dirty="0">
+                <a:solidFill>
+                  <a:srgbClr val="1F2933"/>
+                </a:solidFill>
+                <a:latin typeface="Calibri" pitchFamily="34" charset="0"/>
+                <a:ea typeface="Calibri" pitchFamily="34" charset="-122"/>
+                <a:cs typeface="Calibri" pitchFamily="34" charset="-120"/>
+              </a:rPr>
+              <a:t>Trace a few real fibres yourself, and it tunes its own parameters to match</a:t>
+            </a:r>
+            <a:endParaRPr lang="en-US" sz="1800" dirty="0"/>
+          </a:p>
+          <a:p>
+            <a:pPr marL="342900" indent="-342900">
+              <a:spcAft>
+                <a:spcPts val="1100"/>
+              </a:spcAft>
+              <a:buSzPct val="100000"/>
+              <a:buChar char="•"/>
+            </a:pPr>
+            <a:r>
+              <a:rPr lang="en-US" sz="1800" dirty="0">
+                <a:solidFill>
+                  <a:srgbClr val="1F2933"/>
+                </a:solidFill>
+                <a:latin typeface="Calibri" pitchFamily="34" charset="0"/>
+                <a:ea typeface="Calibri" pitchFamily="34" charset="-122"/>
+                <a:cs typeface="Calibri" pitchFamily="34" charset="-120"/>
+              </a:rPr>
+              <a:t>Fibres classified by orientation relative to a tumour boundary</a:t>
+            </a:r>
+            <a:endParaRPr lang="en-US" sz="1800" dirty="0"/>
+          </a:p>
+        </p:txBody>
+      </p:sp>
+      <p:sp>
+        <p:nvSpPr>
+          <p:cNvPr id="10" name="Text 8"/>
           <p:cNvSpPr/>
           <p:nvPr/>
         </p:nvSpPr>
@@ -18036,23 +18244,42 @@
       </p:grpSpPr>
       <p:sp>
         <p:nvSpPr>
-          <p:cNvPr id="2" name="Shape 0"/>
-          <p:cNvSpPr/>
-          <p:nvPr/>
-        </p:nvSpPr>
-        <p:spPr>
-          <a:xfrm>
-            <a:off x="0" y="1417320"/>
-            <a:ext cx="12188952" cy="3108960"/>
-          </a:xfrm>
-          <a:prstGeom prst="rect">
-            <a:avLst/>
-          </a:prstGeom>
-          <a:solidFill>
-            <a:srgbClr val="E8F0FA"/>
-          </a:solidFill>
-          <a:ln/>
-        </p:spPr>
+          <p:cNvPr id="2" name="Text 0"/>
+          <p:cNvSpPr/>
+          <p:nvPr/>
+        </p:nvSpPr>
+        <p:spPr>
+          <a:xfrm>
+            <a:off x="566928" y="384048"/>
+            <a:ext cx="11055096" cy="658368"/>
+          </a:xfrm>
+          <a:prstGeom prst="rect">
+            <a:avLst/>
+          </a:prstGeom>
+          <a:noFill/>
+          <a:ln/>
+        </p:spPr>
+        <p:txBody>
+          <a:bodyPr wrap="square" rtlCol="0" anchor="ctr"/>
+          <a:lstStyle/>
+          <a:p>
+            <a:pPr indent="0" marL="0">
+              <a:buNone/>
+            </a:pPr>
+            <a:r>
+              <a:rPr lang="en-US" sz="3000" b="1" dirty="0">
+                <a:solidFill>
+                  <a:srgbClr val="1F4C86"/>
+                </a:solidFill>
+                <a:latin typeface="Trebuchet MS" pitchFamily="34" charset="0"/>
+                <a:ea typeface="Trebuchet MS" pitchFamily="34" charset="-122"/>
+                <a:cs typeface="Trebuchet MS" pitchFamily="34" charset="-120"/>
+              </a:rPr>
+              <a:t>A dense mat and a sparse clump</a:t>
+            </a:r>
+            <a:endParaRPr lang="en-US" sz="3000" dirty="0"/>
+          </a:p>
+        </p:txBody>
       </p:sp>
       <p:sp>
         <p:nvSpPr>
@@ -18062,8 +18289,8 @@
         </p:nvSpPr>
         <p:spPr>
           <a:xfrm>
-            <a:off x="0" y="1417320"/>
-            <a:ext cx="201168" cy="3108960"/>
+            <a:off x="566928" y="1097280"/>
+            <a:ext cx="1920240" cy="50292"/>
           </a:xfrm>
           <a:prstGeom prst="rect">
             <a:avLst/>
@@ -18082,8 +18309,127 @@
         </p:nvSpPr>
         <p:spPr>
           <a:xfrm>
-            <a:off x="566928" y="1691640"/>
-            <a:ext cx="1828800" cy="914400"/>
+            <a:off x="640080" y="1481328"/>
+            <a:ext cx="10963656" cy="4553712"/>
+          </a:xfrm>
+          <a:prstGeom prst="rect">
+            <a:avLst/>
+          </a:prstGeom>
+          <a:noFill/>
+          <a:ln/>
+        </p:spPr>
+        <p:txBody>
+          <a:bodyPr wrap="square" rtlCol="0" anchor="t"/>
+          <a:lstStyle/>
+          <a:p>
+            <a:pPr marL="342900" indent="-342900">
+              <a:lnSpc>
+                <a:spcPct val="105000"/>
+              </a:lnSpc>
+              <a:spcAft>
+                <a:spcPts val="1200"/>
+              </a:spcAft>
+              <a:buSzPct val="100000"/>
+              <a:buChar char="•"/>
+            </a:pPr>
+            <a:r>
+              <a:rPr lang="en-US" sz="2000" dirty="0">
+                <a:solidFill>
+                  <a:srgbClr val="1F2933"/>
+                </a:solidFill>
+                <a:latin typeface="Calibri" pitchFamily="34" charset="0"/>
+                <a:ea typeface="Calibri" pitchFamily="34" charset="-122"/>
+                <a:cs typeface="Calibri" pitchFamily="34" charset="-120"/>
+              </a:rPr>
+              <a:t>Two fields can share the same mean fibre alignment and be completely different tissue</a:t>
+            </a:r>
+            <a:endParaRPr lang="en-US" sz="2000" dirty="0"/>
+          </a:p>
+          <a:p>
+            <a:pPr marL="342900" indent="-342900">
+              <a:lnSpc>
+                <a:spcPct val="105000"/>
+              </a:lnSpc>
+              <a:spcAft>
+                <a:spcPts val="1200"/>
+              </a:spcAft>
+              <a:buSzPct val="100000"/>
+              <a:buChar char="•"/>
+            </a:pPr>
+            <a:r>
+              <a:rPr lang="en-US" sz="2000" dirty="0">
+                <a:solidFill>
+                  <a:srgbClr val="1F2933"/>
+                </a:solidFill>
+                <a:latin typeface="Calibri" pitchFamily="34" charset="0"/>
+                <a:ea typeface="Calibri" pitchFamily="34" charset="-122"/>
+                <a:cs typeface="Calibri" pitchFamily="34" charset="-120"/>
+              </a:rPr>
+              <a:t>Texture measures the spatial heterogeneity that alignment averages away</a:t>
+            </a:r>
+            <a:endParaRPr lang="en-US" sz="2000" dirty="0"/>
+          </a:p>
+          <a:p>
+            <a:pPr marL="342900" indent="-342900">
+              <a:lnSpc>
+                <a:spcPct val="105000"/>
+              </a:lnSpc>
+              <a:spcAft>
+                <a:spcPts val="1200"/>
+              </a:spcAft>
+              <a:buSzPct val="100000"/>
+              <a:buChar char="•"/>
+            </a:pPr>
+            <a:r>
+              <a:rPr lang="en-US" sz="2000" dirty="0">
+                <a:solidFill>
+                  <a:srgbClr val="1F2933"/>
+                </a:solidFill>
+                <a:latin typeface="Calibri" pitchFamily="34" charset="0"/>
+                <a:ea typeface="Calibri" pitchFamily="34" charset="-122"/>
+                <a:cs typeface="Calibri" pitchFamily="34" charset="-120"/>
+              </a:rPr>
+              <a:t>Which is why both tools are worth running, on the same region</a:t>
+            </a:r>
+            <a:endParaRPr lang="en-US" sz="2000" dirty="0"/>
+          </a:p>
+        </p:txBody>
+      </p:sp>
+      <p:sp>
+        <p:nvSpPr>
+          <p:cNvPr id="5" name="Shape 3"/>
+          <p:cNvSpPr/>
+          <p:nvPr/>
+        </p:nvSpPr>
+        <p:spPr>
+          <a:xfrm>
+            <a:off x="566928" y="5650992"/>
+            <a:ext cx="11055096" cy="566928"/>
+          </a:xfrm>
+          <a:prstGeom prst="rect">
+            <a:avLst/>
+          </a:prstGeom>
+          <a:solidFill>
+            <a:srgbClr val="F4F8FD"/>
+          </a:solidFill>
+          <a:ln w="9525">
+            <a:solidFill>
+              <a:srgbClr val="3674C1"/>
+            </a:solidFill>
+            <a:prstDash val="solid"/>
+          </a:ln>
+        </p:spPr>
+      </p:sp>
+      <p:sp>
+        <p:nvSpPr>
+          <p:cNvPr id="6" name="Text 4"/>
+          <p:cNvSpPr/>
+          <p:nvPr/>
+        </p:nvSpPr>
+        <p:spPr>
+          <a:xfrm>
+            <a:off x="768096" y="5650992"/>
+            <a:ext cx="10652760" cy="566928"/>
           </a:xfrm>
           <a:prstGeom prst="rect">
             <a:avLst/>
@@ -18099,140 +18445,23 @@
               <a:buNone/>
             </a:pPr>
             <a:r>
-              <a:rPr lang="en-US" sz="5400" b="1" dirty="0">
-                <a:solidFill>
-                  <a:srgbClr val="3674C1"/>
-                </a:solidFill>
-                <a:latin typeface="Trebuchet MS" pitchFamily="34" charset="0"/>
-                <a:ea typeface="Trebuchet MS" pitchFamily="34" charset="-122"/>
-                <a:cs typeface="Trebuchet MS" pitchFamily="34" charset="-120"/>
-              </a:rPr>
-              <a:t>08</a:t>
-            </a:r>
-            <a:endParaRPr lang="en-US" sz="5400" dirty="0"/>
-          </a:p>
-        </p:txBody>
-      </p:sp>
-      <p:sp>
-        <p:nvSpPr>
-          <p:cNvPr id="5" name="Text 3"/>
-          <p:cNvSpPr/>
-          <p:nvPr/>
-        </p:nvSpPr>
-        <p:spPr>
-          <a:xfrm>
-            <a:off x="566928" y="2606040"/>
-            <a:ext cx="11055096" cy="868680"/>
-          </a:xfrm>
-          <a:prstGeom prst="rect">
-            <a:avLst/>
-          </a:prstGeom>
-          <a:noFill/>
-          <a:ln/>
-        </p:spPr>
-        <p:txBody>
-          <a:bodyPr wrap="square" rtlCol="0" anchor="ctr"/>
-          <a:lstStyle/>
-          <a:p>
-            <a:pPr indent="0" marL="0">
-              <a:buNone/>
-            </a:pPr>
-            <a:r>
-              <a:rPr lang="en-US" sz="4000" b="1" dirty="0">
+              <a:rPr lang="en-US" sz="1600" b="1" dirty="0">
                 <a:solidFill>
                   <a:srgbClr val="1F4C86"/>
                 </a:solidFill>
-                <a:latin typeface="Trebuchet MS" pitchFamily="34" charset="0"/>
-                <a:ea typeface="Trebuchet MS" pitchFamily="34" charset="-122"/>
-                <a:cs typeface="Trebuchet MS" pitchFamily="34" charset="-120"/>
-              </a:rPr>
-              <a:t>Microscope control</a:t>
-            </a:r>
-            <a:endParaRPr lang="en-US" sz="4000" dirty="0"/>
-          </a:p>
-        </p:txBody>
-      </p:sp>
-      <p:sp>
-        <p:nvSpPr>
-          <p:cNvPr id="6" name="Text 4"/>
-          <p:cNvSpPr/>
-          <p:nvPr/>
-        </p:nvSpPr>
-        <p:spPr>
-          <a:xfrm>
-            <a:off x="566928" y="3456432"/>
-            <a:ext cx="10140696" cy="731520"/>
-          </a:xfrm>
-          <a:prstGeom prst="rect">
-            <a:avLst/>
-          </a:prstGeom>
-          <a:noFill/>
-          <a:ln/>
-        </p:spPr>
-        <p:txBody>
-          <a:bodyPr wrap="square" rtlCol="0" anchor="t"/>
-          <a:lstStyle/>
-          <a:p>
-            <a:pPr indent="0" marL="0">
-              <a:buNone/>
-            </a:pPr>
-            <a:r>
-              <a:rPr lang="en-US" sz="1900" dirty="0">
-                <a:solidFill>
-                  <a:srgbClr val="5A6675"/>
-                </a:solidFill>
-                <a:latin typeface="Calibri" pitchFamily="34" charset="0"/>
-                <a:ea typeface="Calibri" pitchFamily="34" charset="-122"/>
-                <a:cs typeface="Calibri" pitchFamily="34" charset="-120"/>
-              </a:rPr>
-              <a:t>The most complex thing here, and the reason for the rest</a:t>
-            </a:r>
-            <a:endParaRPr lang="en-US" sz="1900" dirty="0"/>
+                <a:latin typeface="Calibri" pitchFamily="34" charset="0"/>
+                <a:ea typeface="Calibri" pitchFamily="34" charset="-122"/>
+                <a:cs typeface="Calibri" pitchFamily="34" charset="-120"/>
+              </a:rPr>
+              <a:t>Demo only today: one needs a long environment build, the other a dedicated analysis server.</a:t>
+            </a:r>
+            <a:endParaRPr lang="en-US" sz="1600" dirty="0"/>
           </a:p>
         </p:txBody>
       </p:sp>
       <p:sp>
         <p:nvSpPr>
           <p:cNvPr id="7" name="Text 5"/>
-          <p:cNvSpPr/>
-          <p:nvPr/>
-        </p:nvSpPr>
-        <p:spPr>
-          <a:xfrm>
-            <a:off x="566928" y="6199632"/>
-            <a:ext cx="8229600" cy="365760"/>
-          </a:xfrm>
-          <a:prstGeom prst="rect">
-            <a:avLst/>
-          </a:prstGeom>
-          <a:noFill/>
-          <a:ln/>
-        </p:spPr>
-        <p:txBody>
-          <a:bodyPr wrap="square" rtlCol="0" anchor="ctr"/>
-          <a:lstStyle/>
-          <a:p>
-            <a:pPr indent="0" marL="0">
-              <a:buNone/>
-            </a:pPr>
-            <a:r>
-              <a:rPr lang="en-US" sz="1400" dirty="0">
-                <a:solidFill>
-                  <a:srgbClr val="A8B2BF"/>
-                </a:solidFill>
-                <a:latin typeface="Calibri" pitchFamily="34" charset="0"/>
-                <a:ea typeface="Calibri" pitchFamily="34" charset="-122"/>
-                <a:cs typeface="Calibri" pitchFamily="34" charset="-120"/>
-              </a:rPr>
-              <a:t>michaelsnelson.github.io/BINA-I2K-2026-QuPath-Extensions</a:t>
-            </a:r>
-            <a:endParaRPr lang="en-US" sz="1400" dirty="0"/>
-          </a:p>
-        </p:txBody>
-      </p:sp>
-      <p:sp>
-        <p:nvSpPr>
-          <p:cNvPr id="8" name="Text 6"/>
           <p:cNvSpPr/>
           <p:nvPr/>
         </p:nvSpPr>
@@ -18334,7 +18563,7 @@
                 <a:ea typeface="Trebuchet MS" pitchFamily="34" charset="-122"/>
                 <a:cs typeface="Trebuchet MS" pitchFamily="34" charset="-120"/>
               </a:rPr>
-              <a:t>QPSC — QuPath Scope Control</a:t>
+              <a:t>Please cite the methods</a:t>
             </a:r>
             <a:endParaRPr lang="en-US" sz="3000" dirty="0"/>
           </a:p>
@@ -18400,7 +18629,7 @@
                 <a:ea typeface="Calibri" pitchFamily="34" charset="-122"/>
                 <a:cs typeface="Calibri" pitchFamily="34" charset="-120"/>
               </a:rPr>
-              <a:t>Draw a box around a region in QuPath. The stage moves, the tiles are captured and stitched, and the image appears back in your project</a:t>
+              <a:t>Both tools are thin wrappers over other people’s science</a:t>
             </a:r>
             <a:endParaRPr lang="en-US" sz="2000" dirty="0"/>
           </a:p>
@@ -18424,7 +18653,7 @@
                 <a:ea typeface="Calibri" pitchFamily="34" charset="-122"/>
                 <a:cs typeface="Calibri" pitchFamily="34" charset="-120"/>
               </a:rPr>
-              <a:t>Target specific annotations on a slide you already scanned</a:t>
+              <a:t>CT-FIRE — Bredfeldt et al. 2014, Journal of Biomedical Optics 19(1):016007</a:t>
             </a:r>
             <a:endParaRPr lang="en-US" sz="2000" dirty="0"/>
           </a:p>
@@ -18448,7 +18677,7 @@
                 <a:ea typeface="Calibri" pitchFamily="34" charset="-122"/>
                 <a:cs typeface="Calibri" pitchFamily="34" charset="-120"/>
               </a:rPr>
-              <a:t>Live camera view, stage map, saved positions, and a virtual joystick</a:t>
+              <a:t>CurveAlign — LOCI, University of Wisconsin–Madison</a:t>
             </a:r>
             <a:endParaRPr lang="en-US" sz="2000" dirty="0"/>
           </a:p>
@@ -18472,7 +18701,31 @@
                 <a:ea typeface="Calibri" pitchFamily="34" charset="-122"/>
                 <a:cs typeface="Calibri" pitchFamily="34" charset="-120"/>
               </a:rPr>
-              <a:t>Brightfield, multi-channel fluorescence, and combined passes on a single-camera scope</a:t>
+              <a:t>TACS — Conklin et al. 2011; Provenzano et al. 2008, BMC Medicine 6:11</a:t>
+            </a:r>
+            <a:endParaRPr lang="en-US" sz="2000" dirty="0"/>
+          </a:p>
+          <a:p>
+            <a:pPr marL="342900" indent="-342900">
+              <a:lnSpc>
+                <a:spcPct val="105000"/>
+              </a:lnSpc>
+              <a:spcAft>
+                <a:spcPts val="1200"/>
+              </a:spcAft>
+              <a:buSzPct val="100000"/>
+              <a:buChar char="•"/>
+            </a:pPr>
+            <a:r>
+              <a:rPr lang="en-US" sz="2000" dirty="0">
+                <a:solidFill>
+                  <a:srgbClr val="1F2933"/>
+                </a:solidFill>
+                <a:latin typeface="Calibri" pitchFamily="34" charset="0"/>
+                <a:ea typeface="Calibri" pitchFamily="34" charset="-122"/>
+                <a:cs typeface="Calibri" pitchFamily="34" charset="-120"/>
+              </a:rPr>
+              <a:t>TWOMBLI — Wershof et al. 2021, Life Science Alliance 4(3)</a:t>
             </a:r>
             <a:endParaRPr lang="en-US" sz="2000" dirty="0"/>
           </a:p>
@@ -18551,14 +18804,54 @@
       </p:grpSpPr>
       <p:sp>
         <p:nvSpPr>
-          <p:cNvPr id="2" name="Text 0"/>
-          <p:cNvSpPr/>
-          <p:nvPr/>
-        </p:nvSpPr>
-        <p:spPr>
-          <a:xfrm>
-            <a:off x="566928" y="384048"/>
-            <a:ext cx="11055096" cy="658368"/>
+          <p:cNvPr id="2" name="Shape 0"/>
+          <p:cNvSpPr/>
+          <p:nvPr/>
+        </p:nvSpPr>
+        <p:spPr>
+          <a:xfrm>
+            <a:off x="0" y="1417320"/>
+            <a:ext cx="12188952" cy="3108960"/>
+          </a:xfrm>
+          <a:prstGeom prst="rect">
+            <a:avLst/>
+          </a:prstGeom>
+          <a:solidFill>
+            <a:srgbClr val="E8F0FA"/>
+          </a:solidFill>
+          <a:ln/>
+        </p:spPr>
+      </p:sp>
+      <p:sp>
+        <p:nvSpPr>
+          <p:cNvPr id="3" name="Shape 1"/>
+          <p:cNvSpPr/>
+          <p:nvPr/>
+        </p:nvSpPr>
+        <p:spPr>
+          <a:xfrm>
+            <a:off x="0" y="1417320"/>
+            <a:ext cx="201168" cy="3108960"/>
+          </a:xfrm>
+          <a:prstGeom prst="rect">
+            <a:avLst/>
+          </a:prstGeom>
+          <a:solidFill>
+            <a:srgbClr val="3674C1"/>
+          </a:solidFill>
+          <a:ln/>
+        </p:spPr>
+      </p:sp>
+      <p:sp>
+        <p:nvSpPr>
+          <p:cNvPr id="4" name="Text 2"/>
+          <p:cNvSpPr/>
+          <p:nvPr/>
+        </p:nvSpPr>
+        <p:spPr>
+          <a:xfrm>
+            <a:off x="566928" y="1691640"/>
+            <a:ext cx="1828800" cy="914400"/>
           </a:xfrm>
           <a:prstGeom prst="rect">
             <a:avLst/>
@@ -18574,169 +18867,30 @@
               <a:buNone/>
             </a:pPr>
             <a:r>
-              <a:rPr lang="en-US" sz="3000" b="1" dirty="0">
-                <a:solidFill>
-                  <a:srgbClr val="1F4C86"/>
+              <a:rPr lang="en-US" sz="5400" b="1" dirty="0">
+                <a:solidFill>
+                  <a:srgbClr val="3674C1"/>
                 </a:solidFill>
                 <a:latin typeface="Trebuchet MS" pitchFamily="34" charset="0"/>
                 <a:ea typeface="Trebuchet MS" pitchFamily="34" charset="-122"/>
                 <a:cs typeface="Trebuchet MS" pitchFamily="34" charset="-120"/>
               </a:rPr>
-              <a:t>Why this changes the rest</a:t>
-            </a:r>
-            <a:endParaRPr lang="en-US" sz="3000" dirty="0"/>
-          </a:p>
-        </p:txBody>
-      </p:sp>
-      <p:sp>
-        <p:nvSpPr>
-          <p:cNvPr id="3" name="Shape 1"/>
-          <p:cNvSpPr/>
-          <p:nvPr/>
-        </p:nvSpPr>
-        <p:spPr>
-          <a:xfrm>
-            <a:off x="566928" y="1097280"/>
-            <a:ext cx="1920240" cy="50292"/>
-          </a:xfrm>
-          <a:prstGeom prst="rect">
-            <a:avLst/>
-          </a:prstGeom>
-          <a:solidFill>
-            <a:srgbClr val="3674C1"/>
-          </a:solidFill>
-          <a:ln/>
-        </p:spPr>
-      </p:sp>
-      <p:sp>
-        <p:nvSpPr>
-          <p:cNvPr id="4" name="Text 2"/>
-          <p:cNvSpPr/>
-          <p:nvPr/>
-        </p:nvSpPr>
-        <p:spPr>
-          <a:xfrm>
-            <a:off x="640080" y="1481328"/>
-            <a:ext cx="10963656" cy="4553712"/>
-          </a:xfrm>
-          <a:prstGeom prst="rect">
-            <a:avLst/>
-          </a:prstGeom>
-          <a:noFill/>
-          <a:ln/>
-        </p:spPr>
-        <p:txBody>
-          <a:bodyPr wrap="square" rtlCol="0" anchor="t"/>
-          <a:lstStyle/>
-          <a:p>
-            <a:pPr marL="342900" indent="-342900">
-              <a:lnSpc>
-                <a:spcPct val="105000"/>
-              </a:lnSpc>
-              <a:spcAft>
-                <a:spcPts val="1200"/>
-              </a:spcAft>
-              <a:buSzPct val="100000"/>
-              <a:buChar char="•"/>
-            </a:pPr>
-            <a:r>
-              <a:rPr lang="en-US" sz="2000" dirty="0">
-                <a:solidFill>
-                  <a:srgbClr val="1F2933"/>
-                </a:solidFill>
-                <a:latin typeface="Calibri" pitchFamily="34" charset="0"/>
-                <a:ea typeface="Calibri" pitchFamily="34" charset="-122"/>
-                <a:cs typeface="Calibri" pitchFamily="34" charset="-120"/>
-              </a:rPr>
-              <a:t>The region you analysed is the region you acquire at high resolution</a:t>
-            </a:r>
-            <a:endParaRPr lang="en-US" sz="2000" dirty="0"/>
-          </a:p>
-          <a:p>
-            <a:pPr marL="342900" indent="-342900">
-              <a:lnSpc>
-                <a:spcPct val="105000"/>
-              </a:lnSpc>
-              <a:spcAft>
-                <a:spcPts val="1200"/>
-              </a:spcAft>
-              <a:buSzPct val="100000"/>
-              <a:buChar char="•"/>
-            </a:pPr>
-            <a:r>
-              <a:rPr lang="en-US" sz="2000" dirty="0">
-                <a:solidFill>
-                  <a:srgbClr val="1F2933"/>
-                </a:solidFill>
-                <a:latin typeface="Calibri" pitchFamily="34" charset="0"/>
-                <a:ea typeface="Calibri" pitchFamily="34" charset="-122"/>
-                <a:cs typeface="Calibri" pitchFamily="34" charset="-120"/>
-              </a:rPr>
-              <a:t>Acquisition metadata arrives in the project, not in a folder that gets separated from the images</a:t>
-            </a:r>
-            <a:endParaRPr lang="en-US" sz="2000" dirty="0"/>
-          </a:p>
-          <a:p>
-            <a:pPr marL="342900" indent="-342900">
-              <a:lnSpc>
-                <a:spcPct val="105000"/>
-              </a:lnSpc>
-              <a:spcAft>
-                <a:spcPts val="1200"/>
-              </a:spcAft>
-              <a:buSzPct val="100000"/>
-              <a:buChar char="•"/>
-            </a:pPr>
-            <a:r>
-              <a:rPr lang="en-US" sz="2000" dirty="0">
-                <a:solidFill>
-                  <a:srgbClr val="1F2933"/>
-                </a:solidFill>
-                <a:latin typeface="Calibri" pitchFamily="34" charset="0"/>
-                <a:ea typeface="Calibri" pitchFamily="34" charset="-122"/>
-                <a:cs typeface="Calibri" pitchFamily="34" charset="-120"/>
-              </a:rPr>
-              <a:t>Stitching is a step in this pipeline — and it works perfectly well on its own, which is why it is in your hands-on hour</a:t>
-            </a:r>
-            <a:endParaRPr lang="en-US" sz="2000" dirty="0"/>
-          </a:p>
-        </p:txBody>
-      </p:sp>
-      <p:sp>
-        <p:nvSpPr>
-          <p:cNvPr id="5" name="Shape 3"/>
-          <p:cNvSpPr/>
-          <p:nvPr/>
-        </p:nvSpPr>
-        <p:spPr>
-          <a:xfrm>
-            <a:off x="566928" y="5650992"/>
-            <a:ext cx="11055096" cy="566928"/>
-          </a:xfrm>
-          <a:prstGeom prst="rect">
-            <a:avLst/>
-          </a:prstGeom>
-          <a:solidFill>
-            <a:srgbClr val="F4F8FD"/>
-          </a:solidFill>
-          <a:ln w="9525">
-            <a:solidFill>
-              <a:srgbClr val="3674C1"/>
-            </a:solidFill>
-            <a:prstDash val="solid"/>
-          </a:ln>
-        </p:spPr>
-      </p:sp>
-      <p:sp>
-        <p:nvSpPr>
-          <p:cNvPr id="6" name="Text 4"/>
-          <p:cNvSpPr/>
-          <p:nvPr/>
-        </p:nvSpPr>
-        <p:spPr>
-          <a:xfrm>
-            <a:off x="768096" y="5650992"/>
-            <a:ext cx="10652760" cy="566928"/>
+              <a:t>08</a:t>
+            </a:r>
+            <a:endParaRPr lang="en-US" sz="5400" dirty="0"/>
+          </a:p>
+        </p:txBody>
+      </p:sp>
+      <p:sp>
+        <p:nvSpPr>
+          <p:cNvPr id="5" name="Text 3"/>
+          <p:cNvSpPr/>
+          <p:nvPr/>
+        </p:nvSpPr>
+        <p:spPr>
+          <a:xfrm>
+            <a:off x="566928" y="2606040"/>
+            <a:ext cx="11055096" cy="868680"/>
           </a:xfrm>
           <a:prstGeom prst="rect">
             <a:avLst/>
@@ -18752,23 +18906,101 @@
               <a:buNone/>
             </a:pPr>
             <a:r>
-              <a:rPr lang="en-US" sz="1600" b="1" dirty="0">
+              <a:rPr lang="en-US" sz="4000" b="1" dirty="0">
                 <a:solidFill>
                   <a:srgbClr val="1F4C86"/>
                 </a:solidFill>
-                <a:latin typeface="Calibri" pitchFamily="34" charset="0"/>
-                <a:ea typeface="Calibri" pitchFamily="34" charset="-122"/>
-                <a:cs typeface="Calibri" pitchFamily="34" charset="-120"/>
-              </a:rPr>
-              <a:t>Once acquisition is driven from QuPath, "acquisition software" and "analysis software" stop being separate places your data lives.</a:t>
-            </a:r>
-            <a:endParaRPr lang="en-US" sz="1600" dirty="0"/>
+                <a:latin typeface="Trebuchet MS" pitchFamily="34" charset="0"/>
+                <a:ea typeface="Trebuchet MS" pitchFamily="34" charset="-122"/>
+                <a:cs typeface="Trebuchet MS" pitchFamily="34" charset="-120"/>
+              </a:rPr>
+              <a:t>Microscope control</a:t>
+            </a:r>
+            <a:endParaRPr lang="en-US" sz="4000" dirty="0"/>
+          </a:p>
+        </p:txBody>
+      </p:sp>
+      <p:sp>
+        <p:nvSpPr>
+          <p:cNvPr id="6" name="Text 4"/>
+          <p:cNvSpPr/>
+          <p:nvPr/>
+        </p:nvSpPr>
+        <p:spPr>
+          <a:xfrm>
+            <a:off x="566928" y="3456432"/>
+            <a:ext cx="10140696" cy="731520"/>
+          </a:xfrm>
+          <a:prstGeom prst="rect">
+            <a:avLst/>
+          </a:prstGeom>
+          <a:noFill/>
+          <a:ln/>
+        </p:spPr>
+        <p:txBody>
+          <a:bodyPr wrap="square" rtlCol="0" anchor="t"/>
+          <a:lstStyle/>
+          <a:p>
+            <a:pPr indent="0" marL="0">
+              <a:buNone/>
+            </a:pPr>
+            <a:r>
+              <a:rPr lang="en-US" sz="1900" dirty="0">
+                <a:solidFill>
+                  <a:srgbClr val="5A6675"/>
+                </a:solidFill>
+                <a:latin typeface="Calibri" pitchFamily="34" charset="0"/>
+                <a:ea typeface="Calibri" pitchFamily="34" charset="-122"/>
+                <a:cs typeface="Calibri" pitchFamily="34" charset="-120"/>
+              </a:rPr>
+              <a:t>The most complex thing here, and the reason for the rest</a:t>
+            </a:r>
+            <a:endParaRPr lang="en-US" sz="1900" dirty="0"/>
           </a:p>
         </p:txBody>
       </p:sp>
       <p:sp>
         <p:nvSpPr>
           <p:cNvPr id="7" name="Text 5"/>
+          <p:cNvSpPr/>
+          <p:nvPr/>
+        </p:nvSpPr>
+        <p:spPr>
+          <a:xfrm>
+            <a:off x="566928" y="6199632"/>
+            <a:ext cx="8229600" cy="365760"/>
+          </a:xfrm>
+          <a:prstGeom prst="rect">
+            <a:avLst/>
+          </a:prstGeom>
+          <a:noFill/>
+          <a:ln/>
+        </p:spPr>
+        <p:txBody>
+          <a:bodyPr wrap="square" rtlCol="0" anchor="ctr"/>
+          <a:lstStyle/>
+          <a:p>
+            <a:pPr indent="0" marL="0">
+              <a:buNone/>
+            </a:pPr>
+            <a:r>
+              <a:rPr lang="en-US" sz="1400" dirty="0">
+                <a:solidFill>
+                  <a:srgbClr val="A8B2BF"/>
+                </a:solidFill>
+                <a:latin typeface="Calibri" pitchFamily="34" charset="0"/>
+                <a:ea typeface="Calibri" pitchFamily="34" charset="-122"/>
+                <a:cs typeface="Calibri" pitchFamily="34" charset="-120"/>
+              </a:rPr>
+              <a:t>michaelsnelson.github.io/BINA-I2K-2026-QuPath-Extensions</a:t>
+            </a:r>
+            <a:endParaRPr lang="en-US" sz="1400" dirty="0"/>
+          </a:p>
+        </p:txBody>
+      </p:sp>
+      <p:sp>
+        <p:nvSpPr>
+          <p:cNvPr id="8" name="Text 6"/>
           <p:cNvSpPr/>
           <p:nvPr/>
         </p:nvSpPr>
@@ -18870,7 +19102,7 @@
                 <a:ea typeface="Trebuchet MS" pitchFamily="34" charset="-122"/>
                 <a:cs typeface="Trebuchet MS" pitchFamily="34" charset="-120"/>
               </a:rPr>
-              <a:t>How it is put together</a:t>
+              <a:t>QPSC — QuPath Scope Control</a:t>
             </a:r>
             <a:endParaRPr lang="en-US" sz="3000" dirty="0"/>
           </a:p>
@@ -18904,47 +19136,8 @@
         </p:nvSpPr>
         <p:spPr>
           <a:xfrm>
-            <a:off x="566928" y="1243584"/>
-            <a:ext cx="11055096" cy="384048"/>
-          </a:xfrm>
-          <a:prstGeom prst="rect">
-            <a:avLst/>
-          </a:prstGeom>
-          <a:noFill/>
-          <a:ln/>
-        </p:spPr>
-        <p:txBody>
-          <a:bodyPr wrap="square" rtlCol="0" anchor="ctr"/>
-          <a:lstStyle/>
-          <a:p>
-            <a:pPr indent="0" marL="0">
-              <a:buNone/>
-            </a:pPr>
-            <a:r>
-              <a:rPr lang="en-US" sz="1700" i="1" dirty="0">
-                <a:solidFill>
-                  <a:srgbClr val="5A6675"/>
-                </a:solidFill>
-                <a:latin typeface="Calibri" pitchFamily="34" charset="0"/>
-                <a:ea typeface="Calibri" pitchFamily="34" charset="-122"/>
-                <a:cs typeface="Calibri" pitchFamily="34" charset="-120"/>
-              </a:rPr>
-              <a:t>The easy part is the QuPath extension. Budget your time for the microscope side.</a:t>
-            </a:r>
-            <a:endParaRPr lang="en-US" sz="1700" dirty="0"/>
-          </a:p>
-        </p:txBody>
-      </p:sp>
-      <p:sp>
-        <p:nvSpPr>
-          <p:cNvPr id="5" name="Text 3"/>
-          <p:cNvSpPr/>
-          <p:nvPr/>
-        </p:nvSpPr>
-        <p:spPr>
-          <a:xfrm>
-            <a:off x="640080" y="1755648"/>
-            <a:ext cx="10963656" cy="4279392"/>
+            <a:off x="640080" y="1481328"/>
+            <a:ext cx="10963656" cy="4553712"/>
           </a:xfrm>
           <a:prstGeom prst="rect">
             <a:avLst/>
@@ -18975,7 +19168,7 @@
                 <a:ea typeface="Calibri" pitchFamily="34" charset="-122"/>
                 <a:cs typeface="Calibri" pitchFamily="34" charset="-120"/>
               </a:rPr>
-              <a:t>QuPath talks to a small command server, which drives Micro-Manager, which drives the hardware</a:t>
+              <a:t>Draw a box around a region in QuPath. The stage moves, the tiles are captured and stitched, and the image appears back in your project</a:t>
             </a:r>
             <a:endParaRPr lang="en-US" sz="2000" dirty="0"/>
           </a:p>
@@ -18999,7 +19192,7 @@
                 <a:ea typeface="Calibri" pitchFamily="34" charset="-122"/>
                 <a:cs typeface="Calibri" pitchFamily="34" charset="-120"/>
               </a:rPr>
-              <a:t>Each instrument is described by its own configuration — the QuPath side does not know what kind of microscope it is</a:t>
+              <a:t>Target specific annotations on a slide you already scanned</a:t>
             </a:r>
             <a:endParaRPr lang="en-US" sz="2000" dirty="0"/>
           </a:p>
@@ -19023,15 +19216,39 @@
                 <a:ea typeface="Calibri" pitchFamily="34" charset="-122"/>
                 <a:cs typeface="Calibri" pitchFamily="34" charset="-120"/>
               </a:rPr>
-              <a:t>Micro-Manager remains the device layer. We did not reinvent it</a:t>
+              <a:t>Live camera view, stage map, saved positions, and a virtual joystick</a:t>
             </a:r>
             <a:endParaRPr lang="en-US" sz="2000" dirty="0"/>
           </a:p>
-        </p:txBody>
-      </p:sp>
-      <p:sp>
-        <p:nvSpPr>
-          <p:cNvPr id="6" name="Text 4"/>
+          <a:p>
+            <a:pPr marL="342900" indent="-342900">
+              <a:lnSpc>
+                <a:spcPct val="105000"/>
+              </a:lnSpc>
+              <a:spcAft>
+                <a:spcPts val="1200"/>
+              </a:spcAft>
+              <a:buSzPct val="100000"/>
+              <a:buChar char="•"/>
+            </a:pPr>
+            <a:r>
+              <a:rPr lang="en-US" sz="2000" dirty="0">
+                <a:solidFill>
+                  <a:srgbClr val="1F2933"/>
+                </a:solidFill>
+                <a:latin typeface="Calibri" pitchFamily="34" charset="0"/>
+                <a:ea typeface="Calibri" pitchFamily="34" charset="-122"/>
+                <a:cs typeface="Calibri" pitchFamily="34" charset="-120"/>
+              </a:rPr>
+              <a:t>Brightfield, multi-channel fluorescence, and combined passes on a single-camera scope</a:t>
+            </a:r>
+            <a:endParaRPr lang="en-US" sz="2000" dirty="0"/>
+          </a:p>
+        </p:txBody>
+      </p:sp>
+      <p:sp>
+        <p:nvSpPr>
+          <p:cNvPr id="5" name="Text 3"/>
           <p:cNvSpPr/>
           <p:nvPr/>
         </p:nvSpPr>
@@ -19102,41 +19319,14 @@
       </p:grpSpPr>
       <p:sp>
         <p:nvSpPr>
-          <p:cNvPr id="2" name="Shape 0"/>
-          <p:cNvSpPr/>
-          <p:nvPr/>
-        </p:nvSpPr>
-        <p:spPr>
-          <a:xfrm>
-            <a:off x="566928" y="411480"/>
-            <a:ext cx="2331720" cy="457200"/>
-          </a:xfrm>
-          <a:prstGeom prst="roundRect">
-            <a:avLst>
-              <a:gd name="adj" fmla="val 20000"/>
-            </a:avLst>
-          </a:prstGeom>
-          <a:solidFill>
-            <a:srgbClr val="FBF1E0"/>
-          </a:solidFill>
-          <a:ln w="12700">
-            <a:solidFill>
-              <a:srgbClr val="B26A00"/>
-            </a:solidFill>
-            <a:prstDash val="solid"/>
-          </a:ln>
-        </p:spPr>
-      </p:sp>
-      <p:sp>
-        <p:nvSpPr>
-          <p:cNvPr id="3" name="Text 1"/>
-          <p:cNvSpPr/>
-          <p:nvPr/>
-        </p:nvSpPr>
-        <p:spPr>
-          <a:xfrm>
-            <a:off x="566928" y="411480"/>
-            <a:ext cx="2331720" cy="457200"/>
+          <p:cNvPr id="2" name="Text 0"/>
+          <p:cNvSpPr/>
+          <p:nvPr/>
+        </p:nvSpPr>
+        <p:spPr>
+          <a:xfrm>
+            <a:off x="566928" y="384048"/>
+            <a:ext cx="11055096" cy="658368"/>
           </a:xfrm>
           <a:prstGeom prst="rect">
             <a:avLst/>
@@ -19148,72 +19338,33 @@
           <a:bodyPr wrap="square" rtlCol="0" anchor="ctr"/>
           <a:lstStyle/>
           <a:p>
-            <a:pPr algn="ctr" indent="0" marL="0">
+            <a:pPr indent="0" marL="0">
               <a:buNone/>
             </a:pPr>
             <a:r>
-              <a:rPr lang="en-US" sz="1600" b="1" dirty="0">
-                <a:solidFill>
-                  <a:srgbClr val="B26A00"/>
+              <a:rPr lang="en-US" sz="3000" b="1" dirty="0">
+                <a:solidFill>
+                  <a:srgbClr val="1F4C86"/>
                 </a:solidFill>
                 <a:latin typeface="Trebuchet MS" pitchFamily="34" charset="0"/>
                 <a:ea typeface="Trebuchet MS" pitchFamily="34" charset="-122"/>
                 <a:cs typeface="Trebuchet MS" pitchFamily="34" charset="-120"/>
               </a:rPr>
-              <a:t>▶  SHOWN  ·  NOT YOURS TO RUN</a:t>
-            </a:r>
-            <a:endParaRPr lang="en-US" sz="1600" dirty="0"/>
-          </a:p>
-        </p:txBody>
-      </p:sp>
-      <p:sp>
-        <p:nvSpPr>
-          <p:cNvPr id="4" name="Text 2"/>
-          <p:cNvSpPr/>
-          <p:nvPr/>
-        </p:nvSpPr>
-        <p:spPr>
-          <a:xfrm>
-            <a:off x="566928" y="1024128"/>
-            <a:ext cx="11055096" cy="685800"/>
-          </a:xfrm>
-          <a:prstGeom prst="rect">
-            <a:avLst/>
-          </a:prstGeom>
-          <a:noFill/>
-          <a:ln/>
-        </p:spPr>
-        <p:txBody>
-          <a:bodyPr wrap="square" rtlCol="0" anchor="ctr"/>
-          <a:lstStyle/>
-          <a:p>
-            <a:pPr indent="0" marL="0">
-              <a:buNone/>
-            </a:pPr>
-            <a:r>
-              <a:rPr lang="en-US" sz="3200" b="1" dirty="0">
-                <a:solidFill>
-                  <a:srgbClr val="1F4C86"/>
-                </a:solidFill>
-                <a:latin typeface="Trebuchet MS" pitchFamily="34" charset="0"/>
-                <a:ea typeface="Trebuchet MS" pitchFamily="34" charset="-122"/>
-                <a:cs typeface="Trebuchet MS" pitchFamily="34" charset="-120"/>
-              </a:rPr>
-              <a:t>Acquisition, live</a:t>
-            </a:r>
-            <a:endParaRPr lang="en-US" sz="3200" dirty="0"/>
-          </a:p>
-        </p:txBody>
-      </p:sp>
-      <p:sp>
-        <p:nvSpPr>
-          <p:cNvPr id="5" name="Shape 3"/>
-          <p:cNvSpPr/>
-          <p:nvPr/>
-        </p:nvSpPr>
-        <p:spPr>
-          <a:xfrm>
-            <a:off x="566928" y="1783080"/>
+              <a:t>Why this changes the rest</a:t>
+            </a:r>
+            <a:endParaRPr lang="en-US" sz="3000" dirty="0"/>
+          </a:p>
+        </p:txBody>
+      </p:sp>
+      <p:sp>
+        <p:nvSpPr>
+          <p:cNvPr id="3" name="Shape 1"/>
+          <p:cNvSpPr/>
+          <p:nvPr/>
+        </p:nvSpPr>
+        <p:spPr>
+          <a:xfrm>
+            <a:off x="566928" y="1097280"/>
             <a:ext cx="1920240" cy="50292"/>
           </a:xfrm>
           <a:prstGeom prst="rect">
@@ -19227,14 +19378,14 @@
       </p:sp>
       <p:sp>
         <p:nvSpPr>
-          <p:cNvPr id="6" name="Text 4"/>
-          <p:cNvSpPr/>
-          <p:nvPr/>
-        </p:nvSpPr>
-        <p:spPr>
-          <a:xfrm>
-            <a:off x="640080" y="2103120"/>
-            <a:ext cx="10963656" cy="3017520"/>
+          <p:cNvPr id="4" name="Text 2"/>
+          <p:cNvSpPr/>
+          <p:nvPr/>
+        </p:nvSpPr>
+        <p:spPr>
+          <a:xfrm>
+            <a:off x="640080" y="1481328"/>
+            <a:ext cx="10963656" cy="4553712"/>
           </a:xfrm>
           <a:prstGeom prst="rect">
             <a:avLst/>
@@ -19247,8 +19398,11 @@
           <a:lstStyle/>
           <a:p>
             <a:pPr marL="342900" indent="-342900">
+              <a:lnSpc>
+                <a:spcPct val="105000"/>
+              </a:lnSpc>
               <a:spcAft>
-                <a:spcPts val="1400"/>
+                <a:spcPts val="1200"/>
               </a:spcAft>
               <a:buSzPct val="100000"/>
               <a:buChar char="•"/>
@@ -19262,14 +19416,17 @@
                 <a:ea typeface="Calibri" pitchFamily="34" charset="-122"/>
                 <a:cs typeface="Calibri" pitchFamily="34" charset="-120"/>
               </a:rPr>
-              <a:t>Draw a bounding box on a slide overview</a:t>
+              <a:t>The region you analysed is the region you acquire at high resolution</a:t>
             </a:r>
             <a:endParaRPr lang="en-US" sz="2000" dirty="0"/>
           </a:p>
           <a:p>
             <a:pPr marL="342900" indent="-342900">
+              <a:lnSpc>
+                <a:spcPct val="105000"/>
+              </a:lnSpc>
               <a:spcAft>
-                <a:spcPts val="1400"/>
+                <a:spcPts val="1200"/>
               </a:spcAft>
               <a:buSzPct val="100000"/>
               <a:buChar char="•"/>
@@ -19283,14 +19440,17 @@
                 <a:ea typeface="Calibri" pitchFamily="34" charset="-122"/>
                 <a:cs typeface="Calibri" pitchFamily="34" charset="-120"/>
               </a:rPr>
-              <a:t>Watch the stage move and the tiles come in</a:t>
+              <a:t>Acquisition metadata arrives in the project, not in a folder that gets separated from the images</a:t>
             </a:r>
             <a:endParaRPr lang="en-US" sz="2000" dirty="0"/>
           </a:p>
           <a:p>
             <a:pPr marL="342900" indent="-342900">
+              <a:lnSpc>
+                <a:spcPct val="105000"/>
+              </a:lnSpc>
               <a:spcAft>
-                <a:spcPts val="1400"/>
+                <a:spcPts val="1200"/>
               </a:spcAft>
               <a:buSzPct val="100000"/>
               <a:buChar char="•"/>
@@ -19304,57 +19464,15 @@
                 <a:ea typeface="Calibri" pitchFamily="34" charset="-122"/>
                 <a:cs typeface="Calibri" pitchFamily="34" charset="-120"/>
               </a:rPr>
-              <a:t>Stitched pyramidal image lands back in the project, with its metadata</a:t>
+              <a:t>Stitching is a step in this pipeline — and it works perfectly well on its own, which is why it is in your hands-on hour</a:t>
             </a:r>
             <a:endParaRPr lang="en-US" sz="2000" dirty="0"/>
           </a:p>
-          <a:p>
-            <a:pPr marL="342900" indent="-342900">
-              <a:spcAft>
-                <a:spcPts val="1400"/>
-              </a:spcAft>
-              <a:buSzPct val="100000"/>
-              <a:buChar char="•"/>
-            </a:pPr>
-            <a:r>
-              <a:rPr lang="en-US" sz="2000" dirty="0">
-                <a:solidFill>
-                  <a:srgbClr val="1F2933"/>
-                </a:solidFill>
-                <a:latin typeface="Calibri" pitchFamily="34" charset="0"/>
-                <a:ea typeface="Calibri" pitchFamily="34" charset="-122"/>
-                <a:cs typeface="Calibri" pitchFamily="34" charset="-120"/>
-              </a:rPr>
-              <a:t>Then open it and annotate it — the loop closes</a:t>
-            </a:r>
-            <a:endParaRPr lang="en-US" sz="2000" dirty="0"/>
-          </a:p>
-          <a:p>
-            <a:pPr marL="342900" indent="-342900">
-              <a:spcAft>
-                <a:spcPts val="1400"/>
-              </a:spcAft>
-              <a:buSzPct val="100000"/>
-              <a:buChar char="•"/>
-            </a:pPr>
-            <a:r>
-              <a:rPr lang="en-US" sz="2000" dirty="0">
-                <a:solidFill>
-                  <a:srgbClr val="1F2933"/>
-                </a:solidFill>
-                <a:latin typeface="Calibri" pitchFamily="34" charset="0"/>
-                <a:ea typeface="Calibri" pitchFamily="34" charset="-122"/>
-                <a:cs typeface="Calibri" pitchFamily="34" charset="-120"/>
-              </a:rPr>
-              <a:t>The stitching half — Tiles to Pyramid — you can install and use today, no microscope needed</a:t>
-            </a:r>
-            <a:endParaRPr lang="en-US" sz="2000" dirty="0"/>
-          </a:p>
-        </p:txBody>
-      </p:sp>
-      <p:sp>
-        <p:nvSpPr>
-          <p:cNvPr id="7" name="Shape 5"/>
+        </p:txBody>
+      </p:sp>
+      <p:sp>
+        <p:nvSpPr>
+          <p:cNvPr id="5" name="Shape 3"/>
           <p:cNvSpPr/>
           <p:nvPr/>
         </p:nvSpPr>
@@ -19379,7 +19497,7 @@
       </p:sp>
       <p:sp>
         <p:nvSpPr>
-          <p:cNvPr id="8" name="Text 6"/>
+          <p:cNvPr id="6" name="Text 4"/>
           <p:cNvSpPr/>
           <p:nvPr/>
         </p:nvSpPr>
@@ -19410,7 +19528,7 @@
                 <a:ea typeface="Calibri" pitchFamily="34" charset="-122"/>
                 <a:cs typeface="Calibri" pitchFamily="34" charset="-120"/>
               </a:rPr>
-              <a:t>You watch this one: it needs a microscope, so nobody in the room runs it. About five minutes, with a recorded fallback if the network or the hardware disagrees.</a:t>
+              <a:t>Once acquisition is driven from QuPath, "acquisition software" and "analysis software" stop being separate places your data lives.</a:t>
             </a:r>
             <a:endParaRPr lang="en-US" sz="1600" dirty="0"/>
           </a:p>
@@ -19418,7 +19536,7 @@
       </p:sp>
       <p:sp>
         <p:nvSpPr>
-          <p:cNvPr id="9" name="Text 7"/>
+          <p:cNvPr id="7" name="Text 5"/>
           <p:cNvSpPr/>
           <p:nvPr/>
         </p:nvSpPr>
@@ -19870,8 +19988,8 @@
         </p:nvSpPr>
         <p:spPr>
           <a:xfrm>
-            <a:off x="566928" y="411480"/>
-            <a:ext cx="11055096" cy="685800"/>
+            <a:off x="566928" y="384048"/>
+            <a:ext cx="11055096" cy="658368"/>
           </a:xfrm>
           <a:prstGeom prst="rect">
             <a:avLst/>
@@ -19887,7 +20005,7 @@
               <a:buNone/>
             </a:pPr>
             <a:r>
-              <a:rPr lang="en-US" sz="3200" b="1" dirty="0">
+              <a:rPr lang="en-US" sz="3000" b="1" dirty="0">
                 <a:solidFill>
                   <a:srgbClr val="1F4C86"/>
                 </a:solidFill>
@@ -19895,9 +20013,9 @@
                 <a:ea typeface="Trebuchet MS" pitchFamily="34" charset="-122"/>
                 <a:cs typeface="Trebuchet MS" pitchFamily="34" charset="-120"/>
               </a:rPr>
-              <a:t>Acknowledgements</a:t>
-            </a:r>
-            <a:endParaRPr lang="en-US" sz="3200" dirty="0"/>
+              <a:t>How it is put together</a:t>
+            </a:r>
+            <a:endParaRPr lang="en-US" sz="3000" dirty="0"/>
           </a:p>
         </p:txBody>
       </p:sp>
@@ -19909,7 +20027,7 @@
         </p:nvSpPr>
         <p:spPr>
           <a:xfrm>
-            <a:off x="566928" y="1152144"/>
+            <a:off x="566928" y="1097280"/>
             <a:ext cx="1920240" cy="50292"/>
           </a:xfrm>
           <a:prstGeom prst="rect">
@@ -19923,54 +20041,14 @@
       </p:sp>
       <p:sp>
         <p:nvSpPr>
-          <p:cNvPr id="4" name="Shape 2"/>
-          <p:cNvSpPr/>
-          <p:nvPr/>
-        </p:nvSpPr>
-        <p:spPr>
-          <a:xfrm>
-            <a:off x="566928" y="1572768"/>
-            <a:ext cx="11055096" cy="2240280"/>
-          </a:xfrm>
-          <a:prstGeom prst="rect">
-            <a:avLst/>
-          </a:prstGeom>
-          <a:solidFill>
-            <a:srgbClr val="E8F0FA"/>
-          </a:solidFill>
-          <a:ln/>
-        </p:spPr>
-      </p:sp>
-      <p:sp>
-        <p:nvSpPr>
-          <p:cNvPr id="5" name="Shape 3"/>
-          <p:cNvSpPr/>
-          <p:nvPr/>
-        </p:nvSpPr>
-        <p:spPr>
-          <a:xfrm>
-            <a:off x="566928" y="1572768"/>
-            <a:ext cx="146304" cy="2240280"/>
-          </a:xfrm>
-          <a:prstGeom prst="rect">
-            <a:avLst/>
-          </a:prstGeom>
-          <a:solidFill>
-            <a:srgbClr val="3674C1"/>
-          </a:solidFill>
-          <a:ln/>
-        </p:spPr>
-      </p:sp>
-      <p:sp>
-        <p:nvSpPr>
-          <p:cNvPr id="6" name="Text 4"/>
-          <p:cNvSpPr/>
-          <p:nvPr/>
-        </p:nvSpPr>
-        <p:spPr>
-          <a:xfrm>
-            <a:off x="978408" y="1737360"/>
-            <a:ext cx="10232136" cy="365760"/>
+          <p:cNvPr id="4" name="Text 2"/>
+          <p:cNvSpPr/>
+          <p:nvPr/>
+        </p:nvSpPr>
+        <p:spPr>
+          <a:xfrm>
+            <a:off x="566928" y="1243584"/>
+            <a:ext cx="11055096" cy="384048"/>
           </a:xfrm>
           <a:prstGeom prst="rect">
             <a:avLst/>
@@ -19986,85 +20064,53 @@
               <a:buNone/>
             </a:pPr>
             <a:r>
-              <a:rPr lang="en-US" sz="1600" b="1" spc="150" kern="0" dirty="0">
-                <a:solidFill>
-                  <a:srgbClr val="3674C1"/>
-                </a:solidFill>
-                <a:latin typeface="Calibri" pitchFamily="34" charset="0"/>
-                <a:ea typeface="Calibri" pitchFamily="34" charset="-122"/>
-                <a:cs typeface="Calibri" pitchFamily="34" charset="-120"/>
-              </a:rPr>
-              <a:t>Sample data</a:t>
-            </a:r>
-            <a:endParaRPr lang="en-US" sz="1600" dirty="0"/>
-          </a:p>
-        </p:txBody>
-      </p:sp>
-      <p:sp>
-        <p:nvSpPr>
-          <p:cNvPr id="7" name="Text 5"/>
-          <p:cNvSpPr/>
-          <p:nvPr/>
-        </p:nvSpPr>
-        <p:spPr>
-          <a:xfrm>
-            <a:off x="978408" y="2103120"/>
-            <a:ext cx="10232136" cy="566928"/>
-          </a:xfrm>
-          <a:prstGeom prst="rect">
-            <a:avLst/>
-          </a:prstGeom>
-          <a:noFill/>
-          <a:ln/>
-        </p:spPr>
-        <p:txBody>
-          <a:bodyPr wrap="square" rtlCol="0" anchor="ctr"/>
-          <a:lstStyle/>
-          <a:p>
-            <a:pPr indent="0" marL="0">
-              <a:buNone/>
-            </a:pPr>
-            <a:r>
-              <a:rPr lang="en-US" sz="3200" b="1" dirty="0">
-                <a:solidFill>
-                  <a:srgbClr val="1F4C86"/>
-                </a:solidFill>
-                <a:latin typeface="Trebuchet MS" pitchFamily="34" charset="0"/>
-                <a:ea typeface="Trebuchet MS" pitchFamily="34" charset="-122"/>
-                <a:cs typeface="Trebuchet MS" pitchFamily="34" charset="-120"/>
-              </a:rPr>
-              <a:t>Sara McArdle  ·  Zbigniew Mikulski</a:t>
-            </a:r>
-            <a:endParaRPr lang="en-US" sz="3200" dirty="0"/>
-          </a:p>
-        </p:txBody>
-      </p:sp>
-      <p:sp>
-        <p:nvSpPr>
-          <p:cNvPr id="8" name="Text 6"/>
-          <p:cNvSpPr/>
-          <p:nvPr/>
-        </p:nvSpPr>
-        <p:spPr>
-          <a:xfrm>
-            <a:off x="978408" y="2670048"/>
-            <a:ext cx="10232136" cy="384048"/>
-          </a:xfrm>
-          <a:prstGeom prst="rect">
-            <a:avLst/>
-          </a:prstGeom>
-          <a:noFill/>
-          <a:ln/>
-        </p:spPr>
-        <p:txBody>
-          <a:bodyPr wrap="square" rtlCol="0" anchor="ctr"/>
-          <a:lstStyle/>
-          <a:p>
-            <a:pPr indent="0" marL="0">
-              <a:buNone/>
-            </a:pPr>
-            <a:r>
-              <a:rPr lang="en-US" sz="2100" dirty="0">
+              <a:rPr lang="en-US" sz="1700" i="1" dirty="0">
+                <a:solidFill>
+                  <a:srgbClr val="5A6675"/>
+                </a:solidFill>
+                <a:latin typeface="Calibri" pitchFamily="34" charset="0"/>
+                <a:ea typeface="Calibri" pitchFamily="34" charset="-122"/>
+                <a:cs typeface="Calibri" pitchFamily="34" charset="-120"/>
+              </a:rPr>
+              <a:t>The easy part is the QuPath extension. Budget your time for the microscope side.</a:t>
+            </a:r>
+            <a:endParaRPr lang="en-US" sz="1700" dirty="0"/>
+          </a:p>
+        </p:txBody>
+      </p:sp>
+      <p:sp>
+        <p:nvSpPr>
+          <p:cNvPr id="5" name="Text 3"/>
+          <p:cNvSpPr/>
+          <p:nvPr/>
+        </p:nvSpPr>
+        <p:spPr>
+          <a:xfrm>
+            <a:off x="640080" y="1755648"/>
+            <a:ext cx="10963656" cy="4279392"/>
+          </a:xfrm>
+          <a:prstGeom prst="rect">
+            <a:avLst/>
+          </a:prstGeom>
+          <a:noFill/>
+          <a:ln/>
+        </p:spPr>
+        <p:txBody>
+          <a:bodyPr wrap="square" rtlCol="0" anchor="t"/>
+          <a:lstStyle/>
+          <a:p>
+            <a:pPr marL="342900" indent="-342900">
+              <a:lnSpc>
+                <a:spcPct val="105000"/>
+              </a:lnSpc>
+              <a:spcAft>
+                <a:spcPts val="1200"/>
+              </a:spcAft>
+              <a:buSzPct val="100000"/>
+              <a:buChar char="•"/>
+            </a:pPr>
+            <a:r>
+              <a:rPr lang="en-US" sz="2000" dirty="0">
                 <a:solidFill>
                   <a:srgbClr val="1F2933"/>
                 </a:solidFill>
@@ -20072,103 +20118,47 @@
                 <a:ea typeface="Calibri" pitchFamily="34" charset="-122"/>
                 <a:cs typeface="Calibri" pitchFamily="34" charset="-120"/>
               </a:rPr>
-              <a:t>La Jolla Institute for Immunology</a:t>
-            </a:r>
-            <a:endParaRPr lang="en-US" sz="2100" dirty="0"/>
-          </a:p>
-        </p:txBody>
-      </p:sp>
-      <p:sp>
-        <p:nvSpPr>
-          <p:cNvPr id="9" name="Text 7"/>
-          <p:cNvSpPr/>
-          <p:nvPr/>
-        </p:nvSpPr>
-        <p:spPr>
-          <a:xfrm>
-            <a:off x="978408" y="3054096"/>
-            <a:ext cx="10232136" cy="731520"/>
-          </a:xfrm>
-          <a:prstGeom prst="rect">
-            <a:avLst/>
-          </a:prstGeom>
-          <a:noFill/>
-          <a:ln/>
-        </p:spPr>
-        <p:txBody>
-          <a:bodyPr wrap="square" rtlCol="0" anchor="ctr"/>
-          <a:lstStyle/>
-          <a:p>
-            <a:pPr indent="0" marL="0">
+              <a:t>QuPath talks to a small command server, which drives Micro-Manager, which drives the hardware</a:t>
+            </a:r>
+            <a:endParaRPr lang="en-US" sz="2000" dirty="0"/>
+          </a:p>
+          <a:p>
+            <a:pPr marL="342900" indent="-342900">
               <a:lnSpc>
-                <a:spcPct val="110000"/>
+                <a:spcPct val="105000"/>
               </a:lnSpc>
-              <a:buNone/>
-            </a:pPr>
-            <a:r>
-              <a:rPr lang="en-US" sz="1700" i="1" dirty="0">
-                <a:solidFill>
-                  <a:srgbClr val="5A6675"/>
-                </a:solidFill>
-                <a:latin typeface="Calibri" pitchFamily="34" charset="0"/>
-                <a:ea typeface="Calibri" pitchFamily="34" charset="-122"/>
-                <a:cs typeface="Calibri" pitchFamily="34" charset="-120"/>
-              </a:rPr>
-              <a:t>They provided the majority of the test and demonstration data behind almost every exercise you will see today.</a:t>
-            </a:r>
-            <a:endParaRPr lang="en-US" sz="1700" dirty="0"/>
-          </a:p>
-          <a:p>
-            <a:pPr indent="0" marL="0">
+              <a:spcAft>
+                <a:spcPts val="1200"/>
+              </a:spcAft>
+              <a:buSzPct val="100000"/>
+              <a:buChar char="•"/>
+            </a:pPr>
+            <a:r>
+              <a:rPr lang="en-US" sz="2000" dirty="0">
+                <a:solidFill>
+                  <a:srgbClr val="1F2933"/>
+                </a:solidFill>
+                <a:latin typeface="Calibri" pitchFamily="34" charset="0"/>
+                <a:ea typeface="Calibri" pitchFamily="34" charset="-122"/>
+                <a:cs typeface="Calibri" pitchFamily="34" charset="-120"/>
+              </a:rPr>
+              <a:t>Each instrument is described by its own configuration — the QuPath side does not know what kind of microscope it is</a:t>
+            </a:r>
+            <a:endParaRPr lang="en-US" sz="2000" dirty="0"/>
+          </a:p>
+          <a:p>
+            <a:pPr marL="342900" indent="-342900">
               <a:lnSpc>
-                <a:spcPct val="110000"/>
+                <a:spcPct val="105000"/>
               </a:lnSpc>
-              <a:buNone/>
-            </a:pPr>
-            <a:r>
-              <a:rPr lang="en-US" sz="1700" i="1" dirty="0">
-                <a:solidFill>
-                  <a:srgbClr val="5A6675"/>
-                </a:solidFill>
-                <a:latin typeface="Calibri" pitchFamily="34" charset="0"/>
-                <a:ea typeface="Calibri" pitchFamily="34" charset="-122"/>
-                <a:cs typeface="Calibri" pitchFamily="34" charset="-120"/>
-              </a:rPr>
-              <a:t>These tools could not have been built, tested, or taught without it.</a:t>
-            </a:r>
-            <a:endParaRPr lang="en-US" sz="1700" dirty="0"/>
-          </a:p>
-        </p:txBody>
-      </p:sp>
-      <p:sp>
-        <p:nvSpPr>
-          <p:cNvPr id="10" name="Text 8"/>
-          <p:cNvSpPr/>
-          <p:nvPr/>
-        </p:nvSpPr>
-        <p:spPr>
-          <a:xfrm>
-            <a:off x="566928" y="3977640"/>
-            <a:ext cx="11055096" cy="2103120"/>
-          </a:xfrm>
-          <a:prstGeom prst="rect">
-            <a:avLst/>
-          </a:prstGeom>
-          <a:noFill/>
-          <a:ln/>
-        </p:spPr>
-        <p:txBody>
-          <a:bodyPr wrap="square" rtlCol="0" anchor="t"/>
-          <a:lstStyle/>
-          <a:p>
-            <a:pPr indent="0" marL="0">
               <a:spcAft>
-                <a:spcPts val="1000"/>
+                <a:spcPts val="1200"/>
               </a:spcAft>
-              <a:buNone/>
-            </a:pPr>
-            <a:r>
-              <a:rPr lang="en-US" sz="1700" dirty="0">
+              <a:buSzPct val="100000"/>
+              <a:buChar char="•"/>
+            </a:pPr>
+            <a:r>
+              <a:rPr lang="en-US" sz="2000" dirty="0">
                 <a:solidFill>
                   <a:srgbClr val="1F2933"/>
                 </a:solidFill>
@@ -20176,48 +20166,15 @@
                 <a:ea typeface="Calibri" pitchFamily="34" charset="-122"/>
                 <a:cs typeface="Calibri" pitchFamily="34" charset="-120"/>
               </a:rPr>
-              <a:t>Sara McArdle also shaped the software directly — two of these extensions began as her Groovy scripts, and her FS2K course was the model for how the workshop pages are written.
-</a:t>
-            </a:r>
-            <a:pPr indent="0" marL="0">
-              <a:spcAft>
-                <a:spcPts val="1000"/>
-              </a:spcAft>
-              <a:buNone/>
-            </a:pPr>
-            <a:r>
-              <a:rPr lang="en-US" sz="1700" dirty="0">
-                <a:solidFill>
-                  <a:srgbClr val="1F2933"/>
-                </a:solidFill>
-                <a:latin typeface="Calibri" pitchFamily="34" charset="0"/>
-                <a:ea typeface="Calibri" pitchFamily="34" charset="-122"/>
-                <a:cs typeface="Calibri" pitchFamily="34" charset="-120"/>
-              </a:rPr>
-              <a:t>Kristin Gallick, whose concept and scripts the Confusion Matrix grew from.  ·  Pete Bankhead and the QuPath team.  ·  CT-FIRE, CurveAlign, TACS and TWOMBLI for the fibre work.  ·  CytoMAP and QuBaLab for bringing clustering into QuPath.  ·  QUAREP-LiMi for the reporting standards.  ·  The image.sc community, where several of these features were first requested.
-</a:t>
-            </a:r>
-            <a:pPr indent="0" marL="0">
-              <a:buNone/>
-            </a:pPr>
-            <a:r>
-              <a:rPr lang="en-US" sz="1700" b="1" dirty="0">
-                <a:solidFill>
-                  <a:srgbClr val="1F4C86"/>
-                </a:solidFill>
-                <a:latin typeface="Calibri" pitchFamily="34" charset="0"/>
-                <a:ea typeface="Calibri" pitchFamily="34" charset="-122"/>
-                <a:cs typeface="Calibri" pitchFamily="34" charset="-120"/>
-              </a:rPr>
-              <a:t>Full credits: michaelsnelson.github.io/BINA-I2K-2026-QuPath-Extensions/docs/acknowledgements.html</a:t>
-            </a:r>
-            <a:endParaRPr lang="en-US" sz="1700" dirty="0"/>
-          </a:p>
-        </p:txBody>
-      </p:sp>
-      <p:sp>
-        <p:nvSpPr>
-          <p:cNvPr id="11" name="Text 9"/>
+              <a:t>Micro-Manager remains the device layer. We did not reinvent it</a:t>
+            </a:r>
+            <a:endParaRPr lang="en-US" sz="2000" dirty="0"/>
+          </a:p>
+        </p:txBody>
+      </p:sp>
+      <p:sp>
+        <p:nvSpPr>
+          <p:cNvPr id="6" name="Text 4"/>
           <p:cNvSpPr/>
           <p:nvPr/>
         </p:nvSpPr>
@@ -20294,8 +20251,113 @@
         </p:nvSpPr>
         <p:spPr>
           <a:xfrm>
-            <a:off x="0" y="0"/>
-            <a:ext cx="274320" cy="6858000"/>
+            <a:off x="566928" y="411480"/>
+            <a:ext cx="2331720" cy="457200"/>
+          </a:xfrm>
+          <a:prstGeom prst="roundRect">
+            <a:avLst>
+              <a:gd name="adj" fmla="val 20000"/>
+            </a:avLst>
+          </a:prstGeom>
+          <a:solidFill>
+            <a:srgbClr val="FBF1E0"/>
+          </a:solidFill>
+          <a:ln w="12700">
+            <a:solidFill>
+              <a:srgbClr val="B26A00"/>
+            </a:solidFill>
+            <a:prstDash val="solid"/>
+          </a:ln>
+        </p:spPr>
+      </p:sp>
+      <p:sp>
+        <p:nvSpPr>
+          <p:cNvPr id="3" name="Text 1"/>
+          <p:cNvSpPr/>
+          <p:nvPr/>
+        </p:nvSpPr>
+        <p:spPr>
+          <a:xfrm>
+            <a:off x="566928" y="411480"/>
+            <a:ext cx="2331720" cy="457200"/>
+          </a:xfrm>
+          <a:prstGeom prst="rect">
+            <a:avLst/>
+          </a:prstGeom>
+          <a:noFill/>
+          <a:ln/>
+        </p:spPr>
+        <p:txBody>
+          <a:bodyPr wrap="square" rtlCol="0" anchor="ctr"/>
+          <a:lstStyle/>
+          <a:p>
+            <a:pPr algn="ctr" indent="0" marL="0">
+              <a:buNone/>
+            </a:pPr>
+            <a:r>
+              <a:rPr lang="en-US" sz="1600" b="1" dirty="0">
+                <a:solidFill>
+                  <a:srgbClr val="B26A00"/>
+                </a:solidFill>
+                <a:latin typeface="Trebuchet MS" pitchFamily="34" charset="0"/>
+                <a:ea typeface="Trebuchet MS" pitchFamily="34" charset="-122"/>
+                <a:cs typeface="Trebuchet MS" pitchFamily="34" charset="-120"/>
+              </a:rPr>
+              <a:t>▶  SHOWN  ·  NOT YOURS TO RUN</a:t>
+            </a:r>
+            <a:endParaRPr lang="en-US" sz="1600" dirty="0"/>
+          </a:p>
+        </p:txBody>
+      </p:sp>
+      <p:sp>
+        <p:nvSpPr>
+          <p:cNvPr id="4" name="Text 2"/>
+          <p:cNvSpPr/>
+          <p:nvPr/>
+        </p:nvSpPr>
+        <p:spPr>
+          <a:xfrm>
+            <a:off x="566928" y="1024128"/>
+            <a:ext cx="11055096" cy="685800"/>
+          </a:xfrm>
+          <a:prstGeom prst="rect">
+            <a:avLst/>
+          </a:prstGeom>
+          <a:noFill/>
+          <a:ln/>
+        </p:spPr>
+        <p:txBody>
+          <a:bodyPr wrap="square" rtlCol="0" anchor="ctr"/>
+          <a:lstStyle/>
+          <a:p>
+            <a:pPr indent="0" marL="0">
+              <a:buNone/>
+            </a:pPr>
+            <a:r>
+              <a:rPr lang="en-US" sz="3200" b="1" dirty="0">
+                <a:solidFill>
+                  <a:srgbClr val="1F4C86"/>
+                </a:solidFill>
+                <a:latin typeface="Trebuchet MS" pitchFamily="34" charset="0"/>
+                <a:ea typeface="Trebuchet MS" pitchFamily="34" charset="-122"/>
+                <a:cs typeface="Trebuchet MS" pitchFamily="34" charset="-120"/>
+              </a:rPr>
+              <a:t>Acquisition, live</a:t>
+            </a:r>
+            <a:endParaRPr lang="en-US" sz="3200" dirty="0"/>
+          </a:p>
+        </p:txBody>
+      </p:sp>
+      <p:sp>
+        <p:nvSpPr>
+          <p:cNvPr id="5" name="Shape 3"/>
+          <p:cNvSpPr/>
+          <p:nvPr/>
+        </p:nvSpPr>
+        <p:spPr>
+          <a:xfrm>
+            <a:off x="566928" y="1783080"/>
+            <a:ext cx="1920240" cy="50292"/>
           </a:xfrm>
           <a:prstGeom prst="rect">
             <a:avLst/>
@@ -20308,14 +20370,166 @@
       </p:sp>
       <p:sp>
         <p:nvSpPr>
-          <p:cNvPr id="3" name="Text 1"/>
-          <p:cNvSpPr/>
-          <p:nvPr/>
-        </p:nvSpPr>
-        <p:spPr>
-          <a:xfrm>
-            <a:off x="960120" y="777240"/>
-            <a:ext cx="10268712" cy="822960"/>
+          <p:cNvPr id="6" name="Text 4"/>
+          <p:cNvSpPr/>
+          <p:nvPr/>
+        </p:nvSpPr>
+        <p:spPr>
+          <a:xfrm>
+            <a:off x="640080" y="2103120"/>
+            <a:ext cx="10963656" cy="3017520"/>
+          </a:xfrm>
+          <a:prstGeom prst="rect">
+            <a:avLst/>
+          </a:prstGeom>
+          <a:noFill/>
+          <a:ln/>
+        </p:spPr>
+        <p:txBody>
+          <a:bodyPr wrap="square" rtlCol="0" anchor="t"/>
+          <a:lstStyle/>
+          <a:p>
+            <a:pPr marL="342900" indent="-342900">
+              <a:spcAft>
+                <a:spcPts val="1400"/>
+              </a:spcAft>
+              <a:buSzPct val="100000"/>
+              <a:buChar char="•"/>
+            </a:pPr>
+            <a:r>
+              <a:rPr lang="en-US" sz="2000" dirty="0">
+                <a:solidFill>
+                  <a:srgbClr val="1F2933"/>
+                </a:solidFill>
+                <a:latin typeface="Calibri" pitchFamily="34" charset="0"/>
+                <a:ea typeface="Calibri" pitchFamily="34" charset="-122"/>
+                <a:cs typeface="Calibri" pitchFamily="34" charset="-120"/>
+              </a:rPr>
+              <a:t>Draw a bounding box on a slide overview</a:t>
+            </a:r>
+            <a:endParaRPr lang="en-US" sz="2000" dirty="0"/>
+          </a:p>
+          <a:p>
+            <a:pPr marL="342900" indent="-342900">
+              <a:spcAft>
+                <a:spcPts val="1400"/>
+              </a:spcAft>
+              <a:buSzPct val="100000"/>
+              <a:buChar char="•"/>
+            </a:pPr>
+            <a:r>
+              <a:rPr lang="en-US" sz="2000" dirty="0">
+                <a:solidFill>
+                  <a:srgbClr val="1F2933"/>
+                </a:solidFill>
+                <a:latin typeface="Calibri" pitchFamily="34" charset="0"/>
+                <a:ea typeface="Calibri" pitchFamily="34" charset="-122"/>
+                <a:cs typeface="Calibri" pitchFamily="34" charset="-120"/>
+              </a:rPr>
+              <a:t>Watch the stage move and the tiles come in</a:t>
+            </a:r>
+            <a:endParaRPr lang="en-US" sz="2000" dirty="0"/>
+          </a:p>
+          <a:p>
+            <a:pPr marL="342900" indent="-342900">
+              <a:spcAft>
+                <a:spcPts val="1400"/>
+              </a:spcAft>
+              <a:buSzPct val="100000"/>
+              <a:buChar char="•"/>
+            </a:pPr>
+            <a:r>
+              <a:rPr lang="en-US" sz="2000" dirty="0">
+                <a:solidFill>
+                  <a:srgbClr val="1F2933"/>
+                </a:solidFill>
+                <a:latin typeface="Calibri" pitchFamily="34" charset="0"/>
+                <a:ea typeface="Calibri" pitchFamily="34" charset="-122"/>
+                <a:cs typeface="Calibri" pitchFamily="34" charset="-120"/>
+              </a:rPr>
+              <a:t>Stitched pyramidal image lands back in the project, with its metadata</a:t>
+            </a:r>
+            <a:endParaRPr lang="en-US" sz="2000" dirty="0"/>
+          </a:p>
+          <a:p>
+            <a:pPr marL="342900" indent="-342900">
+              <a:spcAft>
+                <a:spcPts val="1400"/>
+              </a:spcAft>
+              <a:buSzPct val="100000"/>
+              <a:buChar char="•"/>
+            </a:pPr>
+            <a:r>
+              <a:rPr lang="en-US" sz="2000" dirty="0">
+                <a:solidFill>
+                  <a:srgbClr val="1F2933"/>
+                </a:solidFill>
+                <a:latin typeface="Calibri" pitchFamily="34" charset="0"/>
+                <a:ea typeface="Calibri" pitchFamily="34" charset="-122"/>
+                <a:cs typeface="Calibri" pitchFamily="34" charset="-120"/>
+              </a:rPr>
+              <a:t>Then open it and annotate it — the loop closes</a:t>
+            </a:r>
+            <a:endParaRPr lang="en-US" sz="2000" dirty="0"/>
+          </a:p>
+          <a:p>
+            <a:pPr marL="342900" indent="-342900">
+              <a:spcAft>
+                <a:spcPts val="1400"/>
+              </a:spcAft>
+              <a:buSzPct val="100000"/>
+              <a:buChar char="•"/>
+            </a:pPr>
+            <a:r>
+              <a:rPr lang="en-US" sz="2000" dirty="0">
+                <a:solidFill>
+                  <a:srgbClr val="1F2933"/>
+                </a:solidFill>
+                <a:latin typeface="Calibri" pitchFamily="34" charset="0"/>
+                <a:ea typeface="Calibri" pitchFamily="34" charset="-122"/>
+                <a:cs typeface="Calibri" pitchFamily="34" charset="-120"/>
+              </a:rPr>
+              <a:t>The stitching half — Tiles to Pyramid — you can install and use today, no microscope needed</a:t>
+            </a:r>
+            <a:endParaRPr lang="en-US" sz="2000" dirty="0"/>
+          </a:p>
+        </p:txBody>
+      </p:sp>
+      <p:sp>
+        <p:nvSpPr>
+          <p:cNvPr id="7" name="Shape 5"/>
+          <p:cNvSpPr/>
+          <p:nvPr/>
+        </p:nvSpPr>
+        <p:spPr>
+          <a:xfrm>
+            <a:off x="566928" y="5650992"/>
+            <a:ext cx="11055096" cy="566928"/>
+          </a:xfrm>
+          <a:prstGeom prst="rect">
+            <a:avLst/>
+          </a:prstGeom>
+          <a:solidFill>
+            <a:srgbClr val="F4F8FD"/>
+          </a:solidFill>
+          <a:ln w="9525">
+            <a:solidFill>
+              <a:srgbClr val="3674C1"/>
+            </a:solidFill>
+            <a:prstDash val="solid"/>
+          </a:ln>
+        </p:spPr>
+      </p:sp>
+      <p:sp>
+        <p:nvSpPr>
+          <p:cNvPr id="8" name="Text 6"/>
+          <p:cNvSpPr/>
+          <p:nvPr/>
+        </p:nvSpPr>
+        <p:spPr>
+          <a:xfrm>
+            <a:off x="768096" y="5650992"/>
+            <a:ext cx="10652760" cy="566928"/>
           </a:xfrm>
           <a:prstGeom prst="rect">
             <a:avLst/>
@@ -20331,7 +20545,117 @@
               <a:buNone/>
             </a:pPr>
             <a:r>
-              <a:rPr lang="en-US" sz="4000" b="1" dirty="0">
+              <a:rPr lang="en-US" sz="1600" b="1" dirty="0">
+                <a:solidFill>
+                  <a:srgbClr val="1F4C86"/>
+                </a:solidFill>
+                <a:latin typeface="Calibri" pitchFamily="34" charset="0"/>
+                <a:ea typeface="Calibri" pitchFamily="34" charset="-122"/>
+                <a:cs typeface="Calibri" pitchFamily="34" charset="-120"/>
+              </a:rPr>
+              <a:t>You watch this one: it needs a microscope, so nobody in the room runs it. About five minutes, with a recorded fallback if the network or the hardware disagrees.</a:t>
+            </a:r>
+            <a:endParaRPr lang="en-US" sz="1600" dirty="0"/>
+          </a:p>
+        </p:txBody>
+      </p:sp>
+      <p:sp>
+        <p:nvSpPr>
+          <p:cNvPr id="9" name="Text 7"/>
+          <p:cNvSpPr/>
+          <p:nvPr/>
+        </p:nvSpPr>
+        <p:spPr>
+          <a:xfrm>
+            <a:off x="11274552" y="6291072"/>
+            <a:ext cx="457200" cy="310896"/>
+          </a:xfrm>
+          <a:prstGeom prst="rect">
+            <a:avLst/>
+          </a:prstGeom>
+          <a:noFill/>
+          <a:ln/>
+        </p:spPr>
+        <p:txBody>
+          <a:bodyPr wrap="square" rtlCol="0" anchor="ctr"/>
+          <a:lstStyle/>
+          <a:p>
+            <a:pPr algn="r" indent="0" marL="0">
+              <a:buNone/>
+            </a:pPr>
+            <a:r>
+              <a:rPr lang="en-US" sz="1400" dirty="0">
+                <a:solidFill>
+                  <a:srgbClr val="A8B2BF"/>
+                </a:solidFill>
+                <a:latin typeface="Calibri" pitchFamily="34" charset="0"/>
+                <a:ea typeface="Calibri" pitchFamily="34" charset="-122"/>
+                <a:cs typeface="Calibri" pitchFamily="34" charset="-120"/>
+              </a:rPr>
+              <a:t>51</a:t>
+            </a:r>
+            <a:endParaRPr lang="en-US" sz="1400" dirty="0"/>
+          </a:p>
+        </p:txBody>
+      </p:sp>
+    </p:spTree>
+  </p:cSld>
+  <p:clrMapOvr>
+    <a:masterClrMapping/>
+  </p:clrMapOvr>
+</p:sld>
+</file>
+
+<file path=ppt/slides/slide52.xml><?xml version="1.0" encoding="utf-8"?>
+<p:sld xmlns:a="http://schemas.openxmlformats.org/drawingml/2006/main" xmlns:r="http://schemas.openxmlformats.org/officeDocument/2006/relationships" xmlns:p="http://schemas.openxmlformats.org/presentationml/2006/main">
+  <p:cSld name="Slide 52">
+    <p:bg>
+      <p:bgPr>
+        <a:solidFill>
+          <a:srgbClr val="FFFFFF"/>
+        </a:solidFill>
+      </p:bgPr>
+    </p:bg>
+    <p:spTree>
+      <p:nvGrpSpPr>
+        <p:cNvPr id="1" name=""/>
+        <p:cNvGrpSpPr/>
+        <p:nvPr/>
+      </p:nvGrpSpPr>
+      <p:grpSpPr>
+        <a:xfrm>
+          <a:off x="0" y="0"/>
+          <a:ext cx="0" cy="0"/>
+          <a:chOff x="0" y="0"/>
+          <a:chExt cx="0" cy="0"/>
+        </a:xfrm>
+      </p:grpSpPr>
+      <p:sp>
+        <p:nvSpPr>
+          <p:cNvPr id="2" name="Text 0"/>
+          <p:cNvSpPr/>
+          <p:nvPr/>
+        </p:nvSpPr>
+        <p:spPr>
+          <a:xfrm>
+            <a:off x="566928" y="411480"/>
+            <a:ext cx="11055096" cy="685800"/>
+          </a:xfrm>
+          <a:prstGeom prst="rect">
+            <a:avLst/>
+          </a:prstGeom>
+          <a:noFill/>
+          <a:ln/>
+        </p:spPr>
+        <p:txBody>
+          <a:bodyPr wrap="square" rtlCol="0" anchor="ctr"/>
+          <a:lstStyle/>
+          <a:p>
+            <a:pPr indent="0" marL="0">
+              <a:buNone/>
+            </a:pPr>
+            <a:r>
+              <a:rPr lang="en-US" sz="3200" b="1" dirty="0">
                 <a:solidFill>
                   <a:srgbClr val="1F4C86"/>
                 </a:solidFill>
@@ -20339,11 +20663,31 @@
                 <a:ea typeface="Trebuchet MS" pitchFamily="34" charset="-122"/>
                 <a:cs typeface="Trebuchet MS" pitchFamily="34" charset="-120"/>
               </a:rPr>
-              <a:t>Everything is here</a:t>
-            </a:r>
-            <a:endParaRPr lang="en-US" sz="4000" dirty="0"/>
-          </a:p>
-        </p:txBody>
+              <a:t>Acknowledgements</a:t>
+            </a:r>
+            <a:endParaRPr lang="en-US" sz="3200" dirty="0"/>
+          </a:p>
+        </p:txBody>
+      </p:sp>
+      <p:sp>
+        <p:nvSpPr>
+          <p:cNvPr id="3" name="Shape 1"/>
+          <p:cNvSpPr/>
+          <p:nvPr/>
+        </p:nvSpPr>
+        <p:spPr>
+          <a:xfrm>
+            <a:off x="566928" y="1152144"/>
+            <a:ext cx="1920240" cy="50292"/>
+          </a:xfrm>
+          <a:prstGeom prst="rect">
+            <a:avLst/>
+          </a:prstGeom>
+          <a:solidFill>
+            <a:srgbClr val="3674C1"/>
+          </a:solidFill>
+          <a:ln/>
+        </p:spPr>
       </p:sp>
       <p:sp>
         <p:nvSpPr>
@@ -20353,8 +20697,8 @@
         </p:nvSpPr>
         <p:spPr>
           <a:xfrm>
-            <a:off x="960120" y="1691640"/>
-            <a:ext cx="8686800" cy="713232"/>
+            <a:off x="566928" y="1572768"/>
+            <a:ext cx="11055096" cy="2240280"/>
           </a:xfrm>
           <a:prstGeom prst="rect">
             <a:avLst/>
@@ -20367,14 +20711,34 @@
       </p:sp>
       <p:sp>
         <p:nvSpPr>
-          <p:cNvPr id="5" name="Text 3"/>
-          <p:cNvSpPr/>
-          <p:nvPr/>
-        </p:nvSpPr>
-        <p:spPr>
-          <a:xfrm>
-            <a:off x="1188720" y="1691640"/>
-            <a:ext cx="8412480" cy="713232"/>
+          <p:cNvPr id="5" name="Shape 3"/>
+          <p:cNvSpPr/>
+          <p:nvPr/>
+        </p:nvSpPr>
+        <p:spPr>
+          <a:xfrm>
+            <a:off x="566928" y="1572768"/>
+            <a:ext cx="146304" cy="2240280"/>
+          </a:xfrm>
+          <a:prstGeom prst="rect">
+            <a:avLst/>
+          </a:prstGeom>
+          <a:solidFill>
+            <a:srgbClr val="3674C1"/>
+          </a:solidFill>
+          <a:ln/>
+        </p:spPr>
+      </p:sp>
+      <p:sp>
+        <p:nvSpPr>
+          <p:cNvPr id="6" name="Text 4"/>
+          <p:cNvSpPr/>
+          <p:nvPr/>
+        </p:nvSpPr>
+        <p:spPr>
+          <a:xfrm>
+            <a:off x="978408" y="1737360"/>
+            <a:ext cx="10232136" cy="365760"/>
           </a:xfrm>
           <a:prstGeom prst="rect">
             <a:avLst/>
@@ -20390,30 +20754,170 @@
               <a:buNone/>
             </a:pPr>
             <a:r>
-              <a:rPr lang="en-US" sz="2200" b="1" dirty="0">
+              <a:rPr lang="en-US" sz="1600" b="1" spc="150" kern="0" dirty="0">
+                <a:solidFill>
+                  <a:srgbClr val="3674C1"/>
+                </a:solidFill>
+                <a:latin typeface="Calibri" pitchFamily="34" charset="0"/>
+                <a:ea typeface="Calibri" pitchFamily="34" charset="-122"/>
+                <a:cs typeface="Calibri" pitchFamily="34" charset="-120"/>
+              </a:rPr>
+              <a:t>Sample data</a:t>
+            </a:r>
+            <a:endParaRPr lang="en-US" sz="1600" dirty="0"/>
+          </a:p>
+        </p:txBody>
+      </p:sp>
+      <p:sp>
+        <p:nvSpPr>
+          <p:cNvPr id="7" name="Text 5"/>
+          <p:cNvSpPr/>
+          <p:nvPr/>
+        </p:nvSpPr>
+        <p:spPr>
+          <a:xfrm>
+            <a:off x="978408" y="2103120"/>
+            <a:ext cx="10232136" cy="566928"/>
+          </a:xfrm>
+          <a:prstGeom prst="rect">
+            <a:avLst/>
+          </a:prstGeom>
+          <a:noFill/>
+          <a:ln/>
+        </p:spPr>
+        <p:txBody>
+          <a:bodyPr wrap="square" rtlCol="0" anchor="ctr"/>
+          <a:lstStyle/>
+          <a:p>
+            <a:pPr indent="0" marL="0">
+              <a:buNone/>
+            </a:pPr>
+            <a:r>
+              <a:rPr lang="en-US" sz="3200" b="1" dirty="0">
                 <a:solidFill>
                   <a:srgbClr val="1F4C86"/>
                 </a:solidFill>
-                <a:latin typeface="Calibri" pitchFamily="34" charset="0"/>
-                <a:ea typeface="Calibri" pitchFamily="34" charset="-122"/>
-                <a:cs typeface="Calibri" pitchFamily="34" charset="-120"/>
-              </a:rPr>
-              <a:t>michaelsnelson.github.io/BINA-I2K-2026-QuPath-Extensions</a:t>
-            </a:r>
-            <a:endParaRPr lang="en-US" sz="2200" dirty="0"/>
-          </a:p>
-        </p:txBody>
-      </p:sp>
-      <p:sp>
-        <p:nvSpPr>
-          <p:cNvPr id="6" name="Text 4"/>
-          <p:cNvSpPr/>
-          <p:nvPr/>
-        </p:nvSpPr>
-        <p:spPr>
-          <a:xfrm>
-            <a:off x="960120" y="2697480"/>
-            <a:ext cx="9811512" cy="2560320"/>
+                <a:latin typeface="Trebuchet MS" pitchFamily="34" charset="0"/>
+                <a:ea typeface="Trebuchet MS" pitchFamily="34" charset="-122"/>
+                <a:cs typeface="Trebuchet MS" pitchFamily="34" charset="-120"/>
+              </a:rPr>
+              <a:t>Sara McArdle  ·  Zbigniew Mikulski</a:t>
+            </a:r>
+            <a:endParaRPr lang="en-US" sz="3200" dirty="0"/>
+          </a:p>
+        </p:txBody>
+      </p:sp>
+      <p:sp>
+        <p:nvSpPr>
+          <p:cNvPr id="8" name="Text 6"/>
+          <p:cNvSpPr/>
+          <p:nvPr/>
+        </p:nvSpPr>
+        <p:spPr>
+          <a:xfrm>
+            <a:off x="978408" y="2670048"/>
+            <a:ext cx="10232136" cy="384048"/>
+          </a:xfrm>
+          <a:prstGeom prst="rect">
+            <a:avLst/>
+          </a:prstGeom>
+          <a:noFill/>
+          <a:ln/>
+        </p:spPr>
+        <p:txBody>
+          <a:bodyPr wrap="square" rtlCol="0" anchor="ctr"/>
+          <a:lstStyle/>
+          <a:p>
+            <a:pPr indent="0" marL="0">
+              <a:buNone/>
+            </a:pPr>
+            <a:r>
+              <a:rPr lang="en-US" sz="2100" dirty="0">
+                <a:solidFill>
+                  <a:srgbClr val="1F2933"/>
+                </a:solidFill>
+                <a:latin typeface="Calibri" pitchFamily="34" charset="0"/>
+                <a:ea typeface="Calibri" pitchFamily="34" charset="-122"/>
+                <a:cs typeface="Calibri" pitchFamily="34" charset="-120"/>
+              </a:rPr>
+              <a:t>La Jolla Institute for Immunology</a:t>
+            </a:r>
+            <a:endParaRPr lang="en-US" sz="2100" dirty="0"/>
+          </a:p>
+        </p:txBody>
+      </p:sp>
+      <p:sp>
+        <p:nvSpPr>
+          <p:cNvPr id="9" name="Text 7"/>
+          <p:cNvSpPr/>
+          <p:nvPr/>
+        </p:nvSpPr>
+        <p:spPr>
+          <a:xfrm>
+            <a:off x="978408" y="3054096"/>
+            <a:ext cx="10232136" cy="731520"/>
+          </a:xfrm>
+          <a:prstGeom prst="rect">
+            <a:avLst/>
+          </a:prstGeom>
+          <a:noFill/>
+          <a:ln/>
+        </p:spPr>
+        <p:txBody>
+          <a:bodyPr wrap="square" rtlCol="0" anchor="ctr"/>
+          <a:lstStyle/>
+          <a:p>
+            <a:pPr indent="0" marL="0">
+              <a:lnSpc>
+                <a:spcPct val="110000"/>
+              </a:lnSpc>
+              <a:buNone/>
+            </a:pPr>
+            <a:r>
+              <a:rPr lang="en-US" sz="1700" i="1" dirty="0">
+                <a:solidFill>
+                  <a:srgbClr val="5A6675"/>
+                </a:solidFill>
+                <a:latin typeface="Calibri" pitchFamily="34" charset="0"/>
+                <a:ea typeface="Calibri" pitchFamily="34" charset="-122"/>
+                <a:cs typeface="Calibri" pitchFamily="34" charset="-120"/>
+              </a:rPr>
+              <a:t>They provided the majority of the test and demonstration data behind almost every exercise you will see today.</a:t>
+            </a:r>
+            <a:endParaRPr lang="en-US" sz="1700" dirty="0"/>
+          </a:p>
+          <a:p>
+            <a:pPr indent="0" marL="0">
+              <a:lnSpc>
+                <a:spcPct val="110000"/>
+              </a:lnSpc>
+              <a:buNone/>
+            </a:pPr>
+            <a:r>
+              <a:rPr lang="en-US" sz="1700" i="1" dirty="0">
+                <a:solidFill>
+                  <a:srgbClr val="5A6675"/>
+                </a:solidFill>
+                <a:latin typeface="Calibri" pitchFamily="34" charset="0"/>
+                <a:ea typeface="Calibri" pitchFamily="34" charset="-122"/>
+                <a:cs typeface="Calibri" pitchFamily="34" charset="-120"/>
+              </a:rPr>
+              <a:t>These tools could not have been built, tested, or taught without it.</a:t>
+            </a:r>
+            <a:endParaRPr lang="en-US" sz="1700" dirty="0"/>
+          </a:p>
+        </p:txBody>
+      </p:sp>
+      <p:sp>
+        <p:nvSpPr>
+          <p:cNvPr id="10" name="Text 8"/>
+          <p:cNvSpPr/>
+          <p:nvPr/>
+        </p:nvSpPr>
+        <p:spPr>
+          <a:xfrm>
+            <a:off x="566928" y="3977640"/>
+            <a:ext cx="11055096" cy="2103120"/>
           </a:xfrm>
           <a:prstGeom prst="rect">
             <a:avLst/>
@@ -20432,6 +20936,270 @@
               <a:buNone/>
             </a:pPr>
             <a:r>
+              <a:rPr lang="en-US" sz="1700" dirty="0">
+                <a:solidFill>
+                  <a:srgbClr val="1F2933"/>
+                </a:solidFill>
+                <a:latin typeface="Calibri" pitchFamily="34" charset="0"/>
+                <a:ea typeface="Calibri" pitchFamily="34" charset="-122"/>
+                <a:cs typeface="Calibri" pitchFamily="34" charset="-120"/>
+              </a:rPr>
+              <a:t>Sara McArdle also shaped the software directly — two of these extensions began as her Groovy scripts, and her FS2K course was the model for how the workshop pages are written.
+</a:t>
+            </a:r>
+            <a:pPr indent="0" marL="0">
+              <a:spcAft>
+                <a:spcPts val="1000"/>
+              </a:spcAft>
+              <a:buNone/>
+            </a:pPr>
+            <a:r>
+              <a:rPr lang="en-US" sz="1700" dirty="0">
+                <a:solidFill>
+                  <a:srgbClr val="1F2933"/>
+                </a:solidFill>
+                <a:latin typeface="Calibri" pitchFamily="34" charset="0"/>
+                <a:ea typeface="Calibri" pitchFamily="34" charset="-122"/>
+                <a:cs typeface="Calibri" pitchFamily="34" charset="-120"/>
+              </a:rPr>
+              <a:t>Kristin Gallick, whose concept and scripts the Confusion Matrix grew from.  ·  Pete Bankhead and the QuPath team.  ·  CT-FIRE, CurveAlign, TACS and TWOMBLI for the fibre work.  ·  CytoMAP and QuBaLab for bringing clustering into QuPath.  ·  QUAREP-LiMi for the reporting standards.  ·  The image.sc community, where several of these features were first requested.
+</a:t>
+            </a:r>
+            <a:pPr indent="0" marL="0">
+              <a:buNone/>
+            </a:pPr>
+            <a:r>
+              <a:rPr lang="en-US" sz="1700" b="1" dirty="0">
+                <a:solidFill>
+                  <a:srgbClr val="1F4C86"/>
+                </a:solidFill>
+                <a:latin typeface="Calibri" pitchFamily="34" charset="0"/>
+                <a:ea typeface="Calibri" pitchFamily="34" charset="-122"/>
+                <a:cs typeface="Calibri" pitchFamily="34" charset="-120"/>
+              </a:rPr>
+              <a:t>Full credits: michaelsnelson.github.io/BINA-I2K-2026-QuPath-Extensions/docs/acknowledgements.html</a:t>
+            </a:r>
+            <a:endParaRPr lang="en-US" sz="1700" dirty="0"/>
+          </a:p>
+        </p:txBody>
+      </p:sp>
+      <p:sp>
+        <p:nvSpPr>
+          <p:cNvPr id="11" name="Text 9"/>
+          <p:cNvSpPr/>
+          <p:nvPr/>
+        </p:nvSpPr>
+        <p:spPr>
+          <a:xfrm>
+            <a:off x="11274552" y="6291072"/>
+            <a:ext cx="457200" cy="310896"/>
+          </a:xfrm>
+          <a:prstGeom prst="rect">
+            <a:avLst/>
+          </a:prstGeom>
+          <a:noFill/>
+          <a:ln/>
+        </p:spPr>
+        <p:txBody>
+          <a:bodyPr wrap="square" rtlCol="0" anchor="ctr"/>
+          <a:lstStyle/>
+          <a:p>
+            <a:pPr algn="r" indent="0" marL="0">
+              <a:buNone/>
+            </a:pPr>
+            <a:r>
+              <a:rPr lang="en-US" sz="1400" dirty="0">
+                <a:solidFill>
+                  <a:srgbClr val="A8B2BF"/>
+                </a:solidFill>
+                <a:latin typeface="Calibri" pitchFamily="34" charset="0"/>
+                <a:ea typeface="Calibri" pitchFamily="34" charset="-122"/>
+                <a:cs typeface="Calibri" pitchFamily="34" charset="-120"/>
+              </a:rPr>
+              <a:t>52</a:t>
+            </a:r>
+            <a:endParaRPr lang="en-US" sz="1400" dirty="0"/>
+          </a:p>
+        </p:txBody>
+      </p:sp>
+    </p:spTree>
+  </p:cSld>
+  <p:clrMapOvr>
+    <a:masterClrMapping/>
+  </p:clrMapOvr>
+</p:sld>
+</file>
+
+<file path=ppt/slides/slide53.xml><?xml version="1.0" encoding="utf-8"?>
+<p:sld xmlns:a="http://schemas.openxmlformats.org/drawingml/2006/main" xmlns:r="http://schemas.openxmlformats.org/officeDocument/2006/relationships" xmlns:p="http://schemas.openxmlformats.org/presentationml/2006/main">
+  <p:cSld name="Slide 53">
+    <p:bg>
+      <p:bgPr>
+        <a:solidFill>
+          <a:srgbClr val="FFFFFF"/>
+        </a:solidFill>
+      </p:bgPr>
+    </p:bg>
+    <p:spTree>
+      <p:nvGrpSpPr>
+        <p:cNvPr id="1" name=""/>
+        <p:cNvGrpSpPr/>
+        <p:nvPr/>
+      </p:nvGrpSpPr>
+      <p:grpSpPr>
+        <a:xfrm>
+          <a:off x="0" y="0"/>
+          <a:ext cx="0" cy="0"/>
+          <a:chOff x="0" y="0"/>
+          <a:chExt cx="0" cy="0"/>
+        </a:xfrm>
+      </p:grpSpPr>
+      <p:sp>
+        <p:nvSpPr>
+          <p:cNvPr id="2" name="Shape 0"/>
+          <p:cNvSpPr/>
+          <p:nvPr/>
+        </p:nvSpPr>
+        <p:spPr>
+          <a:xfrm>
+            <a:off x="0" y="0"/>
+            <a:ext cx="274320" cy="6858000"/>
+          </a:xfrm>
+          <a:prstGeom prst="rect">
+            <a:avLst/>
+          </a:prstGeom>
+          <a:solidFill>
+            <a:srgbClr val="3674C1"/>
+          </a:solidFill>
+          <a:ln/>
+        </p:spPr>
+      </p:sp>
+      <p:sp>
+        <p:nvSpPr>
+          <p:cNvPr id="3" name="Text 1"/>
+          <p:cNvSpPr/>
+          <p:nvPr/>
+        </p:nvSpPr>
+        <p:spPr>
+          <a:xfrm>
+            <a:off x="960120" y="777240"/>
+            <a:ext cx="10268712" cy="822960"/>
+          </a:xfrm>
+          <a:prstGeom prst="rect">
+            <a:avLst/>
+          </a:prstGeom>
+          <a:noFill/>
+          <a:ln/>
+        </p:spPr>
+        <p:txBody>
+          <a:bodyPr wrap="square" rtlCol="0" anchor="ctr"/>
+          <a:lstStyle/>
+          <a:p>
+            <a:pPr indent="0" marL="0">
+              <a:buNone/>
+            </a:pPr>
+            <a:r>
+              <a:rPr lang="en-US" sz="4000" b="1" dirty="0">
+                <a:solidFill>
+                  <a:srgbClr val="1F4C86"/>
+                </a:solidFill>
+                <a:latin typeface="Trebuchet MS" pitchFamily="34" charset="0"/>
+                <a:ea typeface="Trebuchet MS" pitchFamily="34" charset="-122"/>
+                <a:cs typeface="Trebuchet MS" pitchFamily="34" charset="-120"/>
+              </a:rPr>
+              <a:t>Everything is here</a:t>
+            </a:r>
+            <a:endParaRPr lang="en-US" sz="4000" dirty="0"/>
+          </a:p>
+        </p:txBody>
+      </p:sp>
+      <p:sp>
+        <p:nvSpPr>
+          <p:cNvPr id="4" name="Shape 2"/>
+          <p:cNvSpPr/>
+          <p:nvPr/>
+        </p:nvSpPr>
+        <p:spPr>
+          <a:xfrm>
+            <a:off x="960120" y="1691640"/>
+            <a:ext cx="8686800" cy="713232"/>
+          </a:xfrm>
+          <a:prstGeom prst="rect">
+            <a:avLst/>
+          </a:prstGeom>
+          <a:solidFill>
+            <a:srgbClr val="E8F0FA"/>
+          </a:solidFill>
+          <a:ln/>
+        </p:spPr>
+      </p:sp>
+      <p:sp>
+        <p:nvSpPr>
+          <p:cNvPr id="5" name="Text 3"/>
+          <p:cNvSpPr/>
+          <p:nvPr/>
+        </p:nvSpPr>
+        <p:spPr>
+          <a:xfrm>
+            <a:off x="1188720" y="1691640"/>
+            <a:ext cx="8412480" cy="713232"/>
+          </a:xfrm>
+          <a:prstGeom prst="rect">
+            <a:avLst/>
+          </a:prstGeom>
+          <a:noFill/>
+          <a:ln/>
+        </p:spPr>
+        <p:txBody>
+          <a:bodyPr wrap="square" rtlCol="0" anchor="ctr"/>
+          <a:lstStyle/>
+          <a:p>
+            <a:pPr indent="0" marL="0">
+              <a:buNone/>
+            </a:pPr>
+            <a:r>
+              <a:rPr lang="en-US" sz="2200" b="1" dirty="0">
+                <a:solidFill>
+                  <a:srgbClr val="1F4C86"/>
+                </a:solidFill>
+                <a:latin typeface="Calibri" pitchFamily="34" charset="0"/>
+                <a:ea typeface="Calibri" pitchFamily="34" charset="-122"/>
+                <a:cs typeface="Calibri" pitchFamily="34" charset="-120"/>
+              </a:rPr>
+              <a:t>michaelsnelson.github.io/BINA-I2K-2026-QuPath-Extensions</a:t>
+            </a:r>
+            <a:endParaRPr lang="en-US" sz="2200" dirty="0"/>
+          </a:p>
+        </p:txBody>
+      </p:sp>
+      <p:sp>
+        <p:nvSpPr>
+          <p:cNvPr id="6" name="Text 4"/>
+          <p:cNvSpPr/>
+          <p:nvPr/>
+        </p:nvSpPr>
+        <p:spPr>
+          <a:xfrm>
+            <a:off x="960120" y="2697480"/>
+            <a:ext cx="9811512" cy="2560320"/>
+          </a:xfrm>
+          <a:prstGeom prst="rect">
+            <a:avLst/>
+          </a:prstGeom>
+          <a:noFill/>
+          <a:ln/>
+        </p:spPr>
+        <p:txBody>
+          <a:bodyPr wrap="square" rtlCol="0" anchor="t"/>
+          <a:lstStyle/>
+          <a:p>
+            <a:pPr indent="0" marL="0">
+              <a:spcAft>
+                <a:spcPts val="1000"/>
+              </a:spcAft>
+              <a:buNone/>
+            </a:pPr>
+            <a:r>
               <a:rPr lang="en-US" sz="1900" dirty="0">
                 <a:solidFill>
                   <a:srgbClr val="1F2933"/>
@@ -20626,7 +21394,7 @@
                 <a:ea typeface="Calibri" pitchFamily="34" charset="-122"/>
                 <a:cs typeface="Calibri" pitchFamily="34" charset="-120"/>
               </a:rPr>
-              <a:t>51</a:t>
+              <a:t>53</a:t>
             </a:r>
             <a:endParaRPr lang="en-US" sz="1400" dirty="0"/>
           </a:p>

--- a/I2K_2026_QuPath_Extensions.pptx
+++ b/I2K_2026_QuPath_Extensions.pptx
@@ -12392,7 +12392,7 @@
                 <a:ea typeface="Trebuchet MS" pitchFamily="34" charset="-122"/>
                 <a:cs typeface="Trebuchet MS" pitchFamily="34" charset="-120"/>
               </a:rPr>
-              <a:t>Measure once, on the image with the most contrast</a:t>
+              <a:t>Measure once, on the image with the clearest structure</a:t>
             </a:r>
             <a:endParaRPr lang="en-US" sz="3000" dirty="0"/>
           </a:p>
@@ -12577,7 +12577,7 @@
                 <a:ea typeface="Calibri" pitchFamily="34" charset="-122"/>
                 <a:cs typeface="Calibri" pitchFamily="34" charset="-120"/>
               </a:rPr>
-              <a:t>Measure the positions on whichever angle or channel carries the most information. Every other image of the same tiles reuses that measurement, so they stay aligned with each other.</a:t>
+              <a:t>Measure the positions on the image with the most distinct, best separated structure, which is not always the brightest or the busiest one. Every other image of the same tiles reuses that measurement, so they stay aligned with each other.</a:t>
             </a:r>
             <a:endParaRPr lang="en-US" sz="1500" dirty="0"/>
           </a:p>

--- a/I2K_2026_QuPath_Extensions.pptx
+++ b/I2K_2026_QuPath_Extensions.pptx
@@ -21316,7 +21316,7 @@
                 <a:ea typeface="Calibri" pitchFamily="34" charset="-122"/>
                 <a:cs typeface="Calibri" pitchFamily="34" charset="-120"/>
               </a:rPr>
-              <a:t>Sample data courtesy of Sara McArdle and Zbigniew Mikulski, La Jolla Institute for Immunology.</a:t>
+              <a:t>Slide-label images courtesy of Sara McArdle and Zbigniew Mikulski, La Jolla Institute for Immunology. Other data: public images, a CC0 synthetic set, and tiles acquired at LOCI.</a:t>
             </a:r>
             <a:endParaRPr lang="en-US" sz="1600" dirty="0"/>
           </a:p>

--- a/I2K_2026_QuPath_Extensions.pptx
+++ b/I2K_2026_QuPath_Extensions.pptx
@@ -7721,7 +7721,7 @@
                 <a:ea typeface="Calibri" pitchFamily="34" charset="-122"/>
                 <a:cs typeface="Calibri" pitchFamily="34" charset="-120"/>
               </a:rPr>
-              <a:t>The least glamorous tool here, and the one that saves the most support time.</a:t>
+              <a:t>The least glamorous tool here.</a:t>
             </a:r>
             <a:endParaRPr lang="en-US" sz="1700" dirty="0"/>
           </a:p>
@@ -11493,7 +11493,7 @@
                 <a:ea typeface="Calibri" pitchFamily="34" charset="-122"/>
                 <a:cs typeface="Calibri" pitchFamily="34" charset="-120"/>
               </a:rPr>
-              <a:t>If you just ran label recognition across 467 slides, this is where you find out whether it worked.</a:t>
+              <a:t>If you just ran label recognition across a few hundred slides, this is where you find out whether it worked.</a:t>
             </a:r>
             <a:endParaRPr lang="en-US" sz="1700" dirty="0"/>
           </a:p>
@@ -11675,7 +11675,7 @@
                 <a:ea typeface="Calibri" pitchFamily="34" charset="-122"/>
                 <a:cs typeface="Calibri" pitchFamily="34" charset="-120"/>
               </a:rPr>
-              <a:t>Sorting by a recognised column is the fastest quality check available — bad reads are outliers.</a:t>
+              <a:t>Sorting by a recognised column makes the bad reads stand out as outliers.</a:t>
             </a:r>
             <a:endParaRPr lang="en-US" sz="1600" dirty="0"/>
           </a:p>

--- a/I2K_2026_QuPath_Extensions.pptx
+++ b/I2K_2026_QuPath_Extensions.pptx
@@ -6218,71 +6218,7 @@
       </p:sp>
       <p:sp>
         <p:nvSpPr>
-          <p:cNvPr id="6" name="Shape 4"/>
-          <p:cNvSpPr/>
-          <p:nvPr/>
-        </p:nvSpPr>
-        <p:spPr>
-          <a:xfrm>
-            <a:off x="566928" y="5650992"/>
-            <a:ext cx="11055096" cy="566928"/>
-          </a:xfrm>
-          <a:prstGeom prst="rect">
-            <a:avLst/>
-          </a:prstGeom>
-          <a:solidFill>
-            <a:srgbClr val="F4F8FD"/>
-          </a:solidFill>
-          <a:ln w="9525">
-            <a:solidFill>
-              <a:srgbClr val="3674C1"/>
-            </a:solidFill>
-            <a:prstDash val="solid"/>
-          </a:ln>
-        </p:spPr>
-      </p:sp>
-      <p:sp>
-        <p:nvSpPr>
-          <p:cNvPr id="7" name="Text 5"/>
-          <p:cNvSpPr/>
-          <p:nvPr/>
-        </p:nvSpPr>
-        <p:spPr>
-          <a:xfrm>
-            <a:off x="768096" y="5650992"/>
-            <a:ext cx="10652760" cy="566928"/>
-          </a:xfrm>
-          <a:prstGeom prst="rect">
-            <a:avLst/>
-          </a:prstGeom>
-          <a:noFill/>
-          <a:ln/>
-        </p:spPr>
-        <p:txBody>
-          <a:bodyPr wrap="square" rtlCol="0" anchor="ctr"/>
-          <a:lstStyle/>
-          <a:p>
-            <a:pPr indent="0" marL="0">
-              <a:buNone/>
-            </a:pPr>
-            <a:r>
-              <a:rPr lang="en-US" sz="1600" b="1" dirty="0">
-                <a:solidFill>
-                  <a:srgbClr val="1F4C86"/>
-                </a:solidFill>
-                <a:latin typeface="Calibri" pitchFamily="34" charset="0"/>
-                <a:ea typeface="Calibri" pitchFamily="34" charset="-122"/>
-                <a:cs typeface="Calibri" pitchFamily="34" charset="-120"/>
-              </a:rPr>
-              <a:t>Publishing your own catalog takes about twenty minutes and removes a support burden.</a:t>
-            </a:r>
-            <a:endParaRPr lang="en-US" sz="1600" dirty="0"/>
-          </a:p>
-        </p:txBody>
-      </p:sp>
-      <p:sp>
-        <p:nvSpPr>
-          <p:cNvPr id="8" name="Text 6"/>
+          <p:cNvPr id="6" name="Text 4"/>
           <p:cNvSpPr/>
           <p:nvPr/>
         </p:nvSpPr>
@@ -12857,7 +12793,71 @@
       </p:sp>
       <p:sp>
         <p:nvSpPr>
-          <p:cNvPr id="5" name="Text 3"/>
+          <p:cNvPr id="5" name="Shape 3"/>
+          <p:cNvSpPr/>
+          <p:nvPr/>
+        </p:nvSpPr>
+        <p:spPr>
+          <a:xfrm>
+            <a:off x="566928" y="5650992"/>
+            <a:ext cx="11055096" cy="566928"/>
+          </a:xfrm>
+          <a:prstGeom prst="rect">
+            <a:avLst/>
+          </a:prstGeom>
+          <a:solidFill>
+            <a:srgbClr val="F4F8FD"/>
+          </a:solidFill>
+          <a:ln w="9525">
+            <a:solidFill>
+              <a:srgbClr val="3674C1"/>
+            </a:solidFill>
+            <a:prstDash val="solid"/>
+          </a:ln>
+        </p:spPr>
+      </p:sp>
+      <p:sp>
+        <p:nvSpPr>
+          <p:cNvPr id="6" name="Text 4"/>
+          <p:cNvSpPr/>
+          <p:nvPr/>
+        </p:nvSpPr>
+        <p:spPr>
+          <a:xfrm>
+            <a:off x="768096" y="5650992"/>
+            <a:ext cx="10652760" cy="566928"/>
+          </a:xfrm>
+          <a:prstGeom prst="rect">
+            <a:avLst/>
+          </a:prstGeom>
+          <a:noFill/>
+          <a:ln/>
+        </p:spPr>
+        <p:txBody>
+          <a:bodyPr wrap="square" rtlCol="0" anchor="ctr"/>
+          <a:lstStyle/>
+          <a:p>
+            <a:pPr indent="0" marL="0">
+              <a:buNone/>
+            </a:pPr>
+            <a:r>
+              <a:rPr lang="en-US" sz="1600" b="1" dirty="0">
+                <a:solidFill>
+                  <a:srgbClr val="1F4C86"/>
+                </a:solidFill>
+                <a:latin typeface="Calibri" pitchFamily="34" charset="0"/>
+                <a:ea typeface="Calibri" pitchFamily="34" charset="-122"/>
+                <a:cs typeface="Calibri" pitchFamily="34" charset="-120"/>
+              </a:rPr>
+              <a:t>Most of these are under active development, written in bursts as I have time. Useful, not stable — treat them accordingly.</a:t>
+            </a:r>
+            <a:endParaRPr lang="en-US" sz="1600" dirty="0"/>
+          </a:p>
+        </p:txBody>
+      </p:sp>
+      <p:sp>
+        <p:nvSpPr>
+          <p:cNvPr id="7" name="Text 5"/>
           <p:cNvSpPr/>
           <p:nvPr/>
         </p:nvSpPr>
@@ -20882,7 +20882,7 @@
                 <a:ea typeface="Calibri" pitchFamily="34" charset="-122"/>
                 <a:cs typeface="Calibri" pitchFamily="34" charset="-120"/>
               </a:rPr>
-              <a:t>They provided the majority of the test and demonstration data behind almost every exercise you will see today.</a:t>
+              <a:t>They provided the slide-label images behind the OCR and metadata exercises. Label images are the kind of data nobody publishes, so those exercises could not exist without them.</a:t>
             </a:r>
             <a:endParaRPr lang="en-US" sz="1700" dirty="0"/>
           </a:p>
@@ -20902,7 +20902,7 @@
                 <a:ea typeface="Calibri" pitchFamily="34" charset="-122"/>
                 <a:cs typeface="Calibri" pitchFamily="34" charset="-120"/>
               </a:rPr>
-              <a:t>These tools could not have been built, tested, or taught without it.</a:t>
+              <a:t>Other data today: public images, a CC0 synthetic set, and tiles acquired at LOCI.</a:t>
             </a:r>
             <a:endParaRPr lang="en-US" sz="1700" dirty="0"/>
           </a:p>
@@ -22352,7 +22352,7 @@
                 <a:ea typeface="Calibri" pitchFamily="34" charset="-122"/>
                 <a:cs typeface="Calibri" pitchFamily="34" charset="-120"/>
               </a:rPr>
-              <a:t>This is roughly half of all "the menu item is not there" reports</a:t>
+              <a:t>Extensions are only loaded at startup, so nothing appears until you restart</a:t>
             </a:r>
             <a:endParaRPr lang="en-US" sz="2000" dirty="0"/>
           </a:p>

--- a/I2K_2026_QuPath_Extensions.pptx
+++ b/I2K_2026_QuPath_Extensions.pptx
@@ -20882,7 +20882,7 @@
                 <a:ea typeface="Calibri" pitchFamily="34" charset="-122"/>
                 <a:cs typeface="Calibri" pitchFamily="34" charset="-120"/>
               </a:rPr>
-              <a:t>They provided the slide-label images behind the OCR and metadata exercises. Label images are the kind of data nobody publishes, so those exercises could not exist without them.</a:t>
+              <a:t>They provided the slide-label images behind the OCR and metadata exercises.</a:t>
             </a:r>
             <a:endParaRPr lang="en-US" sz="1700" dirty="0"/>
           </a:p>

--- a/I2K_2026_QuPath_Extensions.pptx
+++ b/I2K_2026_QuPath_Extensions.pptx
@@ -7949,7 +7949,7 @@
                 <a:ea typeface="Trebuchet MS" pitchFamily="34" charset="-122"/>
                 <a:cs typeface="Trebuchet MS" pitchFamily="34" charset="-120"/>
               </a:rPr>
-              <a:t>Two you already saw this morning</a:t>
+              <a:t>Two you may already have seen</a:t>
             </a:r>
             <a:endParaRPr lang="en-US" sz="3000" dirty="0"/>
           </a:p>
@@ -8008,7 +8008,7 @@
                 <a:ea typeface="Calibri" pitchFamily="34" charset="-122"/>
                 <a:cs typeface="Calibri" pitchFamily="34" charset="-120"/>
               </a:rPr>
-              <a:t>From “Tips and tricks for maintaining sanity during hi-plex classification in QuPath”, earlier today.</a:t>
+              <a:t>From “Tips and tricks for maintaining sanity during hi-plex classification in QuPath”, earlier in the conference.</a:t>
             </a:r>
             <a:endParaRPr lang="en-US" sz="1700" dirty="0"/>
           </a:p>
@@ -8102,7 +8102,7 @@
                 <a:ea typeface="Calibri" pitchFamily="34" charset="-122"/>
                 <a:cs typeface="Calibri" pitchFamily="34" charset="-120"/>
               </a:rPr>
-              <a:t>Both began as Sara McArdle’s Groovy scripts, and Sara demonstrated both in the session before this one</a:t>
+              <a:t>Both began as Sara McArdle’s Groovy scripts, and Sara demonstrated both in her session earlier in the conference</a:t>
             </a:r>
             <a:endParaRPr lang="en-US" sz="2000" dirty="0"/>
           </a:p>
@@ -15538,7 +15538,7 @@
                 <a:ea typeface="Calibri" pitchFamily="34" charset="-122"/>
                 <a:cs typeface="Calibri" pitchFamily="34" charset="-120"/>
               </a:rPr>
-              <a:t>We are not re-teaching it. Sara’s session this morning was the hi-plex classification half</a:t>
+              <a:t>We are not re-teaching it. Sara’s earlier session was the hi-plex classification half</a:t>
             </a:r>
             <a:endParaRPr lang="en-US" sz="2000" dirty="0"/>
           </a:p>
@@ -19815,7 +19815,7 @@
                 <a:ea typeface="Calibri" pitchFamily="34" charset="-122"/>
                 <a:cs typeface="Calibri" pitchFamily="34" charset="-120"/>
               </a:rPr>
-              <a:t>A few slots are fixed; two more were covered in Sara McArdle’s session this morning</a:t>
+              <a:t>A few slots are fixed; two more were covered in Sara McArdle’s session earlier in the conference</a:t>
             </a:r>
             <a:endParaRPr lang="en-US" sz="2000" dirty="0"/>
           </a:p>
@@ -21604,7 +21604,7 @@
                 <a:ea typeface="Calibri" pitchFamily="34" charset="-122"/>
                 <a:cs typeface="Calibri" pitchFamily="34" charset="-120"/>
               </a:rPr>
-              <a:t>Already fixed: QPSC, the Confusion Matrix and the fibre tools are shown regardless — and Channel Names Viewer and Classify Object Subset were covered in Sara McArdle’s session this morning.
+              <a:t>Already fixed: QPSC, the Confusion Matrix and the fibre tools are shown regardless — and Channel Names Viewer and Classify Object Subset were covered in Sara McArdle’s session earlier in the conference.
 </a:t>
             </a:r>
             <a:pPr indent="0" marL="0">

--- a/I2K_2026_QuPath_Extensions.pptx
+++ b/I2K_2026_QuPath_Extensions.pptx
@@ -8008,7 +8008,7 @@
                 <a:ea typeface="Calibri" pitchFamily="34" charset="-122"/>
                 <a:cs typeface="Calibri" pitchFamily="34" charset="-120"/>
               </a:rPr>
-              <a:t>From “Tips and tricks for maintaining sanity during hi-plex classification in QuPath”, earlier in the conference.</a:t>
+              <a:t>From “Tips and tricks for maintaining sanity during hi-plex classification in QuPath”, Monday 11:00.</a:t>
             </a:r>
             <a:endParaRPr lang="en-US" sz="1700" dirty="0"/>
           </a:p>
@@ -8102,7 +8102,7 @@
                 <a:ea typeface="Calibri" pitchFamily="34" charset="-122"/>
                 <a:cs typeface="Calibri" pitchFamily="34" charset="-120"/>
               </a:rPr>
-              <a:t>Both began as Sara McArdle’s Groovy scripts, and Sara demonstrated both in her session earlier in the conference</a:t>
+              <a:t>Both began as Sara McArdle’s Groovy scripts, and Sara demonstrated both in her session yesterday</a:t>
             </a:r>
             <a:endParaRPr lang="en-US" sz="2000" dirty="0"/>
           </a:p>
@@ -15538,7 +15538,7 @@
                 <a:ea typeface="Calibri" pitchFamily="34" charset="-122"/>
                 <a:cs typeface="Calibri" pitchFamily="34" charset="-120"/>
               </a:rPr>
-              <a:t>We are not re-teaching it. Sara’s earlier session was the hi-plex classification half</a:t>
+              <a:t>We are not re-teaching it. Sara’s Monday session was the hi-plex classification half</a:t>
             </a:r>
             <a:endParaRPr lang="en-US" sz="2000" dirty="0"/>
           </a:p>
@@ -19815,7 +19815,7 @@
                 <a:ea typeface="Calibri" pitchFamily="34" charset="-122"/>
                 <a:cs typeface="Calibri" pitchFamily="34" charset="-120"/>
               </a:rPr>
-              <a:t>A few slots are fixed; two more were covered in Sara McArdle’s session earlier in the conference</a:t>
+              <a:t>A few slots are fixed; two more were covered in Sara McArdle’s session yesterday</a:t>
             </a:r>
             <a:endParaRPr lang="en-US" sz="2000" dirty="0"/>
           </a:p>
@@ -21604,7 +21604,7 @@
                 <a:ea typeface="Calibri" pitchFamily="34" charset="-122"/>
                 <a:cs typeface="Calibri" pitchFamily="34" charset="-120"/>
               </a:rPr>
-              <a:t>Already fixed: QPSC, the Confusion Matrix and the fibre tools are shown regardless — and Channel Names Viewer and Classify Object Subset were covered in Sara McArdle’s session earlier in the conference.
+              <a:t>Already fixed: QPSC, the Confusion Matrix and the fibre tools are shown regardless — and Channel Names Viewer and Classify Object Subset were covered in Sara McArdle’s session yesterday.
 </a:t>
             </a:r>
             <a:pPr indent="0" marL="0">

--- a/I2K_2026_QuPath_Extensions.pptx
+++ b/I2K_2026_QuPath_Extensions.pptx
@@ -16648,7 +16648,7 @@
                 <a:ea typeface="Calibri" pitchFamily="34" charset="-122"/>
                 <a:cs typeface="Calibri" pitchFamily="34" charset="-120"/>
               </a:rPr>
-              <a:t>Inflamed versus desert: one image is 55% lymphoid, another 14% with no follicles at all</a:t>
+              <a:t>Inflamed versus desert: one image is 52% lymphoid, another 9% with no B cells at all</a:t>
             </a:r>
             <a:endParaRPr lang="en-US" sz="2000" dirty="0"/>
           </a:p>

--- a/I2K_2026_QuPath_Extensions.pptx
+++ b/I2K_2026_QuPath_Extensions.pptx
@@ -6210,7 +6210,7 @@
                 <a:ea typeface="Calibri" pitchFamily="34" charset="-122"/>
                 <a:cs typeface="Calibri" pitchFamily="34" charset="-120"/>
               </a:rPr>
-              <a:t>Install only what you want — QP-CAT and the DL classifier each pull 1.5–2.5 GB on first use</a:t>
+              <a:t>Install only what you want — QP-CAT pulls 1.5–2.5 GB on first use, the DL classifier 2–4 GB</a:t>
             </a:r>
             <a:endParaRPr lang="en-US" sz="2000" dirty="0"/>
           </a:p>
@@ -13340,7 +13340,7 @@
                 <a:ea typeface="Calibri" pitchFamily="34" charset="-122"/>
                 <a:cs typeface="Calibri" pitchFamily="34" charset="-120"/>
               </a:rPr>
-              <a:t>Bootstrap confidence intervals on every per-class metric</a:t>
+              <a:t>Bootstrap confidence intervals on the overall and macro-averaged metrics</a:t>
             </a:r>
             <a:endParaRPr lang="en-US" sz="2000" dirty="0"/>
           </a:p>
@@ -18701,7 +18701,7 @@
                 <a:ea typeface="Calibri" pitchFamily="34" charset="-122"/>
                 <a:cs typeface="Calibri" pitchFamily="34" charset="-120"/>
               </a:rPr>
-              <a:t>TACS — Conklin et al. 2011; Provenzano et al. 2008, BMC Medicine 6:11</a:t>
+              <a:t>TACS — Provenzano et al. 2006, BMC Medicine 4:38; Conklin et al. 2011</a:t>
             </a:r>
             <a:endParaRPr lang="en-US" sz="2000" dirty="0"/>
           </a:p>
@@ -19767,7 +19767,7 @@
                 <a:ea typeface="Calibri" pitchFamily="34" charset="-122"/>
                 <a:cs typeface="Calibri" pitchFamily="34" charset="-120"/>
               </a:rPr>
-              <a:t>So: every tool has a full written walkthrough, and a video of me doing it</a:t>
+              <a:t>So: every tool has a full written walkthrough, and will have a video of me doing it</a:t>
             </a:r>
             <a:endParaRPr lang="en-US" sz="2000" dirty="0"/>
           </a:p>
@@ -21208,7 +21208,7 @@
                 <a:ea typeface="Calibri" pitchFamily="34" charset="-122"/>
                 <a:cs typeface="Calibri" pitchFamily="34" charset="-120"/>
               </a:rPr>
-              <a:t>A written walkthrough and a video for every tool  ·  setup instructions  ·  sample data  ·  these slides
+              <a:t>A written walkthrough for every tool, videos to follow  ·  setup instructions  ·  sample data  ·  these slides
 </a:t>
             </a:r>
             <a:pPr indent="0" marL="0">
@@ -21262,7 +21262,7 @@
                 <a:ea typeface="Calibri" pitchFamily="34" charset="-122"/>
                 <a:cs typeface="Calibri" pitchFamily="34" charset="-120"/>
               </a:rPr>
-              <a:t>Adding it installs nothing — you pick from the list. Two entries download 1.5–2.5 GB.
+              <a:t>Adding it installs nothing — you pick from the list. Two entries download 1.5–4 GB.
 </a:t>
             </a:r>
             <a:pPr indent="0" marL="0">
@@ -22333,26 +22333,26 @@
             <a:endParaRPr lang="en-US" sz="2000" dirty="0"/>
           </a:p>
           <a:p>
-            <a:pPr lvl="1" marL="685800" indent="-342900">
+            <a:pPr marL="342900" indent="-342900">
               <a:lnSpc>
                 <a:spcPct val="105000"/>
               </a:lnSpc>
               <a:spcAft>
-                <a:spcPts val="800"/>
+                <a:spcPts val="1200"/>
               </a:spcAft>
               <a:buSzPct val="100000"/>
-              <a:buChar char="▪"/>
-            </a:pPr>
-            <a:r>
-              <a:rPr lang="en-US" sz="1700" dirty="0">
-                <a:solidFill>
-                  <a:srgbClr val="5A6675"/>
-                </a:solidFill>
-                <a:latin typeface="Calibri" pitchFamily="34" charset="0"/>
-                <a:ea typeface="Calibri" pitchFamily="34" charset="-122"/>
-                <a:cs typeface="Calibri" pitchFamily="34" charset="-120"/>
-              </a:rPr>
-              <a:t>Extensions are only loaded at startup, so nothing appears until you restart</a:t>
+              <a:buChar char="•"/>
+            </a:pPr>
+            <a:r>
+              <a:rPr lang="en-US" sz="2000" dirty="0">
+                <a:solidFill>
+                  <a:srgbClr val="1F2933"/>
+                </a:solidFill>
+                <a:latin typeface="Calibri" pitchFamily="34" charset="0"/>
+                <a:ea typeface="Calibri" pitchFamily="34" charset="-122"/>
+                <a:cs typeface="Calibri" pitchFamily="34" charset="-120"/>
+              </a:rPr>
+              <a:t>Take the jar with -all in the name — without it the extension throws ClassNotFoundException the first time you use it</a:t>
             </a:r>
             <a:endParaRPr lang="en-US" sz="2000" dirty="0"/>
           </a:p>

--- a/I2K_2026_QuPath_Extensions.pptx
+++ b/I2K_2026_QuPath_Extensions.pptx
@@ -58,9 +58,10 @@
     <p:sldId id="306" r:id="rId52"/>
     <p:sldId id="307" r:id="rId53"/>
     <p:sldId id="308" r:id="rId54"/>
+    <p:sldId id="309" r:id="rId55"/>
   </p:sldIdLst>
   <p:notesMasterIdLst>
-    <p:notesMasterId r:id="rId55"/>
+    <p:notesMasterId r:id="rId56"/>
   </p:notesMasterIdLst>
   <p:sldSz cx="12192000" cy="6858000"/>
   <p:notesSz cx="6858000" cy="12192000"/>
@@ -4802,6 +4803,94 @@
             <a:fld id="{F7021451-1387-4CA6-816F-3879F97B5CBC}" type="slidenum">
               <a:rPr lang="en-US"/>
               <a:t>53</a:t>
+            </a:fld>
+            <a:endParaRPr lang="en-US"/>
+          </a:p>
+        </p:txBody>
+      </p:sp>
+    </p:spTree>
+    <p:extLst>
+      <p:ext uri="{BB962C8B-B14F-4D97-AF65-F5344CB8AC3E}">
+        <p14:creationId xmlns:p14="http://schemas.microsoft.com/office/powerpoint/2010/main" val="1024086991"/>
+      </p:ext>
+    </p:extLst>
+  </p:cSld>
+  <p:clrMapOvr>
+    <a:masterClrMapping/>
+  </p:clrMapOvr>
+</p:notes>
+</file>
+
+<file path=ppt/notesSlides/notesSlide54.xml><?xml version="1.0" encoding="utf-8"?>
+<p:notes xmlns:a="http://schemas.openxmlformats.org/drawingml/2006/main" xmlns:r="http://schemas.openxmlformats.org/officeDocument/2006/relationships" xmlns:p="http://schemas.openxmlformats.org/presentationml/2006/main">
+  <p:cSld>
+    <p:spTree>
+      <p:nvGrpSpPr>
+        <p:cNvPr id="1" name=""/>
+        <p:cNvGrpSpPr/>
+        <p:nvPr/>
+      </p:nvGrpSpPr>
+      <p:grpSpPr>
+        <a:xfrm>
+          <a:off x="0" y="0"/>
+          <a:ext cx="0" cy="0"/>
+          <a:chOff x="0" y="0"/>
+          <a:chExt cx="0" cy="0"/>
+        </a:xfrm>
+      </p:grpSpPr>
+      <p:sp>
+        <p:nvSpPr>
+          <p:cNvPr id="2" name="Slide Image Placeholder 1"/>
+          <p:cNvSpPr>
+            <a:spLocks noGrp="1" noRot="1" noChangeAspect="1"/>
+          </p:cNvSpPr>
+          <p:nvPr>
+            <p:ph type="sldImg"/>
+          </p:nvPr>
+        </p:nvSpPr>
+        <p:spPr/>
+      </p:sp>
+      <p:sp>
+        <p:nvSpPr>
+          <p:cNvPr id="3" name="Notes Placeholder 2"/>
+          <p:cNvSpPr>
+            <a:spLocks noGrp="1"/>
+          </p:cNvSpPr>
+          <p:nvPr>
+            <p:ph type="body" idx="1"/>
+          </p:nvPr>
+        </p:nvSpPr>
+        <p:spPr/>
+        <p:txBody>
+          <a:bodyPr/>
+          <a:lstStyle/>
+          <a:p>
+            <a:r>
+              <a:rPr lang="en-US" dirty="0"/>
+              <a:t/>
+            </a:r>
+            <a:endParaRPr lang="en-US" dirty="0"/>
+          </a:p>
+        </p:txBody>
+      </p:sp>
+      <p:sp>
+        <p:nvSpPr>
+          <p:cNvPr id="4" name="Slide Number Placeholder 3"/>
+          <p:cNvSpPr>
+            <a:spLocks noGrp="1"/>
+          </p:cNvSpPr>
+          <p:nvPr>
+            <p:ph type="sldNum" sz="quarter" idx="10"/>
+          </p:nvPr>
+        </p:nvSpPr>
+        <p:spPr/>
+        <p:txBody>
+          <a:bodyPr/>
+          <a:lstStyle/>
+          <a:p>
+            <a:fld id="{F7021451-1387-4CA6-816F-3879F97B5CBC}" type="slidenum">
+              <a:rPr lang="en-US"/>
+              <a:t>54</a:t>
             </a:fld>
             <a:endParaRPr lang="en-US"/>
           </a:p>
@@ -12328,7 +12417,7 @@
                 <a:ea typeface="Trebuchet MS" pitchFamily="34" charset="-122"/>
                 <a:cs typeface="Trebuchet MS" pitchFamily="34" charset="-120"/>
               </a:rPr>
-              <a:t>Measure once, on the image with the clearest structure</a:t>
+              <a:t>Measure on the clearest channel, reuse on the rest</a:t>
             </a:r>
             <a:endParaRPr lang="en-US" sz="3000" dirty="0"/>
           </a:p>
@@ -12362,8 +12451,8 @@
         </p:nvSpPr>
         <p:spPr>
           <a:xfrm>
-            <a:off x="566928" y="1225296"/>
-            <a:ext cx="11055096" cy="384048"/>
+            <a:off x="768096" y="1316736"/>
+            <a:ext cx="5120640" cy="402336"/>
           </a:xfrm>
           <a:prstGeom prst="rect">
             <a:avLst/>
@@ -12387,7 +12476,7 @@
                 <a:ea typeface="Calibri" pitchFamily="34" charset="-122"/>
                 <a:cs typeface="Calibri" pitchFamily="34" charset="-120"/>
               </a:rPr>
-              <a:t>The same two tiles, imaged for birefringence</a:t>
+              <a:t>Placed where the stage said it was</a:t>
             </a:r>
             <a:endParaRPr lang="en-US" sz="1700" dirty="0"/>
           </a:p>
@@ -12395,7 +12484,7 @@
       </p:sp>
       <p:pic>
         <p:nvPicPr>
-          <p:cNvPr id="5" name="Image 0" descr="images/stitch_biref_unstitched.jpg">    </p:cNvPr>
+          <p:cNvPr id="5" name="Image 0" descr="images/stitch_if_nominal.jpg">    </p:cNvPr>
           <p:cNvPicPr>
             <a:picLocks noChangeAspect="1"/>
           </p:cNvPicPr>
@@ -12409,8 +12498,8 @@
         </p:blipFill>
         <p:spPr>
           <a:xfrm>
-            <a:off x="566928" y="1645920"/>
-            <a:ext cx="10058400" cy="1894332"/>
+            <a:off x="768096" y="1783080"/>
+            <a:ext cx="5120640" cy="4118776"/>
           </a:xfrm>
           <a:prstGeom prst="rect">
             <a:avLst/>
@@ -12425,8 +12514,8 @@
         </p:nvSpPr>
         <p:spPr>
           <a:xfrm>
-            <a:off x="566928" y="3631692"/>
-            <a:ext cx="11055096" cy="384048"/>
+            <a:off x="6300216" y="1316736"/>
+            <a:ext cx="5120640" cy="402336"/>
           </a:xfrm>
           <a:prstGeom prst="rect">
             <a:avLst/>
@@ -12450,7 +12539,7 @@
                 <a:ea typeface="Calibri" pitchFamily="34" charset="-122"/>
                 <a:cs typeface="Calibri" pitchFamily="34" charset="-120"/>
               </a:rPr>
-              <a:t>Stitched with the positions measured once and reused unchanged</a:t>
+              <a:t>Placed where the image content says it is</a:t>
             </a:r>
             <a:endParaRPr lang="en-US" sz="1700" dirty="0"/>
           </a:p>
@@ -12458,7 +12547,7 @@
       </p:sp>
       <p:pic>
         <p:nvPicPr>
-          <p:cNvPr id="7" name="Image 1" descr="images/stitch_biref_stitched.jpg">    </p:cNvPr>
+          <p:cNvPr id="7" name="Image 1" descr="images/stitch_if_registered.jpg">    </p:cNvPr>
           <p:cNvPicPr>
             <a:picLocks noChangeAspect="1"/>
           </p:cNvPicPr>
@@ -12472,8 +12561,8 @@
         </p:blipFill>
         <p:spPr>
           <a:xfrm>
-            <a:off x="566928" y="4052316"/>
-            <a:ext cx="9273845" cy="1894332"/>
+            <a:off x="6300216" y="1783080"/>
+            <a:ext cx="5120640" cy="4118776"/>
           </a:xfrm>
           <a:prstGeom prst="rect">
             <a:avLst/>
@@ -12488,17 +12577,17 @@
         </p:nvSpPr>
         <p:spPr>
           <a:xfrm>
-            <a:off x="566928" y="5998464"/>
-            <a:ext cx="10140696" cy="512064"/>
-          </a:xfrm>
-          <a:prstGeom prst="rect">
-            <a:avLst/>
-          </a:prstGeom>
-          <a:noFill/>
-          <a:ln/>
-        </p:spPr>
-        <p:txBody>
-          <a:bodyPr wrap="square" rtlCol="0" anchor="ctr"/>
+            <a:off x="566928" y="6011584"/>
+            <a:ext cx="11055096" cy="566928"/>
+          </a:xfrm>
+          <a:prstGeom prst="rect">
+            <a:avLst/>
+          </a:prstGeom>
+          <a:noFill/>
+          <a:ln/>
+        </p:spPr>
+        <p:txBody>
+          <a:bodyPr wrap="square" rtlCol="0" anchor="t"/>
           <a:lstStyle/>
           <a:p>
             <a:pPr indent="0" marL="0">
@@ -12513,7 +12602,7 @@
                 <a:ea typeface="Calibri" pitchFamily="34" charset="-122"/>
                 <a:cs typeface="Calibri" pitchFamily="34" charset="-120"/>
               </a:rPr>
-              <a:t>Measure the positions on the image with the most distinct, best separated structure, which is not always the brightest or the busiest one. Every other image of the same tiles reuses that measurement, so they stay aligned with each other.</a:t>
+              <a:t>The same join through the same cells; only the tile positions differ. Positions were measured on DAPI, the channel with the most distinct, best separated structure, and reused unchanged for the other two channels — so every channel stays aligned with every other. Nuclei blue, actin green, mitochondria red; the correction here is 7 px, about 4.6 µm.</a:t>
             </a:r>
             <a:endParaRPr lang="en-US" sz="1500" dirty="0"/>
           </a:p>
@@ -12928,23 +13017,42 @@
       </p:grpSpPr>
       <p:sp>
         <p:nvSpPr>
-          <p:cNvPr id="2" name="Shape 0"/>
-          <p:cNvSpPr/>
-          <p:nvPr/>
-        </p:nvSpPr>
-        <p:spPr>
-          <a:xfrm>
-            <a:off x="0" y="1417320"/>
-            <a:ext cx="12188952" cy="3108960"/>
-          </a:xfrm>
-          <a:prstGeom prst="rect">
-            <a:avLst/>
-          </a:prstGeom>
-          <a:solidFill>
-            <a:srgbClr val="E8F0FA"/>
-          </a:solidFill>
-          <a:ln/>
-        </p:spPr>
+          <p:cNvPr id="2" name="Text 0"/>
+          <p:cNvSpPr/>
+          <p:nvPr/>
+        </p:nvSpPr>
+        <p:spPr>
+          <a:xfrm>
+            <a:off x="566928" y="384048"/>
+            <a:ext cx="11055096" cy="658368"/>
+          </a:xfrm>
+          <a:prstGeom prst="rect">
+            <a:avLst/>
+          </a:prstGeom>
+          <a:noFill/>
+          <a:ln/>
+        </p:spPr>
+        <p:txBody>
+          <a:bodyPr wrap="square" rtlCol="0" anchor="ctr"/>
+          <a:lstStyle/>
+          <a:p>
+            <a:pPr indent="0" marL="0">
+              <a:buNone/>
+            </a:pPr>
+            <a:r>
+              <a:rPr lang="en-US" sz="3000" b="1" dirty="0">
+                <a:solidFill>
+                  <a:srgbClr val="1F4C86"/>
+                </a:solidFill>
+                <a:latin typeface="Trebuchet MS" pitchFamily="34" charset="0"/>
+                <a:ea typeface="Trebuchet MS" pitchFamily="34" charset="-122"/>
+                <a:cs typeface="Trebuchet MS" pitchFamily="34" charset="-120"/>
+              </a:rPr>
+              <a:t>Tiles to Pyramid — how the mosaic is assembled</a:t>
+            </a:r>
+            <a:endParaRPr lang="en-US" sz="3000" dirty="0"/>
+          </a:p>
+        </p:txBody>
       </p:sp>
       <p:sp>
         <p:nvSpPr>
@@ -12954,8 +13062,8 @@
         </p:nvSpPr>
         <p:spPr>
           <a:xfrm>
-            <a:off x="0" y="1417320"/>
-            <a:ext cx="201168" cy="3108960"/>
+            <a:off x="566928" y="1097280"/>
+            <a:ext cx="1920240" cy="50292"/>
           </a:xfrm>
           <a:prstGeom prst="rect">
             <a:avLst/>
@@ -12974,8 +13082,8 @@
         </p:nvSpPr>
         <p:spPr>
           <a:xfrm>
-            <a:off x="566928" y="1691640"/>
-            <a:ext cx="1828800" cy="914400"/>
+            <a:off x="566928" y="1243584"/>
+            <a:ext cx="11055096" cy="384048"/>
           </a:xfrm>
           <a:prstGeom prst="rect">
             <a:avLst/>
@@ -12991,17 +13099,17 @@
               <a:buNone/>
             </a:pPr>
             <a:r>
-              <a:rPr lang="en-US" sz="5400" b="1" dirty="0">
-                <a:solidFill>
-                  <a:srgbClr val="3674C1"/>
-                </a:solidFill>
-                <a:latin typeface="Trebuchet MS" pitchFamily="34" charset="0"/>
-                <a:ea typeface="Trebuchet MS" pitchFamily="34" charset="-122"/>
-                <a:cs typeface="Trebuchet MS" pitchFamily="34" charset="-120"/>
-              </a:rPr>
-              <a:t>05</a:t>
-            </a:r>
-            <a:endParaRPr lang="en-US" sz="5400" dirty="0"/>
+              <a:rPr lang="en-US" sz="1700" i="1" dirty="0">
+                <a:solidFill>
+                  <a:srgbClr val="5A6675"/>
+                </a:solidFill>
+                <a:latin typeface="Calibri" pitchFamily="34" charset="0"/>
+                <a:ea typeface="Calibri" pitchFamily="34" charset="-122"/>
+                <a:cs typeface="Calibri" pitchFamily="34" charset="-120"/>
+              </a:rPr>
+              <a:t>Memory stops tracking the size of the mosaic, which is what lets thousands of tiles stitch on an ordinary machine.</a:t>
+            </a:r>
+            <a:endParaRPr lang="en-US" sz="1700" dirty="0"/>
           </a:p>
         </p:txBody>
       </p:sp>
@@ -13013,8 +13121,175 @@
         </p:nvSpPr>
         <p:spPr>
           <a:xfrm>
-            <a:off x="566928" y="2606040"/>
-            <a:ext cx="11055096" cy="868680"/>
+            <a:off x="640080" y="1755648"/>
+            <a:ext cx="10963656" cy="4279392"/>
+          </a:xfrm>
+          <a:prstGeom prst="rect">
+            <a:avLst/>
+          </a:prstGeom>
+          <a:noFill/>
+          <a:ln/>
+        </p:spPr>
+        <p:txBody>
+          <a:bodyPr wrap="square" rtlCol="0" anchor="t"/>
+          <a:lstStyle/>
+          <a:p>
+            <a:pPr marL="342900" indent="-342900">
+              <a:lnSpc>
+                <a:spcPct val="105000"/>
+              </a:lnSpc>
+              <a:spcAft>
+                <a:spcPts val="1200"/>
+              </a:spcAft>
+              <a:buSzPct val="100000"/>
+              <a:buChar char="•"/>
+            </a:pPr>
+            <a:r>
+              <a:rPr lang="en-US" sz="2000" dirty="0">
+                <a:solidFill>
+                  <a:srgbClr val="1F2933"/>
+                </a:solidFill>
+                <a:latin typeface="Calibri" pitchFamily="34" charset="0"/>
+                <a:ea typeface="Calibri" pitchFamily="34" charset="-122"/>
+                <a:cs typeface="Calibri" pitchFamily="34" charset="-120"/>
+              </a:rPr>
+              <a:t>Every overlapping pair is measured against the image content, then all tiles are placed at once by least squares</a:t>
+            </a:r>
+            <a:endParaRPr lang="en-US" sz="2000" dirty="0"/>
+          </a:p>
+          <a:p>
+            <a:pPr lvl="1" marL="685800" indent="-342900">
+              <a:lnSpc>
+                <a:spcPct val="105000"/>
+              </a:lnSpc>
+              <a:spcAft>
+                <a:spcPts val="800"/>
+              </a:spcAft>
+              <a:buSzPct val="100000"/>
+              <a:buChar char="▪"/>
+            </a:pPr>
+            <a:r>
+              <a:rPr lang="en-US" sz="1700" dirty="0">
+                <a:solidFill>
+                  <a:srgbClr val="5A6675"/>
+                </a:solidFill>
+                <a:latin typeface="Calibri" pitchFamily="34" charset="0"/>
+                <a:ea typeface="Calibri" pitchFamily="34" charset="-122"/>
+                <a:cs typeface="Calibri" pitchFamily="34" charset="-120"/>
+              </a:rPr>
+              <a:t>A spanning tree would keep 99 of the 180 neighbour edges on a 10×10 grid and throw away 81, so nothing is ever asked to close a loop</a:t>
+            </a:r>
+            <a:endParaRPr lang="en-US" sz="2000" dirty="0"/>
+          </a:p>
+          <a:p>
+            <a:pPr marL="342900" indent="-342900">
+              <a:lnSpc>
+                <a:spcPct val="105000"/>
+              </a:lnSpc>
+              <a:spcAft>
+                <a:spcPts val="1200"/>
+              </a:spcAft>
+              <a:buSzPct val="100000"/>
+              <a:buChar char="•"/>
+            </a:pPr>
+            <a:r>
+              <a:rPr lang="en-US" sz="2000" dirty="0">
+                <a:solidFill>
+                  <a:srgbClr val="1F2933"/>
+                </a:solidFill>
+                <a:latin typeface="Calibri" pitchFamily="34" charset="0"/>
+                <a:ea typeface="Calibri" pitchFamily="34" charset="-122"/>
+                <a:cs typeface="Calibri" pitchFamily="34" charset="-120"/>
+              </a:rPr>
+              <a:t>Each tile is also pulled toward its recorded stage position, so a tile with no accepted edges stays exactly where the stage put it</a:t>
+            </a:r>
+            <a:endParaRPr lang="en-US" sz="2000" dirty="0"/>
+          </a:p>
+          <a:p>
+            <a:pPr marL="342900" indent="-342900">
+              <a:lnSpc>
+                <a:spcPct val="105000"/>
+              </a:lnSpc>
+              <a:spcAft>
+                <a:spcPts val="1200"/>
+              </a:spcAft>
+              <a:buSzPct val="100000"/>
+              <a:buChar char="•"/>
+            </a:pPr>
+            <a:r>
+              <a:rPr lang="en-US" sz="2000" dirty="0">
+                <a:solidFill>
+                  <a:srgbClr val="1F2933"/>
+                </a:solidFill>
+                <a:latin typeface="Calibri" pitchFamily="34" charset="0"/>
+                <a:ea typeface="Calibri" pitchFamily="34" charset="-122"/>
+                <a:cs typeface="Calibri" pitchFamily="34" charset="-120"/>
+              </a:rPr>
+              <a:t>The output is written chunk by chunk, and only the one to four tiles overlapping the current chunk are ever in memory</a:t>
+            </a:r>
+            <a:endParaRPr lang="en-US" sz="2000" dirty="0"/>
+          </a:p>
+          <a:p>
+            <a:pPr marL="342900" indent="-342900">
+              <a:lnSpc>
+                <a:spcPct val="105000"/>
+              </a:lnSpc>
+              <a:spcAft>
+                <a:spcPts val="1200"/>
+              </a:spcAft>
+              <a:buSzPct val="100000"/>
+              <a:buChar char="•"/>
+            </a:pPr>
+            <a:r>
+              <a:rPr lang="en-US" sz="2000" dirty="0">
+                <a:solidFill>
+                  <a:srgbClr val="1F2933"/>
+                </a:solidFill>
+                <a:latin typeface="Calibri" pitchFamily="34" charset="0"/>
+                <a:ea typeface="Calibri" pitchFamily="34" charset="-122"/>
+                <a:cs typeface="Calibri" pitchFamily="34" charset="-120"/>
+              </a:rPr>
+              <a:t>Measured: 144 tiles (125 MP) stitch in the same 227 MB as 64 tiles (56 MP)</a:t>
+            </a:r>
+            <a:endParaRPr lang="en-US" sz="2000" dirty="0"/>
+          </a:p>
+        </p:txBody>
+      </p:sp>
+      <p:sp>
+        <p:nvSpPr>
+          <p:cNvPr id="6" name="Shape 4"/>
+          <p:cNvSpPr/>
+          <p:nvPr/>
+        </p:nvSpPr>
+        <p:spPr>
+          <a:xfrm>
+            <a:off x="566928" y="5650992"/>
+            <a:ext cx="11055096" cy="566928"/>
+          </a:xfrm>
+          <a:prstGeom prst="rect">
+            <a:avLst/>
+          </a:prstGeom>
+          <a:solidFill>
+            <a:srgbClr val="F4F8FD"/>
+          </a:solidFill>
+          <a:ln w="9525">
+            <a:solidFill>
+              <a:srgbClr val="3674C1"/>
+            </a:solidFill>
+            <a:prstDash val="solid"/>
+          </a:ln>
+        </p:spPr>
+      </p:sp>
+      <p:sp>
+        <p:nvSpPr>
+          <p:cNvPr id="7" name="Text 5"/>
+          <p:cNvSpPr/>
+          <p:nvPr/>
+        </p:nvSpPr>
+        <p:spPr>
+          <a:xfrm>
+            <a:off x="768096" y="5650992"/>
+            <a:ext cx="10652760" cy="566928"/>
           </a:xfrm>
           <a:prstGeom prst="rect">
             <a:avLst/>
@@ -13030,95 +13305,17 @@
               <a:buNone/>
             </a:pPr>
             <a:r>
-              <a:rPr lang="en-US" sz="4000" b="1" dirty="0">
+              <a:rPr lang="en-US" sz="1600" b="1" dirty="0">
                 <a:solidFill>
                   <a:srgbClr val="1F4C86"/>
                 </a:solidFill>
-                <a:latin typeface="Trebuchet MS" pitchFamily="34" charset="0"/>
-                <a:ea typeface="Trebuchet MS" pitchFamily="34" charset="-122"/>
-                <a:cs typeface="Trebuchet MS" pitchFamily="34" charset="-120"/>
-              </a:rPr>
-              <a:t>Did it actually work?</a:t>
-            </a:r>
-            <a:endParaRPr lang="en-US" sz="4000" dirty="0"/>
-          </a:p>
-        </p:txBody>
-      </p:sp>
-      <p:sp>
-        <p:nvSpPr>
-          <p:cNvPr id="6" name="Text 4"/>
-          <p:cNvSpPr/>
-          <p:nvPr/>
-        </p:nvSpPr>
-        <p:spPr>
-          <a:xfrm>
-            <a:off x="566928" y="3456432"/>
-            <a:ext cx="10140696" cy="731520"/>
-          </a:xfrm>
-          <a:prstGeom prst="rect">
-            <a:avLst/>
-          </a:prstGeom>
-          <a:noFill/>
-          <a:ln/>
-        </p:spPr>
-        <p:txBody>
-          <a:bodyPr wrap="square" rtlCol="0" anchor="t"/>
-          <a:lstStyle/>
-          <a:p>
-            <a:pPr indent="0" marL="0">
-              <a:buNone/>
-            </a:pPr>
-            <a:r>
-              <a:rPr lang="en-US" sz="1900" dirty="0">
-                <a:solidFill>
-                  <a:srgbClr val="5A6675"/>
-                </a:solidFill>
-                <a:latin typeface="Calibri" pitchFamily="34" charset="0"/>
-                <a:ea typeface="Calibri" pitchFamily="34" charset="-122"/>
-                <a:cs typeface="Calibri" pitchFamily="34" charset="-120"/>
-              </a:rPr>
-              <a:t>Classifier validation you can put in a paper</a:t>
-            </a:r>
-            <a:endParaRPr lang="en-US" sz="1900" dirty="0"/>
-          </a:p>
-        </p:txBody>
-      </p:sp>
-      <p:sp>
-        <p:nvSpPr>
-          <p:cNvPr id="7" name="Text 5"/>
-          <p:cNvSpPr/>
-          <p:nvPr/>
-        </p:nvSpPr>
-        <p:spPr>
-          <a:xfrm>
-            <a:off x="566928" y="6199632"/>
-            <a:ext cx="8229600" cy="365760"/>
-          </a:xfrm>
-          <a:prstGeom prst="rect">
-            <a:avLst/>
-          </a:prstGeom>
-          <a:noFill/>
-          <a:ln/>
-        </p:spPr>
-        <p:txBody>
-          <a:bodyPr wrap="square" rtlCol="0" anchor="ctr"/>
-          <a:lstStyle/>
-          <a:p>
-            <a:pPr indent="0" marL="0">
-              <a:buNone/>
-            </a:pPr>
-            <a:r>
-              <a:rPr lang="en-US" sz="1400" dirty="0">
-                <a:solidFill>
-                  <a:srgbClr val="A8B2BF"/>
-                </a:solidFill>
-                <a:latin typeface="Calibri" pitchFamily="34" charset="0"/>
-                <a:ea typeface="Calibri" pitchFamily="34" charset="-122"/>
-                <a:cs typeface="Calibri" pitchFamily="34" charset="-120"/>
-              </a:rPr>
-              <a:t>michaelsnelson.github.io/BINA-I2K-2026-QuPath-Extensions</a:t>
-            </a:r>
-            <a:endParaRPr lang="en-US" sz="1400" dirty="0"/>
+                <a:latin typeface="Calibri" pitchFamily="34" charset="0"/>
+                <a:ea typeface="Calibri" pitchFamily="34" charset="-122"/>
+                <a:cs typeface="Calibri" pitchFamily="34" charset="-120"/>
+              </a:rPr>
+              <a:t>Measured with the extension’s own benchmark: 1024 px 16-bit tiles, 10% overlap. The older load-everything path needed 2–4 GB and ran out of memory past about 1600 tiles.</a:t>
+            </a:r>
+            <a:endParaRPr lang="en-US" sz="1600" dirty="0"/>
           </a:p>
         </p:txBody>
       </p:sp>
@@ -13195,14 +13392,54 @@
       </p:grpSpPr>
       <p:sp>
         <p:nvSpPr>
-          <p:cNvPr id="2" name="Text 0"/>
-          <p:cNvSpPr/>
-          <p:nvPr/>
-        </p:nvSpPr>
-        <p:spPr>
-          <a:xfrm>
-            <a:off x="566928" y="384048"/>
-            <a:ext cx="11055096" cy="658368"/>
+          <p:cNvPr id="2" name="Shape 0"/>
+          <p:cNvSpPr/>
+          <p:nvPr/>
+        </p:nvSpPr>
+        <p:spPr>
+          <a:xfrm>
+            <a:off x="0" y="1417320"/>
+            <a:ext cx="12188952" cy="3108960"/>
+          </a:xfrm>
+          <a:prstGeom prst="rect">
+            <a:avLst/>
+          </a:prstGeom>
+          <a:solidFill>
+            <a:srgbClr val="E8F0FA"/>
+          </a:solidFill>
+          <a:ln/>
+        </p:spPr>
+      </p:sp>
+      <p:sp>
+        <p:nvSpPr>
+          <p:cNvPr id="3" name="Shape 1"/>
+          <p:cNvSpPr/>
+          <p:nvPr/>
+        </p:nvSpPr>
+        <p:spPr>
+          <a:xfrm>
+            <a:off x="0" y="1417320"/>
+            <a:ext cx="201168" cy="3108960"/>
+          </a:xfrm>
+          <a:prstGeom prst="rect">
+            <a:avLst/>
+          </a:prstGeom>
+          <a:solidFill>
+            <a:srgbClr val="3674C1"/>
+          </a:solidFill>
+          <a:ln/>
+        </p:spPr>
+      </p:sp>
+      <p:sp>
+        <p:nvSpPr>
+          <p:cNvPr id="4" name="Text 2"/>
+          <p:cNvSpPr/>
+          <p:nvPr/>
+        </p:nvSpPr>
+        <p:spPr>
+          <a:xfrm>
+            <a:off x="566928" y="1691640"/>
+            <a:ext cx="1828800" cy="914400"/>
           </a:xfrm>
           <a:prstGeom prst="rect">
             <a:avLst/>
@@ -13218,193 +13455,30 @@
               <a:buNone/>
             </a:pPr>
             <a:r>
-              <a:rPr lang="en-US" sz="3000" b="1" dirty="0">
-                <a:solidFill>
-                  <a:srgbClr val="1F4C86"/>
+              <a:rPr lang="en-US" sz="5400" b="1" dirty="0">
+                <a:solidFill>
+                  <a:srgbClr val="3674C1"/>
                 </a:solidFill>
                 <a:latin typeface="Trebuchet MS" pitchFamily="34" charset="0"/>
                 <a:ea typeface="Trebuchet MS" pitchFamily="34" charset="-122"/>
                 <a:cs typeface="Trebuchet MS" pitchFamily="34" charset="-120"/>
               </a:rPr>
-              <a:t>The interval, not the estimate</a:t>
-            </a:r>
-            <a:endParaRPr lang="en-US" sz="3000" dirty="0"/>
-          </a:p>
-        </p:txBody>
-      </p:sp>
-      <p:sp>
-        <p:nvSpPr>
-          <p:cNvPr id="3" name="Shape 1"/>
-          <p:cNvSpPr/>
-          <p:nvPr/>
-        </p:nvSpPr>
-        <p:spPr>
-          <a:xfrm>
-            <a:off x="566928" y="1097280"/>
-            <a:ext cx="1920240" cy="50292"/>
-          </a:xfrm>
-          <a:prstGeom prst="rect">
-            <a:avLst/>
-          </a:prstGeom>
-          <a:solidFill>
-            <a:srgbClr val="3674C1"/>
-          </a:solidFill>
-          <a:ln/>
-        </p:spPr>
-      </p:sp>
-      <p:sp>
-        <p:nvSpPr>
-          <p:cNvPr id="4" name="Text 2"/>
-          <p:cNvSpPr/>
-          <p:nvPr/>
-        </p:nvSpPr>
-        <p:spPr>
-          <a:xfrm>
-            <a:off x="640080" y="1481328"/>
-            <a:ext cx="10963656" cy="4553712"/>
-          </a:xfrm>
-          <a:prstGeom prst="rect">
-            <a:avLst/>
-          </a:prstGeom>
-          <a:noFill/>
-          <a:ln/>
-        </p:spPr>
-        <p:txBody>
-          <a:bodyPr wrap="square" rtlCol="0" anchor="t"/>
-          <a:lstStyle/>
-          <a:p>
-            <a:pPr marL="342900" indent="-342900">
-              <a:lnSpc>
-                <a:spcPct val="105000"/>
-              </a:lnSpc>
-              <a:spcAft>
-                <a:spcPts val="1200"/>
-              </a:spcAft>
-              <a:buSzPct val="100000"/>
-              <a:buChar char="•"/>
-            </a:pPr>
-            <a:r>
-              <a:rPr lang="en-US" sz="2000" dirty="0">
-                <a:solidFill>
-                  <a:srgbClr val="1F2933"/>
-                </a:solidFill>
-                <a:latin typeface="Calibri" pitchFamily="34" charset="0"/>
-                <a:ea typeface="Calibri" pitchFamily="34" charset="-122"/>
-                <a:cs typeface="Calibri" pitchFamily="34" charset="-120"/>
-              </a:rPr>
-              <a:t>"F1 = 0.87, 95% CI [0.82, 0.91]" instead of "87% accurate"</a:t>
-            </a:r>
-            <a:endParaRPr lang="en-US" sz="2000" dirty="0"/>
-          </a:p>
-          <a:p>
-            <a:pPr marL="342900" indent="-342900">
-              <a:lnSpc>
-                <a:spcPct val="105000"/>
-              </a:lnSpc>
-              <a:spcAft>
-                <a:spcPts val="1200"/>
-              </a:spcAft>
-              <a:buSzPct val="100000"/>
-              <a:buChar char="•"/>
-            </a:pPr>
-            <a:r>
-              <a:rPr lang="en-US" sz="2000" dirty="0">
-                <a:solidFill>
-                  <a:srgbClr val="1F2933"/>
-                </a:solidFill>
-                <a:latin typeface="Calibri" pitchFamily="34" charset="0"/>
-                <a:ea typeface="Calibri" pitchFamily="34" charset="-122"/>
-                <a:cs typeface="Calibri" pitchFamily="34" charset="-120"/>
-              </a:rPr>
-              <a:t>95% from forty cells and 95% from four thousand cells are not the same claim</a:t>
-            </a:r>
-            <a:endParaRPr lang="en-US" sz="2000" dirty="0"/>
-          </a:p>
-          <a:p>
-            <a:pPr marL="342900" indent="-342900">
-              <a:lnSpc>
-                <a:spcPct val="105000"/>
-              </a:lnSpc>
-              <a:spcAft>
-                <a:spcPts val="1200"/>
-              </a:spcAft>
-              <a:buSzPct val="100000"/>
-              <a:buChar char="•"/>
-            </a:pPr>
-            <a:r>
-              <a:rPr lang="en-US" sz="2000" dirty="0">
-                <a:solidFill>
-                  <a:srgbClr val="1F2933"/>
-                </a:solidFill>
-                <a:latin typeface="Calibri" pitchFamily="34" charset="0"/>
-                <a:ea typeface="Calibri" pitchFamily="34" charset="-122"/>
-                <a:cs typeface="Calibri" pitchFamily="34" charset="-120"/>
-              </a:rPr>
-              <a:t>Bootstrap confidence intervals on the overall and macro-averaged metrics</a:t>
-            </a:r>
-            <a:endParaRPr lang="en-US" sz="2000" dirty="0"/>
-          </a:p>
-          <a:p>
-            <a:pPr marL="342900" indent="-342900">
-              <a:lnSpc>
-                <a:spcPct val="105000"/>
-              </a:lnSpc>
-              <a:spcAft>
-                <a:spcPts val="1200"/>
-              </a:spcAft>
-              <a:buSzPct val="100000"/>
-              <a:buChar char="•"/>
-            </a:pPr>
-            <a:r>
-              <a:rPr lang="en-US" sz="2000" dirty="0">
-                <a:solidFill>
-                  <a:srgbClr val="1F2933"/>
-                </a:solidFill>
-                <a:latin typeface="Calibri" pitchFamily="34" charset="0"/>
-                <a:ea typeface="Calibri" pitchFamily="34" charset="-122"/>
-                <a:cs typeface="Calibri" pitchFamily="34" charset="-120"/>
-              </a:rPr>
-              <a:t>For probability-producing classifiers: is the confidence itself trustworthy, or just the top class?</a:t>
-            </a:r>
-            <a:endParaRPr lang="en-US" sz="2000" dirty="0"/>
-          </a:p>
-        </p:txBody>
-      </p:sp>
-      <p:sp>
-        <p:nvSpPr>
-          <p:cNvPr id="5" name="Shape 3"/>
-          <p:cNvSpPr/>
-          <p:nvPr/>
-        </p:nvSpPr>
-        <p:spPr>
-          <a:xfrm>
-            <a:off x="566928" y="5650992"/>
-            <a:ext cx="11055096" cy="566928"/>
-          </a:xfrm>
-          <a:prstGeom prst="rect">
-            <a:avLst/>
-          </a:prstGeom>
-          <a:solidFill>
-            <a:srgbClr val="F4F8FD"/>
-          </a:solidFill>
-          <a:ln w="9525">
-            <a:solidFill>
-              <a:srgbClr val="3674C1"/>
-            </a:solidFill>
-            <a:prstDash val="solid"/>
-          </a:ln>
-        </p:spPr>
-      </p:sp>
-      <p:sp>
-        <p:nvSpPr>
-          <p:cNvPr id="6" name="Text 4"/>
-          <p:cNvSpPr/>
-          <p:nvPr/>
-        </p:nvSpPr>
-        <p:spPr>
-          <a:xfrm>
-            <a:off x="768096" y="5650992"/>
-            <a:ext cx="10652760" cy="566928"/>
+              <a:t>05</a:t>
+            </a:r>
+            <a:endParaRPr lang="en-US" sz="5400" dirty="0"/>
+          </a:p>
+        </p:txBody>
+      </p:sp>
+      <p:sp>
+        <p:nvSpPr>
+          <p:cNvPr id="5" name="Text 3"/>
+          <p:cNvSpPr/>
+          <p:nvPr/>
+        </p:nvSpPr>
+        <p:spPr>
+          <a:xfrm>
+            <a:off x="566928" y="2606040"/>
+            <a:ext cx="11055096" cy="868680"/>
           </a:xfrm>
           <a:prstGeom prst="rect">
             <a:avLst/>
@@ -13420,23 +13494,101 @@
               <a:buNone/>
             </a:pPr>
             <a:r>
-              <a:rPr lang="en-US" sz="1600" b="1" dirty="0">
+              <a:rPr lang="en-US" sz="4000" b="1" dirty="0">
                 <a:solidFill>
                   <a:srgbClr val="1F4C86"/>
                 </a:solidFill>
-                <a:latin typeface="Calibri" pitchFamily="34" charset="0"/>
-                <a:ea typeface="Calibri" pitchFamily="34" charset="-122"/>
-                <a:cs typeface="Calibri" pitchFamily="34" charset="-120"/>
-              </a:rPr>
-              <a:t>A model that is 95% confident and 70% correct is a different problem, needing a different fix.</a:t>
-            </a:r>
-            <a:endParaRPr lang="en-US" sz="1600" dirty="0"/>
+                <a:latin typeface="Trebuchet MS" pitchFamily="34" charset="0"/>
+                <a:ea typeface="Trebuchet MS" pitchFamily="34" charset="-122"/>
+                <a:cs typeface="Trebuchet MS" pitchFamily="34" charset="-120"/>
+              </a:rPr>
+              <a:t>Did it actually work?</a:t>
+            </a:r>
+            <a:endParaRPr lang="en-US" sz="4000" dirty="0"/>
+          </a:p>
+        </p:txBody>
+      </p:sp>
+      <p:sp>
+        <p:nvSpPr>
+          <p:cNvPr id="6" name="Text 4"/>
+          <p:cNvSpPr/>
+          <p:nvPr/>
+        </p:nvSpPr>
+        <p:spPr>
+          <a:xfrm>
+            <a:off x="566928" y="3456432"/>
+            <a:ext cx="10140696" cy="731520"/>
+          </a:xfrm>
+          <a:prstGeom prst="rect">
+            <a:avLst/>
+          </a:prstGeom>
+          <a:noFill/>
+          <a:ln/>
+        </p:spPr>
+        <p:txBody>
+          <a:bodyPr wrap="square" rtlCol="0" anchor="t"/>
+          <a:lstStyle/>
+          <a:p>
+            <a:pPr indent="0" marL="0">
+              <a:buNone/>
+            </a:pPr>
+            <a:r>
+              <a:rPr lang="en-US" sz="1900" dirty="0">
+                <a:solidFill>
+                  <a:srgbClr val="5A6675"/>
+                </a:solidFill>
+                <a:latin typeface="Calibri" pitchFamily="34" charset="0"/>
+                <a:ea typeface="Calibri" pitchFamily="34" charset="-122"/>
+                <a:cs typeface="Calibri" pitchFamily="34" charset="-120"/>
+              </a:rPr>
+              <a:t>Classifier validation you can put in a paper</a:t>
+            </a:r>
+            <a:endParaRPr lang="en-US" sz="1900" dirty="0"/>
           </a:p>
         </p:txBody>
       </p:sp>
       <p:sp>
         <p:nvSpPr>
           <p:cNvPr id="7" name="Text 5"/>
+          <p:cNvSpPr/>
+          <p:nvPr/>
+        </p:nvSpPr>
+        <p:spPr>
+          <a:xfrm>
+            <a:off x="566928" y="6199632"/>
+            <a:ext cx="8229600" cy="365760"/>
+          </a:xfrm>
+          <a:prstGeom prst="rect">
+            <a:avLst/>
+          </a:prstGeom>
+          <a:noFill/>
+          <a:ln/>
+        </p:spPr>
+        <p:txBody>
+          <a:bodyPr wrap="square" rtlCol="0" anchor="ctr"/>
+          <a:lstStyle/>
+          <a:p>
+            <a:pPr indent="0" marL="0">
+              <a:buNone/>
+            </a:pPr>
+            <a:r>
+              <a:rPr lang="en-US" sz="1400" dirty="0">
+                <a:solidFill>
+                  <a:srgbClr val="A8B2BF"/>
+                </a:solidFill>
+                <a:latin typeface="Calibri" pitchFamily="34" charset="0"/>
+                <a:ea typeface="Calibri" pitchFamily="34" charset="-122"/>
+                <a:cs typeface="Calibri" pitchFamily="34" charset="-120"/>
+              </a:rPr>
+              <a:t>michaelsnelson.github.io/BINA-I2K-2026-QuPath-Extensions</a:t>
+            </a:r>
+            <a:endParaRPr lang="en-US" sz="1400" dirty="0"/>
+          </a:p>
+        </p:txBody>
+      </p:sp>
+      <p:sp>
+        <p:nvSpPr>
+          <p:cNvPr id="8" name="Text 6"/>
           <p:cNvSpPr/>
           <p:nvPr/>
         </p:nvSpPr>
@@ -13507,41 +13659,14 @@
       </p:grpSpPr>
       <p:sp>
         <p:nvSpPr>
-          <p:cNvPr id="2" name="Shape 0"/>
-          <p:cNvSpPr/>
-          <p:nvPr/>
-        </p:nvSpPr>
-        <p:spPr>
-          <a:xfrm>
-            <a:off x="566928" y="411480"/>
-            <a:ext cx="2331720" cy="457200"/>
-          </a:xfrm>
-          <a:prstGeom prst="roundRect">
-            <a:avLst>
-              <a:gd name="adj" fmla="val 20000"/>
-            </a:avLst>
-          </a:prstGeom>
-          <a:solidFill>
-            <a:srgbClr val="FBF1E0"/>
-          </a:solidFill>
-          <a:ln w="12700">
-            <a:solidFill>
-              <a:srgbClr val="B26A00"/>
-            </a:solidFill>
-            <a:prstDash val="solid"/>
-          </a:ln>
-        </p:spPr>
-      </p:sp>
-      <p:sp>
-        <p:nvSpPr>
-          <p:cNvPr id="3" name="Text 1"/>
-          <p:cNvSpPr/>
-          <p:nvPr/>
-        </p:nvSpPr>
-        <p:spPr>
-          <a:xfrm>
-            <a:off x="566928" y="411480"/>
-            <a:ext cx="2331720" cy="457200"/>
+          <p:cNvPr id="2" name="Text 0"/>
+          <p:cNvSpPr/>
+          <p:nvPr/>
+        </p:nvSpPr>
+        <p:spPr>
+          <a:xfrm>
+            <a:off x="566928" y="384048"/>
+            <a:ext cx="11055096" cy="658368"/>
           </a:xfrm>
           <a:prstGeom prst="rect">
             <a:avLst/>
@@ -13553,72 +13678,33 @@
           <a:bodyPr wrap="square" rtlCol="0" anchor="ctr"/>
           <a:lstStyle/>
           <a:p>
-            <a:pPr algn="ctr" indent="0" marL="0">
+            <a:pPr indent="0" marL="0">
               <a:buNone/>
             </a:pPr>
             <a:r>
-              <a:rPr lang="en-US" sz="1600" b="1" dirty="0">
-                <a:solidFill>
-                  <a:srgbClr val="B26A00"/>
+              <a:rPr lang="en-US" sz="3000" b="1" dirty="0">
+                <a:solidFill>
+                  <a:srgbClr val="1F4C86"/>
                 </a:solidFill>
                 <a:latin typeface="Trebuchet MS" pitchFamily="34" charset="0"/>
                 <a:ea typeface="Trebuchet MS" pitchFamily="34" charset="-122"/>
                 <a:cs typeface="Trebuchet MS" pitchFamily="34" charset="-120"/>
               </a:rPr>
-              <a:t>▶  DEMO ONLY</a:t>
-            </a:r>
-            <a:endParaRPr lang="en-US" sz="1600" dirty="0"/>
-          </a:p>
-        </p:txBody>
-      </p:sp>
-      <p:sp>
-        <p:nvSpPr>
-          <p:cNvPr id="4" name="Text 2"/>
-          <p:cNvSpPr/>
-          <p:nvPr/>
-        </p:nvSpPr>
-        <p:spPr>
-          <a:xfrm>
-            <a:off x="566928" y="1024128"/>
-            <a:ext cx="11055096" cy="685800"/>
-          </a:xfrm>
-          <a:prstGeom prst="rect">
-            <a:avLst/>
-          </a:prstGeom>
-          <a:noFill/>
-          <a:ln/>
-        </p:spPr>
-        <p:txBody>
-          <a:bodyPr wrap="square" rtlCol="0" anchor="ctr"/>
-          <a:lstStyle/>
-          <a:p>
-            <a:pPr indent="0" marL="0">
-              <a:buNone/>
-            </a:pPr>
-            <a:r>
-              <a:rPr lang="en-US" sz="3200" b="1" dirty="0">
-                <a:solidFill>
-                  <a:srgbClr val="1F4C86"/>
-                </a:solidFill>
-                <a:latin typeface="Trebuchet MS" pitchFamily="34" charset="0"/>
-                <a:ea typeface="Trebuchet MS" pitchFamily="34" charset="-122"/>
-                <a:cs typeface="Trebuchet MS" pitchFamily="34" charset="-120"/>
-              </a:rPr>
-              <a:t>Confusion Matrix</a:t>
-            </a:r>
-            <a:endParaRPr lang="en-US" sz="3200" dirty="0"/>
-          </a:p>
-        </p:txBody>
-      </p:sp>
-      <p:sp>
-        <p:nvSpPr>
-          <p:cNvPr id="5" name="Shape 3"/>
-          <p:cNvSpPr/>
-          <p:nvPr/>
-        </p:nvSpPr>
-        <p:spPr>
-          <a:xfrm>
-            <a:off x="566928" y="1783080"/>
+              <a:t>The interval, not the estimate</a:t>
+            </a:r>
+            <a:endParaRPr lang="en-US" sz="3000" dirty="0"/>
+          </a:p>
+        </p:txBody>
+      </p:sp>
+      <p:sp>
+        <p:nvSpPr>
+          <p:cNvPr id="3" name="Shape 1"/>
+          <p:cNvSpPr/>
+          <p:nvPr/>
+        </p:nvSpPr>
+        <p:spPr>
+          <a:xfrm>
+            <a:off x="566928" y="1097280"/>
             <a:ext cx="1920240" cy="50292"/>
           </a:xfrm>
           <a:prstGeom prst="rect">
@@ -13632,14 +13718,14 @@
       </p:sp>
       <p:sp>
         <p:nvSpPr>
-          <p:cNvPr id="6" name="Text 4"/>
-          <p:cNvSpPr/>
-          <p:nvPr/>
-        </p:nvSpPr>
-        <p:spPr>
-          <a:xfrm>
-            <a:off x="640080" y="2103120"/>
-            <a:ext cx="10963656" cy="3017520"/>
+          <p:cNvPr id="4" name="Text 2"/>
+          <p:cNvSpPr/>
+          <p:nvPr/>
+        </p:nvSpPr>
+        <p:spPr>
+          <a:xfrm>
+            <a:off x="640080" y="1481328"/>
+            <a:ext cx="10963656" cy="4553712"/>
           </a:xfrm>
           <a:prstGeom prst="rect">
             <a:avLst/>
@@ -13652,8 +13738,11 @@
           <a:lstStyle/>
           <a:p>
             <a:pPr marL="342900" indent="-342900">
+              <a:lnSpc>
+                <a:spcPct val="105000"/>
+              </a:lnSpc>
               <a:spcAft>
-                <a:spcPts val="1400"/>
+                <a:spcPts val="1200"/>
               </a:spcAft>
               <a:buSzPct val="100000"/>
               <a:buChar char="•"/>
@@ -13667,14 +13756,17 @@
                 <a:ea typeface="Calibri" pitchFamily="34" charset="-122"/>
                 <a:cs typeface="Calibri" pitchFamily="34" charset="-120"/>
               </a:rPr>
-              <a:t>Click the largest off-diagonal cell — those cells highlight on the slide</a:t>
+              <a:t>"F1 = 0.87, 95% CI [0.82, 0.91]" instead of "87% accurate"</a:t>
             </a:r>
             <a:endParaRPr lang="en-US" sz="2000" dirty="0"/>
           </a:p>
           <a:p>
             <a:pPr marL="342900" indent="-342900">
+              <a:lnSpc>
+                <a:spcPct val="105000"/>
+              </a:lnSpc>
               <a:spcAft>
-                <a:spcPts val="1400"/>
+                <a:spcPts val="1200"/>
               </a:spcAft>
               <a:buSzPct val="100000"/>
               <a:buChar char="•"/>
@@ -13688,14 +13780,17 @@
                 <a:ea typeface="Calibri" pitchFamily="34" charset="-122"/>
                 <a:cs typeface="Calibri" pitchFamily="34" charset="-120"/>
               </a:rPr>
-              <a:t>"The classifier is 87% accurate" becomes "it confuses these two things, for this reason"</a:t>
+              <a:t>95% from forty cells and 95% from four thousand cells are not the same claim</a:t>
             </a:r>
             <a:endParaRPr lang="en-US" sz="2000" dirty="0"/>
           </a:p>
           <a:p>
             <a:pPr marL="342900" indent="-342900">
+              <a:lnSpc>
+                <a:spcPct val="105000"/>
+              </a:lnSpc>
               <a:spcAft>
-                <a:spcPts val="1400"/>
+                <a:spcPts val="1200"/>
               </a:spcAft>
               <a:buSzPct val="100000"/>
               <a:buChar char="•"/>
@@ -13709,14 +13804,17 @@
                 <a:ea typeface="Calibri" pitchFamily="34" charset="-122"/>
                 <a:cs typeface="Calibri" pitchFamily="34" charset="-120"/>
               </a:rPr>
-              <a:t>Across a project: per-image breakdown, with divergent images flagged automatically</a:t>
+              <a:t>Bootstrap confidence intervals on the overall and macro-averaged metrics</a:t>
             </a:r>
             <a:endParaRPr lang="en-US" sz="2000" dirty="0"/>
           </a:p>
           <a:p>
             <a:pPr marL="342900" indent="-342900">
+              <a:lnSpc>
+                <a:spcPct val="105000"/>
+              </a:lnSpc>
               <a:spcAft>
-                <a:spcPts val="1400"/>
+                <a:spcPts val="1200"/>
               </a:spcAft>
               <a:buSzPct val="100000"/>
               <a:buChar char="•"/>
@@ -13730,7 +13828,7 @@
                 <a:ea typeface="Calibri" pitchFamily="34" charset="-122"/>
                 <a:cs typeface="Calibri" pitchFamily="34" charset="-120"/>
               </a:rPr>
-              <a:t>Flagged images usually mean a staining or scanning problem, not a classifier problem</a:t>
+              <a:t>For probability-producing classifiers: is the confidence itself trustworthy, or just the top class?</a:t>
             </a:r>
             <a:endParaRPr lang="en-US" sz="2000" dirty="0"/>
           </a:p>
@@ -13738,7 +13836,7 @@
       </p:sp>
       <p:sp>
         <p:nvSpPr>
-          <p:cNvPr id="7" name="Shape 5"/>
+          <p:cNvPr id="5" name="Shape 3"/>
           <p:cNvSpPr/>
           <p:nvPr/>
         </p:nvSpPr>
@@ -13763,7 +13861,7 @@
       </p:sp>
       <p:sp>
         <p:nvSpPr>
-          <p:cNvPr id="8" name="Text 6"/>
+          <p:cNvPr id="6" name="Text 4"/>
           <p:cNvSpPr/>
           <p:nvPr/>
         </p:nvSpPr>
@@ -13794,7 +13892,7 @@
                 <a:ea typeface="Calibri" pitchFamily="34" charset="-122"/>
                 <a:cs typeface="Calibri" pitchFamily="34" charset="-120"/>
               </a:rPr>
-              <a:t>Originated by Kristin Gallick — concept and initial scripts; built out at LOCI.  ·  Demo only: the repository is currently private.</a:t>
+              <a:t>A model that is 95% confident and 70% correct is a different problem, needing a different fix.</a:t>
             </a:r>
             <a:endParaRPr lang="en-US" sz="1600" dirty="0"/>
           </a:p>
@@ -13802,7 +13900,7 @@
       </p:sp>
       <p:sp>
         <p:nvSpPr>
-          <p:cNvPr id="9" name="Text 7"/>
+          <p:cNvPr id="7" name="Text 5"/>
           <p:cNvSpPr/>
           <p:nvPr/>
         </p:nvSpPr>
@@ -13879,28 +13977,113 @@
         </p:nvSpPr>
         <p:spPr>
           <a:xfrm>
-            <a:off x="0" y="1417320"/>
-            <a:ext cx="12188952" cy="3108960"/>
-          </a:xfrm>
-          <a:prstGeom prst="rect">
-            <a:avLst/>
+            <a:off x="566928" y="411480"/>
+            <a:ext cx="2331720" cy="457200"/>
+          </a:xfrm>
+          <a:prstGeom prst="roundRect">
+            <a:avLst>
+              <a:gd name="adj" fmla="val 20000"/>
+            </a:avLst>
           </a:prstGeom>
           <a:solidFill>
-            <a:srgbClr val="E8F0FA"/>
+            <a:srgbClr val="FBF1E0"/>
           </a:solidFill>
-          <a:ln/>
-        </p:spPr>
-      </p:sp>
-      <p:sp>
-        <p:nvSpPr>
-          <p:cNvPr id="3" name="Shape 1"/>
-          <p:cNvSpPr/>
-          <p:nvPr/>
-        </p:nvSpPr>
-        <p:spPr>
-          <a:xfrm>
-            <a:off x="0" y="1417320"/>
-            <a:ext cx="201168" cy="3108960"/>
+          <a:ln w="12700">
+            <a:solidFill>
+              <a:srgbClr val="B26A00"/>
+            </a:solidFill>
+            <a:prstDash val="solid"/>
+          </a:ln>
+        </p:spPr>
+      </p:sp>
+      <p:sp>
+        <p:nvSpPr>
+          <p:cNvPr id="3" name="Text 1"/>
+          <p:cNvSpPr/>
+          <p:nvPr/>
+        </p:nvSpPr>
+        <p:spPr>
+          <a:xfrm>
+            <a:off x="566928" y="411480"/>
+            <a:ext cx="2331720" cy="457200"/>
+          </a:xfrm>
+          <a:prstGeom prst="rect">
+            <a:avLst/>
+          </a:prstGeom>
+          <a:noFill/>
+          <a:ln/>
+        </p:spPr>
+        <p:txBody>
+          <a:bodyPr wrap="square" rtlCol="0" anchor="ctr"/>
+          <a:lstStyle/>
+          <a:p>
+            <a:pPr algn="ctr" indent="0" marL="0">
+              <a:buNone/>
+            </a:pPr>
+            <a:r>
+              <a:rPr lang="en-US" sz="1600" b="1" dirty="0">
+                <a:solidFill>
+                  <a:srgbClr val="B26A00"/>
+                </a:solidFill>
+                <a:latin typeface="Trebuchet MS" pitchFamily="34" charset="0"/>
+                <a:ea typeface="Trebuchet MS" pitchFamily="34" charset="-122"/>
+                <a:cs typeface="Trebuchet MS" pitchFamily="34" charset="-120"/>
+              </a:rPr>
+              <a:t>▶  DEMO ONLY</a:t>
+            </a:r>
+            <a:endParaRPr lang="en-US" sz="1600" dirty="0"/>
+          </a:p>
+        </p:txBody>
+      </p:sp>
+      <p:sp>
+        <p:nvSpPr>
+          <p:cNvPr id="4" name="Text 2"/>
+          <p:cNvSpPr/>
+          <p:nvPr/>
+        </p:nvSpPr>
+        <p:spPr>
+          <a:xfrm>
+            <a:off x="566928" y="1024128"/>
+            <a:ext cx="11055096" cy="685800"/>
+          </a:xfrm>
+          <a:prstGeom prst="rect">
+            <a:avLst/>
+          </a:prstGeom>
+          <a:noFill/>
+          <a:ln/>
+        </p:spPr>
+        <p:txBody>
+          <a:bodyPr wrap="square" rtlCol="0" anchor="ctr"/>
+          <a:lstStyle/>
+          <a:p>
+            <a:pPr indent="0" marL="0">
+              <a:buNone/>
+            </a:pPr>
+            <a:r>
+              <a:rPr lang="en-US" sz="3200" b="1" dirty="0">
+                <a:solidFill>
+                  <a:srgbClr val="1F4C86"/>
+                </a:solidFill>
+                <a:latin typeface="Trebuchet MS" pitchFamily="34" charset="0"/>
+                <a:ea typeface="Trebuchet MS" pitchFamily="34" charset="-122"/>
+                <a:cs typeface="Trebuchet MS" pitchFamily="34" charset="-120"/>
+              </a:rPr>
+              <a:t>Confusion Matrix</a:t>
+            </a:r>
+            <a:endParaRPr lang="en-US" sz="3200" dirty="0"/>
+          </a:p>
+        </p:txBody>
+      </p:sp>
+      <p:sp>
+        <p:nvSpPr>
+          <p:cNvPr id="5" name="Shape 3"/>
+          <p:cNvSpPr/>
+          <p:nvPr/>
+        </p:nvSpPr>
+        <p:spPr>
+          <a:xfrm>
+            <a:off x="566928" y="1783080"/>
+            <a:ext cx="1920240" cy="50292"/>
           </a:xfrm>
           <a:prstGeom prst="rect">
             <a:avLst/>
@@ -13913,14 +14096,145 @@
       </p:sp>
       <p:sp>
         <p:nvSpPr>
-          <p:cNvPr id="4" name="Text 2"/>
-          <p:cNvSpPr/>
-          <p:nvPr/>
-        </p:nvSpPr>
-        <p:spPr>
-          <a:xfrm>
-            <a:off x="566928" y="1691640"/>
-            <a:ext cx="1828800" cy="914400"/>
+          <p:cNvPr id="6" name="Text 4"/>
+          <p:cNvSpPr/>
+          <p:nvPr/>
+        </p:nvSpPr>
+        <p:spPr>
+          <a:xfrm>
+            <a:off x="640080" y="2103120"/>
+            <a:ext cx="10963656" cy="3017520"/>
+          </a:xfrm>
+          <a:prstGeom prst="rect">
+            <a:avLst/>
+          </a:prstGeom>
+          <a:noFill/>
+          <a:ln/>
+        </p:spPr>
+        <p:txBody>
+          <a:bodyPr wrap="square" rtlCol="0" anchor="t"/>
+          <a:lstStyle/>
+          <a:p>
+            <a:pPr marL="342900" indent="-342900">
+              <a:spcAft>
+                <a:spcPts val="1400"/>
+              </a:spcAft>
+              <a:buSzPct val="100000"/>
+              <a:buChar char="•"/>
+            </a:pPr>
+            <a:r>
+              <a:rPr lang="en-US" sz="2000" dirty="0">
+                <a:solidFill>
+                  <a:srgbClr val="1F2933"/>
+                </a:solidFill>
+                <a:latin typeface="Calibri" pitchFamily="34" charset="0"/>
+                <a:ea typeface="Calibri" pitchFamily="34" charset="-122"/>
+                <a:cs typeface="Calibri" pitchFamily="34" charset="-120"/>
+              </a:rPr>
+              <a:t>Click the largest off-diagonal cell — those cells highlight on the slide</a:t>
+            </a:r>
+            <a:endParaRPr lang="en-US" sz="2000" dirty="0"/>
+          </a:p>
+          <a:p>
+            <a:pPr marL="342900" indent="-342900">
+              <a:spcAft>
+                <a:spcPts val="1400"/>
+              </a:spcAft>
+              <a:buSzPct val="100000"/>
+              <a:buChar char="•"/>
+            </a:pPr>
+            <a:r>
+              <a:rPr lang="en-US" sz="2000" dirty="0">
+                <a:solidFill>
+                  <a:srgbClr val="1F2933"/>
+                </a:solidFill>
+                <a:latin typeface="Calibri" pitchFamily="34" charset="0"/>
+                <a:ea typeface="Calibri" pitchFamily="34" charset="-122"/>
+                <a:cs typeface="Calibri" pitchFamily="34" charset="-120"/>
+              </a:rPr>
+              <a:t>"The classifier is 87% accurate" becomes "it confuses these two things, for this reason"</a:t>
+            </a:r>
+            <a:endParaRPr lang="en-US" sz="2000" dirty="0"/>
+          </a:p>
+          <a:p>
+            <a:pPr marL="342900" indent="-342900">
+              <a:spcAft>
+                <a:spcPts val="1400"/>
+              </a:spcAft>
+              <a:buSzPct val="100000"/>
+              <a:buChar char="•"/>
+            </a:pPr>
+            <a:r>
+              <a:rPr lang="en-US" sz="2000" dirty="0">
+                <a:solidFill>
+                  <a:srgbClr val="1F2933"/>
+                </a:solidFill>
+                <a:latin typeface="Calibri" pitchFamily="34" charset="0"/>
+                <a:ea typeface="Calibri" pitchFamily="34" charset="-122"/>
+                <a:cs typeface="Calibri" pitchFamily="34" charset="-120"/>
+              </a:rPr>
+              <a:t>Across a project: per-image breakdown, with divergent images flagged automatically</a:t>
+            </a:r>
+            <a:endParaRPr lang="en-US" sz="2000" dirty="0"/>
+          </a:p>
+          <a:p>
+            <a:pPr marL="342900" indent="-342900">
+              <a:spcAft>
+                <a:spcPts val="1400"/>
+              </a:spcAft>
+              <a:buSzPct val="100000"/>
+              <a:buChar char="•"/>
+            </a:pPr>
+            <a:r>
+              <a:rPr lang="en-US" sz="2000" dirty="0">
+                <a:solidFill>
+                  <a:srgbClr val="1F2933"/>
+                </a:solidFill>
+                <a:latin typeface="Calibri" pitchFamily="34" charset="0"/>
+                <a:ea typeface="Calibri" pitchFamily="34" charset="-122"/>
+                <a:cs typeface="Calibri" pitchFamily="34" charset="-120"/>
+              </a:rPr>
+              <a:t>Flagged images usually mean a staining or scanning problem, not a classifier problem</a:t>
+            </a:r>
+            <a:endParaRPr lang="en-US" sz="2000" dirty="0"/>
+          </a:p>
+        </p:txBody>
+      </p:sp>
+      <p:sp>
+        <p:nvSpPr>
+          <p:cNvPr id="7" name="Shape 5"/>
+          <p:cNvSpPr/>
+          <p:nvPr/>
+        </p:nvSpPr>
+        <p:spPr>
+          <a:xfrm>
+            <a:off x="566928" y="5650992"/>
+            <a:ext cx="11055096" cy="566928"/>
+          </a:xfrm>
+          <a:prstGeom prst="rect">
+            <a:avLst/>
+          </a:prstGeom>
+          <a:solidFill>
+            <a:srgbClr val="F4F8FD"/>
+          </a:solidFill>
+          <a:ln w="9525">
+            <a:solidFill>
+              <a:srgbClr val="3674C1"/>
+            </a:solidFill>
+            <a:prstDash val="solid"/>
+          </a:ln>
+        </p:spPr>
+      </p:sp>
+      <p:sp>
+        <p:nvSpPr>
+          <p:cNvPr id="8" name="Text 6"/>
+          <p:cNvSpPr/>
+          <p:nvPr/>
+        </p:nvSpPr>
+        <p:spPr>
+          <a:xfrm>
+            <a:off x="768096" y="5650992"/>
+            <a:ext cx="10652760" cy="566928"/>
           </a:xfrm>
           <a:prstGeom prst="rect">
             <a:avLst/>
@@ -13936,140 +14250,23 @@
               <a:buNone/>
             </a:pPr>
             <a:r>
-              <a:rPr lang="en-US" sz="5400" b="1" dirty="0">
-                <a:solidFill>
-                  <a:srgbClr val="3674C1"/>
-                </a:solidFill>
-                <a:latin typeface="Trebuchet MS" pitchFamily="34" charset="0"/>
-                <a:ea typeface="Trebuchet MS" pitchFamily="34" charset="-122"/>
-                <a:cs typeface="Trebuchet MS" pitchFamily="34" charset="-120"/>
-              </a:rPr>
-              <a:t>06</a:t>
-            </a:r>
-            <a:endParaRPr lang="en-US" sz="5400" dirty="0"/>
-          </a:p>
-        </p:txBody>
-      </p:sp>
-      <p:sp>
-        <p:nvSpPr>
-          <p:cNvPr id="5" name="Text 3"/>
-          <p:cNvSpPr/>
-          <p:nvPr/>
-        </p:nvSpPr>
-        <p:spPr>
-          <a:xfrm>
-            <a:off x="566928" y="2606040"/>
-            <a:ext cx="11055096" cy="868680"/>
-          </a:xfrm>
-          <a:prstGeom prst="rect">
-            <a:avLst/>
-          </a:prstGeom>
-          <a:noFill/>
-          <a:ln/>
-        </p:spPr>
-        <p:txBody>
-          <a:bodyPr wrap="square" rtlCol="0" anchor="ctr"/>
-          <a:lstStyle/>
-          <a:p>
-            <a:pPr indent="0" marL="0">
-              <a:buNone/>
-            </a:pPr>
-            <a:r>
-              <a:rPr lang="en-US" sz="4000" b="1" dirty="0">
+              <a:rPr lang="en-US" sz="1600" b="1" dirty="0">
                 <a:solidFill>
                   <a:srgbClr val="1F4C86"/>
                 </a:solidFill>
-                <a:latin typeface="Trebuchet MS" pitchFamily="34" charset="0"/>
-                <a:ea typeface="Trebuchet MS" pitchFamily="34" charset="-122"/>
-                <a:cs typeface="Trebuchet MS" pitchFamily="34" charset="-120"/>
-              </a:rPr>
-              <a:t>Deep learning</a:t>
-            </a:r>
-            <a:endParaRPr lang="en-US" sz="4000" dirty="0"/>
-          </a:p>
-        </p:txBody>
-      </p:sp>
-      <p:sp>
-        <p:nvSpPr>
-          <p:cNvPr id="6" name="Text 4"/>
-          <p:cNvSpPr/>
-          <p:nvPr/>
-        </p:nvSpPr>
-        <p:spPr>
-          <a:xfrm>
-            <a:off x="566928" y="3456432"/>
-            <a:ext cx="10140696" cy="731520"/>
-          </a:xfrm>
-          <a:prstGeom prst="rect">
-            <a:avLst/>
-          </a:prstGeom>
-          <a:noFill/>
-          <a:ln/>
-        </p:spPr>
-        <p:txBody>
-          <a:bodyPr wrap="square" rtlCol="0" anchor="t"/>
-          <a:lstStyle/>
-          <a:p>
-            <a:pPr indent="0" marL="0">
-              <a:buNone/>
-            </a:pPr>
-            <a:r>
-              <a:rPr lang="en-US" sz="1900" dirty="0">
-                <a:solidFill>
-                  <a:srgbClr val="5A6675"/>
-                </a:solidFill>
-                <a:latin typeface="Calibri" pitchFamily="34" charset="0"/>
-                <a:ea typeface="Calibri" pitchFamily="34" charset="-122"/>
-                <a:cs typeface="Calibri" pitchFamily="34" charset="-120"/>
-              </a:rPr>
-              <a:t>Pixel classifiers, cell classifiers, and knowing when not to trust them</a:t>
-            </a:r>
-            <a:endParaRPr lang="en-US" sz="1900" dirty="0"/>
-          </a:p>
-        </p:txBody>
-      </p:sp>
-      <p:sp>
-        <p:nvSpPr>
-          <p:cNvPr id="7" name="Text 5"/>
-          <p:cNvSpPr/>
-          <p:nvPr/>
-        </p:nvSpPr>
-        <p:spPr>
-          <a:xfrm>
-            <a:off x="566928" y="6199632"/>
-            <a:ext cx="8229600" cy="365760"/>
-          </a:xfrm>
-          <a:prstGeom prst="rect">
-            <a:avLst/>
-          </a:prstGeom>
-          <a:noFill/>
-          <a:ln/>
-        </p:spPr>
-        <p:txBody>
-          <a:bodyPr wrap="square" rtlCol="0" anchor="ctr"/>
-          <a:lstStyle/>
-          <a:p>
-            <a:pPr indent="0" marL="0">
-              <a:buNone/>
-            </a:pPr>
-            <a:r>
-              <a:rPr lang="en-US" sz="1400" dirty="0">
-                <a:solidFill>
-                  <a:srgbClr val="A8B2BF"/>
-                </a:solidFill>
-                <a:latin typeface="Calibri" pitchFamily="34" charset="0"/>
-                <a:ea typeface="Calibri" pitchFamily="34" charset="-122"/>
-                <a:cs typeface="Calibri" pitchFamily="34" charset="-120"/>
-              </a:rPr>
-              <a:t>michaelsnelson.github.io/BINA-I2K-2026-QuPath-Extensions</a:t>
-            </a:r>
-            <a:endParaRPr lang="en-US" sz="1400" dirty="0"/>
-          </a:p>
-        </p:txBody>
-      </p:sp>
-      <p:sp>
-        <p:nvSpPr>
-          <p:cNvPr id="8" name="Text 6"/>
+                <a:latin typeface="Calibri" pitchFamily="34" charset="0"/>
+                <a:ea typeface="Calibri" pitchFamily="34" charset="-122"/>
+                <a:cs typeface="Calibri" pitchFamily="34" charset="-120"/>
+              </a:rPr>
+              <a:t>Originated by Kristin Gallick — concept and initial scripts; built out at LOCI.  ·  Demo only: the repository is currently private.</a:t>
+            </a:r>
+            <a:endParaRPr lang="en-US" sz="1600" dirty="0"/>
+          </a:p>
+        </p:txBody>
+      </p:sp>
+      <p:sp>
+        <p:nvSpPr>
+          <p:cNvPr id="9" name="Text 7"/>
           <p:cNvSpPr/>
           <p:nvPr/>
         </p:nvSpPr>
@@ -14140,14 +14337,54 @@
       </p:grpSpPr>
       <p:sp>
         <p:nvSpPr>
-          <p:cNvPr id="2" name="Text 0"/>
-          <p:cNvSpPr/>
-          <p:nvPr/>
-        </p:nvSpPr>
-        <p:spPr>
-          <a:xfrm>
-            <a:off x="566928" y="384048"/>
-            <a:ext cx="11055096" cy="658368"/>
+          <p:cNvPr id="2" name="Shape 0"/>
+          <p:cNvSpPr/>
+          <p:nvPr/>
+        </p:nvSpPr>
+        <p:spPr>
+          <a:xfrm>
+            <a:off x="0" y="1417320"/>
+            <a:ext cx="12188952" cy="3108960"/>
+          </a:xfrm>
+          <a:prstGeom prst="rect">
+            <a:avLst/>
+          </a:prstGeom>
+          <a:solidFill>
+            <a:srgbClr val="E8F0FA"/>
+          </a:solidFill>
+          <a:ln/>
+        </p:spPr>
+      </p:sp>
+      <p:sp>
+        <p:nvSpPr>
+          <p:cNvPr id="3" name="Shape 1"/>
+          <p:cNvSpPr/>
+          <p:nvPr/>
+        </p:nvSpPr>
+        <p:spPr>
+          <a:xfrm>
+            <a:off x="0" y="1417320"/>
+            <a:ext cx="201168" cy="3108960"/>
+          </a:xfrm>
+          <a:prstGeom prst="rect">
+            <a:avLst/>
+          </a:prstGeom>
+          <a:solidFill>
+            <a:srgbClr val="3674C1"/>
+          </a:solidFill>
+          <a:ln/>
+        </p:spPr>
+      </p:sp>
+      <p:sp>
+        <p:nvSpPr>
+          <p:cNvPr id="4" name="Text 2"/>
+          <p:cNvSpPr/>
+          <p:nvPr/>
+        </p:nvSpPr>
+        <p:spPr>
+          <a:xfrm>
+            <a:off x="566928" y="1691640"/>
+            <a:ext cx="1828800" cy="914400"/>
           </a:xfrm>
           <a:prstGeom prst="rect">
             <a:avLst/>
@@ -14163,50 +14400,30 @@
               <a:buNone/>
             </a:pPr>
             <a:r>
-              <a:rPr lang="en-US" sz="3000" b="1" dirty="0">
-                <a:solidFill>
-                  <a:srgbClr val="1F4C86"/>
+              <a:rPr lang="en-US" sz="5400" b="1" dirty="0">
+                <a:solidFill>
+                  <a:srgbClr val="3674C1"/>
                 </a:solidFill>
                 <a:latin typeface="Trebuchet MS" pitchFamily="34" charset="0"/>
                 <a:ea typeface="Trebuchet MS" pitchFamily="34" charset="-122"/>
                 <a:cs typeface="Trebuchet MS" pitchFamily="34" charset="-120"/>
               </a:rPr>
-              <a:t>Deep learning pixel classification</a:t>
-            </a:r>
-            <a:endParaRPr lang="en-US" sz="3000" dirty="0"/>
-          </a:p>
-        </p:txBody>
-      </p:sp>
-      <p:sp>
-        <p:nvSpPr>
-          <p:cNvPr id="3" name="Shape 1"/>
-          <p:cNvSpPr/>
-          <p:nvPr/>
-        </p:nvSpPr>
-        <p:spPr>
-          <a:xfrm>
-            <a:off x="566928" y="1097280"/>
-            <a:ext cx="1920240" cy="50292"/>
-          </a:xfrm>
-          <a:prstGeom prst="rect">
-            <a:avLst/>
-          </a:prstGeom>
-          <a:solidFill>
-            <a:srgbClr val="3674C1"/>
-          </a:solidFill>
-          <a:ln/>
-        </p:spPr>
-      </p:sp>
-      <p:sp>
-        <p:nvSpPr>
-          <p:cNvPr id="4" name="Text 2"/>
-          <p:cNvSpPr/>
-          <p:nvPr/>
-        </p:nvSpPr>
-        <p:spPr>
-          <a:xfrm>
-            <a:off x="566928" y="1243584"/>
-            <a:ext cx="11055096" cy="384048"/>
+              <a:t>06</a:t>
+            </a:r>
+            <a:endParaRPr lang="en-US" sz="5400" dirty="0"/>
+          </a:p>
+        </p:txBody>
+      </p:sp>
+      <p:sp>
+        <p:nvSpPr>
+          <p:cNvPr id="5" name="Text 3"/>
+          <p:cNvSpPr/>
+          <p:nvPr/>
+        </p:nvSpPr>
+        <p:spPr>
+          <a:xfrm>
+            <a:off x="566928" y="2606040"/>
+            <a:ext cx="11055096" cy="868680"/>
           </a:xfrm>
           <a:prstGeom prst="rect">
             <a:avLst/>
@@ -14222,7 +14439,46 @@
               <a:buNone/>
             </a:pPr>
             <a:r>
-              <a:rPr lang="en-US" sz="1700" i="1" dirty="0">
+              <a:rPr lang="en-US" sz="4000" b="1" dirty="0">
+                <a:solidFill>
+                  <a:srgbClr val="1F4C86"/>
+                </a:solidFill>
+                <a:latin typeface="Trebuchet MS" pitchFamily="34" charset="0"/>
+                <a:ea typeface="Trebuchet MS" pitchFamily="34" charset="-122"/>
+                <a:cs typeface="Trebuchet MS" pitchFamily="34" charset="-120"/>
+              </a:rPr>
+              <a:t>Deep learning</a:t>
+            </a:r>
+            <a:endParaRPr lang="en-US" sz="4000" dirty="0"/>
+          </a:p>
+        </p:txBody>
+      </p:sp>
+      <p:sp>
+        <p:nvSpPr>
+          <p:cNvPr id="6" name="Text 4"/>
+          <p:cNvSpPr/>
+          <p:nvPr/>
+        </p:nvSpPr>
+        <p:spPr>
+          <a:xfrm>
+            <a:off x="566928" y="3456432"/>
+            <a:ext cx="10140696" cy="731520"/>
+          </a:xfrm>
+          <a:prstGeom prst="rect">
+            <a:avLst/>
+          </a:prstGeom>
+          <a:noFill/>
+          <a:ln/>
+        </p:spPr>
+        <p:txBody>
+          <a:bodyPr wrap="square" rtlCol="0" anchor="t"/>
+          <a:lstStyle/>
+          <a:p>
+            <a:pPr indent="0" marL="0">
+              <a:buNone/>
+            </a:pPr>
+            <a:r>
+              <a:rPr lang="en-US" sz="1900" dirty="0">
                 <a:solidFill>
                   <a:srgbClr val="5A6675"/>
                 </a:solidFill>
@@ -14230,133 +14486,54 @@
                 <a:ea typeface="Calibri" pitchFamily="34" charset="-122"/>
                 <a:cs typeface="Calibri" pitchFamily="34" charset="-120"/>
               </a:rPr>
-              <a:t>For when the built-in classifier is not enough: subtle textures, classes that differ by architecture rather than colour.</a:t>
-            </a:r>
-            <a:endParaRPr lang="en-US" sz="1700" dirty="0"/>
-          </a:p>
-        </p:txBody>
-      </p:sp>
-      <p:sp>
-        <p:nvSpPr>
-          <p:cNvPr id="5" name="Text 3"/>
-          <p:cNvSpPr/>
-          <p:nvPr/>
-        </p:nvSpPr>
-        <p:spPr>
-          <a:xfrm>
-            <a:off x="640080" y="1755648"/>
-            <a:ext cx="10963656" cy="4279392"/>
-          </a:xfrm>
-          <a:prstGeom prst="rect">
-            <a:avLst/>
-          </a:prstGeom>
-          <a:noFill/>
-          <a:ln/>
-        </p:spPr>
-        <p:txBody>
-          <a:bodyPr wrap="square" rtlCol="0" anchor="t"/>
-          <a:lstStyle/>
-          <a:p>
-            <a:pPr marL="342900" indent="-342900">
-              <a:lnSpc>
-                <a:spcPct val="105000"/>
-              </a:lnSpc>
-              <a:spcAft>
-                <a:spcPts val="1200"/>
-              </a:spcAft>
-              <a:buSzPct val="100000"/>
-              <a:buChar char="•"/>
-            </a:pPr>
-            <a:r>
-              <a:rPr lang="en-US" sz="2000" dirty="0">
-                <a:solidFill>
-                  <a:srgbClr val="1F2933"/>
-                </a:solidFill>
-                <a:latin typeface="Calibri" pitchFamily="34" charset="0"/>
-                <a:ea typeface="Calibri" pitchFamily="34" charset="-122"/>
-                <a:cs typeface="Calibri" pitchFamily="34" charset="-120"/>
-              </a:rPr>
-              <a:t>Same interaction as the built-in classifier: draw a few sparse regions per class</a:t>
-            </a:r>
-            <a:endParaRPr lang="en-US" sz="2000" dirty="0"/>
-          </a:p>
-          <a:p>
-            <a:pPr marL="342900" indent="-342900">
-              <a:lnSpc>
-                <a:spcPct val="105000"/>
-              </a:lnSpc>
-              <a:spcAft>
-                <a:spcPts val="1200"/>
-              </a:spcAft>
-              <a:buSzPct val="100000"/>
-              <a:buChar char="•"/>
-            </a:pPr>
-            <a:r>
-              <a:rPr lang="en-US" sz="2000" dirty="0">
-                <a:solidFill>
-                  <a:srgbClr val="1F2933"/>
-                </a:solidFill>
-                <a:latin typeface="Calibri" pitchFamily="34" charset="0"/>
-                <a:ea typeface="Calibri" pitchFamily="34" charset="-122"/>
-                <a:cs typeface="Calibri" pitchFamily="34" charset="-120"/>
-              </a:rPr>
-              <a:t>The extension samples training tiles from what you marked — you are steering a sampler</a:t>
-            </a:r>
-            <a:endParaRPr lang="en-US" sz="2000" dirty="0"/>
-          </a:p>
-          <a:p>
-            <a:pPr marL="342900" indent="-342900">
-              <a:lnSpc>
-                <a:spcPct val="105000"/>
-              </a:lnSpc>
-              <a:spcAft>
-                <a:spcPts val="1200"/>
-              </a:spcAft>
-              <a:buSzPct val="100000"/>
-              <a:buChar char="•"/>
-            </a:pPr>
-            <a:r>
-              <a:rPr lang="en-US" sz="2000" dirty="0">
-                <a:solidFill>
-                  <a:srgbClr val="1F2933"/>
-                </a:solidFill>
-                <a:latin typeface="Calibri" pitchFamily="34" charset="0"/>
-                <a:ea typeface="Calibri" pitchFamily="34" charset="-122"/>
-                <a:cs typeface="Calibri" pitchFamily="34" charset="-120"/>
-              </a:rPr>
-              <a:t>Brightfield and multi-channel fluorescence, with per-channel normalisation</a:t>
-            </a:r>
-            <a:endParaRPr lang="en-US" sz="2000" dirty="0"/>
-          </a:p>
-          <a:p>
-            <a:pPr marL="342900" indent="-342900">
-              <a:lnSpc>
-                <a:spcPct val="105000"/>
-              </a:lnSpc>
-              <a:spcAft>
-                <a:spcPts val="1200"/>
-              </a:spcAft>
-              <a:buSzPct val="100000"/>
-              <a:buChar char="•"/>
-            </a:pPr>
-            <a:r>
-              <a:rPr lang="en-US" sz="2000" dirty="0">
-                <a:solidFill>
-                  <a:srgbClr val="1F2933"/>
-                </a:solidFill>
-                <a:latin typeface="Calibri" pitchFamily="34" charset="0"/>
-                <a:ea typeface="Calibri" pitchFamily="34" charset="-122"/>
-                <a:cs typeface="Calibri" pitchFamily="34" charset="-120"/>
-              </a:rPr>
-              <a:t>Train across several project images at once for representative sampling</a:t>
-            </a:r>
-            <a:endParaRPr lang="en-US" sz="2000" dirty="0"/>
-          </a:p>
-        </p:txBody>
-      </p:sp>
-      <p:sp>
-        <p:nvSpPr>
-          <p:cNvPr id="6" name="Text 4"/>
+              <a:t>Pixel classifiers, cell classifiers, and knowing when not to trust them</a:t>
+            </a:r>
+            <a:endParaRPr lang="en-US" sz="1900" dirty="0"/>
+          </a:p>
+        </p:txBody>
+      </p:sp>
+      <p:sp>
+        <p:nvSpPr>
+          <p:cNvPr id="7" name="Text 5"/>
+          <p:cNvSpPr/>
+          <p:nvPr/>
+        </p:nvSpPr>
+        <p:spPr>
+          <a:xfrm>
+            <a:off x="566928" y="6199632"/>
+            <a:ext cx="8229600" cy="365760"/>
+          </a:xfrm>
+          <a:prstGeom prst="rect">
+            <a:avLst/>
+          </a:prstGeom>
+          <a:noFill/>
+          <a:ln/>
+        </p:spPr>
+        <p:txBody>
+          <a:bodyPr wrap="square" rtlCol="0" anchor="ctr"/>
+          <a:lstStyle/>
+          <a:p>
+            <a:pPr indent="0" marL="0">
+              <a:buNone/>
+            </a:pPr>
+            <a:r>
+              <a:rPr lang="en-US" sz="1400" dirty="0">
+                <a:solidFill>
+                  <a:srgbClr val="A8B2BF"/>
+                </a:solidFill>
+                <a:latin typeface="Calibri" pitchFamily="34" charset="0"/>
+                <a:ea typeface="Calibri" pitchFamily="34" charset="-122"/>
+                <a:cs typeface="Calibri" pitchFamily="34" charset="-120"/>
+              </a:rPr>
+              <a:t>michaelsnelson.github.io/BINA-I2K-2026-QuPath-Extensions</a:t>
+            </a:r>
+            <a:endParaRPr lang="en-US" sz="1400" dirty="0"/>
+          </a:p>
+        </p:txBody>
+      </p:sp>
+      <p:sp>
+        <p:nvSpPr>
+          <p:cNvPr id="8" name="Text 6"/>
           <p:cNvSpPr/>
           <p:nvPr/>
         </p:nvSpPr>
@@ -14458,7 +14635,7 @@
                 <a:ea typeface="Trebuchet MS" pitchFamily="34" charset="-122"/>
                 <a:cs typeface="Trebuchet MS" pitchFamily="34" charset="-120"/>
               </a:rPr>
-              <a:t>What is underneath</a:t>
+              <a:t>Deep learning pixel classification</a:t>
             </a:r>
             <a:endParaRPr lang="en-US" sz="3000" dirty="0"/>
           </a:p>
@@ -14492,8 +14669,47 @@
         </p:nvSpPr>
         <p:spPr>
           <a:xfrm>
-            <a:off x="640080" y="1481328"/>
-            <a:ext cx="10963656" cy="4553712"/>
+            <a:off x="566928" y="1243584"/>
+            <a:ext cx="11055096" cy="384048"/>
+          </a:xfrm>
+          <a:prstGeom prst="rect">
+            <a:avLst/>
+          </a:prstGeom>
+          <a:noFill/>
+          <a:ln/>
+        </p:spPr>
+        <p:txBody>
+          <a:bodyPr wrap="square" rtlCol="0" anchor="ctr"/>
+          <a:lstStyle/>
+          <a:p>
+            <a:pPr indent="0" marL="0">
+              <a:buNone/>
+            </a:pPr>
+            <a:r>
+              <a:rPr lang="en-US" sz="1700" i="1" dirty="0">
+                <a:solidFill>
+                  <a:srgbClr val="5A6675"/>
+                </a:solidFill>
+                <a:latin typeface="Calibri" pitchFamily="34" charset="0"/>
+                <a:ea typeface="Calibri" pitchFamily="34" charset="-122"/>
+                <a:cs typeface="Calibri" pitchFamily="34" charset="-120"/>
+              </a:rPr>
+              <a:t>For when the built-in classifier is not enough: subtle textures, classes that differ by architecture rather than colour.</a:t>
+            </a:r>
+            <a:endParaRPr lang="en-US" sz="1700" dirty="0"/>
+          </a:p>
+        </p:txBody>
+      </p:sp>
+      <p:sp>
+        <p:nvSpPr>
+          <p:cNvPr id="5" name="Text 3"/>
+          <p:cNvSpPr/>
+          <p:nvPr/>
+        </p:nvSpPr>
+        <p:spPr>
+          <a:xfrm>
+            <a:off x="640080" y="1755648"/>
+            <a:ext cx="10963656" cy="4279392"/>
           </a:xfrm>
           <a:prstGeom prst="rect">
             <a:avLst/>
@@ -14524,7 +14740,7 @@
                 <a:ea typeface="Calibri" pitchFamily="34" charset="-122"/>
                 <a:cs typeface="Calibri" pitchFamily="34" charset="-120"/>
               </a:rPr>
-              <a:t>Your choice of encoder, from lightweight convolutional networks to vision transformers</a:t>
+              <a:t>Same interaction as the built-in classifier: draw a few sparse regions per class</a:t>
             </a:r>
             <a:endParaRPr lang="en-US" sz="2000" dirty="0"/>
           </a:p>
@@ -14548,7 +14764,7 @@
                 <a:ea typeface="Calibri" pitchFamily="34" charset="-122"/>
                 <a:cs typeface="Calibri" pitchFamily="34" charset="-120"/>
               </a:rPr>
-              <a:t>Start from weights pretrained on histology rather than on everyday photographs</a:t>
+              <a:t>The extension samples training tiles from what you marked — you are steering a sampler</a:t>
             </a:r>
             <a:endParaRPr lang="en-US" sz="2000" dirty="0"/>
           </a:p>
@@ -14572,7 +14788,7 @@
                 <a:ea typeface="Calibri" pitchFamily="34" charset="-122"/>
                 <a:cs typeface="Calibri" pitchFamily="34" charset="-120"/>
               </a:rPr>
-              <a:t>Or from pathology foundation models, downloaded on demand</a:t>
+              <a:t>Brightfield and multi-channel fluorescence, with per-channel normalisation</a:t>
             </a:r>
             <a:endParaRPr lang="en-US" sz="2000" dirty="0"/>
           </a:p>
@@ -14596,7 +14812,7 @@
                 <a:ea typeface="Calibri" pitchFamily="34" charset="-122"/>
                 <a:cs typeface="Calibri" pitchFamily="34" charset="-120"/>
               </a:rPr>
-              <a:t>Normalisation computed over the whole image, which removes tile-boundary artefacts</a:t>
+              <a:t>Train across several project images at once for representative sampling</a:t>
             </a:r>
             <a:endParaRPr lang="en-US" sz="2000" dirty="0"/>
           </a:p>
@@ -14604,71 +14820,7 @@
       </p:sp>
       <p:sp>
         <p:nvSpPr>
-          <p:cNvPr id="5" name="Shape 3"/>
-          <p:cNvSpPr/>
-          <p:nvPr/>
-        </p:nvSpPr>
-        <p:spPr>
-          <a:xfrm>
-            <a:off x="566928" y="5650992"/>
-            <a:ext cx="11055096" cy="566928"/>
-          </a:xfrm>
-          <a:prstGeom prst="rect">
-            <a:avLst/>
-          </a:prstGeom>
-          <a:solidFill>
-            <a:srgbClr val="F4F8FD"/>
-          </a:solidFill>
-          <a:ln w="9525">
-            <a:solidFill>
-              <a:srgbClr val="3674C1"/>
-            </a:solidFill>
-            <a:prstDash val="solid"/>
-          </a:ln>
-        </p:spPr>
-      </p:sp>
-      <p:sp>
-        <p:nvSpPr>
           <p:cNvPr id="6" name="Text 4"/>
-          <p:cNvSpPr/>
-          <p:nvPr/>
-        </p:nvSpPr>
-        <p:spPr>
-          <a:xfrm>
-            <a:off x="768096" y="5650992"/>
-            <a:ext cx="10652760" cy="566928"/>
-          </a:xfrm>
-          <a:prstGeom prst="rect">
-            <a:avLst/>
-          </a:prstGeom>
-          <a:noFill/>
-          <a:ln/>
-        </p:spPr>
-        <p:txBody>
-          <a:bodyPr wrap="square" rtlCol="0" anchor="ctr"/>
-          <a:lstStyle/>
-          <a:p>
-            <a:pPr indent="0" marL="0">
-              <a:buNone/>
-            </a:pPr>
-            <a:r>
-              <a:rPr lang="en-US" sz="1600" b="1" dirty="0">
-                <a:solidFill>
-                  <a:srgbClr val="1F4C86"/>
-                </a:solidFill>
-                <a:latin typeface="Calibri" pitchFamily="34" charset="0"/>
-                <a:ea typeface="Calibri" pitchFamily="34" charset="-122"/>
-                <a:cs typeface="Calibri" pitchFamily="34" charset="-120"/>
-              </a:rPr>
-              <a:t>Training needs a dedicated GPU. That is why training is a demonstration and inference is the exercise.</a:t>
-            </a:r>
-            <a:endParaRPr lang="en-US" sz="1600" dirty="0"/>
-          </a:p>
-        </p:txBody>
-      </p:sp>
-      <p:sp>
-        <p:nvSpPr>
-          <p:cNvPr id="7" name="Text 5"/>
           <p:cNvSpPr/>
           <p:nvPr/>
         </p:nvSpPr>
@@ -14770,7 +14922,7 @@
                 <a:ea typeface="Trebuchet MS" pitchFamily="34" charset="-122"/>
                 <a:cs typeface="Trebuchet MS" pitchFamily="34" charset="-120"/>
               </a:rPr>
-              <a:t>The two most important features</a:t>
+              <a:t>What is underneath</a:t>
             </a:r>
             <a:endParaRPr lang="en-US" sz="3000" dirty="0"/>
           </a:p>
@@ -14836,31 +14988,7 @@
                 <a:ea typeface="Calibri" pitchFamily="34" charset="-122"/>
                 <a:cs typeface="Calibri" pitchFamily="34" charset="-120"/>
               </a:rPr>
-              <a:t>Full per-pixel probability maps, not just the winning class</a:t>
-            </a:r>
-            <a:endParaRPr lang="en-US" sz="2000" dirty="0"/>
-          </a:p>
-          <a:p>
-            <a:pPr lvl="1" marL="685800" indent="-342900">
-              <a:lnSpc>
-                <a:spcPct val="105000"/>
-              </a:lnSpc>
-              <a:spcAft>
-                <a:spcPts val="800"/>
-              </a:spcAft>
-              <a:buSzPct val="100000"/>
-              <a:buChar char="▪"/>
-            </a:pPr>
-            <a:r>
-              <a:rPr lang="en-US" sz="1700" dirty="0">
-                <a:solidFill>
-                  <a:srgbClr val="5A6675"/>
-                </a:solidFill>
-                <a:latin typeface="Calibri" pitchFamily="34" charset="0"/>
-                <a:ea typeface="Calibri" pitchFamily="34" charset="-122"/>
-                <a:cs typeface="Calibri" pitchFamily="34" charset="-120"/>
-              </a:rPr>
-              <a:t>The honest uncertainty is at the boundaries between classes — go and look at it</a:t>
+              <a:t>Your choice of encoder, from lightweight convolutional networks to vision transformers</a:t>
             </a:r>
             <a:endParaRPr lang="en-US" sz="2000" dirty="0"/>
           </a:p>
@@ -14884,31 +15012,55 @@
                 <a:ea typeface="Calibri" pitchFamily="34" charset="-122"/>
                 <a:cs typeface="Calibri" pitchFamily="34" charset="-120"/>
               </a:rPr>
-              <a:t>An out-of-distribution warning before inference, when an image no longer resembles the training data</a:t>
+              <a:t>Start from weights pretrained on histology rather than on everyday photographs</a:t>
             </a:r>
             <a:endParaRPr lang="en-US" sz="2000" dirty="0"/>
           </a:p>
           <a:p>
-            <a:pPr lvl="1" marL="685800" indent="-342900">
+            <a:pPr marL="342900" indent="-342900">
               <a:lnSpc>
                 <a:spcPct val="105000"/>
               </a:lnSpc>
               <a:spcAft>
-                <a:spcPts val="800"/>
+                <a:spcPts val="1200"/>
               </a:spcAft>
               <a:buSzPct val="100000"/>
-              <a:buChar char="▪"/>
-            </a:pPr>
-            <a:r>
-              <a:rPr lang="en-US" sz="1700" dirty="0">
-                <a:solidFill>
-                  <a:srgbClr val="5A6675"/>
-                </a:solidFill>
-                <a:latin typeface="Calibri" pitchFamily="34" charset="0"/>
-                <a:ea typeface="Calibri" pitchFamily="34" charset="-122"/>
-                <a:cs typeface="Calibri" pitchFamily="34" charset="-120"/>
-              </a:rPr>
-              <a:t>Catches stain, exposure and sensor changes that would quietly degrade predictions</a:t>
+              <a:buChar char="•"/>
+            </a:pPr>
+            <a:r>
+              <a:rPr lang="en-US" sz="2000" dirty="0">
+                <a:solidFill>
+                  <a:srgbClr val="1F2933"/>
+                </a:solidFill>
+                <a:latin typeface="Calibri" pitchFamily="34" charset="0"/>
+                <a:ea typeface="Calibri" pitchFamily="34" charset="-122"/>
+                <a:cs typeface="Calibri" pitchFamily="34" charset="-120"/>
+              </a:rPr>
+              <a:t>Or from pathology foundation models, downloaded on demand</a:t>
+            </a:r>
+            <a:endParaRPr lang="en-US" sz="2000" dirty="0"/>
+          </a:p>
+          <a:p>
+            <a:pPr marL="342900" indent="-342900">
+              <a:lnSpc>
+                <a:spcPct val="105000"/>
+              </a:lnSpc>
+              <a:spcAft>
+                <a:spcPts val="1200"/>
+              </a:spcAft>
+              <a:buSzPct val="100000"/>
+              <a:buChar char="•"/>
+            </a:pPr>
+            <a:r>
+              <a:rPr lang="en-US" sz="2000" dirty="0">
+                <a:solidFill>
+                  <a:srgbClr val="1F2933"/>
+                </a:solidFill>
+                <a:latin typeface="Calibri" pitchFamily="34" charset="0"/>
+                <a:ea typeface="Calibri" pitchFamily="34" charset="-122"/>
+                <a:cs typeface="Calibri" pitchFamily="34" charset="-120"/>
+              </a:rPr>
+              <a:t>Normalisation computed over the whole image, which removes tile-boundary artefacts</a:t>
             </a:r>
             <a:endParaRPr lang="en-US" sz="2000" dirty="0"/>
           </a:p>
@@ -14972,7 +15124,7 @@
                 <a:ea typeface="Calibri" pitchFamily="34" charset="-122"/>
                 <a:cs typeface="Calibri" pitchFamily="34" charset="-120"/>
               </a:rPr>
-              <a:t>These are the features that tell you when not to trust the output, and the easiest to ignore.</a:t>
+              <a:t>Training needs a dedicated GPU. That is why training is a demonstration and inference is the exercise.</a:t>
             </a:r>
             <a:endParaRPr lang="en-US" sz="1600" dirty="0"/>
           </a:p>
@@ -15082,7 +15234,7 @@
                 <a:ea typeface="Trebuchet MS" pitchFamily="34" charset="-122"/>
                 <a:cs typeface="Trebuchet MS" pitchFamily="34" charset="-120"/>
               </a:rPr>
-              <a:t>When the model stops working</a:t>
+              <a:t>The two most important features</a:t>
             </a:r>
             <a:endParaRPr lang="en-US" sz="3000" dirty="0"/>
           </a:p>
@@ -15116,47 +15268,8 @@
         </p:nvSpPr>
         <p:spPr>
           <a:xfrm>
-            <a:off x="566928" y="1243584"/>
-            <a:ext cx="11055096" cy="384048"/>
-          </a:xfrm>
-          <a:prstGeom prst="rect">
-            <a:avLst/>
-          </a:prstGeom>
-          <a:noFill/>
-          <a:ln/>
-        </p:spPr>
-        <p:txBody>
-          <a:bodyPr wrap="square" rtlCol="0" anchor="ctr"/>
-          <a:lstStyle/>
-          <a:p>
-            <a:pPr indent="0" marL="0">
-              <a:buNone/>
-            </a:pPr>
-            <a:r>
-              <a:rPr lang="en-US" sz="1700" i="1" dirty="0">
-                <a:solidFill>
-                  <a:srgbClr val="5A6675"/>
-                </a:solidFill>
-                <a:latin typeface="Calibri" pitchFamily="34" charset="0"/>
-                <a:ea typeface="Calibri" pitchFamily="34" charset="-122"/>
-                <a:cs typeface="Calibri" pitchFamily="34" charset="-120"/>
-              </a:rPr>
-              <a:t>Domain shift is the practical problem, far more often than model architecture.</a:t>
-            </a:r>
-            <a:endParaRPr lang="en-US" sz="1700" dirty="0"/>
-          </a:p>
-        </p:txBody>
-      </p:sp>
-      <p:sp>
-        <p:nvSpPr>
-          <p:cNvPr id="5" name="Text 3"/>
-          <p:cNvSpPr/>
-          <p:nvPr/>
-        </p:nvSpPr>
-        <p:spPr>
-          <a:xfrm>
-            <a:off x="640080" y="1755648"/>
-            <a:ext cx="10963656" cy="4279392"/>
+            <a:off x="640080" y="1481328"/>
+            <a:ext cx="10963656" cy="4553712"/>
           </a:xfrm>
           <a:prstGeom prst="rect">
             <a:avLst/>
@@ -15187,7 +15300,31 @@
                 <a:ea typeface="Calibri" pitchFamily="34" charset="-122"/>
                 <a:cs typeface="Calibri" pitchFamily="34" charset="-120"/>
               </a:rPr>
-              <a:t>A new scanner, a new stain, a new batch — and last month’s model degrades</a:t>
+              <a:t>Full per-pixel probability maps, not just the winning class</a:t>
+            </a:r>
+            <a:endParaRPr lang="en-US" sz="2000" dirty="0"/>
+          </a:p>
+          <a:p>
+            <a:pPr lvl="1" marL="685800" indent="-342900">
+              <a:lnSpc>
+                <a:spcPct val="105000"/>
+              </a:lnSpc>
+              <a:spcAft>
+                <a:spcPts val="800"/>
+              </a:spcAft>
+              <a:buSzPct val="100000"/>
+              <a:buChar char="▪"/>
+            </a:pPr>
+            <a:r>
+              <a:rPr lang="en-US" sz="1700" dirty="0">
+                <a:solidFill>
+                  <a:srgbClr val="5A6675"/>
+                </a:solidFill>
+                <a:latin typeface="Calibri" pitchFamily="34" charset="0"/>
+                <a:ea typeface="Calibri" pitchFamily="34" charset="-122"/>
+                <a:cs typeface="Calibri" pitchFamily="34" charset="-120"/>
+              </a:rPr>
+              <a:t>The honest uncertainty is at the boundaries between classes — go and look at it</a:t>
             </a:r>
             <a:endParaRPr lang="en-US" sz="2000" dirty="0"/>
           </a:p>
@@ -15211,31 +15348,31 @@
                 <a:ea typeface="Calibri" pitchFamily="34" charset="-122"/>
                 <a:cs typeface="Calibri" pitchFamily="34" charset="-120"/>
               </a:rPr>
-              <a:t>Recalibrating to the current image takes seconds and no retraining at all</a:t>
+              <a:t>An out-of-distribution warning before inference, when an image no longer resembles the training data</a:t>
             </a:r>
             <a:endParaRPr lang="en-US" sz="2000" dirty="0"/>
           </a:p>
           <a:p>
-            <a:pPr marL="342900" indent="-342900">
+            <a:pPr lvl="1" marL="685800" indent="-342900">
               <a:lnSpc>
                 <a:spcPct val="105000"/>
               </a:lnSpc>
               <a:spcAft>
-                <a:spcPts val="1200"/>
+                <a:spcPts val="800"/>
               </a:spcAft>
               <a:buSzPct val="100000"/>
-              <a:buChar char="•"/>
-            </a:pPr>
-            <a:r>
-              <a:rPr lang="en-US" sz="2000" dirty="0">
-                <a:solidFill>
-                  <a:srgbClr val="1F2933"/>
-                </a:solidFill>
-                <a:latin typeface="Calibri" pitchFamily="34" charset="0"/>
-                <a:ea typeface="Calibri" pitchFamily="34" charset="-122"/>
-                <a:cs typeface="Calibri" pitchFamily="34" charset="-120"/>
-              </a:rPr>
-              <a:t>Or adapt the model to your own unlabelled data before committing to a full retrain</a:t>
+              <a:buChar char="▪"/>
+            </a:pPr>
+            <a:r>
+              <a:rPr lang="en-US" sz="1700" dirty="0">
+                <a:solidFill>
+                  <a:srgbClr val="5A6675"/>
+                </a:solidFill>
+                <a:latin typeface="Calibri" pitchFamily="34" charset="0"/>
+                <a:ea typeface="Calibri" pitchFamily="34" charset="-122"/>
+                <a:cs typeface="Calibri" pitchFamily="34" charset="-120"/>
+              </a:rPr>
+              <a:t>Catches stain, exposure and sensor changes that would quietly degrade predictions</a:t>
             </a:r>
             <a:endParaRPr lang="en-US" sz="2000" dirty="0"/>
           </a:p>
@@ -15243,7 +15380,7 @@
       </p:sp>
       <p:sp>
         <p:nvSpPr>
-          <p:cNvPr id="6" name="Shape 4"/>
+          <p:cNvPr id="5" name="Shape 3"/>
           <p:cNvSpPr/>
           <p:nvPr/>
         </p:nvSpPr>
@@ -15268,7 +15405,7 @@
       </p:sp>
       <p:sp>
         <p:nvSpPr>
-          <p:cNvPr id="7" name="Text 5"/>
+          <p:cNvPr id="6" name="Text 4"/>
           <p:cNvSpPr/>
           <p:nvPr/>
         </p:nvSpPr>
@@ -15299,7 +15436,7 @@
                 <a:ea typeface="Calibri" pitchFamily="34" charset="-122"/>
                 <a:cs typeface="Calibri" pitchFamily="34" charset="-120"/>
               </a:rPr>
-              <a:t>Try recalibration before you consider retraining. It usually recovers most of the loss.</a:t>
+              <a:t>These are the features that tell you when not to trust the output, and the easiest to ignore.</a:t>
             </a:r>
             <a:endParaRPr lang="en-US" sz="1600" dirty="0"/>
           </a:p>
@@ -15307,7 +15444,7 @@
       </p:sp>
       <p:sp>
         <p:nvSpPr>
-          <p:cNvPr id="8" name="Text 6"/>
+          <p:cNvPr id="7" name="Text 5"/>
           <p:cNvSpPr/>
           <p:nvPr/>
         </p:nvSpPr>
@@ -15409,7 +15546,7 @@
                 <a:ea typeface="Trebuchet MS" pitchFamily="34" charset="-122"/>
                 <a:cs typeface="Trebuchet MS" pitchFamily="34" charset="-120"/>
               </a:rPr>
-              <a:t>What we are not covering</a:t>
+              <a:t>When the model stops working</a:t>
             </a:r>
             <a:endParaRPr lang="en-US" sz="3000" dirty="0"/>
           </a:p>
@@ -15468,7 +15605,7 @@
                 <a:ea typeface="Calibri" pitchFamily="34" charset="-122"/>
                 <a:cs typeface="Calibri" pitchFamily="34" charset="-120"/>
               </a:rPr>
-              <a:t>Two halves of the same workflow, in the right order — hers first, then this.</a:t>
+              <a:t>Domain shift is the practical problem, far more often than model architecture.</a:t>
             </a:r>
             <a:endParaRPr lang="en-US" sz="1700" dirty="0"/>
           </a:p>
@@ -15514,7 +15651,7 @@
                 <a:ea typeface="Calibri" pitchFamily="34" charset="-122"/>
                 <a:cs typeface="Calibri" pitchFamily="34" charset="-120"/>
               </a:rPr>
-              <a:t>QuPath already has object classification — train on measurements, or threshold a single one</a:t>
+              <a:t>A new scanner, a new stain, a new batch — and last month’s model degrades</a:t>
             </a:r>
             <a:endParaRPr lang="en-US" sz="2000" dirty="0"/>
           </a:p>
@@ -15538,7 +15675,7 @@
                 <a:ea typeface="Calibri" pitchFamily="34" charset="-122"/>
                 <a:cs typeface="Calibri" pitchFamily="34" charset="-120"/>
               </a:rPr>
-              <a:t>We are not re-teaching it. Sara’s Monday session was the hi-plex classification half</a:t>
+              <a:t>Recalibrating to the current image takes seconds and no retraining at all</a:t>
             </a:r>
             <a:endParaRPr lang="en-US" sz="2000" dirty="0"/>
           </a:p>
@@ -15562,55 +15699,7 @@
                 <a:ea typeface="Calibri" pitchFamily="34" charset="-122"/>
                 <a:cs typeface="Calibri" pitchFamily="34" charset="-120"/>
               </a:rPr>
-              <a:t>What follows are alternative mechanisms for getting a class onto a cell:</a:t>
-            </a:r>
-            <a:endParaRPr lang="en-US" sz="2000" dirty="0"/>
-          </a:p>
-          <a:p>
-            <a:pPr marL="342900" indent="-342900">
-              <a:lnSpc>
-                <a:spcPct val="105000"/>
-              </a:lnSpc>
-              <a:spcAft>
-                <a:spcPts val="1200"/>
-              </a:spcAft>
-              <a:buSzPct val="100000"/>
-              <a:buChar char="•"/>
-            </a:pPr>
-            <a:r>
-              <a:rPr lang="en-US" sz="2000" dirty="0">
-                <a:solidFill>
-                  <a:srgbClr val="1F2933"/>
-                </a:solidFill>
-                <a:latin typeface="Calibri" pitchFamily="34" charset="0"/>
-                <a:ea typeface="Calibri" pitchFamily="34" charset="-122"/>
-                <a:cs typeface="Calibri" pitchFamily="34" charset="-120"/>
-              </a:rPr>
-              <a:t>Unsupervised clustering · rule-based marker gating · propagation from a small hand-labelled subset · applying an existing classifier to a chosen subset instead of everything</a:t>
-            </a:r>
-            <a:endParaRPr lang="en-US" sz="2000" dirty="0"/>
-          </a:p>
-          <a:p>
-            <a:pPr marL="342900" indent="-342900">
-              <a:lnSpc>
-                <a:spcPct val="105000"/>
-              </a:lnSpc>
-              <a:spcAft>
-                <a:spcPts val="1200"/>
-              </a:spcAft>
-              <a:buSzPct val="100000"/>
-              <a:buChar char="•"/>
-            </a:pPr>
-            <a:r>
-              <a:rPr lang="en-US" sz="2000" dirty="0">
-                <a:solidFill>
-                  <a:srgbClr val="1F2933"/>
-                </a:solidFill>
-                <a:latin typeface="Calibri" pitchFamily="34" charset="0"/>
-                <a:ea typeface="Calibri" pitchFamily="34" charset="-122"/>
-                <a:cs typeface="Calibri" pitchFamily="34" charset="-120"/>
-              </a:rPr>
-              <a:t>Then: what those classified cells are actually telling you — which sit next to which, and whether that differs between images</a:t>
+              <a:t>Or adapt the model to your own unlabelled data before committing to a full retrain</a:t>
             </a:r>
             <a:endParaRPr lang="en-US" sz="2000" dirty="0"/>
           </a:p>
@@ -15674,7 +15763,7 @@
                 <a:ea typeface="Calibri" pitchFamily="34" charset="-122"/>
                 <a:cs typeface="Calibri" pitchFamily="34" charset="-120"/>
               </a:rPr>
-              <a:t>If you missed hers, the two extensions she demonstrated are documented on our site too.</a:t>
+              <a:t>Try recalibration before you consider retraining. It usually recovers most of the loss.</a:t>
             </a:r>
             <a:endParaRPr lang="en-US" sz="1600" dirty="0"/>
           </a:p>
@@ -15784,7 +15873,7 @@
                 <a:ea typeface="Trebuchet MS" pitchFamily="34" charset="-122"/>
                 <a:cs typeface="Trebuchet MS" pitchFamily="34" charset="-120"/>
               </a:rPr>
-              <a:t>QP-CAT — multiplexed cell analysis</a:t>
+              <a:t>What we are not covering</a:t>
             </a:r>
             <a:endParaRPr lang="en-US" sz="3000" dirty="0"/>
           </a:p>
@@ -15843,7 +15932,7 @@
                 <a:ea typeface="Calibri" pitchFamily="34" charset="-122"/>
                 <a:cs typeface="Calibri" pitchFamily="34" charset="-120"/>
               </a:rPr>
-              <a:t>The usual workflow loses the link back to the tissue. This keeps it.</a:t>
+              <a:t>Two halves of the same workflow, in the right order — hers first, then this.</a:t>
             </a:r>
             <a:endParaRPr lang="en-US" sz="1700" dirty="0"/>
           </a:p>
@@ -15889,7 +15978,7 @@
                 <a:ea typeface="Calibri" pitchFamily="34" charset="-122"/>
                 <a:cs typeface="Calibri" pitchFamily="34" charset="-120"/>
               </a:rPr>
-              <a:t>The full scientific Python stack embedded in QuPath. No environments to manage</a:t>
+              <a:t>QuPath already has object classification — train on measurements, or threshold a single one</a:t>
             </a:r>
             <a:endParaRPr lang="en-US" sz="2000" dirty="0"/>
           </a:p>
@@ -15913,7 +16002,7 @@
                 <a:ea typeface="Calibri" pitchFamily="34" charset="-122"/>
                 <a:cs typeface="Calibri" pitchFamily="34" charset="-120"/>
               </a:rPr>
-              <a:t>Clustering, marker gating with suggested thresholds, spatial statistics, batch correction</a:t>
+              <a:t>We are not re-teaching it. Sara’s Monday session was the hi-plex classification half</a:t>
             </a:r>
             <a:endParaRPr lang="en-US" sz="2000" dirty="0"/>
           </a:p>
@@ -15937,7 +16026,7 @@
                 <a:ea typeface="Calibri" pitchFamily="34" charset="-122"/>
                 <a:cs typeface="Calibri" pitchFamily="34" charset="-120"/>
               </a:rPr>
-              <a:t>Label a small subset by hand and have the rest of the project labelled for you — no object classifier involved</a:t>
+              <a:t>What follows are alternative mechanisms for getting a class onto a cell:</a:t>
             </a:r>
             <a:endParaRPr lang="en-US" sz="2000" dirty="0"/>
           </a:p>
@@ -15961,7 +16050,7 @@
                 <a:ea typeface="Calibri" pitchFamily="34" charset="-122"/>
                 <a:cs typeface="Calibri" pitchFamily="34" charset="-120"/>
               </a:rPr>
-              <a:t>Brush a region of the embedding and those cells highlight on the slide</a:t>
+              <a:t>Unsupervised clustering · rule-based marker gating · propagation from a small hand-labelled subset · applying an existing classifier to a chosen subset instead of everything</a:t>
             </a:r>
             <a:endParaRPr lang="en-US" sz="2000" dirty="0"/>
           </a:p>
@@ -15985,7 +16074,7 @@
                 <a:ea typeface="Calibri" pitchFamily="34" charset="-122"/>
                 <a:cs typeface="Calibri" pitchFamily="34" charset="-120"/>
               </a:rPr>
-              <a:t>Separate tissue stays separate — no spatial graph edge ever crosses two TMA cores</a:t>
+              <a:t>Then: what those classified cells are actually telling you — which sit next to which, and whether that differs between images</a:t>
             </a:r>
             <a:endParaRPr lang="en-US" sz="2000" dirty="0"/>
           </a:p>
@@ -16049,7 +16138,7 @@
                 <a:ea typeface="Calibri" pitchFamily="34" charset="-122"/>
                 <a:cs typeface="Calibri" pitchFamily="34" charset="-120"/>
               </a:rPr>
-              <a:t>Author’s own warning: many features are lightly tested. Treat results as a starting point.</a:t>
+              <a:t>If you missed hers, the two extensions she demonstrated are documented on our site too.</a:t>
             </a:r>
             <a:endParaRPr lang="en-US" sz="1600" dirty="0"/>
           </a:p>
@@ -16471,7 +16560,7 @@
                 <a:ea typeface="Trebuchet MS" pitchFamily="34" charset="-122"/>
                 <a:cs typeface="Trebuchet MS" pitchFamily="34" charset="-120"/>
               </a:rPr>
-              <a:t>You can check the answer</a:t>
+              <a:t>QP-CAT — multiplexed cell analysis</a:t>
             </a:r>
             <a:endParaRPr lang="en-US" sz="3000" dirty="0"/>
           </a:p>
@@ -16530,7 +16619,7 @@
                 <a:ea typeface="Calibri" pitchFamily="34" charset="-122"/>
                 <a:cs typeface="Calibri" pitchFamily="34" charset="-120"/>
               </a:rPr>
-              <a:t>Learn what a correct result looks like, so you can recognise a wrong one later.</a:t>
+              <a:t>The usual workflow loses the link back to the tissue. This keeps it.</a:t>
             </a:r>
             <a:endParaRPr lang="en-US" sz="1700" dirty="0"/>
           </a:p>
@@ -16576,7 +16665,7 @@
                 <a:ea typeface="Calibri" pitchFamily="34" charset="-122"/>
                 <a:cs typeface="Calibri" pitchFamily="34" charset="-120"/>
               </a:rPr>
-              <a:t>Real multiplexed tissue has no ground truth — you never know which cell is really which type</a:t>
+              <a:t>The full scientific Python stack embedded in QuPath. No environments to manage</a:t>
             </a:r>
             <a:endParaRPr lang="en-US" sz="2000" dirty="0"/>
           </a:p>
@@ -16600,7 +16689,7 @@
                 <a:ea typeface="Calibri" pitchFamily="34" charset="-122"/>
                 <a:cs typeface="Calibri" pitchFamily="34" charset="-120"/>
               </a:rPr>
-              <a:t>So the exercise uses a synthetic tumour microenvironment where every cell is labelled</a:t>
+              <a:t>Clustering, marker gating with suggested thresholds, spatial statistics, batch correction</a:t>
             </a:r>
             <a:endParaRPr lang="en-US" sz="2000" dirty="0"/>
           </a:p>
@@ -16624,7 +16713,7 @@
                 <a:ea typeface="Calibri" pitchFamily="34" charset="-122"/>
                 <a:cs typeface="Calibri" pitchFamily="34" charset="-120"/>
               </a:rPr>
-              <a:t>Six cell types, tumour nests, an immune-infiltrated boundary, B-cell follicles, a proliferation gradient</a:t>
+              <a:t>Label a small subset by hand and have the rest of the project labelled for you — no object classifier involved</a:t>
             </a:r>
             <a:endParaRPr lang="en-US" sz="2000" dirty="0"/>
           </a:p>
@@ -16648,7 +16737,7 @@
                 <a:ea typeface="Calibri" pitchFamily="34" charset="-122"/>
                 <a:cs typeface="Calibri" pitchFamily="34" charset="-120"/>
               </a:rPr>
-              <a:t>Inflamed versus desert: one image is 52% lymphoid, another 9% with no B cells at all</a:t>
+              <a:t>Brush a region of the embedding and those cells highlight on the slide</a:t>
             </a:r>
             <a:endParaRPr lang="en-US" sz="2000" dirty="0"/>
           </a:p>
@@ -16672,7 +16761,7 @@
                 <a:ea typeface="Calibri" pitchFamily="34" charset="-122"/>
                 <a:cs typeface="Calibri" pitchFamily="34" charset="-120"/>
               </a:rPr>
-              <a:t>20 MB, public domain, and it downloads straight from GitHub</a:t>
+              <a:t>Separate tissue stays separate — no spatial graph edge ever crosses two TMA cores</a:t>
             </a:r>
             <a:endParaRPr lang="en-US" sz="2000" dirty="0"/>
           </a:p>
@@ -16736,7 +16825,7 @@
                 <a:ea typeface="Calibri" pitchFamily="34" charset="-122"/>
                 <a:cs typeface="Calibri" pitchFamily="34" charset="-120"/>
               </a:rPr>
-              <a:t>Cluster it, then click a boundary cell and find out whether the cluster was telling the truth.</a:t>
+              <a:t>Author’s own warning: many features are lightly tested. Treat results as a starting point.</a:t>
             </a:r>
             <a:endParaRPr lang="en-US" sz="1600" dirty="0"/>
           </a:p>
@@ -16846,7 +16935,7 @@
                 <a:ea typeface="Trebuchet MS" pitchFamily="34" charset="-122"/>
                 <a:cs typeface="Trebuchet MS" pitchFamily="34" charset="-120"/>
               </a:rPr>
-              <a:t>And getting back to the tissue</a:t>
+              <a:t>You can check the answer</a:t>
             </a:r>
             <a:endParaRPr lang="en-US" sz="3000" dirty="0"/>
           </a:p>
@@ -16905,7 +16994,7 @@
                 <a:ea typeface="Calibri" pitchFamily="34" charset="-122"/>
                 <a:cs typeface="Calibri" pitchFamily="34" charset="-120"/>
               </a:rPr>
-              <a:t>A mention rather than a demo — it is the navigation half of the clustering you just saw.</a:t>
+              <a:t>Learn what a correct result looks like, so you can recognise a wrong one later.</a:t>
             </a:r>
             <a:endParaRPr lang="en-US" sz="1700" dirty="0"/>
           </a:p>
@@ -16951,7 +17040,7 @@
                 <a:ea typeface="Calibri" pitchFamily="34" charset="-122"/>
                 <a:cs typeface="Calibri" pitchFamily="34" charset="-120"/>
               </a:rPr>
-              <a:t>Clustering answers "which cells group together". It does not answer "which cell is that"</a:t>
+              <a:t>Real multiplexed tissue has no ground truth — you never know which cell is really which type</a:t>
             </a:r>
             <a:endParaRPr lang="en-US" sz="2000" dirty="0"/>
           </a:p>
@@ -16975,7 +17064,7 @@
                 <a:ea typeface="Calibri" pitchFamily="34" charset="-122"/>
                 <a:cs typeface="Calibri" pitchFamily="34" charset="-120"/>
               </a:rPr>
-              <a:t>Cluster 3D Navigator: a rotatable point cloud, one point per cell, coloured by class</a:t>
+              <a:t>So the exercise uses a synthetic tumour microenvironment where every cell is labelled</a:t>
             </a:r>
             <a:endParaRPr lang="en-US" sz="2000" dirty="0"/>
           </a:p>
@@ -16999,7 +17088,7 @@
                 <a:ea typeface="Calibri" pitchFamily="34" charset="-122"/>
                 <a:cs typeface="Calibri" pitchFamily="34" charset="-120"/>
               </a:rPr>
-              <a:t>Click a point in cluster space and land on that cell in the viewer</a:t>
+              <a:t>Six cell types, tumour nests, an immune-infiltrated boundary, B-cell follicles, a proliferation gradient</a:t>
             </a:r>
             <a:endParaRPr lang="en-US" sz="2000" dirty="0"/>
           </a:p>
@@ -17023,7 +17112,31 @@
                 <a:ea typeface="Calibri" pitchFamily="34" charset="-122"/>
                 <a:cs typeface="Calibri" pitchFamily="34" charset="-120"/>
               </a:rPr>
-              <a:t>Boundary cells are where classification errors live — this makes them one click away</a:t>
+              <a:t>Inflamed versus desert: one image is 52% lymphoid, another 9% with no B cells at all</a:t>
+            </a:r>
+            <a:endParaRPr lang="en-US" sz="2000" dirty="0"/>
+          </a:p>
+          <a:p>
+            <a:pPr marL="342900" indent="-342900">
+              <a:lnSpc>
+                <a:spcPct val="105000"/>
+              </a:lnSpc>
+              <a:spcAft>
+                <a:spcPts val="1200"/>
+              </a:spcAft>
+              <a:buSzPct val="100000"/>
+              <a:buChar char="•"/>
+            </a:pPr>
+            <a:r>
+              <a:rPr lang="en-US" sz="2000" dirty="0">
+                <a:solidFill>
+                  <a:srgbClr val="1F2933"/>
+                </a:solidFill>
+                <a:latin typeface="Calibri" pitchFamily="34" charset="0"/>
+                <a:ea typeface="Calibri" pitchFamily="34" charset="-122"/>
+                <a:cs typeface="Calibri" pitchFamily="34" charset="-120"/>
+              </a:rPr>
+              <a:t>20 MB, public domain, and it downloads straight from GitHub</a:t>
             </a:r>
             <a:endParaRPr lang="en-US" sz="2000" dirty="0"/>
           </a:p>
@@ -17087,7 +17200,7 @@
                 <a:ea typeface="Calibri" pitchFamily="34" charset="-122"/>
                 <a:cs typeface="Calibri" pitchFamily="34" charset="-120"/>
               </a:rPr>
-              <a:t>Works with any clustering tool’s output, not just QP-CAT’s. It only reads; it writes nothing.</a:t>
+              <a:t>Cluster it, then click a boundary cell and find out whether the cluster was telling the truth.</a:t>
             </a:r>
             <a:endParaRPr lang="en-US" sz="1600" dirty="0"/>
           </a:p>
@@ -17166,23 +17279,42 @@
       </p:grpSpPr>
       <p:sp>
         <p:nvSpPr>
-          <p:cNvPr id="2" name="Shape 0"/>
-          <p:cNvSpPr/>
-          <p:nvPr/>
-        </p:nvSpPr>
-        <p:spPr>
-          <a:xfrm>
-            <a:off x="0" y="1417320"/>
-            <a:ext cx="12188952" cy="3108960"/>
-          </a:xfrm>
-          <a:prstGeom prst="rect">
-            <a:avLst/>
-          </a:prstGeom>
-          <a:solidFill>
-            <a:srgbClr val="E8F0FA"/>
-          </a:solidFill>
-          <a:ln/>
-        </p:spPr>
+          <p:cNvPr id="2" name="Text 0"/>
+          <p:cNvSpPr/>
+          <p:nvPr/>
+        </p:nvSpPr>
+        <p:spPr>
+          <a:xfrm>
+            <a:off x="566928" y="384048"/>
+            <a:ext cx="11055096" cy="658368"/>
+          </a:xfrm>
+          <a:prstGeom prst="rect">
+            <a:avLst/>
+          </a:prstGeom>
+          <a:noFill/>
+          <a:ln/>
+        </p:spPr>
+        <p:txBody>
+          <a:bodyPr wrap="square" rtlCol="0" anchor="ctr"/>
+          <a:lstStyle/>
+          <a:p>
+            <a:pPr indent="0" marL="0">
+              <a:buNone/>
+            </a:pPr>
+            <a:r>
+              <a:rPr lang="en-US" sz="3000" b="1" dirty="0">
+                <a:solidFill>
+                  <a:srgbClr val="1F4C86"/>
+                </a:solidFill>
+                <a:latin typeface="Trebuchet MS" pitchFamily="34" charset="0"/>
+                <a:ea typeface="Trebuchet MS" pitchFamily="34" charset="-122"/>
+                <a:cs typeface="Trebuchet MS" pitchFamily="34" charset="-120"/>
+              </a:rPr>
+              <a:t>And getting back to the tissue</a:t>
+            </a:r>
+            <a:endParaRPr lang="en-US" sz="3000" dirty="0"/>
+          </a:p>
+        </p:txBody>
       </p:sp>
       <p:sp>
         <p:nvSpPr>
@@ -17192,8 +17324,8 @@
         </p:nvSpPr>
         <p:spPr>
           <a:xfrm>
-            <a:off x="0" y="1417320"/>
-            <a:ext cx="201168" cy="3108960"/>
+            <a:off x="566928" y="1097280"/>
+            <a:ext cx="1920240" cy="50292"/>
           </a:xfrm>
           <a:prstGeom prst="rect">
             <a:avLst/>
@@ -17212,8 +17344,8 @@
         </p:nvSpPr>
         <p:spPr>
           <a:xfrm>
-            <a:off x="566928" y="1691640"/>
-            <a:ext cx="1828800" cy="914400"/>
+            <a:off x="566928" y="1243584"/>
+            <a:ext cx="11055096" cy="384048"/>
           </a:xfrm>
           <a:prstGeom prst="rect">
             <a:avLst/>
@@ -17229,17 +17361,17 @@
               <a:buNone/>
             </a:pPr>
             <a:r>
-              <a:rPr lang="en-US" sz="5400" b="1" dirty="0">
-                <a:solidFill>
-                  <a:srgbClr val="3674C1"/>
-                </a:solidFill>
-                <a:latin typeface="Trebuchet MS" pitchFamily="34" charset="0"/>
-                <a:ea typeface="Trebuchet MS" pitchFamily="34" charset="-122"/>
-                <a:cs typeface="Trebuchet MS" pitchFamily="34" charset="-120"/>
-              </a:rPr>
-              <a:t>07</a:t>
-            </a:r>
-            <a:endParaRPr lang="en-US" sz="5400" dirty="0"/>
+              <a:rPr lang="en-US" sz="1700" i="1" dirty="0">
+                <a:solidFill>
+                  <a:srgbClr val="5A6675"/>
+                </a:solidFill>
+                <a:latin typeface="Calibri" pitchFamily="34" charset="0"/>
+                <a:ea typeface="Calibri" pitchFamily="34" charset="-122"/>
+                <a:cs typeface="Calibri" pitchFamily="34" charset="-120"/>
+              </a:rPr>
+              <a:t>A mention rather than a demo — it is the navigation half of the clustering you just saw.</a:t>
+            </a:r>
+            <a:endParaRPr lang="en-US" sz="1700" dirty="0"/>
           </a:p>
         </p:txBody>
       </p:sp>
@@ -17251,8 +17383,151 @@
         </p:nvSpPr>
         <p:spPr>
           <a:xfrm>
-            <a:off x="566928" y="2606040"/>
-            <a:ext cx="11055096" cy="868680"/>
+            <a:off x="640080" y="1755648"/>
+            <a:ext cx="10963656" cy="4279392"/>
+          </a:xfrm>
+          <a:prstGeom prst="rect">
+            <a:avLst/>
+          </a:prstGeom>
+          <a:noFill/>
+          <a:ln/>
+        </p:spPr>
+        <p:txBody>
+          <a:bodyPr wrap="square" rtlCol="0" anchor="t"/>
+          <a:lstStyle/>
+          <a:p>
+            <a:pPr marL="342900" indent="-342900">
+              <a:lnSpc>
+                <a:spcPct val="105000"/>
+              </a:lnSpc>
+              <a:spcAft>
+                <a:spcPts val="1200"/>
+              </a:spcAft>
+              <a:buSzPct val="100000"/>
+              <a:buChar char="•"/>
+            </a:pPr>
+            <a:r>
+              <a:rPr lang="en-US" sz="2000" dirty="0">
+                <a:solidFill>
+                  <a:srgbClr val="1F2933"/>
+                </a:solidFill>
+                <a:latin typeface="Calibri" pitchFamily="34" charset="0"/>
+                <a:ea typeface="Calibri" pitchFamily="34" charset="-122"/>
+                <a:cs typeface="Calibri" pitchFamily="34" charset="-120"/>
+              </a:rPr>
+              <a:t>Clustering answers "which cells group together". It does not answer "which cell is that"</a:t>
+            </a:r>
+            <a:endParaRPr lang="en-US" sz="2000" dirty="0"/>
+          </a:p>
+          <a:p>
+            <a:pPr marL="342900" indent="-342900">
+              <a:lnSpc>
+                <a:spcPct val="105000"/>
+              </a:lnSpc>
+              <a:spcAft>
+                <a:spcPts val="1200"/>
+              </a:spcAft>
+              <a:buSzPct val="100000"/>
+              <a:buChar char="•"/>
+            </a:pPr>
+            <a:r>
+              <a:rPr lang="en-US" sz="2000" dirty="0">
+                <a:solidFill>
+                  <a:srgbClr val="1F2933"/>
+                </a:solidFill>
+                <a:latin typeface="Calibri" pitchFamily="34" charset="0"/>
+                <a:ea typeface="Calibri" pitchFamily="34" charset="-122"/>
+                <a:cs typeface="Calibri" pitchFamily="34" charset="-120"/>
+              </a:rPr>
+              <a:t>Cluster 3D Navigator: a rotatable point cloud, one point per cell, coloured by class</a:t>
+            </a:r>
+            <a:endParaRPr lang="en-US" sz="2000" dirty="0"/>
+          </a:p>
+          <a:p>
+            <a:pPr marL="342900" indent="-342900">
+              <a:lnSpc>
+                <a:spcPct val="105000"/>
+              </a:lnSpc>
+              <a:spcAft>
+                <a:spcPts val="1200"/>
+              </a:spcAft>
+              <a:buSzPct val="100000"/>
+              <a:buChar char="•"/>
+            </a:pPr>
+            <a:r>
+              <a:rPr lang="en-US" sz="2000" dirty="0">
+                <a:solidFill>
+                  <a:srgbClr val="1F2933"/>
+                </a:solidFill>
+                <a:latin typeface="Calibri" pitchFamily="34" charset="0"/>
+                <a:ea typeface="Calibri" pitchFamily="34" charset="-122"/>
+                <a:cs typeface="Calibri" pitchFamily="34" charset="-120"/>
+              </a:rPr>
+              <a:t>Click a point in cluster space and land on that cell in the viewer</a:t>
+            </a:r>
+            <a:endParaRPr lang="en-US" sz="2000" dirty="0"/>
+          </a:p>
+          <a:p>
+            <a:pPr marL="342900" indent="-342900">
+              <a:lnSpc>
+                <a:spcPct val="105000"/>
+              </a:lnSpc>
+              <a:spcAft>
+                <a:spcPts val="1200"/>
+              </a:spcAft>
+              <a:buSzPct val="100000"/>
+              <a:buChar char="•"/>
+            </a:pPr>
+            <a:r>
+              <a:rPr lang="en-US" sz="2000" dirty="0">
+                <a:solidFill>
+                  <a:srgbClr val="1F2933"/>
+                </a:solidFill>
+                <a:latin typeface="Calibri" pitchFamily="34" charset="0"/>
+                <a:ea typeface="Calibri" pitchFamily="34" charset="-122"/>
+                <a:cs typeface="Calibri" pitchFamily="34" charset="-120"/>
+              </a:rPr>
+              <a:t>Boundary cells are where classification errors live — this makes them one click away</a:t>
+            </a:r>
+            <a:endParaRPr lang="en-US" sz="2000" dirty="0"/>
+          </a:p>
+        </p:txBody>
+      </p:sp>
+      <p:sp>
+        <p:nvSpPr>
+          <p:cNvPr id="6" name="Shape 4"/>
+          <p:cNvSpPr/>
+          <p:nvPr/>
+        </p:nvSpPr>
+        <p:spPr>
+          <a:xfrm>
+            <a:off x="566928" y="5650992"/>
+            <a:ext cx="11055096" cy="566928"/>
+          </a:xfrm>
+          <a:prstGeom prst="rect">
+            <a:avLst/>
+          </a:prstGeom>
+          <a:solidFill>
+            <a:srgbClr val="F4F8FD"/>
+          </a:solidFill>
+          <a:ln w="9525">
+            <a:solidFill>
+              <a:srgbClr val="3674C1"/>
+            </a:solidFill>
+            <a:prstDash val="solid"/>
+          </a:ln>
+        </p:spPr>
+      </p:sp>
+      <p:sp>
+        <p:nvSpPr>
+          <p:cNvPr id="7" name="Text 5"/>
+          <p:cNvSpPr/>
+          <p:nvPr/>
+        </p:nvSpPr>
+        <p:spPr>
+          <a:xfrm>
+            <a:off x="768096" y="5650992"/>
+            <a:ext cx="10652760" cy="566928"/>
           </a:xfrm>
           <a:prstGeom prst="rect">
             <a:avLst/>
@@ -17268,95 +17543,17 @@
               <a:buNone/>
             </a:pPr>
             <a:r>
-              <a:rPr lang="en-US" sz="4000" b="1" dirty="0">
+              <a:rPr lang="en-US" sz="1600" b="1" dirty="0">
                 <a:solidFill>
                   <a:srgbClr val="1F4C86"/>
                 </a:solidFill>
-                <a:latin typeface="Trebuchet MS" pitchFamily="34" charset="0"/>
-                <a:ea typeface="Trebuchet MS" pitchFamily="34" charset="-122"/>
-                <a:cs typeface="Trebuchet MS" pitchFamily="34" charset="-120"/>
-              </a:rPr>
-              <a:t>Collagen fibre and texture</a:t>
-            </a:r>
-            <a:endParaRPr lang="en-US" sz="4000" dirty="0"/>
-          </a:p>
-        </p:txBody>
-      </p:sp>
-      <p:sp>
-        <p:nvSpPr>
-          <p:cNvPr id="6" name="Text 4"/>
-          <p:cNvSpPr/>
-          <p:nvPr/>
-        </p:nvSpPr>
-        <p:spPr>
-          <a:xfrm>
-            <a:off x="566928" y="3456432"/>
-            <a:ext cx="10140696" cy="731520"/>
-          </a:xfrm>
-          <a:prstGeom prst="rect">
-            <a:avLst/>
-          </a:prstGeom>
-          <a:noFill/>
-          <a:ln/>
-        </p:spPr>
-        <p:txBody>
-          <a:bodyPr wrap="square" rtlCol="0" anchor="t"/>
-          <a:lstStyle/>
-          <a:p>
-            <a:pPr indent="0" marL="0">
-              <a:buNone/>
-            </a:pPr>
-            <a:r>
-              <a:rPr lang="en-US" sz="1900" dirty="0">
-                <a:solidFill>
-                  <a:srgbClr val="5A6675"/>
-                </a:solidFill>
-                <a:latin typeface="Calibri" pitchFamily="34" charset="0"/>
-                <a:ea typeface="Calibri" pitchFamily="34" charset="-122"/>
-                <a:cs typeface="Calibri" pitchFamily="34" charset="-120"/>
-              </a:rPr>
-              <a:t>Architecture, not just presence</a:t>
-            </a:r>
-            <a:endParaRPr lang="en-US" sz="1900" dirty="0"/>
-          </a:p>
-        </p:txBody>
-      </p:sp>
-      <p:sp>
-        <p:nvSpPr>
-          <p:cNvPr id="7" name="Text 5"/>
-          <p:cNvSpPr/>
-          <p:nvPr/>
-        </p:nvSpPr>
-        <p:spPr>
-          <a:xfrm>
-            <a:off x="566928" y="6199632"/>
-            <a:ext cx="8229600" cy="365760"/>
-          </a:xfrm>
-          <a:prstGeom prst="rect">
-            <a:avLst/>
-          </a:prstGeom>
-          <a:noFill/>
-          <a:ln/>
-        </p:spPr>
-        <p:txBody>
-          <a:bodyPr wrap="square" rtlCol="0" anchor="ctr"/>
-          <a:lstStyle/>
-          <a:p>
-            <a:pPr indent="0" marL="0">
-              <a:buNone/>
-            </a:pPr>
-            <a:r>
-              <a:rPr lang="en-US" sz="1400" dirty="0">
-                <a:solidFill>
-                  <a:srgbClr val="A8B2BF"/>
-                </a:solidFill>
-                <a:latin typeface="Calibri" pitchFamily="34" charset="0"/>
-                <a:ea typeface="Calibri" pitchFamily="34" charset="-122"/>
-                <a:cs typeface="Calibri" pitchFamily="34" charset="-120"/>
-              </a:rPr>
-              <a:t>michaelsnelson.github.io/BINA-I2K-2026-QuPath-Extensions</a:t>
-            </a:r>
-            <a:endParaRPr lang="en-US" sz="1400" dirty="0"/>
+                <a:latin typeface="Calibri" pitchFamily="34" charset="0"/>
+                <a:ea typeface="Calibri" pitchFamily="34" charset="-122"/>
+                <a:cs typeface="Calibri" pitchFamily="34" charset="-120"/>
+              </a:rPr>
+              <a:t>Works with any clustering tool’s output, not just QP-CAT’s. It only reads; it writes nothing.</a:t>
+            </a:r>
+            <a:endParaRPr lang="en-US" sz="1600" dirty="0"/>
           </a:p>
         </p:txBody>
       </p:sp>
@@ -17433,14 +17630,54 @@
       </p:grpSpPr>
       <p:sp>
         <p:nvSpPr>
-          <p:cNvPr id="2" name="Text 0"/>
-          <p:cNvSpPr/>
-          <p:nvPr/>
-        </p:nvSpPr>
-        <p:spPr>
-          <a:xfrm>
-            <a:off x="566928" y="384048"/>
-            <a:ext cx="11055096" cy="658368"/>
+          <p:cNvPr id="2" name="Shape 0"/>
+          <p:cNvSpPr/>
+          <p:nvPr/>
+        </p:nvSpPr>
+        <p:spPr>
+          <a:xfrm>
+            <a:off x="0" y="1417320"/>
+            <a:ext cx="12188952" cy="3108960"/>
+          </a:xfrm>
+          <a:prstGeom prst="rect">
+            <a:avLst/>
+          </a:prstGeom>
+          <a:solidFill>
+            <a:srgbClr val="E8F0FA"/>
+          </a:solidFill>
+          <a:ln/>
+        </p:spPr>
+      </p:sp>
+      <p:sp>
+        <p:nvSpPr>
+          <p:cNvPr id="3" name="Shape 1"/>
+          <p:cNvSpPr/>
+          <p:nvPr/>
+        </p:nvSpPr>
+        <p:spPr>
+          <a:xfrm>
+            <a:off x="0" y="1417320"/>
+            <a:ext cx="201168" cy="3108960"/>
+          </a:xfrm>
+          <a:prstGeom prst="rect">
+            <a:avLst/>
+          </a:prstGeom>
+          <a:solidFill>
+            <a:srgbClr val="3674C1"/>
+          </a:solidFill>
+          <a:ln/>
+        </p:spPr>
+      </p:sp>
+      <p:sp>
+        <p:nvSpPr>
+          <p:cNvPr id="4" name="Text 2"/>
+          <p:cNvSpPr/>
+          <p:nvPr/>
+        </p:nvSpPr>
+        <p:spPr>
+          <a:xfrm>
+            <a:off x="566928" y="1691640"/>
+            <a:ext cx="1828800" cy="914400"/>
           </a:xfrm>
           <a:prstGeom prst="rect">
             <a:avLst/>
@@ -17456,50 +17693,30 @@
               <a:buNone/>
             </a:pPr>
             <a:r>
-              <a:rPr lang="en-US" sz="3000" b="1" dirty="0">
-                <a:solidFill>
-                  <a:srgbClr val="1F4C86"/>
+              <a:rPr lang="en-US" sz="5400" b="1" dirty="0">
+                <a:solidFill>
+                  <a:srgbClr val="3674C1"/>
                 </a:solidFill>
                 <a:latin typeface="Trebuchet MS" pitchFamily="34" charset="0"/>
                 <a:ea typeface="Trebuchet MS" pitchFamily="34" charset="-122"/>
                 <a:cs typeface="Trebuchet MS" pitchFamily="34" charset="-120"/>
               </a:rPr>
-              <a:t>Why fibre architecture</a:t>
-            </a:r>
-            <a:endParaRPr lang="en-US" sz="3000" dirty="0"/>
-          </a:p>
-        </p:txBody>
-      </p:sp>
-      <p:sp>
-        <p:nvSpPr>
-          <p:cNvPr id="3" name="Shape 1"/>
-          <p:cNvSpPr/>
-          <p:nvPr/>
-        </p:nvSpPr>
-        <p:spPr>
-          <a:xfrm>
-            <a:off x="566928" y="1097280"/>
-            <a:ext cx="1920240" cy="50292"/>
-          </a:xfrm>
-          <a:prstGeom prst="rect">
-            <a:avLst/>
-          </a:prstGeom>
-          <a:solidFill>
-            <a:srgbClr val="3674C1"/>
-          </a:solidFill>
-          <a:ln/>
-        </p:spPr>
-      </p:sp>
-      <p:sp>
-        <p:nvSpPr>
-          <p:cNvPr id="4" name="Text 2"/>
-          <p:cNvSpPr/>
-          <p:nvPr/>
-        </p:nvSpPr>
-        <p:spPr>
-          <a:xfrm>
-            <a:off x="566928" y="1243584"/>
-            <a:ext cx="11055096" cy="384048"/>
+              <a:t>07</a:t>
+            </a:r>
+            <a:endParaRPr lang="en-US" sz="5400" dirty="0"/>
+          </a:p>
+        </p:txBody>
+      </p:sp>
+      <p:sp>
+        <p:nvSpPr>
+          <p:cNvPr id="5" name="Text 3"/>
+          <p:cNvSpPr/>
+          <p:nvPr/>
+        </p:nvSpPr>
+        <p:spPr>
+          <a:xfrm>
+            <a:off x="566928" y="2606040"/>
+            <a:ext cx="11055096" cy="868680"/>
           </a:xfrm>
           <a:prstGeom prst="rect">
             <a:avLst/>
@@ -17515,30 +17732,30 @@
               <a:buNone/>
             </a:pPr>
             <a:r>
-              <a:rPr lang="en-US" sz="1700" i="1" dirty="0">
-                <a:solidFill>
-                  <a:srgbClr val="5A6675"/>
-                </a:solidFill>
-                <a:latin typeface="Calibri" pitchFamily="34" charset="0"/>
-                <a:ea typeface="Calibri" pitchFamily="34" charset="-122"/>
-                <a:cs typeface="Calibri" pitchFamily="34" charset="-120"/>
-              </a:rPr>
-              <a:t>Conklin et al. 2011, American Journal of Pathology 178:1221.</a:t>
-            </a:r>
-            <a:endParaRPr lang="en-US" sz="1700" dirty="0"/>
-          </a:p>
-        </p:txBody>
-      </p:sp>
-      <p:sp>
-        <p:nvSpPr>
-          <p:cNvPr id="5" name="Text 3"/>
-          <p:cNvSpPr/>
-          <p:nvPr/>
-        </p:nvSpPr>
-        <p:spPr>
-          <a:xfrm>
-            <a:off x="640080" y="1755648"/>
-            <a:ext cx="10963656" cy="4279392"/>
+              <a:rPr lang="en-US" sz="4000" b="1" dirty="0">
+                <a:solidFill>
+                  <a:srgbClr val="1F4C86"/>
+                </a:solidFill>
+                <a:latin typeface="Trebuchet MS" pitchFamily="34" charset="0"/>
+                <a:ea typeface="Trebuchet MS" pitchFamily="34" charset="-122"/>
+                <a:cs typeface="Trebuchet MS" pitchFamily="34" charset="-120"/>
+              </a:rPr>
+              <a:t>Collagen fibre and texture</a:t>
+            </a:r>
+            <a:endParaRPr lang="en-US" sz="4000" dirty="0"/>
+          </a:p>
+        </p:txBody>
+      </p:sp>
+      <p:sp>
+        <p:nvSpPr>
+          <p:cNvPr id="6" name="Text 4"/>
+          <p:cNvSpPr/>
+          <p:nvPr/>
+        </p:nvSpPr>
+        <p:spPr>
+          <a:xfrm>
+            <a:off x="566928" y="3456432"/>
+            <a:ext cx="10140696" cy="731520"/>
           </a:xfrm>
           <a:prstGeom prst="rect">
             <a:avLst/>
@@ -17548,166 +17765,62 @@
         </p:spPr>
         <p:txBody>
           <a:bodyPr wrap="square" rtlCol="0" anchor="t"/>
-          <a:lstStyle/>
-          <a:p>
-            <a:pPr marL="342900" indent="-342900">
-              <a:lnSpc>
-                <a:spcPct val="105000"/>
-              </a:lnSpc>
-              <a:spcAft>
-                <a:spcPts val="1200"/>
-              </a:spcAft>
-              <a:buSzPct val="100000"/>
-              <a:buChar char="•"/>
-            </a:pPr>
-            <a:r>
-              <a:rPr lang="en-US" sz="2000" dirty="0">
-                <a:solidFill>
-                  <a:srgbClr val="1F2933"/>
-                </a:solidFill>
-                <a:latin typeface="Calibri" pitchFamily="34" charset="0"/>
-                <a:ea typeface="Calibri" pitchFamily="34" charset="-122"/>
-                <a:cs typeface="Calibri" pitchFamily="34" charset="-120"/>
-              </a:rPr>
-              <a:t>Collagen is not simply present or absent — the arrangement carries the biology</a:t>
-            </a:r>
-            <a:endParaRPr lang="en-US" sz="2000" dirty="0"/>
-          </a:p>
-          <a:p>
-            <a:pPr marL="342900" indent="-342900">
-              <a:lnSpc>
-                <a:spcPct val="105000"/>
-              </a:lnSpc>
-              <a:spcAft>
-                <a:spcPts val="1200"/>
-              </a:spcAft>
-              <a:buSzPct val="100000"/>
-              <a:buChar char="•"/>
-            </a:pPr>
-            <a:r>
-              <a:rPr lang="en-US" sz="2000" dirty="0">
-                <a:solidFill>
-                  <a:srgbClr val="1F2933"/>
-                </a:solidFill>
-                <a:latin typeface="Calibri" pitchFamily="34" charset="0"/>
-                <a:ea typeface="Calibri" pitchFamily="34" charset="-122"/>
-                <a:cs typeface="Calibri" pitchFamily="34" charset="-120"/>
-              </a:rPr>
-              <a:t>Wavy versus straightened; aligned versus isotropic; and how that changes at a boundary</a:t>
-            </a:r>
-            <a:endParaRPr lang="en-US" sz="2000" dirty="0"/>
-          </a:p>
-          <a:p>
-            <a:pPr marL="342900" indent="-342900">
-              <a:lnSpc>
-                <a:spcPct val="105000"/>
-              </a:lnSpc>
-              <a:spcAft>
-                <a:spcPts val="1200"/>
-              </a:spcAft>
-              <a:buSzPct val="100000"/>
-              <a:buChar char="•"/>
-            </a:pPr>
-            <a:r>
-              <a:rPr lang="en-US" sz="2000" dirty="0">
-                <a:solidFill>
-                  <a:srgbClr val="1F2933"/>
-                </a:solidFill>
-                <a:latin typeface="Calibri" pitchFamily="34" charset="0"/>
-                <a:ea typeface="Calibri" pitchFamily="34" charset="-122"/>
-                <a:cs typeface="Calibri" pitchFamily="34" charset="-120"/>
-              </a:rPr>
-              <a:t>In breast pathology, straightened fibres running perpendicular to the tumour boundary act as tracks for invading cells</a:t>
-            </a:r>
-            <a:endParaRPr lang="en-US" sz="2000" dirty="0"/>
-          </a:p>
-          <a:p>
-            <a:pPr marL="342900" indent="-342900">
-              <a:lnSpc>
-                <a:spcPct val="105000"/>
-              </a:lnSpc>
-              <a:spcAft>
-                <a:spcPts val="1200"/>
-              </a:spcAft>
-              <a:buSzPct val="100000"/>
-              <a:buChar char="•"/>
-            </a:pPr>
-            <a:r>
-              <a:rPr lang="en-US" sz="2000" dirty="0">
-                <a:solidFill>
-                  <a:srgbClr val="1F2933"/>
-                </a:solidFill>
-                <a:latin typeface="Calibri" pitchFamily="34" charset="0"/>
-                <a:ea typeface="Calibri" pitchFamily="34" charset="-122"/>
-                <a:cs typeface="Calibri" pitchFamily="34" charset="-120"/>
-              </a:rPr>
-              <a:t>Hazard ratio 3.0–3.9 for disease-free survival, independent of grade, size and receptor status</a:t>
-            </a:r>
-            <a:endParaRPr lang="en-US" sz="2000" dirty="0"/>
-          </a:p>
-        </p:txBody>
-      </p:sp>
-      <p:sp>
-        <p:nvSpPr>
-          <p:cNvPr id="6" name="Shape 4"/>
-          <p:cNvSpPr/>
-          <p:nvPr/>
-        </p:nvSpPr>
-        <p:spPr>
-          <a:xfrm>
-            <a:off x="566928" y="5650992"/>
-            <a:ext cx="11055096" cy="566928"/>
-          </a:xfrm>
-          <a:prstGeom prst="rect">
-            <a:avLst/>
-          </a:prstGeom>
-          <a:solidFill>
-            <a:srgbClr val="F4F8FD"/>
-          </a:solidFill>
-          <a:ln w="9525">
-            <a:solidFill>
-              <a:srgbClr val="3674C1"/>
-            </a:solidFill>
-            <a:prstDash val="solid"/>
-          </a:ln>
-        </p:spPr>
-      </p:sp>
-      <p:sp>
-        <p:nvSpPr>
-          <p:cNvPr id="7" name="Text 5"/>
-          <p:cNvSpPr/>
-          <p:nvPr/>
-        </p:nvSpPr>
-        <p:spPr>
-          <a:xfrm>
-            <a:off x="768096" y="5650992"/>
-            <a:ext cx="10652760" cy="566928"/>
-          </a:xfrm>
-          <a:prstGeom prst="rect">
-            <a:avLst/>
-          </a:prstGeom>
-          <a:noFill/>
-          <a:ln/>
-        </p:spPr>
-        <p:txBody>
-          <a:bodyPr wrap="square" rtlCol="0" anchor="ctr"/>
           <a:lstStyle/>
           <a:p>
             <a:pPr indent="0" marL="0">
               <a:buNone/>
             </a:pPr>
             <a:r>
-              <a:rPr lang="en-US" sz="1600" b="1" dirty="0">
-                <a:solidFill>
-                  <a:srgbClr val="1F4C86"/>
-                </a:solidFill>
-                <a:latin typeface="Calibri" pitchFamily="34" charset="0"/>
-                <a:ea typeface="Calibri" pitchFamily="34" charset="-122"/>
-                <a:cs typeface="Calibri" pitchFamily="34" charset="-120"/>
-              </a:rPr>
-              <a:t>The same wavy-to-straight axis recurs in arterial adventitia, sclera, alveolar wall, and cardiac fibrosis.</a:t>
-            </a:r>
-            <a:endParaRPr lang="en-US" sz="1600" dirty="0"/>
+              <a:rPr lang="en-US" sz="1900" dirty="0">
+                <a:solidFill>
+                  <a:srgbClr val="5A6675"/>
+                </a:solidFill>
+                <a:latin typeface="Calibri" pitchFamily="34" charset="0"/>
+                <a:ea typeface="Calibri" pitchFamily="34" charset="-122"/>
+                <a:cs typeface="Calibri" pitchFamily="34" charset="-120"/>
+              </a:rPr>
+              <a:t>Architecture, not just presence</a:t>
+            </a:r>
+            <a:endParaRPr lang="en-US" sz="1900" dirty="0"/>
+          </a:p>
+        </p:txBody>
+      </p:sp>
+      <p:sp>
+        <p:nvSpPr>
+          <p:cNvPr id="7" name="Text 5"/>
+          <p:cNvSpPr/>
+          <p:nvPr/>
+        </p:nvSpPr>
+        <p:spPr>
+          <a:xfrm>
+            <a:off x="566928" y="6199632"/>
+            <a:ext cx="8229600" cy="365760"/>
+          </a:xfrm>
+          <a:prstGeom prst="rect">
+            <a:avLst/>
+          </a:prstGeom>
+          <a:noFill/>
+          <a:ln/>
+        </p:spPr>
+        <p:txBody>
+          <a:bodyPr wrap="square" rtlCol="0" anchor="ctr"/>
+          <a:lstStyle/>
+          <a:p>
+            <a:pPr indent="0" marL="0">
+              <a:buNone/>
+            </a:pPr>
+            <a:r>
+              <a:rPr lang="en-US" sz="1400" dirty="0">
+                <a:solidFill>
+                  <a:srgbClr val="A8B2BF"/>
+                </a:solidFill>
+                <a:latin typeface="Calibri" pitchFamily="34" charset="0"/>
+                <a:ea typeface="Calibri" pitchFamily="34" charset="-122"/>
+                <a:cs typeface="Calibri" pitchFamily="34" charset="-120"/>
+              </a:rPr>
+              <a:t>michaelsnelson.github.io/BINA-I2K-2026-QuPath-Extensions</a:t>
+            </a:r>
+            <a:endParaRPr lang="en-US" sz="1400" dirty="0"/>
           </a:p>
         </p:txBody>
       </p:sp>
@@ -17815,7 +17928,7 @@
                 <a:ea typeface="Trebuchet MS" pitchFamily="34" charset="-122"/>
                 <a:cs typeface="Trebuchet MS" pitchFamily="34" charset="-120"/>
               </a:rPr>
-              <a:t>Two complementary tools</a:t>
+              <a:t>Why fibre architecture</a:t>
             </a:r>
             <a:endParaRPr lang="en-US" sz="3000" dirty="0"/>
           </a:p>
@@ -17843,34 +17956,14 @@
       </p:sp>
       <p:sp>
         <p:nvSpPr>
-          <p:cNvPr id="4" name="Shape 2"/>
-          <p:cNvSpPr/>
-          <p:nvPr/>
-        </p:nvSpPr>
-        <p:spPr>
-          <a:xfrm>
-            <a:off x="566928" y="1554480"/>
-            <a:ext cx="5298948" cy="530352"/>
-          </a:xfrm>
-          <a:prstGeom prst="rect">
-            <a:avLst/>
-          </a:prstGeom>
-          <a:solidFill>
-            <a:srgbClr val="E8F0FA"/>
-          </a:solidFill>
-          <a:ln/>
-        </p:spPr>
-      </p:sp>
-      <p:sp>
-        <p:nvSpPr>
-          <p:cNvPr id="5" name="Text 3"/>
-          <p:cNvSpPr/>
-          <p:nvPr/>
-        </p:nvSpPr>
-        <p:spPr>
-          <a:xfrm>
-            <a:off x="731520" y="1554480"/>
-            <a:ext cx="4969764" cy="530352"/>
+          <p:cNvPr id="4" name="Text 2"/>
+          <p:cNvSpPr/>
+          <p:nvPr/>
+        </p:nvSpPr>
+        <p:spPr>
+          <a:xfrm>
+            <a:off x="566928" y="1243584"/>
+            <a:ext cx="11055096" cy="384048"/>
           </a:xfrm>
           <a:prstGeom prst="rect">
             <a:avLst/>
@@ -17886,30 +17979,30 @@
               <a:buNone/>
             </a:pPr>
             <a:r>
-              <a:rPr lang="en-US" sz="2000" b="1" dirty="0">
-                <a:solidFill>
-                  <a:srgbClr val="1F4C86"/>
-                </a:solidFill>
-                <a:latin typeface="Trebuchet MS" pitchFamily="34" charset="0"/>
-                <a:ea typeface="Trebuchet MS" pitchFamily="34" charset="-122"/>
-                <a:cs typeface="Trebuchet MS" pitchFamily="34" charset="-120"/>
-              </a:rPr>
-              <a:t>Fiber Analysis — measure a zone</a:t>
-            </a:r>
-            <a:endParaRPr lang="en-US" sz="2000" dirty="0"/>
-          </a:p>
-        </p:txBody>
-      </p:sp>
-      <p:sp>
-        <p:nvSpPr>
-          <p:cNvPr id="6" name="Text 4"/>
-          <p:cNvSpPr/>
-          <p:nvPr/>
-        </p:nvSpPr>
-        <p:spPr>
-          <a:xfrm>
-            <a:off x="658368" y="2240280"/>
-            <a:ext cx="5116068" cy="3566160"/>
+              <a:rPr lang="en-US" sz="1700" i="1" dirty="0">
+                <a:solidFill>
+                  <a:srgbClr val="5A6675"/>
+                </a:solidFill>
+                <a:latin typeface="Calibri" pitchFamily="34" charset="0"/>
+                <a:ea typeface="Calibri" pitchFamily="34" charset="-122"/>
+                <a:cs typeface="Calibri" pitchFamily="34" charset="-120"/>
+              </a:rPr>
+              <a:t>Conklin et al. 2011, American Journal of Pathology 178:1221.</a:t>
+            </a:r>
+            <a:endParaRPr lang="en-US" sz="1700" dirty="0"/>
+          </a:p>
+        </p:txBody>
+      </p:sp>
+      <p:sp>
+        <p:nvSpPr>
+          <p:cNvPr id="5" name="Text 3"/>
+          <p:cNvSpPr/>
+          <p:nvPr/>
+        </p:nvSpPr>
+        <p:spPr>
+          <a:xfrm>
+            <a:off x="640080" y="1755648"/>
+            <a:ext cx="10963656" cy="4279392"/>
           </a:xfrm>
           <a:prstGeom prst="rect">
             <a:avLst/>
@@ -17922,14 +18015,17 @@
           <a:lstStyle/>
           <a:p>
             <a:pPr marL="342900" indent="-342900">
+              <a:lnSpc>
+                <a:spcPct val="105000"/>
+              </a:lnSpc>
               <a:spcAft>
-                <a:spcPts val="1100"/>
+                <a:spcPts val="1200"/>
               </a:spcAft>
               <a:buSzPct val="100000"/>
               <a:buChar char="•"/>
             </a:pPr>
             <a:r>
-              <a:rPr lang="en-US" sz="1800" dirty="0">
+              <a:rPr lang="en-US" sz="2000" dirty="0">
                 <a:solidFill>
                   <a:srgbClr val="1F2933"/>
                 </a:solidFill>
@@ -17937,20 +18033,23 @@
                 <a:ea typeface="Calibri" pitchFamily="34" charset="-122"/>
                 <a:cs typeface="Calibri" pitchFamily="34" charset="-120"/>
               </a:rPr>
-              <a:t>A band of chosen width inside, outside, or across an annotation boundary</a:t>
-            </a:r>
-            <a:endParaRPr lang="en-US" sz="1800" dirty="0"/>
+              <a:t>Collagen is not simply present or absent — the arrangement carries the biology</a:t>
+            </a:r>
+            <a:endParaRPr lang="en-US" sz="2000" dirty="0"/>
           </a:p>
           <a:p>
             <a:pPr marL="342900" indent="-342900">
+              <a:lnSpc>
+                <a:spcPct val="105000"/>
+              </a:lnSpc>
               <a:spcAft>
-                <a:spcPts val="1100"/>
+                <a:spcPts val="1200"/>
               </a:spcAft>
               <a:buSzPct val="100000"/>
               <a:buChar char="•"/>
             </a:pPr>
             <a:r>
-              <a:rPr lang="en-US" sz="1800" dirty="0">
+              <a:rPr lang="en-US" sz="2000" dirty="0">
                 <a:solidFill>
                   <a:srgbClr val="1F2933"/>
                 </a:solidFill>
@@ -17958,20 +18057,23 @@
                 <a:ea typeface="Calibri" pitchFamily="34" charset="-122"/>
                 <a:cs typeface="Calibri" pitchFamily="34" charset="-120"/>
               </a:rPr>
-              <a:t>Straightness and persistence: wavy versus straightened fibres</a:t>
-            </a:r>
-            <a:endParaRPr lang="en-US" sz="1800" dirty="0"/>
+              <a:t>Wavy versus straightened; aligned versus isotropic; and how that changes at a boundary</a:t>
+            </a:r>
+            <a:endParaRPr lang="en-US" sz="2000" dirty="0"/>
           </a:p>
           <a:p>
             <a:pPr marL="342900" indent="-342900">
+              <a:lnSpc>
+                <a:spcPct val="105000"/>
+              </a:lnSpc>
               <a:spcAft>
-                <a:spcPts val="1100"/>
+                <a:spcPts val="1200"/>
               </a:spcAft>
               <a:buSzPct val="100000"/>
               <a:buChar char="•"/>
             </a:pPr>
             <a:r>
-              <a:rPr lang="en-US" sz="1800" dirty="0">
+              <a:rPr lang="en-US" sz="2000" dirty="0">
                 <a:solidFill>
                   <a:srgbClr val="1F2933"/>
                 </a:solidFill>
@@ -17979,20 +18081,23 @@
                 <a:ea typeface="Calibri" pitchFamily="34" charset="-122"/>
                 <a:cs typeface="Calibri" pitchFamily="34" charset="-120"/>
               </a:rPr>
-              <a:t>Morphometrics: coverage, length, branching, fractal dimension, gaps</a:t>
-            </a:r>
-            <a:endParaRPr lang="en-US" sz="1800" dirty="0"/>
+              <a:t>In breast pathology, straightened fibres running perpendicular to the tumour boundary act as tracks for invading cells</a:t>
+            </a:r>
+            <a:endParaRPr lang="en-US" sz="2000" dirty="0"/>
           </a:p>
           <a:p>
             <a:pPr marL="342900" indent="-342900">
+              <a:lnSpc>
+                <a:spcPct val="105000"/>
+              </a:lnSpc>
               <a:spcAft>
-                <a:spcPts val="1100"/>
+                <a:spcPts val="1200"/>
               </a:spcAft>
               <a:buSzPct val="100000"/>
               <a:buChar char="•"/>
             </a:pPr>
             <a:r>
-              <a:rPr lang="en-US" sz="1800" dirty="0">
+              <a:rPr lang="en-US" sz="2000" dirty="0">
                 <a:solidFill>
                   <a:srgbClr val="1F2933"/>
                 </a:solidFill>
@@ -18000,42 +18105,47 @@
                 <a:ea typeface="Calibri" pitchFamily="34" charset="-122"/>
                 <a:cs typeface="Calibri" pitchFamily="34" charset="-120"/>
               </a:rPr>
-              <a:t>Texture: the information fibre-tracing misses entirely</a:t>
-            </a:r>
-            <a:endParaRPr lang="en-US" sz="1800" dirty="0"/>
-          </a:p>
-        </p:txBody>
-      </p:sp>
-      <p:sp>
-        <p:nvSpPr>
-          <p:cNvPr id="7" name="Shape 5"/>
-          <p:cNvSpPr/>
-          <p:nvPr/>
-        </p:nvSpPr>
-        <p:spPr>
-          <a:xfrm>
-            <a:off x="6323076" y="1554480"/>
-            <a:ext cx="5298948" cy="530352"/>
+              <a:t>Hazard ratio 3.0–3.9 for disease-free survival, independent of grade, size and receptor status</a:t>
+            </a:r>
+            <a:endParaRPr lang="en-US" sz="2000" dirty="0"/>
+          </a:p>
+        </p:txBody>
+      </p:sp>
+      <p:sp>
+        <p:nvSpPr>
+          <p:cNvPr id="6" name="Shape 4"/>
+          <p:cNvSpPr/>
+          <p:nvPr/>
+        </p:nvSpPr>
+        <p:spPr>
+          <a:xfrm>
+            <a:off x="566928" y="5650992"/>
+            <a:ext cx="11055096" cy="566928"/>
           </a:xfrm>
           <a:prstGeom prst="rect">
             <a:avLst/>
           </a:prstGeom>
           <a:solidFill>
-            <a:srgbClr val="E8F0FA"/>
+            <a:srgbClr val="F4F8FD"/>
           </a:solidFill>
-          <a:ln/>
-        </p:spPr>
-      </p:sp>
-      <p:sp>
-        <p:nvSpPr>
-          <p:cNvPr id="8" name="Text 6"/>
-          <p:cNvSpPr/>
-          <p:nvPr/>
-        </p:nvSpPr>
-        <p:spPr>
-          <a:xfrm>
-            <a:off x="6487668" y="1554480"/>
-            <a:ext cx="4969764" cy="530352"/>
+          <a:ln w="9525">
+            <a:solidFill>
+              <a:srgbClr val="3674C1"/>
+            </a:solidFill>
+            <a:prstDash val="solid"/>
+          </a:ln>
+        </p:spPr>
+      </p:sp>
+      <p:sp>
+        <p:nvSpPr>
+          <p:cNvPr id="7" name="Text 5"/>
+          <p:cNvSpPr/>
+          <p:nvPr/>
+        </p:nvSpPr>
+        <p:spPr>
+          <a:xfrm>
+            <a:off x="768096" y="5650992"/>
+            <a:ext cx="10652760" cy="566928"/>
           </a:xfrm>
           <a:prstGeom prst="rect">
             <a:avLst/>
@@ -18051,129 +18161,23 @@
               <a:buNone/>
             </a:pPr>
             <a:r>
-              <a:rPr lang="en-US" sz="2000" b="1" dirty="0">
-                <a:solidFill>
-                  <a:srgbClr val="B26A00"/>
-                </a:solidFill>
-                <a:latin typeface="Trebuchet MS" pitchFamily="34" charset="0"/>
-                <a:ea typeface="Trebuchet MS" pitchFamily="34" charset="-122"/>
-                <a:cs typeface="Trebuchet MS" pitchFamily="34" charset="-120"/>
-              </a:rPr>
-              <a:t>TME-Quant — trace the fibres</a:t>
-            </a:r>
-            <a:endParaRPr lang="en-US" sz="2000" dirty="0"/>
-          </a:p>
-        </p:txBody>
-      </p:sp>
-      <p:sp>
-        <p:nvSpPr>
-          <p:cNvPr id="9" name="Text 7"/>
-          <p:cNvSpPr/>
-          <p:nvPr/>
-        </p:nvSpPr>
-        <p:spPr>
-          <a:xfrm>
-            <a:off x="6414516" y="2240280"/>
-            <a:ext cx="5116068" cy="3566160"/>
-          </a:xfrm>
-          <a:prstGeom prst="rect">
-            <a:avLst/>
-          </a:prstGeom>
-          <a:noFill/>
-          <a:ln/>
-        </p:spPr>
-        <p:txBody>
-          <a:bodyPr wrap="square" rtlCol="0" anchor="t"/>
-          <a:lstStyle/>
-          <a:p>
-            <a:pPr marL="342900" indent="-342900">
-              <a:spcAft>
-                <a:spcPts val="1100"/>
-              </a:spcAft>
-              <a:buSzPct val="100000"/>
-              <a:buChar char="•"/>
-            </a:pPr>
-            <a:r>
-              <a:rPr lang="en-US" sz="1800" dirty="0">
-                <a:solidFill>
-                  <a:srgbClr val="1F2933"/>
-                </a:solidFill>
-                <a:latin typeface="Calibri" pitchFamily="34" charset="0"/>
-                <a:ea typeface="Calibri" pitchFamily="34" charset="-122"/>
-                <a:cs typeface="Calibri" pitchFamily="34" charset="-120"/>
-              </a:rPr>
-              <a:t>Individual fibres extracted and committed back as objects</a:t>
-            </a:r>
-            <a:endParaRPr lang="en-US" sz="1800" dirty="0"/>
-          </a:p>
-          <a:p>
-            <a:pPr marL="342900" indent="-342900">
-              <a:spcAft>
-                <a:spcPts val="1100"/>
-              </a:spcAft>
-              <a:buSzPct val="100000"/>
-              <a:buChar char="•"/>
-            </a:pPr>
-            <a:r>
-              <a:rPr lang="en-US" sz="1800" dirty="0">
-                <a:solidFill>
-                  <a:srgbClr val="1F2933"/>
-                </a:solidFill>
-                <a:latin typeface="Calibri" pitchFamily="34" charset="0"/>
-                <a:ea typeface="Calibri" pitchFamily="34" charset="-122"/>
-                <a:cs typeface="Calibri" pitchFamily="34" charset="-120"/>
-              </a:rPr>
-              <a:t>Set the threshold by eye, with the mask shown before you commit</a:t>
-            </a:r>
-            <a:endParaRPr lang="en-US" sz="1800" dirty="0"/>
-          </a:p>
-          <a:p>
-            <a:pPr marL="342900" indent="-342900">
-              <a:spcAft>
-                <a:spcPts val="1100"/>
-              </a:spcAft>
-              <a:buSzPct val="100000"/>
-              <a:buChar char="•"/>
-            </a:pPr>
-            <a:r>
-              <a:rPr lang="en-US" sz="1800" dirty="0">
-                <a:solidFill>
-                  <a:srgbClr val="1F2933"/>
-                </a:solidFill>
-                <a:latin typeface="Calibri" pitchFamily="34" charset="0"/>
-                <a:ea typeface="Calibri" pitchFamily="34" charset="-122"/>
-                <a:cs typeface="Calibri" pitchFamily="34" charset="-120"/>
-              </a:rPr>
-              <a:t>Trace a few real fibres yourself, and it tunes its own parameters to match</a:t>
-            </a:r>
-            <a:endParaRPr lang="en-US" sz="1800" dirty="0"/>
-          </a:p>
-          <a:p>
-            <a:pPr marL="342900" indent="-342900">
-              <a:spcAft>
-                <a:spcPts val="1100"/>
-              </a:spcAft>
-              <a:buSzPct val="100000"/>
-              <a:buChar char="•"/>
-            </a:pPr>
-            <a:r>
-              <a:rPr lang="en-US" sz="1800" dirty="0">
-                <a:solidFill>
-                  <a:srgbClr val="1F2933"/>
-                </a:solidFill>
-                <a:latin typeface="Calibri" pitchFamily="34" charset="0"/>
-                <a:ea typeface="Calibri" pitchFamily="34" charset="-122"/>
-                <a:cs typeface="Calibri" pitchFamily="34" charset="-120"/>
-              </a:rPr>
-              <a:t>Fibres classified by orientation relative to a tumour boundary</a:t>
-            </a:r>
-            <a:endParaRPr lang="en-US" sz="1800" dirty="0"/>
-          </a:p>
-        </p:txBody>
-      </p:sp>
-      <p:sp>
-        <p:nvSpPr>
-          <p:cNvPr id="10" name="Text 8"/>
+              <a:rPr lang="en-US" sz="1600" b="1" dirty="0">
+                <a:solidFill>
+                  <a:srgbClr val="1F4C86"/>
+                </a:solidFill>
+                <a:latin typeface="Calibri" pitchFamily="34" charset="0"/>
+                <a:ea typeface="Calibri" pitchFamily="34" charset="-122"/>
+                <a:cs typeface="Calibri" pitchFamily="34" charset="-120"/>
+              </a:rPr>
+              <a:t>The same wavy-to-straight axis recurs in arterial adventitia, sclera, alveolar wall, and cardiac fibrosis.</a:t>
+            </a:r>
+            <a:endParaRPr lang="en-US" sz="1600" dirty="0"/>
+          </a:p>
+        </p:txBody>
+      </p:sp>
+      <p:sp>
+        <p:nvSpPr>
+          <p:cNvPr id="8" name="Text 6"/>
           <p:cNvSpPr/>
           <p:nvPr/>
         </p:nvSpPr>
@@ -18275,7 +18279,7 @@
                 <a:ea typeface="Trebuchet MS" pitchFamily="34" charset="-122"/>
                 <a:cs typeface="Trebuchet MS" pitchFamily="34" charset="-120"/>
               </a:rPr>
-              <a:t>A dense mat and a sparse clump</a:t>
+              <a:t>Two complementary tools</a:t>
             </a:r>
             <a:endParaRPr lang="en-US" sz="3000" dirty="0"/>
           </a:p>
@@ -18303,14 +18307,73 @@
       </p:sp>
       <p:sp>
         <p:nvSpPr>
-          <p:cNvPr id="4" name="Text 2"/>
-          <p:cNvSpPr/>
-          <p:nvPr/>
-        </p:nvSpPr>
-        <p:spPr>
-          <a:xfrm>
-            <a:off x="640080" y="1481328"/>
-            <a:ext cx="10963656" cy="4553712"/>
+          <p:cNvPr id="4" name="Shape 2"/>
+          <p:cNvSpPr/>
+          <p:nvPr/>
+        </p:nvSpPr>
+        <p:spPr>
+          <a:xfrm>
+            <a:off x="566928" y="1554480"/>
+            <a:ext cx="5298948" cy="530352"/>
+          </a:xfrm>
+          <a:prstGeom prst="rect">
+            <a:avLst/>
+          </a:prstGeom>
+          <a:solidFill>
+            <a:srgbClr val="E8F0FA"/>
+          </a:solidFill>
+          <a:ln/>
+        </p:spPr>
+      </p:sp>
+      <p:sp>
+        <p:nvSpPr>
+          <p:cNvPr id="5" name="Text 3"/>
+          <p:cNvSpPr/>
+          <p:nvPr/>
+        </p:nvSpPr>
+        <p:spPr>
+          <a:xfrm>
+            <a:off x="731520" y="1554480"/>
+            <a:ext cx="4969764" cy="530352"/>
+          </a:xfrm>
+          <a:prstGeom prst="rect">
+            <a:avLst/>
+          </a:prstGeom>
+          <a:noFill/>
+          <a:ln/>
+        </p:spPr>
+        <p:txBody>
+          <a:bodyPr wrap="square" rtlCol="0" anchor="ctr"/>
+          <a:lstStyle/>
+          <a:p>
+            <a:pPr indent="0" marL="0">
+              <a:buNone/>
+            </a:pPr>
+            <a:r>
+              <a:rPr lang="en-US" sz="2000" b="1" dirty="0">
+                <a:solidFill>
+                  <a:srgbClr val="1F4C86"/>
+                </a:solidFill>
+                <a:latin typeface="Trebuchet MS" pitchFamily="34" charset="0"/>
+                <a:ea typeface="Trebuchet MS" pitchFamily="34" charset="-122"/>
+                <a:cs typeface="Trebuchet MS" pitchFamily="34" charset="-120"/>
+              </a:rPr>
+              <a:t>Fiber Analysis — measure a zone</a:t>
+            </a:r>
+            <a:endParaRPr lang="en-US" sz="2000" dirty="0"/>
+          </a:p>
+        </p:txBody>
+      </p:sp>
+      <p:sp>
+        <p:nvSpPr>
+          <p:cNvPr id="6" name="Text 4"/>
+          <p:cNvSpPr/>
+          <p:nvPr/>
+        </p:nvSpPr>
+        <p:spPr>
+          <a:xfrm>
+            <a:off x="658368" y="2240280"/>
+            <a:ext cx="5116068" cy="3566160"/>
           </a:xfrm>
           <a:prstGeom prst="rect">
             <a:avLst/>
@@ -18323,17 +18386,14 @@
           <a:lstStyle/>
           <a:p>
             <a:pPr marL="342900" indent="-342900">
-              <a:lnSpc>
-                <a:spcPct val="105000"/>
-              </a:lnSpc>
               <a:spcAft>
-                <a:spcPts val="1200"/>
+                <a:spcPts val="1100"/>
               </a:spcAft>
               <a:buSzPct val="100000"/>
               <a:buChar char="•"/>
             </a:pPr>
             <a:r>
-              <a:rPr lang="en-US" sz="2000" dirty="0">
+              <a:rPr lang="en-US" sz="1800" dirty="0">
                 <a:solidFill>
                   <a:srgbClr val="1F2933"/>
                 </a:solidFill>
@@ -18341,23 +18401,20 @@
                 <a:ea typeface="Calibri" pitchFamily="34" charset="-122"/>
                 <a:cs typeface="Calibri" pitchFamily="34" charset="-120"/>
               </a:rPr>
-              <a:t>Two fields can share the same mean fibre alignment and be completely different tissue</a:t>
-            </a:r>
-            <a:endParaRPr lang="en-US" sz="2000" dirty="0"/>
+              <a:t>A band of chosen width inside, outside, or across an annotation boundary</a:t>
+            </a:r>
+            <a:endParaRPr lang="en-US" sz="1800" dirty="0"/>
           </a:p>
           <a:p>
             <a:pPr marL="342900" indent="-342900">
-              <a:lnSpc>
-                <a:spcPct val="105000"/>
-              </a:lnSpc>
               <a:spcAft>
-                <a:spcPts val="1200"/>
+                <a:spcPts val="1100"/>
               </a:spcAft>
               <a:buSzPct val="100000"/>
               <a:buChar char="•"/>
             </a:pPr>
             <a:r>
-              <a:rPr lang="en-US" sz="2000" dirty="0">
+              <a:rPr lang="en-US" sz="1800" dirty="0">
                 <a:solidFill>
                   <a:srgbClr val="1F2933"/>
                 </a:solidFill>
@@ -18365,23 +18422,20 @@
                 <a:ea typeface="Calibri" pitchFamily="34" charset="-122"/>
                 <a:cs typeface="Calibri" pitchFamily="34" charset="-120"/>
               </a:rPr>
-              <a:t>Texture measures the spatial heterogeneity that alignment averages away</a:t>
-            </a:r>
-            <a:endParaRPr lang="en-US" sz="2000" dirty="0"/>
+              <a:t>Straightness and persistence: wavy versus straightened fibres</a:t>
+            </a:r>
+            <a:endParaRPr lang="en-US" sz="1800" dirty="0"/>
           </a:p>
           <a:p>
             <a:pPr marL="342900" indent="-342900">
-              <a:lnSpc>
-                <a:spcPct val="105000"/>
-              </a:lnSpc>
               <a:spcAft>
-                <a:spcPts val="1200"/>
+                <a:spcPts val="1100"/>
               </a:spcAft>
               <a:buSzPct val="100000"/>
               <a:buChar char="•"/>
             </a:pPr>
             <a:r>
-              <a:rPr lang="en-US" sz="2000" dirty="0">
+              <a:rPr lang="en-US" sz="1800" dirty="0">
                 <a:solidFill>
                   <a:srgbClr val="1F2933"/>
                 </a:solidFill>
@@ -18389,47 +18443,63 @@
                 <a:ea typeface="Calibri" pitchFamily="34" charset="-122"/>
                 <a:cs typeface="Calibri" pitchFamily="34" charset="-120"/>
               </a:rPr>
-              <a:t>Which is why both tools are worth running, on the same region</a:t>
-            </a:r>
-            <a:endParaRPr lang="en-US" sz="2000" dirty="0"/>
-          </a:p>
-        </p:txBody>
-      </p:sp>
-      <p:sp>
-        <p:nvSpPr>
-          <p:cNvPr id="5" name="Shape 3"/>
-          <p:cNvSpPr/>
-          <p:nvPr/>
-        </p:nvSpPr>
-        <p:spPr>
-          <a:xfrm>
-            <a:off x="566928" y="5650992"/>
-            <a:ext cx="11055096" cy="566928"/>
+              <a:t>Morphometrics: coverage, length, branching, fractal dimension, gaps</a:t>
+            </a:r>
+            <a:endParaRPr lang="en-US" sz="1800" dirty="0"/>
+          </a:p>
+          <a:p>
+            <a:pPr marL="342900" indent="-342900">
+              <a:spcAft>
+                <a:spcPts val="1100"/>
+              </a:spcAft>
+              <a:buSzPct val="100000"/>
+              <a:buChar char="•"/>
+            </a:pPr>
+            <a:r>
+              <a:rPr lang="en-US" sz="1800" dirty="0">
+                <a:solidFill>
+                  <a:srgbClr val="1F2933"/>
+                </a:solidFill>
+                <a:latin typeface="Calibri" pitchFamily="34" charset="0"/>
+                <a:ea typeface="Calibri" pitchFamily="34" charset="-122"/>
+                <a:cs typeface="Calibri" pitchFamily="34" charset="-120"/>
+              </a:rPr>
+              <a:t>Texture: the information fibre-tracing misses entirely</a:t>
+            </a:r>
+            <a:endParaRPr lang="en-US" sz="1800" dirty="0"/>
+          </a:p>
+        </p:txBody>
+      </p:sp>
+      <p:sp>
+        <p:nvSpPr>
+          <p:cNvPr id="7" name="Shape 5"/>
+          <p:cNvSpPr/>
+          <p:nvPr/>
+        </p:nvSpPr>
+        <p:spPr>
+          <a:xfrm>
+            <a:off x="6323076" y="1554480"/>
+            <a:ext cx="5298948" cy="530352"/>
           </a:xfrm>
           <a:prstGeom prst="rect">
             <a:avLst/>
           </a:prstGeom>
           <a:solidFill>
-            <a:srgbClr val="F4F8FD"/>
+            <a:srgbClr val="E8F0FA"/>
           </a:solidFill>
-          <a:ln w="9525">
-            <a:solidFill>
-              <a:srgbClr val="3674C1"/>
-            </a:solidFill>
-            <a:prstDash val="solid"/>
-          </a:ln>
-        </p:spPr>
-      </p:sp>
-      <p:sp>
-        <p:nvSpPr>
-          <p:cNvPr id="6" name="Text 4"/>
-          <p:cNvSpPr/>
-          <p:nvPr/>
-        </p:nvSpPr>
-        <p:spPr>
-          <a:xfrm>
-            <a:off x="768096" y="5650992"/>
-            <a:ext cx="10652760" cy="566928"/>
+          <a:ln/>
+        </p:spPr>
+      </p:sp>
+      <p:sp>
+        <p:nvSpPr>
+          <p:cNvPr id="8" name="Text 6"/>
+          <p:cNvSpPr/>
+          <p:nvPr/>
+        </p:nvSpPr>
+        <p:spPr>
+          <a:xfrm>
+            <a:off x="6487668" y="1554480"/>
+            <a:ext cx="4969764" cy="530352"/>
           </a:xfrm>
           <a:prstGeom prst="rect">
             <a:avLst/>
@@ -18445,23 +18515,129 @@
               <a:buNone/>
             </a:pPr>
             <a:r>
-              <a:rPr lang="en-US" sz="1600" b="1" dirty="0">
-                <a:solidFill>
-                  <a:srgbClr val="1F4C86"/>
-                </a:solidFill>
-                <a:latin typeface="Calibri" pitchFamily="34" charset="0"/>
-                <a:ea typeface="Calibri" pitchFamily="34" charset="-122"/>
-                <a:cs typeface="Calibri" pitchFamily="34" charset="-120"/>
-              </a:rPr>
-              <a:t>Demo only today: one needs a long environment build, the other a dedicated analysis server.</a:t>
-            </a:r>
-            <a:endParaRPr lang="en-US" sz="1600" dirty="0"/>
-          </a:p>
-        </p:txBody>
-      </p:sp>
-      <p:sp>
-        <p:nvSpPr>
-          <p:cNvPr id="7" name="Text 5"/>
+              <a:rPr lang="en-US" sz="2000" b="1" dirty="0">
+                <a:solidFill>
+                  <a:srgbClr val="B26A00"/>
+                </a:solidFill>
+                <a:latin typeface="Trebuchet MS" pitchFamily="34" charset="0"/>
+                <a:ea typeface="Trebuchet MS" pitchFamily="34" charset="-122"/>
+                <a:cs typeface="Trebuchet MS" pitchFamily="34" charset="-120"/>
+              </a:rPr>
+              <a:t>TME-Quant — trace the fibres</a:t>
+            </a:r>
+            <a:endParaRPr lang="en-US" sz="2000" dirty="0"/>
+          </a:p>
+        </p:txBody>
+      </p:sp>
+      <p:sp>
+        <p:nvSpPr>
+          <p:cNvPr id="9" name="Text 7"/>
+          <p:cNvSpPr/>
+          <p:nvPr/>
+        </p:nvSpPr>
+        <p:spPr>
+          <a:xfrm>
+            <a:off x="6414516" y="2240280"/>
+            <a:ext cx="5116068" cy="3566160"/>
+          </a:xfrm>
+          <a:prstGeom prst="rect">
+            <a:avLst/>
+          </a:prstGeom>
+          <a:noFill/>
+          <a:ln/>
+        </p:spPr>
+        <p:txBody>
+          <a:bodyPr wrap="square" rtlCol="0" anchor="t"/>
+          <a:lstStyle/>
+          <a:p>
+            <a:pPr marL="342900" indent="-342900">
+              <a:spcAft>
+                <a:spcPts val="1100"/>
+              </a:spcAft>
+              <a:buSzPct val="100000"/>
+              <a:buChar char="•"/>
+            </a:pPr>
+            <a:r>
+              <a:rPr lang="en-US" sz="1800" dirty="0">
+                <a:solidFill>
+                  <a:srgbClr val="1F2933"/>
+                </a:solidFill>
+                <a:latin typeface="Calibri" pitchFamily="34" charset="0"/>
+                <a:ea typeface="Calibri" pitchFamily="34" charset="-122"/>
+                <a:cs typeface="Calibri" pitchFamily="34" charset="-120"/>
+              </a:rPr>
+              <a:t>Individual fibres extracted and committed back as objects</a:t>
+            </a:r>
+            <a:endParaRPr lang="en-US" sz="1800" dirty="0"/>
+          </a:p>
+          <a:p>
+            <a:pPr marL="342900" indent="-342900">
+              <a:spcAft>
+                <a:spcPts val="1100"/>
+              </a:spcAft>
+              <a:buSzPct val="100000"/>
+              <a:buChar char="•"/>
+            </a:pPr>
+            <a:r>
+              <a:rPr lang="en-US" sz="1800" dirty="0">
+                <a:solidFill>
+                  <a:srgbClr val="1F2933"/>
+                </a:solidFill>
+                <a:latin typeface="Calibri" pitchFamily="34" charset="0"/>
+                <a:ea typeface="Calibri" pitchFamily="34" charset="-122"/>
+                <a:cs typeface="Calibri" pitchFamily="34" charset="-120"/>
+              </a:rPr>
+              <a:t>Set the threshold by eye, with the mask shown before you commit</a:t>
+            </a:r>
+            <a:endParaRPr lang="en-US" sz="1800" dirty="0"/>
+          </a:p>
+          <a:p>
+            <a:pPr marL="342900" indent="-342900">
+              <a:spcAft>
+                <a:spcPts val="1100"/>
+              </a:spcAft>
+              <a:buSzPct val="100000"/>
+              <a:buChar char="•"/>
+            </a:pPr>
+            <a:r>
+              <a:rPr lang="en-US" sz="1800" dirty="0">
+                <a:solidFill>
+                  <a:srgbClr val="1F2933"/>
+                </a:solidFill>
+                <a:latin typeface="Calibri" pitchFamily="34" charset="0"/>
+                <a:ea typeface="Calibri" pitchFamily="34" charset="-122"/>
+                <a:cs typeface="Calibri" pitchFamily="34" charset="-120"/>
+              </a:rPr>
+              <a:t>Trace a few real fibres yourself, and it tunes its own parameters to match</a:t>
+            </a:r>
+            <a:endParaRPr lang="en-US" sz="1800" dirty="0"/>
+          </a:p>
+          <a:p>
+            <a:pPr marL="342900" indent="-342900">
+              <a:spcAft>
+                <a:spcPts val="1100"/>
+              </a:spcAft>
+              <a:buSzPct val="100000"/>
+              <a:buChar char="•"/>
+            </a:pPr>
+            <a:r>
+              <a:rPr lang="en-US" sz="1800" dirty="0">
+                <a:solidFill>
+                  <a:srgbClr val="1F2933"/>
+                </a:solidFill>
+                <a:latin typeface="Calibri" pitchFamily="34" charset="0"/>
+                <a:ea typeface="Calibri" pitchFamily="34" charset="-122"/>
+                <a:cs typeface="Calibri" pitchFamily="34" charset="-120"/>
+              </a:rPr>
+              <a:t>Fibres classified by orientation relative to a tumour boundary</a:t>
+            </a:r>
+            <a:endParaRPr lang="en-US" sz="1800" dirty="0"/>
+          </a:p>
+        </p:txBody>
+      </p:sp>
+      <p:sp>
+        <p:nvSpPr>
+          <p:cNvPr id="10" name="Text 8"/>
           <p:cNvSpPr/>
           <p:nvPr/>
         </p:nvSpPr>
@@ -18563,7 +18739,7 @@
                 <a:ea typeface="Trebuchet MS" pitchFamily="34" charset="-122"/>
                 <a:cs typeface="Trebuchet MS" pitchFamily="34" charset="-120"/>
               </a:rPr>
-              <a:t>Please cite the methods</a:t>
+              <a:t>A dense mat and a sparse clump</a:t>
             </a:r>
             <a:endParaRPr lang="en-US" sz="3000" dirty="0"/>
           </a:p>
@@ -18629,7 +18805,7 @@
                 <a:ea typeface="Calibri" pitchFamily="34" charset="-122"/>
                 <a:cs typeface="Calibri" pitchFamily="34" charset="-120"/>
               </a:rPr>
-              <a:t>Both tools are thin wrappers over other people’s science</a:t>
+              <a:t>Two fields can share the same mean fibre alignment and be completely different tissue</a:t>
             </a:r>
             <a:endParaRPr lang="en-US" sz="2000" dirty="0"/>
           </a:p>
@@ -18653,7 +18829,7 @@
                 <a:ea typeface="Calibri" pitchFamily="34" charset="-122"/>
                 <a:cs typeface="Calibri" pitchFamily="34" charset="-120"/>
               </a:rPr>
-              <a:t>CT-FIRE — Bredfeldt et al. 2014, Journal of Biomedical Optics 19(1):016007</a:t>
+              <a:t>Texture measures the spatial heterogeneity that alignment averages away</a:t>
             </a:r>
             <a:endParaRPr lang="en-US" sz="2000" dirty="0"/>
           </a:p>
@@ -18677,63 +18853,79 @@
                 <a:ea typeface="Calibri" pitchFamily="34" charset="-122"/>
                 <a:cs typeface="Calibri" pitchFamily="34" charset="-120"/>
               </a:rPr>
-              <a:t>CurveAlign — LOCI, University of Wisconsin–Madison</a:t>
+              <a:t>Which is why both tools are worth running, on the same region</a:t>
             </a:r>
             <a:endParaRPr lang="en-US" sz="2000" dirty="0"/>
           </a:p>
-          <a:p>
-            <a:pPr marL="342900" indent="-342900">
-              <a:lnSpc>
-                <a:spcPct val="105000"/>
-              </a:lnSpc>
-              <a:spcAft>
-                <a:spcPts val="1200"/>
-              </a:spcAft>
-              <a:buSzPct val="100000"/>
-              <a:buChar char="•"/>
-            </a:pPr>
-            <a:r>
-              <a:rPr lang="en-US" sz="2000" dirty="0">
-                <a:solidFill>
-                  <a:srgbClr val="1F2933"/>
-                </a:solidFill>
-                <a:latin typeface="Calibri" pitchFamily="34" charset="0"/>
-                <a:ea typeface="Calibri" pitchFamily="34" charset="-122"/>
-                <a:cs typeface="Calibri" pitchFamily="34" charset="-120"/>
-              </a:rPr>
-              <a:t>TACS — Provenzano et al. 2006, BMC Medicine 4:38; Conklin et al. 2011</a:t>
-            </a:r>
-            <a:endParaRPr lang="en-US" sz="2000" dirty="0"/>
-          </a:p>
-          <a:p>
-            <a:pPr marL="342900" indent="-342900">
-              <a:lnSpc>
-                <a:spcPct val="105000"/>
-              </a:lnSpc>
-              <a:spcAft>
-                <a:spcPts val="1200"/>
-              </a:spcAft>
-              <a:buSzPct val="100000"/>
-              <a:buChar char="•"/>
-            </a:pPr>
-            <a:r>
-              <a:rPr lang="en-US" sz="2000" dirty="0">
-                <a:solidFill>
-                  <a:srgbClr val="1F2933"/>
-                </a:solidFill>
-                <a:latin typeface="Calibri" pitchFamily="34" charset="0"/>
-                <a:ea typeface="Calibri" pitchFamily="34" charset="-122"/>
-                <a:cs typeface="Calibri" pitchFamily="34" charset="-120"/>
-              </a:rPr>
-              <a:t>TWOMBLI — Wershof et al. 2021, Life Science Alliance 4(3)</a:t>
-            </a:r>
-            <a:endParaRPr lang="en-US" sz="2000" dirty="0"/>
-          </a:p>
-        </p:txBody>
-      </p:sp>
-      <p:sp>
-        <p:nvSpPr>
-          <p:cNvPr id="5" name="Text 3"/>
+        </p:txBody>
+      </p:sp>
+      <p:sp>
+        <p:nvSpPr>
+          <p:cNvPr id="5" name="Shape 3"/>
+          <p:cNvSpPr/>
+          <p:nvPr/>
+        </p:nvSpPr>
+        <p:spPr>
+          <a:xfrm>
+            <a:off x="566928" y="5650992"/>
+            <a:ext cx="11055096" cy="566928"/>
+          </a:xfrm>
+          <a:prstGeom prst="rect">
+            <a:avLst/>
+          </a:prstGeom>
+          <a:solidFill>
+            <a:srgbClr val="F4F8FD"/>
+          </a:solidFill>
+          <a:ln w="9525">
+            <a:solidFill>
+              <a:srgbClr val="3674C1"/>
+            </a:solidFill>
+            <a:prstDash val="solid"/>
+          </a:ln>
+        </p:spPr>
+      </p:sp>
+      <p:sp>
+        <p:nvSpPr>
+          <p:cNvPr id="6" name="Text 4"/>
+          <p:cNvSpPr/>
+          <p:nvPr/>
+        </p:nvSpPr>
+        <p:spPr>
+          <a:xfrm>
+            <a:off x="768096" y="5650992"/>
+            <a:ext cx="10652760" cy="566928"/>
+          </a:xfrm>
+          <a:prstGeom prst="rect">
+            <a:avLst/>
+          </a:prstGeom>
+          <a:noFill/>
+          <a:ln/>
+        </p:spPr>
+        <p:txBody>
+          <a:bodyPr wrap="square" rtlCol="0" anchor="ctr"/>
+          <a:lstStyle/>
+          <a:p>
+            <a:pPr indent="0" marL="0">
+              <a:buNone/>
+            </a:pPr>
+            <a:r>
+              <a:rPr lang="en-US" sz="1600" b="1" dirty="0">
+                <a:solidFill>
+                  <a:srgbClr val="1F4C86"/>
+                </a:solidFill>
+                <a:latin typeface="Calibri" pitchFamily="34" charset="0"/>
+                <a:ea typeface="Calibri" pitchFamily="34" charset="-122"/>
+                <a:cs typeface="Calibri" pitchFamily="34" charset="-120"/>
+              </a:rPr>
+              <a:t>Demo only today: one needs a long environment build, the other a dedicated analysis server.</a:t>
+            </a:r>
+            <a:endParaRPr lang="en-US" sz="1600" dirty="0"/>
+          </a:p>
+        </p:txBody>
+      </p:sp>
+      <p:sp>
+        <p:nvSpPr>
+          <p:cNvPr id="7" name="Text 5"/>
           <p:cNvSpPr/>
           <p:nvPr/>
         </p:nvSpPr>
@@ -18804,23 +18996,42 @@
       </p:grpSpPr>
       <p:sp>
         <p:nvSpPr>
-          <p:cNvPr id="2" name="Shape 0"/>
-          <p:cNvSpPr/>
-          <p:nvPr/>
-        </p:nvSpPr>
-        <p:spPr>
-          <a:xfrm>
-            <a:off x="0" y="1417320"/>
-            <a:ext cx="12188952" cy="3108960"/>
-          </a:xfrm>
-          <a:prstGeom prst="rect">
-            <a:avLst/>
-          </a:prstGeom>
-          <a:solidFill>
-            <a:srgbClr val="E8F0FA"/>
-          </a:solidFill>
-          <a:ln/>
-        </p:spPr>
+          <p:cNvPr id="2" name="Text 0"/>
+          <p:cNvSpPr/>
+          <p:nvPr/>
+        </p:nvSpPr>
+        <p:spPr>
+          <a:xfrm>
+            <a:off x="566928" y="384048"/>
+            <a:ext cx="11055096" cy="658368"/>
+          </a:xfrm>
+          <a:prstGeom prst="rect">
+            <a:avLst/>
+          </a:prstGeom>
+          <a:noFill/>
+          <a:ln/>
+        </p:spPr>
+        <p:txBody>
+          <a:bodyPr wrap="square" rtlCol="0" anchor="ctr"/>
+          <a:lstStyle/>
+          <a:p>
+            <a:pPr indent="0" marL="0">
+              <a:buNone/>
+            </a:pPr>
+            <a:r>
+              <a:rPr lang="en-US" sz="3000" b="1" dirty="0">
+                <a:solidFill>
+                  <a:srgbClr val="1F4C86"/>
+                </a:solidFill>
+                <a:latin typeface="Trebuchet MS" pitchFamily="34" charset="0"/>
+                <a:ea typeface="Trebuchet MS" pitchFamily="34" charset="-122"/>
+                <a:cs typeface="Trebuchet MS" pitchFamily="34" charset="-120"/>
+              </a:rPr>
+              <a:t>Please cite the methods</a:t>
+            </a:r>
+            <a:endParaRPr lang="en-US" sz="3000" dirty="0"/>
+          </a:p>
+        </p:txBody>
       </p:sp>
       <p:sp>
         <p:nvSpPr>
@@ -18830,8 +19041,8 @@
         </p:nvSpPr>
         <p:spPr>
           <a:xfrm>
-            <a:off x="0" y="1417320"/>
-            <a:ext cx="201168" cy="3108960"/>
+            <a:off x="566928" y="1097280"/>
+            <a:ext cx="1920240" cy="50292"/>
           </a:xfrm>
           <a:prstGeom prst="rect">
             <a:avLst/>
@@ -18850,157 +19061,143 @@
         </p:nvSpPr>
         <p:spPr>
           <a:xfrm>
-            <a:off x="566928" y="1691640"/>
-            <a:ext cx="1828800" cy="914400"/>
-          </a:xfrm>
-          <a:prstGeom prst="rect">
-            <a:avLst/>
-          </a:prstGeom>
-          <a:noFill/>
-          <a:ln/>
-        </p:spPr>
-        <p:txBody>
-          <a:bodyPr wrap="square" rtlCol="0" anchor="ctr"/>
-          <a:lstStyle/>
-          <a:p>
-            <a:pPr indent="0" marL="0">
-              <a:buNone/>
-            </a:pPr>
-            <a:r>
-              <a:rPr lang="en-US" sz="5400" b="1" dirty="0">
-                <a:solidFill>
-                  <a:srgbClr val="3674C1"/>
-                </a:solidFill>
-                <a:latin typeface="Trebuchet MS" pitchFamily="34" charset="0"/>
-                <a:ea typeface="Trebuchet MS" pitchFamily="34" charset="-122"/>
-                <a:cs typeface="Trebuchet MS" pitchFamily="34" charset="-120"/>
-              </a:rPr>
-              <a:t>08</a:t>
-            </a:r>
-            <a:endParaRPr lang="en-US" sz="5400" dirty="0"/>
+            <a:off x="640080" y="1481328"/>
+            <a:ext cx="10963656" cy="4553712"/>
+          </a:xfrm>
+          <a:prstGeom prst="rect">
+            <a:avLst/>
+          </a:prstGeom>
+          <a:noFill/>
+          <a:ln/>
+        </p:spPr>
+        <p:txBody>
+          <a:bodyPr wrap="square" rtlCol="0" anchor="t"/>
+          <a:lstStyle/>
+          <a:p>
+            <a:pPr marL="342900" indent="-342900">
+              <a:lnSpc>
+                <a:spcPct val="105000"/>
+              </a:lnSpc>
+              <a:spcAft>
+                <a:spcPts val="1200"/>
+              </a:spcAft>
+              <a:buSzPct val="100000"/>
+              <a:buChar char="•"/>
+            </a:pPr>
+            <a:r>
+              <a:rPr lang="en-US" sz="2000" dirty="0">
+                <a:solidFill>
+                  <a:srgbClr val="1F2933"/>
+                </a:solidFill>
+                <a:latin typeface="Calibri" pitchFamily="34" charset="0"/>
+                <a:ea typeface="Calibri" pitchFamily="34" charset="-122"/>
+                <a:cs typeface="Calibri" pitchFamily="34" charset="-120"/>
+              </a:rPr>
+              <a:t>Both tools are thin wrappers over other people’s science</a:t>
+            </a:r>
+            <a:endParaRPr lang="en-US" sz="2000" dirty="0"/>
+          </a:p>
+          <a:p>
+            <a:pPr marL="342900" indent="-342900">
+              <a:lnSpc>
+                <a:spcPct val="105000"/>
+              </a:lnSpc>
+              <a:spcAft>
+                <a:spcPts val="1200"/>
+              </a:spcAft>
+              <a:buSzPct val="100000"/>
+              <a:buChar char="•"/>
+            </a:pPr>
+            <a:r>
+              <a:rPr lang="en-US" sz="2000" dirty="0">
+                <a:solidFill>
+                  <a:srgbClr val="1F2933"/>
+                </a:solidFill>
+                <a:latin typeface="Calibri" pitchFamily="34" charset="0"/>
+                <a:ea typeface="Calibri" pitchFamily="34" charset="-122"/>
+                <a:cs typeface="Calibri" pitchFamily="34" charset="-120"/>
+              </a:rPr>
+              <a:t>CT-FIRE — Bredfeldt et al. 2014, Journal of Biomedical Optics 19(1):016007</a:t>
+            </a:r>
+            <a:endParaRPr lang="en-US" sz="2000" dirty="0"/>
+          </a:p>
+          <a:p>
+            <a:pPr marL="342900" indent="-342900">
+              <a:lnSpc>
+                <a:spcPct val="105000"/>
+              </a:lnSpc>
+              <a:spcAft>
+                <a:spcPts val="1200"/>
+              </a:spcAft>
+              <a:buSzPct val="100000"/>
+              <a:buChar char="•"/>
+            </a:pPr>
+            <a:r>
+              <a:rPr lang="en-US" sz="2000" dirty="0">
+                <a:solidFill>
+                  <a:srgbClr val="1F2933"/>
+                </a:solidFill>
+                <a:latin typeface="Calibri" pitchFamily="34" charset="0"/>
+                <a:ea typeface="Calibri" pitchFamily="34" charset="-122"/>
+                <a:cs typeface="Calibri" pitchFamily="34" charset="-120"/>
+              </a:rPr>
+              <a:t>CurveAlign — LOCI, University of Wisconsin–Madison</a:t>
+            </a:r>
+            <a:endParaRPr lang="en-US" sz="2000" dirty="0"/>
+          </a:p>
+          <a:p>
+            <a:pPr marL="342900" indent="-342900">
+              <a:lnSpc>
+                <a:spcPct val="105000"/>
+              </a:lnSpc>
+              <a:spcAft>
+                <a:spcPts val="1200"/>
+              </a:spcAft>
+              <a:buSzPct val="100000"/>
+              <a:buChar char="•"/>
+            </a:pPr>
+            <a:r>
+              <a:rPr lang="en-US" sz="2000" dirty="0">
+                <a:solidFill>
+                  <a:srgbClr val="1F2933"/>
+                </a:solidFill>
+                <a:latin typeface="Calibri" pitchFamily="34" charset="0"/>
+                <a:ea typeface="Calibri" pitchFamily="34" charset="-122"/>
+                <a:cs typeface="Calibri" pitchFamily="34" charset="-120"/>
+              </a:rPr>
+              <a:t>TACS — Provenzano et al. 2006, BMC Medicine 4:38; Conklin et al. 2011</a:t>
+            </a:r>
+            <a:endParaRPr lang="en-US" sz="2000" dirty="0"/>
+          </a:p>
+          <a:p>
+            <a:pPr marL="342900" indent="-342900">
+              <a:lnSpc>
+                <a:spcPct val="105000"/>
+              </a:lnSpc>
+              <a:spcAft>
+                <a:spcPts val="1200"/>
+              </a:spcAft>
+              <a:buSzPct val="100000"/>
+              <a:buChar char="•"/>
+            </a:pPr>
+            <a:r>
+              <a:rPr lang="en-US" sz="2000" dirty="0">
+                <a:solidFill>
+                  <a:srgbClr val="1F2933"/>
+                </a:solidFill>
+                <a:latin typeface="Calibri" pitchFamily="34" charset="0"/>
+                <a:ea typeface="Calibri" pitchFamily="34" charset="-122"/>
+                <a:cs typeface="Calibri" pitchFamily="34" charset="-120"/>
+              </a:rPr>
+              <a:t>TWOMBLI — Wershof et al. 2021, Life Science Alliance 4(3)</a:t>
+            </a:r>
+            <a:endParaRPr lang="en-US" sz="2000" dirty="0"/>
           </a:p>
         </p:txBody>
       </p:sp>
       <p:sp>
         <p:nvSpPr>
           <p:cNvPr id="5" name="Text 3"/>
-          <p:cNvSpPr/>
-          <p:nvPr/>
-        </p:nvSpPr>
-        <p:spPr>
-          <a:xfrm>
-            <a:off x="566928" y="2606040"/>
-            <a:ext cx="11055096" cy="868680"/>
-          </a:xfrm>
-          <a:prstGeom prst="rect">
-            <a:avLst/>
-          </a:prstGeom>
-          <a:noFill/>
-          <a:ln/>
-        </p:spPr>
-        <p:txBody>
-          <a:bodyPr wrap="square" rtlCol="0" anchor="ctr"/>
-          <a:lstStyle/>
-          <a:p>
-            <a:pPr indent="0" marL="0">
-              <a:buNone/>
-            </a:pPr>
-            <a:r>
-              <a:rPr lang="en-US" sz="4000" b="1" dirty="0">
-                <a:solidFill>
-                  <a:srgbClr val="1F4C86"/>
-                </a:solidFill>
-                <a:latin typeface="Trebuchet MS" pitchFamily="34" charset="0"/>
-                <a:ea typeface="Trebuchet MS" pitchFamily="34" charset="-122"/>
-                <a:cs typeface="Trebuchet MS" pitchFamily="34" charset="-120"/>
-              </a:rPr>
-              <a:t>Microscope control</a:t>
-            </a:r>
-            <a:endParaRPr lang="en-US" sz="4000" dirty="0"/>
-          </a:p>
-        </p:txBody>
-      </p:sp>
-      <p:sp>
-        <p:nvSpPr>
-          <p:cNvPr id="6" name="Text 4"/>
-          <p:cNvSpPr/>
-          <p:nvPr/>
-        </p:nvSpPr>
-        <p:spPr>
-          <a:xfrm>
-            <a:off x="566928" y="3456432"/>
-            <a:ext cx="10140696" cy="731520"/>
-          </a:xfrm>
-          <a:prstGeom prst="rect">
-            <a:avLst/>
-          </a:prstGeom>
-          <a:noFill/>
-          <a:ln/>
-        </p:spPr>
-        <p:txBody>
-          <a:bodyPr wrap="square" rtlCol="0" anchor="t"/>
-          <a:lstStyle/>
-          <a:p>
-            <a:pPr indent="0" marL="0">
-              <a:buNone/>
-            </a:pPr>
-            <a:r>
-              <a:rPr lang="en-US" sz="1900" dirty="0">
-                <a:solidFill>
-                  <a:srgbClr val="5A6675"/>
-                </a:solidFill>
-                <a:latin typeface="Calibri" pitchFamily="34" charset="0"/>
-                <a:ea typeface="Calibri" pitchFamily="34" charset="-122"/>
-                <a:cs typeface="Calibri" pitchFamily="34" charset="-120"/>
-              </a:rPr>
-              <a:t>The most complex thing here, and the reason for the rest</a:t>
-            </a:r>
-            <a:endParaRPr lang="en-US" sz="1900" dirty="0"/>
-          </a:p>
-        </p:txBody>
-      </p:sp>
-      <p:sp>
-        <p:nvSpPr>
-          <p:cNvPr id="7" name="Text 5"/>
-          <p:cNvSpPr/>
-          <p:nvPr/>
-        </p:nvSpPr>
-        <p:spPr>
-          <a:xfrm>
-            <a:off x="566928" y="6199632"/>
-            <a:ext cx="8229600" cy="365760"/>
-          </a:xfrm>
-          <a:prstGeom prst="rect">
-            <a:avLst/>
-          </a:prstGeom>
-          <a:noFill/>
-          <a:ln/>
-        </p:spPr>
-        <p:txBody>
-          <a:bodyPr wrap="square" rtlCol="0" anchor="ctr"/>
-          <a:lstStyle/>
-          <a:p>
-            <a:pPr indent="0" marL="0">
-              <a:buNone/>
-            </a:pPr>
-            <a:r>
-              <a:rPr lang="en-US" sz="1400" dirty="0">
-                <a:solidFill>
-                  <a:srgbClr val="A8B2BF"/>
-                </a:solidFill>
-                <a:latin typeface="Calibri" pitchFamily="34" charset="0"/>
-                <a:ea typeface="Calibri" pitchFamily="34" charset="-122"/>
-                <a:cs typeface="Calibri" pitchFamily="34" charset="-120"/>
-              </a:rPr>
-              <a:t>michaelsnelson.github.io/BINA-I2K-2026-QuPath-Extensions</a:t>
-            </a:r>
-            <a:endParaRPr lang="en-US" sz="1400" dirty="0"/>
-          </a:p>
-        </p:txBody>
-      </p:sp>
-      <p:sp>
-        <p:nvSpPr>
-          <p:cNvPr id="8" name="Text 6"/>
           <p:cNvSpPr/>
           <p:nvPr/>
         </p:nvSpPr>
@@ -19071,14 +19268,54 @@
       </p:grpSpPr>
       <p:sp>
         <p:nvSpPr>
-          <p:cNvPr id="2" name="Text 0"/>
-          <p:cNvSpPr/>
-          <p:nvPr/>
-        </p:nvSpPr>
-        <p:spPr>
-          <a:xfrm>
-            <a:off x="566928" y="384048"/>
-            <a:ext cx="11055096" cy="658368"/>
+          <p:cNvPr id="2" name="Shape 0"/>
+          <p:cNvSpPr/>
+          <p:nvPr/>
+        </p:nvSpPr>
+        <p:spPr>
+          <a:xfrm>
+            <a:off x="0" y="1417320"/>
+            <a:ext cx="12188952" cy="3108960"/>
+          </a:xfrm>
+          <a:prstGeom prst="rect">
+            <a:avLst/>
+          </a:prstGeom>
+          <a:solidFill>
+            <a:srgbClr val="E8F0FA"/>
+          </a:solidFill>
+          <a:ln/>
+        </p:spPr>
+      </p:sp>
+      <p:sp>
+        <p:nvSpPr>
+          <p:cNvPr id="3" name="Shape 1"/>
+          <p:cNvSpPr/>
+          <p:nvPr/>
+        </p:nvSpPr>
+        <p:spPr>
+          <a:xfrm>
+            <a:off x="0" y="1417320"/>
+            <a:ext cx="201168" cy="3108960"/>
+          </a:xfrm>
+          <a:prstGeom prst="rect">
+            <a:avLst/>
+          </a:prstGeom>
+          <a:solidFill>
+            <a:srgbClr val="3674C1"/>
+          </a:solidFill>
+          <a:ln/>
+        </p:spPr>
+      </p:sp>
+      <p:sp>
+        <p:nvSpPr>
+          <p:cNvPr id="4" name="Text 2"/>
+          <p:cNvSpPr/>
+          <p:nvPr/>
+        </p:nvSpPr>
+        <p:spPr>
+          <a:xfrm>
+            <a:off x="566928" y="1691640"/>
+            <a:ext cx="1828800" cy="914400"/>
           </a:xfrm>
           <a:prstGeom prst="rect">
             <a:avLst/>
@@ -19094,50 +19331,69 @@
               <a:buNone/>
             </a:pPr>
             <a:r>
-              <a:rPr lang="en-US" sz="3000" b="1" dirty="0">
-                <a:solidFill>
-                  <a:srgbClr val="1F4C86"/>
+              <a:rPr lang="en-US" sz="5400" b="1" dirty="0">
+                <a:solidFill>
+                  <a:srgbClr val="3674C1"/>
                 </a:solidFill>
                 <a:latin typeface="Trebuchet MS" pitchFamily="34" charset="0"/>
                 <a:ea typeface="Trebuchet MS" pitchFamily="34" charset="-122"/>
                 <a:cs typeface="Trebuchet MS" pitchFamily="34" charset="-120"/>
               </a:rPr>
-              <a:t>QPSC — QuPath Scope Control</a:t>
-            </a:r>
-            <a:endParaRPr lang="en-US" sz="3000" dirty="0"/>
-          </a:p>
-        </p:txBody>
-      </p:sp>
-      <p:sp>
-        <p:nvSpPr>
-          <p:cNvPr id="3" name="Shape 1"/>
-          <p:cNvSpPr/>
-          <p:nvPr/>
-        </p:nvSpPr>
-        <p:spPr>
-          <a:xfrm>
-            <a:off x="566928" y="1097280"/>
-            <a:ext cx="1920240" cy="50292"/>
-          </a:xfrm>
-          <a:prstGeom prst="rect">
-            <a:avLst/>
-          </a:prstGeom>
-          <a:solidFill>
-            <a:srgbClr val="3674C1"/>
-          </a:solidFill>
-          <a:ln/>
-        </p:spPr>
-      </p:sp>
-      <p:sp>
-        <p:nvSpPr>
-          <p:cNvPr id="4" name="Text 2"/>
-          <p:cNvSpPr/>
-          <p:nvPr/>
-        </p:nvSpPr>
-        <p:spPr>
-          <a:xfrm>
-            <a:off x="640080" y="1481328"/>
-            <a:ext cx="10963656" cy="4553712"/>
+              <a:t>08</a:t>
+            </a:r>
+            <a:endParaRPr lang="en-US" sz="5400" dirty="0"/>
+          </a:p>
+        </p:txBody>
+      </p:sp>
+      <p:sp>
+        <p:nvSpPr>
+          <p:cNvPr id="5" name="Text 3"/>
+          <p:cNvSpPr/>
+          <p:nvPr/>
+        </p:nvSpPr>
+        <p:spPr>
+          <a:xfrm>
+            <a:off x="566928" y="2606040"/>
+            <a:ext cx="11055096" cy="868680"/>
+          </a:xfrm>
+          <a:prstGeom prst="rect">
+            <a:avLst/>
+          </a:prstGeom>
+          <a:noFill/>
+          <a:ln/>
+        </p:spPr>
+        <p:txBody>
+          <a:bodyPr wrap="square" rtlCol="0" anchor="ctr"/>
+          <a:lstStyle/>
+          <a:p>
+            <a:pPr indent="0" marL="0">
+              <a:buNone/>
+            </a:pPr>
+            <a:r>
+              <a:rPr lang="en-US" sz="4000" b="1" dirty="0">
+                <a:solidFill>
+                  <a:srgbClr val="1F4C86"/>
+                </a:solidFill>
+                <a:latin typeface="Trebuchet MS" pitchFamily="34" charset="0"/>
+                <a:ea typeface="Trebuchet MS" pitchFamily="34" charset="-122"/>
+                <a:cs typeface="Trebuchet MS" pitchFamily="34" charset="-120"/>
+              </a:rPr>
+              <a:t>Microscope control</a:t>
+            </a:r>
+            <a:endParaRPr lang="en-US" sz="4000" dirty="0"/>
+          </a:p>
+        </p:txBody>
+      </p:sp>
+      <p:sp>
+        <p:nvSpPr>
+          <p:cNvPr id="6" name="Text 4"/>
+          <p:cNvSpPr/>
+          <p:nvPr/>
+        </p:nvSpPr>
+        <p:spPr>
+          <a:xfrm>
+            <a:off x="566928" y="3456432"/>
+            <a:ext cx="10140696" cy="731520"/>
           </a:xfrm>
           <a:prstGeom prst="rect">
             <a:avLst/>
@@ -19149,106 +19405,66 @@
           <a:bodyPr wrap="square" rtlCol="0" anchor="t"/>
           <a:lstStyle/>
           <a:p>
-            <a:pPr marL="342900" indent="-342900">
-              <a:lnSpc>
-                <a:spcPct val="105000"/>
-              </a:lnSpc>
-              <a:spcAft>
-                <a:spcPts val="1200"/>
-              </a:spcAft>
-              <a:buSzPct val="100000"/>
-              <a:buChar char="•"/>
-            </a:pPr>
-            <a:r>
-              <a:rPr lang="en-US" sz="2000" dirty="0">
-                <a:solidFill>
-                  <a:srgbClr val="1F2933"/>
-                </a:solidFill>
-                <a:latin typeface="Calibri" pitchFamily="34" charset="0"/>
-                <a:ea typeface="Calibri" pitchFamily="34" charset="-122"/>
-                <a:cs typeface="Calibri" pitchFamily="34" charset="-120"/>
-              </a:rPr>
-              <a:t>Draw a box around a region in QuPath. The stage moves, the tiles are captured and stitched, and the image appears back in your project</a:t>
-            </a:r>
-            <a:endParaRPr lang="en-US" sz="2000" dirty="0"/>
-          </a:p>
-          <a:p>
-            <a:pPr marL="342900" indent="-342900">
-              <a:lnSpc>
-                <a:spcPct val="105000"/>
-              </a:lnSpc>
-              <a:spcAft>
-                <a:spcPts val="1200"/>
-              </a:spcAft>
-              <a:buSzPct val="100000"/>
-              <a:buChar char="•"/>
-            </a:pPr>
-            <a:r>
-              <a:rPr lang="en-US" sz="2000" dirty="0">
-                <a:solidFill>
-                  <a:srgbClr val="1F2933"/>
-                </a:solidFill>
-                <a:latin typeface="Calibri" pitchFamily="34" charset="0"/>
-                <a:ea typeface="Calibri" pitchFamily="34" charset="-122"/>
-                <a:cs typeface="Calibri" pitchFamily="34" charset="-120"/>
-              </a:rPr>
-              <a:t>Target specific annotations on a slide you already scanned</a:t>
-            </a:r>
-            <a:endParaRPr lang="en-US" sz="2000" dirty="0"/>
-          </a:p>
-          <a:p>
-            <a:pPr marL="342900" indent="-342900">
-              <a:lnSpc>
-                <a:spcPct val="105000"/>
-              </a:lnSpc>
-              <a:spcAft>
-                <a:spcPts val="1200"/>
-              </a:spcAft>
-              <a:buSzPct val="100000"/>
-              <a:buChar char="•"/>
-            </a:pPr>
-            <a:r>
-              <a:rPr lang="en-US" sz="2000" dirty="0">
-                <a:solidFill>
-                  <a:srgbClr val="1F2933"/>
-                </a:solidFill>
-                <a:latin typeface="Calibri" pitchFamily="34" charset="0"/>
-                <a:ea typeface="Calibri" pitchFamily="34" charset="-122"/>
-                <a:cs typeface="Calibri" pitchFamily="34" charset="-120"/>
-              </a:rPr>
-              <a:t>Live camera view, stage map, saved positions, and a virtual joystick</a:t>
-            </a:r>
-            <a:endParaRPr lang="en-US" sz="2000" dirty="0"/>
-          </a:p>
-          <a:p>
-            <a:pPr marL="342900" indent="-342900">
-              <a:lnSpc>
-                <a:spcPct val="105000"/>
-              </a:lnSpc>
-              <a:spcAft>
-                <a:spcPts val="1200"/>
-              </a:spcAft>
-              <a:buSzPct val="100000"/>
-              <a:buChar char="•"/>
-            </a:pPr>
-            <a:r>
-              <a:rPr lang="en-US" sz="2000" dirty="0">
-                <a:solidFill>
-                  <a:srgbClr val="1F2933"/>
-                </a:solidFill>
-                <a:latin typeface="Calibri" pitchFamily="34" charset="0"/>
-                <a:ea typeface="Calibri" pitchFamily="34" charset="-122"/>
-                <a:cs typeface="Calibri" pitchFamily="34" charset="-120"/>
-              </a:rPr>
-              <a:t>Brightfield, multi-channel fluorescence, and combined passes on a single-camera scope</a:t>
-            </a:r>
-            <a:endParaRPr lang="en-US" sz="2000" dirty="0"/>
-          </a:p>
-        </p:txBody>
-      </p:sp>
-      <p:sp>
-        <p:nvSpPr>
-          <p:cNvPr id="5" name="Text 3"/>
+            <a:pPr indent="0" marL="0">
+              <a:buNone/>
+            </a:pPr>
+            <a:r>
+              <a:rPr lang="en-US" sz="1900" dirty="0">
+                <a:solidFill>
+                  <a:srgbClr val="5A6675"/>
+                </a:solidFill>
+                <a:latin typeface="Calibri" pitchFamily="34" charset="0"/>
+                <a:ea typeface="Calibri" pitchFamily="34" charset="-122"/>
+                <a:cs typeface="Calibri" pitchFamily="34" charset="-120"/>
+              </a:rPr>
+              <a:t>The most complex thing here, and the reason for the rest</a:t>
+            </a:r>
+            <a:endParaRPr lang="en-US" sz="1900" dirty="0"/>
+          </a:p>
+        </p:txBody>
+      </p:sp>
+      <p:sp>
+        <p:nvSpPr>
+          <p:cNvPr id="7" name="Text 5"/>
+          <p:cNvSpPr/>
+          <p:nvPr/>
+        </p:nvSpPr>
+        <p:spPr>
+          <a:xfrm>
+            <a:off x="566928" y="6199632"/>
+            <a:ext cx="8229600" cy="365760"/>
+          </a:xfrm>
+          <a:prstGeom prst="rect">
+            <a:avLst/>
+          </a:prstGeom>
+          <a:noFill/>
+          <a:ln/>
+        </p:spPr>
+        <p:txBody>
+          <a:bodyPr wrap="square" rtlCol="0" anchor="ctr"/>
+          <a:lstStyle/>
+          <a:p>
+            <a:pPr indent="0" marL="0">
+              <a:buNone/>
+            </a:pPr>
+            <a:r>
+              <a:rPr lang="en-US" sz="1400" dirty="0">
+                <a:solidFill>
+                  <a:srgbClr val="A8B2BF"/>
+                </a:solidFill>
+                <a:latin typeface="Calibri" pitchFamily="34" charset="0"/>
+                <a:ea typeface="Calibri" pitchFamily="34" charset="-122"/>
+                <a:cs typeface="Calibri" pitchFamily="34" charset="-120"/>
+              </a:rPr>
+              <a:t>michaelsnelson.github.io/BINA-I2K-2026-QuPath-Extensions</a:t>
+            </a:r>
+            <a:endParaRPr lang="en-US" sz="1400" dirty="0"/>
+          </a:p>
+        </p:txBody>
+      </p:sp>
+      <p:sp>
+        <p:nvSpPr>
+          <p:cNvPr id="8" name="Text 6"/>
           <p:cNvSpPr/>
           <p:nvPr/>
         </p:nvSpPr>
@@ -19350,7 +19566,7 @@
                 <a:ea typeface="Trebuchet MS" pitchFamily="34" charset="-122"/>
                 <a:cs typeface="Trebuchet MS" pitchFamily="34" charset="-120"/>
               </a:rPr>
-              <a:t>Why this changes the rest</a:t>
+              <a:t>QPSC — QuPath Scope Control</a:t>
             </a:r>
             <a:endParaRPr lang="en-US" sz="3000" dirty="0"/>
           </a:p>
@@ -19416,7 +19632,7 @@
                 <a:ea typeface="Calibri" pitchFamily="34" charset="-122"/>
                 <a:cs typeface="Calibri" pitchFamily="34" charset="-120"/>
               </a:rPr>
-              <a:t>The region you analysed is the region you acquire at high resolution</a:t>
+              <a:t>Draw a box around a region in QuPath. The stage moves, the tiles are captured and stitched, and the image appears back in your project</a:t>
             </a:r>
             <a:endParaRPr lang="en-US" sz="2000" dirty="0"/>
           </a:p>
@@ -19440,7 +19656,7 @@
                 <a:ea typeface="Calibri" pitchFamily="34" charset="-122"/>
                 <a:cs typeface="Calibri" pitchFamily="34" charset="-120"/>
               </a:rPr>
-              <a:t>Acquisition metadata arrives in the project, not in a folder that gets separated from the images</a:t>
+              <a:t>Target specific annotations on a slide you already scanned</a:t>
             </a:r>
             <a:endParaRPr lang="en-US" sz="2000" dirty="0"/>
           </a:p>
@@ -19464,79 +19680,39 @@
                 <a:ea typeface="Calibri" pitchFamily="34" charset="-122"/>
                 <a:cs typeface="Calibri" pitchFamily="34" charset="-120"/>
               </a:rPr>
-              <a:t>Stitching is a step in this pipeline — and it works perfectly well on its own, which is why it is in your hands-on hour</a:t>
+              <a:t>Live camera view, stage map, saved positions, and a virtual joystick</a:t>
             </a:r>
             <a:endParaRPr lang="en-US" sz="2000" dirty="0"/>
           </a:p>
-        </p:txBody>
-      </p:sp>
-      <p:sp>
-        <p:nvSpPr>
-          <p:cNvPr id="5" name="Shape 3"/>
-          <p:cNvSpPr/>
-          <p:nvPr/>
-        </p:nvSpPr>
-        <p:spPr>
-          <a:xfrm>
-            <a:off x="566928" y="5650992"/>
-            <a:ext cx="11055096" cy="566928"/>
-          </a:xfrm>
-          <a:prstGeom prst="rect">
-            <a:avLst/>
-          </a:prstGeom>
-          <a:solidFill>
-            <a:srgbClr val="F4F8FD"/>
-          </a:solidFill>
-          <a:ln w="9525">
-            <a:solidFill>
-              <a:srgbClr val="3674C1"/>
-            </a:solidFill>
-            <a:prstDash val="solid"/>
-          </a:ln>
-        </p:spPr>
-      </p:sp>
-      <p:sp>
-        <p:nvSpPr>
-          <p:cNvPr id="6" name="Text 4"/>
-          <p:cNvSpPr/>
-          <p:nvPr/>
-        </p:nvSpPr>
-        <p:spPr>
-          <a:xfrm>
-            <a:off x="768096" y="5650992"/>
-            <a:ext cx="10652760" cy="566928"/>
-          </a:xfrm>
-          <a:prstGeom prst="rect">
-            <a:avLst/>
-          </a:prstGeom>
-          <a:noFill/>
-          <a:ln/>
-        </p:spPr>
-        <p:txBody>
-          <a:bodyPr wrap="square" rtlCol="0" anchor="ctr"/>
-          <a:lstStyle/>
-          <a:p>
-            <a:pPr indent="0" marL="0">
-              <a:buNone/>
-            </a:pPr>
-            <a:r>
-              <a:rPr lang="en-US" sz="1600" b="1" dirty="0">
-                <a:solidFill>
-                  <a:srgbClr val="1F4C86"/>
-                </a:solidFill>
-                <a:latin typeface="Calibri" pitchFamily="34" charset="0"/>
-                <a:ea typeface="Calibri" pitchFamily="34" charset="-122"/>
-                <a:cs typeface="Calibri" pitchFamily="34" charset="-120"/>
-              </a:rPr>
-              <a:t>Once acquisition is driven from QuPath, "acquisition software" and "analysis software" stop being separate places your data lives.</a:t>
-            </a:r>
-            <a:endParaRPr lang="en-US" sz="1600" dirty="0"/>
-          </a:p>
-        </p:txBody>
-      </p:sp>
-      <p:sp>
-        <p:nvSpPr>
-          <p:cNvPr id="7" name="Text 5"/>
+          <a:p>
+            <a:pPr marL="342900" indent="-342900">
+              <a:lnSpc>
+                <a:spcPct val="105000"/>
+              </a:lnSpc>
+              <a:spcAft>
+                <a:spcPts val="1200"/>
+              </a:spcAft>
+              <a:buSzPct val="100000"/>
+              <a:buChar char="•"/>
+            </a:pPr>
+            <a:r>
+              <a:rPr lang="en-US" sz="2000" dirty="0">
+                <a:solidFill>
+                  <a:srgbClr val="1F2933"/>
+                </a:solidFill>
+                <a:latin typeface="Calibri" pitchFamily="34" charset="0"/>
+                <a:ea typeface="Calibri" pitchFamily="34" charset="-122"/>
+                <a:cs typeface="Calibri" pitchFamily="34" charset="-120"/>
+              </a:rPr>
+              <a:t>Brightfield, multi-channel fluorescence, and combined passes on a single-camera scope</a:t>
+            </a:r>
+            <a:endParaRPr lang="en-US" sz="2000" dirty="0"/>
+          </a:p>
+        </p:txBody>
+      </p:sp>
+      <p:sp>
+        <p:nvSpPr>
+          <p:cNvPr id="5" name="Text 3"/>
           <p:cNvSpPr/>
           <p:nvPr/>
         </p:nvSpPr>
@@ -20013,7 +20189,7 @@
                 <a:ea typeface="Trebuchet MS" pitchFamily="34" charset="-122"/>
                 <a:cs typeface="Trebuchet MS" pitchFamily="34" charset="-120"/>
               </a:rPr>
-              <a:t>How it is put together</a:t>
+              <a:t>Why this changes the rest</a:t>
             </a:r>
             <a:endParaRPr lang="en-US" sz="3000" dirty="0"/>
           </a:p>
@@ -20047,47 +20223,8 @@
         </p:nvSpPr>
         <p:spPr>
           <a:xfrm>
-            <a:off x="566928" y="1243584"/>
-            <a:ext cx="11055096" cy="384048"/>
-          </a:xfrm>
-          <a:prstGeom prst="rect">
-            <a:avLst/>
-          </a:prstGeom>
-          <a:noFill/>
-          <a:ln/>
-        </p:spPr>
-        <p:txBody>
-          <a:bodyPr wrap="square" rtlCol="0" anchor="ctr"/>
-          <a:lstStyle/>
-          <a:p>
-            <a:pPr indent="0" marL="0">
-              <a:buNone/>
-            </a:pPr>
-            <a:r>
-              <a:rPr lang="en-US" sz="1700" i="1" dirty="0">
-                <a:solidFill>
-                  <a:srgbClr val="5A6675"/>
-                </a:solidFill>
-                <a:latin typeface="Calibri" pitchFamily="34" charset="0"/>
-                <a:ea typeface="Calibri" pitchFamily="34" charset="-122"/>
-                <a:cs typeface="Calibri" pitchFamily="34" charset="-120"/>
-              </a:rPr>
-              <a:t>The easy part is the QuPath extension. Budget your time for the microscope side.</a:t>
-            </a:r>
-            <a:endParaRPr lang="en-US" sz="1700" dirty="0"/>
-          </a:p>
-        </p:txBody>
-      </p:sp>
-      <p:sp>
-        <p:nvSpPr>
-          <p:cNvPr id="5" name="Text 3"/>
-          <p:cNvSpPr/>
-          <p:nvPr/>
-        </p:nvSpPr>
-        <p:spPr>
-          <a:xfrm>
-            <a:off x="640080" y="1755648"/>
-            <a:ext cx="10963656" cy="4279392"/>
+            <a:off x="640080" y="1481328"/>
+            <a:ext cx="10963656" cy="4553712"/>
           </a:xfrm>
           <a:prstGeom prst="rect">
             <a:avLst/>
@@ -20118,7 +20255,7 @@
                 <a:ea typeface="Calibri" pitchFamily="34" charset="-122"/>
                 <a:cs typeface="Calibri" pitchFamily="34" charset="-120"/>
               </a:rPr>
-              <a:t>QuPath talks to a small command server, which drives Micro-Manager, which drives the hardware</a:t>
+              <a:t>The region you analysed is the region you acquire at high resolution</a:t>
             </a:r>
             <a:endParaRPr lang="en-US" sz="2000" dirty="0"/>
           </a:p>
@@ -20142,7 +20279,7 @@
                 <a:ea typeface="Calibri" pitchFamily="34" charset="-122"/>
                 <a:cs typeface="Calibri" pitchFamily="34" charset="-120"/>
               </a:rPr>
-              <a:t>Each instrument is described by its own configuration — the QuPath side does not know what kind of microscope it is</a:t>
+              <a:t>Acquisition metadata arrives in the project, not in a folder that gets separated from the images</a:t>
             </a:r>
             <a:endParaRPr lang="en-US" sz="2000" dirty="0"/>
           </a:p>
@@ -20166,7 +20303,7 @@
                 <a:ea typeface="Calibri" pitchFamily="34" charset="-122"/>
                 <a:cs typeface="Calibri" pitchFamily="34" charset="-120"/>
               </a:rPr>
-              <a:t>Micro-Manager remains the device layer. We did not reinvent it</a:t>
+              <a:t>Stitching is a step in this pipeline — and it works perfectly well on its own, which is why it is in your hands-on hour</a:t>
             </a:r>
             <a:endParaRPr lang="en-US" sz="2000" dirty="0"/>
           </a:p>
@@ -20174,7 +20311,71 @@
       </p:sp>
       <p:sp>
         <p:nvSpPr>
+          <p:cNvPr id="5" name="Shape 3"/>
+          <p:cNvSpPr/>
+          <p:nvPr/>
+        </p:nvSpPr>
+        <p:spPr>
+          <a:xfrm>
+            <a:off x="566928" y="5650992"/>
+            <a:ext cx="11055096" cy="566928"/>
+          </a:xfrm>
+          <a:prstGeom prst="rect">
+            <a:avLst/>
+          </a:prstGeom>
+          <a:solidFill>
+            <a:srgbClr val="F4F8FD"/>
+          </a:solidFill>
+          <a:ln w="9525">
+            <a:solidFill>
+              <a:srgbClr val="3674C1"/>
+            </a:solidFill>
+            <a:prstDash val="solid"/>
+          </a:ln>
+        </p:spPr>
+      </p:sp>
+      <p:sp>
+        <p:nvSpPr>
           <p:cNvPr id="6" name="Text 4"/>
+          <p:cNvSpPr/>
+          <p:nvPr/>
+        </p:nvSpPr>
+        <p:spPr>
+          <a:xfrm>
+            <a:off x="768096" y="5650992"/>
+            <a:ext cx="10652760" cy="566928"/>
+          </a:xfrm>
+          <a:prstGeom prst="rect">
+            <a:avLst/>
+          </a:prstGeom>
+          <a:noFill/>
+          <a:ln/>
+        </p:spPr>
+        <p:txBody>
+          <a:bodyPr wrap="square" rtlCol="0" anchor="ctr"/>
+          <a:lstStyle/>
+          <a:p>
+            <a:pPr indent="0" marL="0">
+              <a:buNone/>
+            </a:pPr>
+            <a:r>
+              <a:rPr lang="en-US" sz="1600" b="1" dirty="0">
+                <a:solidFill>
+                  <a:srgbClr val="1F4C86"/>
+                </a:solidFill>
+                <a:latin typeface="Calibri" pitchFamily="34" charset="0"/>
+                <a:ea typeface="Calibri" pitchFamily="34" charset="-122"/>
+                <a:cs typeface="Calibri" pitchFamily="34" charset="-120"/>
+              </a:rPr>
+              <a:t>Once acquisition is driven from QuPath, "acquisition software" and "analysis software" stop being separate places your data lives.</a:t>
+            </a:r>
+            <a:endParaRPr lang="en-US" sz="1600" dirty="0"/>
+          </a:p>
+        </p:txBody>
+      </p:sp>
+      <p:sp>
+        <p:nvSpPr>
+          <p:cNvPr id="7" name="Text 5"/>
           <p:cNvSpPr/>
           <p:nvPr/>
         </p:nvSpPr>
@@ -20245,41 +20446,14 @@
       </p:grpSpPr>
       <p:sp>
         <p:nvSpPr>
-          <p:cNvPr id="2" name="Shape 0"/>
-          <p:cNvSpPr/>
-          <p:nvPr/>
-        </p:nvSpPr>
-        <p:spPr>
-          <a:xfrm>
-            <a:off x="566928" y="411480"/>
-            <a:ext cx="2331720" cy="457200"/>
-          </a:xfrm>
-          <a:prstGeom prst="roundRect">
-            <a:avLst>
-              <a:gd name="adj" fmla="val 20000"/>
-            </a:avLst>
-          </a:prstGeom>
-          <a:solidFill>
-            <a:srgbClr val="FBF1E0"/>
-          </a:solidFill>
-          <a:ln w="12700">
-            <a:solidFill>
-              <a:srgbClr val="B26A00"/>
-            </a:solidFill>
-            <a:prstDash val="solid"/>
-          </a:ln>
-        </p:spPr>
-      </p:sp>
-      <p:sp>
-        <p:nvSpPr>
-          <p:cNvPr id="3" name="Text 1"/>
-          <p:cNvSpPr/>
-          <p:nvPr/>
-        </p:nvSpPr>
-        <p:spPr>
-          <a:xfrm>
-            <a:off x="566928" y="411480"/>
-            <a:ext cx="2331720" cy="457200"/>
+          <p:cNvPr id="2" name="Text 0"/>
+          <p:cNvSpPr/>
+          <p:nvPr/>
+        </p:nvSpPr>
+        <p:spPr>
+          <a:xfrm>
+            <a:off x="566928" y="384048"/>
+            <a:ext cx="11055096" cy="658368"/>
           </a:xfrm>
           <a:prstGeom prst="rect">
             <a:avLst/>
@@ -20291,72 +20465,33 @@
           <a:bodyPr wrap="square" rtlCol="0" anchor="ctr"/>
           <a:lstStyle/>
           <a:p>
-            <a:pPr algn="ctr" indent="0" marL="0">
+            <a:pPr indent="0" marL="0">
               <a:buNone/>
             </a:pPr>
             <a:r>
-              <a:rPr lang="en-US" sz="1600" b="1" dirty="0">
-                <a:solidFill>
-                  <a:srgbClr val="B26A00"/>
+              <a:rPr lang="en-US" sz="3000" b="1" dirty="0">
+                <a:solidFill>
+                  <a:srgbClr val="1F4C86"/>
                 </a:solidFill>
                 <a:latin typeface="Trebuchet MS" pitchFamily="34" charset="0"/>
                 <a:ea typeface="Trebuchet MS" pitchFamily="34" charset="-122"/>
                 <a:cs typeface="Trebuchet MS" pitchFamily="34" charset="-120"/>
               </a:rPr>
-              <a:t>▶  SHOWN  ·  NOT YOURS TO RUN</a:t>
-            </a:r>
-            <a:endParaRPr lang="en-US" sz="1600" dirty="0"/>
-          </a:p>
-        </p:txBody>
-      </p:sp>
-      <p:sp>
-        <p:nvSpPr>
-          <p:cNvPr id="4" name="Text 2"/>
-          <p:cNvSpPr/>
-          <p:nvPr/>
-        </p:nvSpPr>
-        <p:spPr>
-          <a:xfrm>
-            <a:off x="566928" y="1024128"/>
-            <a:ext cx="11055096" cy="685800"/>
-          </a:xfrm>
-          <a:prstGeom prst="rect">
-            <a:avLst/>
-          </a:prstGeom>
-          <a:noFill/>
-          <a:ln/>
-        </p:spPr>
-        <p:txBody>
-          <a:bodyPr wrap="square" rtlCol="0" anchor="ctr"/>
-          <a:lstStyle/>
-          <a:p>
-            <a:pPr indent="0" marL="0">
-              <a:buNone/>
-            </a:pPr>
-            <a:r>
-              <a:rPr lang="en-US" sz="3200" b="1" dirty="0">
-                <a:solidFill>
-                  <a:srgbClr val="1F4C86"/>
-                </a:solidFill>
-                <a:latin typeface="Trebuchet MS" pitchFamily="34" charset="0"/>
-                <a:ea typeface="Trebuchet MS" pitchFamily="34" charset="-122"/>
-                <a:cs typeface="Trebuchet MS" pitchFamily="34" charset="-120"/>
-              </a:rPr>
-              <a:t>Acquisition, live</a:t>
-            </a:r>
-            <a:endParaRPr lang="en-US" sz="3200" dirty="0"/>
-          </a:p>
-        </p:txBody>
-      </p:sp>
-      <p:sp>
-        <p:nvSpPr>
-          <p:cNvPr id="5" name="Shape 3"/>
-          <p:cNvSpPr/>
-          <p:nvPr/>
-        </p:nvSpPr>
-        <p:spPr>
-          <a:xfrm>
-            <a:off x="566928" y="1783080"/>
+              <a:t>How it is put together</a:t>
+            </a:r>
+            <a:endParaRPr lang="en-US" sz="3000" dirty="0"/>
+          </a:p>
+        </p:txBody>
+      </p:sp>
+      <p:sp>
+        <p:nvSpPr>
+          <p:cNvPr id="3" name="Shape 1"/>
+          <p:cNvSpPr/>
+          <p:nvPr/>
+        </p:nvSpPr>
+        <p:spPr>
+          <a:xfrm>
+            <a:off x="566928" y="1097280"/>
             <a:ext cx="1920240" cy="50292"/>
           </a:xfrm>
           <a:prstGeom prst="rect">
@@ -20370,14 +20505,53 @@
       </p:sp>
       <p:sp>
         <p:nvSpPr>
-          <p:cNvPr id="6" name="Text 4"/>
-          <p:cNvSpPr/>
-          <p:nvPr/>
-        </p:nvSpPr>
-        <p:spPr>
-          <a:xfrm>
-            <a:off x="640080" y="2103120"/>
-            <a:ext cx="10963656" cy="3017520"/>
+          <p:cNvPr id="4" name="Text 2"/>
+          <p:cNvSpPr/>
+          <p:nvPr/>
+        </p:nvSpPr>
+        <p:spPr>
+          <a:xfrm>
+            <a:off x="566928" y="1243584"/>
+            <a:ext cx="11055096" cy="384048"/>
+          </a:xfrm>
+          <a:prstGeom prst="rect">
+            <a:avLst/>
+          </a:prstGeom>
+          <a:noFill/>
+          <a:ln/>
+        </p:spPr>
+        <p:txBody>
+          <a:bodyPr wrap="square" rtlCol="0" anchor="ctr"/>
+          <a:lstStyle/>
+          <a:p>
+            <a:pPr indent="0" marL="0">
+              <a:buNone/>
+            </a:pPr>
+            <a:r>
+              <a:rPr lang="en-US" sz="1700" i="1" dirty="0">
+                <a:solidFill>
+                  <a:srgbClr val="5A6675"/>
+                </a:solidFill>
+                <a:latin typeface="Calibri" pitchFamily="34" charset="0"/>
+                <a:ea typeface="Calibri" pitchFamily="34" charset="-122"/>
+                <a:cs typeface="Calibri" pitchFamily="34" charset="-120"/>
+              </a:rPr>
+              <a:t>The easy part is the QuPath extension. Budget your time for the microscope side.</a:t>
+            </a:r>
+            <a:endParaRPr lang="en-US" sz="1700" dirty="0"/>
+          </a:p>
+        </p:txBody>
+      </p:sp>
+      <p:sp>
+        <p:nvSpPr>
+          <p:cNvPr id="5" name="Text 3"/>
+          <p:cNvSpPr/>
+          <p:nvPr/>
+        </p:nvSpPr>
+        <p:spPr>
+          <a:xfrm>
+            <a:off x="640080" y="1755648"/>
+            <a:ext cx="10963656" cy="4279392"/>
           </a:xfrm>
           <a:prstGeom prst="rect">
             <a:avLst/>
@@ -20390,8 +20564,11 @@
           <a:lstStyle/>
           <a:p>
             <a:pPr marL="342900" indent="-342900">
+              <a:lnSpc>
+                <a:spcPct val="105000"/>
+              </a:lnSpc>
               <a:spcAft>
-                <a:spcPts val="1400"/>
+                <a:spcPts val="1200"/>
               </a:spcAft>
               <a:buSzPct val="100000"/>
               <a:buChar char="•"/>
@@ -20405,14 +20582,17 @@
                 <a:ea typeface="Calibri" pitchFamily="34" charset="-122"/>
                 <a:cs typeface="Calibri" pitchFamily="34" charset="-120"/>
               </a:rPr>
-              <a:t>Draw a bounding box on a slide overview</a:t>
+              <a:t>QuPath talks to a small command server, which drives Micro-Manager, which drives the hardware</a:t>
             </a:r>
             <a:endParaRPr lang="en-US" sz="2000" dirty="0"/>
           </a:p>
           <a:p>
             <a:pPr marL="342900" indent="-342900">
+              <a:lnSpc>
+                <a:spcPct val="105000"/>
+              </a:lnSpc>
               <a:spcAft>
-                <a:spcPts val="1400"/>
+                <a:spcPts val="1200"/>
               </a:spcAft>
               <a:buSzPct val="100000"/>
               <a:buChar char="•"/>
@@ -20426,14 +20606,17 @@
                 <a:ea typeface="Calibri" pitchFamily="34" charset="-122"/>
                 <a:cs typeface="Calibri" pitchFamily="34" charset="-120"/>
               </a:rPr>
-              <a:t>Watch the stage move and the tiles come in</a:t>
+              <a:t>Each instrument is described by its own configuration — the QuPath side does not know what kind of microscope it is</a:t>
             </a:r>
             <a:endParaRPr lang="en-US" sz="2000" dirty="0"/>
           </a:p>
           <a:p>
             <a:pPr marL="342900" indent="-342900">
+              <a:lnSpc>
+                <a:spcPct val="105000"/>
+              </a:lnSpc>
               <a:spcAft>
-                <a:spcPts val="1400"/>
+                <a:spcPts val="1200"/>
               </a:spcAft>
               <a:buSzPct val="100000"/>
               <a:buChar char="•"/>
@@ -20447,121 +20630,15 @@
                 <a:ea typeface="Calibri" pitchFamily="34" charset="-122"/>
                 <a:cs typeface="Calibri" pitchFamily="34" charset="-120"/>
               </a:rPr>
-              <a:t>Stitched pyramidal image lands back in the project, with its metadata</a:t>
+              <a:t>Micro-Manager remains the device layer. We did not reinvent it</a:t>
             </a:r>
             <a:endParaRPr lang="en-US" sz="2000" dirty="0"/>
           </a:p>
-          <a:p>
-            <a:pPr marL="342900" indent="-342900">
-              <a:spcAft>
-                <a:spcPts val="1400"/>
-              </a:spcAft>
-              <a:buSzPct val="100000"/>
-              <a:buChar char="•"/>
-            </a:pPr>
-            <a:r>
-              <a:rPr lang="en-US" sz="2000" dirty="0">
-                <a:solidFill>
-                  <a:srgbClr val="1F2933"/>
-                </a:solidFill>
-                <a:latin typeface="Calibri" pitchFamily="34" charset="0"/>
-                <a:ea typeface="Calibri" pitchFamily="34" charset="-122"/>
-                <a:cs typeface="Calibri" pitchFamily="34" charset="-120"/>
-              </a:rPr>
-              <a:t>Then open it and annotate it — the loop closes</a:t>
-            </a:r>
-            <a:endParaRPr lang="en-US" sz="2000" dirty="0"/>
-          </a:p>
-          <a:p>
-            <a:pPr marL="342900" indent="-342900">
-              <a:spcAft>
-                <a:spcPts val="1400"/>
-              </a:spcAft>
-              <a:buSzPct val="100000"/>
-              <a:buChar char="•"/>
-            </a:pPr>
-            <a:r>
-              <a:rPr lang="en-US" sz="2000" dirty="0">
-                <a:solidFill>
-                  <a:srgbClr val="1F2933"/>
-                </a:solidFill>
-                <a:latin typeface="Calibri" pitchFamily="34" charset="0"/>
-                <a:ea typeface="Calibri" pitchFamily="34" charset="-122"/>
-                <a:cs typeface="Calibri" pitchFamily="34" charset="-120"/>
-              </a:rPr>
-              <a:t>The stitching half — Tiles to Pyramid — you can install and use today, no microscope needed</a:t>
-            </a:r>
-            <a:endParaRPr lang="en-US" sz="2000" dirty="0"/>
-          </a:p>
-        </p:txBody>
-      </p:sp>
-      <p:sp>
-        <p:nvSpPr>
-          <p:cNvPr id="7" name="Shape 5"/>
-          <p:cNvSpPr/>
-          <p:nvPr/>
-        </p:nvSpPr>
-        <p:spPr>
-          <a:xfrm>
-            <a:off x="566928" y="5650992"/>
-            <a:ext cx="11055096" cy="566928"/>
-          </a:xfrm>
-          <a:prstGeom prst="rect">
-            <a:avLst/>
-          </a:prstGeom>
-          <a:solidFill>
-            <a:srgbClr val="F4F8FD"/>
-          </a:solidFill>
-          <a:ln w="9525">
-            <a:solidFill>
-              <a:srgbClr val="3674C1"/>
-            </a:solidFill>
-            <a:prstDash val="solid"/>
-          </a:ln>
-        </p:spPr>
-      </p:sp>
-      <p:sp>
-        <p:nvSpPr>
-          <p:cNvPr id="8" name="Text 6"/>
-          <p:cNvSpPr/>
-          <p:nvPr/>
-        </p:nvSpPr>
-        <p:spPr>
-          <a:xfrm>
-            <a:off x="768096" y="5650992"/>
-            <a:ext cx="10652760" cy="566928"/>
-          </a:xfrm>
-          <a:prstGeom prst="rect">
-            <a:avLst/>
-          </a:prstGeom>
-          <a:noFill/>
-          <a:ln/>
-        </p:spPr>
-        <p:txBody>
-          <a:bodyPr wrap="square" rtlCol="0" anchor="ctr"/>
-          <a:lstStyle/>
-          <a:p>
-            <a:pPr indent="0" marL="0">
-              <a:buNone/>
-            </a:pPr>
-            <a:r>
-              <a:rPr lang="en-US" sz="1600" b="1" dirty="0">
-                <a:solidFill>
-                  <a:srgbClr val="1F4C86"/>
-                </a:solidFill>
-                <a:latin typeface="Calibri" pitchFamily="34" charset="0"/>
-                <a:ea typeface="Calibri" pitchFamily="34" charset="-122"/>
-                <a:cs typeface="Calibri" pitchFamily="34" charset="-120"/>
-              </a:rPr>
-              <a:t>You watch this one: it needs a microscope, so nobody in the room runs it. About five minutes, with a recorded fallback if the network or the hardware disagrees.</a:t>
-            </a:r>
-            <a:endParaRPr lang="en-US" sz="1600" dirty="0"/>
-          </a:p>
-        </p:txBody>
-      </p:sp>
-      <p:sp>
-        <p:nvSpPr>
-          <p:cNvPr id="9" name="Text 7"/>
+        </p:txBody>
+      </p:sp>
+      <p:sp>
+        <p:nvSpPr>
+          <p:cNvPr id="6" name="Text 4"/>
           <p:cNvSpPr/>
           <p:nvPr/>
         </p:nvSpPr>
@@ -20632,14 +20709,41 @@
       </p:grpSpPr>
       <p:sp>
         <p:nvSpPr>
-          <p:cNvPr id="2" name="Text 0"/>
+          <p:cNvPr id="2" name="Shape 0"/>
           <p:cNvSpPr/>
           <p:nvPr/>
         </p:nvSpPr>
         <p:spPr>
           <a:xfrm>
             <a:off x="566928" y="411480"/>
-            <a:ext cx="11055096" cy="685800"/>
+            <a:ext cx="2331720" cy="457200"/>
+          </a:xfrm>
+          <a:prstGeom prst="roundRect">
+            <a:avLst>
+              <a:gd name="adj" fmla="val 20000"/>
+            </a:avLst>
+          </a:prstGeom>
+          <a:solidFill>
+            <a:srgbClr val="FBF1E0"/>
+          </a:solidFill>
+          <a:ln w="12700">
+            <a:solidFill>
+              <a:srgbClr val="B26A00"/>
+            </a:solidFill>
+            <a:prstDash val="solid"/>
+          </a:ln>
+        </p:spPr>
+      </p:sp>
+      <p:sp>
+        <p:nvSpPr>
+          <p:cNvPr id="3" name="Text 1"/>
+          <p:cNvSpPr/>
+          <p:nvPr/>
+        </p:nvSpPr>
+        <p:spPr>
+          <a:xfrm>
+            <a:off x="566928" y="411480"/>
+            <a:ext cx="2331720" cy="457200"/>
           </a:xfrm>
           <a:prstGeom prst="rect">
             <a:avLst/>
@@ -20651,19 +20755,58 @@
           <a:bodyPr wrap="square" rtlCol="0" anchor="ctr"/>
           <a:lstStyle/>
           <a:p>
-            <a:pPr indent="0" marL="0">
+            <a:pPr algn="ctr" indent="0" marL="0">
               <a:buNone/>
             </a:pPr>
             <a:r>
-              <a:rPr lang="en-US" sz="3200" b="1" dirty="0">
-                <a:solidFill>
-                  <a:srgbClr val="1F4C86"/>
+              <a:rPr lang="en-US" sz="1600" b="1" dirty="0">
+                <a:solidFill>
+                  <a:srgbClr val="B26A00"/>
                 </a:solidFill>
                 <a:latin typeface="Trebuchet MS" pitchFamily="34" charset="0"/>
                 <a:ea typeface="Trebuchet MS" pitchFamily="34" charset="-122"/>
                 <a:cs typeface="Trebuchet MS" pitchFamily="34" charset="-120"/>
               </a:rPr>
-              <a:t>Acknowledgements</a:t>
+              <a:t>▶  SHOWN  ·  NOT YOURS TO RUN</a:t>
+            </a:r>
+            <a:endParaRPr lang="en-US" sz="1600" dirty="0"/>
+          </a:p>
+        </p:txBody>
+      </p:sp>
+      <p:sp>
+        <p:nvSpPr>
+          <p:cNvPr id="4" name="Text 2"/>
+          <p:cNvSpPr/>
+          <p:nvPr/>
+        </p:nvSpPr>
+        <p:spPr>
+          <a:xfrm>
+            <a:off x="566928" y="1024128"/>
+            <a:ext cx="11055096" cy="685800"/>
+          </a:xfrm>
+          <a:prstGeom prst="rect">
+            <a:avLst/>
+          </a:prstGeom>
+          <a:noFill/>
+          <a:ln/>
+        </p:spPr>
+        <p:txBody>
+          <a:bodyPr wrap="square" rtlCol="0" anchor="ctr"/>
+          <a:lstStyle/>
+          <a:p>
+            <a:pPr indent="0" marL="0">
+              <a:buNone/>
+            </a:pPr>
+            <a:r>
+              <a:rPr lang="en-US" sz="3200" b="1" dirty="0">
+                <a:solidFill>
+                  <a:srgbClr val="1F4C86"/>
+                </a:solidFill>
+                <a:latin typeface="Trebuchet MS" pitchFamily="34" charset="0"/>
+                <a:ea typeface="Trebuchet MS" pitchFamily="34" charset="-122"/>
+                <a:cs typeface="Trebuchet MS" pitchFamily="34" charset="-120"/>
+              </a:rPr>
+              <a:t>Acquisition, live</a:t>
             </a:r>
             <a:endParaRPr lang="en-US" sz="3200" dirty="0"/>
           </a:p>
@@ -20671,13 +20814,13 @@
       </p:sp>
       <p:sp>
         <p:nvSpPr>
-          <p:cNvPr id="3" name="Shape 1"/>
-          <p:cNvSpPr/>
-          <p:nvPr/>
-        </p:nvSpPr>
-        <p:spPr>
-          <a:xfrm>
-            <a:off x="566928" y="1152144"/>
+          <p:cNvPr id="5" name="Shape 3"/>
+          <p:cNvSpPr/>
+          <p:nvPr/>
+        </p:nvSpPr>
+        <p:spPr>
+          <a:xfrm>
+            <a:off x="566928" y="1783080"/>
             <a:ext cx="1920240" cy="50292"/>
           </a:xfrm>
           <a:prstGeom prst="rect">
@@ -20691,54 +20834,166 @@
       </p:sp>
       <p:sp>
         <p:nvSpPr>
-          <p:cNvPr id="4" name="Shape 2"/>
-          <p:cNvSpPr/>
-          <p:nvPr/>
-        </p:nvSpPr>
-        <p:spPr>
-          <a:xfrm>
-            <a:off x="566928" y="1572768"/>
-            <a:ext cx="11055096" cy="2240280"/>
+          <p:cNvPr id="6" name="Text 4"/>
+          <p:cNvSpPr/>
+          <p:nvPr/>
+        </p:nvSpPr>
+        <p:spPr>
+          <a:xfrm>
+            <a:off x="640080" y="2103120"/>
+            <a:ext cx="10963656" cy="3017520"/>
+          </a:xfrm>
+          <a:prstGeom prst="rect">
+            <a:avLst/>
+          </a:prstGeom>
+          <a:noFill/>
+          <a:ln/>
+        </p:spPr>
+        <p:txBody>
+          <a:bodyPr wrap="square" rtlCol="0" anchor="t"/>
+          <a:lstStyle/>
+          <a:p>
+            <a:pPr marL="342900" indent="-342900">
+              <a:spcAft>
+                <a:spcPts val="1400"/>
+              </a:spcAft>
+              <a:buSzPct val="100000"/>
+              <a:buChar char="•"/>
+            </a:pPr>
+            <a:r>
+              <a:rPr lang="en-US" sz="2000" dirty="0">
+                <a:solidFill>
+                  <a:srgbClr val="1F2933"/>
+                </a:solidFill>
+                <a:latin typeface="Calibri" pitchFamily="34" charset="0"/>
+                <a:ea typeface="Calibri" pitchFamily="34" charset="-122"/>
+                <a:cs typeface="Calibri" pitchFamily="34" charset="-120"/>
+              </a:rPr>
+              <a:t>Draw a bounding box on a slide overview</a:t>
+            </a:r>
+            <a:endParaRPr lang="en-US" sz="2000" dirty="0"/>
+          </a:p>
+          <a:p>
+            <a:pPr marL="342900" indent="-342900">
+              <a:spcAft>
+                <a:spcPts val="1400"/>
+              </a:spcAft>
+              <a:buSzPct val="100000"/>
+              <a:buChar char="•"/>
+            </a:pPr>
+            <a:r>
+              <a:rPr lang="en-US" sz="2000" dirty="0">
+                <a:solidFill>
+                  <a:srgbClr val="1F2933"/>
+                </a:solidFill>
+                <a:latin typeface="Calibri" pitchFamily="34" charset="0"/>
+                <a:ea typeface="Calibri" pitchFamily="34" charset="-122"/>
+                <a:cs typeface="Calibri" pitchFamily="34" charset="-120"/>
+              </a:rPr>
+              <a:t>Watch the stage move and the tiles come in</a:t>
+            </a:r>
+            <a:endParaRPr lang="en-US" sz="2000" dirty="0"/>
+          </a:p>
+          <a:p>
+            <a:pPr marL="342900" indent="-342900">
+              <a:spcAft>
+                <a:spcPts val="1400"/>
+              </a:spcAft>
+              <a:buSzPct val="100000"/>
+              <a:buChar char="•"/>
+            </a:pPr>
+            <a:r>
+              <a:rPr lang="en-US" sz="2000" dirty="0">
+                <a:solidFill>
+                  <a:srgbClr val="1F2933"/>
+                </a:solidFill>
+                <a:latin typeface="Calibri" pitchFamily="34" charset="0"/>
+                <a:ea typeface="Calibri" pitchFamily="34" charset="-122"/>
+                <a:cs typeface="Calibri" pitchFamily="34" charset="-120"/>
+              </a:rPr>
+              <a:t>Stitched pyramidal image lands back in the project, with its metadata</a:t>
+            </a:r>
+            <a:endParaRPr lang="en-US" sz="2000" dirty="0"/>
+          </a:p>
+          <a:p>
+            <a:pPr marL="342900" indent="-342900">
+              <a:spcAft>
+                <a:spcPts val="1400"/>
+              </a:spcAft>
+              <a:buSzPct val="100000"/>
+              <a:buChar char="•"/>
+            </a:pPr>
+            <a:r>
+              <a:rPr lang="en-US" sz="2000" dirty="0">
+                <a:solidFill>
+                  <a:srgbClr val="1F2933"/>
+                </a:solidFill>
+                <a:latin typeface="Calibri" pitchFamily="34" charset="0"/>
+                <a:ea typeface="Calibri" pitchFamily="34" charset="-122"/>
+                <a:cs typeface="Calibri" pitchFamily="34" charset="-120"/>
+              </a:rPr>
+              <a:t>Then open it and annotate it — the loop closes</a:t>
+            </a:r>
+            <a:endParaRPr lang="en-US" sz="2000" dirty="0"/>
+          </a:p>
+          <a:p>
+            <a:pPr marL="342900" indent="-342900">
+              <a:spcAft>
+                <a:spcPts val="1400"/>
+              </a:spcAft>
+              <a:buSzPct val="100000"/>
+              <a:buChar char="•"/>
+            </a:pPr>
+            <a:r>
+              <a:rPr lang="en-US" sz="2000" dirty="0">
+                <a:solidFill>
+                  <a:srgbClr val="1F2933"/>
+                </a:solidFill>
+                <a:latin typeface="Calibri" pitchFamily="34" charset="0"/>
+                <a:ea typeface="Calibri" pitchFamily="34" charset="-122"/>
+                <a:cs typeface="Calibri" pitchFamily="34" charset="-120"/>
+              </a:rPr>
+              <a:t>The stitching half — Tiles to Pyramid — you can install and use today, no microscope needed</a:t>
+            </a:r>
+            <a:endParaRPr lang="en-US" sz="2000" dirty="0"/>
+          </a:p>
+        </p:txBody>
+      </p:sp>
+      <p:sp>
+        <p:nvSpPr>
+          <p:cNvPr id="7" name="Shape 5"/>
+          <p:cNvSpPr/>
+          <p:nvPr/>
+        </p:nvSpPr>
+        <p:spPr>
+          <a:xfrm>
+            <a:off x="566928" y="5650992"/>
+            <a:ext cx="11055096" cy="566928"/>
           </a:xfrm>
           <a:prstGeom prst="rect">
             <a:avLst/>
           </a:prstGeom>
           <a:solidFill>
-            <a:srgbClr val="E8F0FA"/>
+            <a:srgbClr val="F4F8FD"/>
           </a:solidFill>
-          <a:ln/>
-        </p:spPr>
-      </p:sp>
-      <p:sp>
-        <p:nvSpPr>
-          <p:cNvPr id="5" name="Shape 3"/>
-          <p:cNvSpPr/>
-          <p:nvPr/>
-        </p:nvSpPr>
-        <p:spPr>
-          <a:xfrm>
-            <a:off x="566928" y="1572768"/>
-            <a:ext cx="146304" cy="2240280"/>
-          </a:xfrm>
-          <a:prstGeom prst="rect">
-            <a:avLst/>
-          </a:prstGeom>
-          <a:solidFill>
-            <a:srgbClr val="3674C1"/>
-          </a:solidFill>
-          <a:ln/>
-        </p:spPr>
-      </p:sp>
-      <p:sp>
-        <p:nvSpPr>
-          <p:cNvPr id="6" name="Text 4"/>
-          <p:cNvSpPr/>
-          <p:nvPr/>
-        </p:nvSpPr>
-        <p:spPr>
-          <a:xfrm>
-            <a:off x="978408" y="1737360"/>
-            <a:ext cx="10232136" cy="365760"/>
+          <a:ln w="9525">
+            <a:solidFill>
+              <a:srgbClr val="3674C1"/>
+            </a:solidFill>
+            <a:prstDash val="solid"/>
+          </a:ln>
+        </p:spPr>
+      </p:sp>
+      <p:sp>
+        <p:nvSpPr>
+          <p:cNvPr id="8" name="Text 6"/>
+          <p:cNvSpPr/>
+          <p:nvPr/>
+        </p:nvSpPr>
+        <p:spPr>
+          <a:xfrm>
+            <a:off x="768096" y="5650992"/>
+            <a:ext cx="10652760" cy="566928"/>
           </a:xfrm>
           <a:prstGeom prst="rect">
             <a:avLst/>
@@ -20754,15 +21009,15 @@
               <a:buNone/>
             </a:pPr>
             <a:r>
-              <a:rPr lang="en-US" sz="1600" b="1" spc="150" kern="0" dirty="0">
-                <a:solidFill>
-                  <a:srgbClr val="3674C1"/>
-                </a:solidFill>
-                <a:latin typeface="Calibri" pitchFamily="34" charset="0"/>
-                <a:ea typeface="Calibri" pitchFamily="34" charset="-122"/>
-                <a:cs typeface="Calibri" pitchFamily="34" charset="-120"/>
-              </a:rPr>
-              <a:t>Sample data</a:t>
+              <a:rPr lang="en-US" sz="1600" b="1" dirty="0">
+                <a:solidFill>
+                  <a:srgbClr val="1F4C86"/>
+                </a:solidFill>
+                <a:latin typeface="Calibri" pitchFamily="34" charset="0"/>
+                <a:ea typeface="Calibri" pitchFamily="34" charset="-122"/>
+                <a:cs typeface="Calibri" pitchFamily="34" charset="-120"/>
+              </a:rPr>
+              <a:t>You watch this one: it needs a microscope, so nobody in the room runs it. About five minutes, with a recorded fallback if the network or the hardware disagrees.</a:t>
             </a:r>
             <a:endParaRPr lang="en-US" sz="1600" dirty="0"/>
           </a:p>
@@ -20770,222 +21025,7 @@
       </p:sp>
       <p:sp>
         <p:nvSpPr>
-          <p:cNvPr id="7" name="Text 5"/>
-          <p:cNvSpPr/>
-          <p:nvPr/>
-        </p:nvSpPr>
-        <p:spPr>
-          <a:xfrm>
-            <a:off x="978408" y="2103120"/>
-            <a:ext cx="10232136" cy="566928"/>
-          </a:xfrm>
-          <a:prstGeom prst="rect">
-            <a:avLst/>
-          </a:prstGeom>
-          <a:noFill/>
-          <a:ln/>
-        </p:spPr>
-        <p:txBody>
-          <a:bodyPr wrap="square" rtlCol="0" anchor="ctr"/>
-          <a:lstStyle/>
-          <a:p>
-            <a:pPr indent="0" marL="0">
-              <a:buNone/>
-            </a:pPr>
-            <a:r>
-              <a:rPr lang="en-US" sz="3200" b="1" dirty="0">
-                <a:solidFill>
-                  <a:srgbClr val="1F4C86"/>
-                </a:solidFill>
-                <a:latin typeface="Trebuchet MS" pitchFamily="34" charset="0"/>
-                <a:ea typeface="Trebuchet MS" pitchFamily="34" charset="-122"/>
-                <a:cs typeface="Trebuchet MS" pitchFamily="34" charset="-120"/>
-              </a:rPr>
-              <a:t>Sara McArdle  ·  Zbigniew Mikulski</a:t>
-            </a:r>
-            <a:endParaRPr lang="en-US" sz="3200" dirty="0"/>
-          </a:p>
-        </p:txBody>
-      </p:sp>
-      <p:sp>
-        <p:nvSpPr>
-          <p:cNvPr id="8" name="Text 6"/>
-          <p:cNvSpPr/>
-          <p:nvPr/>
-        </p:nvSpPr>
-        <p:spPr>
-          <a:xfrm>
-            <a:off x="978408" y="2670048"/>
-            <a:ext cx="10232136" cy="384048"/>
-          </a:xfrm>
-          <a:prstGeom prst="rect">
-            <a:avLst/>
-          </a:prstGeom>
-          <a:noFill/>
-          <a:ln/>
-        </p:spPr>
-        <p:txBody>
-          <a:bodyPr wrap="square" rtlCol="0" anchor="ctr"/>
-          <a:lstStyle/>
-          <a:p>
-            <a:pPr indent="0" marL="0">
-              <a:buNone/>
-            </a:pPr>
-            <a:r>
-              <a:rPr lang="en-US" sz="2100" dirty="0">
-                <a:solidFill>
-                  <a:srgbClr val="1F2933"/>
-                </a:solidFill>
-                <a:latin typeface="Calibri" pitchFamily="34" charset="0"/>
-                <a:ea typeface="Calibri" pitchFamily="34" charset="-122"/>
-                <a:cs typeface="Calibri" pitchFamily="34" charset="-120"/>
-              </a:rPr>
-              <a:t>La Jolla Institute for Immunology</a:t>
-            </a:r>
-            <a:endParaRPr lang="en-US" sz="2100" dirty="0"/>
-          </a:p>
-        </p:txBody>
-      </p:sp>
-      <p:sp>
-        <p:nvSpPr>
           <p:cNvPr id="9" name="Text 7"/>
-          <p:cNvSpPr/>
-          <p:nvPr/>
-        </p:nvSpPr>
-        <p:spPr>
-          <a:xfrm>
-            <a:off x="978408" y="3054096"/>
-            <a:ext cx="10232136" cy="731520"/>
-          </a:xfrm>
-          <a:prstGeom prst="rect">
-            <a:avLst/>
-          </a:prstGeom>
-          <a:noFill/>
-          <a:ln/>
-        </p:spPr>
-        <p:txBody>
-          <a:bodyPr wrap="square" rtlCol="0" anchor="ctr"/>
-          <a:lstStyle/>
-          <a:p>
-            <a:pPr indent="0" marL="0">
-              <a:lnSpc>
-                <a:spcPct val="110000"/>
-              </a:lnSpc>
-              <a:buNone/>
-            </a:pPr>
-            <a:r>
-              <a:rPr lang="en-US" sz="1700" i="1" dirty="0">
-                <a:solidFill>
-                  <a:srgbClr val="5A6675"/>
-                </a:solidFill>
-                <a:latin typeface="Calibri" pitchFamily="34" charset="0"/>
-                <a:ea typeface="Calibri" pitchFamily="34" charset="-122"/>
-                <a:cs typeface="Calibri" pitchFamily="34" charset="-120"/>
-              </a:rPr>
-              <a:t>They provided the slide-label images behind the OCR and metadata exercises.</a:t>
-            </a:r>
-            <a:endParaRPr lang="en-US" sz="1700" dirty="0"/>
-          </a:p>
-          <a:p>
-            <a:pPr indent="0" marL="0">
-              <a:lnSpc>
-                <a:spcPct val="110000"/>
-              </a:lnSpc>
-              <a:buNone/>
-            </a:pPr>
-            <a:r>
-              <a:rPr lang="en-US" sz="1700" i="1" dirty="0">
-                <a:solidFill>
-                  <a:srgbClr val="5A6675"/>
-                </a:solidFill>
-                <a:latin typeface="Calibri" pitchFamily="34" charset="0"/>
-                <a:ea typeface="Calibri" pitchFamily="34" charset="-122"/>
-                <a:cs typeface="Calibri" pitchFamily="34" charset="-120"/>
-              </a:rPr>
-              <a:t>Other data today: public images, a CC0 synthetic set, and tiles acquired at LOCI.</a:t>
-            </a:r>
-            <a:endParaRPr lang="en-US" sz="1700" dirty="0"/>
-          </a:p>
-        </p:txBody>
-      </p:sp>
-      <p:sp>
-        <p:nvSpPr>
-          <p:cNvPr id="10" name="Text 8"/>
-          <p:cNvSpPr/>
-          <p:nvPr/>
-        </p:nvSpPr>
-        <p:spPr>
-          <a:xfrm>
-            <a:off x="566928" y="3977640"/>
-            <a:ext cx="11055096" cy="2103120"/>
-          </a:xfrm>
-          <a:prstGeom prst="rect">
-            <a:avLst/>
-          </a:prstGeom>
-          <a:noFill/>
-          <a:ln/>
-        </p:spPr>
-        <p:txBody>
-          <a:bodyPr wrap="square" rtlCol="0" anchor="t"/>
-          <a:lstStyle/>
-          <a:p>
-            <a:pPr indent="0" marL="0">
-              <a:spcAft>
-                <a:spcPts val="1000"/>
-              </a:spcAft>
-              <a:buNone/>
-            </a:pPr>
-            <a:r>
-              <a:rPr lang="en-US" sz="1700" dirty="0">
-                <a:solidFill>
-                  <a:srgbClr val="1F2933"/>
-                </a:solidFill>
-                <a:latin typeface="Calibri" pitchFamily="34" charset="0"/>
-                <a:ea typeface="Calibri" pitchFamily="34" charset="-122"/>
-                <a:cs typeface="Calibri" pitchFamily="34" charset="-120"/>
-              </a:rPr>
-              <a:t>Sara McArdle also shaped the software directly — two of these extensions began as her Groovy scripts, and her FS2K course was the model for how the workshop pages are written.
-</a:t>
-            </a:r>
-            <a:pPr indent="0" marL="0">
-              <a:spcAft>
-                <a:spcPts val="1000"/>
-              </a:spcAft>
-              <a:buNone/>
-            </a:pPr>
-            <a:r>
-              <a:rPr lang="en-US" sz="1700" dirty="0">
-                <a:solidFill>
-                  <a:srgbClr val="1F2933"/>
-                </a:solidFill>
-                <a:latin typeface="Calibri" pitchFamily="34" charset="0"/>
-                <a:ea typeface="Calibri" pitchFamily="34" charset="-122"/>
-                <a:cs typeface="Calibri" pitchFamily="34" charset="-120"/>
-              </a:rPr>
-              <a:t>Kristin Gallick, whose concept and scripts the Confusion Matrix grew from.  ·  Pete Bankhead and the QuPath team.  ·  CT-FIRE, CurveAlign, TACS and TWOMBLI for the fibre work.  ·  CytoMAP and QuBaLab for bringing clustering into QuPath.  ·  QUAREP-LiMi for the reporting standards.  ·  The image.sc community, where several of these features were first requested.
-</a:t>
-            </a:r>
-            <a:pPr indent="0" marL="0">
-              <a:buNone/>
-            </a:pPr>
-            <a:r>
-              <a:rPr lang="en-US" sz="1700" b="1" dirty="0">
-                <a:solidFill>
-                  <a:srgbClr val="1F4C86"/>
-                </a:solidFill>
-                <a:latin typeface="Calibri" pitchFamily="34" charset="0"/>
-                <a:ea typeface="Calibri" pitchFamily="34" charset="-122"/>
-                <a:cs typeface="Calibri" pitchFamily="34" charset="-120"/>
-              </a:rPr>
-              <a:t>Full credits: michaelsnelson.github.io/BINA-I2K-2026-QuPath-Extensions/docs/acknowledgements.html</a:t>
-            </a:r>
-            <a:endParaRPr lang="en-US" sz="1700" dirty="0"/>
-          </a:p>
-        </p:txBody>
-      </p:sp>
-      <p:sp>
-        <p:nvSpPr>
-          <p:cNvPr id="11" name="Text 9"/>
           <p:cNvSpPr/>
           <p:nvPr/>
         </p:nvSpPr>
@@ -21056,14 +21096,53 @@
       </p:grpSpPr>
       <p:sp>
         <p:nvSpPr>
-          <p:cNvPr id="2" name="Shape 0"/>
-          <p:cNvSpPr/>
-          <p:nvPr/>
-        </p:nvSpPr>
-        <p:spPr>
-          <a:xfrm>
-            <a:off x="0" y="0"/>
-            <a:ext cx="274320" cy="6858000"/>
+          <p:cNvPr id="2" name="Text 0"/>
+          <p:cNvSpPr/>
+          <p:nvPr/>
+        </p:nvSpPr>
+        <p:spPr>
+          <a:xfrm>
+            <a:off x="566928" y="411480"/>
+            <a:ext cx="11055096" cy="685800"/>
+          </a:xfrm>
+          <a:prstGeom prst="rect">
+            <a:avLst/>
+          </a:prstGeom>
+          <a:noFill/>
+          <a:ln/>
+        </p:spPr>
+        <p:txBody>
+          <a:bodyPr wrap="square" rtlCol="0" anchor="ctr"/>
+          <a:lstStyle/>
+          <a:p>
+            <a:pPr indent="0" marL="0">
+              <a:buNone/>
+            </a:pPr>
+            <a:r>
+              <a:rPr lang="en-US" sz="3200" b="1" dirty="0">
+                <a:solidFill>
+                  <a:srgbClr val="1F4C86"/>
+                </a:solidFill>
+                <a:latin typeface="Trebuchet MS" pitchFamily="34" charset="0"/>
+                <a:ea typeface="Trebuchet MS" pitchFamily="34" charset="-122"/>
+                <a:cs typeface="Trebuchet MS" pitchFamily="34" charset="-120"/>
+              </a:rPr>
+              <a:t>Acknowledgements</a:t>
+            </a:r>
+            <a:endParaRPr lang="en-US" sz="3200" dirty="0"/>
+          </a:p>
+        </p:txBody>
+      </p:sp>
+      <p:sp>
+        <p:nvSpPr>
+          <p:cNvPr id="3" name="Shape 1"/>
+          <p:cNvSpPr/>
+          <p:nvPr/>
+        </p:nvSpPr>
+        <p:spPr>
+          <a:xfrm>
+            <a:off x="566928" y="1152144"/>
+            <a:ext cx="1920240" cy="50292"/>
           </a:xfrm>
           <a:prstGeom prst="rect">
             <a:avLst/>
@@ -21076,14 +21155,54 @@
       </p:sp>
       <p:sp>
         <p:nvSpPr>
-          <p:cNvPr id="3" name="Text 1"/>
-          <p:cNvSpPr/>
-          <p:nvPr/>
-        </p:nvSpPr>
-        <p:spPr>
-          <a:xfrm>
-            <a:off x="960120" y="777240"/>
-            <a:ext cx="10268712" cy="822960"/>
+          <p:cNvPr id="4" name="Shape 2"/>
+          <p:cNvSpPr/>
+          <p:nvPr/>
+        </p:nvSpPr>
+        <p:spPr>
+          <a:xfrm>
+            <a:off x="566928" y="1572768"/>
+            <a:ext cx="11055096" cy="2240280"/>
+          </a:xfrm>
+          <a:prstGeom prst="rect">
+            <a:avLst/>
+          </a:prstGeom>
+          <a:solidFill>
+            <a:srgbClr val="E8F0FA"/>
+          </a:solidFill>
+          <a:ln/>
+        </p:spPr>
+      </p:sp>
+      <p:sp>
+        <p:nvSpPr>
+          <p:cNvPr id="5" name="Shape 3"/>
+          <p:cNvSpPr/>
+          <p:nvPr/>
+        </p:nvSpPr>
+        <p:spPr>
+          <a:xfrm>
+            <a:off x="566928" y="1572768"/>
+            <a:ext cx="146304" cy="2240280"/>
+          </a:xfrm>
+          <a:prstGeom prst="rect">
+            <a:avLst/>
+          </a:prstGeom>
+          <a:solidFill>
+            <a:srgbClr val="3674C1"/>
+          </a:solidFill>
+          <a:ln/>
+        </p:spPr>
+      </p:sp>
+      <p:sp>
+        <p:nvSpPr>
+          <p:cNvPr id="6" name="Text 4"/>
+          <p:cNvSpPr/>
+          <p:nvPr/>
+        </p:nvSpPr>
+        <p:spPr>
+          <a:xfrm>
+            <a:off x="978408" y="1737360"/>
+            <a:ext cx="10232136" cy="365760"/>
           </a:xfrm>
           <a:prstGeom prst="rect">
             <a:avLst/>
@@ -21099,7 +21218,46 @@
               <a:buNone/>
             </a:pPr>
             <a:r>
-              <a:rPr lang="en-US" sz="4000" b="1" dirty="0">
+              <a:rPr lang="en-US" sz="1600" b="1" spc="150" kern="0" dirty="0">
+                <a:solidFill>
+                  <a:srgbClr val="3674C1"/>
+                </a:solidFill>
+                <a:latin typeface="Calibri" pitchFamily="34" charset="0"/>
+                <a:ea typeface="Calibri" pitchFamily="34" charset="-122"/>
+                <a:cs typeface="Calibri" pitchFamily="34" charset="-120"/>
+              </a:rPr>
+              <a:t>Sample data</a:t>
+            </a:r>
+            <a:endParaRPr lang="en-US" sz="1600" dirty="0"/>
+          </a:p>
+        </p:txBody>
+      </p:sp>
+      <p:sp>
+        <p:nvSpPr>
+          <p:cNvPr id="7" name="Text 5"/>
+          <p:cNvSpPr/>
+          <p:nvPr/>
+        </p:nvSpPr>
+        <p:spPr>
+          <a:xfrm>
+            <a:off x="978408" y="2103120"/>
+            <a:ext cx="10232136" cy="566928"/>
+          </a:xfrm>
+          <a:prstGeom prst="rect">
+            <a:avLst/>
+          </a:prstGeom>
+          <a:noFill/>
+          <a:ln/>
+        </p:spPr>
+        <p:txBody>
+          <a:bodyPr wrap="square" rtlCol="0" anchor="ctr"/>
+          <a:lstStyle/>
+          <a:p>
+            <a:pPr indent="0" marL="0">
+              <a:buNone/>
+            </a:pPr>
+            <a:r>
+              <a:rPr lang="en-US" sz="3200" b="1" dirty="0">
                 <a:solidFill>
                   <a:srgbClr val="1F4C86"/>
                 </a:solidFill>
@@ -21107,42 +21265,22 @@
                 <a:ea typeface="Trebuchet MS" pitchFamily="34" charset="-122"/>
                 <a:cs typeface="Trebuchet MS" pitchFamily="34" charset="-120"/>
               </a:rPr>
-              <a:t>Everything is here</a:t>
-            </a:r>
-            <a:endParaRPr lang="en-US" sz="4000" dirty="0"/>
-          </a:p>
-        </p:txBody>
-      </p:sp>
-      <p:sp>
-        <p:nvSpPr>
-          <p:cNvPr id="4" name="Shape 2"/>
-          <p:cNvSpPr/>
-          <p:nvPr/>
-        </p:nvSpPr>
-        <p:spPr>
-          <a:xfrm>
-            <a:off x="960120" y="1691640"/>
-            <a:ext cx="8686800" cy="713232"/>
-          </a:xfrm>
-          <a:prstGeom prst="rect">
-            <a:avLst/>
-          </a:prstGeom>
-          <a:solidFill>
-            <a:srgbClr val="E8F0FA"/>
-          </a:solidFill>
-          <a:ln/>
-        </p:spPr>
-      </p:sp>
-      <p:sp>
-        <p:nvSpPr>
-          <p:cNvPr id="5" name="Text 3"/>
-          <p:cNvSpPr/>
-          <p:nvPr/>
-        </p:nvSpPr>
-        <p:spPr>
-          <a:xfrm>
-            <a:off x="1188720" y="1691640"/>
-            <a:ext cx="8412480" cy="713232"/>
+              <a:t>Sara McArdle  ·  Zbigniew Mikulski</a:t>
+            </a:r>
+            <a:endParaRPr lang="en-US" sz="3200" dirty="0"/>
+          </a:p>
+        </p:txBody>
+      </p:sp>
+      <p:sp>
+        <p:nvSpPr>
+          <p:cNvPr id="8" name="Text 6"/>
+          <p:cNvSpPr/>
+          <p:nvPr/>
+        </p:nvSpPr>
+        <p:spPr>
+          <a:xfrm>
+            <a:off x="978408" y="2670048"/>
+            <a:ext cx="10232136" cy="384048"/>
           </a:xfrm>
           <a:prstGeom prst="rect">
             <a:avLst/>
@@ -21158,30 +21296,92 @@
               <a:buNone/>
             </a:pPr>
             <a:r>
-              <a:rPr lang="en-US" sz="2200" b="1" dirty="0">
-                <a:solidFill>
-                  <a:srgbClr val="1F4C86"/>
-                </a:solidFill>
-                <a:latin typeface="Calibri" pitchFamily="34" charset="0"/>
-                <a:ea typeface="Calibri" pitchFamily="34" charset="-122"/>
-                <a:cs typeface="Calibri" pitchFamily="34" charset="-120"/>
-              </a:rPr>
-              <a:t>michaelsnelson.github.io/BINA-I2K-2026-QuPath-Extensions</a:t>
-            </a:r>
-            <a:endParaRPr lang="en-US" sz="2200" dirty="0"/>
-          </a:p>
-        </p:txBody>
-      </p:sp>
-      <p:sp>
-        <p:nvSpPr>
-          <p:cNvPr id="6" name="Text 4"/>
-          <p:cNvSpPr/>
-          <p:nvPr/>
-        </p:nvSpPr>
-        <p:spPr>
-          <a:xfrm>
-            <a:off x="960120" y="2697480"/>
-            <a:ext cx="9811512" cy="2560320"/>
+              <a:rPr lang="en-US" sz="2100" dirty="0">
+                <a:solidFill>
+                  <a:srgbClr val="1F2933"/>
+                </a:solidFill>
+                <a:latin typeface="Calibri" pitchFamily="34" charset="0"/>
+                <a:ea typeface="Calibri" pitchFamily="34" charset="-122"/>
+                <a:cs typeface="Calibri" pitchFamily="34" charset="-120"/>
+              </a:rPr>
+              <a:t>La Jolla Institute for Immunology</a:t>
+            </a:r>
+            <a:endParaRPr lang="en-US" sz="2100" dirty="0"/>
+          </a:p>
+        </p:txBody>
+      </p:sp>
+      <p:sp>
+        <p:nvSpPr>
+          <p:cNvPr id="9" name="Text 7"/>
+          <p:cNvSpPr/>
+          <p:nvPr/>
+        </p:nvSpPr>
+        <p:spPr>
+          <a:xfrm>
+            <a:off x="978408" y="3054096"/>
+            <a:ext cx="10232136" cy="731520"/>
+          </a:xfrm>
+          <a:prstGeom prst="rect">
+            <a:avLst/>
+          </a:prstGeom>
+          <a:noFill/>
+          <a:ln/>
+        </p:spPr>
+        <p:txBody>
+          <a:bodyPr wrap="square" rtlCol="0" anchor="ctr"/>
+          <a:lstStyle/>
+          <a:p>
+            <a:pPr indent="0" marL="0">
+              <a:lnSpc>
+                <a:spcPct val="110000"/>
+              </a:lnSpc>
+              <a:buNone/>
+            </a:pPr>
+            <a:r>
+              <a:rPr lang="en-US" sz="1700" i="1" dirty="0">
+                <a:solidFill>
+                  <a:srgbClr val="5A6675"/>
+                </a:solidFill>
+                <a:latin typeface="Calibri" pitchFamily="34" charset="0"/>
+                <a:ea typeface="Calibri" pitchFamily="34" charset="-122"/>
+                <a:cs typeface="Calibri" pitchFamily="34" charset="-120"/>
+              </a:rPr>
+              <a:t>They provided the slide-label images behind the OCR and metadata exercises.</a:t>
+            </a:r>
+            <a:endParaRPr lang="en-US" sz="1700" dirty="0"/>
+          </a:p>
+          <a:p>
+            <a:pPr indent="0" marL="0">
+              <a:lnSpc>
+                <a:spcPct val="110000"/>
+              </a:lnSpc>
+              <a:buNone/>
+            </a:pPr>
+            <a:r>
+              <a:rPr lang="en-US" sz="1700" i="1" dirty="0">
+                <a:solidFill>
+                  <a:srgbClr val="5A6675"/>
+                </a:solidFill>
+                <a:latin typeface="Calibri" pitchFamily="34" charset="0"/>
+                <a:ea typeface="Calibri" pitchFamily="34" charset="-122"/>
+                <a:cs typeface="Calibri" pitchFamily="34" charset="-120"/>
+              </a:rPr>
+              <a:t>Other data today: public images, a CC0 synthetic set, and tiles acquired at LOCI.</a:t>
+            </a:r>
+            <a:endParaRPr lang="en-US" sz="1700" dirty="0"/>
+          </a:p>
+        </p:txBody>
+      </p:sp>
+      <p:sp>
+        <p:nvSpPr>
+          <p:cNvPr id="10" name="Text 8"/>
+          <p:cNvSpPr/>
+          <p:nvPr/>
+        </p:nvSpPr>
+        <p:spPr>
+          <a:xfrm>
+            <a:off x="566928" y="3977640"/>
+            <a:ext cx="11055096" cy="2103120"/>
           </a:xfrm>
           <a:prstGeom prst="rect">
             <a:avLst/>
@@ -21200,6 +21400,270 @@
               <a:buNone/>
             </a:pPr>
             <a:r>
+              <a:rPr lang="en-US" sz="1700" dirty="0">
+                <a:solidFill>
+                  <a:srgbClr val="1F2933"/>
+                </a:solidFill>
+                <a:latin typeface="Calibri" pitchFamily="34" charset="0"/>
+                <a:ea typeface="Calibri" pitchFamily="34" charset="-122"/>
+                <a:cs typeface="Calibri" pitchFamily="34" charset="-120"/>
+              </a:rPr>
+              <a:t>Sara McArdle also shaped the software directly — two of these extensions began as her Groovy scripts, and her FS2K course was the model for how the workshop pages are written.
+</a:t>
+            </a:r>
+            <a:pPr indent="0" marL="0">
+              <a:spcAft>
+                <a:spcPts val="1000"/>
+              </a:spcAft>
+              <a:buNone/>
+            </a:pPr>
+            <a:r>
+              <a:rPr lang="en-US" sz="1700" dirty="0">
+                <a:solidFill>
+                  <a:srgbClr val="1F2933"/>
+                </a:solidFill>
+                <a:latin typeface="Calibri" pitchFamily="34" charset="0"/>
+                <a:ea typeface="Calibri" pitchFamily="34" charset="-122"/>
+                <a:cs typeface="Calibri" pitchFamily="34" charset="-120"/>
+              </a:rPr>
+              <a:t>Kristin Gallick, whose concept and scripts the Confusion Matrix grew from.  ·  Pete Bankhead and the QuPath team.  ·  CT-FIRE, CurveAlign, TACS and TWOMBLI for the fibre work.  ·  CytoMAP and QuBaLab for bringing clustering into QuPath.  ·  QUAREP-LiMi for the reporting standards.  ·  The image.sc community, where several of these features were first requested.
+</a:t>
+            </a:r>
+            <a:pPr indent="0" marL="0">
+              <a:buNone/>
+            </a:pPr>
+            <a:r>
+              <a:rPr lang="en-US" sz="1700" b="1" dirty="0">
+                <a:solidFill>
+                  <a:srgbClr val="1F4C86"/>
+                </a:solidFill>
+                <a:latin typeface="Calibri" pitchFamily="34" charset="0"/>
+                <a:ea typeface="Calibri" pitchFamily="34" charset="-122"/>
+                <a:cs typeface="Calibri" pitchFamily="34" charset="-120"/>
+              </a:rPr>
+              <a:t>Full credits: michaelsnelson.github.io/BINA-I2K-2026-QuPath-Extensions/docs/acknowledgements.html</a:t>
+            </a:r>
+            <a:endParaRPr lang="en-US" sz="1700" dirty="0"/>
+          </a:p>
+        </p:txBody>
+      </p:sp>
+      <p:sp>
+        <p:nvSpPr>
+          <p:cNvPr id="11" name="Text 9"/>
+          <p:cNvSpPr/>
+          <p:nvPr/>
+        </p:nvSpPr>
+        <p:spPr>
+          <a:xfrm>
+            <a:off x="11274552" y="6291072"/>
+            <a:ext cx="457200" cy="310896"/>
+          </a:xfrm>
+          <a:prstGeom prst="rect">
+            <a:avLst/>
+          </a:prstGeom>
+          <a:noFill/>
+          <a:ln/>
+        </p:spPr>
+        <p:txBody>
+          <a:bodyPr wrap="square" rtlCol="0" anchor="ctr"/>
+          <a:lstStyle/>
+          <a:p>
+            <a:pPr algn="r" indent="0" marL="0">
+              <a:buNone/>
+            </a:pPr>
+            <a:r>
+              <a:rPr lang="en-US" sz="1400" dirty="0">
+                <a:solidFill>
+                  <a:srgbClr val="A8B2BF"/>
+                </a:solidFill>
+                <a:latin typeface="Calibri" pitchFamily="34" charset="0"/>
+                <a:ea typeface="Calibri" pitchFamily="34" charset="-122"/>
+                <a:cs typeface="Calibri" pitchFamily="34" charset="-120"/>
+              </a:rPr>
+              <a:t>53</a:t>
+            </a:r>
+            <a:endParaRPr lang="en-US" sz="1400" dirty="0"/>
+          </a:p>
+        </p:txBody>
+      </p:sp>
+    </p:spTree>
+  </p:cSld>
+  <p:clrMapOvr>
+    <a:masterClrMapping/>
+  </p:clrMapOvr>
+</p:sld>
+</file>
+
+<file path=ppt/slides/slide54.xml><?xml version="1.0" encoding="utf-8"?>
+<p:sld xmlns:a="http://schemas.openxmlformats.org/drawingml/2006/main" xmlns:r="http://schemas.openxmlformats.org/officeDocument/2006/relationships" xmlns:p="http://schemas.openxmlformats.org/presentationml/2006/main">
+  <p:cSld name="Slide 54">
+    <p:bg>
+      <p:bgPr>
+        <a:solidFill>
+          <a:srgbClr val="FFFFFF"/>
+        </a:solidFill>
+      </p:bgPr>
+    </p:bg>
+    <p:spTree>
+      <p:nvGrpSpPr>
+        <p:cNvPr id="1" name=""/>
+        <p:cNvGrpSpPr/>
+        <p:nvPr/>
+      </p:nvGrpSpPr>
+      <p:grpSpPr>
+        <a:xfrm>
+          <a:off x="0" y="0"/>
+          <a:ext cx="0" cy="0"/>
+          <a:chOff x="0" y="0"/>
+          <a:chExt cx="0" cy="0"/>
+        </a:xfrm>
+      </p:grpSpPr>
+      <p:sp>
+        <p:nvSpPr>
+          <p:cNvPr id="2" name="Shape 0"/>
+          <p:cNvSpPr/>
+          <p:nvPr/>
+        </p:nvSpPr>
+        <p:spPr>
+          <a:xfrm>
+            <a:off x="0" y="0"/>
+            <a:ext cx="274320" cy="6858000"/>
+          </a:xfrm>
+          <a:prstGeom prst="rect">
+            <a:avLst/>
+          </a:prstGeom>
+          <a:solidFill>
+            <a:srgbClr val="3674C1"/>
+          </a:solidFill>
+          <a:ln/>
+        </p:spPr>
+      </p:sp>
+      <p:sp>
+        <p:nvSpPr>
+          <p:cNvPr id="3" name="Text 1"/>
+          <p:cNvSpPr/>
+          <p:nvPr/>
+        </p:nvSpPr>
+        <p:spPr>
+          <a:xfrm>
+            <a:off x="960120" y="777240"/>
+            <a:ext cx="10268712" cy="822960"/>
+          </a:xfrm>
+          <a:prstGeom prst="rect">
+            <a:avLst/>
+          </a:prstGeom>
+          <a:noFill/>
+          <a:ln/>
+        </p:spPr>
+        <p:txBody>
+          <a:bodyPr wrap="square" rtlCol="0" anchor="ctr"/>
+          <a:lstStyle/>
+          <a:p>
+            <a:pPr indent="0" marL="0">
+              <a:buNone/>
+            </a:pPr>
+            <a:r>
+              <a:rPr lang="en-US" sz="4000" b="1" dirty="0">
+                <a:solidFill>
+                  <a:srgbClr val="1F4C86"/>
+                </a:solidFill>
+                <a:latin typeface="Trebuchet MS" pitchFamily="34" charset="0"/>
+                <a:ea typeface="Trebuchet MS" pitchFamily="34" charset="-122"/>
+                <a:cs typeface="Trebuchet MS" pitchFamily="34" charset="-120"/>
+              </a:rPr>
+              <a:t>Everything is here</a:t>
+            </a:r>
+            <a:endParaRPr lang="en-US" sz="4000" dirty="0"/>
+          </a:p>
+        </p:txBody>
+      </p:sp>
+      <p:sp>
+        <p:nvSpPr>
+          <p:cNvPr id="4" name="Shape 2"/>
+          <p:cNvSpPr/>
+          <p:nvPr/>
+        </p:nvSpPr>
+        <p:spPr>
+          <a:xfrm>
+            <a:off x="960120" y="1691640"/>
+            <a:ext cx="8686800" cy="713232"/>
+          </a:xfrm>
+          <a:prstGeom prst="rect">
+            <a:avLst/>
+          </a:prstGeom>
+          <a:solidFill>
+            <a:srgbClr val="E8F0FA"/>
+          </a:solidFill>
+          <a:ln/>
+        </p:spPr>
+      </p:sp>
+      <p:sp>
+        <p:nvSpPr>
+          <p:cNvPr id="5" name="Text 3"/>
+          <p:cNvSpPr/>
+          <p:nvPr/>
+        </p:nvSpPr>
+        <p:spPr>
+          <a:xfrm>
+            <a:off x="1188720" y="1691640"/>
+            <a:ext cx="8412480" cy="713232"/>
+          </a:xfrm>
+          <a:prstGeom prst="rect">
+            <a:avLst/>
+          </a:prstGeom>
+          <a:noFill/>
+          <a:ln/>
+        </p:spPr>
+        <p:txBody>
+          <a:bodyPr wrap="square" rtlCol="0" anchor="ctr"/>
+          <a:lstStyle/>
+          <a:p>
+            <a:pPr indent="0" marL="0">
+              <a:buNone/>
+            </a:pPr>
+            <a:r>
+              <a:rPr lang="en-US" sz="2200" b="1" dirty="0">
+                <a:solidFill>
+                  <a:srgbClr val="1F4C86"/>
+                </a:solidFill>
+                <a:latin typeface="Calibri" pitchFamily="34" charset="0"/>
+                <a:ea typeface="Calibri" pitchFamily="34" charset="-122"/>
+                <a:cs typeface="Calibri" pitchFamily="34" charset="-120"/>
+              </a:rPr>
+              <a:t>michaelsnelson.github.io/BINA-I2K-2026-QuPath-Extensions</a:t>
+            </a:r>
+            <a:endParaRPr lang="en-US" sz="2200" dirty="0"/>
+          </a:p>
+        </p:txBody>
+      </p:sp>
+      <p:sp>
+        <p:nvSpPr>
+          <p:cNvPr id="6" name="Text 4"/>
+          <p:cNvSpPr/>
+          <p:nvPr/>
+        </p:nvSpPr>
+        <p:spPr>
+          <a:xfrm>
+            <a:off x="960120" y="2697480"/>
+            <a:ext cx="9811512" cy="2560320"/>
+          </a:xfrm>
+          <a:prstGeom prst="rect">
+            <a:avLst/>
+          </a:prstGeom>
+          <a:noFill/>
+          <a:ln/>
+        </p:spPr>
+        <p:txBody>
+          <a:bodyPr wrap="square" rtlCol="0" anchor="t"/>
+          <a:lstStyle/>
+          <a:p>
+            <a:pPr indent="0" marL="0">
+              <a:spcAft>
+                <a:spcPts val="1000"/>
+              </a:spcAft>
+              <a:buNone/>
+            </a:pPr>
+            <a:r>
               <a:rPr lang="en-US" sz="1900" dirty="0">
                 <a:solidFill>
                   <a:srgbClr val="1F2933"/>
@@ -21394,7 +21858,7 @@
                 <a:ea typeface="Calibri" pitchFamily="34" charset="-122"/>
                 <a:cs typeface="Calibri" pitchFamily="34" charset="-120"/>
               </a:rPr>
-              <a:t>53</a:t>
+              <a:t>54</a:t>
             </a:r>
             <a:endParaRPr lang="en-US" sz="1400" dirty="0"/>
           </a:p>

--- a/I2K_2026_QuPath_Extensions.pptx
+++ b/I2K_2026_QuPath_Extensions.pptx
@@ -14194,7 +14194,7 @@
                 <a:ea typeface="Calibri" pitchFamily="34" charset="-122"/>
                 <a:cs typeface="Calibri" pitchFamily="34" charset="-120"/>
               </a:rPr>
-              <a:t>Flagged images usually mean a staining or scanning problem, not a classifier problem</a:t>
+              <a:t>A flagged image points at the ground truth, the staining, or the classifier’s generalisation — the breakdown tells you which</a:t>
             </a:r>
             <a:endParaRPr lang="en-US" sz="2000" dirty="0"/>
           </a:p>
@@ -16761,7 +16761,7 @@
                 <a:ea typeface="Calibri" pitchFamily="34" charset="-122"/>
                 <a:cs typeface="Calibri" pitchFamily="34" charset="-120"/>
               </a:rPr>
-              <a:t>Separate tissue stays separate — no spatial graph edge ever crosses two TMA cores</a:t>
+              <a:t>Configure independent areas and no spatial graph edge crosses two TMA cores, so separate tissue stays separate</a:t>
             </a:r>
             <a:endParaRPr lang="en-US" sz="2000" dirty="0"/>
           </a:p>
@@ -19093,7 +19093,7 @@
                 <a:ea typeface="Calibri" pitchFamily="34" charset="-122"/>
                 <a:cs typeface="Calibri" pitchFamily="34" charset="-120"/>
               </a:rPr>
-              <a:t>Both tools are thin wrappers over other people’s science</a:t>
+              <a:t>Both tools implement other people’s methods — cite the methods, not just the tools</a:t>
             </a:r>
             <a:endParaRPr lang="en-US" sz="2000" dirty="0"/>
           </a:p>
@@ -19197,7 +19197,71 @@
       </p:sp>
       <p:sp>
         <p:nvSpPr>
-          <p:cNvPr id="5" name="Text 3"/>
+          <p:cNvPr id="5" name="Shape 3"/>
+          <p:cNvSpPr/>
+          <p:nvPr/>
+        </p:nvSpPr>
+        <p:spPr>
+          <a:xfrm>
+            <a:off x="566928" y="5650992"/>
+            <a:ext cx="11055096" cy="566928"/>
+          </a:xfrm>
+          <a:prstGeom prst="rect">
+            <a:avLst/>
+          </a:prstGeom>
+          <a:solidFill>
+            <a:srgbClr val="F4F8FD"/>
+          </a:solidFill>
+          <a:ln w="9525">
+            <a:solidFill>
+              <a:srgbClr val="3674C1"/>
+            </a:solidFill>
+            <a:prstDash val="solid"/>
+          </a:ln>
+        </p:spPr>
+      </p:sp>
+      <p:sp>
+        <p:nvSpPr>
+          <p:cNvPr id="6" name="Text 4"/>
+          <p:cNvSpPr/>
+          <p:nvPr/>
+        </p:nvSpPr>
+        <p:spPr>
+          <a:xfrm>
+            <a:off x="768096" y="5650992"/>
+            <a:ext cx="10652760" cy="566928"/>
+          </a:xfrm>
+          <a:prstGeom prst="rect">
+            <a:avLst/>
+          </a:prstGeom>
+          <a:noFill/>
+          <a:ln/>
+        </p:spPr>
+        <p:txBody>
+          <a:bodyPr wrap="square" rtlCol="0" anchor="ctr"/>
+          <a:lstStyle/>
+          <a:p>
+            <a:pPr indent="0" marL="0">
+              <a:buNone/>
+            </a:pPr>
+            <a:r>
+              <a:rPr lang="en-US" sz="1600" b="1" dirty="0">
+                <a:solidFill>
+                  <a:srgbClr val="1F4C86"/>
+                </a:solidFill>
+                <a:latin typeface="Calibri" pitchFamily="34" charset="0"/>
+                <a:ea typeface="Calibri" pitchFamily="34" charset="-122"/>
+                <a:cs typeface="Calibri" pitchFamily="34" charset="-120"/>
+              </a:rPr>
+              <a:t>Fiber Analysis re-implements TWOMBLI’s cheap metrics natively rather than bundling its FIJI plugins, so its fractal dimension and lacunarity diverge from TWOMBLI’s by roughly 20–40%. Do not compare them with published TWOMBLI numbers.</a:t>
+            </a:r>
+            <a:endParaRPr lang="en-US" sz="1600" dirty="0"/>
+          </a:p>
+        </p:txBody>
+      </p:sp>
+      <p:sp>
+        <p:nvSpPr>
+          <p:cNvPr id="7" name="Text 5"/>
           <p:cNvSpPr/>
           <p:nvPr/>
         </p:nvSpPr>

--- a/I2K_2026_QuPath_Extensions.pptx
+++ b/I2K_2026_QuPath_Extensions.pptx
@@ -49,9 +49,13 @@
     <p:sldId id="297" r:id="rId43"/>
     <p:sldId id="298" r:id="rId44"/>
     <p:sldId id="299" r:id="rId45"/>
+    <p:sldId id="300" r:id="rId46"/>
+    <p:sldId id="301" r:id="rId47"/>
+    <p:sldId id="302" r:id="rId48"/>
+    <p:sldId id="303" r:id="rId49"/>
   </p:sldIdLst>
   <p:notesMasterIdLst>
-    <p:notesMasterId r:id="rId46"/>
+    <p:notesMasterId r:id="rId50"/>
   </p:notesMasterIdLst>
   <p:sldSz cx="12192000" cy="6858000"/>
   <p:notesSz cx="6858000" cy="12192000"/>
@@ -3913,6 +3917,358 @@
             <a:fld id="{F7021451-1387-4CA6-816F-3879F97B5CBC}" type="slidenum">
               <a:rPr lang="en-US"/>
               <a:t>44</a:t>
+            </a:fld>
+            <a:endParaRPr lang="en-US"/>
+          </a:p>
+        </p:txBody>
+      </p:sp>
+    </p:spTree>
+    <p:extLst>
+      <p:ext uri="{BB962C8B-B14F-4D97-AF65-F5344CB8AC3E}">
+        <p14:creationId xmlns:p14="http://schemas.microsoft.com/office/powerpoint/2010/main" val="1024086991"/>
+      </p:ext>
+    </p:extLst>
+  </p:cSld>
+  <p:clrMapOvr>
+    <a:masterClrMapping/>
+  </p:clrMapOvr>
+</p:notes>
+</file>
+
+<file path=ppt/notesSlides/notesSlide45.xml><?xml version="1.0" encoding="utf-8"?>
+<p:notes xmlns:a="http://schemas.openxmlformats.org/drawingml/2006/main" xmlns:r="http://schemas.openxmlformats.org/officeDocument/2006/relationships" xmlns:p="http://schemas.openxmlformats.org/presentationml/2006/main">
+  <p:cSld>
+    <p:spTree>
+      <p:nvGrpSpPr>
+        <p:cNvPr id="1" name=""/>
+        <p:cNvGrpSpPr/>
+        <p:nvPr/>
+      </p:nvGrpSpPr>
+      <p:grpSpPr>
+        <a:xfrm>
+          <a:off x="0" y="0"/>
+          <a:ext cx="0" cy="0"/>
+          <a:chOff x="0" y="0"/>
+          <a:chExt cx="0" cy="0"/>
+        </a:xfrm>
+      </p:grpSpPr>
+      <p:sp>
+        <p:nvSpPr>
+          <p:cNvPr id="2" name="Slide Image Placeholder 1"/>
+          <p:cNvSpPr>
+            <a:spLocks noGrp="1" noRot="1" noChangeAspect="1"/>
+          </p:cNvSpPr>
+          <p:nvPr>
+            <p:ph type="sldImg"/>
+          </p:nvPr>
+        </p:nvSpPr>
+        <p:spPr/>
+      </p:sp>
+      <p:sp>
+        <p:nvSpPr>
+          <p:cNvPr id="3" name="Notes Placeholder 2"/>
+          <p:cNvSpPr>
+            <a:spLocks noGrp="1"/>
+          </p:cNvSpPr>
+          <p:nvPr>
+            <p:ph type="body" idx="1"/>
+          </p:nvPr>
+        </p:nvSpPr>
+        <p:spPr/>
+        <p:txBody>
+          <a:bodyPr/>
+          <a:lstStyle/>
+          <a:p>
+            <a:r>
+              <a:rPr lang="en-US" dirty="0"/>
+              <a:t/>
+            </a:r>
+            <a:endParaRPr lang="en-US" dirty="0"/>
+          </a:p>
+        </p:txBody>
+      </p:sp>
+      <p:sp>
+        <p:nvSpPr>
+          <p:cNvPr id="4" name="Slide Number Placeholder 3"/>
+          <p:cNvSpPr>
+            <a:spLocks noGrp="1"/>
+          </p:cNvSpPr>
+          <p:nvPr>
+            <p:ph type="sldNum" sz="quarter" idx="10"/>
+          </p:nvPr>
+        </p:nvSpPr>
+        <p:spPr/>
+        <p:txBody>
+          <a:bodyPr/>
+          <a:lstStyle/>
+          <a:p>
+            <a:fld id="{F7021451-1387-4CA6-816F-3879F97B5CBC}" type="slidenum">
+              <a:rPr lang="en-US"/>
+              <a:t>45</a:t>
+            </a:fld>
+            <a:endParaRPr lang="en-US"/>
+          </a:p>
+        </p:txBody>
+      </p:sp>
+    </p:spTree>
+    <p:extLst>
+      <p:ext uri="{BB962C8B-B14F-4D97-AF65-F5344CB8AC3E}">
+        <p14:creationId xmlns:p14="http://schemas.microsoft.com/office/powerpoint/2010/main" val="1024086991"/>
+      </p:ext>
+    </p:extLst>
+  </p:cSld>
+  <p:clrMapOvr>
+    <a:masterClrMapping/>
+  </p:clrMapOvr>
+</p:notes>
+</file>
+
+<file path=ppt/notesSlides/notesSlide46.xml><?xml version="1.0" encoding="utf-8"?>
+<p:notes xmlns:a="http://schemas.openxmlformats.org/drawingml/2006/main" xmlns:r="http://schemas.openxmlformats.org/officeDocument/2006/relationships" xmlns:p="http://schemas.openxmlformats.org/presentationml/2006/main">
+  <p:cSld>
+    <p:spTree>
+      <p:nvGrpSpPr>
+        <p:cNvPr id="1" name=""/>
+        <p:cNvGrpSpPr/>
+        <p:nvPr/>
+      </p:nvGrpSpPr>
+      <p:grpSpPr>
+        <a:xfrm>
+          <a:off x="0" y="0"/>
+          <a:ext cx="0" cy="0"/>
+          <a:chOff x="0" y="0"/>
+          <a:chExt cx="0" cy="0"/>
+        </a:xfrm>
+      </p:grpSpPr>
+      <p:sp>
+        <p:nvSpPr>
+          <p:cNvPr id="2" name="Slide Image Placeholder 1"/>
+          <p:cNvSpPr>
+            <a:spLocks noGrp="1" noRot="1" noChangeAspect="1"/>
+          </p:cNvSpPr>
+          <p:nvPr>
+            <p:ph type="sldImg"/>
+          </p:nvPr>
+        </p:nvSpPr>
+        <p:spPr/>
+      </p:sp>
+      <p:sp>
+        <p:nvSpPr>
+          <p:cNvPr id="3" name="Notes Placeholder 2"/>
+          <p:cNvSpPr>
+            <a:spLocks noGrp="1"/>
+          </p:cNvSpPr>
+          <p:nvPr>
+            <p:ph type="body" idx="1"/>
+          </p:nvPr>
+        </p:nvSpPr>
+        <p:spPr/>
+        <p:txBody>
+          <a:bodyPr/>
+          <a:lstStyle/>
+          <a:p>
+            <a:r>
+              <a:rPr lang="en-US" dirty="0"/>
+              <a:t/>
+            </a:r>
+            <a:endParaRPr lang="en-US" dirty="0"/>
+          </a:p>
+        </p:txBody>
+      </p:sp>
+      <p:sp>
+        <p:nvSpPr>
+          <p:cNvPr id="4" name="Slide Number Placeholder 3"/>
+          <p:cNvSpPr>
+            <a:spLocks noGrp="1"/>
+          </p:cNvSpPr>
+          <p:nvPr>
+            <p:ph type="sldNum" sz="quarter" idx="10"/>
+          </p:nvPr>
+        </p:nvSpPr>
+        <p:spPr/>
+        <p:txBody>
+          <a:bodyPr/>
+          <a:lstStyle/>
+          <a:p>
+            <a:fld id="{F7021451-1387-4CA6-816F-3879F97B5CBC}" type="slidenum">
+              <a:rPr lang="en-US"/>
+              <a:t>46</a:t>
+            </a:fld>
+            <a:endParaRPr lang="en-US"/>
+          </a:p>
+        </p:txBody>
+      </p:sp>
+    </p:spTree>
+    <p:extLst>
+      <p:ext uri="{BB962C8B-B14F-4D97-AF65-F5344CB8AC3E}">
+        <p14:creationId xmlns:p14="http://schemas.microsoft.com/office/powerpoint/2010/main" val="1024086991"/>
+      </p:ext>
+    </p:extLst>
+  </p:cSld>
+  <p:clrMapOvr>
+    <a:masterClrMapping/>
+  </p:clrMapOvr>
+</p:notes>
+</file>
+
+<file path=ppt/notesSlides/notesSlide47.xml><?xml version="1.0" encoding="utf-8"?>
+<p:notes xmlns:a="http://schemas.openxmlformats.org/drawingml/2006/main" xmlns:r="http://schemas.openxmlformats.org/officeDocument/2006/relationships" xmlns:p="http://schemas.openxmlformats.org/presentationml/2006/main">
+  <p:cSld>
+    <p:spTree>
+      <p:nvGrpSpPr>
+        <p:cNvPr id="1" name=""/>
+        <p:cNvGrpSpPr/>
+        <p:nvPr/>
+      </p:nvGrpSpPr>
+      <p:grpSpPr>
+        <a:xfrm>
+          <a:off x="0" y="0"/>
+          <a:ext cx="0" cy="0"/>
+          <a:chOff x="0" y="0"/>
+          <a:chExt cx="0" cy="0"/>
+        </a:xfrm>
+      </p:grpSpPr>
+      <p:sp>
+        <p:nvSpPr>
+          <p:cNvPr id="2" name="Slide Image Placeholder 1"/>
+          <p:cNvSpPr>
+            <a:spLocks noGrp="1" noRot="1" noChangeAspect="1"/>
+          </p:cNvSpPr>
+          <p:nvPr>
+            <p:ph type="sldImg"/>
+          </p:nvPr>
+        </p:nvSpPr>
+        <p:spPr/>
+      </p:sp>
+      <p:sp>
+        <p:nvSpPr>
+          <p:cNvPr id="3" name="Notes Placeholder 2"/>
+          <p:cNvSpPr>
+            <a:spLocks noGrp="1"/>
+          </p:cNvSpPr>
+          <p:nvPr>
+            <p:ph type="body" idx="1"/>
+          </p:nvPr>
+        </p:nvSpPr>
+        <p:spPr/>
+        <p:txBody>
+          <a:bodyPr/>
+          <a:lstStyle/>
+          <a:p>
+            <a:r>
+              <a:rPr lang="en-US" dirty="0"/>
+              <a:t/>
+            </a:r>
+            <a:endParaRPr lang="en-US" dirty="0"/>
+          </a:p>
+        </p:txBody>
+      </p:sp>
+      <p:sp>
+        <p:nvSpPr>
+          <p:cNvPr id="4" name="Slide Number Placeholder 3"/>
+          <p:cNvSpPr>
+            <a:spLocks noGrp="1"/>
+          </p:cNvSpPr>
+          <p:nvPr>
+            <p:ph type="sldNum" sz="quarter" idx="10"/>
+          </p:nvPr>
+        </p:nvSpPr>
+        <p:spPr/>
+        <p:txBody>
+          <a:bodyPr/>
+          <a:lstStyle/>
+          <a:p>
+            <a:fld id="{F7021451-1387-4CA6-816F-3879F97B5CBC}" type="slidenum">
+              <a:rPr lang="en-US"/>
+              <a:t>47</a:t>
+            </a:fld>
+            <a:endParaRPr lang="en-US"/>
+          </a:p>
+        </p:txBody>
+      </p:sp>
+    </p:spTree>
+    <p:extLst>
+      <p:ext uri="{BB962C8B-B14F-4D97-AF65-F5344CB8AC3E}">
+        <p14:creationId xmlns:p14="http://schemas.microsoft.com/office/powerpoint/2010/main" val="1024086991"/>
+      </p:ext>
+    </p:extLst>
+  </p:cSld>
+  <p:clrMapOvr>
+    <a:masterClrMapping/>
+  </p:clrMapOvr>
+</p:notes>
+</file>
+
+<file path=ppt/notesSlides/notesSlide48.xml><?xml version="1.0" encoding="utf-8"?>
+<p:notes xmlns:a="http://schemas.openxmlformats.org/drawingml/2006/main" xmlns:r="http://schemas.openxmlformats.org/officeDocument/2006/relationships" xmlns:p="http://schemas.openxmlformats.org/presentationml/2006/main">
+  <p:cSld>
+    <p:spTree>
+      <p:nvGrpSpPr>
+        <p:cNvPr id="1" name=""/>
+        <p:cNvGrpSpPr/>
+        <p:nvPr/>
+      </p:nvGrpSpPr>
+      <p:grpSpPr>
+        <a:xfrm>
+          <a:off x="0" y="0"/>
+          <a:ext cx="0" cy="0"/>
+          <a:chOff x="0" y="0"/>
+          <a:chExt cx="0" cy="0"/>
+        </a:xfrm>
+      </p:grpSpPr>
+      <p:sp>
+        <p:nvSpPr>
+          <p:cNvPr id="2" name="Slide Image Placeholder 1"/>
+          <p:cNvSpPr>
+            <a:spLocks noGrp="1" noRot="1" noChangeAspect="1"/>
+          </p:cNvSpPr>
+          <p:nvPr>
+            <p:ph type="sldImg"/>
+          </p:nvPr>
+        </p:nvSpPr>
+        <p:spPr/>
+      </p:sp>
+      <p:sp>
+        <p:nvSpPr>
+          <p:cNvPr id="3" name="Notes Placeholder 2"/>
+          <p:cNvSpPr>
+            <a:spLocks noGrp="1"/>
+          </p:cNvSpPr>
+          <p:nvPr>
+            <p:ph type="body" idx="1"/>
+          </p:nvPr>
+        </p:nvSpPr>
+        <p:spPr/>
+        <p:txBody>
+          <a:bodyPr/>
+          <a:lstStyle/>
+          <a:p>
+            <a:r>
+              <a:rPr lang="en-US" dirty="0"/>
+              <a:t/>
+            </a:r>
+            <a:endParaRPr lang="en-US" dirty="0"/>
+          </a:p>
+        </p:txBody>
+      </p:sp>
+      <p:sp>
+        <p:nvSpPr>
+          <p:cNvPr id="4" name="Slide Number Placeholder 3"/>
+          <p:cNvSpPr>
+            <a:spLocks noGrp="1"/>
+          </p:cNvSpPr>
+          <p:nvPr>
+            <p:ph type="sldNum" sz="quarter" idx="10"/>
+          </p:nvPr>
+        </p:nvSpPr>
+        <p:spPr/>
+        <p:txBody>
+          <a:bodyPr/>
+          <a:lstStyle/>
+          <a:p>
+            <a:fld id="{F7021451-1387-4CA6-816F-3879F97B5CBC}" type="slidenum">
+              <a:rPr lang="en-US"/>
+              <a:t>48</a:t>
             </a:fld>
             <a:endParaRPr lang="en-US"/>
           </a:p>
@@ -7742,7 +8098,7 @@
                 <a:ea typeface="Trebuchet MS" pitchFamily="34" charset="-122"/>
                 <a:cs typeface="Trebuchet MS" pitchFamily="34" charset="-120"/>
               </a:rPr>
-              <a:t>Tiles to Pyramid: stitching two tiles</a:t>
+              <a:t>Four captures, one field of view</a:t>
             </a:r>
             <a:endParaRPr lang="en-US" sz="3000" dirty="0"/>
           </a:p>
@@ -7768,48 +8124,9 @@
           <a:ln/>
         </p:spPr>
       </p:sp>
-      <p:sp>
-        <p:nvSpPr>
-          <p:cNvPr id="4" name="Text 2"/>
-          <p:cNvSpPr/>
-          <p:nvPr/>
-        </p:nvSpPr>
-        <p:spPr>
-          <a:xfrm>
-            <a:off x="566928" y="1225296"/>
-            <a:ext cx="11055096" cy="384048"/>
-          </a:xfrm>
-          <a:prstGeom prst="rect">
-            <a:avLst/>
-          </a:prstGeom>
-          <a:noFill/>
-          <a:ln/>
-        </p:spPr>
-        <p:txBody>
-          <a:bodyPr wrap="square" rtlCol="0" anchor="ctr"/>
-          <a:lstStyle/>
-          <a:p>
-            <a:pPr indent="0" marL="0">
-              <a:buNone/>
-            </a:pPr>
-            <a:r>
-              <a:rPr lang="en-US" sz="1700" b="1" dirty="0">
-                <a:solidFill>
-                  <a:srgbClr val="1F4C86"/>
-                </a:solidFill>
-                <a:latin typeface="Calibri" pitchFamily="34" charset="0"/>
-                <a:ea typeface="Calibri" pitchFamily="34" charset="-122"/>
-                <a:cs typeface="Calibri" pitchFamily="34" charset="-120"/>
-              </a:rPr>
-              <a:t>As acquired: neighbouring tiles share a strip of the same tissue (shaded)</a:t>
-            </a:r>
-            <a:endParaRPr lang="en-US" sz="1700" dirty="0"/>
-          </a:p>
-        </p:txBody>
-      </p:sp>
       <p:pic>
         <p:nvPicPr>
-          <p:cNvPr id="5" name="Image 0" descr="images/stitch_ppm_unstitched.jpg">    </p:cNvPr>
+          <p:cNvPr id="4" name="tile0" descr="images/tile_0.jpg">    </p:cNvPr>
           <p:cNvPicPr>
             <a:picLocks noChangeAspect="1"/>
           </p:cNvPicPr>
@@ -7823,56 +8140,17 @@
         </p:blipFill>
         <p:spPr>
           <a:xfrm>
-            <a:off x="566928" y="1645920"/>
-            <a:ext cx="10058400" cy="1894332"/>
+            <a:off x="3899916" y="1481328"/>
+            <a:ext cx="2057400" cy="2057400"/>
           </a:xfrm>
           <a:prstGeom prst="rect">
             <a:avLst/>
           </a:prstGeom>
         </p:spPr>
       </p:pic>
-      <p:sp>
-        <p:nvSpPr>
-          <p:cNvPr id="6" name="Text 3"/>
-          <p:cNvSpPr/>
-          <p:nvPr/>
-        </p:nvSpPr>
-        <p:spPr>
-          <a:xfrm>
-            <a:off x="566928" y="3631692"/>
-            <a:ext cx="11055096" cy="384048"/>
-          </a:xfrm>
-          <a:prstGeom prst="rect">
-            <a:avLst/>
-          </a:prstGeom>
-          <a:noFill/>
-          <a:ln/>
-        </p:spPr>
-        <p:txBody>
-          <a:bodyPr wrap="square" rtlCol="0" anchor="ctr"/>
-          <a:lstStyle/>
-          <a:p>
-            <a:pPr indent="0" marL="0">
-              <a:buNone/>
-            </a:pPr>
-            <a:r>
-              <a:rPr lang="en-US" sz="1700" b="1" dirty="0">
-                <a:solidFill>
-                  <a:srgbClr val="1F4C86"/>
-                </a:solidFill>
-                <a:latin typeface="Calibri" pitchFamily="34" charset="0"/>
-                <a:ea typeface="Calibri" pitchFamily="34" charset="-122"/>
-                <a:cs typeface="Calibri" pitchFamily="34" charset="-120"/>
-              </a:rPr>
-              <a:t>Stitched: the join is placed by matching the image content in that strip</a:t>
-            </a:r>
-            <a:endParaRPr lang="en-US" sz="1700" dirty="0"/>
-          </a:p>
-        </p:txBody>
-      </p:sp>
       <p:pic>
         <p:nvPicPr>
-          <p:cNvPr id="7" name="Image 1" descr="images/stitch_ppm_stitched.jpg">    </p:cNvPr>
+          <p:cNvPr id="5" name="tile1" descr="images/tile_1.jpg">    </p:cNvPr>
           <p:cNvPicPr>
             <a:picLocks noChangeAspect="1"/>
           </p:cNvPicPr>
@@ -7886,33 +8164,81 @@
         </p:blipFill>
         <p:spPr>
           <a:xfrm>
-            <a:off x="566928" y="4052316"/>
-            <a:ext cx="9273845" cy="1894332"/>
+            <a:off x="6231636" y="1481328"/>
+            <a:ext cx="2057400" cy="2057400"/>
           </a:xfrm>
           <a:prstGeom prst="rect">
             <a:avLst/>
           </a:prstGeom>
         </p:spPr>
       </p:pic>
-      <p:sp>
-        <p:nvSpPr>
-          <p:cNvPr id="8" name="Text 4"/>
-          <p:cNvSpPr/>
-          <p:nvPr/>
-        </p:nvSpPr>
-        <p:spPr>
-          <a:xfrm>
-            <a:off x="566928" y="5998464"/>
-            <a:ext cx="10140696" cy="512064"/>
-          </a:xfrm>
-          <a:prstGeom prst="rect">
-            <a:avLst/>
-          </a:prstGeom>
-          <a:noFill/>
-          <a:ln/>
-        </p:spPr>
-        <p:txBody>
-          <a:bodyPr wrap="square" rtlCol="0" anchor="ctr"/>
+      <p:pic>
+        <p:nvPicPr>
+          <p:cNvPr id="6" name="tile2" descr="images/tile_2.jpg">    </p:cNvPr>
+          <p:cNvPicPr>
+            <a:picLocks noChangeAspect="1"/>
+          </p:cNvPicPr>
+          <p:nvPr/>
+        </p:nvPicPr>
+        <p:blipFill>
+          <a:blip r:embed="rId3"/>
+          <a:stretch>
+            <a:fillRect/>
+          </a:stretch>
+        </p:blipFill>
+        <p:spPr>
+          <a:xfrm>
+            <a:off x="6231636" y="3813048"/>
+            <a:ext cx="2057400" cy="2057400"/>
+          </a:xfrm>
+          <a:prstGeom prst="rect">
+            <a:avLst/>
+          </a:prstGeom>
+        </p:spPr>
+      </p:pic>
+      <p:pic>
+        <p:nvPicPr>
+          <p:cNvPr id="7" name="tile3" descr="images/tile_3.jpg">    </p:cNvPr>
+          <p:cNvPicPr>
+            <a:picLocks noChangeAspect="1"/>
+          </p:cNvPicPr>
+          <p:nvPr/>
+        </p:nvPicPr>
+        <p:blipFill>
+          <a:blip r:embed="rId4"/>
+          <a:stretch>
+            <a:fillRect/>
+          </a:stretch>
+        </p:blipFill>
+        <p:spPr>
+          <a:xfrm>
+            <a:off x="3899916" y="3813048"/>
+            <a:ext cx="2057400" cy="2057400"/>
+          </a:xfrm>
+          <a:prstGeom prst="rect">
+            <a:avLst/>
+          </a:prstGeom>
+        </p:spPr>
+      </p:pic>
+      <p:sp>
+        <p:nvSpPr>
+          <p:cNvPr id="8" name="Text 2"/>
+          <p:cNvSpPr/>
+          <p:nvPr/>
+        </p:nvSpPr>
+        <p:spPr>
+          <a:xfrm>
+            <a:off x="566928" y="5925312"/>
+            <a:ext cx="11055096" cy="566928"/>
+          </a:xfrm>
+          <a:prstGeom prst="rect">
+            <a:avLst/>
+          </a:prstGeom>
+          <a:noFill/>
+          <a:ln/>
+        </p:spPr>
+        <p:txBody>
+          <a:bodyPr wrap="square" rtlCol="0" anchor="t"/>
           <a:lstStyle/>
           <a:p>
             <a:pPr indent="0" marL="0">
@@ -7927,7 +8253,7 @@
                 <a:ea typeface="Calibri" pitchFamily="34" charset="-122"/>
                 <a:cs typeface="Calibri" pitchFamily="34" charset="-120"/>
               </a:rPr>
-              <a:t>Pancreatic cancer, polarised light. The stage recorded this tile about 5 px (0.9 µm) away from where it really was — the worst of 17 seams in this grid, which ran to a 2.2 px median. Registration measured that from the overlap and closed every seam to under a pixel. It is a tick-box: left off, tiles go where the stage said.</a:t>
+              <a:t>Each tile is a separate exposure. The stage moved between them, and every neighbouring pair was told to share about 10% of its width so there is common tissue to match on.</a:t>
             </a:r>
             <a:endParaRPr lang="en-US" sz="1500" dirty="0"/>
           </a:p>
@@ -7935,7 +8261,7 @@
       </p:sp>
       <p:sp>
         <p:nvSpPr>
-          <p:cNvPr id="9" name="Text 5"/>
+          <p:cNvPr id="9" name="Text 3"/>
           <p:cNvSpPr/>
           <p:nvPr/>
         </p:nvSpPr>
@@ -8037,7 +8363,7 @@
                 <a:ea typeface="Trebuchet MS" pitchFamily="34" charset="-122"/>
                 <a:cs typeface="Trebuchet MS" pitchFamily="34" charset="-120"/>
               </a:rPr>
-              <a:t>Measure on the clearest channel, reuse on the rest</a:t>
+              <a:t>Where the stage said they were</a:t>
             </a:r>
             <a:endParaRPr lang="en-US" sz="3000" dirty="0"/>
           </a:p>
@@ -8063,48 +8389,9 @@
           <a:ln/>
         </p:spPr>
       </p:sp>
-      <p:sp>
-        <p:nvSpPr>
-          <p:cNvPr id="4" name="Text 2"/>
-          <p:cNvSpPr/>
-          <p:nvPr/>
-        </p:nvSpPr>
-        <p:spPr>
-          <a:xfrm>
-            <a:off x="768096" y="1316736"/>
-            <a:ext cx="5120640" cy="402336"/>
-          </a:xfrm>
-          <a:prstGeom prst="rect">
-            <a:avLst/>
-          </a:prstGeom>
-          <a:noFill/>
-          <a:ln/>
-        </p:spPr>
-        <p:txBody>
-          <a:bodyPr wrap="square" rtlCol="0" anchor="ctr"/>
-          <a:lstStyle/>
-          <a:p>
-            <a:pPr indent="0" marL="0">
-              <a:buNone/>
-            </a:pPr>
-            <a:r>
-              <a:rPr lang="en-US" sz="1700" b="1" dirty="0">
-                <a:solidFill>
-                  <a:srgbClr val="1F4C86"/>
-                </a:solidFill>
-                <a:latin typeface="Calibri" pitchFamily="34" charset="0"/>
-                <a:ea typeface="Calibri" pitchFamily="34" charset="-122"/>
-                <a:cs typeface="Calibri" pitchFamily="34" charset="-120"/>
-              </a:rPr>
-              <a:t>Placed where the stage said it was</a:t>
-            </a:r>
-            <a:endParaRPr lang="en-US" sz="1700" dirty="0"/>
-          </a:p>
-        </p:txBody>
-      </p:sp>
       <p:pic>
         <p:nvPicPr>
-          <p:cNvPr id="5" name="Image 0" descr="images/stitch_if_nominal.jpg">    </p:cNvPr>
+          <p:cNvPr id="4" name="tile0" descr="images/tile_0.jpg">    </p:cNvPr>
           <p:cNvPicPr>
             <a:picLocks noChangeAspect="1"/>
           </p:cNvPicPr>
@@ -8118,8 +8405,8 @@
         </p:blipFill>
         <p:spPr>
           <a:xfrm>
-            <a:off x="768096" y="1783080"/>
-            <a:ext cx="5120640" cy="4118776"/>
+            <a:off x="4140046" y="1481328"/>
+            <a:ext cx="2057400" cy="2057400"/>
           </a:xfrm>
           <a:prstGeom prst="rect">
             <a:avLst/>
@@ -8128,92 +8415,29 @@
       </p:pic>
       <p:sp>
         <p:nvSpPr>
-          <p:cNvPr id="6" name="Text 3"/>
-          <p:cNvSpPr/>
-          <p:nvPr/>
-        </p:nvSpPr>
-        <p:spPr>
-          <a:xfrm>
-            <a:off x="6300216" y="1316736"/>
-            <a:ext cx="5120640" cy="402336"/>
-          </a:xfrm>
-          <a:prstGeom prst="rect">
-            <a:avLst/>
-          </a:prstGeom>
-          <a:noFill/>
-          <a:ln/>
-        </p:spPr>
-        <p:txBody>
-          <a:bodyPr wrap="square" rtlCol="0" anchor="ctr"/>
+          <p:cNvPr id="5" name="Text 2"/>
+          <p:cNvSpPr/>
+          <p:nvPr/>
+        </p:nvSpPr>
+        <p:spPr>
+          <a:xfrm>
+            <a:off x="566928" y="5925312"/>
+            <a:ext cx="11055096" cy="566928"/>
+          </a:xfrm>
+          <a:prstGeom prst="rect">
+            <a:avLst/>
+          </a:prstGeom>
+          <a:noFill/>
+          <a:ln/>
+        </p:spPr>
+        <p:txBody>
+          <a:bodyPr wrap="square" rtlCol="0" anchor="t"/>
           <a:lstStyle/>
           <a:p>
             <a:pPr indent="0" marL="0">
               <a:buNone/>
             </a:pPr>
             <a:r>
-              <a:rPr lang="en-US" sz="1700" b="1" dirty="0">
-                <a:solidFill>
-                  <a:srgbClr val="1F4C86"/>
-                </a:solidFill>
-                <a:latin typeface="Calibri" pitchFamily="34" charset="0"/>
-                <a:ea typeface="Calibri" pitchFamily="34" charset="-122"/>
-                <a:cs typeface="Calibri" pitchFamily="34" charset="-120"/>
-              </a:rPr>
-              <a:t>Placed where the image content says it is</a:t>
-            </a:r>
-            <a:endParaRPr lang="en-US" sz="1700" dirty="0"/>
-          </a:p>
-        </p:txBody>
-      </p:sp>
-      <p:pic>
-        <p:nvPicPr>
-          <p:cNvPr id="7" name="Image 1" descr="images/stitch_if_registered.jpg">    </p:cNvPr>
-          <p:cNvPicPr>
-            <a:picLocks noChangeAspect="1"/>
-          </p:cNvPicPr>
-          <p:nvPr/>
-        </p:nvPicPr>
-        <p:blipFill>
-          <a:blip r:embed="rId2"/>
-          <a:stretch>
-            <a:fillRect/>
-          </a:stretch>
-        </p:blipFill>
-        <p:spPr>
-          <a:xfrm>
-            <a:off x="6300216" y="1783080"/>
-            <a:ext cx="5120640" cy="4118776"/>
-          </a:xfrm>
-          <a:prstGeom prst="rect">
-            <a:avLst/>
-          </a:prstGeom>
-        </p:spPr>
-      </p:pic>
-      <p:sp>
-        <p:nvSpPr>
-          <p:cNvPr id="8" name="Text 4"/>
-          <p:cNvSpPr/>
-          <p:nvPr/>
-        </p:nvSpPr>
-        <p:spPr>
-          <a:xfrm>
-            <a:off x="566928" y="6011584"/>
-            <a:ext cx="11055096" cy="566928"/>
-          </a:xfrm>
-          <a:prstGeom prst="rect">
-            <a:avLst/>
-          </a:prstGeom>
-          <a:noFill/>
-          <a:ln/>
-        </p:spPr>
-        <p:txBody>
-          <a:bodyPr wrap="square" rtlCol="0" anchor="t"/>
-          <a:lstStyle/>
-          <a:p>
-            <a:pPr indent="0" marL="0">
-              <a:buNone/>
-            </a:pPr>
-            <a:r>
               <a:rPr lang="en-US" sz="1500" i="1" dirty="0">
                 <a:solidFill>
                   <a:srgbClr val="5A6675"/>
@@ -8222,7 +8446,7 @@
                 <a:ea typeface="Calibri" pitchFamily="34" charset="-122"/>
                 <a:cs typeface="Calibri" pitchFamily="34" charset="-120"/>
               </a:rPr>
-              <a:t>The same join through the same cells; only the tile positions differ. Positions were measured on DAPI, the channel with the most distinct, best separated structure, and reused unchanged for the other two channels — so every channel stays aligned with every other. Nuclei blue, actin green, mitochondria red; the correction here is 7 px, about 4.6 µm.</a:t>
+              <a:t>The first tile lands at the position the stage reported.</a:t>
             </a:r>
             <a:endParaRPr lang="en-US" sz="1500" dirty="0"/>
           </a:p>
@@ -8230,7 +8454,7 @@
       </p:sp>
       <p:sp>
         <p:nvSpPr>
-          <p:cNvPr id="9" name="Text 5"/>
+          <p:cNvPr id="6" name="Text 3"/>
           <p:cNvSpPr/>
           <p:nvPr/>
         </p:nvSpPr>
@@ -8774,7 +8998,7 @@
                 <a:ea typeface="Trebuchet MS" pitchFamily="34" charset="-122"/>
                 <a:cs typeface="Trebuchet MS" pitchFamily="34" charset="-120"/>
               </a:rPr>
-              <a:t>Tiles to Pyramid — how the mosaic is assembled</a:t>
+              <a:t>Where the stage said they were</a:t>
             </a:r>
             <a:endParaRPr lang="en-US" sz="3000" dirty="0"/>
           </a:p>
@@ -8800,32 +9024,80 @@
           <a:ln/>
         </p:spPr>
       </p:sp>
-      <p:sp>
-        <p:nvSpPr>
-          <p:cNvPr id="4" name="Text 2"/>
-          <p:cNvSpPr/>
-          <p:nvPr/>
-        </p:nvSpPr>
-        <p:spPr>
-          <a:xfrm>
-            <a:off x="566928" y="1243584"/>
-            <a:ext cx="11055096" cy="384048"/>
-          </a:xfrm>
-          <a:prstGeom prst="rect">
-            <a:avLst/>
-          </a:prstGeom>
-          <a:noFill/>
-          <a:ln/>
-        </p:spPr>
-        <p:txBody>
-          <a:bodyPr wrap="square" rtlCol="0" anchor="ctr"/>
+      <p:pic>
+        <p:nvPicPr>
+          <p:cNvPr id="4" name="tile0" descr="images/tile_0.jpg">    </p:cNvPr>
+          <p:cNvPicPr>
+            <a:picLocks noChangeAspect="1"/>
+          </p:cNvPicPr>
+          <p:nvPr/>
+        </p:nvPicPr>
+        <p:blipFill>
+          <a:blip r:embed="rId1"/>
+          <a:stretch>
+            <a:fillRect/>
+          </a:stretch>
+        </p:blipFill>
+        <p:spPr>
+          <a:xfrm>
+            <a:off x="4140046" y="1481328"/>
+            <a:ext cx="2057400" cy="2057400"/>
+          </a:xfrm>
+          <a:prstGeom prst="rect">
+            <a:avLst/>
+          </a:prstGeom>
+        </p:spPr>
+      </p:pic>
+      <p:pic>
+        <p:nvPicPr>
+          <p:cNvPr id="5" name="tile1" descr="images/tile_1.jpg">    </p:cNvPr>
+          <p:cNvPicPr>
+            <a:picLocks noChangeAspect="1"/>
+          </p:cNvPicPr>
+          <p:nvPr/>
+        </p:nvPicPr>
+        <p:blipFill>
+          <a:blip r:embed="rId2"/>
+          <a:stretch>
+            <a:fillRect/>
+          </a:stretch>
+        </p:blipFill>
+        <p:spPr>
+          <a:xfrm>
+            <a:off x="5991506" y="1481328"/>
+            <a:ext cx="2057400" cy="2057400"/>
+          </a:xfrm>
+          <a:prstGeom prst="rect">
+            <a:avLst/>
+          </a:prstGeom>
+        </p:spPr>
+      </p:pic>
+      <p:sp>
+        <p:nvSpPr>
+          <p:cNvPr id="6" name="Text 2"/>
+          <p:cNvSpPr/>
+          <p:nvPr/>
+        </p:nvSpPr>
+        <p:spPr>
+          <a:xfrm>
+            <a:off x="566928" y="5925312"/>
+            <a:ext cx="11055096" cy="566928"/>
+          </a:xfrm>
+          <a:prstGeom prst="rect">
+            <a:avLst/>
+          </a:prstGeom>
+          <a:noFill/>
+          <a:ln/>
+        </p:spPr>
+        <p:txBody>
+          <a:bodyPr wrap="square" rtlCol="0" anchor="t"/>
           <a:lstStyle/>
           <a:p>
             <a:pPr indent="0" marL="0">
               <a:buNone/>
             </a:pPr>
             <a:r>
-              <a:rPr lang="en-US" sz="1700" i="1" dirty="0">
+              <a:rPr lang="en-US" sz="1500" i="1" dirty="0">
                 <a:solidFill>
                   <a:srgbClr val="5A6675"/>
                 </a:solidFill>
@@ -8833,221 +9105,15 @@
                 <a:ea typeface="Calibri" pitchFamily="34" charset="-122"/>
                 <a:cs typeface="Calibri" pitchFamily="34" charset="-120"/>
               </a:rPr>
-              <a:t>Memory stops tracking the size of the mosaic, which is what lets thousands of tiles stitch on an ordinary machine.</a:t>
-            </a:r>
-            <a:endParaRPr lang="en-US" sz="1700" dirty="0"/>
-          </a:p>
-        </p:txBody>
-      </p:sp>
-      <p:sp>
-        <p:nvSpPr>
-          <p:cNvPr id="5" name="Text 3"/>
-          <p:cNvSpPr/>
-          <p:nvPr/>
-        </p:nvSpPr>
-        <p:spPr>
-          <a:xfrm>
-            <a:off x="640080" y="1755648"/>
-            <a:ext cx="10963656" cy="4279392"/>
-          </a:xfrm>
-          <a:prstGeom prst="rect">
-            <a:avLst/>
-          </a:prstGeom>
-          <a:noFill/>
-          <a:ln/>
-        </p:spPr>
-        <p:txBody>
-          <a:bodyPr wrap="square" rtlCol="0" anchor="t"/>
-          <a:lstStyle/>
-          <a:p>
-            <a:pPr marL="342900" indent="-342900">
-              <a:lnSpc>
-                <a:spcPct val="105000"/>
-              </a:lnSpc>
-              <a:spcAft>
-                <a:spcPts val="1200"/>
-              </a:spcAft>
-              <a:buSzPct val="100000"/>
-              <a:buChar char="•"/>
-            </a:pPr>
-            <a:r>
-              <a:rPr lang="en-US" sz="2000" dirty="0">
-                <a:solidFill>
-                  <a:srgbClr val="1F2933"/>
-                </a:solidFill>
-                <a:latin typeface="Calibri" pitchFamily="34" charset="0"/>
-                <a:ea typeface="Calibri" pitchFamily="34" charset="-122"/>
-                <a:cs typeface="Calibri" pitchFamily="34" charset="-120"/>
-              </a:rPr>
-              <a:t>Every overlapping pair is measured against the image content, then all tiles are placed at once by least squares</a:t>
-            </a:r>
-            <a:endParaRPr lang="en-US" sz="2000" dirty="0"/>
-          </a:p>
-          <a:p>
-            <a:pPr lvl="1" marL="685800" indent="-342900">
-              <a:lnSpc>
-                <a:spcPct val="105000"/>
-              </a:lnSpc>
-              <a:spcAft>
-                <a:spcPts val="800"/>
-              </a:spcAft>
-              <a:buSzPct val="100000"/>
-              <a:buChar char="▪"/>
-            </a:pPr>
-            <a:r>
-              <a:rPr lang="en-US" sz="1700" dirty="0">
-                <a:solidFill>
-                  <a:srgbClr val="5A6675"/>
-                </a:solidFill>
-                <a:latin typeface="Calibri" pitchFamily="34" charset="0"/>
-                <a:ea typeface="Calibri" pitchFamily="34" charset="-122"/>
-                <a:cs typeface="Calibri" pitchFamily="34" charset="-120"/>
-              </a:rPr>
-              <a:t>A spanning tree would keep 99 of the 180 neighbour edges on a 10×10 grid and throw away 81, so nothing is ever asked to close a loop</a:t>
-            </a:r>
-            <a:endParaRPr lang="en-US" sz="2000" dirty="0"/>
-          </a:p>
-          <a:p>
-            <a:pPr marL="342900" indent="-342900">
-              <a:lnSpc>
-                <a:spcPct val="105000"/>
-              </a:lnSpc>
-              <a:spcAft>
-                <a:spcPts val="1200"/>
-              </a:spcAft>
-              <a:buSzPct val="100000"/>
-              <a:buChar char="•"/>
-            </a:pPr>
-            <a:r>
-              <a:rPr lang="en-US" sz="2000" dirty="0">
-                <a:solidFill>
-                  <a:srgbClr val="1F2933"/>
-                </a:solidFill>
-                <a:latin typeface="Calibri" pitchFamily="34" charset="0"/>
-                <a:ea typeface="Calibri" pitchFamily="34" charset="-122"/>
-                <a:cs typeface="Calibri" pitchFamily="34" charset="-120"/>
-              </a:rPr>
-              <a:t>Each tile is also pulled toward its recorded stage position, so a tile with no accepted edges stays exactly where the stage put it</a:t>
-            </a:r>
-            <a:endParaRPr lang="en-US" sz="2000" dirty="0"/>
-          </a:p>
-          <a:p>
-            <a:pPr marL="342900" indent="-342900">
-              <a:lnSpc>
-                <a:spcPct val="105000"/>
-              </a:lnSpc>
-              <a:spcAft>
-                <a:spcPts val="1200"/>
-              </a:spcAft>
-              <a:buSzPct val="100000"/>
-              <a:buChar char="•"/>
-            </a:pPr>
-            <a:r>
-              <a:rPr lang="en-US" sz="2000" dirty="0">
-                <a:solidFill>
-                  <a:srgbClr val="1F2933"/>
-                </a:solidFill>
-                <a:latin typeface="Calibri" pitchFamily="34" charset="0"/>
-                <a:ea typeface="Calibri" pitchFamily="34" charset="-122"/>
-                <a:cs typeface="Calibri" pitchFamily="34" charset="-120"/>
-              </a:rPr>
-              <a:t>The output is written chunk by chunk, and only the one to four tiles overlapping the current chunk are ever in memory</a:t>
-            </a:r>
-            <a:endParaRPr lang="en-US" sz="2000" dirty="0"/>
-          </a:p>
-          <a:p>
-            <a:pPr marL="342900" indent="-342900">
-              <a:lnSpc>
-                <a:spcPct val="105000"/>
-              </a:lnSpc>
-              <a:spcAft>
-                <a:spcPts val="1200"/>
-              </a:spcAft>
-              <a:buSzPct val="100000"/>
-              <a:buChar char="•"/>
-            </a:pPr>
-            <a:r>
-              <a:rPr lang="en-US" sz="2000" dirty="0">
-                <a:solidFill>
-                  <a:srgbClr val="1F2933"/>
-                </a:solidFill>
-                <a:latin typeface="Calibri" pitchFamily="34" charset="0"/>
-                <a:ea typeface="Calibri" pitchFamily="34" charset="-122"/>
-                <a:cs typeface="Calibri" pitchFamily="34" charset="-120"/>
-              </a:rPr>
-              <a:t>Measured: 144 tiles (125 MP) stitch in the same 227 MB as 64 tiles (56 MP)</a:t>
-            </a:r>
-            <a:endParaRPr lang="en-US" sz="2000" dirty="0"/>
-          </a:p>
-        </p:txBody>
-      </p:sp>
-      <p:sp>
-        <p:nvSpPr>
-          <p:cNvPr id="6" name="Shape 4"/>
-          <p:cNvSpPr/>
-          <p:nvPr/>
-        </p:nvSpPr>
-        <p:spPr>
-          <a:xfrm>
-            <a:off x="566928" y="5650992"/>
-            <a:ext cx="11055096" cy="566928"/>
-          </a:xfrm>
-          <a:prstGeom prst="rect">
-            <a:avLst/>
-          </a:prstGeom>
-          <a:solidFill>
-            <a:srgbClr val="F4F8FD"/>
-          </a:solidFill>
-          <a:ln w="9525">
-            <a:solidFill>
-              <a:srgbClr val="3674C1"/>
-            </a:solidFill>
-            <a:prstDash val="solid"/>
-          </a:ln>
-        </p:spPr>
-      </p:sp>
-      <p:sp>
-        <p:nvSpPr>
-          <p:cNvPr id="7" name="Text 5"/>
-          <p:cNvSpPr/>
-          <p:nvPr/>
-        </p:nvSpPr>
-        <p:spPr>
-          <a:xfrm>
-            <a:off x="768096" y="5650992"/>
-            <a:ext cx="10652760" cy="566928"/>
-          </a:xfrm>
-          <a:prstGeom prst="rect">
-            <a:avLst/>
-          </a:prstGeom>
-          <a:noFill/>
-          <a:ln/>
-        </p:spPr>
-        <p:txBody>
-          <a:bodyPr wrap="square" rtlCol="0" anchor="ctr"/>
-          <a:lstStyle/>
-          <a:p>
-            <a:pPr indent="0" marL="0">
-              <a:buNone/>
-            </a:pPr>
-            <a:r>
-              <a:rPr lang="en-US" sz="1600" b="1" dirty="0">
-                <a:solidFill>
-                  <a:srgbClr val="1F4C86"/>
-                </a:solidFill>
-                <a:latin typeface="Calibri" pitchFamily="34" charset="0"/>
-                <a:ea typeface="Calibri" pitchFamily="34" charset="-122"/>
-                <a:cs typeface="Calibri" pitchFamily="34" charset="-120"/>
-              </a:rPr>
-              <a:t>Measured with the extension’s own benchmark: 1024 px 16-bit tiles, 10% overlap. The older load-everything path needed 2–4 GB and ran out of memory past about 1600 tiles.</a:t>
-            </a:r>
-            <a:endParaRPr lang="en-US" sz="1600" dirty="0"/>
-          </a:p>
-        </p:txBody>
-      </p:sp>
-      <p:sp>
-        <p:nvSpPr>
-          <p:cNvPr id="8" name="Text 6"/>
+              <a:t>The second overlaps the first. That shared strip is the only evidence available for whether the stage was right.</a:t>
+            </a:r>
+            <a:endParaRPr lang="en-US" sz="1500" dirty="0"/>
+          </a:p>
+        </p:txBody>
+      </p:sp>
+      <p:sp>
+        <p:nvSpPr>
+          <p:cNvPr id="7" name="Text 3"/>
           <p:cNvSpPr/>
           <p:nvPr/>
         </p:nvSpPr>
@@ -9118,23 +9184,42 @@
       </p:grpSpPr>
       <p:sp>
         <p:nvSpPr>
-          <p:cNvPr id="2" name="Shape 0"/>
-          <p:cNvSpPr/>
-          <p:nvPr/>
-        </p:nvSpPr>
-        <p:spPr>
-          <a:xfrm>
-            <a:off x="0" y="1417320"/>
-            <a:ext cx="12188952" cy="3108960"/>
-          </a:xfrm>
-          <a:prstGeom prst="rect">
-            <a:avLst/>
-          </a:prstGeom>
-          <a:solidFill>
-            <a:srgbClr val="E8F0FA"/>
-          </a:solidFill>
-          <a:ln/>
-        </p:spPr>
+          <p:cNvPr id="2" name="Text 0"/>
+          <p:cNvSpPr/>
+          <p:nvPr/>
+        </p:nvSpPr>
+        <p:spPr>
+          <a:xfrm>
+            <a:off x="566928" y="384048"/>
+            <a:ext cx="11055096" cy="658368"/>
+          </a:xfrm>
+          <a:prstGeom prst="rect">
+            <a:avLst/>
+          </a:prstGeom>
+          <a:noFill/>
+          <a:ln/>
+        </p:spPr>
+        <p:txBody>
+          <a:bodyPr wrap="square" rtlCol="0" anchor="ctr"/>
+          <a:lstStyle/>
+          <a:p>
+            <a:pPr indent="0" marL="0">
+              <a:buNone/>
+            </a:pPr>
+            <a:r>
+              <a:rPr lang="en-US" sz="3000" b="1" dirty="0">
+                <a:solidFill>
+                  <a:srgbClr val="1F4C86"/>
+                </a:solidFill>
+                <a:latin typeface="Trebuchet MS" pitchFamily="34" charset="0"/>
+                <a:ea typeface="Trebuchet MS" pitchFamily="34" charset="-122"/>
+                <a:cs typeface="Trebuchet MS" pitchFamily="34" charset="-120"/>
+              </a:rPr>
+              <a:t>Where the stage said they were</a:t>
+            </a:r>
+            <a:endParaRPr lang="en-US" sz="3000" dirty="0"/>
+          </a:p>
+        </p:txBody>
       </p:sp>
       <p:sp>
         <p:nvSpPr>
@@ -9144,8 +9229,8 @@
         </p:nvSpPr>
         <p:spPr>
           <a:xfrm>
-            <a:off x="0" y="1417320"/>
-            <a:ext cx="201168" cy="3108960"/>
+            <a:off x="566928" y="1097280"/>
+            <a:ext cx="1920240" cy="50292"/>
           </a:xfrm>
           <a:prstGeom prst="rect">
             <a:avLst/>
@@ -9158,108 +9243,170 @@
       </p:sp>
       <p:sp>
         <p:nvSpPr>
-          <p:cNvPr id="4" name="Text 2"/>
-          <p:cNvSpPr/>
-          <p:nvPr/>
-        </p:nvSpPr>
-        <p:spPr>
-          <a:xfrm>
-            <a:off x="566928" y="1691640"/>
-            <a:ext cx="1828800" cy="914400"/>
-          </a:xfrm>
-          <a:prstGeom prst="rect">
-            <a:avLst/>
-          </a:prstGeom>
-          <a:noFill/>
-          <a:ln/>
-        </p:spPr>
-        <p:txBody>
-          <a:bodyPr wrap="square" rtlCol="0" anchor="ctr"/>
+          <p:cNvPr id="4" name="Shape 2"/>
+          <p:cNvSpPr/>
+          <p:nvPr/>
+        </p:nvSpPr>
+        <p:spPr>
+          <a:xfrm>
+            <a:off x="5991506" y="1481328"/>
+            <a:ext cx="205941" cy="3908859"/>
+          </a:xfrm>
+          <a:prstGeom prst="rect">
+            <a:avLst/>
+          </a:prstGeom>
+          <a:solidFill>
+            <a:srgbClr val="3674C1">
+              <a:alpha val="38000"/>
+            </a:srgbClr>
+          </a:solidFill>
+          <a:ln/>
+        </p:spPr>
+      </p:sp>
+      <p:sp>
+        <p:nvSpPr>
+          <p:cNvPr id="5" name="Shape 3"/>
+          <p:cNvSpPr/>
+          <p:nvPr/>
+        </p:nvSpPr>
+        <p:spPr>
+          <a:xfrm>
+            <a:off x="4140046" y="3332787"/>
+            <a:ext cx="3908859" cy="205941"/>
+          </a:xfrm>
+          <a:prstGeom prst="rect">
+            <a:avLst/>
+          </a:prstGeom>
+          <a:solidFill>
+            <a:srgbClr val="3674C1">
+              <a:alpha val="38000"/>
+            </a:srgbClr>
+          </a:solidFill>
+          <a:ln/>
+        </p:spPr>
+      </p:sp>
+      <p:pic>
+        <p:nvPicPr>
+          <p:cNvPr id="6" name="tile0" descr="images/tile_0.jpg">    </p:cNvPr>
+          <p:cNvPicPr>
+            <a:picLocks noChangeAspect="1"/>
+          </p:cNvPicPr>
+          <p:nvPr/>
+        </p:nvPicPr>
+        <p:blipFill>
+          <a:blip r:embed="rId1"/>
+          <a:stretch>
+            <a:fillRect/>
+          </a:stretch>
+        </p:blipFill>
+        <p:spPr>
+          <a:xfrm>
+            <a:off x="4140046" y="1481328"/>
+            <a:ext cx="2057400" cy="2057400"/>
+          </a:xfrm>
+          <a:prstGeom prst="rect">
+            <a:avLst/>
+          </a:prstGeom>
+        </p:spPr>
+      </p:pic>
+      <p:pic>
+        <p:nvPicPr>
+          <p:cNvPr id="7" name="tile1" descr="images/tile_1.jpg">    </p:cNvPr>
+          <p:cNvPicPr>
+            <a:picLocks noChangeAspect="1"/>
+          </p:cNvPicPr>
+          <p:nvPr/>
+        </p:nvPicPr>
+        <p:blipFill>
+          <a:blip r:embed="rId2"/>
+          <a:stretch>
+            <a:fillRect/>
+          </a:stretch>
+        </p:blipFill>
+        <p:spPr>
+          <a:xfrm>
+            <a:off x="5991506" y="1481328"/>
+            <a:ext cx="2057400" cy="2057400"/>
+          </a:xfrm>
+          <a:prstGeom prst="rect">
+            <a:avLst/>
+          </a:prstGeom>
+        </p:spPr>
+      </p:pic>
+      <p:pic>
+        <p:nvPicPr>
+          <p:cNvPr id="8" name="tile2" descr="images/tile_2.jpg">    </p:cNvPr>
+          <p:cNvPicPr>
+            <a:picLocks noChangeAspect="1"/>
+          </p:cNvPicPr>
+          <p:nvPr/>
+        </p:nvPicPr>
+        <p:blipFill>
+          <a:blip r:embed="rId3"/>
+          <a:stretch>
+            <a:fillRect/>
+          </a:stretch>
+        </p:blipFill>
+        <p:spPr>
+          <a:xfrm>
+            <a:off x="5991506" y="3332787"/>
+            <a:ext cx="2057400" cy="2057400"/>
+          </a:xfrm>
+          <a:prstGeom prst="rect">
+            <a:avLst/>
+          </a:prstGeom>
+        </p:spPr>
+      </p:pic>
+      <p:pic>
+        <p:nvPicPr>
+          <p:cNvPr id="9" name="tile3" descr="images/tile_3.jpg">    </p:cNvPr>
+          <p:cNvPicPr>
+            <a:picLocks noChangeAspect="1"/>
+          </p:cNvPicPr>
+          <p:nvPr/>
+        </p:nvPicPr>
+        <p:blipFill>
+          <a:blip r:embed="rId4"/>
+          <a:stretch>
+            <a:fillRect/>
+          </a:stretch>
+        </p:blipFill>
+        <p:spPr>
+          <a:xfrm>
+            <a:off x="4140046" y="3332787"/>
+            <a:ext cx="2057400" cy="2057400"/>
+          </a:xfrm>
+          <a:prstGeom prst="rect">
+            <a:avLst/>
+          </a:prstGeom>
+        </p:spPr>
+      </p:pic>
+      <p:sp>
+        <p:nvSpPr>
+          <p:cNvPr id="10" name="Text 4"/>
+          <p:cNvSpPr/>
+          <p:nvPr/>
+        </p:nvSpPr>
+        <p:spPr>
+          <a:xfrm>
+            <a:off x="566928" y="5925312"/>
+            <a:ext cx="11055096" cy="566928"/>
+          </a:xfrm>
+          <a:prstGeom prst="rect">
+            <a:avLst/>
+          </a:prstGeom>
+          <a:noFill/>
+          <a:ln/>
+        </p:spPr>
+        <p:txBody>
+          <a:bodyPr wrap="square" rtlCol="0" anchor="t"/>
           <a:lstStyle/>
           <a:p>
             <a:pPr indent="0" marL="0">
               <a:buNone/>
             </a:pPr>
             <a:r>
-              <a:rPr lang="en-US" sz="5400" b="1" dirty="0">
-                <a:solidFill>
-                  <a:srgbClr val="3674C1"/>
-                </a:solidFill>
-                <a:latin typeface="Trebuchet MS" pitchFamily="34" charset="0"/>
-                <a:ea typeface="Trebuchet MS" pitchFamily="34" charset="-122"/>
-                <a:cs typeface="Trebuchet MS" pitchFamily="34" charset="-120"/>
-              </a:rPr>
-              <a:t>04</a:t>
-            </a:r>
-            <a:endParaRPr lang="en-US" sz="5400" dirty="0"/>
-          </a:p>
-        </p:txBody>
-      </p:sp>
-      <p:sp>
-        <p:nvSpPr>
-          <p:cNvPr id="5" name="Text 3"/>
-          <p:cNvSpPr/>
-          <p:nvPr/>
-        </p:nvSpPr>
-        <p:spPr>
-          <a:xfrm>
-            <a:off x="566928" y="2606040"/>
-            <a:ext cx="11055096" cy="868680"/>
-          </a:xfrm>
-          <a:prstGeom prst="rect">
-            <a:avLst/>
-          </a:prstGeom>
-          <a:noFill/>
-          <a:ln/>
-        </p:spPr>
-        <p:txBody>
-          <a:bodyPr wrap="square" rtlCol="0" anchor="ctr"/>
-          <a:lstStyle/>
-          <a:p>
-            <a:pPr indent="0" marL="0">
-              <a:buNone/>
-            </a:pPr>
-            <a:r>
-              <a:rPr lang="en-US" sz="4000" b="1" dirty="0">
-                <a:solidFill>
-                  <a:srgbClr val="1F4C86"/>
-                </a:solidFill>
-                <a:latin typeface="Trebuchet MS" pitchFamily="34" charset="0"/>
-                <a:ea typeface="Trebuchet MS" pitchFamily="34" charset="-122"/>
-                <a:cs typeface="Trebuchet MS" pitchFamily="34" charset="-120"/>
-              </a:rPr>
-              <a:t>Confusion Matrix</a:t>
-            </a:r>
-            <a:endParaRPr lang="en-US" sz="4000" dirty="0"/>
-          </a:p>
-        </p:txBody>
-      </p:sp>
-      <p:sp>
-        <p:nvSpPr>
-          <p:cNvPr id="6" name="Text 4"/>
-          <p:cNvSpPr/>
-          <p:nvPr/>
-        </p:nvSpPr>
-        <p:spPr>
-          <a:xfrm>
-            <a:off x="566928" y="3456432"/>
-            <a:ext cx="10140696" cy="731520"/>
-          </a:xfrm>
-          <a:prstGeom prst="rect">
-            <a:avLst/>
-          </a:prstGeom>
-          <a:noFill/>
-          <a:ln/>
-        </p:spPr>
-        <p:txBody>
-          <a:bodyPr wrap="square" rtlCol="0" anchor="t"/>
-          <a:lstStyle/>
-          <a:p>
-            <a:pPr indent="0" marL="0">
-              <a:buNone/>
-            </a:pPr>
-            <a:r>
-              <a:rPr lang="en-US" sz="1900" dirty="0">
+              <a:rPr lang="en-US" sz="1500" i="1" dirty="0">
                 <a:solidFill>
                   <a:srgbClr val="5A6675"/>
                 </a:solidFill>
@@ -9267,54 +9414,15 @@
                 <a:ea typeface="Calibri" pitchFamily="34" charset="-122"/>
                 <a:cs typeface="Calibri" pitchFamily="34" charset="-120"/>
               </a:rPr>
-              <a:t>Classifier validation you can put in a paper</a:t>
-            </a:r>
-            <a:endParaRPr lang="en-US" sz="1900" dirty="0"/>
-          </a:p>
-        </p:txBody>
-      </p:sp>
-      <p:sp>
-        <p:nvSpPr>
-          <p:cNvPr id="7" name="Text 5"/>
-          <p:cNvSpPr/>
-          <p:nvPr/>
-        </p:nvSpPr>
-        <p:spPr>
-          <a:xfrm>
-            <a:off x="566928" y="6199632"/>
-            <a:ext cx="8229600" cy="365760"/>
-          </a:xfrm>
-          <a:prstGeom prst="rect">
-            <a:avLst/>
-          </a:prstGeom>
-          <a:noFill/>
-          <a:ln/>
-        </p:spPr>
-        <p:txBody>
-          <a:bodyPr wrap="square" rtlCol="0" anchor="ctr"/>
-          <a:lstStyle/>
-          <a:p>
-            <a:pPr indent="0" marL="0">
-              <a:buNone/>
-            </a:pPr>
-            <a:r>
-              <a:rPr lang="en-US" sz="1400" dirty="0">
-                <a:solidFill>
-                  <a:srgbClr val="A8B2BF"/>
-                </a:solidFill>
-                <a:latin typeface="Calibri" pitchFamily="34" charset="0"/>
-                <a:ea typeface="Calibri" pitchFamily="34" charset="-122"/>
-                <a:cs typeface="Calibri" pitchFamily="34" charset="-120"/>
-              </a:rPr>
-              <a:t>michaelsnelson.github.io/BINA-I2K-2026-QuPath-Extensions</a:t>
-            </a:r>
-            <a:endParaRPr lang="en-US" sz="1400" dirty="0"/>
-          </a:p>
-        </p:txBody>
-      </p:sp>
-      <p:sp>
-        <p:nvSpPr>
-          <p:cNvPr id="8" name="Text 6"/>
+              <a:t>All four, placed on the recorded coordinates alone. Every neighbouring pair now shares a strip.</a:t>
+            </a:r>
+            <a:endParaRPr lang="en-US" sz="1500" dirty="0"/>
+          </a:p>
+        </p:txBody>
+      </p:sp>
+      <p:sp>
+        <p:nvSpPr>
+          <p:cNvPr id="11" name="Text 5"/>
           <p:cNvSpPr/>
           <p:nvPr/>
         </p:nvSpPr>
@@ -9385,41 +9493,14 @@
       </p:grpSpPr>
       <p:sp>
         <p:nvSpPr>
-          <p:cNvPr id="2" name="Shape 0"/>
-          <p:cNvSpPr/>
-          <p:nvPr/>
-        </p:nvSpPr>
-        <p:spPr>
-          <a:xfrm>
-            <a:off x="566928" y="411480"/>
-            <a:ext cx="2331720" cy="457200"/>
-          </a:xfrm>
-          <a:prstGeom prst="roundRect">
-            <a:avLst>
-              <a:gd name="adj" fmla="val 20000"/>
-            </a:avLst>
-          </a:prstGeom>
-          <a:solidFill>
-            <a:srgbClr val="FBF1E0"/>
-          </a:solidFill>
-          <a:ln w="12700">
-            <a:solidFill>
-              <a:srgbClr val="B26A00"/>
-            </a:solidFill>
-            <a:prstDash val="solid"/>
-          </a:ln>
-        </p:spPr>
-      </p:sp>
-      <p:sp>
-        <p:nvSpPr>
-          <p:cNvPr id="3" name="Text 1"/>
-          <p:cNvSpPr/>
-          <p:nvPr/>
-        </p:nvSpPr>
-        <p:spPr>
-          <a:xfrm>
-            <a:off x="566928" y="411480"/>
-            <a:ext cx="2331720" cy="457200"/>
+          <p:cNvPr id="2" name="Text 0"/>
+          <p:cNvSpPr/>
+          <p:nvPr/>
+        </p:nvSpPr>
+        <p:spPr>
+          <a:xfrm>
+            <a:off x="566928" y="384048"/>
+            <a:ext cx="11055096" cy="658368"/>
           </a:xfrm>
           <a:prstGeom prst="rect">
             <a:avLst/>
@@ -9431,72 +9512,33 @@
           <a:bodyPr wrap="square" rtlCol="0" anchor="ctr"/>
           <a:lstStyle/>
           <a:p>
-            <a:pPr algn="ctr" indent="0" marL="0">
+            <a:pPr indent="0" marL="0">
               <a:buNone/>
             </a:pPr>
             <a:r>
-              <a:rPr lang="en-US" sz="1600" b="1" dirty="0">
-                <a:solidFill>
-                  <a:srgbClr val="B26A00"/>
+              <a:rPr lang="en-US" sz="3000" b="1" dirty="0">
+                <a:solidFill>
+                  <a:srgbClr val="1F4C86"/>
                 </a:solidFill>
                 <a:latin typeface="Trebuchet MS" pitchFamily="34" charset="0"/>
                 <a:ea typeface="Trebuchet MS" pitchFamily="34" charset="-122"/>
                 <a:cs typeface="Trebuchet MS" pitchFamily="34" charset="-120"/>
               </a:rPr>
-              <a:t>▶  DEMO ONLY</a:t>
-            </a:r>
-            <a:endParaRPr lang="en-US" sz="1600" dirty="0"/>
-          </a:p>
-        </p:txBody>
-      </p:sp>
-      <p:sp>
-        <p:nvSpPr>
-          <p:cNvPr id="4" name="Text 2"/>
-          <p:cNvSpPr/>
-          <p:nvPr/>
-        </p:nvSpPr>
-        <p:spPr>
-          <a:xfrm>
-            <a:off x="566928" y="1024128"/>
-            <a:ext cx="11055096" cy="685800"/>
-          </a:xfrm>
-          <a:prstGeom prst="rect">
-            <a:avLst/>
-          </a:prstGeom>
-          <a:noFill/>
-          <a:ln/>
-        </p:spPr>
-        <p:txBody>
-          <a:bodyPr wrap="square" rtlCol="0" anchor="ctr"/>
-          <a:lstStyle/>
-          <a:p>
-            <a:pPr indent="0" marL="0">
-              <a:buNone/>
-            </a:pPr>
-            <a:r>
-              <a:rPr lang="en-US" sz="3200" b="1" dirty="0">
-                <a:solidFill>
-                  <a:srgbClr val="1F4C86"/>
-                </a:solidFill>
-                <a:latin typeface="Trebuchet MS" pitchFamily="34" charset="0"/>
-                <a:ea typeface="Trebuchet MS" pitchFamily="34" charset="-122"/>
-                <a:cs typeface="Trebuchet MS" pitchFamily="34" charset="-120"/>
-              </a:rPr>
-              <a:t>Confusion Matrix</a:t>
-            </a:r>
-            <a:endParaRPr lang="en-US" sz="3200" dirty="0"/>
-          </a:p>
-        </p:txBody>
-      </p:sp>
-      <p:sp>
-        <p:nvSpPr>
-          <p:cNvPr id="5" name="Shape 3"/>
-          <p:cNvSpPr/>
-          <p:nvPr/>
-        </p:nvSpPr>
-        <p:spPr>
-          <a:xfrm>
-            <a:off x="566928" y="1783080"/>
+              <a:t>Tiles to Pyramid: stitching two tiles</a:t>
+            </a:r>
+            <a:endParaRPr lang="en-US" sz="3000" dirty="0"/>
+          </a:p>
+        </p:txBody>
+      </p:sp>
+      <p:sp>
+        <p:nvSpPr>
+          <p:cNvPr id="3" name="Shape 1"/>
+          <p:cNvSpPr/>
+          <p:nvPr/>
+        </p:nvSpPr>
+        <p:spPr>
+          <a:xfrm>
+            <a:off x="566928" y="1097280"/>
             <a:ext cx="1920240" cy="50292"/>
           </a:xfrm>
           <a:prstGeom prst="rect">
@@ -9510,145 +9552,14 @@
       </p:sp>
       <p:sp>
         <p:nvSpPr>
-          <p:cNvPr id="6" name="Text 4"/>
-          <p:cNvSpPr/>
-          <p:nvPr/>
-        </p:nvSpPr>
-        <p:spPr>
-          <a:xfrm>
-            <a:off x="640080" y="2103120"/>
-            <a:ext cx="10963656" cy="3017520"/>
-          </a:xfrm>
-          <a:prstGeom prst="rect">
-            <a:avLst/>
-          </a:prstGeom>
-          <a:noFill/>
-          <a:ln/>
-        </p:spPr>
-        <p:txBody>
-          <a:bodyPr wrap="square" rtlCol="0" anchor="t"/>
-          <a:lstStyle/>
-          <a:p>
-            <a:pPr marL="342900" indent="-342900">
-              <a:spcAft>
-                <a:spcPts val="1400"/>
-              </a:spcAft>
-              <a:buSzPct val="100000"/>
-              <a:buChar char="•"/>
-            </a:pPr>
-            <a:r>
-              <a:rPr lang="en-US" sz="2000" dirty="0">
-                <a:solidFill>
-                  <a:srgbClr val="1F2933"/>
-                </a:solidFill>
-                <a:latin typeface="Calibri" pitchFamily="34" charset="0"/>
-                <a:ea typeface="Calibri" pitchFamily="34" charset="-122"/>
-                <a:cs typeface="Calibri" pitchFamily="34" charset="-120"/>
-              </a:rPr>
-              <a:t>Click the largest off-diagonal cell — those cells highlight on the slide</a:t>
-            </a:r>
-            <a:endParaRPr lang="en-US" sz="2000" dirty="0"/>
-          </a:p>
-          <a:p>
-            <a:pPr marL="342900" indent="-342900">
-              <a:spcAft>
-                <a:spcPts val="1400"/>
-              </a:spcAft>
-              <a:buSzPct val="100000"/>
-              <a:buChar char="•"/>
-            </a:pPr>
-            <a:r>
-              <a:rPr lang="en-US" sz="2000" dirty="0">
-                <a:solidFill>
-                  <a:srgbClr val="1F2933"/>
-                </a:solidFill>
-                <a:latin typeface="Calibri" pitchFamily="34" charset="0"/>
-                <a:ea typeface="Calibri" pitchFamily="34" charset="-122"/>
-                <a:cs typeface="Calibri" pitchFamily="34" charset="-120"/>
-              </a:rPr>
-              <a:t>"The classifier is 87% accurate" becomes "it confuses these two things, for this reason"</a:t>
-            </a:r>
-            <a:endParaRPr lang="en-US" sz="2000" dirty="0"/>
-          </a:p>
-          <a:p>
-            <a:pPr marL="342900" indent="-342900">
-              <a:spcAft>
-                <a:spcPts val="1400"/>
-              </a:spcAft>
-              <a:buSzPct val="100000"/>
-              <a:buChar char="•"/>
-            </a:pPr>
-            <a:r>
-              <a:rPr lang="en-US" sz="2000" dirty="0">
-                <a:solidFill>
-                  <a:srgbClr val="1F2933"/>
-                </a:solidFill>
-                <a:latin typeface="Calibri" pitchFamily="34" charset="0"/>
-                <a:ea typeface="Calibri" pitchFamily="34" charset="-122"/>
-                <a:cs typeface="Calibri" pitchFamily="34" charset="-120"/>
-              </a:rPr>
-              <a:t>Across a project: per-image breakdown, with divergent images flagged automatically</a:t>
-            </a:r>
-            <a:endParaRPr lang="en-US" sz="2000" dirty="0"/>
-          </a:p>
-          <a:p>
-            <a:pPr marL="342900" indent="-342900">
-              <a:spcAft>
-                <a:spcPts val="1400"/>
-              </a:spcAft>
-              <a:buSzPct val="100000"/>
-              <a:buChar char="•"/>
-            </a:pPr>
-            <a:r>
-              <a:rPr lang="en-US" sz="2000" dirty="0">
-                <a:solidFill>
-                  <a:srgbClr val="1F2933"/>
-                </a:solidFill>
-                <a:latin typeface="Calibri" pitchFamily="34" charset="0"/>
-                <a:ea typeface="Calibri" pitchFamily="34" charset="-122"/>
-                <a:cs typeface="Calibri" pitchFamily="34" charset="-120"/>
-              </a:rPr>
-              <a:t>A flagged image points at the ground truth, the staining, or the classifier’s generalisation — the breakdown tells you which</a:t>
-            </a:r>
-            <a:endParaRPr lang="en-US" sz="2000" dirty="0"/>
-          </a:p>
-        </p:txBody>
-      </p:sp>
-      <p:sp>
-        <p:nvSpPr>
-          <p:cNvPr id="7" name="Shape 5"/>
-          <p:cNvSpPr/>
-          <p:nvPr/>
-        </p:nvSpPr>
-        <p:spPr>
-          <a:xfrm>
-            <a:off x="566928" y="5650992"/>
-            <a:ext cx="11055096" cy="566928"/>
-          </a:xfrm>
-          <a:prstGeom prst="rect">
-            <a:avLst/>
-          </a:prstGeom>
-          <a:solidFill>
-            <a:srgbClr val="F4F8FD"/>
-          </a:solidFill>
-          <a:ln w="9525">
-            <a:solidFill>
-              <a:srgbClr val="3674C1"/>
-            </a:solidFill>
-            <a:prstDash val="solid"/>
-          </a:ln>
-        </p:spPr>
-      </p:sp>
-      <p:sp>
-        <p:nvSpPr>
-          <p:cNvPr id="8" name="Text 6"/>
-          <p:cNvSpPr/>
-          <p:nvPr/>
-        </p:nvSpPr>
-        <p:spPr>
-          <a:xfrm>
-            <a:off x="768096" y="5650992"/>
-            <a:ext cx="10652760" cy="566928"/>
+          <p:cNvPr id="4" name="Text 2"/>
+          <p:cNvSpPr/>
+          <p:nvPr/>
+        </p:nvSpPr>
+        <p:spPr>
+          <a:xfrm>
+            <a:off x="566928" y="1225296"/>
+            <a:ext cx="11055096" cy="384048"/>
           </a:xfrm>
           <a:prstGeom prst="rect">
             <a:avLst/>
@@ -9664,7 +9575,7 @@
               <a:buNone/>
             </a:pPr>
             <a:r>
-              <a:rPr lang="en-US" sz="1600" b="1" dirty="0">
+              <a:rPr lang="en-US" sz="1700" b="1" dirty="0">
                 <a:solidFill>
                   <a:srgbClr val="1F4C86"/>
                 </a:solidFill>
@@ -9672,15 +9583,141 @@
                 <a:ea typeface="Calibri" pitchFamily="34" charset="-122"/>
                 <a:cs typeface="Calibri" pitchFamily="34" charset="-120"/>
               </a:rPr>
-              <a:t>Originated by Kristin Gallik — concept and initial scripts; built out at LOCI.  ·  Demo only: the repository is currently private.</a:t>
-            </a:r>
-            <a:endParaRPr lang="en-US" sz="1600" dirty="0"/>
-          </a:p>
-        </p:txBody>
-      </p:sp>
-      <p:sp>
-        <p:nvSpPr>
-          <p:cNvPr id="9" name="Text 7"/>
+              <a:t>As acquired: neighbouring tiles share a strip of the same tissue (shaded)</a:t>
+            </a:r>
+            <a:endParaRPr lang="en-US" sz="1700" dirty="0"/>
+          </a:p>
+        </p:txBody>
+      </p:sp>
+      <p:pic>
+        <p:nvPicPr>
+          <p:cNvPr id="5" name="Image 0" descr="images/stitch_ppm_unstitched.jpg">    </p:cNvPr>
+          <p:cNvPicPr>
+            <a:picLocks noChangeAspect="1"/>
+          </p:cNvPicPr>
+          <p:nvPr/>
+        </p:nvPicPr>
+        <p:blipFill>
+          <a:blip r:embed="rId1"/>
+          <a:stretch>
+            <a:fillRect/>
+          </a:stretch>
+        </p:blipFill>
+        <p:spPr>
+          <a:xfrm>
+            <a:off x="566928" y="1645920"/>
+            <a:ext cx="10058400" cy="1894332"/>
+          </a:xfrm>
+          <a:prstGeom prst="rect">
+            <a:avLst/>
+          </a:prstGeom>
+        </p:spPr>
+      </p:pic>
+      <p:sp>
+        <p:nvSpPr>
+          <p:cNvPr id="6" name="Text 3"/>
+          <p:cNvSpPr/>
+          <p:nvPr/>
+        </p:nvSpPr>
+        <p:spPr>
+          <a:xfrm>
+            <a:off x="566928" y="3631692"/>
+            <a:ext cx="11055096" cy="384048"/>
+          </a:xfrm>
+          <a:prstGeom prst="rect">
+            <a:avLst/>
+          </a:prstGeom>
+          <a:noFill/>
+          <a:ln/>
+        </p:spPr>
+        <p:txBody>
+          <a:bodyPr wrap="square" rtlCol="0" anchor="ctr"/>
+          <a:lstStyle/>
+          <a:p>
+            <a:pPr indent="0" marL="0">
+              <a:buNone/>
+            </a:pPr>
+            <a:r>
+              <a:rPr lang="en-US" sz="1700" b="1" dirty="0">
+                <a:solidFill>
+                  <a:srgbClr val="1F4C86"/>
+                </a:solidFill>
+                <a:latin typeface="Calibri" pitchFamily="34" charset="0"/>
+                <a:ea typeface="Calibri" pitchFamily="34" charset="-122"/>
+                <a:cs typeface="Calibri" pitchFamily="34" charset="-120"/>
+              </a:rPr>
+              <a:t>Stitched: the join is placed by matching the image content in that strip</a:t>
+            </a:r>
+            <a:endParaRPr lang="en-US" sz="1700" dirty="0"/>
+          </a:p>
+        </p:txBody>
+      </p:sp>
+      <p:pic>
+        <p:nvPicPr>
+          <p:cNvPr id="7" name="Image 1" descr="images/stitch_ppm_stitched.jpg">    </p:cNvPr>
+          <p:cNvPicPr>
+            <a:picLocks noChangeAspect="1"/>
+          </p:cNvPicPr>
+          <p:nvPr/>
+        </p:nvPicPr>
+        <p:blipFill>
+          <a:blip r:embed="rId2"/>
+          <a:stretch>
+            <a:fillRect/>
+          </a:stretch>
+        </p:blipFill>
+        <p:spPr>
+          <a:xfrm>
+            <a:off x="566928" y="4052316"/>
+            <a:ext cx="9273845" cy="1894332"/>
+          </a:xfrm>
+          <a:prstGeom prst="rect">
+            <a:avLst/>
+          </a:prstGeom>
+        </p:spPr>
+      </p:pic>
+      <p:sp>
+        <p:nvSpPr>
+          <p:cNvPr id="8" name="Text 4"/>
+          <p:cNvSpPr/>
+          <p:nvPr/>
+        </p:nvSpPr>
+        <p:spPr>
+          <a:xfrm>
+            <a:off x="566928" y="5998464"/>
+            <a:ext cx="10140696" cy="512064"/>
+          </a:xfrm>
+          <a:prstGeom prst="rect">
+            <a:avLst/>
+          </a:prstGeom>
+          <a:noFill/>
+          <a:ln/>
+        </p:spPr>
+        <p:txBody>
+          <a:bodyPr wrap="square" rtlCol="0" anchor="ctr"/>
+          <a:lstStyle/>
+          <a:p>
+            <a:pPr indent="0" marL="0">
+              <a:buNone/>
+            </a:pPr>
+            <a:r>
+              <a:rPr lang="en-US" sz="1500" i="1" dirty="0">
+                <a:solidFill>
+                  <a:srgbClr val="5A6675"/>
+                </a:solidFill>
+                <a:latin typeface="Calibri" pitchFamily="34" charset="0"/>
+                <a:ea typeface="Calibri" pitchFamily="34" charset="-122"/>
+                <a:cs typeface="Calibri" pitchFamily="34" charset="-120"/>
+              </a:rPr>
+              <a:t>Pancreatic cancer, polarised light. The stage recorded this tile about 5 px (0.9 µm) away from where it really was — the worst of 17 seams in this grid, which ran to a 2.2 px median. Registration measured that from the overlap and closed every seam to under a pixel. It is a tick-box: left off, tiles go where the stage said.</a:t>
+            </a:r>
+            <a:endParaRPr lang="en-US" sz="1500" dirty="0"/>
+          </a:p>
+        </p:txBody>
+      </p:sp>
+      <p:sp>
+        <p:nvSpPr>
+          <p:cNvPr id="9" name="Text 5"/>
           <p:cNvSpPr/>
           <p:nvPr/>
         </p:nvSpPr>
@@ -9751,23 +9788,42 @@
       </p:grpSpPr>
       <p:sp>
         <p:nvSpPr>
-          <p:cNvPr id="2" name="Shape 0"/>
-          <p:cNvSpPr/>
-          <p:nvPr/>
-        </p:nvSpPr>
-        <p:spPr>
-          <a:xfrm>
-            <a:off x="0" y="1417320"/>
-            <a:ext cx="12188952" cy="3108960"/>
-          </a:xfrm>
-          <a:prstGeom prst="rect">
-            <a:avLst/>
-          </a:prstGeom>
-          <a:solidFill>
-            <a:srgbClr val="E8F0FA"/>
-          </a:solidFill>
-          <a:ln/>
-        </p:spPr>
+          <p:cNvPr id="2" name="Text 0"/>
+          <p:cNvSpPr/>
+          <p:nvPr/>
+        </p:nvSpPr>
+        <p:spPr>
+          <a:xfrm>
+            <a:off x="566928" y="384048"/>
+            <a:ext cx="11055096" cy="658368"/>
+          </a:xfrm>
+          <a:prstGeom prst="rect">
+            <a:avLst/>
+          </a:prstGeom>
+          <a:noFill/>
+          <a:ln/>
+        </p:spPr>
+        <p:txBody>
+          <a:bodyPr wrap="square" rtlCol="0" anchor="ctr"/>
+          <a:lstStyle/>
+          <a:p>
+            <a:pPr indent="0" marL="0">
+              <a:buNone/>
+            </a:pPr>
+            <a:r>
+              <a:rPr lang="en-US" sz="3000" b="1" dirty="0">
+                <a:solidFill>
+                  <a:srgbClr val="1F4C86"/>
+                </a:solidFill>
+                <a:latin typeface="Trebuchet MS" pitchFamily="34" charset="0"/>
+                <a:ea typeface="Trebuchet MS" pitchFamily="34" charset="-122"/>
+                <a:cs typeface="Trebuchet MS" pitchFamily="34" charset="-120"/>
+              </a:rPr>
+              <a:t>Measure on the clearest channel, reuse on the rest</a:t>
+            </a:r>
+            <a:endParaRPr lang="en-US" sz="3000" dirty="0"/>
+          </a:p>
+        </p:txBody>
       </p:sp>
       <p:sp>
         <p:nvSpPr>
@@ -9777,8 +9833,8 @@
         </p:nvSpPr>
         <p:spPr>
           <a:xfrm>
-            <a:off x="0" y="1417320"/>
-            <a:ext cx="201168" cy="3108960"/>
+            <a:off x="566928" y="1097280"/>
+            <a:ext cx="1920240" cy="50292"/>
           </a:xfrm>
           <a:prstGeom prst="rect">
             <a:avLst/>
@@ -9797,8 +9853,8 @@
         </p:nvSpPr>
         <p:spPr>
           <a:xfrm>
-            <a:off x="566928" y="1691640"/>
-            <a:ext cx="1828800" cy="914400"/>
+            <a:off x="768096" y="1316736"/>
+            <a:ext cx="5120640" cy="402336"/>
           </a:xfrm>
           <a:prstGeom prst="rect">
             <a:avLst/>
@@ -9814,30 +9870,54 @@
               <a:buNone/>
             </a:pPr>
             <a:r>
-              <a:rPr lang="en-US" sz="5400" b="1" dirty="0">
-                <a:solidFill>
-                  <a:srgbClr val="3674C1"/>
-                </a:solidFill>
-                <a:latin typeface="Trebuchet MS" pitchFamily="34" charset="0"/>
-                <a:ea typeface="Trebuchet MS" pitchFamily="34" charset="-122"/>
-                <a:cs typeface="Trebuchet MS" pitchFamily="34" charset="-120"/>
-              </a:rPr>
-              <a:t>05</a:t>
-            </a:r>
-            <a:endParaRPr lang="en-US" sz="5400" dirty="0"/>
-          </a:p>
-        </p:txBody>
-      </p:sp>
-      <p:sp>
-        <p:nvSpPr>
-          <p:cNvPr id="5" name="Text 3"/>
-          <p:cNvSpPr/>
-          <p:nvPr/>
-        </p:nvSpPr>
-        <p:spPr>
-          <a:xfrm>
-            <a:off x="566928" y="2606040"/>
-            <a:ext cx="11055096" cy="868680"/>
+              <a:rPr lang="en-US" sz="1700" b="1" dirty="0">
+                <a:solidFill>
+                  <a:srgbClr val="1F4C86"/>
+                </a:solidFill>
+                <a:latin typeface="Calibri" pitchFamily="34" charset="0"/>
+                <a:ea typeface="Calibri" pitchFamily="34" charset="-122"/>
+                <a:cs typeface="Calibri" pitchFamily="34" charset="-120"/>
+              </a:rPr>
+              <a:t>Placed where the stage said it was</a:t>
+            </a:r>
+            <a:endParaRPr lang="en-US" sz="1700" dirty="0"/>
+          </a:p>
+        </p:txBody>
+      </p:sp>
+      <p:pic>
+        <p:nvPicPr>
+          <p:cNvPr id="5" name="Image 0" descr="images/stitch_if_nominal.jpg">    </p:cNvPr>
+          <p:cNvPicPr>
+            <a:picLocks noChangeAspect="1"/>
+          </p:cNvPicPr>
+          <p:nvPr/>
+        </p:nvPicPr>
+        <p:blipFill>
+          <a:blip r:embed="rId1"/>
+          <a:stretch>
+            <a:fillRect/>
+          </a:stretch>
+        </p:blipFill>
+        <p:spPr>
+          <a:xfrm>
+            <a:off x="768096" y="1783080"/>
+            <a:ext cx="5120640" cy="4118776"/>
+          </a:xfrm>
+          <a:prstGeom prst="rect">
+            <a:avLst/>
+          </a:prstGeom>
+        </p:spPr>
+      </p:pic>
+      <p:sp>
+        <p:nvSpPr>
+          <p:cNvPr id="6" name="Text 3"/>
+          <p:cNvSpPr/>
+          <p:nvPr/>
+        </p:nvSpPr>
+        <p:spPr>
+          <a:xfrm>
+            <a:off x="6300216" y="1316736"/>
+            <a:ext cx="5120640" cy="402336"/>
           </a:xfrm>
           <a:prstGeom prst="rect">
             <a:avLst/>
@@ -9853,30 +9933,54 @@
               <a:buNone/>
             </a:pPr>
             <a:r>
-              <a:rPr lang="en-US" sz="4000" b="1" dirty="0">
+              <a:rPr lang="en-US" sz="1700" b="1" dirty="0">
                 <a:solidFill>
                   <a:srgbClr val="1F4C86"/>
                 </a:solidFill>
-                <a:latin typeface="Trebuchet MS" pitchFamily="34" charset="0"/>
-                <a:ea typeface="Trebuchet MS" pitchFamily="34" charset="-122"/>
-                <a:cs typeface="Trebuchet MS" pitchFamily="34" charset="-120"/>
-              </a:rPr>
-              <a:t>DL Pixel Classifier and QP-CAT</a:t>
-            </a:r>
-            <a:endParaRPr lang="en-US" sz="4000" dirty="0"/>
-          </a:p>
-        </p:txBody>
-      </p:sp>
-      <p:sp>
-        <p:nvSpPr>
-          <p:cNvPr id="6" name="Text 4"/>
-          <p:cNvSpPr/>
-          <p:nvPr/>
-        </p:nvSpPr>
-        <p:spPr>
-          <a:xfrm>
-            <a:off x="566928" y="3456432"/>
-            <a:ext cx="10140696" cy="731520"/>
+                <a:latin typeface="Calibri" pitchFamily="34" charset="0"/>
+                <a:ea typeface="Calibri" pitchFamily="34" charset="-122"/>
+                <a:cs typeface="Calibri" pitchFamily="34" charset="-120"/>
+              </a:rPr>
+              <a:t>Placed where the image content says it is</a:t>
+            </a:r>
+            <a:endParaRPr lang="en-US" sz="1700" dirty="0"/>
+          </a:p>
+        </p:txBody>
+      </p:sp>
+      <p:pic>
+        <p:nvPicPr>
+          <p:cNvPr id="7" name="Image 1" descr="images/stitch_if_registered.jpg">    </p:cNvPr>
+          <p:cNvPicPr>
+            <a:picLocks noChangeAspect="1"/>
+          </p:cNvPicPr>
+          <p:nvPr/>
+        </p:nvPicPr>
+        <p:blipFill>
+          <a:blip r:embed="rId2"/>
+          <a:stretch>
+            <a:fillRect/>
+          </a:stretch>
+        </p:blipFill>
+        <p:spPr>
+          <a:xfrm>
+            <a:off x="6300216" y="1783080"/>
+            <a:ext cx="5120640" cy="4118776"/>
+          </a:xfrm>
+          <a:prstGeom prst="rect">
+            <a:avLst/>
+          </a:prstGeom>
+        </p:spPr>
+      </p:pic>
+      <p:sp>
+        <p:nvSpPr>
+          <p:cNvPr id="8" name="Text 4"/>
+          <p:cNvSpPr/>
+          <p:nvPr/>
+        </p:nvSpPr>
+        <p:spPr>
+          <a:xfrm>
+            <a:off x="566928" y="6011584"/>
+            <a:ext cx="11055096" cy="566928"/>
           </a:xfrm>
           <a:prstGeom prst="rect">
             <a:avLst/>
@@ -9892,7 +9996,7 @@
               <a:buNone/>
             </a:pPr>
             <a:r>
-              <a:rPr lang="en-US" sz="1900" dirty="0">
+              <a:rPr lang="en-US" sz="1500" i="1" dirty="0">
                 <a:solidFill>
                   <a:srgbClr val="5A6675"/>
                 </a:solidFill>
@@ -9900,54 +10004,15 @@
                 <a:ea typeface="Calibri" pitchFamily="34" charset="-122"/>
                 <a:cs typeface="Calibri" pitchFamily="34" charset="-120"/>
               </a:rPr>
-              <a:t>Pixel classification, cell phenotyping, and knowing when not to trust them</a:t>
-            </a:r>
-            <a:endParaRPr lang="en-US" sz="1900" dirty="0"/>
-          </a:p>
-        </p:txBody>
-      </p:sp>
-      <p:sp>
-        <p:nvSpPr>
-          <p:cNvPr id="7" name="Text 5"/>
-          <p:cNvSpPr/>
-          <p:nvPr/>
-        </p:nvSpPr>
-        <p:spPr>
-          <a:xfrm>
-            <a:off x="566928" y="6199632"/>
-            <a:ext cx="8229600" cy="365760"/>
-          </a:xfrm>
-          <a:prstGeom prst="rect">
-            <a:avLst/>
-          </a:prstGeom>
-          <a:noFill/>
-          <a:ln/>
-        </p:spPr>
-        <p:txBody>
-          <a:bodyPr wrap="square" rtlCol="0" anchor="ctr"/>
-          <a:lstStyle/>
-          <a:p>
-            <a:pPr indent="0" marL="0">
-              <a:buNone/>
-            </a:pPr>
-            <a:r>
-              <a:rPr lang="en-US" sz="1400" dirty="0">
-                <a:solidFill>
-                  <a:srgbClr val="A8B2BF"/>
-                </a:solidFill>
-                <a:latin typeface="Calibri" pitchFamily="34" charset="0"/>
-                <a:ea typeface="Calibri" pitchFamily="34" charset="-122"/>
-                <a:cs typeface="Calibri" pitchFamily="34" charset="-120"/>
-              </a:rPr>
-              <a:t>michaelsnelson.github.io/BINA-I2K-2026-QuPath-Extensions</a:t>
-            </a:r>
-            <a:endParaRPr lang="en-US" sz="1400" dirty="0"/>
-          </a:p>
-        </p:txBody>
-      </p:sp>
-      <p:sp>
-        <p:nvSpPr>
-          <p:cNvPr id="8" name="Text 6"/>
+              <a:t>The same join through the same cells; only the tile positions differ. Positions were measured on DAPI, the channel with the most distinct, best separated structure, and reused unchanged for the other two channels — so every channel stays aligned with every other. Nuclei blue, actin green, mitochondria red; the correction here is 7 px, about 4.6 µm.</a:t>
+            </a:r>
+            <a:endParaRPr lang="en-US" sz="1500" dirty="0"/>
+          </a:p>
+        </p:txBody>
+      </p:sp>
+      <p:sp>
+        <p:nvSpPr>
+          <p:cNvPr id="9" name="Text 5"/>
           <p:cNvSpPr/>
           <p:nvPr/>
         </p:nvSpPr>
@@ -10049,7 +10114,7 @@
                 <a:ea typeface="Trebuchet MS" pitchFamily="34" charset="-122"/>
                 <a:cs typeface="Trebuchet MS" pitchFamily="34" charset="-120"/>
               </a:rPr>
-              <a:t>Deep learning pixel classification</a:t>
+              <a:t>Tiles to Pyramid — how the mosaic is assembled</a:t>
             </a:r>
             <a:endParaRPr lang="en-US" sz="3000" dirty="0"/>
           </a:p>
@@ -10108,7 +10173,7 @@
                 <a:ea typeface="Calibri" pitchFamily="34" charset="-122"/>
                 <a:cs typeface="Calibri" pitchFamily="34" charset="-120"/>
               </a:rPr>
-              <a:t>For when the built-in classifier is not enough: subtle textures, classes that differ by architecture rather than colour.</a:t>
+              <a:t>Memory stops tracking the size of the mosaic, which is what lets thousands of tiles stitch on an ordinary machine.</a:t>
             </a:r>
             <a:endParaRPr lang="en-US" sz="1700" dirty="0"/>
           </a:p>
@@ -10154,7 +10219,31 @@
                 <a:ea typeface="Calibri" pitchFamily="34" charset="-122"/>
                 <a:cs typeface="Calibri" pitchFamily="34" charset="-120"/>
               </a:rPr>
-              <a:t>Same interaction as the built-in classifier: draw a few sparse regions per class</a:t>
+              <a:t>Every overlapping pair is measured against the image content, then all tiles are placed at once by least squares</a:t>
+            </a:r>
+            <a:endParaRPr lang="en-US" sz="2000" dirty="0"/>
+          </a:p>
+          <a:p>
+            <a:pPr lvl="1" marL="685800" indent="-342900">
+              <a:lnSpc>
+                <a:spcPct val="105000"/>
+              </a:lnSpc>
+              <a:spcAft>
+                <a:spcPts val="800"/>
+              </a:spcAft>
+              <a:buSzPct val="100000"/>
+              <a:buChar char="▪"/>
+            </a:pPr>
+            <a:r>
+              <a:rPr lang="en-US" sz="1700" dirty="0">
+                <a:solidFill>
+                  <a:srgbClr val="5A6675"/>
+                </a:solidFill>
+                <a:latin typeface="Calibri" pitchFamily="34" charset="0"/>
+                <a:ea typeface="Calibri" pitchFamily="34" charset="-122"/>
+                <a:cs typeface="Calibri" pitchFamily="34" charset="-120"/>
+              </a:rPr>
+              <a:t>A spanning tree would keep 99 of the 180 neighbour edges on a 10×10 grid and throw away 81, so nothing is ever asked to close a loop</a:t>
             </a:r>
             <a:endParaRPr lang="en-US" sz="2000" dirty="0"/>
           </a:p>
@@ -10178,7 +10267,7 @@
                 <a:ea typeface="Calibri" pitchFamily="34" charset="-122"/>
                 <a:cs typeface="Calibri" pitchFamily="34" charset="-120"/>
               </a:rPr>
-              <a:t>The extension samples training tiles from what you marked — you are steering a sampler</a:t>
+              <a:t>Each tile is also pulled toward its recorded stage position, so a tile with no accepted edges stays exactly where the stage put it</a:t>
             </a:r>
             <a:endParaRPr lang="en-US" sz="2000" dirty="0"/>
           </a:p>
@@ -10202,7 +10291,7 @@
                 <a:ea typeface="Calibri" pitchFamily="34" charset="-122"/>
                 <a:cs typeface="Calibri" pitchFamily="34" charset="-120"/>
               </a:rPr>
-              <a:t>Brightfield and multi-channel fluorescence, with channel selection and intensity normalisation</a:t>
+              <a:t>The output is written chunk by chunk, and only the one to four tiles overlapping the current chunk are ever in memory</a:t>
             </a:r>
             <a:endParaRPr lang="en-US" sz="2000" dirty="0"/>
           </a:p>
@@ -10226,7 +10315,7 @@
                 <a:ea typeface="Calibri" pitchFamily="34" charset="-122"/>
                 <a:cs typeface="Calibri" pitchFamily="34" charset="-120"/>
               </a:rPr>
-              <a:t>Train across several project images at once for representative sampling</a:t>
+              <a:t>Measured: 144 tiles (125 MP) stitch in the same 227 MB as 64 tiles (56 MP)</a:t>
             </a:r>
             <a:endParaRPr lang="en-US" sz="2000" dirty="0"/>
           </a:p>
@@ -10234,7 +10323,71 @@
       </p:sp>
       <p:sp>
         <p:nvSpPr>
-          <p:cNvPr id="6" name="Text 4"/>
+          <p:cNvPr id="6" name="Shape 4"/>
+          <p:cNvSpPr/>
+          <p:nvPr/>
+        </p:nvSpPr>
+        <p:spPr>
+          <a:xfrm>
+            <a:off x="566928" y="5650992"/>
+            <a:ext cx="11055096" cy="566928"/>
+          </a:xfrm>
+          <a:prstGeom prst="rect">
+            <a:avLst/>
+          </a:prstGeom>
+          <a:solidFill>
+            <a:srgbClr val="F4F8FD"/>
+          </a:solidFill>
+          <a:ln w="9525">
+            <a:solidFill>
+              <a:srgbClr val="3674C1"/>
+            </a:solidFill>
+            <a:prstDash val="solid"/>
+          </a:ln>
+        </p:spPr>
+      </p:sp>
+      <p:sp>
+        <p:nvSpPr>
+          <p:cNvPr id="7" name="Text 5"/>
+          <p:cNvSpPr/>
+          <p:nvPr/>
+        </p:nvSpPr>
+        <p:spPr>
+          <a:xfrm>
+            <a:off x="768096" y="5650992"/>
+            <a:ext cx="10652760" cy="566928"/>
+          </a:xfrm>
+          <a:prstGeom prst="rect">
+            <a:avLst/>
+          </a:prstGeom>
+          <a:noFill/>
+          <a:ln/>
+        </p:spPr>
+        <p:txBody>
+          <a:bodyPr wrap="square" rtlCol="0" anchor="ctr"/>
+          <a:lstStyle/>
+          <a:p>
+            <a:pPr indent="0" marL="0">
+              <a:buNone/>
+            </a:pPr>
+            <a:r>
+              <a:rPr lang="en-US" sz="1600" b="1" dirty="0">
+                <a:solidFill>
+                  <a:srgbClr val="1F4C86"/>
+                </a:solidFill>
+                <a:latin typeface="Calibri" pitchFamily="34" charset="0"/>
+                <a:ea typeface="Calibri" pitchFamily="34" charset="-122"/>
+                <a:cs typeface="Calibri" pitchFamily="34" charset="-120"/>
+              </a:rPr>
+              <a:t>Measured with the extension’s own benchmark: 1024 px 16-bit tiles, 10% overlap. The older load-everything path needed 2–4 GB and ran out of memory past about 1600 tiles.</a:t>
+            </a:r>
+            <a:endParaRPr lang="en-US" sz="1600" dirty="0"/>
+          </a:p>
+        </p:txBody>
+      </p:sp>
+      <p:sp>
+        <p:nvSpPr>
+          <p:cNvPr id="8" name="Text 6"/>
           <p:cNvSpPr/>
           <p:nvPr/>
         </p:nvSpPr>
@@ -10305,14 +10458,54 @@
       </p:grpSpPr>
       <p:sp>
         <p:nvSpPr>
-          <p:cNvPr id="2" name="Text 0"/>
-          <p:cNvSpPr/>
-          <p:nvPr/>
-        </p:nvSpPr>
-        <p:spPr>
-          <a:xfrm>
-            <a:off x="566928" y="384048"/>
-            <a:ext cx="11055096" cy="658368"/>
+          <p:cNvPr id="2" name="Shape 0"/>
+          <p:cNvSpPr/>
+          <p:nvPr/>
+        </p:nvSpPr>
+        <p:spPr>
+          <a:xfrm>
+            <a:off x="0" y="1417320"/>
+            <a:ext cx="12188952" cy="3108960"/>
+          </a:xfrm>
+          <a:prstGeom prst="rect">
+            <a:avLst/>
+          </a:prstGeom>
+          <a:solidFill>
+            <a:srgbClr val="E8F0FA"/>
+          </a:solidFill>
+          <a:ln/>
+        </p:spPr>
+      </p:sp>
+      <p:sp>
+        <p:nvSpPr>
+          <p:cNvPr id="3" name="Shape 1"/>
+          <p:cNvSpPr/>
+          <p:nvPr/>
+        </p:nvSpPr>
+        <p:spPr>
+          <a:xfrm>
+            <a:off x="0" y="1417320"/>
+            <a:ext cx="201168" cy="3108960"/>
+          </a:xfrm>
+          <a:prstGeom prst="rect">
+            <a:avLst/>
+          </a:prstGeom>
+          <a:solidFill>
+            <a:srgbClr val="3674C1"/>
+          </a:solidFill>
+          <a:ln/>
+        </p:spPr>
+      </p:sp>
+      <p:sp>
+        <p:nvSpPr>
+          <p:cNvPr id="4" name="Text 2"/>
+          <p:cNvSpPr/>
+          <p:nvPr/>
+        </p:nvSpPr>
+        <p:spPr>
+          <a:xfrm>
+            <a:off x="566928" y="1691640"/>
+            <a:ext cx="1828800" cy="914400"/>
           </a:xfrm>
           <a:prstGeom prst="rect">
             <a:avLst/>
@@ -10328,50 +10521,30 @@
               <a:buNone/>
             </a:pPr>
             <a:r>
-              <a:rPr lang="en-US" sz="3000" b="1" dirty="0">
-                <a:solidFill>
-                  <a:srgbClr val="1F4C86"/>
+              <a:rPr lang="en-US" sz="5400" b="1" dirty="0">
+                <a:solidFill>
+                  <a:srgbClr val="3674C1"/>
                 </a:solidFill>
                 <a:latin typeface="Trebuchet MS" pitchFamily="34" charset="0"/>
                 <a:ea typeface="Trebuchet MS" pitchFamily="34" charset="-122"/>
                 <a:cs typeface="Trebuchet MS" pitchFamily="34" charset="-120"/>
               </a:rPr>
-              <a:t>The two features that tell you when not to trust it</a:t>
-            </a:r>
-            <a:endParaRPr lang="en-US" sz="3000" dirty="0"/>
-          </a:p>
-        </p:txBody>
-      </p:sp>
-      <p:sp>
-        <p:nvSpPr>
-          <p:cNvPr id="3" name="Shape 1"/>
-          <p:cNvSpPr/>
-          <p:nvPr/>
-        </p:nvSpPr>
-        <p:spPr>
-          <a:xfrm>
-            <a:off x="566928" y="1097280"/>
-            <a:ext cx="1920240" cy="50292"/>
-          </a:xfrm>
-          <a:prstGeom prst="rect">
-            <a:avLst/>
-          </a:prstGeom>
-          <a:solidFill>
-            <a:srgbClr val="3674C1"/>
-          </a:solidFill>
-          <a:ln/>
-        </p:spPr>
-      </p:sp>
-      <p:sp>
-        <p:nvSpPr>
-          <p:cNvPr id="4" name="Text 2"/>
-          <p:cNvSpPr/>
-          <p:nvPr/>
-        </p:nvSpPr>
-        <p:spPr>
-          <a:xfrm>
-            <a:off x="566928" y="1243584"/>
-            <a:ext cx="11055096" cy="384048"/>
+              <a:t>04</a:t>
+            </a:r>
+            <a:endParaRPr lang="en-US" sz="5400" dirty="0"/>
+          </a:p>
+        </p:txBody>
+      </p:sp>
+      <p:sp>
+        <p:nvSpPr>
+          <p:cNvPr id="5" name="Text 3"/>
+          <p:cNvSpPr/>
+          <p:nvPr/>
+        </p:nvSpPr>
+        <p:spPr>
+          <a:xfrm>
+            <a:off x="566928" y="2606040"/>
+            <a:ext cx="11055096" cy="868680"/>
           </a:xfrm>
           <a:prstGeom prst="rect">
             <a:avLst/>
@@ -10387,30 +10560,30 @@
               <a:buNone/>
             </a:pPr>
             <a:r>
-              <a:rPr lang="en-US" sz="1700" i="1" dirty="0">
-                <a:solidFill>
-                  <a:srgbClr val="5A6675"/>
-                </a:solidFill>
-                <a:latin typeface="Calibri" pitchFamily="34" charset="0"/>
-                <a:ea typeface="Calibri" pitchFamily="34" charset="-122"/>
-                <a:cs typeface="Calibri" pitchFamily="34" charset="-120"/>
-              </a:rPr>
-              <a:t>Domain shift — a new scanner, a new stain, a new batch — is the practical problem, far more often than model architecture.</a:t>
-            </a:r>
-            <a:endParaRPr lang="en-US" sz="1700" dirty="0"/>
-          </a:p>
-        </p:txBody>
-      </p:sp>
-      <p:sp>
-        <p:nvSpPr>
-          <p:cNvPr id="5" name="Text 3"/>
-          <p:cNvSpPr/>
-          <p:nvPr/>
-        </p:nvSpPr>
-        <p:spPr>
-          <a:xfrm>
-            <a:off x="640080" y="1755648"/>
-            <a:ext cx="10963656" cy="4279392"/>
+              <a:rPr lang="en-US" sz="4000" b="1" dirty="0">
+                <a:solidFill>
+                  <a:srgbClr val="1F4C86"/>
+                </a:solidFill>
+                <a:latin typeface="Trebuchet MS" pitchFamily="34" charset="0"/>
+                <a:ea typeface="Trebuchet MS" pitchFamily="34" charset="-122"/>
+                <a:cs typeface="Trebuchet MS" pitchFamily="34" charset="-120"/>
+              </a:rPr>
+              <a:t>Confusion Matrix</a:t>
+            </a:r>
+            <a:endParaRPr lang="en-US" sz="4000" dirty="0"/>
+          </a:p>
+        </p:txBody>
+      </p:sp>
+      <p:sp>
+        <p:nvSpPr>
+          <p:cNvPr id="6" name="Text 4"/>
+          <p:cNvSpPr/>
+          <p:nvPr/>
+        </p:nvSpPr>
+        <p:spPr>
+          <a:xfrm>
+            <a:off x="566928" y="3456432"/>
+            <a:ext cx="10140696" cy="731520"/>
           </a:xfrm>
           <a:prstGeom prst="rect">
             <a:avLst/>
@@ -10420,190 +10593,62 @@
         </p:spPr>
         <p:txBody>
           <a:bodyPr wrap="square" rtlCol="0" anchor="t"/>
-          <a:lstStyle/>
-          <a:p>
-            <a:pPr marL="342900" indent="-342900">
-              <a:lnSpc>
-                <a:spcPct val="105000"/>
-              </a:lnSpc>
-              <a:spcAft>
-                <a:spcPts val="1200"/>
-              </a:spcAft>
-              <a:buSzPct val="100000"/>
-              <a:buChar char="•"/>
-            </a:pPr>
-            <a:r>
-              <a:rPr lang="en-US" sz="2000" dirty="0">
-                <a:solidFill>
-                  <a:srgbClr val="1F2933"/>
-                </a:solidFill>
-                <a:latin typeface="Calibri" pitchFamily="34" charset="0"/>
-                <a:ea typeface="Calibri" pitchFamily="34" charset="-122"/>
-                <a:cs typeface="Calibri" pitchFamily="34" charset="-120"/>
-              </a:rPr>
-              <a:t>Full per-pixel confidence, not just the winning class — the model’s certainty rendered pixel by pixel</a:t>
-            </a:r>
-            <a:endParaRPr lang="en-US" sz="2000" dirty="0"/>
-          </a:p>
-          <a:p>
-            <a:pPr lvl="1" marL="685800" indent="-342900">
-              <a:lnSpc>
-                <a:spcPct val="105000"/>
-              </a:lnSpc>
-              <a:spcAft>
-                <a:spcPts val="800"/>
-              </a:spcAft>
-              <a:buSzPct val="100000"/>
-              <a:buChar char="▪"/>
-            </a:pPr>
-            <a:r>
-              <a:rPr lang="en-US" sz="1700" dirty="0">
-                <a:solidFill>
-                  <a:srgbClr val="5A6675"/>
-                </a:solidFill>
-                <a:latin typeface="Calibri" pitchFamily="34" charset="0"/>
-                <a:ea typeface="Calibri" pitchFamily="34" charset="-122"/>
-                <a:cs typeface="Calibri" pitchFamily="34" charset="-120"/>
-              </a:rPr>
-              <a:t>The honest uncertainty is at the boundaries between classes — go and look at it</a:t>
-            </a:r>
-            <a:endParaRPr lang="en-US" sz="2000" dirty="0"/>
-          </a:p>
-          <a:p>
-            <a:pPr marL="342900" indent="-342900">
-              <a:lnSpc>
-                <a:spcPct val="105000"/>
-              </a:lnSpc>
-              <a:spcAft>
-                <a:spcPts val="1200"/>
-              </a:spcAft>
-              <a:buSzPct val="100000"/>
-              <a:buChar char="•"/>
-            </a:pPr>
-            <a:r>
-              <a:rPr lang="en-US" sz="2000" dirty="0">
-                <a:solidFill>
-                  <a:srgbClr val="1F2933"/>
-                </a:solidFill>
-                <a:latin typeface="Calibri" pitchFamily="34" charset="0"/>
-                <a:ea typeface="Calibri" pitchFamily="34" charset="-122"/>
-                <a:cs typeface="Calibri" pitchFamily="34" charset="-120"/>
-              </a:rPr>
-              <a:t>An out-of-distribution warning before inference, when an image no longer resembles the training data</a:t>
-            </a:r>
-            <a:endParaRPr lang="en-US" sz="2000" dirty="0"/>
-          </a:p>
-          <a:p>
-            <a:pPr lvl="1" marL="685800" indent="-342900">
-              <a:lnSpc>
-                <a:spcPct val="105000"/>
-              </a:lnSpc>
-              <a:spcAft>
-                <a:spcPts val="800"/>
-              </a:spcAft>
-              <a:buSzPct val="100000"/>
-              <a:buChar char="▪"/>
-            </a:pPr>
-            <a:r>
-              <a:rPr lang="en-US" sz="1700" dirty="0">
-                <a:solidFill>
-                  <a:srgbClr val="5A6675"/>
-                </a:solidFill>
-                <a:latin typeface="Calibri" pitchFamily="34" charset="0"/>
-                <a:ea typeface="Calibri" pitchFamily="34" charset="-122"/>
-                <a:cs typeface="Calibri" pitchFamily="34" charset="-120"/>
-              </a:rPr>
-              <a:t>Catches the stain, exposure and sensor changes that would quietly degrade predictions; it will not catch subtle texture drift</a:t>
-            </a:r>
-            <a:endParaRPr lang="en-US" sz="2000" dirty="0"/>
-          </a:p>
-          <a:p>
-            <a:pPr marL="342900" indent="-342900">
-              <a:lnSpc>
-                <a:spcPct val="105000"/>
-              </a:lnSpc>
-              <a:spcAft>
-                <a:spcPts val="1200"/>
-              </a:spcAft>
-              <a:buSzPct val="100000"/>
-              <a:buChar char="•"/>
-            </a:pPr>
-            <a:r>
-              <a:rPr lang="en-US" sz="2000" dirty="0">
-                <a:solidFill>
-                  <a:srgbClr val="1F2933"/>
-                </a:solidFill>
-                <a:latin typeface="Calibri" pitchFamily="34" charset="0"/>
-                <a:ea typeface="Calibri" pitchFamily="34" charset="-122"/>
-                <a:cs typeface="Calibri" pitchFamily="34" charset="-120"/>
-              </a:rPr>
-              <a:t>When it fires, recalibrating to the current image needs no retraining at all</a:t>
-            </a:r>
-            <a:endParaRPr lang="en-US" sz="2000" dirty="0"/>
-          </a:p>
-        </p:txBody>
-      </p:sp>
-      <p:sp>
-        <p:nvSpPr>
-          <p:cNvPr id="6" name="Shape 4"/>
-          <p:cNvSpPr/>
-          <p:nvPr/>
-        </p:nvSpPr>
-        <p:spPr>
-          <a:xfrm>
-            <a:off x="566928" y="5650992"/>
-            <a:ext cx="11055096" cy="566928"/>
-          </a:xfrm>
-          <a:prstGeom prst="rect">
-            <a:avLst/>
-          </a:prstGeom>
-          <a:solidFill>
-            <a:srgbClr val="F4F8FD"/>
-          </a:solidFill>
-          <a:ln w="9525">
-            <a:solidFill>
-              <a:srgbClr val="3674C1"/>
-            </a:solidFill>
-            <a:prstDash val="solid"/>
-          </a:ln>
-        </p:spPr>
-      </p:sp>
-      <p:sp>
-        <p:nvSpPr>
-          <p:cNvPr id="7" name="Text 5"/>
-          <p:cNvSpPr/>
-          <p:nvPr/>
-        </p:nvSpPr>
-        <p:spPr>
-          <a:xfrm>
-            <a:off x="768096" y="5650992"/>
-            <a:ext cx="10652760" cy="566928"/>
-          </a:xfrm>
-          <a:prstGeom prst="rect">
-            <a:avLst/>
-          </a:prstGeom>
-          <a:noFill/>
-          <a:ln/>
-        </p:spPr>
-        <p:txBody>
-          <a:bodyPr wrap="square" rtlCol="0" anchor="ctr"/>
           <a:lstStyle/>
           <a:p>
             <a:pPr indent="0" marL="0">
               <a:buNone/>
             </a:pPr>
             <a:r>
-              <a:rPr lang="en-US" sz="1600" b="1" dirty="0">
-                <a:solidFill>
-                  <a:srgbClr val="1F4C86"/>
-                </a:solidFill>
-                <a:latin typeface="Calibri" pitchFamily="34" charset="0"/>
-                <a:ea typeface="Calibri" pitchFamily="34" charset="-122"/>
-                <a:cs typeface="Calibri" pitchFamily="34" charset="-120"/>
-              </a:rPr>
-              <a:t>Try recalibration before you commit to retraining. It is cheap, and it costs you nothing to find out.</a:t>
-            </a:r>
-            <a:endParaRPr lang="en-US" sz="1600" dirty="0"/>
+              <a:rPr lang="en-US" sz="1900" dirty="0">
+                <a:solidFill>
+                  <a:srgbClr val="5A6675"/>
+                </a:solidFill>
+                <a:latin typeface="Calibri" pitchFamily="34" charset="0"/>
+                <a:ea typeface="Calibri" pitchFamily="34" charset="-122"/>
+                <a:cs typeface="Calibri" pitchFamily="34" charset="-120"/>
+              </a:rPr>
+              <a:t>Classifier validation you can put in a paper</a:t>
+            </a:r>
+            <a:endParaRPr lang="en-US" sz="1900" dirty="0"/>
+          </a:p>
+        </p:txBody>
+      </p:sp>
+      <p:sp>
+        <p:nvSpPr>
+          <p:cNvPr id="7" name="Text 5"/>
+          <p:cNvSpPr/>
+          <p:nvPr/>
+        </p:nvSpPr>
+        <p:spPr>
+          <a:xfrm>
+            <a:off x="566928" y="6199632"/>
+            <a:ext cx="8229600" cy="365760"/>
+          </a:xfrm>
+          <a:prstGeom prst="rect">
+            <a:avLst/>
+          </a:prstGeom>
+          <a:noFill/>
+          <a:ln/>
+        </p:spPr>
+        <p:txBody>
+          <a:bodyPr wrap="square" rtlCol="0" anchor="ctr"/>
+          <a:lstStyle/>
+          <a:p>
+            <a:pPr indent="0" marL="0">
+              <a:buNone/>
+            </a:pPr>
+            <a:r>
+              <a:rPr lang="en-US" sz="1400" dirty="0">
+                <a:solidFill>
+                  <a:srgbClr val="A8B2BF"/>
+                </a:solidFill>
+                <a:latin typeface="Calibri" pitchFamily="34" charset="0"/>
+                <a:ea typeface="Calibri" pitchFamily="34" charset="-122"/>
+                <a:cs typeface="Calibri" pitchFamily="34" charset="-120"/>
+              </a:rPr>
+              <a:t>michaelsnelson.github.io/BINA-I2K-2026-QuPath-Extensions</a:t>
+            </a:r>
+            <a:endParaRPr lang="en-US" sz="1400" dirty="0"/>
           </a:p>
         </p:txBody>
       </p:sp>
@@ -10680,14 +10725,41 @@
       </p:grpSpPr>
       <p:sp>
         <p:nvSpPr>
-          <p:cNvPr id="2" name="Text 0"/>
-          <p:cNvSpPr/>
-          <p:nvPr/>
-        </p:nvSpPr>
-        <p:spPr>
-          <a:xfrm>
-            <a:off x="566928" y="384048"/>
-            <a:ext cx="11055096" cy="658368"/>
+          <p:cNvPr id="2" name="Shape 0"/>
+          <p:cNvSpPr/>
+          <p:nvPr/>
+        </p:nvSpPr>
+        <p:spPr>
+          <a:xfrm>
+            <a:off x="566928" y="411480"/>
+            <a:ext cx="2331720" cy="457200"/>
+          </a:xfrm>
+          <a:prstGeom prst="roundRect">
+            <a:avLst>
+              <a:gd name="adj" fmla="val 20000"/>
+            </a:avLst>
+          </a:prstGeom>
+          <a:solidFill>
+            <a:srgbClr val="FBF1E0"/>
+          </a:solidFill>
+          <a:ln w="12700">
+            <a:solidFill>
+              <a:srgbClr val="B26A00"/>
+            </a:solidFill>
+            <a:prstDash val="solid"/>
+          </a:ln>
+        </p:spPr>
+      </p:sp>
+      <p:sp>
+        <p:nvSpPr>
+          <p:cNvPr id="3" name="Text 1"/>
+          <p:cNvSpPr/>
+          <p:nvPr/>
+        </p:nvSpPr>
+        <p:spPr>
+          <a:xfrm>
+            <a:off x="566928" y="411480"/>
+            <a:ext cx="2331720" cy="457200"/>
           </a:xfrm>
           <a:prstGeom prst="rect">
             <a:avLst/>
@@ -10699,33 +10771,72 @@
           <a:bodyPr wrap="square" rtlCol="0" anchor="ctr"/>
           <a:lstStyle/>
           <a:p>
-            <a:pPr indent="0" marL="0">
+            <a:pPr algn="ctr" indent="0" marL="0">
               <a:buNone/>
             </a:pPr>
             <a:r>
-              <a:rPr lang="en-US" sz="3000" b="1" dirty="0">
-                <a:solidFill>
-                  <a:srgbClr val="1F4C86"/>
+              <a:rPr lang="en-US" sz="1600" b="1" dirty="0">
+                <a:solidFill>
+                  <a:srgbClr val="B26A00"/>
                 </a:solidFill>
                 <a:latin typeface="Trebuchet MS" pitchFamily="34" charset="0"/>
                 <a:ea typeface="Trebuchet MS" pitchFamily="34" charset="-122"/>
                 <a:cs typeface="Trebuchet MS" pitchFamily="34" charset="-120"/>
               </a:rPr>
-              <a:t>QP-CAT — multiplexed cell analysis</a:t>
-            </a:r>
-            <a:endParaRPr lang="en-US" sz="3000" dirty="0"/>
-          </a:p>
-        </p:txBody>
-      </p:sp>
-      <p:sp>
-        <p:nvSpPr>
-          <p:cNvPr id="3" name="Shape 1"/>
-          <p:cNvSpPr/>
-          <p:nvPr/>
-        </p:nvSpPr>
-        <p:spPr>
-          <a:xfrm>
-            <a:off x="566928" y="1097280"/>
+              <a:t>▶  DEMO ONLY</a:t>
+            </a:r>
+            <a:endParaRPr lang="en-US" sz="1600" dirty="0"/>
+          </a:p>
+        </p:txBody>
+      </p:sp>
+      <p:sp>
+        <p:nvSpPr>
+          <p:cNvPr id="4" name="Text 2"/>
+          <p:cNvSpPr/>
+          <p:nvPr/>
+        </p:nvSpPr>
+        <p:spPr>
+          <a:xfrm>
+            <a:off x="566928" y="1024128"/>
+            <a:ext cx="11055096" cy="685800"/>
+          </a:xfrm>
+          <a:prstGeom prst="rect">
+            <a:avLst/>
+          </a:prstGeom>
+          <a:noFill/>
+          <a:ln/>
+        </p:spPr>
+        <p:txBody>
+          <a:bodyPr wrap="square" rtlCol="0" anchor="ctr"/>
+          <a:lstStyle/>
+          <a:p>
+            <a:pPr indent="0" marL="0">
+              <a:buNone/>
+            </a:pPr>
+            <a:r>
+              <a:rPr lang="en-US" sz="3200" b="1" dirty="0">
+                <a:solidFill>
+                  <a:srgbClr val="1F4C86"/>
+                </a:solidFill>
+                <a:latin typeface="Trebuchet MS" pitchFamily="34" charset="0"/>
+                <a:ea typeface="Trebuchet MS" pitchFamily="34" charset="-122"/>
+                <a:cs typeface="Trebuchet MS" pitchFamily="34" charset="-120"/>
+              </a:rPr>
+              <a:t>Confusion Matrix</a:t>
+            </a:r>
+            <a:endParaRPr lang="en-US" sz="3200" dirty="0"/>
+          </a:p>
+        </p:txBody>
+      </p:sp>
+      <p:sp>
+        <p:nvSpPr>
+          <p:cNvPr id="5" name="Shape 3"/>
+          <p:cNvSpPr/>
+          <p:nvPr/>
+        </p:nvSpPr>
+        <p:spPr>
+          <a:xfrm>
+            <a:off x="566928" y="1783080"/>
             <a:ext cx="1920240" cy="50292"/>
           </a:xfrm>
           <a:prstGeom prst="rect">
@@ -10739,53 +10850,14 @@
       </p:sp>
       <p:sp>
         <p:nvSpPr>
-          <p:cNvPr id="4" name="Text 2"/>
-          <p:cNvSpPr/>
-          <p:nvPr/>
-        </p:nvSpPr>
-        <p:spPr>
-          <a:xfrm>
-            <a:off x="566928" y="1243584"/>
-            <a:ext cx="11055096" cy="384048"/>
-          </a:xfrm>
-          <a:prstGeom prst="rect">
-            <a:avLst/>
-          </a:prstGeom>
-          <a:noFill/>
-          <a:ln/>
-        </p:spPr>
-        <p:txBody>
-          <a:bodyPr wrap="square" rtlCol="0" anchor="ctr"/>
-          <a:lstStyle/>
-          <a:p>
-            <a:pPr indent="0" marL="0">
-              <a:buNone/>
-            </a:pPr>
-            <a:r>
-              <a:rPr lang="en-US" sz="1700" i="1" dirty="0">
-                <a:solidFill>
-                  <a:srgbClr val="5A6675"/>
-                </a:solidFill>
-                <a:latin typeface="Calibri" pitchFamily="34" charset="0"/>
-                <a:ea typeface="Calibri" pitchFamily="34" charset="-122"/>
-                <a:cs typeface="Calibri" pitchFamily="34" charset="-120"/>
-              </a:rPr>
-              <a:t>The usual workflow loses the link back to the tissue. This keeps it.</a:t>
-            </a:r>
-            <a:endParaRPr lang="en-US" sz="1700" dirty="0"/>
-          </a:p>
-        </p:txBody>
-      </p:sp>
-      <p:sp>
-        <p:nvSpPr>
-          <p:cNvPr id="5" name="Text 3"/>
-          <p:cNvSpPr/>
-          <p:nvPr/>
-        </p:nvSpPr>
-        <p:spPr>
-          <a:xfrm>
-            <a:off x="640080" y="1755648"/>
-            <a:ext cx="10963656" cy="4279392"/>
+          <p:cNvPr id="6" name="Text 4"/>
+          <p:cNvSpPr/>
+          <p:nvPr/>
+        </p:nvSpPr>
+        <p:spPr>
+          <a:xfrm>
+            <a:off x="640080" y="2103120"/>
+            <a:ext cx="10963656" cy="3017520"/>
           </a:xfrm>
           <a:prstGeom prst="rect">
             <a:avLst/>
@@ -10798,11 +10870,8 @@
           <a:lstStyle/>
           <a:p>
             <a:pPr marL="342900" indent="-342900">
-              <a:lnSpc>
-                <a:spcPct val="105000"/>
-              </a:lnSpc>
               <a:spcAft>
-                <a:spcPts val="1200"/>
+                <a:spcPts val="1400"/>
               </a:spcAft>
               <a:buSzPct val="100000"/>
               <a:buChar char="•"/>
@@ -10816,17 +10885,14 @@
                 <a:ea typeface="Calibri" pitchFamily="34" charset="-122"/>
                 <a:cs typeface="Calibri" pitchFamily="34" charset="-120"/>
               </a:rPr>
-              <a:t>The full scientific Python stack embedded in QuPath. No conda, no command line — one click, 1.5–2.5 GB, 5–15 minutes, once</a:t>
+              <a:t>Click the largest off-diagonal cell — those cells highlight on the slide</a:t>
             </a:r>
             <a:endParaRPr lang="en-US" sz="2000" dirty="0"/>
           </a:p>
           <a:p>
             <a:pPr marL="342900" indent="-342900">
-              <a:lnSpc>
-                <a:spcPct val="105000"/>
-              </a:lnSpc>
               <a:spcAft>
-                <a:spcPts val="1200"/>
+                <a:spcPts val="1400"/>
               </a:spcAft>
               <a:buSzPct val="100000"/>
               <a:buChar char="•"/>
@@ -10840,17 +10906,14 @@
                 <a:ea typeface="Calibri" pitchFamily="34" charset="-122"/>
                 <a:cs typeface="Calibri" pitchFamily="34" charset="-120"/>
               </a:rPr>
-              <a:t>Clustering, marker gating with suggested thresholds, spatial statistics, batch correction</a:t>
+              <a:t>"The classifier is 87% accurate" becomes "it confuses these two things, for this reason"</a:t>
             </a:r>
             <a:endParaRPr lang="en-US" sz="2000" dirty="0"/>
           </a:p>
           <a:p>
             <a:pPr marL="342900" indent="-342900">
-              <a:lnSpc>
-                <a:spcPct val="105000"/>
-              </a:lnSpc>
               <a:spcAft>
-                <a:spcPts val="1200"/>
+                <a:spcPts val="1400"/>
               </a:spcAft>
               <a:buSzPct val="100000"/>
               <a:buChar char="•"/>
@@ -10864,17 +10927,14 @@
                 <a:ea typeface="Calibri" pitchFamily="34" charset="-122"/>
                 <a:cs typeface="Calibri" pitchFamily="34" charset="-120"/>
               </a:rPr>
-              <a:t>Label a small subset by hand and have the rest of the project labelled for you — no object classifier involved</a:t>
+              <a:t>Across a project: per-image breakdown, with divergent images flagged automatically</a:t>
             </a:r>
             <a:endParaRPr lang="en-US" sz="2000" dirty="0"/>
           </a:p>
           <a:p>
             <a:pPr marL="342900" indent="-342900">
-              <a:lnSpc>
-                <a:spcPct val="105000"/>
-              </a:lnSpc>
               <a:spcAft>
-                <a:spcPts val="1200"/>
+                <a:spcPts val="1400"/>
               </a:spcAft>
               <a:buSzPct val="100000"/>
               <a:buChar char="•"/>
@@ -10888,39 +10948,15 @@
                 <a:ea typeface="Calibri" pitchFamily="34" charset="-122"/>
                 <a:cs typeface="Calibri" pitchFamily="34" charset="-120"/>
               </a:rPr>
-              <a:t>Draw a polygon around a region of the embedding and those cells are selected in the viewer</a:t>
+              <a:t>A flagged image points at the ground truth, the staining, or the classifier’s generalisation — the breakdown tells you which</a:t>
             </a:r>
             <a:endParaRPr lang="en-US" sz="2000" dirty="0"/>
           </a:p>
-          <a:p>
-            <a:pPr marL="342900" indent="-342900">
-              <a:lnSpc>
-                <a:spcPct val="105000"/>
-              </a:lnSpc>
-              <a:spcAft>
-                <a:spcPts val="1200"/>
-              </a:spcAft>
-              <a:buSzPct val="100000"/>
-              <a:buChar char="•"/>
-            </a:pPr>
-            <a:r>
-              <a:rPr lang="en-US" sz="2000" dirty="0">
-                <a:solidFill>
-                  <a:srgbClr val="1F2933"/>
-                </a:solidFill>
-                <a:latin typeface="Calibri" pitchFamily="34" charset="0"/>
-                <a:ea typeface="Calibri" pitchFamily="34" charset="-122"/>
-                <a:cs typeface="Calibri" pitchFamily="34" charset="-120"/>
-              </a:rPr>
-              <a:t>Configure independent areas and no spatial graph edge crosses two TMA cores, so separate tissue stays separate</a:t>
-            </a:r>
-            <a:endParaRPr lang="en-US" sz="2000" dirty="0"/>
-          </a:p>
-        </p:txBody>
-      </p:sp>
-      <p:sp>
-        <p:nvSpPr>
-          <p:cNvPr id="6" name="Shape 4"/>
+        </p:txBody>
+      </p:sp>
+      <p:sp>
+        <p:nvSpPr>
+          <p:cNvPr id="7" name="Shape 5"/>
           <p:cNvSpPr/>
           <p:nvPr/>
         </p:nvSpPr>
@@ -10945,7 +10981,7 @@
       </p:sp>
       <p:sp>
         <p:nvSpPr>
-          <p:cNvPr id="7" name="Text 5"/>
+          <p:cNvPr id="8" name="Text 6"/>
           <p:cNvSpPr/>
           <p:nvPr/>
         </p:nvSpPr>
@@ -10976,7 +11012,7 @@
                 <a:ea typeface="Calibri" pitchFamily="34" charset="-122"/>
                 <a:cs typeface="Calibri" pitchFamily="34" charset="-120"/>
               </a:rPr>
-              <a:t>Author’s own README, first line: many of the features are lightly tested or entirely untested. Treat results as a starting point.</a:t>
+              <a:t>Originated by Kristin Gallik — concept and initial scripts; built out at LOCI.  ·  Demo only: the repository is currently private.</a:t>
             </a:r>
             <a:endParaRPr lang="en-US" sz="1600" dirty="0"/>
           </a:p>
@@ -10984,7 +11020,7 @@
       </p:sp>
       <p:sp>
         <p:nvSpPr>
-          <p:cNvPr id="8" name="Text 6"/>
+          <p:cNvPr id="9" name="Text 7"/>
           <p:cNvSpPr/>
           <p:nvPr/>
         </p:nvSpPr>
@@ -11126,7 +11162,7 @@
                 <a:ea typeface="Trebuchet MS" pitchFamily="34" charset="-122"/>
                 <a:cs typeface="Trebuchet MS" pitchFamily="34" charset="-120"/>
               </a:rPr>
-              <a:t>06</a:t>
+              <a:t>05</a:t>
             </a:r>
             <a:endParaRPr lang="en-US" sz="5400" dirty="0"/>
           </a:p>
@@ -11165,7 +11201,7 @@
                 <a:ea typeface="Trebuchet MS" pitchFamily="34" charset="-122"/>
                 <a:cs typeface="Trebuchet MS" pitchFamily="34" charset="-120"/>
               </a:rPr>
-              <a:t>Fiber Analysis and TME-Quant</a:t>
+              <a:t>DL Pixel Classifier and QP-CAT</a:t>
             </a:r>
             <a:endParaRPr lang="en-US" sz="4000" dirty="0"/>
           </a:p>
@@ -11204,7 +11240,7 @@
                 <a:ea typeface="Calibri" pitchFamily="34" charset="-122"/>
                 <a:cs typeface="Calibri" pitchFamily="34" charset="-120"/>
               </a:rPr>
-              <a:t>Collagen architecture, not just presence</a:t>
+              <a:t>Pixel classification, cell phenotyping, and knowing when not to trust them</a:t>
             </a:r>
             <a:endParaRPr lang="en-US" sz="1900" dirty="0"/>
           </a:p>
@@ -11353,7 +11389,7 @@
                 <a:ea typeface="Trebuchet MS" pitchFamily="34" charset="-122"/>
                 <a:cs typeface="Trebuchet MS" pitchFamily="34" charset="-120"/>
               </a:rPr>
-              <a:t>Why fibre architecture</a:t>
+              <a:t>Deep learning pixel classification</a:t>
             </a:r>
             <a:endParaRPr lang="en-US" sz="3000" dirty="0"/>
           </a:p>
@@ -11412,7 +11448,7 @@
                 <a:ea typeface="Calibri" pitchFamily="34" charset="-122"/>
                 <a:cs typeface="Calibri" pitchFamily="34" charset="-120"/>
               </a:rPr>
-              <a:t>Conklin et al. 2011, American Journal of Pathology 178:1221.</a:t>
+              <a:t>For when the built-in classifier is not enough: subtle textures, classes that differ by architecture rather than colour.</a:t>
             </a:r>
             <a:endParaRPr lang="en-US" sz="1700" dirty="0"/>
           </a:p>
@@ -11458,7 +11494,7 @@
                 <a:ea typeface="Calibri" pitchFamily="34" charset="-122"/>
                 <a:cs typeface="Calibri" pitchFamily="34" charset="-120"/>
               </a:rPr>
-              <a:t>Collagen is not simply present or absent — the arrangement carries the biology</a:t>
+              <a:t>Same interaction as the built-in classifier: draw a few sparse regions per class</a:t>
             </a:r>
             <a:endParaRPr lang="en-US" sz="2000" dirty="0"/>
           </a:p>
@@ -11482,7 +11518,7 @@
                 <a:ea typeface="Calibri" pitchFamily="34" charset="-122"/>
                 <a:cs typeface="Calibri" pitchFamily="34" charset="-120"/>
               </a:rPr>
-              <a:t>Wavy versus straightened; aligned versus isotropic; and how that changes at a boundary</a:t>
+              <a:t>The extension samples training tiles from what you marked — you are steering a sampler</a:t>
             </a:r>
             <a:endParaRPr lang="en-US" sz="2000" dirty="0"/>
           </a:p>
@@ -11506,7 +11542,7 @@
                 <a:ea typeface="Calibri" pitchFamily="34" charset="-122"/>
                 <a:cs typeface="Calibri" pitchFamily="34" charset="-120"/>
               </a:rPr>
-              <a:t>In breast pathology, straightened fibres running perpendicular to the tumour boundary act as tracks for invading cells</a:t>
+              <a:t>Brightfield and multi-channel fluorescence, with channel selection and intensity normalisation</a:t>
             </a:r>
             <a:endParaRPr lang="en-US" sz="2000" dirty="0"/>
           </a:p>
@@ -11530,7 +11566,7 @@
                 <a:ea typeface="Calibri" pitchFamily="34" charset="-122"/>
                 <a:cs typeface="Calibri" pitchFamily="34" charset="-120"/>
               </a:rPr>
-              <a:t>Hazard ratios of 3.0–3.9 for disease-specific and disease-free survival, independent of grade, size, receptor and node status</a:t>
+              <a:t>Train across several project images at once for representative sampling</a:t>
             </a:r>
             <a:endParaRPr lang="en-US" sz="2000" dirty="0"/>
           </a:p>
@@ -11538,71 +11574,7 @@
       </p:sp>
       <p:sp>
         <p:nvSpPr>
-          <p:cNvPr id="6" name="Shape 4"/>
-          <p:cNvSpPr/>
-          <p:nvPr/>
-        </p:nvSpPr>
-        <p:spPr>
-          <a:xfrm>
-            <a:off x="566928" y="5650992"/>
-            <a:ext cx="11055096" cy="566928"/>
-          </a:xfrm>
-          <a:prstGeom prst="rect">
-            <a:avLst/>
-          </a:prstGeom>
-          <a:solidFill>
-            <a:srgbClr val="F4F8FD"/>
-          </a:solidFill>
-          <a:ln w="9525">
-            <a:solidFill>
-              <a:srgbClr val="3674C1"/>
-            </a:solidFill>
-            <a:prstDash val="solid"/>
-          </a:ln>
-        </p:spPr>
-      </p:sp>
-      <p:sp>
-        <p:nvSpPr>
-          <p:cNvPr id="7" name="Text 5"/>
-          <p:cNvSpPr/>
-          <p:nvPr/>
-        </p:nvSpPr>
-        <p:spPr>
-          <a:xfrm>
-            <a:off x="768096" y="5650992"/>
-            <a:ext cx="10652760" cy="566928"/>
-          </a:xfrm>
-          <a:prstGeom prst="rect">
-            <a:avLst/>
-          </a:prstGeom>
-          <a:noFill/>
-          <a:ln/>
-        </p:spPr>
-        <p:txBody>
-          <a:bodyPr wrap="square" rtlCol="0" anchor="ctr"/>
-          <a:lstStyle/>
-          <a:p>
-            <a:pPr indent="0" marL="0">
-              <a:buNone/>
-            </a:pPr>
-            <a:r>
-              <a:rPr lang="en-US" sz="1600" b="1" dirty="0">
-                <a:solidFill>
-                  <a:srgbClr val="1F4C86"/>
-                </a:solidFill>
-                <a:latin typeface="Calibri" pitchFamily="34" charset="0"/>
-                <a:ea typeface="Calibri" pitchFamily="34" charset="-122"/>
-                <a:cs typeface="Calibri" pitchFamily="34" charset="-120"/>
-              </a:rPr>
-              <a:t>The same wavy-to-straight axis turns up wherever collagen bears load, which is why the measures travel beyond breast.</a:t>
-            </a:r>
-            <a:endParaRPr lang="en-US" sz="1600" dirty="0"/>
-          </a:p>
-        </p:txBody>
-      </p:sp>
-      <p:sp>
-        <p:nvSpPr>
-          <p:cNvPr id="8" name="Text 6"/>
+          <p:cNvPr id="6" name="Text 4"/>
           <p:cNvSpPr/>
           <p:nvPr/>
         </p:nvSpPr>
@@ -11704,7 +11676,7 @@
                 <a:ea typeface="Trebuchet MS" pitchFamily="34" charset="-122"/>
                 <a:cs typeface="Trebuchet MS" pitchFamily="34" charset="-120"/>
               </a:rPr>
-              <a:t>Two complementary tools</a:t>
+              <a:t>The two features that tell you when not to trust it</a:t>
             </a:r>
             <a:endParaRPr lang="en-US" sz="3000" dirty="0"/>
           </a:p>
@@ -11732,34 +11704,14 @@
       </p:sp>
       <p:sp>
         <p:nvSpPr>
-          <p:cNvPr id="4" name="Shape 2"/>
-          <p:cNvSpPr/>
-          <p:nvPr/>
-        </p:nvSpPr>
-        <p:spPr>
-          <a:xfrm>
-            <a:off x="566928" y="1554480"/>
-            <a:ext cx="5298948" cy="530352"/>
-          </a:xfrm>
-          <a:prstGeom prst="rect">
-            <a:avLst/>
-          </a:prstGeom>
-          <a:solidFill>
-            <a:srgbClr val="E8F0FA"/>
-          </a:solidFill>
-          <a:ln/>
-        </p:spPr>
-      </p:sp>
-      <p:sp>
-        <p:nvSpPr>
-          <p:cNvPr id="5" name="Text 3"/>
-          <p:cNvSpPr/>
-          <p:nvPr/>
-        </p:nvSpPr>
-        <p:spPr>
-          <a:xfrm>
-            <a:off x="731520" y="1554480"/>
-            <a:ext cx="4969764" cy="530352"/>
+          <p:cNvPr id="4" name="Text 2"/>
+          <p:cNvSpPr/>
+          <p:nvPr/>
+        </p:nvSpPr>
+        <p:spPr>
+          <a:xfrm>
+            <a:off x="566928" y="1243584"/>
+            <a:ext cx="11055096" cy="384048"/>
           </a:xfrm>
           <a:prstGeom prst="rect">
             <a:avLst/>
@@ -11775,30 +11727,30 @@
               <a:buNone/>
             </a:pPr>
             <a:r>
-              <a:rPr lang="en-US" sz="2000" b="1" dirty="0">
-                <a:solidFill>
-                  <a:srgbClr val="1F4C86"/>
-                </a:solidFill>
-                <a:latin typeface="Trebuchet MS" pitchFamily="34" charset="0"/>
-                <a:ea typeface="Trebuchet MS" pitchFamily="34" charset="-122"/>
-                <a:cs typeface="Trebuchet MS" pitchFamily="34" charset="-120"/>
-              </a:rPr>
-              <a:t>Fiber Analysis — measure a zone</a:t>
-            </a:r>
-            <a:endParaRPr lang="en-US" sz="2000" dirty="0"/>
-          </a:p>
-        </p:txBody>
-      </p:sp>
-      <p:sp>
-        <p:nvSpPr>
-          <p:cNvPr id="6" name="Text 4"/>
-          <p:cNvSpPr/>
-          <p:nvPr/>
-        </p:nvSpPr>
-        <p:spPr>
-          <a:xfrm>
-            <a:off x="658368" y="2240280"/>
-            <a:ext cx="5116068" cy="3566160"/>
+              <a:rPr lang="en-US" sz="1700" i="1" dirty="0">
+                <a:solidFill>
+                  <a:srgbClr val="5A6675"/>
+                </a:solidFill>
+                <a:latin typeface="Calibri" pitchFamily="34" charset="0"/>
+                <a:ea typeface="Calibri" pitchFamily="34" charset="-122"/>
+                <a:cs typeface="Calibri" pitchFamily="34" charset="-120"/>
+              </a:rPr>
+              <a:t>Domain shift — a new scanner, a new stain, a new batch — is the practical problem, far more often than model architecture.</a:t>
+            </a:r>
+            <a:endParaRPr lang="en-US" sz="1700" dirty="0"/>
+          </a:p>
+        </p:txBody>
+      </p:sp>
+      <p:sp>
+        <p:nvSpPr>
+          <p:cNvPr id="5" name="Text 3"/>
+          <p:cNvSpPr/>
+          <p:nvPr/>
+        </p:nvSpPr>
+        <p:spPr>
+          <a:xfrm>
+            <a:off x="640080" y="1755648"/>
+            <a:ext cx="10963656" cy="4279392"/>
           </a:xfrm>
           <a:prstGeom prst="rect">
             <a:avLst/>
@@ -11811,14 +11763,17 @@
           <a:lstStyle/>
           <a:p>
             <a:pPr marL="342900" indent="-342900">
+              <a:lnSpc>
+                <a:spcPct val="105000"/>
+              </a:lnSpc>
               <a:spcAft>
-                <a:spcPts val="1100"/>
+                <a:spcPts val="1200"/>
               </a:spcAft>
               <a:buSzPct val="100000"/>
               <a:buChar char="•"/>
             </a:pPr>
             <a:r>
-              <a:rPr lang="en-US" sz="1800" dirty="0">
+              <a:rPr lang="en-US" sz="2000" dirty="0">
                 <a:solidFill>
                   <a:srgbClr val="1F2933"/>
                 </a:solidFill>
@@ -11826,20 +11781,47 @@
                 <a:ea typeface="Calibri" pitchFamily="34" charset="-122"/>
                 <a:cs typeface="Calibri" pitchFamily="34" charset="-120"/>
               </a:rPr>
-              <a:t>A band of chosen width inside, outside, or across an annotation boundary</a:t>
-            </a:r>
-            <a:endParaRPr lang="en-US" sz="1800" dirty="0"/>
+              <a:t>Full per-pixel confidence, not just the winning class — the model’s certainty rendered pixel by pixel</a:t>
+            </a:r>
+            <a:endParaRPr lang="en-US" sz="2000" dirty="0"/>
+          </a:p>
+          <a:p>
+            <a:pPr lvl="1" marL="685800" indent="-342900">
+              <a:lnSpc>
+                <a:spcPct val="105000"/>
+              </a:lnSpc>
+              <a:spcAft>
+                <a:spcPts val="800"/>
+              </a:spcAft>
+              <a:buSzPct val="100000"/>
+              <a:buChar char="▪"/>
+            </a:pPr>
+            <a:r>
+              <a:rPr lang="en-US" sz="1700" dirty="0">
+                <a:solidFill>
+                  <a:srgbClr val="5A6675"/>
+                </a:solidFill>
+                <a:latin typeface="Calibri" pitchFamily="34" charset="0"/>
+                <a:ea typeface="Calibri" pitchFamily="34" charset="-122"/>
+                <a:cs typeface="Calibri" pitchFamily="34" charset="-120"/>
+              </a:rPr>
+              <a:t>The honest uncertainty is at the boundaries between classes — go and look at it</a:t>
+            </a:r>
+            <a:endParaRPr lang="en-US" sz="2000" dirty="0"/>
           </a:p>
           <a:p>
             <a:pPr marL="342900" indent="-342900">
+              <a:lnSpc>
+                <a:spcPct val="105000"/>
+              </a:lnSpc>
               <a:spcAft>
-                <a:spcPts val="1100"/>
+                <a:spcPts val="1200"/>
               </a:spcAft>
               <a:buSzPct val="100000"/>
               <a:buChar char="•"/>
             </a:pPr>
             <a:r>
-              <a:rPr lang="en-US" sz="1800" dirty="0">
+              <a:rPr lang="en-US" sz="2000" dirty="0">
                 <a:solidFill>
                   <a:srgbClr val="1F2933"/>
                 </a:solidFill>
@@ -11847,20 +11829,47 @@
                 <a:ea typeface="Calibri" pitchFamily="34" charset="-122"/>
                 <a:cs typeface="Calibri" pitchFamily="34" charset="-120"/>
               </a:rPr>
-              <a:t>Straightness: wavy versus straightened fibres, per window and per ROI</a:t>
-            </a:r>
-            <a:endParaRPr lang="en-US" sz="1800" dirty="0"/>
+              <a:t>An out-of-distribution warning before inference, when an image no longer resembles the training data</a:t>
+            </a:r>
+            <a:endParaRPr lang="en-US" sz="2000" dirty="0"/>
+          </a:p>
+          <a:p>
+            <a:pPr lvl="1" marL="685800" indent="-342900">
+              <a:lnSpc>
+                <a:spcPct val="105000"/>
+              </a:lnSpc>
+              <a:spcAft>
+                <a:spcPts val="800"/>
+              </a:spcAft>
+              <a:buSzPct val="100000"/>
+              <a:buChar char="▪"/>
+            </a:pPr>
+            <a:r>
+              <a:rPr lang="en-US" sz="1700" dirty="0">
+                <a:solidFill>
+                  <a:srgbClr val="5A6675"/>
+                </a:solidFill>
+                <a:latin typeface="Calibri" pitchFamily="34" charset="0"/>
+                <a:ea typeface="Calibri" pitchFamily="34" charset="-122"/>
+                <a:cs typeface="Calibri" pitchFamily="34" charset="-120"/>
+              </a:rPr>
+              <a:t>Catches the stain, exposure and sensor changes that would quietly degrade predictions; it will not catch subtle texture drift</a:t>
+            </a:r>
+            <a:endParaRPr lang="en-US" sz="2000" dirty="0"/>
           </a:p>
           <a:p>
             <a:pPr marL="342900" indent="-342900">
+              <a:lnSpc>
+                <a:spcPct val="105000"/>
+              </a:lnSpc>
               <a:spcAft>
-                <a:spcPts val="1100"/>
+                <a:spcPts val="1200"/>
               </a:spcAft>
               <a:buSzPct val="100000"/>
               <a:buChar char="•"/>
             </a:pPr>
             <a:r>
-              <a:rPr lang="en-US" sz="1800" dirty="0">
+              <a:rPr lang="en-US" sz="2000" dirty="0">
                 <a:solidFill>
                   <a:srgbClr val="1F2933"/>
                 </a:solidFill>
@@ -11868,63 +11877,47 @@
                 <a:ea typeface="Calibri" pitchFamily="34" charset="-122"/>
                 <a:cs typeface="Calibri" pitchFamily="34" charset="-120"/>
               </a:rPr>
-              <a:t>Morphometrics: coverage, length, branching, fractal dimension, gaps</a:t>
-            </a:r>
-            <a:endParaRPr lang="en-US" sz="1800" dirty="0"/>
-          </a:p>
-          <a:p>
-            <a:pPr marL="342900" indent="-342900">
-              <a:spcAft>
-                <a:spcPts val="1100"/>
-              </a:spcAft>
-              <a:buSzPct val="100000"/>
-              <a:buChar char="•"/>
-            </a:pPr>
-            <a:r>
-              <a:rPr lang="en-US" sz="1800" dirty="0">
-                <a:solidFill>
-                  <a:srgbClr val="1F2933"/>
-                </a:solidFill>
-                <a:latin typeface="Calibri" pitchFamily="34" charset="0"/>
-                <a:ea typeface="Calibri" pitchFamily="34" charset="-122"/>
-                <a:cs typeface="Calibri" pitchFamily="34" charset="-120"/>
-              </a:rPr>
-              <a:t>Texture: the information fibre-tracing misses entirely</a:t>
-            </a:r>
-            <a:endParaRPr lang="en-US" sz="1800" dirty="0"/>
-          </a:p>
-        </p:txBody>
-      </p:sp>
-      <p:sp>
-        <p:nvSpPr>
-          <p:cNvPr id="7" name="Shape 5"/>
-          <p:cNvSpPr/>
-          <p:nvPr/>
-        </p:nvSpPr>
-        <p:spPr>
-          <a:xfrm>
-            <a:off x="6323076" y="1554480"/>
-            <a:ext cx="5298948" cy="530352"/>
+              <a:t>When it fires, recalibrating to the current image needs no retraining at all</a:t>
+            </a:r>
+            <a:endParaRPr lang="en-US" sz="2000" dirty="0"/>
+          </a:p>
+        </p:txBody>
+      </p:sp>
+      <p:sp>
+        <p:nvSpPr>
+          <p:cNvPr id="6" name="Shape 4"/>
+          <p:cNvSpPr/>
+          <p:nvPr/>
+        </p:nvSpPr>
+        <p:spPr>
+          <a:xfrm>
+            <a:off x="566928" y="5650992"/>
+            <a:ext cx="11055096" cy="566928"/>
           </a:xfrm>
           <a:prstGeom prst="rect">
             <a:avLst/>
           </a:prstGeom>
           <a:solidFill>
-            <a:srgbClr val="E8F0FA"/>
+            <a:srgbClr val="F4F8FD"/>
           </a:solidFill>
-          <a:ln/>
-        </p:spPr>
-      </p:sp>
-      <p:sp>
-        <p:nvSpPr>
-          <p:cNvPr id="8" name="Text 6"/>
-          <p:cNvSpPr/>
-          <p:nvPr/>
-        </p:nvSpPr>
-        <p:spPr>
-          <a:xfrm>
-            <a:off x="6487668" y="1554480"/>
-            <a:ext cx="4969764" cy="530352"/>
+          <a:ln w="9525">
+            <a:solidFill>
+              <a:srgbClr val="3674C1"/>
+            </a:solidFill>
+            <a:prstDash val="solid"/>
+          </a:ln>
+        </p:spPr>
+      </p:sp>
+      <p:sp>
+        <p:nvSpPr>
+          <p:cNvPr id="7" name="Text 5"/>
+          <p:cNvSpPr/>
+          <p:nvPr/>
+        </p:nvSpPr>
+        <p:spPr>
+          <a:xfrm>
+            <a:off x="768096" y="5650992"/>
+            <a:ext cx="10652760" cy="566928"/>
           </a:xfrm>
           <a:prstGeom prst="rect">
             <a:avLst/>
@@ -11940,129 +11933,23 @@
               <a:buNone/>
             </a:pPr>
             <a:r>
-              <a:rPr lang="en-US" sz="2000" b="1" dirty="0">
-                <a:solidFill>
-                  <a:srgbClr val="B26A00"/>
-                </a:solidFill>
-                <a:latin typeface="Trebuchet MS" pitchFamily="34" charset="0"/>
-                <a:ea typeface="Trebuchet MS" pitchFamily="34" charset="-122"/>
-                <a:cs typeface="Trebuchet MS" pitchFamily="34" charset="-120"/>
-              </a:rPr>
-              <a:t>TME-Quant — trace the fibres</a:t>
-            </a:r>
-            <a:endParaRPr lang="en-US" sz="2000" dirty="0"/>
-          </a:p>
-        </p:txBody>
-      </p:sp>
-      <p:sp>
-        <p:nvSpPr>
-          <p:cNvPr id="9" name="Text 7"/>
-          <p:cNvSpPr/>
-          <p:nvPr/>
-        </p:nvSpPr>
-        <p:spPr>
-          <a:xfrm>
-            <a:off x="6414516" y="2240280"/>
-            <a:ext cx="5116068" cy="3566160"/>
-          </a:xfrm>
-          <a:prstGeom prst="rect">
-            <a:avLst/>
-          </a:prstGeom>
-          <a:noFill/>
-          <a:ln/>
-        </p:spPr>
-        <p:txBody>
-          <a:bodyPr wrap="square" rtlCol="0" anchor="t"/>
-          <a:lstStyle/>
-          <a:p>
-            <a:pPr marL="342900" indent="-342900">
-              <a:spcAft>
-                <a:spcPts val="1100"/>
-              </a:spcAft>
-              <a:buSzPct val="100000"/>
-              <a:buChar char="•"/>
-            </a:pPr>
-            <a:r>
-              <a:rPr lang="en-US" sz="1800" dirty="0">
-                <a:solidFill>
-                  <a:srgbClr val="1F2933"/>
-                </a:solidFill>
-                <a:latin typeface="Calibri" pitchFamily="34" charset="0"/>
-                <a:ea typeface="Calibri" pitchFamily="34" charset="-122"/>
-                <a:cs typeface="Calibri" pitchFamily="34" charset="-120"/>
-              </a:rPr>
-              <a:t>Individual fibres extracted and committed back as objects</a:t>
-            </a:r>
-            <a:endParaRPr lang="en-US" sz="1800" dirty="0"/>
-          </a:p>
-          <a:p>
-            <a:pPr marL="342900" indent="-342900">
-              <a:spcAft>
-                <a:spcPts val="1100"/>
-              </a:spcAft>
-              <a:buSzPct val="100000"/>
-              <a:buChar char="•"/>
-            </a:pPr>
-            <a:r>
-              <a:rPr lang="en-US" sz="1800" dirty="0">
-                <a:solidFill>
-                  <a:srgbClr val="1F2933"/>
-                </a:solidFill>
-                <a:latin typeface="Calibri" pitchFamily="34" charset="0"/>
-                <a:ea typeface="Calibri" pitchFamily="34" charset="-122"/>
-                <a:cs typeface="Calibri" pitchFamily="34" charset="-120"/>
-              </a:rPr>
-              <a:t>Set the threshold by eye, with the mask shown before you commit</a:t>
-            </a:r>
-            <a:endParaRPr lang="en-US" sz="1800" dirty="0"/>
-          </a:p>
-          <a:p>
-            <a:pPr marL="342900" indent="-342900">
-              <a:spcAft>
-                <a:spcPts val="1100"/>
-              </a:spcAft>
-              <a:buSzPct val="100000"/>
-              <a:buChar char="•"/>
-            </a:pPr>
-            <a:r>
-              <a:rPr lang="en-US" sz="1800" dirty="0">
-                <a:solidFill>
-                  <a:srgbClr val="1F2933"/>
-                </a:solidFill>
-                <a:latin typeface="Calibri" pitchFamily="34" charset="0"/>
-                <a:ea typeface="Calibri" pitchFamily="34" charset="-122"/>
-                <a:cs typeface="Calibri" pitchFamily="34" charset="-120"/>
-              </a:rPr>
-              <a:t>Trace a few real fibres yourself, and it tunes its own parameters to match</a:t>
-            </a:r>
-            <a:endParaRPr lang="en-US" sz="1800" dirty="0"/>
-          </a:p>
-          <a:p>
-            <a:pPr marL="342900" indent="-342900">
-              <a:spcAft>
-                <a:spcPts val="1100"/>
-              </a:spcAft>
-              <a:buSzPct val="100000"/>
-              <a:buChar char="•"/>
-            </a:pPr>
-            <a:r>
-              <a:rPr lang="en-US" sz="1800" dirty="0">
-                <a:solidFill>
-                  <a:srgbClr val="1F2933"/>
-                </a:solidFill>
-                <a:latin typeface="Calibri" pitchFamily="34" charset="0"/>
-                <a:ea typeface="Calibri" pitchFamily="34" charset="-122"/>
-                <a:cs typeface="Calibri" pitchFamily="34" charset="-120"/>
-              </a:rPr>
-              <a:t>Fibres classified by orientation relative to a tumour boundary</a:t>
-            </a:r>
-            <a:endParaRPr lang="en-US" sz="1800" dirty="0"/>
-          </a:p>
-        </p:txBody>
-      </p:sp>
-      <p:sp>
-        <p:nvSpPr>
-          <p:cNvPr id="10" name="Text 8"/>
+              <a:rPr lang="en-US" sz="1600" b="1" dirty="0">
+                <a:solidFill>
+                  <a:srgbClr val="1F4C86"/>
+                </a:solidFill>
+                <a:latin typeface="Calibri" pitchFamily="34" charset="0"/>
+                <a:ea typeface="Calibri" pitchFamily="34" charset="-122"/>
+                <a:cs typeface="Calibri" pitchFamily="34" charset="-120"/>
+              </a:rPr>
+              <a:t>Try recalibration before you commit to retraining. It is cheap, and it costs you nothing to find out.</a:t>
+            </a:r>
+            <a:endParaRPr lang="en-US" sz="1600" dirty="0"/>
+          </a:p>
+        </p:txBody>
+      </p:sp>
+      <p:sp>
+        <p:nvSpPr>
+          <p:cNvPr id="8" name="Text 6"/>
           <p:cNvSpPr/>
           <p:nvPr/>
         </p:nvSpPr>
@@ -12539,7 +12426,7 @@
                 <a:ea typeface="Trebuchet MS" pitchFamily="34" charset="-122"/>
                 <a:cs typeface="Trebuchet MS" pitchFamily="34" charset="-120"/>
               </a:rPr>
-              <a:t>Please cite the methods</a:t>
+              <a:t>QP-CAT — multiplexed cell analysis</a:t>
             </a:r>
             <a:endParaRPr lang="en-US" sz="3000" dirty="0"/>
           </a:p>
@@ -12573,8 +12460,47 @@
         </p:nvSpPr>
         <p:spPr>
           <a:xfrm>
-            <a:off x="640080" y="1481328"/>
-            <a:ext cx="10963656" cy="4553712"/>
+            <a:off x="566928" y="1243584"/>
+            <a:ext cx="11055096" cy="384048"/>
+          </a:xfrm>
+          <a:prstGeom prst="rect">
+            <a:avLst/>
+          </a:prstGeom>
+          <a:noFill/>
+          <a:ln/>
+        </p:spPr>
+        <p:txBody>
+          <a:bodyPr wrap="square" rtlCol="0" anchor="ctr"/>
+          <a:lstStyle/>
+          <a:p>
+            <a:pPr indent="0" marL="0">
+              <a:buNone/>
+            </a:pPr>
+            <a:r>
+              <a:rPr lang="en-US" sz="1700" i="1" dirty="0">
+                <a:solidFill>
+                  <a:srgbClr val="5A6675"/>
+                </a:solidFill>
+                <a:latin typeface="Calibri" pitchFamily="34" charset="0"/>
+                <a:ea typeface="Calibri" pitchFamily="34" charset="-122"/>
+                <a:cs typeface="Calibri" pitchFamily="34" charset="-120"/>
+              </a:rPr>
+              <a:t>The usual workflow loses the link back to the tissue. This keeps it.</a:t>
+            </a:r>
+            <a:endParaRPr lang="en-US" sz="1700" dirty="0"/>
+          </a:p>
+        </p:txBody>
+      </p:sp>
+      <p:sp>
+        <p:nvSpPr>
+          <p:cNvPr id="5" name="Text 3"/>
+          <p:cNvSpPr/>
+          <p:nvPr/>
+        </p:nvSpPr>
+        <p:spPr>
+          <a:xfrm>
+            <a:off x="640080" y="1755648"/>
+            <a:ext cx="10963656" cy="4279392"/>
           </a:xfrm>
           <a:prstGeom prst="rect">
             <a:avLst/>
@@ -12605,7 +12531,7 @@
                 <a:ea typeface="Calibri" pitchFamily="34" charset="-122"/>
                 <a:cs typeface="Calibri" pitchFamily="34" charset="-120"/>
               </a:rPr>
-              <a:t>Both tools implement other people’s methods — cite the methods, not just the tools</a:t>
+              <a:t>The full scientific Python stack embedded in QuPath. No conda, no command line — one click, 1.5–2.5 GB, 5–15 minutes, once</a:t>
             </a:r>
             <a:endParaRPr lang="en-US" sz="2000" dirty="0"/>
           </a:p>
@@ -12629,7 +12555,7 @@
                 <a:ea typeface="Calibri" pitchFamily="34" charset="-122"/>
                 <a:cs typeface="Calibri" pitchFamily="34" charset="-120"/>
               </a:rPr>
-              <a:t>CT-FIRE — Bredfeldt et al. 2014, Journal of Biomedical Optics 19(1):016007</a:t>
+              <a:t>Clustering, marker gating with suggested thresholds, spatial statistics, batch correction</a:t>
             </a:r>
             <a:endParaRPr lang="en-US" sz="2000" dirty="0"/>
           </a:p>
@@ -12653,7 +12579,7 @@
                 <a:ea typeface="Calibri" pitchFamily="34" charset="-122"/>
                 <a:cs typeface="Calibri" pitchFamily="34" charset="-120"/>
               </a:rPr>
-              <a:t>CurveAlign — LOCI, University of Wisconsin–Madison</a:t>
+              <a:t>Label a small subset by hand and have the rest of the project labelled for you — no object classifier involved</a:t>
             </a:r>
             <a:endParaRPr lang="en-US" sz="2000" dirty="0"/>
           </a:p>
@@ -12677,7 +12603,7 @@
                 <a:ea typeface="Calibri" pitchFamily="34" charset="-122"/>
                 <a:cs typeface="Calibri" pitchFamily="34" charset="-120"/>
               </a:rPr>
-              <a:t>TACS — Provenzano et al. 2006, BMC Medicine 4:38; Conklin et al. 2011</a:t>
+              <a:t>Draw a polygon around a region of the embedding and those cells are selected in the viewer</a:t>
             </a:r>
             <a:endParaRPr lang="en-US" sz="2000" dirty="0"/>
           </a:p>
@@ -12701,7 +12627,7 @@
                 <a:ea typeface="Calibri" pitchFamily="34" charset="-122"/>
                 <a:cs typeface="Calibri" pitchFamily="34" charset="-120"/>
               </a:rPr>
-              <a:t>TWOMBLI — Wershof et al. 2021, Life Science Alliance 4(3):e202000880</a:t>
+              <a:t>Configure independent areas and no spatial graph edge crosses two TMA cores, so separate tissue stays separate</a:t>
             </a:r>
             <a:endParaRPr lang="en-US" sz="2000" dirty="0"/>
           </a:p>
@@ -12709,7 +12635,7 @@
       </p:sp>
       <p:sp>
         <p:nvSpPr>
-          <p:cNvPr id="5" name="Shape 3"/>
+          <p:cNvPr id="6" name="Shape 4"/>
           <p:cNvSpPr/>
           <p:nvPr/>
         </p:nvSpPr>
@@ -12734,7 +12660,7 @@
       </p:sp>
       <p:sp>
         <p:nvSpPr>
-          <p:cNvPr id="6" name="Text 4"/>
+          <p:cNvPr id="7" name="Text 5"/>
           <p:cNvSpPr/>
           <p:nvPr/>
         </p:nvSpPr>
@@ -12765,7 +12691,7 @@
                 <a:ea typeface="Calibri" pitchFamily="34" charset="-122"/>
                 <a:cs typeface="Calibri" pitchFamily="34" charset="-120"/>
               </a:rPr>
-              <a:t>Fiber Analysis re-implements TWOMBLI’s cheap metrics natively rather than bundling its FIJI plugins, so its fractal dimension and lacunarity diverge from TWOMBLI’s by roughly 20–40%. Do not compare them with published TWOMBLI numbers.</a:t>
+              <a:t>Author’s own README, first line: many of the features are lightly tested or entirely untested. Treat results as a starting point.</a:t>
             </a:r>
             <a:endParaRPr lang="en-US" sz="1600" dirty="0"/>
           </a:p>
@@ -12773,7 +12699,7 @@
       </p:sp>
       <p:sp>
         <p:nvSpPr>
-          <p:cNvPr id="7" name="Text 5"/>
+          <p:cNvPr id="8" name="Text 6"/>
           <p:cNvSpPr/>
           <p:nvPr/>
         </p:nvSpPr>
@@ -12915,7 +12841,7 @@
                 <a:ea typeface="Trebuchet MS" pitchFamily="34" charset="-122"/>
                 <a:cs typeface="Trebuchet MS" pitchFamily="34" charset="-120"/>
               </a:rPr>
-              <a:t>07</a:t>
+              <a:t>06</a:t>
             </a:r>
             <a:endParaRPr lang="en-US" sz="5400" dirty="0"/>
           </a:p>
@@ -12954,7 +12880,7 @@
                 <a:ea typeface="Trebuchet MS" pitchFamily="34" charset="-122"/>
                 <a:cs typeface="Trebuchet MS" pitchFamily="34" charset="-120"/>
               </a:rPr>
-              <a:t>QPSC — QuPath Scope Control</a:t>
+              <a:t>Fiber Analysis and TME-Quant</a:t>
             </a:r>
             <a:endParaRPr lang="en-US" sz="4000" dirty="0"/>
           </a:p>
@@ -12993,7 +12919,7 @@
                 <a:ea typeface="Calibri" pitchFamily="34" charset="-122"/>
                 <a:cs typeface="Calibri" pitchFamily="34" charset="-120"/>
               </a:rPr>
-              <a:t>The most complex thing here, and the reason for the rest</a:t>
+              <a:t>Collagen architecture, not just presence</a:t>
             </a:r>
             <a:endParaRPr lang="en-US" sz="1900" dirty="0"/>
           </a:p>
@@ -13142,7 +13068,7 @@
                 <a:ea typeface="Trebuchet MS" pitchFamily="34" charset="-122"/>
                 <a:cs typeface="Trebuchet MS" pitchFamily="34" charset="-120"/>
               </a:rPr>
-              <a:t>QPSC — QuPath Scope Control</a:t>
+              <a:t>Why fibre architecture</a:t>
             </a:r>
             <a:endParaRPr lang="en-US" sz="3000" dirty="0"/>
           </a:p>
@@ -13176,8 +13102,47 @@
         </p:nvSpPr>
         <p:spPr>
           <a:xfrm>
-            <a:off x="640080" y="1481328"/>
-            <a:ext cx="10963656" cy="4553712"/>
+            <a:off x="566928" y="1243584"/>
+            <a:ext cx="11055096" cy="384048"/>
+          </a:xfrm>
+          <a:prstGeom prst="rect">
+            <a:avLst/>
+          </a:prstGeom>
+          <a:noFill/>
+          <a:ln/>
+        </p:spPr>
+        <p:txBody>
+          <a:bodyPr wrap="square" rtlCol="0" anchor="ctr"/>
+          <a:lstStyle/>
+          <a:p>
+            <a:pPr indent="0" marL="0">
+              <a:buNone/>
+            </a:pPr>
+            <a:r>
+              <a:rPr lang="en-US" sz="1700" i="1" dirty="0">
+                <a:solidFill>
+                  <a:srgbClr val="5A6675"/>
+                </a:solidFill>
+                <a:latin typeface="Calibri" pitchFamily="34" charset="0"/>
+                <a:ea typeface="Calibri" pitchFamily="34" charset="-122"/>
+                <a:cs typeface="Calibri" pitchFamily="34" charset="-120"/>
+              </a:rPr>
+              <a:t>Conklin et al. 2011, American Journal of Pathology 178:1221.</a:t>
+            </a:r>
+            <a:endParaRPr lang="en-US" sz="1700" dirty="0"/>
+          </a:p>
+        </p:txBody>
+      </p:sp>
+      <p:sp>
+        <p:nvSpPr>
+          <p:cNvPr id="5" name="Text 3"/>
+          <p:cNvSpPr/>
+          <p:nvPr/>
+        </p:nvSpPr>
+        <p:spPr>
+          <a:xfrm>
+            <a:off x="640080" y="1755648"/>
+            <a:ext cx="10963656" cy="4279392"/>
           </a:xfrm>
           <a:prstGeom prst="rect">
             <a:avLst/>
@@ -13208,7 +13173,7 @@
                 <a:ea typeface="Calibri" pitchFamily="34" charset="-122"/>
                 <a:cs typeface="Calibri" pitchFamily="34" charset="-120"/>
               </a:rPr>
-              <a:t>Draw a box around a region in QuPath. The stage moves, the tiles are captured and stitched, and the image appears back in your project</a:t>
+              <a:t>Collagen is not simply present or absent — the arrangement carries the biology</a:t>
             </a:r>
             <a:endParaRPr lang="en-US" sz="2000" dirty="0"/>
           </a:p>
@@ -13232,7 +13197,7 @@
                 <a:ea typeface="Calibri" pitchFamily="34" charset="-122"/>
                 <a:cs typeface="Calibri" pitchFamily="34" charset="-120"/>
               </a:rPr>
-              <a:t>Target specific annotations on a slide you already scanned</a:t>
+              <a:t>Wavy versus straightened; aligned versus isotropic; and how that changes at a boundary</a:t>
             </a:r>
             <a:endParaRPr lang="en-US" sz="2000" dirty="0"/>
           </a:p>
@@ -13256,7 +13221,7 @@
                 <a:ea typeface="Calibri" pitchFamily="34" charset="-122"/>
                 <a:cs typeface="Calibri" pitchFamily="34" charset="-120"/>
               </a:rPr>
-              <a:t>Live camera view, stage map, saved positions, and a virtual joystick</a:t>
+              <a:t>In breast pathology, straightened fibres running perpendicular to the tumour boundary act as tracks for invading cells</a:t>
             </a:r>
             <a:endParaRPr lang="en-US" sz="2000" dirty="0"/>
           </a:p>
@@ -13280,7 +13245,7 @@
                 <a:ea typeface="Calibri" pitchFamily="34" charset="-122"/>
                 <a:cs typeface="Calibri" pitchFamily="34" charset="-120"/>
               </a:rPr>
-              <a:t>Brightfield, multi-channel fluorescence, and combined passes on a single-camera scope</a:t>
+              <a:t>Hazard ratios of 3.0–3.9 for disease-specific and disease-free survival, independent of grade, size, receptor and node status</a:t>
             </a:r>
             <a:endParaRPr lang="en-US" sz="2000" dirty="0"/>
           </a:p>
@@ -13288,7 +13253,71 @@
       </p:sp>
       <p:sp>
         <p:nvSpPr>
-          <p:cNvPr id="5" name="Text 3"/>
+          <p:cNvPr id="6" name="Shape 4"/>
+          <p:cNvSpPr/>
+          <p:nvPr/>
+        </p:nvSpPr>
+        <p:spPr>
+          <a:xfrm>
+            <a:off x="566928" y="5650992"/>
+            <a:ext cx="11055096" cy="566928"/>
+          </a:xfrm>
+          <a:prstGeom prst="rect">
+            <a:avLst/>
+          </a:prstGeom>
+          <a:solidFill>
+            <a:srgbClr val="F4F8FD"/>
+          </a:solidFill>
+          <a:ln w="9525">
+            <a:solidFill>
+              <a:srgbClr val="3674C1"/>
+            </a:solidFill>
+            <a:prstDash val="solid"/>
+          </a:ln>
+        </p:spPr>
+      </p:sp>
+      <p:sp>
+        <p:nvSpPr>
+          <p:cNvPr id="7" name="Text 5"/>
+          <p:cNvSpPr/>
+          <p:nvPr/>
+        </p:nvSpPr>
+        <p:spPr>
+          <a:xfrm>
+            <a:off x="768096" y="5650992"/>
+            <a:ext cx="10652760" cy="566928"/>
+          </a:xfrm>
+          <a:prstGeom prst="rect">
+            <a:avLst/>
+          </a:prstGeom>
+          <a:noFill/>
+          <a:ln/>
+        </p:spPr>
+        <p:txBody>
+          <a:bodyPr wrap="square" rtlCol="0" anchor="ctr"/>
+          <a:lstStyle/>
+          <a:p>
+            <a:pPr indent="0" marL="0">
+              <a:buNone/>
+            </a:pPr>
+            <a:r>
+              <a:rPr lang="en-US" sz="1600" b="1" dirty="0">
+                <a:solidFill>
+                  <a:srgbClr val="1F4C86"/>
+                </a:solidFill>
+                <a:latin typeface="Calibri" pitchFamily="34" charset="0"/>
+                <a:ea typeface="Calibri" pitchFamily="34" charset="-122"/>
+                <a:cs typeface="Calibri" pitchFamily="34" charset="-120"/>
+              </a:rPr>
+              <a:t>The same wavy-to-straight axis turns up wherever collagen bears load, which is why the measures travel beyond breast.</a:t>
+            </a:r>
+            <a:endParaRPr lang="en-US" sz="1600" dirty="0"/>
+          </a:p>
+        </p:txBody>
+      </p:sp>
+      <p:sp>
+        <p:nvSpPr>
+          <p:cNvPr id="8" name="Text 6"/>
           <p:cNvSpPr/>
           <p:nvPr/>
         </p:nvSpPr>
@@ -13390,7 +13419,7 @@
                 <a:ea typeface="Trebuchet MS" pitchFamily="34" charset="-122"/>
                 <a:cs typeface="Trebuchet MS" pitchFamily="34" charset="-120"/>
               </a:rPr>
-              <a:t>Why this changes the rest</a:t>
+              <a:t>Two complementary tools</a:t>
             </a:r>
             <a:endParaRPr lang="en-US" sz="3000" dirty="0"/>
           </a:p>
@@ -13418,14 +13447,73 @@
       </p:sp>
       <p:sp>
         <p:nvSpPr>
-          <p:cNvPr id="4" name="Text 2"/>
-          <p:cNvSpPr/>
-          <p:nvPr/>
-        </p:nvSpPr>
-        <p:spPr>
-          <a:xfrm>
-            <a:off x="640080" y="1481328"/>
-            <a:ext cx="10963656" cy="4553712"/>
+          <p:cNvPr id="4" name="Shape 2"/>
+          <p:cNvSpPr/>
+          <p:nvPr/>
+        </p:nvSpPr>
+        <p:spPr>
+          <a:xfrm>
+            <a:off x="566928" y="1554480"/>
+            <a:ext cx="5298948" cy="530352"/>
+          </a:xfrm>
+          <a:prstGeom prst="rect">
+            <a:avLst/>
+          </a:prstGeom>
+          <a:solidFill>
+            <a:srgbClr val="E8F0FA"/>
+          </a:solidFill>
+          <a:ln/>
+        </p:spPr>
+      </p:sp>
+      <p:sp>
+        <p:nvSpPr>
+          <p:cNvPr id="5" name="Text 3"/>
+          <p:cNvSpPr/>
+          <p:nvPr/>
+        </p:nvSpPr>
+        <p:spPr>
+          <a:xfrm>
+            <a:off x="731520" y="1554480"/>
+            <a:ext cx="4969764" cy="530352"/>
+          </a:xfrm>
+          <a:prstGeom prst="rect">
+            <a:avLst/>
+          </a:prstGeom>
+          <a:noFill/>
+          <a:ln/>
+        </p:spPr>
+        <p:txBody>
+          <a:bodyPr wrap="square" rtlCol="0" anchor="ctr"/>
+          <a:lstStyle/>
+          <a:p>
+            <a:pPr indent="0" marL="0">
+              <a:buNone/>
+            </a:pPr>
+            <a:r>
+              <a:rPr lang="en-US" sz="2000" b="1" dirty="0">
+                <a:solidFill>
+                  <a:srgbClr val="1F4C86"/>
+                </a:solidFill>
+                <a:latin typeface="Trebuchet MS" pitchFamily="34" charset="0"/>
+                <a:ea typeface="Trebuchet MS" pitchFamily="34" charset="-122"/>
+                <a:cs typeface="Trebuchet MS" pitchFamily="34" charset="-120"/>
+              </a:rPr>
+              <a:t>Fiber Analysis — measure a zone</a:t>
+            </a:r>
+            <a:endParaRPr lang="en-US" sz="2000" dirty="0"/>
+          </a:p>
+        </p:txBody>
+      </p:sp>
+      <p:sp>
+        <p:nvSpPr>
+          <p:cNvPr id="6" name="Text 4"/>
+          <p:cNvSpPr/>
+          <p:nvPr/>
+        </p:nvSpPr>
+        <p:spPr>
+          <a:xfrm>
+            <a:off x="658368" y="2240280"/>
+            <a:ext cx="5116068" cy="3566160"/>
           </a:xfrm>
           <a:prstGeom prst="rect">
             <a:avLst/>
@@ -13438,17 +13526,14 @@
           <a:lstStyle/>
           <a:p>
             <a:pPr marL="342900" indent="-342900">
-              <a:lnSpc>
-                <a:spcPct val="105000"/>
-              </a:lnSpc>
               <a:spcAft>
-                <a:spcPts val="1200"/>
+                <a:spcPts val="1100"/>
               </a:spcAft>
               <a:buSzPct val="100000"/>
               <a:buChar char="•"/>
             </a:pPr>
             <a:r>
-              <a:rPr lang="en-US" sz="2000" dirty="0">
+              <a:rPr lang="en-US" sz="1800" dirty="0">
                 <a:solidFill>
                   <a:srgbClr val="1F2933"/>
                 </a:solidFill>
@@ -13456,23 +13541,20 @@
                 <a:ea typeface="Calibri" pitchFamily="34" charset="-122"/>
                 <a:cs typeface="Calibri" pitchFamily="34" charset="-120"/>
               </a:rPr>
-              <a:t>The region you analysed is the region you acquire at high resolution</a:t>
-            </a:r>
-            <a:endParaRPr lang="en-US" sz="2000" dirty="0"/>
+              <a:t>A band of chosen width inside, outside, or across an annotation boundary</a:t>
+            </a:r>
+            <a:endParaRPr lang="en-US" sz="1800" dirty="0"/>
           </a:p>
           <a:p>
             <a:pPr marL="342900" indent="-342900">
-              <a:lnSpc>
-                <a:spcPct val="105000"/>
-              </a:lnSpc>
               <a:spcAft>
-                <a:spcPts val="1200"/>
+                <a:spcPts val="1100"/>
               </a:spcAft>
               <a:buSzPct val="100000"/>
               <a:buChar char="•"/>
             </a:pPr>
             <a:r>
-              <a:rPr lang="en-US" sz="2000" dirty="0">
+              <a:rPr lang="en-US" sz="1800" dirty="0">
                 <a:solidFill>
                   <a:srgbClr val="1F2933"/>
                 </a:solidFill>
@@ -13480,23 +13562,20 @@
                 <a:ea typeface="Calibri" pitchFamily="34" charset="-122"/>
                 <a:cs typeface="Calibri" pitchFamily="34" charset="-120"/>
               </a:rPr>
-              <a:t>Acquisition metadata arrives in the project, not in a folder that gets separated from the images</a:t>
-            </a:r>
-            <a:endParaRPr lang="en-US" sz="2000" dirty="0"/>
+              <a:t>Straightness: wavy versus straightened fibres, per window and per ROI</a:t>
+            </a:r>
+            <a:endParaRPr lang="en-US" sz="1800" dirty="0"/>
           </a:p>
           <a:p>
             <a:pPr marL="342900" indent="-342900">
-              <a:lnSpc>
-                <a:spcPct val="105000"/>
-              </a:lnSpc>
               <a:spcAft>
-                <a:spcPts val="1200"/>
+                <a:spcPts val="1100"/>
               </a:spcAft>
               <a:buSzPct val="100000"/>
               <a:buChar char="•"/>
             </a:pPr>
             <a:r>
-              <a:rPr lang="en-US" sz="2000" dirty="0">
+              <a:rPr lang="en-US" sz="1800" dirty="0">
                 <a:solidFill>
                   <a:srgbClr val="1F2933"/>
                 </a:solidFill>
@@ -13504,47 +13583,63 @@
                 <a:ea typeface="Calibri" pitchFamily="34" charset="-122"/>
                 <a:cs typeface="Calibri" pitchFamily="34" charset="-120"/>
               </a:rPr>
-              <a:t>Stitching is a step in this pipeline — and it works perfectly well on its own, which is why it is in your hands-on hour</a:t>
-            </a:r>
-            <a:endParaRPr lang="en-US" sz="2000" dirty="0"/>
-          </a:p>
-        </p:txBody>
-      </p:sp>
-      <p:sp>
-        <p:nvSpPr>
-          <p:cNvPr id="5" name="Shape 3"/>
-          <p:cNvSpPr/>
-          <p:nvPr/>
-        </p:nvSpPr>
-        <p:spPr>
-          <a:xfrm>
-            <a:off x="566928" y="5650992"/>
-            <a:ext cx="11055096" cy="566928"/>
+              <a:t>Morphometrics: coverage, length, branching, fractal dimension, gaps</a:t>
+            </a:r>
+            <a:endParaRPr lang="en-US" sz="1800" dirty="0"/>
+          </a:p>
+          <a:p>
+            <a:pPr marL="342900" indent="-342900">
+              <a:spcAft>
+                <a:spcPts val="1100"/>
+              </a:spcAft>
+              <a:buSzPct val="100000"/>
+              <a:buChar char="•"/>
+            </a:pPr>
+            <a:r>
+              <a:rPr lang="en-US" sz="1800" dirty="0">
+                <a:solidFill>
+                  <a:srgbClr val="1F2933"/>
+                </a:solidFill>
+                <a:latin typeface="Calibri" pitchFamily="34" charset="0"/>
+                <a:ea typeface="Calibri" pitchFamily="34" charset="-122"/>
+                <a:cs typeface="Calibri" pitchFamily="34" charset="-120"/>
+              </a:rPr>
+              <a:t>Texture: the information fibre-tracing misses entirely</a:t>
+            </a:r>
+            <a:endParaRPr lang="en-US" sz="1800" dirty="0"/>
+          </a:p>
+        </p:txBody>
+      </p:sp>
+      <p:sp>
+        <p:nvSpPr>
+          <p:cNvPr id="7" name="Shape 5"/>
+          <p:cNvSpPr/>
+          <p:nvPr/>
+        </p:nvSpPr>
+        <p:spPr>
+          <a:xfrm>
+            <a:off x="6323076" y="1554480"/>
+            <a:ext cx="5298948" cy="530352"/>
           </a:xfrm>
           <a:prstGeom prst="rect">
             <a:avLst/>
           </a:prstGeom>
           <a:solidFill>
-            <a:srgbClr val="F4F8FD"/>
+            <a:srgbClr val="E8F0FA"/>
           </a:solidFill>
-          <a:ln w="9525">
-            <a:solidFill>
-              <a:srgbClr val="3674C1"/>
-            </a:solidFill>
-            <a:prstDash val="solid"/>
-          </a:ln>
-        </p:spPr>
-      </p:sp>
-      <p:sp>
-        <p:nvSpPr>
-          <p:cNvPr id="6" name="Text 4"/>
-          <p:cNvSpPr/>
-          <p:nvPr/>
-        </p:nvSpPr>
-        <p:spPr>
-          <a:xfrm>
-            <a:off x="768096" y="5650992"/>
-            <a:ext cx="10652760" cy="566928"/>
+          <a:ln/>
+        </p:spPr>
+      </p:sp>
+      <p:sp>
+        <p:nvSpPr>
+          <p:cNvPr id="8" name="Text 6"/>
+          <p:cNvSpPr/>
+          <p:nvPr/>
+        </p:nvSpPr>
+        <p:spPr>
+          <a:xfrm>
+            <a:off x="6487668" y="1554480"/>
+            <a:ext cx="4969764" cy="530352"/>
           </a:xfrm>
           <a:prstGeom prst="rect">
             <a:avLst/>
@@ -13560,23 +13655,129 @@
               <a:buNone/>
             </a:pPr>
             <a:r>
-              <a:rPr lang="en-US" sz="1600" b="1" dirty="0">
-                <a:solidFill>
-                  <a:srgbClr val="1F4C86"/>
-                </a:solidFill>
-                <a:latin typeface="Calibri" pitchFamily="34" charset="0"/>
-                <a:ea typeface="Calibri" pitchFamily="34" charset="-122"/>
-                <a:cs typeface="Calibri" pitchFamily="34" charset="-120"/>
-              </a:rPr>
-              <a:t>Once acquisition is driven from QuPath, "acquisition software" and "analysis software" stop being separate places your data lives.</a:t>
-            </a:r>
-            <a:endParaRPr lang="en-US" sz="1600" dirty="0"/>
-          </a:p>
-        </p:txBody>
-      </p:sp>
-      <p:sp>
-        <p:nvSpPr>
-          <p:cNvPr id="7" name="Text 5"/>
+              <a:rPr lang="en-US" sz="2000" b="1" dirty="0">
+                <a:solidFill>
+                  <a:srgbClr val="B26A00"/>
+                </a:solidFill>
+                <a:latin typeface="Trebuchet MS" pitchFamily="34" charset="0"/>
+                <a:ea typeface="Trebuchet MS" pitchFamily="34" charset="-122"/>
+                <a:cs typeface="Trebuchet MS" pitchFamily="34" charset="-120"/>
+              </a:rPr>
+              <a:t>TME-Quant — trace the fibres</a:t>
+            </a:r>
+            <a:endParaRPr lang="en-US" sz="2000" dirty="0"/>
+          </a:p>
+        </p:txBody>
+      </p:sp>
+      <p:sp>
+        <p:nvSpPr>
+          <p:cNvPr id="9" name="Text 7"/>
+          <p:cNvSpPr/>
+          <p:nvPr/>
+        </p:nvSpPr>
+        <p:spPr>
+          <a:xfrm>
+            <a:off x="6414516" y="2240280"/>
+            <a:ext cx="5116068" cy="3566160"/>
+          </a:xfrm>
+          <a:prstGeom prst="rect">
+            <a:avLst/>
+          </a:prstGeom>
+          <a:noFill/>
+          <a:ln/>
+        </p:spPr>
+        <p:txBody>
+          <a:bodyPr wrap="square" rtlCol="0" anchor="t"/>
+          <a:lstStyle/>
+          <a:p>
+            <a:pPr marL="342900" indent="-342900">
+              <a:spcAft>
+                <a:spcPts val="1100"/>
+              </a:spcAft>
+              <a:buSzPct val="100000"/>
+              <a:buChar char="•"/>
+            </a:pPr>
+            <a:r>
+              <a:rPr lang="en-US" sz="1800" dirty="0">
+                <a:solidFill>
+                  <a:srgbClr val="1F2933"/>
+                </a:solidFill>
+                <a:latin typeface="Calibri" pitchFamily="34" charset="0"/>
+                <a:ea typeface="Calibri" pitchFamily="34" charset="-122"/>
+                <a:cs typeface="Calibri" pitchFamily="34" charset="-120"/>
+              </a:rPr>
+              <a:t>Individual fibres extracted and committed back as objects</a:t>
+            </a:r>
+            <a:endParaRPr lang="en-US" sz="1800" dirty="0"/>
+          </a:p>
+          <a:p>
+            <a:pPr marL="342900" indent="-342900">
+              <a:spcAft>
+                <a:spcPts val="1100"/>
+              </a:spcAft>
+              <a:buSzPct val="100000"/>
+              <a:buChar char="•"/>
+            </a:pPr>
+            <a:r>
+              <a:rPr lang="en-US" sz="1800" dirty="0">
+                <a:solidFill>
+                  <a:srgbClr val="1F2933"/>
+                </a:solidFill>
+                <a:latin typeface="Calibri" pitchFamily="34" charset="0"/>
+                <a:ea typeface="Calibri" pitchFamily="34" charset="-122"/>
+                <a:cs typeface="Calibri" pitchFamily="34" charset="-120"/>
+              </a:rPr>
+              <a:t>Set the threshold by eye, with the mask shown before you commit</a:t>
+            </a:r>
+            <a:endParaRPr lang="en-US" sz="1800" dirty="0"/>
+          </a:p>
+          <a:p>
+            <a:pPr marL="342900" indent="-342900">
+              <a:spcAft>
+                <a:spcPts val="1100"/>
+              </a:spcAft>
+              <a:buSzPct val="100000"/>
+              <a:buChar char="•"/>
+            </a:pPr>
+            <a:r>
+              <a:rPr lang="en-US" sz="1800" dirty="0">
+                <a:solidFill>
+                  <a:srgbClr val="1F2933"/>
+                </a:solidFill>
+                <a:latin typeface="Calibri" pitchFamily="34" charset="0"/>
+                <a:ea typeface="Calibri" pitchFamily="34" charset="-122"/>
+                <a:cs typeface="Calibri" pitchFamily="34" charset="-120"/>
+              </a:rPr>
+              <a:t>Trace a few real fibres yourself, and it tunes its own parameters to match</a:t>
+            </a:r>
+            <a:endParaRPr lang="en-US" sz="1800" dirty="0"/>
+          </a:p>
+          <a:p>
+            <a:pPr marL="342900" indent="-342900">
+              <a:spcAft>
+                <a:spcPts val="1100"/>
+              </a:spcAft>
+              <a:buSzPct val="100000"/>
+              <a:buChar char="•"/>
+            </a:pPr>
+            <a:r>
+              <a:rPr lang="en-US" sz="1800" dirty="0">
+                <a:solidFill>
+                  <a:srgbClr val="1F2933"/>
+                </a:solidFill>
+                <a:latin typeface="Calibri" pitchFamily="34" charset="0"/>
+                <a:ea typeface="Calibri" pitchFamily="34" charset="-122"/>
+                <a:cs typeface="Calibri" pitchFamily="34" charset="-120"/>
+              </a:rPr>
+              <a:t>Fibres classified by orientation relative to a tumour boundary</a:t>
+            </a:r>
+            <a:endParaRPr lang="en-US" sz="1800" dirty="0"/>
+          </a:p>
+        </p:txBody>
+      </p:sp>
+      <p:sp>
+        <p:nvSpPr>
+          <p:cNvPr id="10" name="Text 8"/>
           <p:cNvSpPr/>
           <p:nvPr/>
         </p:nvSpPr>
@@ -13647,41 +13848,14 @@
       </p:grpSpPr>
       <p:sp>
         <p:nvSpPr>
-          <p:cNvPr id="2" name="Shape 0"/>
-          <p:cNvSpPr/>
-          <p:nvPr/>
-        </p:nvSpPr>
-        <p:spPr>
-          <a:xfrm>
-            <a:off x="566928" y="411480"/>
-            <a:ext cx="2331720" cy="457200"/>
-          </a:xfrm>
-          <a:prstGeom prst="roundRect">
-            <a:avLst>
-              <a:gd name="adj" fmla="val 20000"/>
-            </a:avLst>
-          </a:prstGeom>
-          <a:solidFill>
-            <a:srgbClr val="FBF1E0"/>
-          </a:solidFill>
-          <a:ln w="12700">
-            <a:solidFill>
-              <a:srgbClr val="B26A00"/>
-            </a:solidFill>
-            <a:prstDash val="solid"/>
-          </a:ln>
-        </p:spPr>
-      </p:sp>
-      <p:sp>
-        <p:nvSpPr>
-          <p:cNvPr id="3" name="Text 1"/>
-          <p:cNvSpPr/>
-          <p:nvPr/>
-        </p:nvSpPr>
-        <p:spPr>
-          <a:xfrm>
-            <a:off x="566928" y="411480"/>
-            <a:ext cx="2331720" cy="457200"/>
+          <p:cNvPr id="2" name="Text 0"/>
+          <p:cNvSpPr/>
+          <p:nvPr/>
+        </p:nvSpPr>
+        <p:spPr>
+          <a:xfrm>
+            <a:off x="566928" y="384048"/>
+            <a:ext cx="11055096" cy="658368"/>
           </a:xfrm>
           <a:prstGeom prst="rect">
             <a:avLst/>
@@ -13693,72 +13867,33 @@
           <a:bodyPr wrap="square" rtlCol="0" anchor="ctr"/>
           <a:lstStyle/>
           <a:p>
-            <a:pPr algn="ctr" indent="0" marL="0">
+            <a:pPr indent="0" marL="0">
               <a:buNone/>
             </a:pPr>
             <a:r>
-              <a:rPr lang="en-US" sz="1600" b="1" dirty="0">
-                <a:solidFill>
-                  <a:srgbClr val="B26A00"/>
+              <a:rPr lang="en-US" sz="3000" b="1" dirty="0">
+                <a:solidFill>
+                  <a:srgbClr val="1F4C86"/>
                 </a:solidFill>
                 <a:latin typeface="Trebuchet MS" pitchFamily="34" charset="0"/>
                 <a:ea typeface="Trebuchet MS" pitchFamily="34" charset="-122"/>
                 <a:cs typeface="Trebuchet MS" pitchFamily="34" charset="-120"/>
               </a:rPr>
-              <a:t>▶  SHOWN  ·  NOT YOURS TO RUN</a:t>
-            </a:r>
-            <a:endParaRPr lang="en-US" sz="1600" dirty="0"/>
-          </a:p>
-        </p:txBody>
-      </p:sp>
-      <p:sp>
-        <p:nvSpPr>
-          <p:cNvPr id="4" name="Text 2"/>
-          <p:cNvSpPr/>
-          <p:nvPr/>
-        </p:nvSpPr>
-        <p:spPr>
-          <a:xfrm>
-            <a:off x="566928" y="1024128"/>
-            <a:ext cx="11055096" cy="685800"/>
-          </a:xfrm>
-          <a:prstGeom prst="rect">
-            <a:avLst/>
-          </a:prstGeom>
-          <a:noFill/>
-          <a:ln/>
-        </p:spPr>
-        <p:txBody>
-          <a:bodyPr wrap="square" rtlCol="0" anchor="ctr"/>
-          <a:lstStyle/>
-          <a:p>
-            <a:pPr indent="0" marL="0">
-              <a:buNone/>
-            </a:pPr>
-            <a:r>
-              <a:rPr lang="en-US" sz="3200" b="1" dirty="0">
-                <a:solidFill>
-                  <a:srgbClr val="1F4C86"/>
-                </a:solidFill>
-                <a:latin typeface="Trebuchet MS" pitchFamily="34" charset="0"/>
-                <a:ea typeface="Trebuchet MS" pitchFamily="34" charset="-122"/>
-                <a:cs typeface="Trebuchet MS" pitchFamily="34" charset="-120"/>
-              </a:rPr>
-              <a:t>Acquisition, live</a:t>
-            </a:r>
-            <a:endParaRPr lang="en-US" sz="3200" dirty="0"/>
-          </a:p>
-        </p:txBody>
-      </p:sp>
-      <p:sp>
-        <p:nvSpPr>
-          <p:cNvPr id="5" name="Shape 3"/>
-          <p:cNvSpPr/>
-          <p:nvPr/>
-        </p:nvSpPr>
-        <p:spPr>
-          <a:xfrm>
-            <a:off x="566928" y="1783080"/>
+              <a:t>Please cite the methods</a:t>
+            </a:r>
+            <a:endParaRPr lang="en-US" sz="3000" dirty="0"/>
+          </a:p>
+        </p:txBody>
+      </p:sp>
+      <p:sp>
+        <p:nvSpPr>
+          <p:cNvPr id="3" name="Shape 1"/>
+          <p:cNvSpPr/>
+          <p:nvPr/>
+        </p:nvSpPr>
+        <p:spPr>
+          <a:xfrm>
+            <a:off x="566928" y="1097280"/>
             <a:ext cx="1920240" cy="50292"/>
           </a:xfrm>
           <a:prstGeom prst="rect">
@@ -13772,14 +13907,14 @@
       </p:sp>
       <p:sp>
         <p:nvSpPr>
-          <p:cNvPr id="6" name="Text 4"/>
-          <p:cNvSpPr/>
-          <p:nvPr/>
-        </p:nvSpPr>
-        <p:spPr>
-          <a:xfrm>
-            <a:off x="640080" y="2103120"/>
-            <a:ext cx="10963656" cy="3017520"/>
+          <p:cNvPr id="4" name="Text 2"/>
+          <p:cNvSpPr/>
+          <p:nvPr/>
+        </p:nvSpPr>
+        <p:spPr>
+          <a:xfrm>
+            <a:off x="640080" y="1481328"/>
+            <a:ext cx="10963656" cy="4553712"/>
           </a:xfrm>
           <a:prstGeom prst="rect">
             <a:avLst/>
@@ -13792,8 +13927,11 @@
           <a:lstStyle/>
           <a:p>
             <a:pPr marL="342900" indent="-342900">
+              <a:lnSpc>
+                <a:spcPct val="105000"/>
+              </a:lnSpc>
               <a:spcAft>
-                <a:spcPts val="1400"/>
+                <a:spcPts val="1200"/>
               </a:spcAft>
               <a:buSzPct val="100000"/>
               <a:buChar char="•"/>
@@ -13807,14 +13945,17 @@
                 <a:ea typeface="Calibri" pitchFamily="34" charset="-122"/>
                 <a:cs typeface="Calibri" pitchFamily="34" charset="-120"/>
               </a:rPr>
-              <a:t>Draw a bounding box on a slide overview</a:t>
+              <a:t>Both tools implement other people’s methods — cite the methods, not just the tools</a:t>
             </a:r>
             <a:endParaRPr lang="en-US" sz="2000" dirty="0"/>
           </a:p>
           <a:p>
             <a:pPr marL="342900" indent="-342900">
+              <a:lnSpc>
+                <a:spcPct val="105000"/>
+              </a:lnSpc>
               <a:spcAft>
-                <a:spcPts val="1400"/>
+                <a:spcPts val="1200"/>
               </a:spcAft>
               <a:buSzPct val="100000"/>
               <a:buChar char="•"/>
@@ -13828,14 +13969,17 @@
                 <a:ea typeface="Calibri" pitchFamily="34" charset="-122"/>
                 <a:cs typeface="Calibri" pitchFamily="34" charset="-120"/>
               </a:rPr>
-              <a:t>Watch the stage move and the tiles come in</a:t>
+              <a:t>CT-FIRE — Bredfeldt et al. 2014, Journal of Biomedical Optics 19(1):016007</a:t>
             </a:r>
             <a:endParaRPr lang="en-US" sz="2000" dirty="0"/>
           </a:p>
           <a:p>
             <a:pPr marL="342900" indent="-342900">
+              <a:lnSpc>
+                <a:spcPct val="105000"/>
+              </a:lnSpc>
               <a:spcAft>
-                <a:spcPts val="1400"/>
+                <a:spcPts val="1200"/>
               </a:spcAft>
               <a:buSzPct val="100000"/>
               <a:buChar char="•"/>
@@ -13849,14 +13993,17 @@
                 <a:ea typeface="Calibri" pitchFamily="34" charset="-122"/>
                 <a:cs typeface="Calibri" pitchFamily="34" charset="-120"/>
               </a:rPr>
-              <a:t>Stitched pyramidal image lands back in the project, with its metadata</a:t>
+              <a:t>CurveAlign — LOCI, University of Wisconsin–Madison</a:t>
             </a:r>
             <a:endParaRPr lang="en-US" sz="2000" dirty="0"/>
           </a:p>
           <a:p>
             <a:pPr marL="342900" indent="-342900">
+              <a:lnSpc>
+                <a:spcPct val="105000"/>
+              </a:lnSpc>
               <a:spcAft>
-                <a:spcPts val="1400"/>
+                <a:spcPts val="1200"/>
               </a:spcAft>
               <a:buSzPct val="100000"/>
               <a:buChar char="•"/>
@@ -13870,14 +14017,17 @@
                 <a:ea typeface="Calibri" pitchFamily="34" charset="-122"/>
                 <a:cs typeface="Calibri" pitchFamily="34" charset="-120"/>
               </a:rPr>
-              <a:t>Then open it and annotate it — the loop closes</a:t>
+              <a:t>TACS — Provenzano et al. 2006, BMC Medicine 4:38; Conklin et al. 2011</a:t>
             </a:r>
             <a:endParaRPr lang="en-US" sz="2000" dirty="0"/>
           </a:p>
           <a:p>
             <a:pPr marL="342900" indent="-342900">
+              <a:lnSpc>
+                <a:spcPct val="105000"/>
+              </a:lnSpc>
               <a:spcAft>
-                <a:spcPts val="1400"/>
+                <a:spcPts val="1200"/>
               </a:spcAft>
               <a:buSzPct val="100000"/>
               <a:buChar char="•"/>
@@ -13891,7 +14041,7 @@
                 <a:ea typeface="Calibri" pitchFamily="34" charset="-122"/>
                 <a:cs typeface="Calibri" pitchFamily="34" charset="-120"/>
               </a:rPr>
-              <a:t>The stitching half — Tiles to Pyramid — you can install and use today, no microscope needed</a:t>
+              <a:t>TWOMBLI — Wershof et al. 2021, Life Science Alliance 4(3):e202000880</a:t>
             </a:r>
             <a:endParaRPr lang="en-US" sz="2000" dirty="0"/>
           </a:p>
@@ -13899,7 +14049,7 @@
       </p:sp>
       <p:sp>
         <p:nvSpPr>
-          <p:cNvPr id="7" name="Shape 5"/>
+          <p:cNvPr id="5" name="Shape 3"/>
           <p:cNvSpPr/>
           <p:nvPr/>
         </p:nvSpPr>
@@ -13924,7 +14074,7 @@
       </p:sp>
       <p:sp>
         <p:nvSpPr>
-          <p:cNvPr id="8" name="Text 6"/>
+          <p:cNvPr id="6" name="Text 4"/>
           <p:cNvSpPr/>
           <p:nvPr/>
         </p:nvSpPr>
@@ -13955,7 +14105,7 @@
                 <a:ea typeface="Calibri" pitchFamily="34" charset="-122"/>
                 <a:cs typeface="Calibri" pitchFamily="34" charset="-120"/>
               </a:rPr>
-              <a:t>You watch this one: it needs a microscope, so nobody in the room runs it. About five minutes, with a recorded fallback if the network or the hardware disagrees.</a:t>
+              <a:t>Fiber Analysis re-implements TWOMBLI’s cheap metrics natively rather than bundling its FIJI plugins, so its fractal dimension and lacunarity diverge from TWOMBLI’s by roughly 20–40%. Do not compare them with published TWOMBLI numbers.</a:t>
             </a:r>
             <a:endParaRPr lang="en-US" sz="1600" dirty="0"/>
           </a:p>
@@ -13963,7 +14113,7 @@
       </p:sp>
       <p:sp>
         <p:nvSpPr>
-          <p:cNvPr id="9" name="Text 7"/>
+          <p:cNvPr id="7" name="Text 5"/>
           <p:cNvSpPr/>
           <p:nvPr/>
         </p:nvSpPr>
@@ -14040,8 +14190,28 @@
         </p:nvSpPr>
         <p:spPr>
           <a:xfrm>
-            <a:off x="0" y="0"/>
-            <a:ext cx="274320" cy="6858000"/>
+            <a:off x="0" y="1417320"/>
+            <a:ext cx="12188952" cy="3108960"/>
+          </a:xfrm>
+          <a:prstGeom prst="rect">
+            <a:avLst/>
+          </a:prstGeom>
+          <a:solidFill>
+            <a:srgbClr val="E8F0FA"/>
+          </a:solidFill>
+          <a:ln/>
+        </p:spPr>
+      </p:sp>
+      <p:sp>
+        <p:nvSpPr>
+          <p:cNvPr id="3" name="Shape 1"/>
+          <p:cNvSpPr/>
+          <p:nvPr/>
+        </p:nvSpPr>
+        <p:spPr>
+          <a:xfrm>
+            <a:off x="0" y="1417320"/>
+            <a:ext cx="201168" cy="3108960"/>
           </a:xfrm>
           <a:prstGeom prst="rect">
             <a:avLst/>
@@ -14054,14 +14224,14 @@
       </p:sp>
       <p:sp>
         <p:nvSpPr>
-          <p:cNvPr id="3" name="Text 1"/>
-          <p:cNvSpPr/>
-          <p:nvPr/>
-        </p:nvSpPr>
-        <p:spPr>
-          <a:xfrm>
-            <a:off x="960120" y="2194560"/>
-            <a:ext cx="10268712" cy="1280160"/>
+          <p:cNvPr id="4" name="Text 2"/>
+          <p:cNvSpPr/>
+          <p:nvPr/>
+        </p:nvSpPr>
+        <p:spPr>
+          <a:xfrm>
+            <a:off x="566928" y="1691640"/>
+            <a:ext cx="1828800" cy="914400"/>
           </a:xfrm>
           <a:prstGeom prst="rect">
             <a:avLst/>
@@ -14079,13 +14249,13 @@
             <a:r>
               <a:rPr lang="en-US" sz="5400" b="1" dirty="0">
                 <a:solidFill>
-                  <a:srgbClr val="1F4C86"/>
+                  <a:srgbClr val="3674C1"/>
                 </a:solidFill>
                 <a:latin typeface="Trebuchet MS" pitchFamily="34" charset="0"/>
                 <a:ea typeface="Trebuchet MS" pitchFamily="34" charset="-122"/>
                 <a:cs typeface="Trebuchet MS" pitchFamily="34" charset="-120"/>
               </a:rPr>
-              <a:t>Questions?</a:t>
+              <a:t>07</a:t>
             </a:r>
             <a:endParaRPr lang="en-US" sz="5400" dirty="0"/>
           </a:p>
@@ -14093,14 +14263,14 @@
       </p:sp>
       <p:sp>
         <p:nvSpPr>
-          <p:cNvPr id="4" name="Text 2"/>
-          <p:cNvSpPr/>
-          <p:nvPr/>
-        </p:nvSpPr>
-        <p:spPr>
-          <a:xfrm>
-            <a:off x="960120" y="3566160"/>
-            <a:ext cx="10268712" cy="548640"/>
+          <p:cNvPr id="5" name="Text 3"/>
+          <p:cNvSpPr/>
+          <p:nvPr/>
+        </p:nvSpPr>
+        <p:spPr>
+          <a:xfrm>
+            <a:off x="566928" y="2606040"/>
+            <a:ext cx="11055096" cy="868680"/>
           </a:xfrm>
           <a:prstGeom prst="rect">
             <a:avLst/>
@@ -14116,46 +14286,46 @@
               <a:buNone/>
             </a:pPr>
             <a:r>
-              <a:rPr lang="en-US" sz="2200" b="1" dirty="0">
-                <a:solidFill>
-                  <a:srgbClr val="3674C1"/>
-                </a:solidFill>
-                <a:latin typeface="Calibri" pitchFamily="34" charset="0"/>
-                <a:ea typeface="Calibri" pitchFamily="34" charset="-122"/>
-                <a:cs typeface="Calibri" pitchFamily="34" charset="-120"/>
-              </a:rPr>
-              <a:t>michaelsnelson.github.io/BINA-I2K-2026-QuPath-Extensions</a:t>
-            </a:r>
-            <a:endParaRPr lang="en-US" sz="2200" dirty="0"/>
-          </a:p>
-        </p:txBody>
-      </p:sp>
-      <p:sp>
-        <p:nvSpPr>
-          <p:cNvPr id="5" name="Text 3"/>
-          <p:cNvSpPr/>
-          <p:nvPr/>
-        </p:nvSpPr>
-        <p:spPr>
-          <a:xfrm>
-            <a:off x="960120" y="4206240"/>
-            <a:ext cx="9811512" cy="457200"/>
-          </a:xfrm>
-          <a:prstGeom prst="rect">
-            <a:avLst/>
-          </a:prstGeom>
-          <a:noFill/>
-          <a:ln/>
-        </p:spPr>
-        <p:txBody>
-          <a:bodyPr wrap="square" rtlCol="0" anchor="ctr"/>
+              <a:rPr lang="en-US" sz="4000" b="1" dirty="0">
+                <a:solidFill>
+                  <a:srgbClr val="1F4C86"/>
+                </a:solidFill>
+                <a:latin typeface="Trebuchet MS" pitchFamily="34" charset="0"/>
+                <a:ea typeface="Trebuchet MS" pitchFamily="34" charset="-122"/>
+                <a:cs typeface="Trebuchet MS" pitchFamily="34" charset="-120"/>
+              </a:rPr>
+              <a:t>QPSC — QuPath Scope Control</a:t>
+            </a:r>
+            <a:endParaRPr lang="en-US" sz="4000" dirty="0"/>
+          </a:p>
+        </p:txBody>
+      </p:sp>
+      <p:sp>
+        <p:nvSpPr>
+          <p:cNvPr id="6" name="Text 4"/>
+          <p:cNvSpPr/>
+          <p:nvPr/>
+        </p:nvSpPr>
+        <p:spPr>
+          <a:xfrm>
+            <a:off x="566928" y="3456432"/>
+            <a:ext cx="10140696" cy="731520"/>
+          </a:xfrm>
+          <a:prstGeom prst="rect">
+            <a:avLst/>
+          </a:prstGeom>
+          <a:noFill/>
+          <a:ln/>
+        </p:spPr>
+        <p:txBody>
+          <a:bodyPr wrap="square" rtlCol="0" anchor="t"/>
           <a:lstStyle/>
           <a:p>
             <a:pPr indent="0" marL="0">
               <a:buNone/>
             </a:pPr>
             <a:r>
-              <a:rPr lang="en-US" sz="1700" i="1" dirty="0">
+              <a:rPr lang="en-US" sz="1900" dirty="0">
                 <a:solidFill>
                   <a:srgbClr val="5A6675"/>
                 </a:solidFill>
@@ -14163,15 +14333,54 @@
                 <a:ea typeface="Calibri" pitchFamily="34" charset="-122"/>
                 <a:cs typeface="Calibri" pitchFamily="34" charset="-120"/>
               </a:rPr>
-              <a:t>Everything after this slide is backup, kept for the questions it answers.</a:t>
-            </a:r>
-            <a:endParaRPr lang="en-US" sz="1700" dirty="0"/>
-          </a:p>
-        </p:txBody>
-      </p:sp>
-      <p:sp>
-        <p:nvSpPr>
-          <p:cNvPr id="6" name="Text 4"/>
+              <a:t>The most complex thing here, and the reason for the rest</a:t>
+            </a:r>
+            <a:endParaRPr lang="en-US" sz="1900" dirty="0"/>
+          </a:p>
+        </p:txBody>
+      </p:sp>
+      <p:sp>
+        <p:nvSpPr>
+          <p:cNvPr id="7" name="Text 5"/>
+          <p:cNvSpPr/>
+          <p:nvPr/>
+        </p:nvSpPr>
+        <p:spPr>
+          <a:xfrm>
+            <a:off x="566928" y="6199632"/>
+            <a:ext cx="8229600" cy="365760"/>
+          </a:xfrm>
+          <a:prstGeom prst="rect">
+            <a:avLst/>
+          </a:prstGeom>
+          <a:noFill/>
+          <a:ln/>
+        </p:spPr>
+        <p:txBody>
+          <a:bodyPr wrap="square" rtlCol="0" anchor="ctr"/>
+          <a:lstStyle/>
+          <a:p>
+            <a:pPr indent="0" marL="0">
+              <a:buNone/>
+            </a:pPr>
+            <a:r>
+              <a:rPr lang="en-US" sz="1400" dirty="0">
+                <a:solidFill>
+                  <a:srgbClr val="A8B2BF"/>
+                </a:solidFill>
+                <a:latin typeface="Calibri" pitchFamily="34" charset="0"/>
+                <a:ea typeface="Calibri" pitchFamily="34" charset="-122"/>
+                <a:cs typeface="Calibri" pitchFamily="34" charset="-120"/>
+              </a:rPr>
+              <a:t>michaelsnelson.github.io/BINA-I2K-2026-QuPath-Extensions</a:t>
+            </a:r>
+            <a:endParaRPr lang="en-US" sz="1400" dirty="0"/>
+          </a:p>
+        </p:txBody>
+      </p:sp>
+      <p:sp>
+        <p:nvSpPr>
+          <p:cNvPr id="8" name="Text 6"/>
           <p:cNvSpPr/>
           <p:nvPr/>
         </p:nvSpPr>
@@ -14242,23 +14451,42 @@
       </p:grpSpPr>
       <p:sp>
         <p:nvSpPr>
-          <p:cNvPr id="2" name="Shape 0"/>
-          <p:cNvSpPr/>
-          <p:nvPr/>
-        </p:nvSpPr>
-        <p:spPr>
-          <a:xfrm>
-            <a:off x="0" y="1417320"/>
-            <a:ext cx="12188952" cy="3108960"/>
-          </a:xfrm>
-          <a:prstGeom prst="rect">
-            <a:avLst/>
-          </a:prstGeom>
-          <a:solidFill>
-            <a:srgbClr val="E8F0FA"/>
-          </a:solidFill>
-          <a:ln/>
-        </p:spPr>
+          <p:cNvPr id="2" name="Text 0"/>
+          <p:cNvSpPr/>
+          <p:nvPr/>
+        </p:nvSpPr>
+        <p:spPr>
+          <a:xfrm>
+            <a:off x="566928" y="384048"/>
+            <a:ext cx="11055096" cy="658368"/>
+          </a:xfrm>
+          <a:prstGeom prst="rect">
+            <a:avLst/>
+          </a:prstGeom>
+          <a:noFill/>
+          <a:ln/>
+        </p:spPr>
+        <p:txBody>
+          <a:bodyPr wrap="square" rtlCol="0" anchor="ctr"/>
+          <a:lstStyle/>
+          <a:p>
+            <a:pPr indent="0" marL="0">
+              <a:buNone/>
+            </a:pPr>
+            <a:r>
+              <a:rPr lang="en-US" sz="3000" b="1" dirty="0">
+                <a:solidFill>
+                  <a:srgbClr val="1F4C86"/>
+                </a:solidFill>
+                <a:latin typeface="Trebuchet MS" pitchFamily="34" charset="0"/>
+                <a:ea typeface="Trebuchet MS" pitchFamily="34" charset="-122"/>
+                <a:cs typeface="Trebuchet MS" pitchFamily="34" charset="-120"/>
+              </a:rPr>
+              <a:t>QPSC — QuPath Scope Control</a:t>
+            </a:r>
+            <a:endParaRPr lang="en-US" sz="3000" dirty="0"/>
+          </a:p>
+        </p:txBody>
       </p:sp>
       <p:sp>
         <p:nvSpPr>
@@ -14268,8 +14496,8 @@
         </p:nvSpPr>
         <p:spPr>
           <a:xfrm>
-            <a:off x="0" y="1417320"/>
-            <a:ext cx="201168" cy="3108960"/>
+            <a:off x="566928" y="1097280"/>
+            <a:ext cx="1920240" cy="50292"/>
           </a:xfrm>
           <a:prstGeom prst="rect">
             <a:avLst/>
@@ -14288,157 +14516,119 @@
         </p:nvSpPr>
         <p:spPr>
           <a:xfrm>
-            <a:off x="566928" y="1691640"/>
-            <a:ext cx="1828800" cy="914400"/>
-          </a:xfrm>
-          <a:prstGeom prst="rect">
-            <a:avLst/>
-          </a:prstGeom>
-          <a:noFill/>
-          <a:ln/>
-        </p:spPr>
-        <p:txBody>
-          <a:bodyPr wrap="square" rtlCol="0" anchor="ctr"/>
-          <a:lstStyle/>
-          <a:p>
-            <a:pPr indent="0" marL="0">
-              <a:buNone/>
-            </a:pPr>
-            <a:r>
-              <a:rPr lang="en-US" sz="5400" b="1" dirty="0">
-                <a:solidFill>
-                  <a:srgbClr val="3674C1"/>
-                </a:solidFill>
-                <a:latin typeface="Trebuchet MS" pitchFamily="34" charset="0"/>
-                <a:ea typeface="Trebuchet MS" pitchFamily="34" charset="-122"/>
-                <a:cs typeface="Trebuchet MS" pitchFamily="34" charset="-120"/>
-              </a:rPr>
-              <a:t>B</a:t>
-            </a:r>
-            <a:endParaRPr lang="en-US" sz="5400" dirty="0"/>
+            <a:off x="640080" y="1481328"/>
+            <a:ext cx="10963656" cy="4553712"/>
+          </a:xfrm>
+          <a:prstGeom prst="rect">
+            <a:avLst/>
+          </a:prstGeom>
+          <a:noFill/>
+          <a:ln/>
+        </p:spPr>
+        <p:txBody>
+          <a:bodyPr wrap="square" rtlCol="0" anchor="t"/>
+          <a:lstStyle/>
+          <a:p>
+            <a:pPr marL="342900" indent="-342900">
+              <a:lnSpc>
+                <a:spcPct val="105000"/>
+              </a:lnSpc>
+              <a:spcAft>
+                <a:spcPts val="1200"/>
+              </a:spcAft>
+              <a:buSzPct val="100000"/>
+              <a:buChar char="•"/>
+            </a:pPr>
+            <a:r>
+              <a:rPr lang="en-US" sz="2000" dirty="0">
+                <a:solidFill>
+                  <a:srgbClr val="1F2933"/>
+                </a:solidFill>
+                <a:latin typeface="Calibri" pitchFamily="34" charset="0"/>
+                <a:ea typeface="Calibri" pitchFamily="34" charset="-122"/>
+                <a:cs typeface="Calibri" pitchFamily="34" charset="-120"/>
+              </a:rPr>
+              <a:t>Draw a box around a region in QuPath. The stage moves, the tiles are captured and stitched, and the image appears back in your project</a:t>
+            </a:r>
+            <a:endParaRPr lang="en-US" sz="2000" dirty="0"/>
+          </a:p>
+          <a:p>
+            <a:pPr marL="342900" indent="-342900">
+              <a:lnSpc>
+                <a:spcPct val="105000"/>
+              </a:lnSpc>
+              <a:spcAft>
+                <a:spcPts val="1200"/>
+              </a:spcAft>
+              <a:buSzPct val="100000"/>
+              <a:buChar char="•"/>
+            </a:pPr>
+            <a:r>
+              <a:rPr lang="en-US" sz="2000" dirty="0">
+                <a:solidFill>
+                  <a:srgbClr val="1F2933"/>
+                </a:solidFill>
+                <a:latin typeface="Calibri" pitchFamily="34" charset="0"/>
+                <a:ea typeface="Calibri" pitchFamily="34" charset="-122"/>
+                <a:cs typeface="Calibri" pitchFamily="34" charset="-120"/>
+              </a:rPr>
+              <a:t>Target specific annotations on a slide you already scanned</a:t>
+            </a:r>
+            <a:endParaRPr lang="en-US" sz="2000" dirty="0"/>
+          </a:p>
+          <a:p>
+            <a:pPr marL="342900" indent="-342900">
+              <a:lnSpc>
+                <a:spcPct val="105000"/>
+              </a:lnSpc>
+              <a:spcAft>
+                <a:spcPts val="1200"/>
+              </a:spcAft>
+              <a:buSzPct val="100000"/>
+              <a:buChar char="•"/>
+            </a:pPr>
+            <a:r>
+              <a:rPr lang="en-US" sz="2000" dirty="0">
+                <a:solidFill>
+                  <a:srgbClr val="1F2933"/>
+                </a:solidFill>
+                <a:latin typeface="Calibri" pitchFamily="34" charset="0"/>
+                <a:ea typeface="Calibri" pitchFamily="34" charset="-122"/>
+                <a:cs typeface="Calibri" pitchFamily="34" charset="-120"/>
+              </a:rPr>
+              <a:t>Live camera view, stage map, saved positions, and a virtual joystick</a:t>
+            </a:r>
+            <a:endParaRPr lang="en-US" sz="2000" dirty="0"/>
+          </a:p>
+          <a:p>
+            <a:pPr marL="342900" indent="-342900">
+              <a:lnSpc>
+                <a:spcPct val="105000"/>
+              </a:lnSpc>
+              <a:spcAft>
+                <a:spcPts val="1200"/>
+              </a:spcAft>
+              <a:buSzPct val="100000"/>
+              <a:buChar char="•"/>
+            </a:pPr>
+            <a:r>
+              <a:rPr lang="en-US" sz="2000" dirty="0">
+                <a:solidFill>
+                  <a:srgbClr val="1F2933"/>
+                </a:solidFill>
+                <a:latin typeface="Calibri" pitchFamily="34" charset="0"/>
+                <a:ea typeface="Calibri" pitchFamily="34" charset="-122"/>
+                <a:cs typeface="Calibri" pitchFamily="34" charset="-120"/>
+              </a:rPr>
+              <a:t>Brightfield, multi-channel fluorescence, and combined passes on a single-camera scope</a:t>
+            </a:r>
+            <a:endParaRPr lang="en-US" sz="2000" dirty="0"/>
           </a:p>
         </p:txBody>
       </p:sp>
       <p:sp>
         <p:nvSpPr>
           <p:cNvPr id="5" name="Text 3"/>
-          <p:cNvSpPr/>
-          <p:nvPr/>
-        </p:nvSpPr>
-        <p:spPr>
-          <a:xfrm>
-            <a:off x="566928" y="2606040"/>
-            <a:ext cx="11055096" cy="868680"/>
-          </a:xfrm>
-          <a:prstGeom prst="rect">
-            <a:avLst/>
-          </a:prstGeom>
-          <a:noFill/>
-          <a:ln/>
-        </p:spPr>
-        <p:txBody>
-          <a:bodyPr wrap="square" rtlCol="0" anchor="ctr"/>
-          <a:lstStyle/>
-          <a:p>
-            <a:pPr indent="0" marL="0">
-              <a:buNone/>
-            </a:pPr>
-            <a:r>
-              <a:rPr lang="en-US" sz="4000" b="1" dirty="0">
-                <a:solidFill>
-                  <a:srgbClr val="1F4C86"/>
-                </a:solidFill>
-                <a:latin typeface="Trebuchet MS" pitchFamily="34" charset="0"/>
-                <a:ea typeface="Trebuchet MS" pitchFamily="34" charset="-122"/>
-                <a:cs typeface="Trebuchet MS" pitchFamily="34" charset="-120"/>
-              </a:rPr>
-              <a:t>Backup</a:t>
-            </a:r>
-            <a:endParaRPr lang="en-US" sz="4000" dirty="0"/>
-          </a:p>
-        </p:txBody>
-      </p:sp>
-      <p:sp>
-        <p:nvSpPr>
-          <p:cNvPr id="6" name="Text 4"/>
-          <p:cNvSpPr/>
-          <p:nvPr/>
-        </p:nvSpPr>
-        <p:spPr>
-          <a:xfrm>
-            <a:off x="566928" y="3456432"/>
-            <a:ext cx="10140696" cy="731520"/>
-          </a:xfrm>
-          <a:prstGeom prst="rect">
-            <a:avLst/>
-          </a:prstGeom>
-          <a:noFill/>
-          <a:ln/>
-        </p:spPr>
-        <p:txBody>
-          <a:bodyPr wrap="square" rtlCol="0" anchor="t"/>
-          <a:lstStyle/>
-          <a:p>
-            <a:pPr indent="0" marL="0">
-              <a:buNone/>
-            </a:pPr>
-            <a:r>
-              <a:rPr lang="en-US" sz="1900" dirty="0">
-                <a:solidFill>
-                  <a:srgbClr val="5A6675"/>
-                </a:solidFill>
-                <a:latin typeface="Calibri" pitchFamily="34" charset="0"/>
-                <a:ea typeface="Calibri" pitchFamily="34" charset="-122"/>
-                <a:cs typeface="Calibri" pitchFamily="34" charset="-120"/>
-              </a:rPr>
-              <a:t>Cut for time. Here if a question needs them</a:t>
-            </a:r>
-            <a:endParaRPr lang="en-US" sz="1900" dirty="0"/>
-          </a:p>
-        </p:txBody>
-      </p:sp>
-      <p:sp>
-        <p:nvSpPr>
-          <p:cNvPr id="7" name="Text 5"/>
-          <p:cNvSpPr/>
-          <p:nvPr/>
-        </p:nvSpPr>
-        <p:spPr>
-          <a:xfrm>
-            <a:off x="566928" y="6199632"/>
-            <a:ext cx="8229600" cy="365760"/>
-          </a:xfrm>
-          <a:prstGeom prst="rect">
-            <a:avLst/>
-          </a:prstGeom>
-          <a:noFill/>
-          <a:ln/>
-        </p:spPr>
-        <p:txBody>
-          <a:bodyPr wrap="square" rtlCol="0" anchor="ctr"/>
-          <a:lstStyle/>
-          <a:p>
-            <a:pPr indent="0" marL="0">
-              <a:buNone/>
-            </a:pPr>
-            <a:r>
-              <a:rPr lang="en-US" sz="1400" dirty="0">
-                <a:solidFill>
-                  <a:srgbClr val="A8B2BF"/>
-                </a:solidFill>
-                <a:latin typeface="Calibri" pitchFamily="34" charset="0"/>
-                <a:ea typeface="Calibri" pitchFamily="34" charset="-122"/>
-                <a:cs typeface="Calibri" pitchFamily="34" charset="-120"/>
-              </a:rPr>
-              <a:t>michaelsnelson.github.io/BINA-I2K-2026-QuPath-Extensions</a:t>
-            </a:r>
-            <a:endParaRPr lang="en-US" sz="1400" dirty="0"/>
-          </a:p>
-        </p:txBody>
-      </p:sp>
-      <p:sp>
-        <p:nvSpPr>
-          <p:cNvPr id="8" name="Text 6"/>
           <p:cNvSpPr/>
           <p:nvPr/>
         </p:nvSpPr>
@@ -14540,7 +14730,7 @@
                 <a:ea typeface="Trebuchet MS" pitchFamily="34" charset="-122"/>
                 <a:cs typeface="Trebuchet MS" pitchFamily="34" charset="-120"/>
               </a:rPr>
-              <a:t>The claim</a:t>
+              <a:t>Why this changes the rest</a:t>
             </a:r>
             <a:endParaRPr lang="en-US" sz="3000" dirty="0"/>
           </a:p>
@@ -14606,7 +14796,7 @@
                 <a:ea typeface="Calibri" pitchFamily="34" charset="-122"/>
                 <a:cs typeface="Calibri" pitchFamily="34" charset="-120"/>
               </a:rPr>
-              <a:t>QuPath is usually treated as post-acquisition analysis software</a:t>
+              <a:t>The region you analysed is the region you acquire at high resolution</a:t>
             </a:r>
             <a:endParaRPr lang="en-US" sz="2000" dirty="0"/>
           </a:p>
@@ -14630,7 +14820,7 @@
                 <a:ea typeface="Calibri" pitchFamily="34" charset="-122"/>
                 <a:cs typeface="Calibri" pitchFamily="34" charset="-120"/>
               </a:rPr>
-              <a:t>Its extension mechanism reaches much further than that</a:t>
+              <a:t>Acquisition metadata arrives in the project, not in a folder that gets separated from the images</a:t>
             </a:r>
             <a:endParaRPr lang="en-US" sz="2000" dirty="0"/>
           </a:p>
@@ -14654,55 +14844,7 @@
                 <a:ea typeface="Calibri" pitchFamily="34" charset="-122"/>
                 <a:cs typeface="Calibri" pitchFamily="34" charset="-120"/>
               </a:rPr>
-              <a:t>Acquisition → analysis → validation → publication, in one environment</a:t>
-            </a:r>
-            <a:endParaRPr lang="en-US" sz="2000" dirty="0"/>
-          </a:p>
-          <a:p>
-            <a:pPr lvl="1" marL="685800" indent="-342900">
-              <a:lnSpc>
-                <a:spcPct val="105000"/>
-              </a:lnSpc>
-              <a:spcAft>
-                <a:spcPts val="800"/>
-              </a:spcAft>
-              <a:buSzPct val="100000"/>
-              <a:buChar char="▪"/>
-            </a:pPr>
-            <a:r>
-              <a:rPr lang="en-US" sz="1700" dirty="0">
-                <a:solidFill>
-                  <a:srgbClr val="5A6675"/>
-                </a:solidFill>
-                <a:latin typeface="Calibri" pitchFamily="34" charset="0"/>
-                <a:ea typeface="Calibri" pitchFamily="34" charset="-122"/>
-                <a:cs typeface="Calibri" pitchFamily="34" charset="-120"/>
-              </a:rPr>
-              <a:t>One project. One place your metadata lives. One place your figures come from</a:t>
-            </a:r>
-            <a:endParaRPr lang="en-US" sz="2000" dirty="0"/>
-          </a:p>
-          <a:p>
-            <a:pPr marL="342900" indent="-342900">
-              <a:lnSpc>
-                <a:spcPct val="105000"/>
-              </a:lnSpc>
-              <a:spcAft>
-                <a:spcPts val="1200"/>
-              </a:spcAft>
-              <a:buSzPct val="100000"/>
-              <a:buChar char="•"/>
-            </a:pPr>
-            <a:r>
-              <a:rPr lang="en-US" sz="2000" dirty="0">
-                <a:solidFill>
-                  <a:srgbClr val="1F2933"/>
-                </a:solidFill>
-                <a:latin typeface="Calibri" pitchFamily="34" charset="0"/>
-                <a:ea typeface="Calibri" pitchFamily="34" charset="-122"/>
-                <a:cs typeface="Calibri" pitchFamily="34" charset="-120"/>
-              </a:rPr>
-              <a:t>Sixteen extensions built at LOCI — thirteen you can install this afternoon</a:t>
+              <a:t>Stitching is a step in this pipeline — and it works perfectly well on its own, which is why it is in your hands-on hour</a:t>
             </a:r>
             <a:endParaRPr lang="en-US" sz="2000" dirty="0"/>
           </a:p>
@@ -14766,7 +14908,7 @@
                 <a:ea typeface="Calibri" pitchFamily="34" charset="-122"/>
                 <a:cs typeface="Calibri" pitchFamily="34" charset="-120"/>
               </a:rPr>
-              <a:t>Most of these are under active development, written in bursts as I have time. Useful, not stable — treat them accordingly.</a:t>
+              <a:t>Once acquisition is driven from QuPath, "acquisition software" and "analysis software" stop being separate places your data lives.</a:t>
             </a:r>
             <a:endParaRPr lang="en-US" sz="1600" dirty="0"/>
           </a:p>
@@ -14845,14 +14987,41 @@
       </p:grpSpPr>
       <p:sp>
         <p:nvSpPr>
-          <p:cNvPr id="2" name="Text 0"/>
-          <p:cNvSpPr/>
-          <p:nvPr/>
-        </p:nvSpPr>
-        <p:spPr>
-          <a:xfrm>
-            <a:off x="566928" y="384048"/>
-            <a:ext cx="11055096" cy="658368"/>
+          <p:cNvPr id="2" name="Shape 0"/>
+          <p:cNvSpPr/>
+          <p:nvPr/>
+        </p:nvSpPr>
+        <p:spPr>
+          <a:xfrm>
+            <a:off x="566928" y="411480"/>
+            <a:ext cx="2331720" cy="457200"/>
+          </a:xfrm>
+          <a:prstGeom prst="roundRect">
+            <a:avLst>
+              <a:gd name="adj" fmla="val 20000"/>
+            </a:avLst>
+          </a:prstGeom>
+          <a:solidFill>
+            <a:srgbClr val="FBF1E0"/>
+          </a:solidFill>
+          <a:ln w="12700">
+            <a:solidFill>
+              <a:srgbClr val="B26A00"/>
+            </a:solidFill>
+            <a:prstDash val="solid"/>
+          </a:ln>
+        </p:spPr>
+      </p:sp>
+      <p:sp>
+        <p:nvSpPr>
+          <p:cNvPr id="3" name="Text 1"/>
+          <p:cNvSpPr/>
+          <p:nvPr/>
+        </p:nvSpPr>
+        <p:spPr>
+          <a:xfrm>
+            <a:off x="566928" y="411480"/>
+            <a:ext cx="2331720" cy="457200"/>
           </a:xfrm>
           <a:prstGeom prst="rect">
             <a:avLst/>
@@ -14864,33 +15033,72 @@
           <a:bodyPr wrap="square" rtlCol="0" anchor="ctr"/>
           <a:lstStyle/>
           <a:p>
-            <a:pPr indent="0" marL="0">
+            <a:pPr algn="ctr" indent="0" marL="0">
               <a:buNone/>
             </a:pPr>
             <a:r>
-              <a:rPr lang="en-US" sz="3000" b="1" dirty="0">
-                <a:solidFill>
-                  <a:srgbClr val="1F4C86"/>
+              <a:rPr lang="en-US" sz="1600" b="1" dirty="0">
+                <a:solidFill>
+                  <a:srgbClr val="B26A00"/>
                 </a:solidFill>
                 <a:latin typeface="Trebuchet MS" pitchFamily="34" charset="0"/>
                 <a:ea typeface="Trebuchet MS" pitchFamily="34" charset="-122"/>
                 <a:cs typeface="Trebuchet MS" pitchFamily="34" charset="-120"/>
               </a:rPr>
-              <a:t>Sixteen extensions, one person</a:t>
-            </a:r>
-            <a:endParaRPr lang="en-US" sz="3000" dirty="0"/>
-          </a:p>
-        </p:txBody>
-      </p:sp>
-      <p:sp>
-        <p:nvSpPr>
-          <p:cNvPr id="3" name="Shape 1"/>
-          <p:cNvSpPr/>
-          <p:nvPr/>
-        </p:nvSpPr>
-        <p:spPr>
-          <a:xfrm>
-            <a:off x="566928" y="1097280"/>
+              <a:t>▶  SHOWN  ·  NOT YOURS TO RUN</a:t>
+            </a:r>
+            <a:endParaRPr lang="en-US" sz="1600" dirty="0"/>
+          </a:p>
+        </p:txBody>
+      </p:sp>
+      <p:sp>
+        <p:nvSpPr>
+          <p:cNvPr id="4" name="Text 2"/>
+          <p:cNvSpPr/>
+          <p:nvPr/>
+        </p:nvSpPr>
+        <p:spPr>
+          <a:xfrm>
+            <a:off x="566928" y="1024128"/>
+            <a:ext cx="11055096" cy="685800"/>
+          </a:xfrm>
+          <a:prstGeom prst="rect">
+            <a:avLst/>
+          </a:prstGeom>
+          <a:noFill/>
+          <a:ln/>
+        </p:spPr>
+        <p:txBody>
+          <a:bodyPr wrap="square" rtlCol="0" anchor="ctr"/>
+          <a:lstStyle/>
+          <a:p>
+            <a:pPr indent="0" marL="0">
+              <a:buNone/>
+            </a:pPr>
+            <a:r>
+              <a:rPr lang="en-US" sz="3200" b="1" dirty="0">
+                <a:solidFill>
+                  <a:srgbClr val="1F4C86"/>
+                </a:solidFill>
+                <a:latin typeface="Trebuchet MS" pitchFamily="34" charset="0"/>
+                <a:ea typeface="Trebuchet MS" pitchFamily="34" charset="-122"/>
+                <a:cs typeface="Trebuchet MS" pitchFamily="34" charset="-120"/>
+              </a:rPr>
+              <a:t>Acquisition, live</a:t>
+            </a:r>
+            <a:endParaRPr lang="en-US" sz="3200" dirty="0"/>
+          </a:p>
+        </p:txBody>
+      </p:sp>
+      <p:sp>
+        <p:nvSpPr>
+          <p:cNvPr id="5" name="Shape 3"/>
+          <p:cNvSpPr/>
+          <p:nvPr/>
+        </p:nvSpPr>
+        <p:spPr>
+          <a:xfrm>
+            <a:off x="566928" y="1783080"/>
             <a:ext cx="1920240" cy="50292"/>
           </a:xfrm>
           <a:prstGeom prst="rect">
@@ -14904,53 +15112,14 @@
       </p:sp>
       <p:sp>
         <p:nvSpPr>
-          <p:cNvPr id="4" name="Text 2"/>
-          <p:cNvSpPr/>
-          <p:nvPr/>
-        </p:nvSpPr>
-        <p:spPr>
-          <a:xfrm>
-            <a:off x="566928" y="1243584"/>
-            <a:ext cx="11055096" cy="384048"/>
-          </a:xfrm>
-          <a:prstGeom prst="rect">
-            <a:avLst/>
-          </a:prstGeom>
-          <a:noFill/>
-          <a:ln/>
-        </p:spPr>
-        <p:txBody>
-          <a:bodyPr wrap="square" rtlCol="0" anchor="ctr"/>
-          <a:lstStyle/>
-          <a:p>
-            <a:pPr indent="0" marL="0">
-              <a:buNone/>
-            </a:pPr>
-            <a:r>
-              <a:rPr lang="en-US" sz="1700" i="1" dirty="0">
-                <a:solidFill>
-                  <a:srgbClr val="5A6675"/>
-                </a:solidFill>
-                <a:latin typeface="Calibri" pitchFamily="34" charset="0"/>
-                <a:ea typeface="Calibri" pitchFamily="34" charset="-122"/>
-                <a:cs typeface="Calibri" pitchFamily="34" charset="-120"/>
-              </a:rPr>
-              <a:t>The part of this talk most likely to be useful outside QuPath.</a:t>
-            </a:r>
-            <a:endParaRPr lang="en-US" sz="1700" dirty="0"/>
-          </a:p>
-        </p:txBody>
-      </p:sp>
-      <p:sp>
-        <p:nvSpPr>
-          <p:cNvPr id="5" name="Text 3"/>
-          <p:cNvSpPr/>
-          <p:nvPr/>
-        </p:nvSpPr>
-        <p:spPr>
-          <a:xfrm>
-            <a:off x="640080" y="1755648"/>
-            <a:ext cx="10963656" cy="4279392"/>
+          <p:cNvPr id="6" name="Text 4"/>
+          <p:cNvSpPr/>
+          <p:nvPr/>
+        </p:nvSpPr>
+        <p:spPr>
+          <a:xfrm>
+            <a:off x="640080" y="2103120"/>
+            <a:ext cx="10963656" cy="3017520"/>
           </a:xfrm>
           <a:prstGeom prst="rect">
             <a:avLst/>
@@ -14963,11 +15132,8 @@
           <a:lstStyle/>
           <a:p>
             <a:pPr marL="342900" indent="-342900">
-              <a:lnSpc>
-                <a:spcPct val="105000"/>
-              </a:lnSpc>
               <a:spcAft>
-                <a:spcPts val="1200"/>
+                <a:spcPts val="1400"/>
               </a:spcAft>
               <a:buSzPct val="100000"/>
               <a:buChar char="•"/>
@@ -14981,17 +15147,14 @@
                 <a:ea typeface="Calibri" pitchFamily="34" charset="-122"/>
                 <a:cs typeface="Calibri" pitchFamily="34" charset="-120"/>
               </a:rPr>
-              <a:t>That is not a normal output, and it is fair to ask how</a:t>
+              <a:t>Draw a bounding box on a slide overview</a:t>
             </a:r>
             <a:endParaRPr lang="en-US" sz="2000" dirty="0"/>
           </a:p>
           <a:p>
             <a:pPr marL="342900" indent="-342900">
-              <a:lnSpc>
-                <a:spcPct val="105000"/>
-              </a:lnSpc>
               <a:spcAft>
-                <a:spcPts val="1200"/>
+                <a:spcPts val="1400"/>
               </a:spcAft>
               <a:buSzPct val="100000"/>
               <a:buChar char="•"/>
@@ -15005,17 +15168,14 @@
                 <a:ea typeface="Calibri" pitchFamily="34" charset="-122"/>
                 <a:cs typeface="Calibri" pitchFamily="34" charset="-120"/>
               </a:rPr>
-              <a:t>A large fraction of the code was written by an LLM coding agent under close direction</a:t>
+              <a:t>Watch the stage move and the tiles come in</a:t>
             </a:r>
             <a:endParaRPr lang="en-US" sz="2000" dirty="0"/>
           </a:p>
           <a:p>
             <a:pPr marL="342900" indent="-342900">
-              <a:lnSpc>
-                <a:spcPct val="105000"/>
-              </a:lnSpc>
               <a:spcAft>
-                <a:spcPts val="1200"/>
+                <a:spcPts val="1400"/>
               </a:spcAft>
               <a:buSzPct val="100000"/>
               <a:buChar char="•"/>
@@ -15029,15 +15189,121 @@
                 <a:ea typeface="Calibri" pitchFamily="34" charset="-122"/>
                 <a:cs typeface="Calibri" pitchFamily="34" charset="-120"/>
               </a:rPr>
-              <a:t>Several of you will go home and try this, so here is the honest version</a:t>
+              <a:t>Stitched pyramidal image lands back in the project, with its metadata</a:t>
             </a:r>
             <a:endParaRPr lang="en-US" sz="2000" dirty="0"/>
           </a:p>
-        </p:txBody>
-      </p:sp>
-      <p:sp>
-        <p:nvSpPr>
-          <p:cNvPr id="6" name="Text 4"/>
+          <a:p>
+            <a:pPr marL="342900" indent="-342900">
+              <a:spcAft>
+                <a:spcPts val="1400"/>
+              </a:spcAft>
+              <a:buSzPct val="100000"/>
+              <a:buChar char="•"/>
+            </a:pPr>
+            <a:r>
+              <a:rPr lang="en-US" sz="2000" dirty="0">
+                <a:solidFill>
+                  <a:srgbClr val="1F2933"/>
+                </a:solidFill>
+                <a:latin typeface="Calibri" pitchFamily="34" charset="0"/>
+                <a:ea typeface="Calibri" pitchFamily="34" charset="-122"/>
+                <a:cs typeface="Calibri" pitchFamily="34" charset="-120"/>
+              </a:rPr>
+              <a:t>Then open it and annotate it — the loop closes</a:t>
+            </a:r>
+            <a:endParaRPr lang="en-US" sz="2000" dirty="0"/>
+          </a:p>
+          <a:p>
+            <a:pPr marL="342900" indent="-342900">
+              <a:spcAft>
+                <a:spcPts val="1400"/>
+              </a:spcAft>
+              <a:buSzPct val="100000"/>
+              <a:buChar char="•"/>
+            </a:pPr>
+            <a:r>
+              <a:rPr lang="en-US" sz="2000" dirty="0">
+                <a:solidFill>
+                  <a:srgbClr val="1F2933"/>
+                </a:solidFill>
+                <a:latin typeface="Calibri" pitchFamily="34" charset="0"/>
+                <a:ea typeface="Calibri" pitchFamily="34" charset="-122"/>
+                <a:cs typeface="Calibri" pitchFamily="34" charset="-120"/>
+              </a:rPr>
+              <a:t>The stitching half — Tiles to Pyramid — you can install and use today, no microscope needed</a:t>
+            </a:r>
+            <a:endParaRPr lang="en-US" sz="2000" dirty="0"/>
+          </a:p>
+        </p:txBody>
+      </p:sp>
+      <p:sp>
+        <p:nvSpPr>
+          <p:cNvPr id="7" name="Shape 5"/>
+          <p:cNvSpPr/>
+          <p:nvPr/>
+        </p:nvSpPr>
+        <p:spPr>
+          <a:xfrm>
+            <a:off x="566928" y="5650992"/>
+            <a:ext cx="11055096" cy="566928"/>
+          </a:xfrm>
+          <a:prstGeom prst="rect">
+            <a:avLst/>
+          </a:prstGeom>
+          <a:solidFill>
+            <a:srgbClr val="F4F8FD"/>
+          </a:solidFill>
+          <a:ln w="9525">
+            <a:solidFill>
+              <a:srgbClr val="3674C1"/>
+            </a:solidFill>
+            <a:prstDash val="solid"/>
+          </a:ln>
+        </p:spPr>
+      </p:sp>
+      <p:sp>
+        <p:nvSpPr>
+          <p:cNvPr id="8" name="Text 6"/>
+          <p:cNvSpPr/>
+          <p:nvPr/>
+        </p:nvSpPr>
+        <p:spPr>
+          <a:xfrm>
+            <a:off x="768096" y="5650992"/>
+            <a:ext cx="10652760" cy="566928"/>
+          </a:xfrm>
+          <a:prstGeom prst="rect">
+            <a:avLst/>
+          </a:prstGeom>
+          <a:noFill/>
+          <a:ln/>
+        </p:spPr>
+        <p:txBody>
+          <a:bodyPr wrap="square" rtlCol="0" anchor="ctr"/>
+          <a:lstStyle/>
+          <a:p>
+            <a:pPr indent="0" marL="0">
+              <a:buNone/>
+            </a:pPr>
+            <a:r>
+              <a:rPr lang="en-US" sz="1600" b="1" dirty="0">
+                <a:solidFill>
+                  <a:srgbClr val="1F4C86"/>
+                </a:solidFill>
+                <a:latin typeface="Calibri" pitchFamily="34" charset="0"/>
+                <a:ea typeface="Calibri" pitchFamily="34" charset="-122"/>
+                <a:cs typeface="Calibri" pitchFamily="34" charset="-120"/>
+              </a:rPr>
+              <a:t>You watch this one: it needs a microscope, so nobody in the room runs it. About five minutes, with a recorded fallback if the network or the hardware disagrees.</a:t>
+            </a:r>
+            <a:endParaRPr lang="en-US" sz="1600" dirty="0"/>
+          </a:p>
+        </p:txBody>
+      </p:sp>
+      <p:sp>
+        <p:nvSpPr>
+          <p:cNvPr id="9" name="Text 7"/>
           <p:cNvSpPr/>
           <p:nvPr/>
         </p:nvSpPr>
@@ -15108,14 +15374,34 @@
       </p:grpSpPr>
       <p:sp>
         <p:nvSpPr>
-          <p:cNvPr id="2" name="Text 0"/>
-          <p:cNvSpPr/>
-          <p:nvPr/>
-        </p:nvSpPr>
-        <p:spPr>
-          <a:xfrm>
-            <a:off x="566928" y="384048"/>
-            <a:ext cx="11055096" cy="658368"/>
+          <p:cNvPr id="2" name="Shape 0"/>
+          <p:cNvSpPr/>
+          <p:nvPr/>
+        </p:nvSpPr>
+        <p:spPr>
+          <a:xfrm>
+            <a:off x="0" y="0"/>
+            <a:ext cx="274320" cy="6858000"/>
+          </a:xfrm>
+          <a:prstGeom prst="rect">
+            <a:avLst/>
+          </a:prstGeom>
+          <a:solidFill>
+            <a:srgbClr val="3674C1"/>
+          </a:solidFill>
+          <a:ln/>
+        </p:spPr>
+      </p:sp>
+      <p:sp>
+        <p:nvSpPr>
+          <p:cNvPr id="3" name="Text 1"/>
+          <p:cNvSpPr/>
+          <p:nvPr/>
+        </p:nvSpPr>
+        <p:spPr>
+          <a:xfrm>
+            <a:off x="960120" y="2194560"/>
+            <a:ext cx="10268712" cy="1280160"/>
           </a:xfrm>
           <a:prstGeom prst="rect">
             <a:avLst/>
@@ -15131,7 +15417,7 @@
               <a:buNone/>
             </a:pPr>
             <a:r>
-              <a:rPr lang="en-US" sz="3000" b="1" dirty="0">
+              <a:rPr lang="en-US" sz="5400" b="1" dirty="0">
                 <a:solidFill>
                   <a:srgbClr val="1F4C86"/>
                 </a:solidFill>
@@ -15139,62 +15425,22 @@
                 <a:ea typeface="Trebuchet MS" pitchFamily="34" charset="-122"/>
                 <a:cs typeface="Trebuchet MS" pitchFamily="34" charset="-120"/>
               </a:rPr>
-              <a:t>What worked, and what did not</a:t>
-            </a:r>
-            <a:endParaRPr lang="en-US" sz="3000" dirty="0"/>
-          </a:p>
-        </p:txBody>
-      </p:sp>
-      <p:sp>
-        <p:nvSpPr>
-          <p:cNvPr id="3" name="Shape 1"/>
-          <p:cNvSpPr/>
-          <p:nvPr/>
-        </p:nvSpPr>
-        <p:spPr>
-          <a:xfrm>
-            <a:off x="566928" y="1097280"/>
-            <a:ext cx="1920240" cy="50292"/>
-          </a:xfrm>
-          <a:prstGeom prst="rect">
-            <a:avLst/>
-          </a:prstGeom>
-          <a:solidFill>
-            <a:srgbClr val="3674C1"/>
-          </a:solidFill>
-          <a:ln/>
-        </p:spPr>
-      </p:sp>
-      <p:sp>
-        <p:nvSpPr>
-          <p:cNvPr id="4" name="Shape 2"/>
-          <p:cNvSpPr/>
-          <p:nvPr/>
-        </p:nvSpPr>
-        <p:spPr>
-          <a:xfrm>
-            <a:off x="566928" y="1554480"/>
-            <a:ext cx="5298948" cy="530352"/>
-          </a:xfrm>
-          <a:prstGeom prst="rect">
-            <a:avLst/>
-          </a:prstGeom>
-          <a:solidFill>
-            <a:srgbClr val="E8F0FA"/>
-          </a:solidFill>
-          <a:ln/>
-        </p:spPr>
-      </p:sp>
-      <p:sp>
-        <p:nvSpPr>
-          <p:cNvPr id="5" name="Text 3"/>
-          <p:cNvSpPr/>
-          <p:nvPr/>
-        </p:nvSpPr>
-        <p:spPr>
-          <a:xfrm>
-            <a:off x="731520" y="1554480"/>
-            <a:ext cx="4969764" cy="530352"/>
+              <a:t>Questions?</a:t>
+            </a:r>
+            <a:endParaRPr lang="en-US" sz="5400" dirty="0"/>
+          </a:p>
+        </p:txBody>
+      </p:sp>
+      <p:sp>
+        <p:nvSpPr>
+          <p:cNvPr id="4" name="Text 2"/>
+          <p:cNvSpPr/>
+          <p:nvPr/>
+        </p:nvSpPr>
+        <p:spPr>
+          <a:xfrm>
+            <a:off x="960120" y="3566160"/>
+            <a:ext cx="10268712" cy="548640"/>
           </a:xfrm>
           <a:prstGeom prst="rect">
             <a:avLst/>
@@ -15210,156 +15456,30 @@
               <a:buNone/>
             </a:pPr>
             <a:r>
-              <a:rPr lang="en-US" sz="2000" b="1" dirty="0">
-                <a:solidFill>
-                  <a:srgbClr val="1F4C86"/>
-                </a:solidFill>
-                <a:latin typeface="Trebuchet MS" pitchFamily="34" charset="0"/>
-                <a:ea typeface="Trebuchet MS" pitchFamily="34" charset="-122"/>
-                <a:cs typeface="Trebuchet MS" pitchFamily="34" charset="-120"/>
-              </a:rPr>
-              <a:t>Worked</a:t>
-            </a:r>
-            <a:endParaRPr lang="en-US" sz="2000" dirty="0"/>
-          </a:p>
-        </p:txBody>
-      </p:sp>
-      <p:sp>
-        <p:nvSpPr>
-          <p:cNvPr id="6" name="Text 4"/>
-          <p:cNvSpPr/>
-          <p:nvPr/>
-        </p:nvSpPr>
-        <p:spPr>
-          <a:xfrm>
-            <a:off x="658368" y="2240280"/>
-            <a:ext cx="5116068" cy="3566160"/>
-          </a:xfrm>
-          <a:prstGeom prst="rect">
-            <a:avLst/>
-          </a:prstGeom>
-          <a:noFill/>
-          <a:ln/>
-        </p:spPr>
-        <p:txBody>
-          <a:bodyPr wrap="square" rtlCol="0" anchor="t"/>
-          <a:lstStyle/>
-          <a:p>
-            <a:pPr marL="342900" indent="-342900">
-              <a:spcAft>
-                <a:spcPts val="1100"/>
-              </a:spcAft>
-              <a:buSzPct val="100000"/>
-              <a:buChar char="•"/>
-            </a:pPr>
-            <a:r>
-              <a:rPr lang="en-US" sz="1800" dirty="0">
-                <a:solidFill>
-                  <a:srgbClr val="1F2933"/>
-                </a:solidFill>
-                <a:latin typeface="Calibri" pitchFamily="34" charset="0"/>
-                <a:ea typeface="Calibri" pitchFamily="34" charset="-122"/>
-                <a:cs typeface="Calibri" pitchFamily="34" charset="-120"/>
-              </a:rPr>
-              <a:t>Give the model the real API, and require it to compile — a failing build is a free, correct signal</a:t>
-            </a:r>
-            <a:endParaRPr lang="en-US" sz="1800" dirty="0"/>
-          </a:p>
-          <a:p>
-            <a:pPr marL="342900" indent="-342900">
-              <a:spcAft>
-                <a:spcPts val="1100"/>
-              </a:spcAft>
-              <a:buSzPct val="100000"/>
-              <a:buChar char="•"/>
-            </a:pPr>
-            <a:r>
-              <a:rPr lang="en-US" sz="1800" dirty="0">
-                <a:solidFill>
-                  <a:srgbClr val="1F2933"/>
-                </a:solidFill>
-                <a:latin typeface="Calibri" pitchFamily="34" charset="0"/>
-                <a:ea typeface="Calibri" pitchFamily="34" charset="-122"/>
-                <a:cs typeface="Calibri" pitchFamily="34" charset="-120"/>
-              </a:rPr>
-              <a:t>Write the documentation first and treat it as the specification</a:t>
-            </a:r>
-            <a:endParaRPr lang="en-US" sz="1800" dirty="0"/>
-          </a:p>
-          <a:p>
-            <a:pPr marL="342900" indent="-342900">
-              <a:spcAft>
-                <a:spcPts val="1100"/>
-              </a:spcAft>
-              <a:buSzPct val="100000"/>
-              <a:buChar char="•"/>
-            </a:pPr>
-            <a:r>
-              <a:rPr lang="en-US" sz="1800" dirty="0">
-                <a:solidFill>
-                  <a:srgbClr val="1F2933"/>
-                </a:solidFill>
-                <a:latin typeface="Calibri" pitchFamily="34" charset="0"/>
-                <a:ea typeface="Calibri" pitchFamily="34" charset="-122"/>
-                <a:cs typeface="Calibri" pitchFamily="34" charset="-120"/>
-              </a:rPr>
-              <a:t>Keep a persistent map of the codebase so each session does not re-derive it badly</a:t>
-            </a:r>
-            <a:endParaRPr lang="en-US" sz="1800" dirty="0"/>
-          </a:p>
-          <a:p>
-            <a:pPr marL="342900" indent="-342900">
-              <a:spcAft>
-                <a:spcPts val="1100"/>
-              </a:spcAft>
-              <a:buSzPct val="100000"/>
-              <a:buChar char="•"/>
-            </a:pPr>
-            <a:r>
-              <a:rPr lang="en-US" sz="1800" dirty="0">
-                <a:solidFill>
-                  <a:srgbClr val="1F2933"/>
-                </a:solidFill>
-                <a:latin typeface="Calibri" pitchFamily="34" charset="0"/>
-                <a:ea typeface="Calibri" pitchFamily="34" charset="-122"/>
-                <a:cs typeface="Calibri" pitchFamily="34" charset="-120"/>
-              </a:rPr>
-              <a:t>Automate the tedious checks — API compatibility across sixteen repositories</a:t>
-            </a:r>
-            <a:endParaRPr lang="en-US" sz="1800" dirty="0"/>
-          </a:p>
-        </p:txBody>
-      </p:sp>
-      <p:sp>
-        <p:nvSpPr>
-          <p:cNvPr id="7" name="Shape 5"/>
-          <p:cNvSpPr/>
-          <p:nvPr/>
-        </p:nvSpPr>
-        <p:spPr>
-          <a:xfrm>
-            <a:off x="6323076" y="1554480"/>
-            <a:ext cx="5298948" cy="530352"/>
-          </a:xfrm>
-          <a:prstGeom prst="rect">
-            <a:avLst/>
-          </a:prstGeom>
-          <a:solidFill>
-            <a:srgbClr val="E8F0FA"/>
-          </a:solidFill>
-          <a:ln/>
-        </p:spPr>
-      </p:sp>
-      <p:sp>
-        <p:nvSpPr>
-          <p:cNvPr id="8" name="Text 6"/>
-          <p:cNvSpPr/>
-          <p:nvPr/>
-        </p:nvSpPr>
-        <p:spPr>
-          <a:xfrm>
-            <a:off x="6487668" y="1554480"/>
-            <a:ext cx="4969764" cy="530352"/>
+              <a:rPr lang="en-US" sz="2200" b="1" dirty="0">
+                <a:solidFill>
+                  <a:srgbClr val="3674C1"/>
+                </a:solidFill>
+                <a:latin typeface="Calibri" pitchFamily="34" charset="0"/>
+                <a:ea typeface="Calibri" pitchFamily="34" charset="-122"/>
+                <a:cs typeface="Calibri" pitchFamily="34" charset="-120"/>
+              </a:rPr>
+              <a:t>michaelsnelson.github.io/BINA-I2K-2026-QuPath-Extensions</a:t>
+            </a:r>
+            <a:endParaRPr lang="en-US" sz="2200" dirty="0"/>
+          </a:p>
+        </p:txBody>
+      </p:sp>
+      <p:sp>
+        <p:nvSpPr>
+          <p:cNvPr id="5" name="Text 3"/>
+          <p:cNvSpPr/>
+          <p:nvPr/>
+        </p:nvSpPr>
+        <p:spPr>
+          <a:xfrm>
+            <a:off x="960120" y="4206240"/>
+            <a:ext cx="9811512" cy="457200"/>
           </a:xfrm>
           <a:prstGeom prst="rect">
             <a:avLst/>
@@ -15375,129 +15495,23 @@
               <a:buNone/>
             </a:pPr>
             <a:r>
-              <a:rPr lang="en-US" sz="2000" b="1" dirty="0">
-                <a:solidFill>
-                  <a:srgbClr val="B26A00"/>
-                </a:solidFill>
-                <a:latin typeface="Trebuchet MS" pitchFamily="34" charset="0"/>
-                <a:ea typeface="Trebuchet MS" pitchFamily="34" charset="-122"/>
-                <a:cs typeface="Trebuchet MS" pitchFamily="34" charset="-120"/>
-              </a:rPr>
-              <a:t>Did not</a:t>
-            </a:r>
-            <a:endParaRPr lang="en-US" sz="2000" dirty="0"/>
-          </a:p>
-        </p:txBody>
-      </p:sp>
-      <p:sp>
-        <p:nvSpPr>
-          <p:cNvPr id="9" name="Text 7"/>
-          <p:cNvSpPr/>
-          <p:nvPr/>
-        </p:nvSpPr>
-        <p:spPr>
-          <a:xfrm>
-            <a:off x="6414516" y="2240280"/>
-            <a:ext cx="5116068" cy="3566160"/>
-          </a:xfrm>
-          <a:prstGeom prst="rect">
-            <a:avLst/>
-          </a:prstGeom>
-          <a:noFill/>
-          <a:ln/>
-        </p:spPr>
-        <p:txBody>
-          <a:bodyPr wrap="square" rtlCol="0" anchor="t"/>
-          <a:lstStyle/>
-          <a:p>
-            <a:pPr marL="342900" indent="-342900">
-              <a:spcAft>
-                <a:spcPts val="1100"/>
-              </a:spcAft>
-              <a:buSzPct val="100000"/>
-              <a:buChar char="•"/>
-            </a:pPr>
-            <a:r>
-              <a:rPr lang="en-US" sz="1800" dirty="0">
-                <a:solidFill>
-                  <a:srgbClr val="1F2933"/>
-                </a:solidFill>
-                <a:latin typeface="Calibri" pitchFamily="34" charset="0"/>
-                <a:ea typeface="Calibri" pitchFamily="34" charset="-122"/>
-                <a:cs typeface="Calibri" pitchFamily="34" charset="-120"/>
-              </a:rPr>
-              <a:t>"Build me an extension that does X" — compiles, and is wrong in ways you find in front of an audience</a:t>
-            </a:r>
-            <a:endParaRPr lang="en-US" sz="1800" dirty="0"/>
-          </a:p>
-          <a:p>
-            <a:pPr marL="342900" indent="-342900">
-              <a:spcAft>
-                <a:spcPts val="1100"/>
-              </a:spcAft>
-              <a:buSzPct val="100000"/>
-              <a:buChar char="•"/>
-            </a:pPr>
-            <a:r>
-              <a:rPr lang="en-US" sz="1800" dirty="0">
-                <a:solidFill>
-                  <a:srgbClr val="1F2933"/>
-                </a:solidFill>
-                <a:latin typeface="Calibri" pitchFamily="34" charset="0"/>
-                <a:ea typeface="Calibri" pitchFamily="34" charset="-122"/>
-                <a:cs typeface="Calibri" pitchFamily="34" charset="-120"/>
-              </a:rPr>
-              <a:t>Scientific correctness — a bootstrap that runs, looks plausible, and resamples the wrong axis</a:t>
-            </a:r>
-            <a:endParaRPr lang="en-US" sz="1800" dirty="0"/>
-          </a:p>
-          <a:p>
-            <a:pPr marL="342900" indent="-342900">
-              <a:spcAft>
-                <a:spcPts val="1100"/>
-              </a:spcAft>
-              <a:buSzPct val="100000"/>
-              <a:buChar char="•"/>
-            </a:pPr>
-            <a:r>
-              <a:rPr lang="en-US" sz="1800" dirty="0">
-                <a:solidFill>
-                  <a:srgbClr val="1F2933"/>
-                </a:solidFill>
-                <a:latin typeface="Calibri" pitchFamily="34" charset="0"/>
-                <a:ea typeface="Calibri" pitchFamily="34" charset="-122"/>
-                <a:cs typeface="Calibri" pitchFamily="34" charset="-120"/>
-              </a:rPr>
-              <a:t>GUI behaviour — nothing catches a dialog opening off-screen except a human</a:t>
-            </a:r>
-            <a:endParaRPr lang="en-US" sz="1800" dirty="0"/>
-          </a:p>
-          <a:p>
-            <a:pPr marL="342900" indent="-342900">
-              <a:spcAft>
-                <a:spcPts val="1100"/>
-              </a:spcAft>
-              <a:buSzPct val="100000"/>
-              <a:buChar char="•"/>
-            </a:pPr>
-            <a:r>
-              <a:rPr lang="en-US" sz="1800" dirty="0">
-                <a:solidFill>
-                  <a:srgbClr val="1F2933"/>
-                </a:solidFill>
-                <a:latin typeface="Calibri" pitchFamily="34" charset="0"/>
-                <a:ea typeface="Calibri" pitchFamily="34" charset="-122"/>
-                <a:cs typeface="Calibri" pitchFamily="34" charset="-120"/>
-              </a:rPr>
-              <a:t>Licensing — get it wrong and you cannot distribute your work</a:t>
-            </a:r>
-            <a:endParaRPr lang="en-US" sz="1800" dirty="0"/>
-          </a:p>
-        </p:txBody>
-      </p:sp>
-      <p:sp>
-        <p:nvSpPr>
-          <p:cNvPr id="10" name="Text 8"/>
+              <a:rPr lang="en-US" sz="1700" i="1" dirty="0">
+                <a:solidFill>
+                  <a:srgbClr val="5A6675"/>
+                </a:solidFill>
+                <a:latin typeface="Calibri" pitchFamily="34" charset="0"/>
+                <a:ea typeface="Calibri" pitchFamily="34" charset="-122"/>
+                <a:cs typeface="Calibri" pitchFamily="34" charset="-120"/>
+              </a:rPr>
+              <a:t>Everything after this slide is backup, kept for the questions it answers.</a:t>
+            </a:r>
+            <a:endParaRPr lang="en-US" sz="1700" dirty="0"/>
+          </a:p>
+        </p:txBody>
+      </p:sp>
+      <p:sp>
+        <p:nvSpPr>
+          <p:cNvPr id="6" name="Text 4"/>
           <p:cNvSpPr/>
           <p:nvPr/>
         </p:nvSpPr>
@@ -15850,14 +15864,54 @@
       </p:grpSpPr>
       <p:sp>
         <p:nvSpPr>
-          <p:cNvPr id="2" name="Text 0"/>
-          <p:cNvSpPr/>
-          <p:nvPr/>
-        </p:nvSpPr>
-        <p:spPr>
-          <a:xfrm>
-            <a:off x="566928" y="384048"/>
-            <a:ext cx="11055096" cy="658368"/>
+          <p:cNvPr id="2" name="Shape 0"/>
+          <p:cNvSpPr/>
+          <p:nvPr/>
+        </p:nvSpPr>
+        <p:spPr>
+          <a:xfrm>
+            <a:off x="0" y="1417320"/>
+            <a:ext cx="12188952" cy="3108960"/>
+          </a:xfrm>
+          <a:prstGeom prst="rect">
+            <a:avLst/>
+          </a:prstGeom>
+          <a:solidFill>
+            <a:srgbClr val="E8F0FA"/>
+          </a:solidFill>
+          <a:ln/>
+        </p:spPr>
+      </p:sp>
+      <p:sp>
+        <p:nvSpPr>
+          <p:cNvPr id="3" name="Shape 1"/>
+          <p:cNvSpPr/>
+          <p:nvPr/>
+        </p:nvSpPr>
+        <p:spPr>
+          <a:xfrm>
+            <a:off x="0" y="1417320"/>
+            <a:ext cx="201168" cy="3108960"/>
+          </a:xfrm>
+          <a:prstGeom prst="rect">
+            <a:avLst/>
+          </a:prstGeom>
+          <a:solidFill>
+            <a:srgbClr val="3674C1"/>
+          </a:solidFill>
+          <a:ln/>
+        </p:spPr>
+      </p:sp>
+      <p:sp>
+        <p:nvSpPr>
+          <p:cNvPr id="4" name="Text 2"/>
+          <p:cNvSpPr/>
+          <p:nvPr/>
+        </p:nvSpPr>
+        <p:spPr>
+          <a:xfrm>
+            <a:off x="566928" y="1691640"/>
+            <a:ext cx="1828800" cy="914400"/>
           </a:xfrm>
           <a:prstGeom prst="rect">
             <a:avLst/>
@@ -15873,169 +15927,30 @@
               <a:buNone/>
             </a:pPr>
             <a:r>
-              <a:rPr lang="en-US" sz="3000" b="1" dirty="0">
-                <a:solidFill>
-                  <a:srgbClr val="1F4C86"/>
+              <a:rPr lang="en-US" sz="5400" b="1" dirty="0">
+                <a:solidFill>
+                  <a:srgbClr val="3674C1"/>
                 </a:solidFill>
                 <a:latin typeface="Trebuchet MS" pitchFamily="34" charset="0"/>
                 <a:ea typeface="Trebuchet MS" pitchFamily="34" charset="-122"/>
                 <a:cs typeface="Trebuchet MS" pitchFamily="34" charset="-120"/>
               </a:rPr>
-              <a:t>The honest summary</a:t>
-            </a:r>
-            <a:endParaRPr lang="en-US" sz="3000" dirty="0"/>
-          </a:p>
-        </p:txBody>
-      </p:sp>
-      <p:sp>
-        <p:nvSpPr>
-          <p:cNvPr id="3" name="Shape 1"/>
-          <p:cNvSpPr/>
-          <p:nvPr/>
-        </p:nvSpPr>
-        <p:spPr>
-          <a:xfrm>
-            <a:off x="566928" y="1097280"/>
-            <a:ext cx="1920240" cy="50292"/>
-          </a:xfrm>
-          <a:prstGeom prst="rect">
-            <a:avLst/>
-          </a:prstGeom>
-          <a:solidFill>
-            <a:srgbClr val="3674C1"/>
-          </a:solidFill>
-          <a:ln/>
-        </p:spPr>
-      </p:sp>
-      <p:sp>
-        <p:nvSpPr>
-          <p:cNvPr id="4" name="Text 2"/>
-          <p:cNvSpPr/>
-          <p:nvPr/>
-        </p:nvSpPr>
-        <p:spPr>
-          <a:xfrm>
-            <a:off x="640080" y="1481328"/>
-            <a:ext cx="10963656" cy="4553712"/>
-          </a:xfrm>
-          <a:prstGeom prst="rect">
-            <a:avLst/>
-          </a:prstGeom>
-          <a:noFill/>
-          <a:ln/>
-        </p:spPr>
-        <p:txBody>
-          <a:bodyPr wrap="square" rtlCol="0" anchor="t"/>
-          <a:lstStyle/>
-          <a:p>
-            <a:pPr marL="342900" indent="-342900">
-              <a:lnSpc>
-                <a:spcPct val="105000"/>
-              </a:lnSpc>
-              <a:spcAft>
-                <a:spcPts val="1200"/>
-              </a:spcAft>
-              <a:buSzPct val="100000"/>
-              <a:buChar char="•"/>
-            </a:pPr>
-            <a:r>
-              <a:rPr lang="en-US" sz="2000" dirty="0">
-                <a:solidFill>
-                  <a:srgbClr val="1F2933"/>
-                </a:solidFill>
-                <a:latin typeface="Calibri" pitchFamily="34" charset="0"/>
-                <a:ea typeface="Calibri" pitchFamily="34" charset="-122"/>
-                <a:cs typeface="Calibri" pitchFamily="34" charset="-120"/>
-              </a:rPr>
-              <a:t>AI assistance changed the cost of building an extension by about an order of magnitude</a:t>
-            </a:r>
-            <a:endParaRPr lang="en-US" sz="2000" dirty="0"/>
-          </a:p>
-          <a:p>
-            <a:pPr marL="342900" indent="-342900">
-              <a:lnSpc>
-                <a:spcPct val="105000"/>
-              </a:lnSpc>
-              <a:spcAft>
-                <a:spcPts val="1200"/>
-              </a:spcAft>
-              <a:buSzPct val="100000"/>
-              <a:buChar char="•"/>
-            </a:pPr>
-            <a:r>
-              <a:rPr lang="en-US" sz="2000" dirty="0">
-                <a:solidFill>
-                  <a:srgbClr val="1F2933"/>
-                </a:solidFill>
-                <a:latin typeface="Calibri" pitchFamily="34" charset="0"/>
-                <a:ea typeface="Calibri" pitchFamily="34" charset="-122"/>
-                <a:cs typeface="Calibri" pitchFamily="34" charset="-120"/>
-              </a:rPr>
-              <a:t>It changed the correctness of one not at all</a:t>
-            </a:r>
-            <a:endParaRPr lang="en-US" sz="2000" dirty="0"/>
-          </a:p>
-          <a:p>
-            <a:pPr marL="342900" indent="-342900">
-              <a:lnSpc>
-                <a:spcPct val="105000"/>
-              </a:lnSpc>
-              <a:spcAft>
-                <a:spcPts val="1200"/>
-              </a:spcAft>
-              <a:buSzPct val="100000"/>
-              <a:buChar char="•"/>
-            </a:pPr>
-            <a:r>
-              <a:rPr lang="en-US" sz="2000" dirty="0">
-                <a:solidFill>
-                  <a:srgbClr val="1F2933"/>
-                </a:solidFill>
-                <a:latin typeface="Calibri" pitchFamily="34" charset="0"/>
-                <a:ea typeface="Calibri" pitchFamily="34" charset="-122"/>
-                <a:cs typeface="Calibri" pitchFamily="34" charset="-120"/>
-              </a:rPr>
-              <a:t>The bottleneck moved from "can I write this Java" to "do I know what this should do, and can I tell when it is lying to me"</a:t>
-            </a:r>
-            <a:endParaRPr lang="en-US" sz="2000" dirty="0"/>
-          </a:p>
-        </p:txBody>
-      </p:sp>
-      <p:sp>
-        <p:nvSpPr>
-          <p:cNvPr id="5" name="Shape 3"/>
-          <p:cNvSpPr/>
-          <p:nvPr/>
-        </p:nvSpPr>
-        <p:spPr>
-          <a:xfrm>
-            <a:off x="566928" y="5650992"/>
-            <a:ext cx="11055096" cy="566928"/>
-          </a:xfrm>
-          <a:prstGeom prst="rect">
-            <a:avLst/>
-          </a:prstGeom>
-          <a:solidFill>
-            <a:srgbClr val="F4F8FD"/>
-          </a:solidFill>
-          <a:ln w="9525">
-            <a:solidFill>
-              <a:srgbClr val="3674C1"/>
-            </a:solidFill>
-            <a:prstDash val="solid"/>
-          </a:ln>
-        </p:spPr>
-      </p:sp>
-      <p:sp>
-        <p:nvSpPr>
-          <p:cNvPr id="6" name="Text 4"/>
-          <p:cNvSpPr/>
-          <p:nvPr/>
-        </p:nvSpPr>
-        <p:spPr>
-          <a:xfrm>
-            <a:off x="768096" y="5650992"/>
-            <a:ext cx="10652760" cy="566928"/>
+              <a:t>B</a:t>
+            </a:r>
+            <a:endParaRPr lang="en-US" sz="5400" dirty="0"/>
+          </a:p>
+        </p:txBody>
+      </p:sp>
+      <p:sp>
+        <p:nvSpPr>
+          <p:cNvPr id="5" name="Text 3"/>
+          <p:cNvSpPr/>
+          <p:nvPr/>
+        </p:nvSpPr>
+        <p:spPr>
+          <a:xfrm>
+            <a:off x="566928" y="2606040"/>
+            <a:ext cx="11055096" cy="868680"/>
           </a:xfrm>
           <a:prstGeom prst="rect">
             <a:avLst/>
@@ -16051,23 +15966,101 @@
               <a:buNone/>
             </a:pPr>
             <a:r>
-              <a:rPr lang="en-US" sz="1600" b="1" dirty="0">
+              <a:rPr lang="en-US" sz="4000" b="1" dirty="0">
                 <a:solidFill>
                   <a:srgbClr val="1F4C86"/>
                 </a:solidFill>
-                <a:latin typeface="Calibri" pitchFamily="34" charset="0"/>
-                <a:ea typeface="Calibri" pitchFamily="34" charset="-122"/>
-                <a:cs typeface="Calibri" pitchFamily="34" charset="-120"/>
-              </a:rPr>
-              <a:t>A better bottleneck to have. Still a bottleneck, and still yours.</a:t>
-            </a:r>
-            <a:endParaRPr lang="en-US" sz="1600" dirty="0"/>
+                <a:latin typeface="Trebuchet MS" pitchFamily="34" charset="0"/>
+                <a:ea typeface="Trebuchet MS" pitchFamily="34" charset="-122"/>
+                <a:cs typeface="Trebuchet MS" pitchFamily="34" charset="-120"/>
+              </a:rPr>
+              <a:t>Backup</a:t>
+            </a:r>
+            <a:endParaRPr lang="en-US" sz="4000" dirty="0"/>
+          </a:p>
+        </p:txBody>
+      </p:sp>
+      <p:sp>
+        <p:nvSpPr>
+          <p:cNvPr id="6" name="Text 4"/>
+          <p:cNvSpPr/>
+          <p:nvPr/>
+        </p:nvSpPr>
+        <p:spPr>
+          <a:xfrm>
+            <a:off x="566928" y="3456432"/>
+            <a:ext cx="10140696" cy="731520"/>
+          </a:xfrm>
+          <a:prstGeom prst="rect">
+            <a:avLst/>
+          </a:prstGeom>
+          <a:noFill/>
+          <a:ln/>
+        </p:spPr>
+        <p:txBody>
+          <a:bodyPr wrap="square" rtlCol="0" anchor="t"/>
+          <a:lstStyle/>
+          <a:p>
+            <a:pPr indent="0" marL="0">
+              <a:buNone/>
+            </a:pPr>
+            <a:r>
+              <a:rPr lang="en-US" sz="1900" dirty="0">
+                <a:solidFill>
+                  <a:srgbClr val="5A6675"/>
+                </a:solidFill>
+                <a:latin typeface="Calibri" pitchFamily="34" charset="0"/>
+                <a:ea typeface="Calibri" pitchFamily="34" charset="-122"/>
+                <a:cs typeface="Calibri" pitchFamily="34" charset="-120"/>
+              </a:rPr>
+              <a:t>Cut for time. Here if a question needs them</a:t>
+            </a:r>
+            <a:endParaRPr lang="en-US" sz="1900" dirty="0"/>
           </a:p>
         </p:txBody>
       </p:sp>
       <p:sp>
         <p:nvSpPr>
           <p:cNvPr id="7" name="Text 5"/>
+          <p:cNvSpPr/>
+          <p:nvPr/>
+        </p:nvSpPr>
+        <p:spPr>
+          <a:xfrm>
+            <a:off x="566928" y="6199632"/>
+            <a:ext cx="8229600" cy="365760"/>
+          </a:xfrm>
+          <a:prstGeom prst="rect">
+            <a:avLst/>
+          </a:prstGeom>
+          <a:noFill/>
+          <a:ln/>
+        </p:spPr>
+        <p:txBody>
+          <a:bodyPr wrap="square" rtlCol="0" anchor="ctr"/>
+          <a:lstStyle/>
+          <a:p>
+            <a:pPr indent="0" marL="0">
+              <a:buNone/>
+            </a:pPr>
+            <a:r>
+              <a:rPr lang="en-US" sz="1400" dirty="0">
+                <a:solidFill>
+                  <a:srgbClr val="A8B2BF"/>
+                </a:solidFill>
+                <a:latin typeface="Calibri" pitchFamily="34" charset="0"/>
+                <a:ea typeface="Calibri" pitchFamily="34" charset="-122"/>
+                <a:cs typeface="Calibri" pitchFamily="34" charset="-120"/>
+              </a:rPr>
+              <a:t>michaelsnelson.github.io/BINA-I2K-2026-QuPath-Extensions</a:t>
+            </a:r>
+            <a:endParaRPr lang="en-US" sz="1400" dirty="0"/>
+          </a:p>
+        </p:txBody>
+      </p:sp>
+      <p:sp>
+        <p:nvSpPr>
+          <p:cNvPr id="8" name="Text 6"/>
           <p:cNvSpPr/>
           <p:nvPr/>
         </p:nvSpPr>
@@ -16169,7 +16162,7 @@
                 <a:ea typeface="Trebuchet MS" pitchFamily="34" charset="-122"/>
                 <a:cs typeface="Trebuchet MS" pitchFamily="34" charset="-120"/>
               </a:rPr>
-              <a:t>What is underneath</a:t>
+              <a:t>The claim</a:t>
             </a:r>
             <a:endParaRPr lang="en-US" sz="3000" dirty="0"/>
           </a:p>
@@ -16235,7 +16228,7 @@
                 <a:ea typeface="Calibri" pitchFamily="34" charset="-122"/>
                 <a:cs typeface="Calibri" pitchFamily="34" charset="-120"/>
               </a:rPr>
-              <a:t>Your choice of encoder, from lightweight convolutional networks to vision transformers</a:t>
+              <a:t>QuPath is usually treated as post-acquisition analysis software</a:t>
             </a:r>
             <a:endParaRPr lang="en-US" sz="2000" dirty="0"/>
           </a:p>
@@ -16259,7 +16252,7 @@
                 <a:ea typeface="Calibri" pitchFamily="34" charset="-122"/>
                 <a:cs typeface="Calibri" pitchFamily="34" charset="-120"/>
               </a:rPr>
-              <a:t>Start from weights pretrained on histology rather than on everyday photographs</a:t>
+              <a:t>Its extension mechanism reaches much further than that</a:t>
             </a:r>
             <a:endParaRPr lang="en-US" sz="2000" dirty="0"/>
           </a:p>
@@ -16283,7 +16276,31 @@
                 <a:ea typeface="Calibri" pitchFamily="34" charset="-122"/>
                 <a:cs typeface="Calibri" pitchFamily="34" charset="-120"/>
               </a:rPr>
-              <a:t>Or from pathology foundation models, downloaded on demand</a:t>
+              <a:t>Acquisition → analysis → validation → publication, in one environment</a:t>
+            </a:r>
+            <a:endParaRPr lang="en-US" sz="2000" dirty="0"/>
+          </a:p>
+          <a:p>
+            <a:pPr lvl="1" marL="685800" indent="-342900">
+              <a:lnSpc>
+                <a:spcPct val="105000"/>
+              </a:lnSpc>
+              <a:spcAft>
+                <a:spcPts val="800"/>
+              </a:spcAft>
+              <a:buSzPct val="100000"/>
+              <a:buChar char="▪"/>
+            </a:pPr>
+            <a:r>
+              <a:rPr lang="en-US" sz="1700" dirty="0">
+                <a:solidFill>
+                  <a:srgbClr val="5A6675"/>
+                </a:solidFill>
+                <a:latin typeface="Calibri" pitchFamily="34" charset="0"/>
+                <a:ea typeface="Calibri" pitchFamily="34" charset="-122"/>
+                <a:cs typeface="Calibri" pitchFamily="34" charset="-120"/>
+              </a:rPr>
+              <a:t>One project. One place your metadata lives. One place your figures come from</a:t>
             </a:r>
             <a:endParaRPr lang="en-US" sz="2000" dirty="0"/>
           </a:p>
@@ -16307,7 +16324,7 @@
                 <a:ea typeface="Calibri" pitchFamily="34" charset="-122"/>
                 <a:cs typeface="Calibri" pitchFamily="34" charset="-120"/>
               </a:rPr>
-              <a:t>Normalisation statistics sampled across the image, or reused from training, so every tile is scaled the same way</a:t>
+              <a:t>Sixteen extensions built at LOCI — thirteen you can install this afternoon</a:t>
             </a:r>
             <a:endParaRPr lang="en-US" sz="2000" dirty="0"/>
           </a:p>
@@ -16371,7 +16388,7 @@
                 <a:ea typeface="Calibri" pitchFamily="34" charset="-122"/>
                 <a:cs typeface="Calibri" pitchFamily="34" charset="-120"/>
               </a:rPr>
-              <a:t>Training really wants a GPU — on CPU it is hours instead of minutes, and CPU is the default install. That is why training is a demonstration and inference is the exercise.</a:t>
+              <a:t>Most of these are under active development, written in bursts as I have time. Useful, not stable — treat them accordingly.</a:t>
             </a:r>
             <a:endParaRPr lang="en-US" sz="1600" dirty="0"/>
           </a:p>
@@ -16481,7 +16498,7 @@
                 <a:ea typeface="Trebuchet MS" pitchFamily="34" charset="-122"/>
                 <a:cs typeface="Trebuchet MS" pitchFamily="34" charset="-120"/>
               </a:rPr>
-              <a:t>What we are not covering</a:t>
+              <a:t>Sixteen extensions, one person</a:t>
             </a:r>
             <a:endParaRPr lang="en-US" sz="3000" dirty="0"/>
           </a:p>
@@ -16540,7 +16557,7 @@
                 <a:ea typeface="Calibri" pitchFamily="34" charset="-122"/>
                 <a:cs typeface="Calibri" pitchFamily="34" charset="-120"/>
               </a:rPr>
-              <a:t>Two halves of the same workflow, in the right order — hers first, then this.</a:t>
+              <a:t>The part of this talk most likely to be useful outside QuPath.</a:t>
             </a:r>
             <a:endParaRPr lang="en-US" sz="1700" dirty="0"/>
           </a:p>
@@ -16586,7 +16603,7 @@
                 <a:ea typeface="Calibri" pitchFamily="34" charset="-122"/>
                 <a:cs typeface="Calibri" pitchFamily="34" charset="-120"/>
               </a:rPr>
-              <a:t>QuPath already has object classification — train on measurements, or threshold a single one</a:t>
+              <a:t>That is not a normal output, and it is fair to ask how</a:t>
             </a:r>
             <a:endParaRPr lang="en-US" sz="2000" dirty="0"/>
           </a:p>
@@ -16610,7 +16627,7 @@
                 <a:ea typeface="Calibri" pitchFamily="34" charset="-122"/>
                 <a:cs typeface="Calibri" pitchFamily="34" charset="-120"/>
               </a:rPr>
-              <a:t>We are not re-teaching it. Sara’s Monday session was the hi-plex classification half</a:t>
+              <a:t>A large fraction of the code was written by an LLM coding agent under close direction</a:t>
             </a:r>
             <a:endParaRPr lang="en-US" sz="2000" dirty="0"/>
           </a:p>
@@ -16634,127 +16651,15 @@
                 <a:ea typeface="Calibri" pitchFamily="34" charset="-122"/>
                 <a:cs typeface="Calibri" pitchFamily="34" charset="-120"/>
               </a:rPr>
-              <a:t>What follows are alternative mechanisms for getting a class onto a cell:</a:t>
+              <a:t>Several of you will go home and try this, so here is the honest version</a:t>
             </a:r>
             <a:endParaRPr lang="en-US" sz="2000" dirty="0"/>
           </a:p>
-          <a:p>
-            <a:pPr marL="342900" indent="-342900">
-              <a:lnSpc>
-                <a:spcPct val="105000"/>
-              </a:lnSpc>
-              <a:spcAft>
-                <a:spcPts val="1200"/>
-              </a:spcAft>
-              <a:buSzPct val="100000"/>
-              <a:buChar char="•"/>
-            </a:pPr>
-            <a:r>
-              <a:rPr lang="en-US" sz="2000" dirty="0">
-                <a:solidFill>
-                  <a:srgbClr val="1F2933"/>
-                </a:solidFill>
-                <a:latin typeface="Calibri" pitchFamily="34" charset="0"/>
-                <a:ea typeface="Calibri" pitchFamily="34" charset="-122"/>
-                <a:cs typeface="Calibri" pitchFamily="34" charset="-120"/>
-              </a:rPr>
-              <a:t>Unsupervised clustering · rule-based marker gating · propagation from a small hand-labelled subset · applying an existing classifier to a chosen subset instead of everything</a:t>
-            </a:r>
-            <a:endParaRPr lang="en-US" sz="2000" dirty="0"/>
-          </a:p>
-          <a:p>
-            <a:pPr marL="342900" indent="-342900">
-              <a:lnSpc>
-                <a:spcPct val="105000"/>
-              </a:lnSpc>
-              <a:spcAft>
-                <a:spcPts val="1200"/>
-              </a:spcAft>
-              <a:buSzPct val="100000"/>
-              <a:buChar char="•"/>
-            </a:pPr>
-            <a:r>
-              <a:rPr lang="en-US" sz="2000" dirty="0">
-                <a:solidFill>
-                  <a:srgbClr val="1F2933"/>
-                </a:solidFill>
-                <a:latin typeface="Calibri" pitchFamily="34" charset="0"/>
-                <a:ea typeface="Calibri" pitchFamily="34" charset="-122"/>
-                <a:cs typeface="Calibri" pitchFamily="34" charset="-120"/>
-              </a:rPr>
-              <a:t>Then: what those classified cells are actually telling you — which sit next to which, and whether that differs between images</a:t>
-            </a:r>
-            <a:endParaRPr lang="en-US" sz="2000" dirty="0"/>
-          </a:p>
-        </p:txBody>
-      </p:sp>
-      <p:sp>
-        <p:nvSpPr>
-          <p:cNvPr id="6" name="Shape 4"/>
-          <p:cNvSpPr/>
-          <p:nvPr/>
-        </p:nvSpPr>
-        <p:spPr>
-          <a:xfrm>
-            <a:off x="566928" y="5650992"/>
-            <a:ext cx="11055096" cy="566928"/>
-          </a:xfrm>
-          <a:prstGeom prst="rect">
-            <a:avLst/>
-          </a:prstGeom>
-          <a:solidFill>
-            <a:srgbClr val="F4F8FD"/>
-          </a:solidFill>
-          <a:ln w="9525">
-            <a:solidFill>
-              <a:srgbClr val="3674C1"/>
-            </a:solidFill>
-            <a:prstDash val="solid"/>
-          </a:ln>
-        </p:spPr>
-      </p:sp>
-      <p:sp>
-        <p:nvSpPr>
-          <p:cNvPr id="7" name="Text 5"/>
-          <p:cNvSpPr/>
-          <p:nvPr/>
-        </p:nvSpPr>
-        <p:spPr>
-          <a:xfrm>
-            <a:off x="768096" y="5650992"/>
-            <a:ext cx="10652760" cy="566928"/>
-          </a:xfrm>
-          <a:prstGeom prst="rect">
-            <a:avLst/>
-          </a:prstGeom>
-          <a:noFill/>
-          <a:ln/>
-        </p:spPr>
-        <p:txBody>
-          <a:bodyPr wrap="square" rtlCol="0" anchor="ctr"/>
-          <a:lstStyle/>
-          <a:p>
-            <a:pPr indent="0" marL="0">
-              <a:buNone/>
-            </a:pPr>
-            <a:r>
-              <a:rPr lang="en-US" sz="1600" b="1" dirty="0">
-                <a:solidFill>
-                  <a:srgbClr val="1F4C86"/>
-                </a:solidFill>
-                <a:latin typeface="Calibri" pitchFamily="34" charset="0"/>
-                <a:ea typeface="Calibri" pitchFamily="34" charset="-122"/>
-                <a:cs typeface="Calibri" pitchFamily="34" charset="-120"/>
-              </a:rPr>
-              <a:t>If you missed hers, the two extensions she demonstrated are documented on our site too.</a:t>
-            </a:r>
-            <a:endParaRPr lang="en-US" sz="1600" dirty="0"/>
-          </a:p>
-        </p:txBody>
-      </p:sp>
-      <p:sp>
-        <p:nvSpPr>
-          <p:cNvPr id="8" name="Text 6"/>
+        </p:txBody>
+      </p:sp>
+      <p:sp>
+        <p:nvSpPr>
+          <p:cNvPr id="6" name="Text 4"/>
           <p:cNvSpPr/>
           <p:nvPr/>
         </p:nvSpPr>
@@ -16856,7 +16761,7 @@
                 <a:ea typeface="Trebuchet MS" pitchFamily="34" charset="-122"/>
                 <a:cs typeface="Trebuchet MS" pitchFamily="34" charset="-120"/>
               </a:rPr>
-              <a:t>How it is put together</a:t>
+              <a:t>What worked, and what did not</a:t>
             </a:r>
             <a:endParaRPr lang="en-US" sz="3000" dirty="0"/>
           </a:p>
@@ -16884,14 +16789,34 @@
       </p:sp>
       <p:sp>
         <p:nvSpPr>
-          <p:cNvPr id="4" name="Text 2"/>
-          <p:cNvSpPr/>
-          <p:nvPr/>
-        </p:nvSpPr>
-        <p:spPr>
-          <a:xfrm>
-            <a:off x="566928" y="1243584"/>
-            <a:ext cx="11055096" cy="384048"/>
+          <p:cNvPr id="4" name="Shape 2"/>
+          <p:cNvSpPr/>
+          <p:nvPr/>
+        </p:nvSpPr>
+        <p:spPr>
+          <a:xfrm>
+            <a:off x="566928" y="1554480"/>
+            <a:ext cx="5298948" cy="530352"/>
+          </a:xfrm>
+          <a:prstGeom prst="rect">
+            <a:avLst/>
+          </a:prstGeom>
+          <a:solidFill>
+            <a:srgbClr val="E8F0FA"/>
+          </a:solidFill>
+          <a:ln/>
+        </p:spPr>
+      </p:sp>
+      <p:sp>
+        <p:nvSpPr>
+          <p:cNvPr id="5" name="Text 3"/>
+          <p:cNvSpPr/>
+          <p:nvPr/>
+        </p:nvSpPr>
+        <p:spPr>
+          <a:xfrm>
+            <a:off x="731520" y="1554480"/>
+            <a:ext cx="4969764" cy="530352"/>
           </a:xfrm>
           <a:prstGeom prst="rect">
             <a:avLst/>
@@ -16907,30 +16832,30 @@
               <a:buNone/>
             </a:pPr>
             <a:r>
-              <a:rPr lang="en-US" sz="1700" i="1" dirty="0">
-                <a:solidFill>
-                  <a:srgbClr val="5A6675"/>
-                </a:solidFill>
-                <a:latin typeface="Calibri" pitchFamily="34" charset="0"/>
-                <a:ea typeface="Calibri" pitchFamily="34" charset="-122"/>
-                <a:cs typeface="Calibri" pitchFamily="34" charset="-120"/>
-              </a:rPr>
-              <a:t>The easy part is the QuPath extension. Budget your time for the microscope side.</a:t>
-            </a:r>
-            <a:endParaRPr lang="en-US" sz="1700" dirty="0"/>
-          </a:p>
-        </p:txBody>
-      </p:sp>
-      <p:sp>
-        <p:nvSpPr>
-          <p:cNvPr id="5" name="Text 3"/>
-          <p:cNvSpPr/>
-          <p:nvPr/>
-        </p:nvSpPr>
-        <p:spPr>
-          <a:xfrm>
-            <a:off x="640080" y="1755648"/>
-            <a:ext cx="10963656" cy="4279392"/>
+              <a:rPr lang="en-US" sz="2000" b="1" dirty="0">
+                <a:solidFill>
+                  <a:srgbClr val="1F4C86"/>
+                </a:solidFill>
+                <a:latin typeface="Trebuchet MS" pitchFamily="34" charset="0"/>
+                <a:ea typeface="Trebuchet MS" pitchFamily="34" charset="-122"/>
+                <a:cs typeface="Trebuchet MS" pitchFamily="34" charset="-120"/>
+              </a:rPr>
+              <a:t>Worked</a:t>
+            </a:r>
+            <a:endParaRPr lang="en-US" sz="2000" dirty="0"/>
+          </a:p>
+        </p:txBody>
+      </p:sp>
+      <p:sp>
+        <p:nvSpPr>
+          <p:cNvPr id="6" name="Text 4"/>
+          <p:cNvSpPr/>
+          <p:nvPr/>
+        </p:nvSpPr>
+        <p:spPr>
+          <a:xfrm>
+            <a:off x="658368" y="2240280"/>
+            <a:ext cx="5116068" cy="3566160"/>
           </a:xfrm>
           <a:prstGeom prst="rect">
             <a:avLst/>
@@ -16943,17 +16868,14 @@
           <a:lstStyle/>
           <a:p>
             <a:pPr marL="342900" indent="-342900">
-              <a:lnSpc>
-                <a:spcPct val="105000"/>
-              </a:lnSpc>
               <a:spcAft>
-                <a:spcPts val="1200"/>
+                <a:spcPts val="1100"/>
               </a:spcAft>
               <a:buSzPct val="100000"/>
               <a:buChar char="•"/>
             </a:pPr>
             <a:r>
-              <a:rPr lang="en-US" sz="2000" dirty="0">
+              <a:rPr lang="en-US" sz="1800" dirty="0">
                 <a:solidFill>
                   <a:srgbClr val="1F2933"/>
                 </a:solidFill>
@@ -16961,23 +16883,20 @@
                 <a:ea typeface="Calibri" pitchFamily="34" charset="-122"/>
                 <a:cs typeface="Calibri" pitchFamily="34" charset="-120"/>
               </a:rPr>
-              <a:t>QuPath talks to a small command server, which drives Micro-Manager, which drives the hardware</a:t>
-            </a:r>
-            <a:endParaRPr lang="en-US" sz="2000" dirty="0"/>
+              <a:t>Give the model the real API, and require it to compile — a failing build is a free, correct signal</a:t>
+            </a:r>
+            <a:endParaRPr lang="en-US" sz="1800" dirty="0"/>
           </a:p>
           <a:p>
             <a:pPr marL="342900" indent="-342900">
-              <a:lnSpc>
-                <a:spcPct val="105000"/>
-              </a:lnSpc>
               <a:spcAft>
-                <a:spcPts val="1200"/>
+                <a:spcPts val="1100"/>
               </a:spcAft>
               <a:buSzPct val="100000"/>
               <a:buChar char="•"/>
             </a:pPr>
             <a:r>
-              <a:rPr lang="en-US" sz="2000" dirty="0">
+              <a:rPr lang="en-US" sz="1800" dirty="0">
                 <a:solidFill>
                   <a:srgbClr val="1F2933"/>
                 </a:solidFill>
@@ -16985,23 +16904,20 @@
                 <a:ea typeface="Calibri" pitchFamily="34" charset="-122"/>
                 <a:cs typeface="Calibri" pitchFamily="34" charset="-120"/>
               </a:rPr>
-              <a:t>Each instrument is described by its own YAML — the QuPath side carries no per-instrument code, only per-modality handlers</a:t>
-            </a:r>
-            <a:endParaRPr lang="en-US" sz="2000" dirty="0"/>
+              <a:t>Write the documentation first and treat it as the specification</a:t>
+            </a:r>
+            <a:endParaRPr lang="en-US" sz="1800" dirty="0"/>
           </a:p>
           <a:p>
             <a:pPr marL="342900" indent="-342900">
-              <a:lnSpc>
-                <a:spcPct val="105000"/>
-              </a:lnSpc>
               <a:spcAft>
-                <a:spcPts val="1200"/>
+                <a:spcPts val="1100"/>
               </a:spcAft>
               <a:buSzPct val="100000"/>
               <a:buChar char="•"/>
             </a:pPr>
             <a:r>
-              <a:rPr lang="en-US" sz="2000" dirty="0">
+              <a:rPr lang="en-US" sz="1800" dirty="0">
                 <a:solidFill>
                   <a:srgbClr val="1F2933"/>
                 </a:solidFill>
@@ -17009,7 +16925,87 @@
                 <a:ea typeface="Calibri" pitchFamily="34" charset="-122"/>
                 <a:cs typeface="Calibri" pitchFamily="34" charset="-120"/>
               </a:rPr>
-              <a:t>Micro-Manager remains the device layer. We did not reinvent it</a:t>
+              <a:t>Keep a persistent map of the codebase so each session does not re-derive it badly</a:t>
+            </a:r>
+            <a:endParaRPr lang="en-US" sz="1800" dirty="0"/>
+          </a:p>
+          <a:p>
+            <a:pPr marL="342900" indent="-342900">
+              <a:spcAft>
+                <a:spcPts val="1100"/>
+              </a:spcAft>
+              <a:buSzPct val="100000"/>
+              <a:buChar char="•"/>
+            </a:pPr>
+            <a:r>
+              <a:rPr lang="en-US" sz="1800" dirty="0">
+                <a:solidFill>
+                  <a:srgbClr val="1F2933"/>
+                </a:solidFill>
+                <a:latin typeface="Calibri" pitchFamily="34" charset="0"/>
+                <a:ea typeface="Calibri" pitchFamily="34" charset="-122"/>
+                <a:cs typeface="Calibri" pitchFamily="34" charset="-120"/>
+              </a:rPr>
+              <a:t>Automate the tedious checks — API compatibility across sixteen repositories</a:t>
+            </a:r>
+            <a:endParaRPr lang="en-US" sz="1800" dirty="0"/>
+          </a:p>
+        </p:txBody>
+      </p:sp>
+      <p:sp>
+        <p:nvSpPr>
+          <p:cNvPr id="7" name="Shape 5"/>
+          <p:cNvSpPr/>
+          <p:nvPr/>
+        </p:nvSpPr>
+        <p:spPr>
+          <a:xfrm>
+            <a:off x="6323076" y="1554480"/>
+            <a:ext cx="5298948" cy="530352"/>
+          </a:xfrm>
+          <a:prstGeom prst="rect">
+            <a:avLst/>
+          </a:prstGeom>
+          <a:solidFill>
+            <a:srgbClr val="E8F0FA"/>
+          </a:solidFill>
+          <a:ln/>
+        </p:spPr>
+      </p:sp>
+      <p:sp>
+        <p:nvSpPr>
+          <p:cNvPr id="8" name="Text 6"/>
+          <p:cNvSpPr/>
+          <p:nvPr/>
+        </p:nvSpPr>
+        <p:spPr>
+          <a:xfrm>
+            <a:off x="6487668" y="1554480"/>
+            <a:ext cx="4969764" cy="530352"/>
+          </a:xfrm>
+          <a:prstGeom prst="rect">
+            <a:avLst/>
+          </a:prstGeom>
+          <a:noFill/>
+          <a:ln/>
+        </p:spPr>
+        <p:txBody>
+          <a:bodyPr wrap="square" rtlCol="0" anchor="ctr"/>
+          <a:lstStyle/>
+          <a:p>
+            <a:pPr indent="0" marL="0">
+              <a:buNone/>
+            </a:pPr>
+            <a:r>
+              <a:rPr lang="en-US" sz="2000" b="1" dirty="0">
+                <a:solidFill>
+                  <a:srgbClr val="B26A00"/>
+                </a:solidFill>
+                <a:latin typeface="Trebuchet MS" pitchFamily="34" charset="0"/>
+                <a:ea typeface="Trebuchet MS" pitchFamily="34" charset="-122"/>
+                <a:cs typeface="Trebuchet MS" pitchFamily="34" charset="-120"/>
+              </a:rPr>
+              <a:t>Did not</a:t>
             </a:r>
             <a:endParaRPr lang="en-US" sz="2000" dirty="0"/>
           </a:p>
@@ -17017,7 +17013,113 @@
       </p:sp>
       <p:sp>
         <p:nvSpPr>
-          <p:cNvPr id="6" name="Text 4"/>
+          <p:cNvPr id="9" name="Text 7"/>
+          <p:cNvSpPr/>
+          <p:nvPr/>
+        </p:nvSpPr>
+        <p:spPr>
+          <a:xfrm>
+            <a:off x="6414516" y="2240280"/>
+            <a:ext cx="5116068" cy="3566160"/>
+          </a:xfrm>
+          <a:prstGeom prst="rect">
+            <a:avLst/>
+          </a:prstGeom>
+          <a:noFill/>
+          <a:ln/>
+        </p:spPr>
+        <p:txBody>
+          <a:bodyPr wrap="square" rtlCol="0" anchor="t"/>
+          <a:lstStyle/>
+          <a:p>
+            <a:pPr marL="342900" indent="-342900">
+              <a:spcAft>
+                <a:spcPts val="1100"/>
+              </a:spcAft>
+              <a:buSzPct val="100000"/>
+              <a:buChar char="•"/>
+            </a:pPr>
+            <a:r>
+              <a:rPr lang="en-US" sz="1800" dirty="0">
+                <a:solidFill>
+                  <a:srgbClr val="1F2933"/>
+                </a:solidFill>
+                <a:latin typeface="Calibri" pitchFamily="34" charset="0"/>
+                <a:ea typeface="Calibri" pitchFamily="34" charset="-122"/>
+                <a:cs typeface="Calibri" pitchFamily="34" charset="-120"/>
+              </a:rPr>
+              <a:t>"Build me an extension that does X" — compiles, and is wrong in ways you find in front of an audience</a:t>
+            </a:r>
+            <a:endParaRPr lang="en-US" sz="1800" dirty="0"/>
+          </a:p>
+          <a:p>
+            <a:pPr marL="342900" indent="-342900">
+              <a:spcAft>
+                <a:spcPts val="1100"/>
+              </a:spcAft>
+              <a:buSzPct val="100000"/>
+              <a:buChar char="•"/>
+            </a:pPr>
+            <a:r>
+              <a:rPr lang="en-US" sz="1800" dirty="0">
+                <a:solidFill>
+                  <a:srgbClr val="1F2933"/>
+                </a:solidFill>
+                <a:latin typeface="Calibri" pitchFamily="34" charset="0"/>
+                <a:ea typeface="Calibri" pitchFamily="34" charset="-122"/>
+                <a:cs typeface="Calibri" pitchFamily="34" charset="-120"/>
+              </a:rPr>
+              <a:t>Scientific correctness — a bootstrap that runs, looks plausible, and resamples the wrong axis</a:t>
+            </a:r>
+            <a:endParaRPr lang="en-US" sz="1800" dirty="0"/>
+          </a:p>
+          <a:p>
+            <a:pPr marL="342900" indent="-342900">
+              <a:spcAft>
+                <a:spcPts val="1100"/>
+              </a:spcAft>
+              <a:buSzPct val="100000"/>
+              <a:buChar char="•"/>
+            </a:pPr>
+            <a:r>
+              <a:rPr lang="en-US" sz="1800" dirty="0">
+                <a:solidFill>
+                  <a:srgbClr val="1F2933"/>
+                </a:solidFill>
+                <a:latin typeface="Calibri" pitchFamily="34" charset="0"/>
+                <a:ea typeface="Calibri" pitchFamily="34" charset="-122"/>
+                <a:cs typeface="Calibri" pitchFamily="34" charset="-120"/>
+              </a:rPr>
+              <a:t>GUI behaviour — nothing catches a dialog opening off-screen except a human</a:t>
+            </a:r>
+            <a:endParaRPr lang="en-US" sz="1800" dirty="0"/>
+          </a:p>
+          <a:p>
+            <a:pPr marL="342900" indent="-342900">
+              <a:spcAft>
+                <a:spcPts val="1100"/>
+              </a:spcAft>
+              <a:buSzPct val="100000"/>
+              <a:buChar char="•"/>
+            </a:pPr>
+            <a:r>
+              <a:rPr lang="en-US" sz="1800" dirty="0">
+                <a:solidFill>
+                  <a:srgbClr val="1F2933"/>
+                </a:solidFill>
+                <a:latin typeface="Calibri" pitchFamily="34" charset="0"/>
+                <a:ea typeface="Calibri" pitchFamily="34" charset="-122"/>
+                <a:cs typeface="Calibri" pitchFamily="34" charset="-120"/>
+              </a:rPr>
+              <a:t>Licensing — get it wrong and you cannot distribute your work</a:t>
+            </a:r>
+            <a:endParaRPr lang="en-US" sz="1800" dirty="0"/>
+          </a:p>
+        </p:txBody>
+      </p:sp>
+      <p:sp>
+        <p:nvSpPr>
+          <p:cNvPr id="10" name="Text 8"/>
           <p:cNvSpPr/>
           <p:nvPr/>
         </p:nvSpPr>
@@ -17088,6 +17190,1244 @@
       </p:grpSpPr>
       <p:sp>
         <p:nvSpPr>
+          <p:cNvPr id="2" name="Text 0"/>
+          <p:cNvSpPr/>
+          <p:nvPr/>
+        </p:nvSpPr>
+        <p:spPr>
+          <a:xfrm>
+            <a:off x="566928" y="384048"/>
+            <a:ext cx="11055096" cy="658368"/>
+          </a:xfrm>
+          <a:prstGeom prst="rect">
+            <a:avLst/>
+          </a:prstGeom>
+          <a:noFill/>
+          <a:ln/>
+        </p:spPr>
+        <p:txBody>
+          <a:bodyPr wrap="square" rtlCol="0" anchor="ctr"/>
+          <a:lstStyle/>
+          <a:p>
+            <a:pPr indent="0" marL="0">
+              <a:buNone/>
+            </a:pPr>
+            <a:r>
+              <a:rPr lang="en-US" sz="3000" b="1" dirty="0">
+                <a:solidFill>
+                  <a:srgbClr val="1F4C86"/>
+                </a:solidFill>
+                <a:latin typeface="Trebuchet MS" pitchFamily="34" charset="0"/>
+                <a:ea typeface="Trebuchet MS" pitchFamily="34" charset="-122"/>
+                <a:cs typeface="Trebuchet MS" pitchFamily="34" charset="-120"/>
+              </a:rPr>
+              <a:t>The honest summary</a:t>
+            </a:r>
+            <a:endParaRPr lang="en-US" sz="3000" dirty="0"/>
+          </a:p>
+        </p:txBody>
+      </p:sp>
+      <p:sp>
+        <p:nvSpPr>
+          <p:cNvPr id="3" name="Shape 1"/>
+          <p:cNvSpPr/>
+          <p:nvPr/>
+        </p:nvSpPr>
+        <p:spPr>
+          <a:xfrm>
+            <a:off x="566928" y="1097280"/>
+            <a:ext cx="1920240" cy="50292"/>
+          </a:xfrm>
+          <a:prstGeom prst="rect">
+            <a:avLst/>
+          </a:prstGeom>
+          <a:solidFill>
+            <a:srgbClr val="3674C1"/>
+          </a:solidFill>
+          <a:ln/>
+        </p:spPr>
+      </p:sp>
+      <p:sp>
+        <p:nvSpPr>
+          <p:cNvPr id="4" name="Text 2"/>
+          <p:cNvSpPr/>
+          <p:nvPr/>
+        </p:nvSpPr>
+        <p:spPr>
+          <a:xfrm>
+            <a:off x="640080" y="1481328"/>
+            <a:ext cx="10963656" cy="4553712"/>
+          </a:xfrm>
+          <a:prstGeom prst="rect">
+            <a:avLst/>
+          </a:prstGeom>
+          <a:noFill/>
+          <a:ln/>
+        </p:spPr>
+        <p:txBody>
+          <a:bodyPr wrap="square" rtlCol="0" anchor="t"/>
+          <a:lstStyle/>
+          <a:p>
+            <a:pPr marL="342900" indent="-342900">
+              <a:lnSpc>
+                <a:spcPct val="105000"/>
+              </a:lnSpc>
+              <a:spcAft>
+                <a:spcPts val="1200"/>
+              </a:spcAft>
+              <a:buSzPct val="100000"/>
+              <a:buChar char="•"/>
+            </a:pPr>
+            <a:r>
+              <a:rPr lang="en-US" sz="2000" dirty="0">
+                <a:solidFill>
+                  <a:srgbClr val="1F2933"/>
+                </a:solidFill>
+                <a:latin typeface="Calibri" pitchFamily="34" charset="0"/>
+                <a:ea typeface="Calibri" pitchFamily="34" charset="-122"/>
+                <a:cs typeface="Calibri" pitchFamily="34" charset="-120"/>
+              </a:rPr>
+              <a:t>AI assistance changed the cost of building an extension by about an order of magnitude</a:t>
+            </a:r>
+            <a:endParaRPr lang="en-US" sz="2000" dirty="0"/>
+          </a:p>
+          <a:p>
+            <a:pPr marL="342900" indent="-342900">
+              <a:lnSpc>
+                <a:spcPct val="105000"/>
+              </a:lnSpc>
+              <a:spcAft>
+                <a:spcPts val="1200"/>
+              </a:spcAft>
+              <a:buSzPct val="100000"/>
+              <a:buChar char="•"/>
+            </a:pPr>
+            <a:r>
+              <a:rPr lang="en-US" sz="2000" dirty="0">
+                <a:solidFill>
+                  <a:srgbClr val="1F2933"/>
+                </a:solidFill>
+                <a:latin typeface="Calibri" pitchFamily="34" charset="0"/>
+                <a:ea typeface="Calibri" pitchFamily="34" charset="-122"/>
+                <a:cs typeface="Calibri" pitchFamily="34" charset="-120"/>
+              </a:rPr>
+              <a:t>It changed the correctness of one not at all</a:t>
+            </a:r>
+            <a:endParaRPr lang="en-US" sz="2000" dirty="0"/>
+          </a:p>
+          <a:p>
+            <a:pPr marL="342900" indent="-342900">
+              <a:lnSpc>
+                <a:spcPct val="105000"/>
+              </a:lnSpc>
+              <a:spcAft>
+                <a:spcPts val="1200"/>
+              </a:spcAft>
+              <a:buSzPct val="100000"/>
+              <a:buChar char="•"/>
+            </a:pPr>
+            <a:r>
+              <a:rPr lang="en-US" sz="2000" dirty="0">
+                <a:solidFill>
+                  <a:srgbClr val="1F2933"/>
+                </a:solidFill>
+                <a:latin typeface="Calibri" pitchFamily="34" charset="0"/>
+                <a:ea typeface="Calibri" pitchFamily="34" charset="-122"/>
+                <a:cs typeface="Calibri" pitchFamily="34" charset="-120"/>
+              </a:rPr>
+              <a:t>The bottleneck moved from "can I write this Java" to "do I know what this should do, and can I tell when it is lying to me"</a:t>
+            </a:r>
+            <a:endParaRPr lang="en-US" sz="2000" dirty="0"/>
+          </a:p>
+        </p:txBody>
+      </p:sp>
+      <p:sp>
+        <p:nvSpPr>
+          <p:cNvPr id="5" name="Shape 3"/>
+          <p:cNvSpPr/>
+          <p:nvPr/>
+        </p:nvSpPr>
+        <p:spPr>
+          <a:xfrm>
+            <a:off x="566928" y="5650992"/>
+            <a:ext cx="11055096" cy="566928"/>
+          </a:xfrm>
+          <a:prstGeom prst="rect">
+            <a:avLst/>
+          </a:prstGeom>
+          <a:solidFill>
+            <a:srgbClr val="F4F8FD"/>
+          </a:solidFill>
+          <a:ln w="9525">
+            <a:solidFill>
+              <a:srgbClr val="3674C1"/>
+            </a:solidFill>
+            <a:prstDash val="solid"/>
+          </a:ln>
+        </p:spPr>
+      </p:sp>
+      <p:sp>
+        <p:nvSpPr>
+          <p:cNvPr id="6" name="Text 4"/>
+          <p:cNvSpPr/>
+          <p:nvPr/>
+        </p:nvSpPr>
+        <p:spPr>
+          <a:xfrm>
+            <a:off x="768096" y="5650992"/>
+            <a:ext cx="10652760" cy="566928"/>
+          </a:xfrm>
+          <a:prstGeom prst="rect">
+            <a:avLst/>
+          </a:prstGeom>
+          <a:noFill/>
+          <a:ln/>
+        </p:spPr>
+        <p:txBody>
+          <a:bodyPr wrap="square" rtlCol="0" anchor="ctr"/>
+          <a:lstStyle/>
+          <a:p>
+            <a:pPr indent="0" marL="0">
+              <a:buNone/>
+            </a:pPr>
+            <a:r>
+              <a:rPr lang="en-US" sz="1600" b="1" dirty="0">
+                <a:solidFill>
+                  <a:srgbClr val="1F4C86"/>
+                </a:solidFill>
+                <a:latin typeface="Calibri" pitchFamily="34" charset="0"/>
+                <a:ea typeface="Calibri" pitchFamily="34" charset="-122"/>
+                <a:cs typeface="Calibri" pitchFamily="34" charset="-120"/>
+              </a:rPr>
+              <a:t>A better bottleneck to have. Still a bottleneck, and still yours.</a:t>
+            </a:r>
+            <a:endParaRPr lang="en-US" sz="1600" dirty="0"/>
+          </a:p>
+        </p:txBody>
+      </p:sp>
+      <p:sp>
+        <p:nvSpPr>
+          <p:cNvPr id="7" name="Text 5"/>
+          <p:cNvSpPr/>
+          <p:nvPr/>
+        </p:nvSpPr>
+        <p:spPr>
+          <a:xfrm>
+            <a:off x="11274552" y="6291072"/>
+            <a:ext cx="457200" cy="310896"/>
+          </a:xfrm>
+          <a:prstGeom prst="rect">
+            <a:avLst/>
+          </a:prstGeom>
+          <a:noFill/>
+          <a:ln/>
+        </p:spPr>
+        <p:txBody>
+          <a:bodyPr wrap="square" rtlCol="0" anchor="ctr"/>
+          <a:lstStyle/>
+          <a:p>
+            <a:pPr algn="r" indent="0" marL="0">
+              <a:buNone/>
+            </a:pPr>
+            <a:r>
+              <a:rPr lang="en-US" sz="1400" dirty="0">
+                <a:solidFill>
+                  <a:srgbClr val="A8B2BF"/>
+                </a:solidFill>
+                <a:latin typeface="Calibri" pitchFamily="34" charset="0"/>
+                <a:ea typeface="Calibri" pitchFamily="34" charset="-122"/>
+                <a:cs typeface="Calibri" pitchFamily="34" charset="-120"/>
+              </a:rPr>
+              <a:t>44</a:t>
+            </a:r>
+            <a:endParaRPr lang="en-US" sz="1400" dirty="0"/>
+          </a:p>
+        </p:txBody>
+      </p:sp>
+    </p:spTree>
+  </p:cSld>
+  <p:clrMapOvr>
+    <a:masterClrMapping/>
+  </p:clrMapOvr>
+</p:sld>
+</file>
+
+<file path=ppt/slides/slide45.xml><?xml version="1.0" encoding="utf-8"?>
+<p:sld xmlns:a="http://schemas.openxmlformats.org/drawingml/2006/main" xmlns:r="http://schemas.openxmlformats.org/officeDocument/2006/relationships" xmlns:p="http://schemas.openxmlformats.org/presentationml/2006/main">
+  <p:cSld name="Slide 45">
+    <p:bg>
+      <p:bgPr>
+        <a:solidFill>
+          <a:srgbClr val="FFFFFF"/>
+        </a:solidFill>
+      </p:bgPr>
+    </p:bg>
+    <p:spTree>
+      <p:nvGrpSpPr>
+        <p:cNvPr id="1" name=""/>
+        <p:cNvGrpSpPr/>
+        <p:nvPr/>
+      </p:nvGrpSpPr>
+      <p:grpSpPr>
+        <a:xfrm>
+          <a:off x="0" y="0"/>
+          <a:ext cx="0" cy="0"/>
+          <a:chOff x="0" y="0"/>
+          <a:chExt cx="0" cy="0"/>
+        </a:xfrm>
+      </p:grpSpPr>
+      <p:sp>
+        <p:nvSpPr>
+          <p:cNvPr id="2" name="Text 0"/>
+          <p:cNvSpPr/>
+          <p:nvPr/>
+        </p:nvSpPr>
+        <p:spPr>
+          <a:xfrm>
+            <a:off x="566928" y="384048"/>
+            <a:ext cx="11055096" cy="658368"/>
+          </a:xfrm>
+          <a:prstGeom prst="rect">
+            <a:avLst/>
+          </a:prstGeom>
+          <a:noFill/>
+          <a:ln/>
+        </p:spPr>
+        <p:txBody>
+          <a:bodyPr wrap="square" rtlCol="0" anchor="ctr"/>
+          <a:lstStyle/>
+          <a:p>
+            <a:pPr indent="0" marL="0">
+              <a:buNone/>
+            </a:pPr>
+            <a:r>
+              <a:rPr lang="en-US" sz="3000" b="1" dirty="0">
+                <a:solidFill>
+                  <a:srgbClr val="1F4C86"/>
+                </a:solidFill>
+                <a:latin typeface="Trebuchet MS" pitchFamily="34" charset="0"/>
+                <a:ea typeface="Trebuchet MS" pitchFamily="34" charset="-122"/>
+                <a:cs typeface="Trebuchet MS" pitchFamily="34" charset="-120"/>
+              </a:rPr>
+              <a:t>What is underneath</a:t>
+            </a:r>
+            <a:endParaRPr lang="en-US" sz="3000" dirty="0"/>
+          </a:p>
+        </p:txBody>
+      </p:sp>
+      <p:sp>
+        <p:nvSpPr>
+          <p:cNvPr id="3" name="Shape 1"/>
+          <p:cNvSpPr/>
+          <p:nvPr/>
+        </p:nvSpPr>
+        <p:spPr>
+          <a:xfrm>
+            <a:off x="566928" y="1097280"/>
+            <a:ext cx="1920240" cy="50292"/>
+          </a:xfrm>
+          <a:prstGeom prst="rect">
+            <a:avLst/>
+          </a:prstGeom>
+          <a:solidFill>
+            <a:srgbClr val="3674C1"/>
+          </a:solidFill>
+          <a:ln/>
+        </p:spPr>
+      </p:sp>
+      <p:sp>
+        <p:nvSpPr>
+          <p:cNvPr id="4" name="Text 2"/>
+          <p:cNvSpPr/>
+          <p:nvPr/>
+        </p:nvSpPr>
+        <p:spPr>
+          <a:xfrm>
+            <a:off x="640080" y="1481328"/>
+            <a:ext cx="10963656" cy="4553712"/>
+          </a:xfrm>
+          <a:prstGeom prst="rect">
+            <a:avLst/>
+          </a:prstGeom>
+          <a:noFill/>
+          <a:ln/>
+        </p:spPr>
+        <p:txBody>
+          <a:bodyPr wrap="square" rtlCol="0" anchor="t"/>
+          <a:lstStyle/>
+          <a:p>
+            <a:pPr marL="342900" indent="-342900">
+              <a:lnSpc>
+                <a:spcPct val="105000"/>
+              </a:lnSpc>
+              <a:spcAft>
+                <a:spcPts val="1200"/>
+              </a:spcAft>
+              <a:buSzPct val="100000"/>
+              <a:buChar char="•"/>
+            </a:pPr>
+            <a:r>
+              <a:rPr lang="en-US" sz="2000" dirty="0">
+                <a:solidFill>
+                  <a:srgbClr val="1F2933"/>
+                </a:solidFill>
+                <a:latin typeface="Calibri" pitchFamily="34" charset="0"/>
+                <a:ea typeface="Calibri" pitchFamily="34" charset="-122"/>
+                <a:cs typeface="Calibri" pitchFamily="34" charset="-120"/>
+              </a:rPr>
+              <a:t>Your choice of encoder, from lightweight convolutional networks to vision transformers</a:t>
+            </a:r>
+            <a:endParaRPr lang="en-US" sz="2000" dirty="0"/>
+          </a:p>
+          <a:p>
+            <a:pPr marL="342900" indent="-342900">
+              <a:lnSpc>
+                <a:spcPct val="105000"/>
+              </a:lnSpc>
+              <a:spcAft>
+                <a:spcPts val="1200"/>
+              </a:spcAft>
+              <a:buSzPct val="100000"/>
+              <a:buChar char="•"/>
+            </a:pPr>
+            <a:r>
+              <a:rPr lang="en-US" sz="2000" dirty="0">
+                <a:solidFill>
+                  <a:srgbClr val="1F2933"/>
+                </a:solidFill>
+                <a:latin typeface="Calibri" pitchFamily="34" charset="0"/>
+                <a:ea typeface="Calibri" pitchFamily="34" charset="-122"/>
+                <a:cs typeface="Calibri" pitchFamily="34" charset="-120"/>
+              </a:rPr>
+              <a:t>Start from weights pretrained on histology rather than on everyday photographs</a:t>
+            </a:r>
+            <a:endParaRPr lang="en-US" sz="2000" dirty="0"/>
+          </a:p>
+          <a:p>
+            <a:pPr marL="342900" indent="-342900">
+              <a:lnSpc>
+                <a:spcPct val="105000"/>
+              </a:lnSpc>
+              <a:spcAft>
+                <a:spcPts val="1200"/>
+              </a:spcAft>
+              <a:buSzPct val="100000"/>
+              <a:buChar char="•"/>
+            </a:pPr>
+            <a:r>
+              <a:rPr lang="en-US" sz="2000" dirty="0">
+                <a:solidFill>
+                  <a:srgbClr val="1F2933"/>
+                </a:solidFill>
+                <a:latin typeface="Calibri" pitchFamily="34" charset="0"/>
+                <a:ea typeface="Calibri" pitchFamily="34" charset="-122"/>
+                <a:cs typeface="Calibri" pitchFamily="34" charset="-120"/>
+              </a:rPr>
+              <a:t>Or from pathology foundation models, downloaded on demand</a:t>
+            </a:r>
+            <a:endParaRPr lang="en-US" sz="2000" dirty="0"/>
+          </a:p>
+          <a:p>
+            <a:pPr marL="342900" indent="-342900">
+              <a:lnSpc>
+                <a:spcPct val="105000"/>
+              </a:lnSpc>
+              <a:spcAft>
+                <a:spcPts val="1200"/>
+              </a:spcAft>
+              <a:buSzPct val="100000"/>
+              <a:buChar char="•"/>
+            </a:pPr>
+            <a:r>
+              <a:rPr lang="en-US" sz="2000" dirty="0">
+                <a:solidFill>
+                  <a:srgbClr val="1F2933"/>
+                </a:solidFill>
+                <a:latin typeface="Calibri" pitchFamily="34" charset="0"/>
+                <a:ea typeface="Calibri" pitchFamily="34" charset="-122"/>
+                <a:cs typeface="Calibri" pitchFamily="34" charset="-120"/>
+              </a:rPr>
+              <a:t>Normalisation statistics sampled across the image, or reused from training, so every tile is scaled the same way</a:t>
+            </a:r>
+            <a:endParaRPr lang="en-US" sz="2000" dirty="0"/>
+          </a:p>
+        </p:txBody>
+      </p:sp>
+      <p:sp>
+        <p:nvSpPr>
+          <p:cNvPr id="5" name="Shape 3"/>
+          <p:cNvSpPr/>
+          <p:nvPr/>
+        </p:nvSpPr>
+        <p:spPr>
+          <a:xfrm>
+            <a:off x="566928" y="5650992"/>
+            <a:ext cx="11055096" cy="566928"/>
+          </a:xfrm>
+          <a:prstGeom prst="rect">
+            <a:avLst/>
+          </a:prstGeom>
+          <a:solidFill>
+            <a:srgbClr val="F4F8FD"/>
+          </a:solidFill>
+          <a:ln w="9525">
+            <a:solidFill>
+              <a:srgbClr val="3674C1"/>
+            </a:solidFill>
+            <a:prstDash val="solid"/>
+          </a:ln>
+        </p:spPr>
+      </p:sp>
+      <p:sp>
+        <p:nvSpPr>
+          <p:cNvPr id="6" name="Text 4"/>
+          <p:cNvSpPr/>
+          <p:nvPr/>
+        </p:nvSpPr>
+        <p:spPr>
+          <a:xfrm>
+            <a:off x="768096" y="5650992"/>
+            <a:ext cx="10652760" cy="566928"/>
+          </a:xfrm>
+          <a:prstGeom prst="rect">
+            <a:avLst/>
+          </a:prstGeom>
+          <a:noFill/>
+          <a:ln/>
+        </p:spPr>
+        <p:txBody>
+          <a:bodyPr wrap="square" rtlCol="0" anchor="ctr"/>
+          <a:lstStyle/>
+          <a:p>
+            <a:pPr indent="0" marL="0">
+              <a:buNone/>
+            </a:pPr>
+            <a:r>
+              <a:rPr lang="en-US" sz="1600" b="1" dirty="0">
+                <a:solidFill>
+                  <a:srgbClr val="1F4C86"/>
+                </a:solidFill>
+                <a:latin typeface="Calibri" pitchFamily="34" charset="0"/>
+                <a:ea typeface="Calibri" pitchFamily="34" charset="-122"/>
+                <a:cs typeface="Calibri" pitchFamily="34" charset="-120"/>
+              </a:rPr>
+              <a:t>Training really wants a GPU — on CPU it is hours instead of minutes, and CPU is the default install. That is why training is a demonstration and inference is the exercise.</a:t>
+            </a:r>
+            <a:endParaRPr lang="en-US" sz="1600" dirty="0"/>
+          </a:p>
+        </p:txBody>
+      </p:sp>
+      <p:sp>
+        <p:nvSpPr>
+          <p:cNvPr id="7" name="Text 5"/>
+          <p:cNvSpPr/>
+          <p:nvPr/>
+        </p:nvSpPr>
+        <p:spPr>
+          <a:xfrm>
+            <a:off x="11274552" y="6291072"/>
+            <a:ext cx="457200" cy="310896"/>
+          </a:xfrm>
+          <a:prstGeom prst="rect">
+            <a:avLst/>
+          </a:prstGeom>
+          <a:noFill/>
+          <a:ln/>
+        </p:spPr>
+        <p:txBody>
+          <a:bodyPr wrap="square" rtlCol="0" anchor="ctr"/>
+          <a:lstStyle/>
+          <a:p>
+            <a:pPr algn="r" indent="0" marL="0">
+              <a:buNone/>
+            </a:pPr>
+            <a:r>
+              <a:rPr lang="en-US" sz="1400" dirty="0">
+                <a:solidFill>
+                  <a:srgbClr val="A8B2BF"/>
+                </a:solidFill>
+                <a:latin typeface="Calibri" pitchFamily="34" charset="0"/>
+                <a:ea typeface="Calibri" pitchFamily="34" charset="-122"/>
+                <a:cs typeface="Calibri" pitchFamily="34" charset="-120"/>
+              </a:rPr>
+              <a:t>45</a:t>
+            </a:r>
+            <a:endParaRPr lang="en-US" sz="1400" dirty="0"/>
+          </a:p>
+        </p:txBody>
+      </p:sp>
+    </p:spTree>
+  </p:cSld>
+  <p:clrMapOvr>
+    <a:masterClrMapping/>
+  </p:clrMapOvr>
+</p:sld>
+</file>
+
+<file path=ppt/slides/slide46.xml><?xml version="1.0" encoding="utf-8"?>
+<p:sld xmlns:a="http://schemas.openxmlformats.org/drawingml/2006/main" xmlns:r="http://schemas.openxmlformats.org/officeDocument/2006/relationships" xmlns:p="http://schemas.openxmlformats.org/presentationml/2006/main">
+  <p:cSld name="Slide 46">
+    <p:bg>
+      <p:bgPr>
+        <a:solidFill>
+          <a:srgbClr val="FFFFFF"/>
+        </a:solidFill>
+      </p:bgPr>
+    </p:bg>
+    <p:spTree>
+      <p:nvGrpSpPr>
+        <p:cNvPr id="1" name=""/>
+        <p:cNvGrpSpPr/>
+        <p:nvPr/>
+      </p:nvGrpSpPr>
+      <p:grpSpPr>
+        <a:xfrm>
+          <a:off x="0" y="0"/>
+          <a:ext cx="0" cy="0"/>
+          <a:chOff x="0" y="0"/>
+          <a:chExt cx="0" cy="0"/>
+        </a:xfrm>
+      </p:grpSpPr>
+      <p:sp>
+        <p:nvSpPr>
+          <p:cNvPr id="2" name="Text 0"/>
+          <p:cNvSpPr/>
+          <p:nvPr/>
+        </p:nvSpPr>
+        <p:spPr>
+          <a:xfrm>
+            <a:off x="566928" y="384048"/>
+            <a:ext cx="11055096" cy="658368"/>
+          </a:xfrm>
+          <a:prstGeom prst="rect">
+            <a:avLst/>
+          </a:prstGeom>
+          <a:noFill/>
+          <a:ln/>
+        </p:spPr>
+        <p:txBody>
+          <a:bodyPr wrap="square" rtlCol="0" anchor="ctr"/>
+          <a:lstStyle/>
+          <a:p>
+            <a:pPr indent="0" marL="0">
+              <a:buNone/>
+            </a:pPr>
+            <a:r>
+              <a:rPr lang="en-US" sz="3000" b="1" dirty="0">
+                <a:solidFill>
+                  <a:srgbClr val="1F4C86"/>
+                </a:solidFill>
+                <a:latin typeface="Trebuchet MS" pitchFamily="34" charset="0"/>
+                <a:ea typeface="Trebuchet MS" pitchFamily="34" charset="-122"/>
+                <a:cs typeface="Trebuchet MS" pitchFamily="34" charset="-120"/>
+              </a:rPr>
+              <a:t>What we are not covering</a:t>
+            </a:r>
+            <a:endParaRPr lang="en-US" sz="3000" dirty="0"/>
+          </a:p>
+        </p:txBody>
+      </p:sp>
+      <p:sp>
+        <p:nvSpPr>
+          <p:cNvPr id="3" name="Shape 1"/>
+          <p:cNvSpPr/>
+          <p:nvPr/>
+        </p:nvSpPr>
+        <p:spPr>
+          <a:xfrm>
+            <a:off x="566928" y="1097280"/>
+            <a:ext cx="1920240" cy="50292"/>
+          </a:xfrm>
+          <a:prstGeom prst="rect">
+            <a:avLst/>
+          </a:prstGeom>
+          <a:solidFill>
+            <a:srgbClr val="3674C1"/>
+          </a:solidFill>
+          <a:ln/>
+        </p:spPr>
+      </p:sp>
+      <p:sp>
+        <p:nvSpPr>
+          <p:cNvPr id="4" name="Text 2"/>
+          <p:cNvSpPr/>
+          <p:nvPr/>
+        </p:nvSpPr>
+        <p:spPr>
+          <a:xfrm>
+            <a:off x="566928" y="1243584"/>
+            <a:ext cx="11055096" cy="384048"/>
+          </a:xfrm>
+          <a:prstGeom prst="rect">
+            <a:avLst/>
+          </a:prstGeom>
+          <a:noFill/>
+          <a:ln/>
+        </p:spPr>
+        <p:txBody>
+          <a:bodyPr wrap="square" rtlCol="0" anchor="ctr"/>
+          <a:lstStyle/>
+          <a:p>
+            <a:pPr indent="0" marL="0">
+              <a:buNone/>
+            </a:pPr>
+            <a:r>
+              <a:rPr lang="en-US" sz="1700" i="1" dirty="0">
+                <a:solidFill>
+                  <a:srgbClr val="5A6675"/>
+                </a:solidFill>
+                <a:latin typeface="Calibri" pitchFamily="34" charset="0"/>
+                <a:ea typeface="Calibri" pitchFamily="34" charset="-122"/>
+                <a:cs typeface="Calibri" pitchFamily="34" charset="-120"/>
+              </a:rPr>
+              <a:t>Two halves of the same workflow, in the right order — hers first, then this.</a:t>
+            </a:r>
+            <a:endParaRPr lang="en-US" sz="1700" dirty="0"/>
+          </a:p>
+        </p:txBody>
+      </p:sp>
+      <p:sp>
+        <p:nvSpPr>
+          <p:cNvPr id="5" name="Text 3"/>
+          <p:cNvSpPr/>
+          <p:nvPr/>
+        </p:nvSpPr>
+        <p:spPr>
+          <a:xfrm>
+            <a:off x="640080" y="1755648"/>
+            <a:ext cx="10963656" cy="4279392"/>
+          </a:xfrm>
+          <a:prstGeom prst="rect">
+            <a:avLst/>
+          </a:prstGeom>
+          <a:noFill/>
+          <a:ln/>
+        </p:spPr>
+        <p:txBody>
+          <a:bodyPr wrap="square" rtlCol="0" anchor="t"/>
+          <a:lstStyle/>
+          <a:p>
+            <a:pPr marL="342900" indent="-342900">
+              <a:lnSpc>
+                <a:spcPct val="105000"/>
+              </a:lnSpc>
+              <a:spcAft>
+                <a:spcPts val="1200"/>
+              </a:spcAft>
+              <a:buSzPct val="100000"/>
+              <a:buChar char="•"/>
+            </a:pPr>
+            <a:r>
+              <a:rPr lang="en-US" sz="2000" dirty="0">
+                <a:solidFill>
+                  <a:srgbClr val="1F2933"/>
+                </a:solidFill>
+                <a:latin typeface="Calibri" pitchFamily="34" charset="0"/>
+                <a:ea typeface="Calibri" pitchFamily="34" charset="-122"/>
+                <a:cs typeface="Calibri" pitchFamily="34" charset="-120"/>
+              </a:rPr>
+              <a:t>QuPath already has object classification — train on measurements, or threshold a single one</a:t>
+            </a:r>
+            <a:endParaRPr lang="en-US" sz="2000" dirty="0"/>
+          </a:p>
+          <a:p>
+            <a:pPr marL="342900" indent="-342900">
+              <a:lnSpc>
+                <a:spcPct val="105000"/>
+              </a:lnSpc>
+              <a:spcAft>
+                <a:spcPts val="1200"/>
+              </a:spcAft>
+              <a:buSzPct val="100000"/>
+              <a:buChar char="•"/>
+            </a:pPr>
+            <a:r>
+              <a:rPr lang="en-US" sz="2000" dirty="0">
+                <a:solidFill>
+                  <a:srgbClr val="1F2933"/>
+                </a:solidFill>
+                <a:latin typeface="Calibri" pitchFamily="34" charset="0"/>
+                <a:ea typeface="Calibri" pitchFamily="34" charset="-122"/>
+                <a:cs typeface="Calibri" pitchFamily="34" charset="-120"/>
+              </a:rPr>
+              <a:t>We are not re-teaching it. Sara’s Monday session was the hi-plex classification half</a:t>
+            </a:r>
+            <a:endParaRPr lang="en-US" sz="2000" dirty="0"/>
+          </a:p>
+          <a:p>
+            <a:pPr marL="342900" indent="-342900">
+              <a:lnSpc>
+                <a:spcPct val="105000"/>
+              </a:lnSpc>
+              <a:spcAft>
+                <a:spcPts val="1200"/>
+              </a:spcAft>
+              <a:buSzPct val="100000"/>
+              <a:buChar char="•"/>
+            </a:pPr>
+            <a:r>
+              <a:rPr lang="en-US" sz="2000" dirty="0">
+                <a:solidFill>
+                  <a:srgbClr val="1F2933"/>
+                </a:solidFill>
+                <a:latin typeface="Calibri" pitchFamily="34" charset="0"/>
+                <a:ea typeface="Calibri" pitchFamily="34" charset="-122"/>
+                <a:cs typeface="Calibri" pitchFamily="34" charset="-120"/>
+              </a:rPr>
+              <a:t>What follows are alternative mechanisms for getting a class onto a cell:</a:t>
+            </a:r>
+            <a:endParaRPr lang="en-US" sz="2000" dirty="0"/>
+          </a:p>
+          <a:p>
+            <a:pPr marL="342900" indent="-342900">
+              <a:lnSpc>
+                <a:spcPct val="105000"/>
+              </a:lnSpc>
+              <a:spcAft>
+                <a:spcPts val="1200"/>
+              </a:spcAft>
+              <a:buSzPct val="100000"/>
+              <a:buChar char="•"/>
+            </a:pPr>
+            <a:r>
+              <a:rPr lang="en-US" sz="2000" dirty="0">
+                <a:solidFill>
+                  <a:srgbClr val="1F2933"/>
+                </a:solidFill>
+                <a:latin typeface="Calibri" pitchFamily="34" charset="0"/>
+                <a:ea typeface="Calibri" pitchFamily="34" charset="-122"/>
+                <a:cs typeface="Calibri" pitchFamily="34" charset="-120"/>
+              </a:rPr>
+              <a:t>Unsupervised clustering · rule-based marker gating · propagation from a small hand-labelled subset · applying an existing classifier to a chosen subset instead of everything</a:t>
+            </a:r>
+            <a:endParaRPr lang="en-US" sz="2000" dirty="0"/>
+          </a:p>
+          <a:p>
+            <a:pPr marL="342900" indent="-342900">
+              <a:lnSpc>
+                <a:spcPct val="105000"/>
+              </a:lnSpc>
+              <a:spcAft>
+                <a:spcPts val="1200"/>
+              </a:spcAft>
+              <a:buSzPct val="100000"/>
+              <a:buChar char="•"/>
+            </a:pPr>
+            <a:r>
+              <a:rPr lang="en-US" sz="2000" dirty="0">
+                <a:solidFill>
+                  <a:srgbClr val="1F2933"/>
+                </a:solidFill>
+                <a:latin typeface="Calibri" pitchFamily="34" charset="0"/>
+                <a:ea typeface="Calibri" pitchFamily="34" charset="-122"/>
+                <a:cs typeface="Calibri" pitchFamily="34" charset="-120"/>
+              </a:rPr>
+              <a:t>Then: what those classified cells are actually telling you — which sit next to which, and whether that differs between images</a:t>
+            </a:r>
+            <a:endParaRPr lang="en-US" sz="2000" dirty="0"/>
+          </a:p>
+        </p:txBody>
+      </p:sp>
+      <p:sp>
+        <p:nvSpPr>
+          <p:cNvPr id="6" name="Shape 4"/>
+          <p:cNvSpPr/>
+          <p:nvPr/>
+        </p:nvSpPr>
+        <p:spPr>
+          <a:xfrm>
+            <a:off x="566928" y="5650992"/>
+            <a:ext cx="11055096" cy="566928"/>
+          </a:xfrm>
+          <a:prstGeom prst="rect">
+            <a:avLst/>
+          </a:prstGeom>
+          <a:solidFill>
+            <a:srgbClr val="F4F8FD"/>
+          </a:solidFill>
+          <a:ln w="9525">
+            <a:solidFill>
+              <a:srgbClr val="3674C1"/>
+            </a:solidFill>
+            <a:prstDash val="solid"/>
+          </a:ln>
+        </p:spPr>
+      </p:sp>
+      <p:sp>
+        <p:nvSpPr>
+          <p:cNvPr id="7" name="Text 5"/>
+          <p:cNvSpPr/>
+          <p:nvPr/>
+        </p:nvSpPr>
+        <p:spPr>
+          <a:xfrm>
+            <a:off x="768096" y="5650992"/>
+            <a:ext cx="10652760" cy="566928"/>
+          </a:xfrm>
+          <a:prstGeom prst="rect">
+            <a:avLst/>
+          </a:prstGeom>
+          <a:noFill/>
+          <a:ln/>
+        </p:spPr>
+        <p:txBody>
+          <a:bodyPr wrap="square" rtlCol="0" anchor="ctr"/>
+          <a:lstStyle/>
+          <a:p>
+            <a:pPr indent="0" marL="0">
+              <a:buNone/>
+            </a:pPr>
+            <a:r>
+              <a:rPr lang="en-US" sz="1600" b="1" dirty="0">
+                <a:solidFill>
+                  <a:srgbClr val="1F4C86"/>
+                </a:solidFill>
+                <a:latin typeface="Calibri" pitchFamily="34" charset="0"/>
+                <a:ea typeface="Calibri" pitchFamily="34" charset="-122"/>
+                <a:cs typeface="Calibri" pitchFamily="34" charset="-120"/>
+              </a:rPr>
+              <a:t>If you missed hers, the two extensions she demonstrated are documented on our site too.</a:t>
+            </a:r>
+            <a:endParaRPr lang="en-US" sz="1600" dirty="0"/>
+          </a:p>
+        </p:txBody>
+      </p:sp>
+      <p:sp>
+        <p:nvSpPr>
+          <p:cNvPr id="8" name="Text 6"/>
+          <p:cNvSpPr/>
+          <p:nvPr/>
+        </p:nvSpPr>
+        <p:spPr>
+          <a:xfrm>
+            <a:off x="11274552" y="6291072"/>
+            <a:ext cx="457200" cy="310896"/>
+          </a:xfrm>
+          <a:prstGeom prst="rect">
+            <a:avLst/>
+          </a:prstGeom>
+          <a:noFill/>
+          <a:ln/>
+        </p:spPr>
+        <p:txBody>
+          <a:bodyPr wrap="square" rtlCol="0" anchor="ctr"/>
+          <a:lstStyle/>
+          <a:p>
+            <a:pPr algn="r" indent="0" marL="0">
+              <a:buNone/>
+            </a:pPr>
+            <a:r>
+              <a:rPr lang="en-US" sz="1400" dirty="0">
+                <a:solidFill>
+                  <a:srgbClr val="A8B2BF"/>
+                </a:solidFill>
+                <a:latin typeface="Calibri" pitchFamily="34" charset="0"/>
+                <a:ea typeface="Calibri" pitchFamily="34" charset="-122"/>
+                <a:cs typeface="Calibri" pitchFamily="34" charset="-120"/>
+              </a:rPr>
+              <a:t>46</a:t>
+            </a:r>
+            <a:endParaRPr lang="en-US" sz="1400" dirty="0"/>
+          </a:p>
+        </p:txBody>
+      </p:sp>
+    </p:spTree>
+  </p:cSld>
+  <p:clrMapOvr>
+    <a:masterClrMapping/>
+  </p:clrMapOvr>
+</p:sld>
+</file>
+
+<file path=ppt/slides/slide47.xml><?xml version="1.0" encoding="utf-8"?>
+<p:sld xmlns:a="http://schemas.openxmlformats.org/drawingml/2006/main" xmlns:r="http://schemas.openxmlformats.org/officeDocument/2006/relationships" xmlns:p="http://schemas.openxmlformats.org/presentationml/2006/main">
+  <p:cSld name="Slide 47">
+    <p:bg>
+      <p:bgPr>
+        <a:solidFill>
+          <a:srgbClr val="FFFFFF"/>
+        </a:solidFill>
+      </p:bgPr>
+    </p:bg>
+    <p:spTree>
+      <p:nvGrpSpPr>
+        <p:cNvPr id="1" name=""/>
+        <p:cNvGrpSpPr/>
+        <p:nvPr/>
+      </p:nvGrpSpPr>
+      <p:grpSpPr>
+        <a:xfrm>
+          <a:off x="0" y="0"/>
+          <a:ext cx="0" cy="0"/>
+          <a:chOff x="0" y="0"/>
+          <a:chExt cx="0" cy="0"/>
+        </a:xfrm>
+      </p:grpSpPr>
+      <p:sp>
+        <p:nvSpPr>
+          <p:cNvPr id="2" name="Text 0"/>
+          <p:cNvSpPr/>
+          <p:nvPr/>
+        </p:nvSpPr>
+        <p:spPr>
+          <a:xfrm>
+            <a:off x="566928" y="384048"/>
+            <a:ext cx="11055096" cy="658368"/>
+          </a:xfrm>
+          <a:prstGeom prst="rect">
+            <a:avLst/>
+          </a:prstGeom>
+          <a:noFill/>
+          <a:ln/>
+        </p:spPr>
+        <p:txBody>
+          <a:bodyPr wrap="square" rtlCol="0" anchor="ctr"/>
+          <a:lstStyle/>
+          <a:p>
+            <a:pPr indent="0" marL="0">
+              <a:buNone/>
+            </a:pPr>
+            <a:r>
+              <a:rPr lang="en-US" sz="3000" b="1" dirty="0">
+                <a:solidFill>
+                  <a:srgbClr val="1F4C86"/>
+                </a:solidFill>
+                <a:latin typeface="Trebuchet MS" pitchFamily="34" charset="0"/>
+                <a:ea typeface="Trebuchet MS" pitchFamily="34" charset="-122"/>
+                <a:cs typeface="Trebuchet MS" pitchFamily="34" charset="-120"/>
+              </a:rPr>
+              <a:t>How it is put together</a:t>
+            </a:r>
+            <a:endParaRPr lang="en-US" sz="3000" dirty="0"/>
+          </a:p>
+        </p:txBody>
+      </p:sp>
+      <p:sp>
+        <p:nvSpPr>
+          <p:cNvPr id="3" name="Shape 1"/>
+          <p:cNvSpPr/>
+          <p:nvPr/>
+        </p:nvSpPr>
+        <p:spPr>
+          <a:xfrm>
+            <a:off x="566928" y="1097280"/>
+            <a:ext cx="1920240" cy="50292"/>
+          </a:xfrm>
+          <a:prstGeom prst="rect">
+            <a:avLst/>
+          </a:prstGeom>
+          <a:solidFill>
+            <a:srgbClr val="3674C1"/>
+          </a:solidFill>
+          <a:ln/>
+        </p:spPr>
+      </p:sp>
+      <p:sp>
+        <p:nvSpPr>
+          <p:cNvPr id="4" name="Text 2"/>
+          <p:cNvSpPr/>
+          <p:nvPr/>
+        </p:nvSpPr>
+        <p:spPr>
+          <a:xfrm>
+            <a:off x="566928" y="1243584"/>
+            <a:ext cx="11055096" cy="384048"/>
+          </a:xfrm>
+          <a:prstGeom prst="rect">
+            <a:avLst/>
+          </a:prstGeom>
+          <a:noFill/>
+          <a:ln/>
+        </p:spPr>
+        <p:txBody>
+          <a:bodyPr wrap="square" rtlCol="0" anchor="ctr"/>
+          <a:lstStyle/>
+          <a:p>
+            <a:pPr indent="0" marL="0">
+              <a:buNone/>
+            </a:pPr>
+            <a:r>
+              <a:rPr lang="en-US" sz="1700" i="1" dirty="0">
+                <a:solidFill>
+                  <a:srgbClr val="5A6675"/>
+                </a:solidFill>
+                <a:latin typeface="Calibri" pitchFamily="34" charset="0"/>
+                <a:ea typeface="Calibri" pitchFamily="34" charset="-122"/>
+                <a:cs typeface="Calibri" pitchFamily="34" charset="-120"/>
+              </a:rPr>
+              <a:t>The easy part is the QuPath extension. Budget your time for the microscope side.</a:t>
+            </a:r>
+            <a:endParaRPr lang="en-US" sz="1700" dirty="0"/>
+          </a:p>
+        </p:txBody>
+      </p:sp>
+      <p:sp>
+        <p:nvSpPr>
+          <p:cNvPr id="5" name="Text 3"/>
+          <p:cNvSpPr/>
+          <p:nvPr/>
+        </p:nvSpPr>
+        <p:spPr>
+          <a:xfrm>
+            <a:off x="640080" y="1755648"/>
+            <a:ext cx="10963656" cy="4279392"/>
+          </a:xfrm>
+          <a:prstGeom prst="rect">
+            <a:avLst/>
+          </a:prstGeom>
+          <a:noFill/>
+          <a:ln/>
+        </p:spPr>
+        <p:txBody>
+          <a:bodyPr wrap="square" rtlCol="0" anchor="t"/>
+          <a:lstStyle/>
+          <a:p>
+            <a:pPr marL="342900" indent="-342900">
+              <a:lnSpc>
+                <a:spcPct val="105000"/>
+              </a:lnSpc>
+              <a:spcAft>
+                <a:spcPts val="1200"/>
+              </a:spcAft>
+              <a:buSzPct val="100000"/>
+              <a:buChar char="•"/>
+            </a:pPr>
+            <a:r>
+              <a:rPr lang="en-US" sz="2000" dirty="0">
+                <a:solidFill>
+                  <a:srgbClr val="1F2933"/>
+                </a:solidFill>
+                <a:latin typeface="Calibri" pitchFamily="34" charset="0"/>
+                <a:ea typeface="Calibri" pitchFamily="34" charset="-122"/>
+                <a:cs typeface="Calibri" pitchFamily="34" charset="-120"/>
+              </a:rPr>
+              <a:t>QuPath talks to a small command server, which drives Micro-Manager, which drives the hardware</a:t>
+            </a:r>
+            <a:endParaRPr lang="en-US" sz="2000" dirty="0"/>
+          </a:p>
+          <a:p>
+            <a:pPr marL="342900" indent="-342900">
+              <a:lnSpc>
+                <a:spcPct val="105000"/>
+              </a:lnSpc>
+              <a:spcAft>
+                <a:spcPts val="1200"/>
+              </a:spcAft>
+              <a:buSzPct val="100000"/>
+              <a:buChar char="•"/>
+            </a:pPr>
+            <a:r>
+              <a:rPr lang="en-US" sz="2000" dirty="0">
+                <a:solidFill>
+                  <a:srgbClr val="1F2933"/>
+                </a:solidFill>
+                <a:latin typeface="Calibri" pitchFamily="34" charset="0"/>
+                <a:ea typeface="Calibri" pitchFamily="34" charset="-122"/>
+                <a:cs typeface="Calibri" pitchFamily="34" charset="-120"/>
+              </a:rPr>
+              <a:t>Each instrument is described by its own YAML — the QuPath side carries no per-instrument code, only per-modality handlers</a:t>
+            </a:r>
+            <a:endParaRPr lang="en-US" sz="2000" dirty="0"/>
+          </a:p>
+          <a:p>
+            <a:pPr marL="342900" indent="-342900">
+              <a:lnSpc>
+                <a:spcPct val="105000"/>
+              </a:lnSpc>
+              <a:spcAft>
+                <a:spcPts val="1200"/>
+              </a:spcAft>
+              <a:buSzPct val="100000"/>
+              <a:buChar char="•"/>
+            </a:pPr>
+            <a:r>
+              <a:rPr lang="en-US" sz="2000" dirty="0">
+                <a:solidFill>
+                  <a:srgbClr val="1F2933"/>
+                </a:solidFill>
+                <a:latin typeface="Calibri" pitchFamily="34" charset="0"/>
+                <a:ea typeface="Calibri" pitchFamily="34" charset="-122"/>
+                <a:cs typeface="Calibri" pitchFamily="34" charset="-120"/>
+              </a:rPr>
+              <a:t>Micro-Manager remains the device layer. We did not reinvent it</a:t>
+            </a:r>
+            <a:endParaRPr lang="en-US" sz="2000" dirty="0"/>
+          </a:p>
+        </p:txBody>
+      </p:sp>
+      <p:sp>
+        <p:nvSpPr>
+          <p:cNvPr id="6" name="Text 4"/>
+          <p:cNvSpPr/>
+          <p:nvPr/>
+        </p:nvSpPr>
+        <p:spPr>
+          <a:xfrm>
+            <a:off x="11274552" y="6291072"/>
+            <a:ext cx="457200" cy="310896"/>
+          </a:xfrm>
+          <a:prstGeom prst="rect">
+            <a:avLst/>
+          </a:prstGeom>
+          <a:noFill/>
+          <a:ln/>
+        </p:spPr>
+        <p:txBody>
+          <a:bodyPr wrap="square" rtlCol="0" anchor="ctr"/>
+          <a:lstStyle/>
+          <a:p>
+            <a:pPr algn="r" indent="0" marL="0">
+              <a:buNone/>
+            </a:pPr>
+            <a:r>
+              <a:rPr lang="en-US" sz="1400" dirty="0">
+                <a:solidFill>
+                  <a:srgbClr val="A8B2BF"/>
+                </a:solidFill>
+                <a:latin typeface="Calibri" pitchFamily="34" charset="0"/>
+                <a:ea typeface="Calibri" pitchFamily="34" charset="-122"/>
+                <a:cs typeface="Calibri" pitchFamily="34" charset="-120"/>
+              </a:rPr>
+              <a:t>47</a:t>
+            </a:r>
+            <a:endParaRPr lang="en-US" sz="1400" dirty="0"/>
+          </a:p>
+        </p:txBody>
+      </p:sp>
+    </p:spTree>
+  </p:cSld>
+  <p:clrMapOvr>
+    <a:masterClrMapping/>
+  </p:clrMapOvr>
+</p:sld>
+</file>
+
+<file path=ppt/slides/slide48.xml><?xml version="1.0" encoding="utf-8"?>
+<p:sld xmlns:a="http://schemas.openxmlformats.org/drawingml/2006/main" xmlns:r="http://schemas.openxmlformats.org/officeDocument/2006/relationships" xmlns:p="http://schemas.openxmlformats.org/presentationml/2006/main">
+  <p:cSld name="Slide 48">
+    <p:bg>
+      <p:bgPr>
+        <a:solidFill>
+          <a:srgbClr val="FFFFFF"/>
+        </a:solidFill>
+      </p:bgPr>
+    </p:bg>
+    <p:spTree>
+      <p:nvGrpSpPr>
+        <p:cNvPr id="1" name=""/>
+        <p:cNvGrpSpPr/>
+        <p:nvPr/>
+      </p:nvGrpSpPr>
+      <p:grpSpPr>
+        <a:xfrm>
+          <a:off x="0" y="0"/>
+          <a:ext cx="0" cy="0"/>
+          <a:chOff x="0" y="0"/>
+          <a:chExt cx="0" cy="0"/>
+        </a:xfrm>
+      </p:grpSpPr>
+      <p:sp>
+        <p:nvSpPr>
           <p:cNvPr id="2" name="Shape 0"/>
           <p:cNvSpPr/>
           <p:nvPr/>
@@ -17426,7 +18766,7 @@
                 <a:ea typeface="Calibri" pitchFamily="34" charset="-122"/>
                 <a:cs typeface="Calibri" pitchFamily="34" charset="-120"/>
               </a:rPr>
-              <a:t>44</a:t>
+              <a:t>48</a:t>
             </a:r>
             <a:endParaRPr lang="en-US" sz="1400" dirty="0"/>
           </a:p>

--- a/I2K_2026_QuPath_Extensions.pptx
+++ b/I2K_2026_QuPath_Extensions.pptx
@@ -8837,7 +8837,7 @@
                 <a:ea typeface="Calibri" pitchFamily="34" charset="-122"/>
                 <a:cs typeface="Calibri" pitchFamily="34" charset="-120"/>
               </a:rPr>
-              <a:t>Sara McArdle also shaped the software directly — two of these extensions began as her Groovy scripts, and her FS2K course was the model for how the workshop pages are written.
+              <a:t>Sara McArdle also shaped the software directly: the channel legend packages a Groovy script of hers (originally Pete Bankhead’s, from the 2022 QuPath Hackathon), and the subset classifier follows a pattern from another. Her FS2K course was the model for how the workshop pages are written.
 </a:t>
             </a:r>
             <a:pPr indent="0" marL="0">

--- a/I2K_2026_QuPath_Extensions.pptx
+++ b/I2K_2026_QuPath_Extensions.pptx
@@ -19390,7 +19390,7 @@
                 <a:ea typeface="Calibri" pitchFamily="34" charset="-122"/>
                 <a:cs typeface="Calibri" pitchFamily="34" charset="-120"/>
               </a:rPr>
-              <a:t>Workshop requirement: QuPath 0.7.0 or later. Nothing here runs on 0.6.</a:t>
+              <a:t>Bring QuPath 0.7.0 or later. Four of the thirteen require it, and the workshop is built and tested on it; the rest still declare 0.6.0 as their minimum.</a:t>
             </a:r>
             <a:endParaRPr lang="en-US" sz="1600" dirty="0"/>
           </a:p>

--- a/I2K_2026_QuPath_Extensions.pptx
+++ b/I2K_2026_QuPath_Extensions.pptx
@@ -5742,7 +5742,7 @@
                 <a:ea typeface="Trebuchet MS" pitchFamily="34" charset="-122"/>
                 <a:cs typeface="Trebuchet MS" pitchFamily="34" charset="-120"/>
               </a:rPr>
-              <a:t>QuIET — Image Export Toolkit</a:t>
+              <a:t>Five export categories, one wizard</a:t>
             </a:r>
             <a:endParaRPr lang="en-US" sz="3000" dirty="0"/>
           </a:p>
@@ -9048,7 +9048,7 @@
                 <a:ea typeface="Trebuchet MS" pitchFamily="34" charset="-122"/>
                 <a:cs typeface="Trebuchet MS" pitchFamily="34" charset="-120"/>
               </a:rPr>
-              <a:t>Tiles to Pyramid: stitching two tiles</a:t>
+              <a:t>Measure on the clearest channel, reuse on the rest</a:t>
             </a:r>
             <a:endParaRPr lang="en-US" sz="3000" dirty="0"/>
           </a:p>
@@ -9082,8 +9082,8 @@
         </p:nvSpPr>
         <p:spPr>
           <a:xfrm>
-            <a:off x="566928" y="1225296"/>
-            <a:ext cx="11055096" cy="384048"/>
+            <a:off x="768096" y="1316736"/>
+            <a:ext cx="5120640" cy="402336"/>
           </a:xfrm>
           <a:prstGeom prst="rect">
             <a:avLst/>
@@ -9107,7 +9107,7 @@
                 <a:ea typeface="Calibri" pitchFamily="34" charset="-122"/>
                 <a:cs typeface="Calibri" pitchFamily="34" charset="-120"/>
               </a:rPr>
-              <a:t>As acquired: neighbouring tiles share a strip of the same tissue (shaded)</a:t>
+              <a:t>Placed where the stage said it was</a:t>
             </a:r>
             <a:endParaRPr lang="en-US" sz="1700" dirty="0"/>
           </a:p>
@@ -9115,7 +9115,7 @@
       </p:sp>
       <p:pic>
         <p:nvPicPr>
-          <p:cNvPr id="5" name="Image 0" descr="images/stitch_ppm_unstitched.jpg">    </p:cNvPr>
+          <p:cNvPr id="5" name="Image 0" descr="images/stitch_if_nominal.jpg">    </p:cNvPr>
           <p:cNvPicPr>
             <a:picLocks noChangeAspect="1"/>
           </p:cNvPicPr>
@@ -9129,8 +9129,8 @@
         </p:blipFill>
         <p:spPr>
           <a:xfrm>
-            <a:off x="566928" y="1645920"/>
-            <a:ext cx="10058400" cy="1894332"/>
+            <a:off x="768096" y="1783080"/>
+            <a:ext cx="5120640" cy="4118776"/>
           </a:xfrm>
           <a:prstGeom prst="rect">
             <a:avLst/>
@@ -9145,8 +9145,8 @@
         </p:nvSpPr>
         <p:spPr>
           <a:xfrm>
-            <a:off x="566928" y="3631692"/>
-            <a:ext cx="11055096" cy="384048"/>
+            <a:off x="6300216" y="1316736"/>
+            <a:ext cx="5120640" cy="402336"/>
           </a:xfrm>
           <a:prstGeom prst="rect">
             <a:avLst/>
@@ -9170,7 +9170,7 @@
                 <a:ea typeface="Calibri" pitchFamily="34" charset="-122"/>
                 <a:cs typeface="Calibri" pitchFamily="34" charset="-120"/>
               </a:rPr>
-              <a:t>Stitched: the join is placed by matching the image content in that strip</a:t>
+              <a:t>Placed where the image content says it is</a:t>
             </a:r>
             <a:endParaRPr lang="en-US" sz="1700" dirty="0"/>
           </a:p>
@@ -9178,7 +9178,7 @@
       </p:sp>
       <p:pic>
         <p:nvPicPr>
-          <p:cNvPr id="7" name="Image 1" descr="images/stitch_ppm_stitched.jpg">    </p:cNvPr>
+          <p:cNvPr id="7" name="Image 1" descr="images/stitch_if_registered.jpg">    </p:cNvPr>
           <p:cNvPicPr>
             <a:picLocks noChangeAspect="1"/>
           </p:cNvPicPr>
@@ -9192,8 +9192,8 @@
         </p:blipFill>
         <p:spPr>
           <a:xfrm>
-            <a:off x="566928" y="4052316"/>
-            <a:ext cx="9273845" cy="1894332"/>
+            <a:off x="6300216" y="1783080"/>
+            <a:ext cx="5120640" cy="4118776"/>
           </a:xfrm>
           <a:prstGeom prst="rect">
             <a:avLst/>
@@ -9208,17 +9208,17 @@
         </p:nvSpPr>
         <p:spPr>
           <a:xfrm>
-            <a:off x="566928" y="5998464"/>
-            <a:ext cx="10140696" cy="512064"/>
-          </a:xfrm>
-          <a:prstGeom prst="rect">
-            <a:avLst/>
-          </a:prstGeom>
-          <a:noFill/>
-          <a:ln/>
-        </p:spPr>
-        <p:txBody>
-          <a:bodyPr wrap="square" rtlCol="0" anchor="ctr"/>
+            <a:off x="566928" y="6011584"/>
+            <a:ext cx="11055096" cy="566928"/>
+          </a:xfrm>
+          <a:prstGeom prst="rect">
+            <a:avLst/>
+          </a:prstGeom>
+          <a:noFill/>
+          <a:ln/>
+        </p:spPr>
+        <p:txBody>
+          <a:bodyPr wrap="square" rtlCol="0" anchor="t"/>
           <a:lstStyle/>
           <a:p>
             <a:pPr indent="0" marL="0">
@@ -9233,7 +9233,7 @@
                 <a:ea typeface="Calibri" pitchFamily="34" charset="-122"/>
                 <a:cs typeface="Calibri" pitchFamily="34" charset="-120"/>
               </a:rPr>
-              <a:t>Pancreatic cancer, polarised light. The stage recorded this tile about 5 px (0.9 µm) away from where it really was — the worst of 17 seams in this grid, which ran to a 2.2 px median. Registration measured that from the overlap and closed every seam to under a pixel. It is a tick-box: left off, tiles go where the stage said.</a:t>
+              <a:t>The same join through the same cells; only the tile positions differ. Positions were measured on DAPI, the channel with the clearest, best separated structure in this sample, and reused unchanged for the other two channels — so every channel stays aligned with every other. Nuclei blue, actin green, mitochondria red; the correction here is 7 px, about 4.6 µm.</a:t>
             </a:r>
             <a:endParaRPr lang="en-US" sz="1500" dirty="0"/>
           </a:p>
@@ -9343,7 +9343,7 @@
                 <a:ea typeface="Trebuchet MS" pitchFamily="34" charset="-122"/>
                 <a:cs typeface="Trebuchet MS" pitchFamily="34" charset="-120"/>
               </a:rPr>
-              <a:t>Measure on the clearest channel, reuse on the rest</a:t>
+              <a:t>Tiles to Pyramid: stitching two tiles</a:t>
             </a:r>
             <a:endParaRPr lang="en-US" sz="3000" dirty="0"/>
           </a:p>
@@ -9377,8 +9377,8 @@
         </p:nvSpPr>
         <p:spPr>
           <a:xfrm>
-            <a:off x="768096" y="1316736"/>
-            <a:ext cx="5120640" cy="402336"/>
+            <a:off x="566928" y="1225296"/>
+            <a:ext cx="11055096" cy="384048"/>
           </a:xfrm>
           <a:prstGeom prst="rect">
             <a:avLst/>
@@ -9402,7 +9402,7 @@
                 <a:ea typeface="Calibri" pitchFamily="34" charset="-122"/>
                 <a:cs typeface="Calibri" pitchFamily="34" charset="-120"/>
               </a:rPr>
-              <a:t>Placed where the stage said it was</a:t>
+              <a:t>As acquired: neighbouring tiles share a strip of the same tissue (shaded)</a:t>
             </a:r>
             <a:endParaRPr lang="en-US" sz="1700" dirty="0"/>
           </a:p>
@@ -9410,7 +9410,7 @@
       </p:sp>
       <p:pic>
         <p:nvPicPr>
-          <p:cNvPr id="5" name="Image 0" descr="images/stitch_if_nominal.jpg">    </p:cNvPr>
+          <p:cNvPr id="5" name="Image 0" descr="images/stitch_ppm_unstitched.jpg">    </p:cNvPr>
           <p:cNvPicPr>
             <a:picLocks noChangeAspect="1"/>
           </p:cNvPicPr>
@@ -9424,8 +9424,8 @@
         </p:blipFill>
         <p:spPr>
           <a:xfrm>
-            <a:off x="768096" y="1783080"/>
-            <a:ext cx="5120640" cy="4118776"/>
+            <a:off x="566928" y="1645920"/>
+            <a:ext cx="10058400" cy="1894332"/>
           </a:xfrm>
           <a:prstGeom prst="rect">
             <a:avLst/>
@@ -9440,8 +9440,8 @@
         </p:nvSpPr>
         <p:spPr>
           <a:xfrm>
-            <a:off x="6300216" y="1316736"/>
-            <a:ext cx="5120640" cy="402336"/>
+            <a:off x="566928" y="3631692"/>
+            <a:ext cx="11055096" cy="384048"/>
           </a:xfrm>
           <a:prstGeom prst="rect">
             <a:avLst/>
@@ -9465,7 +9465,7 @@
                 <a:ea typeface="Calibri" pitchFamily="34" charset="-122"/>
                 <a:cs typeface="Calibri" pitchFamily="34" charset="-120"/>
               </a:rPr>
-              <a:t>Placed where the image content says it is</a:t>
+              <a:t>Stitched: the join is placed by matching the image content in that strip</a:t>
             </a:r>
             <a:endParaRPr lang="en-US" sz="1700" dirty="0"/>
           </a:p>
@@ -9473,7 +9473,7 @@
       </p:sp>
       <p:pic>
         <p:nvPicPr>
-          <p:cNvPr id="7" name="Image 1" descr="images/stitch_if_registered.jpg">    </p:cNvPr>
+          <p:cNvPr id="7" name="Image 1" descr="images/stitch_ppm_stitched.jpg">    </p:cNvPr>
           <p:cNvPicPr>
             <a:picLocks noChangeAspect="1"/>
           </p:cNvPicPr>
@@ -9487,8 +9487,8 @@
         </p:blipFill>
         <p:spPr>
           <a:xfrm>
-            <a:off x="6300216" y="1783080"/>
-            <a:ext cx="5120640" cy="4118776"/>
+            <a:off x="566928" y="4052316"/>
+            <a:ext cx="9273845" cy="1894332"/>
           </a:xfrm>
           <a:prstGeom prst="rect">
             <a:avLst/>
@@ -9503,17 +9503,17 @@
         </p:nvSpPr>
         <p:spPr>
           <a:xfrm>
-            <a:off x="566928" y="6011584"/>
-            <a:ext cx="11055096" cy="566928"/>
-          </a:xfrm>
-          <a:prstGeom prst="rect">
-            <a:avLst/>
-          </a:prstGeom>
-          <a:noFill/>
-          <a:ln/>
-        </p:spPr>
-        <p:txBody>
-          <a:bodyPr wrap="square" rtlCol="0" anchor="t"/>
+            <a:off x="566928" y="5998464"/>
+            <a:ext cx="10140696" cy="512064"/>
+          </a:xfrm>
+          <a:prstGeom prst="rect">
+            <a:avLst/>
+          </a:prstGeom>
+          <a:noFill/>
+          <a:ln/>
+        </p:spPr>
+        <p:txBody>
+          <a:bodyPr wrap="square" rtlCol="0" anchor="ctr"/>
           <a:lstStyle/>
           <a:p>
             <a:pPr indent="0" marL="0">
@@ -9528,7 +9528,7 @@
                 <a:ea typeface="Calibri" pitchFamily="34" charset="-122"/>
                 <a:cs typeface="Calibri" pitchFamily="34" charset="-120"/>
               </a:rPr>
-              <a:t>The same join through the same cells; only the tile positions differ. Positions were measured on DAPI, the channel with the clearest, best separated structure in this sample, and reused unchanged for the other two channels — so every channel stays aligned with every other. Nuclei blue, actin green, mitochondria red; the correction here is 7 px, about 4.6 µm.</a:t>
+              <a:t>Pancreatic cancer, polarised light. The stage recorded this tile about 5 px (0.9 µm) away from where it really was — the worst of 17 seams in this grid, which ran to a 2.2 px median. Registration measured that from the overlap and closed every seam to under a pixel. It is a tick-box: left off, tiles go where the stage said.</a:t>
             </a:r>
             <a:endParaRPr lang="en-US" sz="1500" dirty="0"/>
           </a:p>
@@ -10307,7 +10307,7 @@
                 <a:ea typeface="Trebuchet MS" pitchFamily="34" charset="-122"/>
                 <a:cs typeface="Trebuchet MS" pitchFamily="34" charset="-120"/>
               </a:rPr>
-              <a:t>▶  DEMO ONLY</a:t>
+              <a:t>▶  DEMO ONLY  ·  5 MIN</a:t>
             </a:r>
             <a:endParaRPr lang="en-US" sz="1600" dirty="0"/>
           </a:p>
@@ -10346,7 +10346,7 @@
                 <a:ea typeface="Trebuchet MS" pitchFamily="34" charset="-122"/>
                 <a:cs typeface="Trebuchet MS" pitchFamily="34" charset="-120"/>
               </a:rPr>
-              <a:t>Confusion Matrix</a:t>
+              <a:t>Reading the matrix</a:t>
             </a:r>
             <a:endParaRPr lang="en-US" sz="3200" dirty="0"/>
           </a:p>
@@ -14006,7 +14006,7 @@
                 <a:ea typeface="Trebuchet MS" pitchFamily="34" charset="-122"/>
                 <a:cs typeface="Trebuchet MS" pitchFamily="34" charset="-120"/>
               </a:rPr>
-              <a:t>QPSC — QuPath Scope Control</a:t>
+              <a:t>Draw a box, the microscope acquires it</a:t>
             </a:r>
             <a:endParaRPr lang="en-US" sz="3000" dirty="0"/>
           </a:p>
@@ -14120,7 +14120,7 @@
                 <a:ea typeface="Calibri" pitchFamily="34" charset="-122"/>
                 <a:cs typeface="Calibri" pitchFamily="34" charset="-120"/>
               </a:rPr>
-              <a:t>Live camera view, stage map, saved positions, and a virtual joystick</a:t>
+              <a:t>Live camera view, stage map, saved points, and a virtual joystick</a:t>
             </a:r>
             <a:endParaRPr lang="en-US" sz="2000" dirty="0"/>
           </a:p>
@@ -18815,7 +18815,7 @@
                 <a:ea typeface="Trebuchet MS" pitchFamily="34" charset="-122"/>
                 <a:cs typeface="Trebuchet MS" pitchFamily="34" charset="-120"/>
               </a:rPr>
-              <a:t>Dialog Manager, Wizard Wand, Polyline Wand</a:t>
+              <a:t>Five small tools</a:t>
             </a:r>
             <a:endParaRPr lang="en-US" sz="4000" dirty="0"/>
           </a:p>
@@ -18854,7 +18854,7 @@
                 <a:ea typeface="Calibri" pitchFamily="34" charset="-122"/>
                 <a:cs typeface="Calibri" pitchFamily="34" charset="-120"/>
               </a:rPr>
-              <a:t>Quality-of-life fixes for things QuPath leaves to you</a:t>
+              <a:t>Dialog Manager · Channel Names · Classify Subset · Wizard Wand · Polyline Wand</a:t>
             </a:r>
             <a:endParaRPr lang="en-US" sz="1900" dirty="0"/>
           </a:p>
@@ -19003,7 +19003,7 @@
                 <a:ea typeface="Trebuchet MS" pitchFamily="34" charset="-122"/>
                 <a:cs typeface="Trebuchet MS" pitchFamily="34" charset="-120"/>
               </a:rPr>
-              <a:t>Three that install in seconds</a:t>
+              <a:t>Dialog Manager, Channel Names, Classify Subset</a:t>
             </a:r>
             <a:endParaRPr lang="en-US" sz="3000" dirty="0"/>
           </a:p>
@@ -19132,7 +19132,7 @@
                 <a:ea typeface="Calibri" pitchFamily="34" charset="-122"/>
                 <a:cs typeface="Calibri" pitchFamily="34" charset="-120"/>
               </a:rPr>
-              <a:t>Recovers windows stranded on a monitor you have since unplugged; notices when display scaling has changed and falls back to a sane on-screen position</a:t>
+              <a:t>Recovers windows stranded on a monitor you have since unplugged, and points several workstations at one shared file so a facility opens with the same layout</a:t>
             </a:r>
             <a:endParaRPr lang="en-US" sz="2000" dirty="0"/>
           </a:p>
@@ -19181,30 +19181,6 @@
                 <a:cs typeface="Calibri" pitchFamily="34" charset="-120"/>
               </a:rPr>
               <a:t>Classify Object Subset — run a saved classifier on a chosen subset, with a live count before you commit</a:t>
-            </a:r>
-            <a:endParaRPr lang="en-US" sz="2000" dirty="0"/>
-          </a:p>
-          <a:p>
-            <a:pPr marL="342900" indent="-342900">
-              <a:lnSpc>
-                <a:spcPct val="105000"/>
-              </a:lnSpc>
-              <a:spcAft>
-                <a:spcPts val="1200"/>
-              </a:spcAft>
-              <a:buSzPct val="100000"/>
-              <a:buChar char="•"/>
-            </a:pPr>
-            <a:r>
-              <a:rPr lang="en-US" sz="2000" dirty="0">
-                <a:solidFill>
-                  <a:srgbClr val="1F2933"/>
-                </a:solidFill>
-                <a:latin typeface="Calibri" pitchFamily="34" charset="0"/>
-                <a:ea typeface="Calibri" pitchFamily="34" charset="-122"/>
-                <a:cs typeface="Calibri" pitchFamily="34" charset="-120"/>
-              </a:rPr>
-              <a:t>Point several workstations at one shared file and a facility gets the same dialog layout everywhere</a:t>
             </a:r>
             <a:endParaRPr lang="en-US" sz="2000" dirty="0"/>
           </a:p>
@@ -19437,7 +19413,7 @@
                 <a:ea typeface="Calibri" pitchFamily="34" charset="-122"/>
                 <a:cs typeface="Calibri" pitchFamily="34" charset="-120"/>
               </a:rPr>
-              <a:t>The built-in wands are untouched — both install as separate tools you can ignore.</a:t>
+              <a:t>QuPath’s own wand is untouched — both of these install as separate tools you can ignore.</a:t>
             </a:r>
             <a:endParaRPr lang="en-US" sz="1700" dirty="0"/>
           </a:p>
@@ -19882,7 +19858,7 @@
                 <a:ea typeface="Calibri" pitchFamily="34" charset="-122"/>
                 <a:cs typeface="Calibri" pitchFamily="34" charset="-120"/>
               </a:rPr>
-              <a:t>Wizard Wand: wand a structure, then auto-tune from a hand-drawn example and do it again</a:t>
+              <a:t>Wizard Wand: wand a structure, then tune from a hand-drawn area annotation and do it again</a:t>
             </a:r>
             <a:endParaRPr lang="en-US" sz="2000" dirty="0"/>
           </a:p>
@@ -19924,7 +19900,7 @@
                 <a:ea typeface="Calibri" pitchFamily="34" charset="-122"/>
                 <a:cs typeface="Calibri" pitchFamily="34" charset="-120"/>
               </a:rPr>
-              <a:t>Polyline Wand: push a traced boundary outward, smooth a noisy stretch, erase back from an endpoint</a:t>
+              <a:t>Polyline Wand: push a traced boundary outward, erase back from an endpoint, then switch mode to smooth a noisy stretch</a:t>
             </a:r>
             <a:endParaRPr lang="en-US" sz="2000" dirty="0"/>
           </a:p>

--- a/I2K_2026_QuPath_Extensions.pptx
+++ b/I2K_2026_QuPath_Extensions.pptx
@@ -5815,8 +5815,159 @@
         </p:nvSpPr>
         <p:spPr>
           <a:xfrm>
+            <a:off x="10140696" y="1316736"/>
+            <a:ext cx="1481328" cy="201168"/>
+          </a:xfrm>
+          <a:prstGeom prst="rect">
+            <a:avLst/>
+          </a:prstGeom>
+          <a:noFill/>
+          <a:ln/>
+        </p:spPr>
+        <p:txBody>
+          <a:bodyPr wrap="square" rtlCol="0" anchor="ctr"/>
+          <a:lstStyle/>
+          <a:p>
+            <a:pPr algn="ctr" indent="0" marL="0">
+              <a:buNone/>
+            </a:pPr>
+            <a:r>
+              <a:rPr lang="en-US" sz="1000" b="1" dirty="0">
+                <a:solidFill>
+                  <a:srgbClr val="1F4C86"/>
+                </a:solidFill>
+                <a:latin typeface="Calibri" pitchFamily="34" charset="0"/>
+                <a:ea typeface="Calibri" pitchFamily="34" charset="-122"/>
+                <a:cs typeface="Calibri" pitchFamily="34" charset="-120"/>
+              </a:rPr>
+              <a:t>QuIET</a:t>
+            </a:r>
+            <a:endParaRPr lang="en-US" sz="1000" dirty="0"/>
+          </a:p>
+        </p:txBody>
+      </p:sp>
+      <p:sp>
+        <p:nvSpPr>
+          <p:cNvPr id="6" name="Shape 4"/>
+          <p:cNvSpPr/>
+          <p:nvPr/>
+        </p:nvSpPr>
+        <p:spPr>
+          <a:xfrm>
+            <a:off x="10264140" y="1536192"/>
+            <a:ext cx="1234440" cy="1234440"/>
+          </a:xfrm>
+          <a:prstGeom prst="rect">
+            <a:avLst/>
+          </a:prstGeom>
+          <a:solidFill>
+            <a:srgbClr val="FFFFFF"/>
+          </a:solidFill>
+          <a:ln w="9525">
+            <a:solidFill>
+              <a:srgbClr val="3674C1"/>
+            </a:solidFill>
+            <a:prstDash val="dash"/>
+          </a:ln>
+        </p:spPr>
+      </p:sp>
+      <p:sp>
+        <p:nvSpPr>
+          <p:cNvPr id="7" name="Text 5"/>
+          <p:cNvSpPr/>
+          <p:nvPr/>
+        </p:nvSpPr>
+        <p:spPr>
+          <a:xfrm>
+            <a:off x="10264140" y="1536192"/>
+            <a:ext cx="1234440" cy="1234440"/>
+          </a:xfrm>
+          <a:prstGeom prst="rect">
+            <a:avLst/>
+          </a:prstGeom>
+          <a:noFill/>
+          <a:ln/>
+        </p:spPr>
+        <p:txBody>
+          <a:bodyPr wrap="square" rtlCol="0" anchor="ctr"/>
+          <a:lstStyle/>
+          <a:p>
+            <a:pPr algn="ctr" indent="0" marL="0">
+              <a:buNone/>
+            </a:pPr>
+            <a:r>
+              <a:rPr lang="en-US" sz="1100" dirty="0">
+                <a:solidFill>
+                  <a:srgbClr val="3674C1"/>
+                </a:solidFill>
+                <a:latin typeface="Calibri" pitchFamily="34" charset="0"/>
+                <a:ea typeface="Calibri" pitchFamily="34" charset="-122"/>
+                <a:cs typeface="Calibri" pitchFamily="34" charset="-120"/>
+              </a:rPr>
+              <a:t>QR</a:t>
+            </a:r>
+            <a:endParaRPr lang="en-US" sz="1100" dirty="0"/>
+          </a:p>
+        </p:txBody>
+      </p:sp>
+      <p:sp>
+        <p:nvSpPr>
+          <p:cNvPr id="8" name="Text 6">
+            <a:hlinkClick r:id="rId1" tooltip=""/>
+          </p:cNvPr>
+          <p:cNvSpPr/>
+          <p:nvPr/>
+        </p:nvSpPr>
+        <p:spPr>
+          <a:xfrm>
+            <a:off x="10140696" y="2807208"/>
+            <a:ext cx="1481328" cy="310896"/>
+          </a:xfrm>
+          <a:prstGeom prst="rect">
+            <a:avLst/>
+          </a:prstGeom>
+          <a:noFill/>
+          <a:ln/>
+        </p:spPr>
+        <p:txBody>
+          <a:bodyPr wrap="square" rtlCol="0" anchor="ctr"/>
+          <a:lstStyle/>
+          <a:p>
+            <a:pPr algn="ctr" indent="0" marL="0">
+              <a:buNone/>
+            </a:pPr>
+            <a:r>
+              <a:rPr lang="en-US" sz="750" u="sng" dirty="0">
+                <a:solidFill>
+                  <a:srgbClr val="5A6675"/>
+                </a:solidFill>
+                <a:latin typeface="Calibri" pitchFamily="34" charset="0"/>
+                <a:ea typeface="Calibri" pitchFamily="34" charset="-122"/>
+                <a:cs typeface="Calibri" pitchFamily="34" charset="-120"/>
+                <a:hlinkClick r:id="rId1" invalidUrl="" action="" tgtFrame="" tooltip="" history="1" highlightClick="0" endSnd="0">
+                  <a:extLst>
+                    <a:ext uri="{A12FA001-AC4F-418D-AE19-62706E023703}">
+                      <ahyp:hlinkClr xmlns:ahyp="http://schemas.microsoft.com/office/drawing/2018/hyperlinkcolor" val="tx"/>
+                    </a:ext>
+                  </a:extLst>
+                </a:hlinkClick>
+              </a:rPr>
+              <a:t>github.com/uw-loci/qupath-extension-image-export-toolkit</a:t>
+            </a:r>
+            <a:endParaRPr lang="en-US" sz="750" dirty="0"/>
+          </a:p>
+        </p:txBody>
+      </p:sp>
+      <p:sp>
+        <p:nvSpPr>
+          <p:cNvPr id="9" name="Text 7"/>
+          <p:cNvSpPr/>
+          <p:nvPr/>
+        </p:nvSpPr>
+        <p:spPr>
+          <a:xfrm>
             <a:off x="640080" y="1755648"/>
-            <a:ext cx="10963656" cy="4279392"/>
+            <a:ext cx="9226296" cy="4279392"/>
           </a:xfrm>
           <a:prstGeom prst="rect">
             <a:avLst/>
@@ -5927,7 +6078,7 @@
       </p:sp>
       <p:sp>
         <p:nvSpPr>
-          <p:cNvPr id="6" name="Text 4"/>
+          <p:cNvPr id="10" name="Text 8"/>
           <p:cNvSpPr/>
           <p:nvPr/>
         </p:nvSpPr>
@@ -6681,8 +6832,159 @@
         </p:nvSpPr>
         <p:spPr>
           <a:xfrm>
+            <a:off x="10140696" y="1280160"/>
+            <a:ext cx="1481328" cy="201168"/>
+          </a:xfrm>
+          <a:prstGeom prst="rect">
+            <a:avLst/>
+          </a:prstGeom>
+          <a:noFill/>
+          <a:ln/>
+        </p:spPr>
+        <p:txBody>
+          <a:bodyPr wrap="square" rtlCol="0" anchor="ctr"/>
+          <a:lstStyle/>
+          <a:p>
+            <a:pPr algn="ctr" indent="0" marL="0">
+              <a:buNone/>
+            </a:pPr>
+            <a:r>
+              <a:rPr lang="en-US" sz="1000" b="1" dirty="0">
+                <a:solidFill>
+                  <a:srgbClr val="1F4C86"/>
+                </a:solidFill>
+                <a:latin typeface="Calibri" pitchFamily="34" charset="0"/>
+                <a:ea typeface="Calibri" pitchFamily="34" charset="-122"/>
+                <a:cs typeface="Calibri" pitchFamily="34" charset="-120"/>
+              </a:rPr>
+              <a:t>OCR for Labels</a:t>
+            </a:r>
+            <a:endParaRPr lang="en-US" sz="1000" dirty="0"/>
+          </a:p>
+        </p:txBody>
+      </p:sp>
+      <p:sp>
+        <p:nvSpPr>
+          <p:cNvPr id="5" name="Shape 3"/>
+          <p:cNvSpPr/>
+          <p:nvPr/>
+        </p:nvSpPr>
+        <p:spPr>
+          <a:xfrm>
+            <a:off x="10264140" y="1499616"/>
+            <a:ext cx="1234440" cy="1234440"/>
+          </a:xfrm>
+          <a:prstGeom prst="rect">
+            <a:avLst/>
+          </a:prstGeom>
+          <a:solidFill>
+            <a:srgbClr val="FFFFFF"/>
+          </a:solidFill>
+          <a:ln w="9525">
+            <a:solidFill>
+              <a:srgbClr val="3674C1"/>
+            </a:solidFill>
+            <a:prstDash val="dash"/>
+          </a:ln>
+        </p:spPr>
+      </p:sp>
+      <p:sp>
+        <p:nvSpPr>
+          <p:cNvPr id="6" name="Text 4"/>
+          <p:cNvSpPr/>
+          <p:nvPr/>
+        </p:nvSpPr>
+        <p:spPr>
+          <a:xfrm>
+            <a:off x="10264140" y="1499616"/>
+            <a:ext cx="1234440" cy="1234440"/>
+          </a:xfrm>
+          <a:prstGeom prst="rect">
+            <a:avLst/>
+          </a:prstGeom>
+          <a:noFill/>
+          <a:ln/>
+        </p:spPr>
+        <p:txBody>
+          <a:bodyPr wrap="square" rtlCol="0" anchor="ctr"/>
+          <a:lstStyle/>
+          <a:p>
+            <a:pPr algn="ctr" indent="0" marL="0">
+              <a:buNone/>
+            </a:pPr>
+            <a:r>
+              <a:rPr lang="en-US" sz="1100" dirty="0">
+                <a:solidFill>
+                  <a:srgbClr val="3674C1"/>
+                </a:solidFill>
+                <a:latin typeface="Calibri" pitchFamily="34" charset="0"/>
+                <a:ea typeface="Calibri" pitchFamily="34" charset="-122"/>
+                <a:cs typeface="Calibri" pitchFamily="34" charset="-120"/>
+              </a:rPr>
+              <a:t>QR</a:t>
+            </a:r>
+            <a:endParaRPr lang="en-US" sz="1100" dirty="0"/>
+          </a:p>
+        </p:txBody>
+      </p:sp>
+      <p:sp>
+        <p:nvSpPr>
+          <p:cNvPr id="7" name="Text 5">
+            <a:hlinkClick r:id="rId1" tooltip=""/>
+          </p:cNvPr>
+          <p:cNvSpPr/>
+          <p:nvPr/>
+        </p:nvSpPr>
+        <p:spPr>
+          <a:xfrm>
+            <a:off x="10140696" y="2770632"/>
+            <a:ext cx="1481328" cy="310896"/>
+          </a:xfrm>
+          <a:prstGeom prst="rect">
+            <a:avLst/>
+          </a:prstGeom>
+          <a:noFill/>
+          <a:ln/>
+        </p:spPr>
+        <p:txBody>
+          <a:bodyPr wrap="square" rtlCol="0" anchor="ctr"/>
+          <a:lstStyle/>
+          <a:p>
+            <a:pPr algn="ctr" indent="0" marL="0">
+              <a:buNone/>
+            </a:pPr>
+            <a:r>
+              <a:rPr lang="en-US" sz="750" u="sng" dirty="0">
+                <a:solidFill>
+                  <a:srgbClr val="5A6675"/>
+                </a:solidFill>
+                <a:latin typeface="Calibri" pitchFamily="34" charset="0"/>
+                <a:ea typeface="Calibri" pitchFamily="34" charset="-122"/>
+                <a:cs typeface="Calibri" pitchFamily="34" charset="-120"/>
+                <a:hlinkClick r:id="rId1" invalidUrl="" action="" tgtFrame="" tooltip="" history="1" highlightClick="0" endSnd="0">
+                  <a:extLst>
+                    <a:ext uri="{A12FA001-AC4F-418D-AE19-62706E023703}">
+                      <ahyp:hlinkClr xmlns:ahyp="http://schemas.microsoft.com/office/drawing/2018/hyperlinkcolor" val="tx"/>
+                    </a:ext>
+                  </a:extLst>
+                </a:hlinkClick>
+              </a:rPr>
+              <a:t>github.com/uw-loci/qupath-extension-ocr4labels</a:t>
+            </a:r>
+            <a:endParaRPr lang="en-US" sz="750" dirty="0"/>
+          </a:p>
+        </p:txBody>
+      </p:sp>
+      <p:sp>
+        <p:nvSpPr>
+          <p:cNvPr id="8" name="Text 6"/>
+          <p:cNvSpPr/>
+          <p:nvPr/>
+        </p:nvSpPr>
+        <p:spPr>
+          <a:xfrm>
             <a:off x="640080" y="1481328"/>
-            <a:ext cx="10963656" cy="4553712"/>
+            <a:ext cx="9226296" cy="4553712"/>
           </a:xfrm>
           <a:prstGeom prst="rect">
             <a:avLst/>
@@ -6793,7 +7095,7 @@
       </p:sp>
       <p:sp>
         <p:nvSpPr>
-          <p:cNvPr id="5" name="Shape 3"/>
+          <p:cNvPr id="9" name="Shape 7"/>
           <p:cNvSpPr/>
           <p:nvPr/>
         </p:nvSpPr>
@@ -6818,7 +7120,7 @@
       </p:sp>
       <p:sp>
         <p:nvSpPr>
-          <p:cNvPr id="6" name="Text 4"/>
+          <p:cNvPr id="10" name="Text 8"/>
           <p:cNvSpPr/>
           <p:nvPr/>
         </p:nvSpPr>
@@ -6857,7 +7159,7 @@
       </p:sp>
       <p:sp>
         <p:nvSpPr>
-          <p:cNvPr id="7" name="Text 5"/>
+          <p:cNvPr id="11" name="Text 9"/>
           <p:cNvSpPr/>
           <p:nvPr/>
         </p:nvSpPr>
@@ -7032,8 +7334,159 @@
         </p:nvSpPr>
         <p:spPr>
           <a:xfrm>
+            <a:off x="10140696" y="1316736"/>
+            <a:ext cx="1481328" cy="201168"/>
+          </a:xfrm>
+          <a:prstGeom prst="rect">
+            <a:avLst/>
+          </a:prstGeom>
+          <a:noFill/>
+          <a:ln/>
+        </p:spPr>
+        <p:txBody>
+          <a:bodyPr wrap="square" rtlCol="0" anchor="ctr"/>
+          <a:lstStyle/>
+          <a:p>
+            <a:pPr algn="ctr" indent="0" marL="0">
+              <a:buNone/>
+            </a:pPr>
+            <a:r>
+              <a:rPr lang="en-US" sz="1000" b="1" dirty="0">
+                <a:solidFill>
+                  <a:srgbClr val="1F4C86"/>
+                </a:solidFill>
+                <a:latin typeface="Calibri" pitchFamily="34" charset="0"/>
+                <a:ea typeface="Calibri" pitchFamily="34" charset="-122"/>
+                <a:cs typeface="Calibri" pitchFamily="34" charset="-120"/>
+              </a:rPr>
+              <a:t>Metadata Browser</a:t>
+            </a:r>
+            <a:endParaRPr lang="en-US" sz="1000" dirty="0"/>
+          </a:p>
+        </p:txBody>
+      </p:sp>
+      <p:sp>
+        <p:nvSpPr>
+          <p:cNvPr id="6" name="Shape 4"/>
+          <p:cNvSpPr/>
+          <p:nvPr/>
+        </p:nvSpPr>
+        <p:spPr>
+          <a:xfrm>
+            <a:off x="10264140" y="1536192"/>
+            <a:ext cx="1234440" cy="1234440"/>
+          </a:xfrm>
+          <a:prstGeom prst="rect">
+            <a:avLst/>
+          </a:prstGeom>
+          <a:solidFill>
+            <a:srgbClr val="FFFFFF"/>
+          </a:solidFill>
+          <a:ln w="9525">
+            <a:solidFill>
+              <a:srgbClr val="3674C1"/>
+            </a:solidFill>
+            <a:prstDash val="dash"/>
+          </a:ln>
+        </p:spPr>
+      </p:sp>
+      <p:sp>
+        <p:nvSpPr>
+          <p:cNvPr id="7" name="Text 5"/>
+          <p:cNvSpPr/>
+          <p:nvPr/>
+        </p:nvSpPr>
+        <p:spPr>
+          <a:xfrm>
+            <a:off x="10264140" y="1536192"/>
+            <a:ext cx="1234440" cy="1234440"/>
+          </a:xfrm>
+          <a:prstGeom prst="rect">
+            <a:avLst/>
+          </a:prstGeom>
+          <a:noFill/>
+          <a:ln/>
+        </p:spPr>
+        <p:txBody>
+          <a:bodyPr wrap="square" rtlCol="0" anchor="ctr"/>
+          <a:lstStyle/>
+          <a:p>
+            <a:pPr algn="ctr" indent="0" marL="0">
+              <a:buNone/>
+            </a:pPr>
+            <a:r>
+              <a:rPr lang="en-US" sz="1100" dirty="0">
+                <a:solidFill>
+                  <a:srgbClr val="3674C1"/>
+                </a:solidFill>
+                <a:latin typeface="Calibri" pitchFamily="34" charset="0"/>
+                <a:ea typeface="Calibri" pitchFamily="34" charset="-122"/>
+                <a:cs typeface="Calibri" pitchFamily="34" charset="-120"/>
+              </a:rPr>
+              <a:t>QR</a:t>
+            </a:r>
+            <a:endParaRPr lang="en-US" sz="1100" dirty="0"/>
+          </a:p>
+        </p:txBody>
+      </p:sp>
+      <p:sp>
+        <p:nvSpPr>
+          <p:cNvPr id="8" name="Text 6">
+            <a:hlinkClick r:id="rId1" tooltip=""/>
+          </p:cNvPr>
+          <p:cNvSpPr/>
+          <p:nvPr/>
+        </p:nvSpPr>
+        <p:spPr>
+          <a:xfrm>
+            <a:off x="10140696" y="2807208"/>
+            <a:ext cx="1481328" cy="310896"/>
+          </a:xfrm>
+          <a:prstGeom prst="rect">
+            <a:avLst/>
+          </a:prstGeom>
+          <a:noFill/>
+          <a:ln/>
+        </p:spPr>
+        <p:txBody>
+          <a:bodyPr wrap="square" rtlCol="0" anchor="ctr"/>
+          <a:lstStyle/>
+          <a:p>
+            <a:pPr algn="ctr" indent="0" marL="0">
+              <a:buNone/>
+            </a:pPr>
+            <a:r>
+              <a:rPr lang="en-US" sz="750" u="sng" dirty="0">
+                <a:solidFill>
+                  <a:srgbClr val="5A6675"/>
+                </a:solidFill>
+                <a:latin typeface="Calibri" pitchFamily="34" charset="0"/>
+                <a:ea typeface="Calibri" pitchFamily="34" charset="-122"/>
+                <a:cs typeface="Calibri" pitchFamily="34" charset="-120"/>
+                <a:hlinkClick r:id="rId1" invalidUrl="" action="" tgtFrame="" tooltip="" history="1" highlightClick="0" endSnd="0">
+                  <a:extLst>
+                    <a:ext uri="{A12FA001-AC4F-418D-AE19-62706E023703}">
+                      <ahyp:hlinkClr xmlns:ahyp="http://schemas.microsoft.com/office/drawing/2018/hyperlinkcolor" val="tx"/>
+                    </a:ext>
+                  </a:extLst>
+                </a:hlinkClick>
+              </a:rPr>
+              <a:t>github.com/uw-loci/qupath-extension-project-metadata-browser</a:t>
+            </a:r>
+            <a:endParaRPr lang="en-US" sz="750" dirty="0"/>
+          </a:p>
+        </p:txBody>
+      </p:sp>
+      <p:sp>
+        <p:nvSpPr>
+          <p:cNvPr id="9" name="Text 7"/>
+          <p:cNvSpPr/>
+          <p:nvPr/>
+        </p:nvSpPr>
+        <p:spPr>
+          <a:xfrm>
             <a:off x="640080" y="1755648"/>
-            <a:ext cx="10963656" cy="4279392"/>
+            <a:ext cx="9226296" cy="4279392"/>
           </a:xfrm>
           <a:prstGeom prst="rect">
             <a:avLst/>
@@ -7144,7 +7597,7 @@
       </p:sp>
       <p:sp>
         <p:nvSpPr>
-          <p:cNvPr id="6" name="Shape 4"/>
+          <p:cNvPr id="10" name="Shape 8"/>
           <p:cNvSpPr/>
           <p:nvPr/>
         </p:nvSpPr>
@@ -7169,7 +7622,7 @@
       </p:sp>
       <p:sp>
         <p:nvSpPr>
-          <p:cNvPr id="7" name="Text 5"/>
+          <p:cNvPr id="11" name="Text 9"/>
           <p:cNvSpPr/>
           <p:nvPr/>
         </p:nvSpPr>
@@ -7208,7 +7661,7 @@
       </p:sp>
       <p:sp>
         <p:nvSpPr>
-          <p:cNvPr id="8" name="Text 6"/>
+          <p:cNvPr id="12" name="Text 10"/>
           <p:cNvSpPr/>
           <p:nvPr/>
         </p:nvSpPr>
@@ -7344,8 +7797,159 @@
         </p:nvSpPr>
         <p:spPr>
           <a:xfrm>
+            <a:off x="10140696" y="1280160"/>
+            <a:ext cx="1481328" cy="201168"/>
+          </a:xfrm>
+          <a:prstGeom prst="rect">
+            <a:avLst/>
+          </a:prstGeom>
+          <a:noFill/>
+          <a:ln/>
+        </p:spPr>
+        <p:txBody>
+          <a:bodyPr wrap="square" rtlCol="0" anchor="ctr"/>
+          <a:lstStyle/>
+          <a:p>
+            <a:pPr algn="ctr" indent="0" marL="0">
+              <a:buNone/>
+            </a:pPr>
+            <a:r>
+              <a:rPr lang="en-US" sz="1000" b="1" dirty="0">
+                <a:solidFill>
+                  <a:srgbClr val="1F4C86"/>
+                </a:solidFill>
+                <a:latin typeface="Calibri" pitchFamily="34" charset="0"/>
+                <a:ea typeface="Calibri" pitchFamily="34" charset="-122"/>
+                <a:cs typeface="Calibri" pitchFamily="34" charset="-120"/>
+              </a:rPr>
+              <a:t>Class Distribution</a:t>
+            </a:r>
+            <a:endParaRPr lang="en-US" sz="1000" dirty="0"/>
+          </a:p>
+        </p:txBody>
+      </p:sp>
+      <p:sp>
+        <p:nvSpPr>
+          <p:cNvPr id="5" name="Shape 3"/>
+          <p:cNvSpPr/>
+          <p:nvPr/>
+        </p:nvSpPr>
+        <p:spPr>
+          <a:xfrm>
+            <a:off x="10264140" y="1499616"/>
+            <a:ext cx="1234440" cy="1234440"/>
+          </a:xfrm>
+          <a:prstGeom prst="rect">
+            <a:avLst/>
+          </a:prstGeom>
+          <a:solidFill>
+            <a:srgbClr val="FFFFFF"/>
+          </a:solidFill>
+          <a:ln w="9525">
+            <a:solidFill>
+              <a:srgbClr val="3674C1"/>
+            </a:solidFill>
+            <a:prstDash val="dash"/>
+          </a:ln>
+        </p:spPr>
+      </p:sp>
+      <p:sp>
+        <p:nvSpPr>
+          <p:cNvPr id="6" name="Text 4"/>
+          <p:cNvSpPr/>
+          <p:nvPr/>
+        </p:nvSpPr>
+        <p:spPr>
+          <a:xfrm>
+            <a:off x="10264140" y="1499616"/>
+            <a:ext cx="1234440" cy="1234440"/>
+          </a:xfrm>
+          <a:prstGeom prst="rect">
+            <a:avLst/>
+          </a:prstGeom>
+          <a:noFill/>
+          <a:ln/>
+        </p:spPr>
+        <p:txBody>
+          <a:bodyPr wrap="square" rtlCol="0" anchor="ctr"/>
+          <a:lstStyle/>
+          <a:p>
+            <a:pPr algn="ctr" indent="0" marL="0">
+              <a:buNone/>
+            </a:pPr>
+            <a:r>
+              <a:rPr lang="en-US" sz="1100" dirty="0">
+                <a:solidFill>
+                  <a:srgbClr val="3674C1"/>
+                </a:solidFill>
+                <a:latin typeface="Calibri" pitchFamily="34" charset="0"/>
+                <a:ea typeface="Calibri" pitchFamily="34" charset="-122"/>
+                <a:cs typeface="Calibri" pitchFamily="34" charset="-120"/>
+              </a:rPr>
+              <a:t>QR</a:t>
+            </a:r>
+            <a:endParaRPr lang="en-US" sz="1100" dirty="0"/>
+          </a:p>
+        </p:txBody>
+      </p:sp>
+      <p:sp>
+        <p:nvSpPr>
+          <p:cNvPr id="7" name="Text 5">
+            <a:hlinkClick r:id="rId1" tooltip=""/>
+          </p:cNvPr>
+          <p:cNvSpPr/>
+          <p:nvPr/>
+        </p:nvSpPr>
+        <p:spPr>
+          <a:xfrm>
+            <a:off x="10140696" y="2770632"/>
+            <a:ext cx="1481328" cy="310896"/>
+          </a:xfrm>
+          <a:prstGeom prst="rect">
+            <a:avLst/>
+          </a:prstGeom>
+          <a:noFill/>
+          <a:ln/>
+        </p:spPr>
+        <p:txBody>
+          <a:bodyPr wrap="square" rtlCol="0" anchor="ctr"/>
+          <a:lstStyle/>
+          <a:p>
+            <a:pPr algn="ctr" indent="0" marL="0">
+              <a:buNone/>
+            </a:pPr>
+            <a:r>
+              <a:rPr lang="en-US" sz="750" u="sng" dirty="0">
+                <a:solidFill>
+                  <a:srgbClr val="5A6675"/>
+                </a:solidFill>
+                <a:latin typeface="Calibri" pitchFamily="34" charset="0"/>
+                <a:ea typeface="Calibri" pitchFamily="34" charset="-122"/>
+                <a:cs typeface="Calibri" pitchFamily="34" charset="-120"/>
+                <a:hlinkClick r:id="rId1" invalidUrl="" action="" tgtFrame="" tooltip="" history="1" highlightClick="0" endSnd="0">
+                  <a:extLst>
+                    <a:ext uri="{A12FA001-AC4F-418D-AE19-62706E023703}">
+                      <ahyp:hlinkClr xmlns:ahyp="http://schemas.microsoft.com/office/drawing/2018/hyperlinkcolor" val="tx"/>
+                    </a:ext>
+                  </a:extLst>
+                </a:hlinkClick>
+              </a:rPr>
+              <a:t>github.com/uw-loci/qupath-extension-class-distribution</a:t>
+            </a:r>
+            <a:endParaRPr lang="en-US" sz="750" dirty="0"/>
+          </a:p>
+        </p:txBody>
+      </p:sp>
+      <p:sp>
+        <p:nvSpPr>
+          <p:cNvPr id="8" name="Text 6"/>
+          <p:cNvSpPr/>
+          <p:nvPr/>
+        </p:nvSpPr>
+        <p:spPr>
+          <a:xfrm>
             <a:off x="640080" y="1481328"/>
-            <a:ext cx="10963656" cy="4553712"/>
+            <a:ext cx="9226296" cy="4553712"/>
           </a:xfrm>
           <a:prstGeom prst="rect">
             <a:avLst/>
@@ -7456,7 +8060,7 @@
       </p:sp>
       <p:sp>
         <p:nvSpPr>
-          <p:cNvPr id="5" name="Shape 3"/>
+          <p:cNvPr id="9" name="Shape 7"/>
           <p:cNvSpPr/>
           <p:nvPr/>
         </p:nvSpPr>
@@ -7481,7 +8085,7 @@
       </p:sp>
       <p:sp>
         <p:nvSpPr>
-          <p:cNvPr id="6" name="Text 4"/>
+          <p:cNvPr id="10" name="Text 8"/>
           <p:cNvSpPr/>
           <p:nvPr/>
         </p:nvSpPr>
@@ -7520,7 +8124,7 @@
       </p:sp>
       <p:sp>
         <p:nvSpPr>
-          <p:cNvPr id="7" name="Text 5"/>
+          <p:cNvPr id="11" name="Text 9"/>
           <p:cNvSpPr/>
           <p:nvPr/>
         </p:nvSpPr>
@@ -8331,8 +8935,8 @@
         </p:nvSpPr>
         <p:spPr>
           <a:xfrm>
-            <a:off x="566928" y="1572768"/>
-            <a:ext cx="11055096" cy="2240280"/>
+            <a:off x="566928" y="1517904"/>
+            <a:ext cx="11055096" cy="1755648"/>
           </a:xfrm>
           <a:prstGeom prst="rect">
             <a:avLst/>
@@ -8351,8 +8955,8 @@
         </p:nvSpPr>
         <p:spPr>
           <a:xfrm>
-            <a:off x="566928" y="1572768"/>
-            <a:ext cx="146304" cy="2240280"/>
+            <a:off x="566928" y="1517904"/>
+            <a:ext cx="146304" cy="1755648"/>
           </a:xfrm>
           <a:prstGeom prst="rect">
             <a:avLst/>
@@ -8371,8 +8975,8 @@
         </p:nvSpPr>
         <p:spPr>
           <a:xfrm>
-            <a:off x="978408" y="1737360"/>
-            <a:ext cx="10232136" cy="365760"/>
+            <a:off x="978408" y="1645920"/>
+            <a:ext cx="10232136" cy="310896"/>
           </a:xfrm>
           <a:prstGeom prst="rect">
             <a:avLst/>
@@ -8388,7 +8992,7 @@
               <a:buNone/>
             </a:pPr>
             <a:r>
-              <a:rPr lang="en-US" sz="1600" b="1" spc="150" kern="0" dirty="0">
+              <a:rPr lang="en-US" sz="1500" b="1" spc="150" kern="0" dirty="0">
                 <a:solidFill>
                   <a:srgbClr val="3674C1"/>
                 </a:solidFill>
@@ -8396,9 +9000,9 @@
                 <a:ea typeface="Calibri" pitchFamily="34" charset="-122"/>
                 <a:cs typeface="Calibri" pitchFamily="34" charset="-120"/>
               </a:rPr>
-              <a:t>Sample data</a:t>
-            </a:r>
-            <a:endParaRPr lang="en-US" sz="1600" dirty="0"/>
+              <a:t>LOCI</a:t>
+            </a:r>
+            <a:endParaRPr lang="en-US" sz="1500" dirty="0"/>
           </a:p>
         </p:txBody>
       </p:sp>
@@ -8410,8 +9014,8 @@
         </p:nvSpPr>
         <p:spPr>
           <a:xfrm>
-            <a:off x="978408" y="2103120"/>
-            <a:ext cx="10232136" cy="566928"/>
+            <a:off x="978408" y="1938528"/>
+            <a:ext cx="10232136" cy="530352"/>
           </a:xfrm>
           <a:prstGeom prst="rect">
             <a:avLst/>
@@ -8427,7 +9031,7 @@
               <a:buNone/>
             </a:pPr>
             <a:r>
-              <a:rPr lang="en-US" sz="3200" b="1" dirty="0">
+              <a:rPr lang="en-US" sz="3000" b="1" dirty="0">
                 <a:solidFill>
                   <a:srgbClr val="1F4C86"/>
                 </a:solidFill>
@@ -8435,9 +9039,9 @@
                 <a:ea typeface="Trebuchet MS" pitchFamily="34" charset="-122"/>
                 <a:cs typeface="Trebuchet MS" pitchFamily="34" charset="-120"/>
               </a:rPr>
-              <a:t>Sara McArdle  ·  Zbigniew Mikulski</a:t>
-            </a:r>
-            <a:endParaRPr lang="en-US" sz="3200" dirty="0"/>
+              <a:t>The lab, and Kevin Eliceiri</a:t>
+            </a:r>
+            <a:endParaRPr lang="en-US" sz="3000" dirty="0"/>
           </a:p>
         </p:txBody>
       </p:sp>
@@ -8449,47 +9053,8 @@
         </p:nvSpPr>
         <p:spPr>
           <a:xfrm>
-            <a:off x="978408" y="2670048"/>
-            <a:ext cx="10232136" cy="384048"/>
-          </a:xfrm>
-          <a:prstGeom prst="rect">
-            <a:avLst/>
-          </a:prstGeom>
-          <a:noFill/>
-          <a:ln/>
-        </p:spPr>
-        <p:txBody>
-          <a:bodyPr wrap="square" rtlCol="0" anchor="ctr"/>
-          <a:lstStyle/>
-          <a:p>
-            <a:pPr indent="0" marL="0">
-              <a:buNone/>
-            </a:pPr>
-            <a:r>
-              <a:rPr lang="en-US" sz="2100" dirty="0">
-                <a:solidFill>
-                  <a:srgbClr val="1F2933"/>
-                </a:solidFill>
-                <a:latin typeface="Calibri" pitchFamily="34" charset="0"/>
-                <a:ea typeface="Calibri" pitchFamily="34" charset="-122"/>
-                <a:cs typeface="Calibri" pitchFamily="34" charset="-120"/>
-              </a:rPr>
-              <a:t>La Jolla Institute for Immunology</a:t>
-            </a:r>
-            <a:endParaRPr lang="en-US" sz="2100" dirty="0"/>
-          </a:p>
-        </p:txBody>
-      </p:sp>
-      <p:sp>
-        <p:nvSpPr>
-          <p:cNvPr id="9" name="Text 7"/>
-          <p:cNvSpPr/>
-          <p:nvPr/>
-        </p:nvSpPr>
-        <p:spPr>
-          <a:xfrm>
-            <a:off x="978408" y="3054096"/>
-            <a:ext cx="10232136" cy="731520"/>
+            <a:off x="978408" y="2487168"/>
+            <a:ext cx="10232136" cy="694944"/>
           </a:xfrm>
           <a:prstGeom prst="rect">
             <a:avLst/>
@@ -8516,42 +9081,22 @@
                 <a:ea typeface="Calibri" pitchFamily="34" charset="-122"/>
                 <a:cs typeface="Calibri" pitchFamily="34" charset="-120"/>
               </a:rPr>
-              <a:t>They provided the slide-label images behind the OCR and metadata exercises.</a:t>
+              <a:t>For a genuinely collaborative lab, and for backing work on QuPath that sits well outside my job description.</a:t>
             </a:r>
             <a:endParaRPr lang="en-US" sz="1700" dirty="0"/>
           </a:p>
-          <a:p>
-            <a:pPr indent="0" marL="0">
-              <a:lnSpc>
-                <a:spcPct val="110000"/>
-              </a:lnSpc>
-              <a:buNone/>
-            </a:pPr>
-            <a:r>
-              <a:rPr lang="en-US" sz="1700" i="1" dirty="0">
-                <a:solidFill>
-                  <a:srgbClr val="5A6675"/>
-                </a:solidFill>
-                <a:latin typeface="Calibri" pitchFamily="34" charset="0"/>
-                <a:ea typeface="Calibri" pitchFamily="34" charset="-122"/>
-                <a:cs typeface="Calibri" pitchFamily="34" charset="-120"/>
-              </a:rPr>
-              <a:t>Other data today: public images, a CC0 synthetic set, and tiles acquired at LOCI.</a:t>
-            </a:r>
-            <a:endParaRPr lang="en-US" sz="1700" dirty="0"/>
-          </a:p>
-        </p:txBody>
-      </p:sp>
-      <p:sp>
-        <p:nvSpPr>
-          <p:cNvPr id="10" name="Text 8"/>
-          <p:cNvSpPr/>
-          <p:nvPr/>
-        </p:nvSpPr>
-        <p:spPr>
-          <a:xfrm>
-            <a:off x="566928" y="3977640"/>
-            <a:ext cx="11055096" cy="2103120"/>
+        </p:txBody>
+      </p:sp>
+      <p:sp>
+        <p:nvSpPr>
+          <p:cNvPr id="9" name="Text 7"/>
+          <p:cNvSpPr/>
+          <p:nvPr/>
+        </p:nvSpPr>
+        <p:spPr>
+          <a:xfrm>
+            <a:off x="566928" y="3419856"/>
+            <a:ext cx="11055096" cy="2743200"/>
           </a:xfrm>
           <a:prstGeom prst="rect">
             <a:avLst/>
@@ -8565,12 +9110,30 @@
           <a:p>
             <a:pPr indent="0" marL="0">
               <a:spcAft>
-                <a:spcPts val="1000"/>
+                <a:spcPts val="900"/>
               </a:spcAft>
               <a:buNone/>
             </a:pPr>
             <a:r>
-              <a:rPr lang="en-US" sz="1700" dirty="0">
+              <a:rPr lang="en-US" sz="1600" dirty="0">
+                <a:solidFill>
+                  <a:srgbClr val="1F2933"/>
+                </a:solidFill>
+                <a:latin typeface="Calibri" pitchFamily="34" charset="0"/>
+                <a:ea typeface="Calibri" pitchFamily="34" charset="-122"/>
+                <a:cs typeface="Calibri" pitchFamily="34" charset="-120"/>
+              </a:rPr>
+              <a:t>Sample data: Sara McArdle and Zbigniew Mikulski, La Jolla Institute for Immunology, who provided the slide-label images behind the OCR and metadata exercises. Other data today: public images, a CC0 synthetic set, and tiles acquired at LOCI.
+</a:t>
+            </a:r>
+            <a:pPr indent="0" marL="0">
+              <a:spcAft>
+                <a:spcPts val="900"/>
+              </a:spcAft>
+              <a:buNone/>
+            </a:pPr>
+            <a:r>
+              <a:rPr lang="en-US" sz="1600" dirty="0">
                 <a:solidFill>
                   <a:srgbClr val="1F2933"/>
                 </a:solidFill>
@@ -8583,12 +9146,12 @@
             </a:r>
             <a:pPr indent="0" marL="0">
               <a:spcAft>
-                <a:spcPts val="1000"/>
+                <a:spcPts val="900"/>
               </a:spcAft>
               <a:buNone/>
             </a:pPr>
             <a:r>
-              <a:rPr lang="en-US" sz="1700" dirty="0">
+              <a:rPr lang="en-US" sz="1600" dirty="0">
                 <a:solidFill>
                   <a:srgbClr val="1F2933"/>
                 </a:solidFill>
@@ -8601,12 +9164,12 @@
             </a:r>
             <a:pPr indent="0" marL="0">
               <a:spcAft>
-                <a:spcPts val="1000"/>
+                <a:spcPts val="900"/>
               </a:spcAft>
               <a:buNone/>
             </a:pPr>
             <a:r>
-              <a:rPr lang="en-US" sz="1700" dirty="0">
+              <a:rPr lang="en-US" sz="1600" dirty="0">
                 <a:solidFill>
                   <a:srgbClr val="1F2933"/>
                 </a:solidFill>
@@ -8621,7 +9184,7 @@
               <a:buNone/>
             </a:pPr>
             <a:r>
-              <a:rPr lang="en-US" sz="1700" b="1" dirty="0">
+              <a:rPr lang="en-US" sz="1600" b="1" dirty="0">
                 <a:solidFill>
                   <a:srgbClr val="1F4C86"/>
                 </a:solidFill>
@@ -8631,13 +9194,13 @@
               </a:rPr>
               <a:t>Full credits: michaelsnelson.github.io/BINA-I2K-2026-QuPath-Extensions/docs/acknowledgements.html</a:t>
             </a:r>
-            <a:endParaRPr lang="en-US" sz="1700" dirty="0"/>
-          </a:p>
-        </p:txBody>
-      </p:sp>
-      <p:sp>
-        <p:nvSpPr>
-          <p:cNvPr id="11" name="Text 9"/>
+            <a:endParaRPr lang="en-US" sz="1600" dirty="0"/>
+          </a:p>
+        </p:txBody>
+      </p:sp>
+      <p:sp>
+        <p:nvSpPr>
+          <p:cNvPr id="10" name="Text 8"/>
           <p:cNvSpPr/>
           <p:nvPr/>
         </p:nvSpPr>
@@ -9107,7 +9670,7 @@
                 <a:ea typeface="Calibri" pitchFamily="34" charset="-122"/>
                 <a:cs typeface="Calibri" pitchFamily="34" charset="-120"/>
               </a:rPr>
-              <a:t>Placed where the stage said it was</a:t>
+              <a:t>Stitched on the stage’s own coordinates</a:t>
             </a:r>
             <a:endParaRPr lang="en-US" sz="1700" dirty="0"/>
           </a:p>
@@ -9130,7 +9693,7 @@
         <p:spPr>
           <a:xfrm>
             <a:off x="768096" y="1783080"/>
-            <a:ext cx="5120640" cy="4118776"/>
+            <a:ext cx="5120640" cy="3925824"/>
           </a:xfrm>
           <a:prstGeom prst="rect">
             <a:avLst/>
@@ -9170,7 +9733,7 @@
                 <a:ea typeface="Calibri" pitchFamily="34" charset="-122"/>
                 <a:cs typeface="Calibri" pitchFamily="34" charset="-120"/>
               </a:rPr>
-              <a:t>Placed where the image content says it is</a:t>
+              <a:t>Stitched on positions measured from the image</a:t>
             </a:r>
             <a:endParaRPr lang="en-US" sz="1700" dirty="0"/>
           </a:p>
@@ -9193,7 +9756,7 @@
         <p:spPr>
           <a:xfrm>
             <a:off x="6300216" y="1783080"/>
-            <a:ext cx="5120640" cy="4118776"/>
+            <a:ext cx="5120640" cy="3925824"/>
           </a:xfrm>
           <a:prstGeom prst="rect">
             <a:avLst/>
@@ -9208,7 +9771,7 @@
         </p:nvSpPr>
         <p:spPr>
           <a:xfrm>
-            <a:off x="566928" y="6011584"/>
+            <a:off x="566928" y="5818632"/>
             <a:ext cx="11055096" cy="566928"/>
           </a:xfrm>
           <a:prstGeom prst="rect">
@@ -9233,7 +9796,7 @@
                 <a:ea typeface="Calibri" pitchFamily="34" charset="-122"/>
                 <a:cs typeface="Calibri" pitchFamily="34" charset="-120"/>
               </a:rPr>
-              <a:t>The same join through the same cells; only the tile positions differ. Positions were measured on DAPI, the channel with the clearest, best separated structure in this sample, and reused unchanged for the other two channels — so every channel stays aligned with every other. Nuclei blue, actin green, mitochondria red; the correction here is 7 px, about 4.6 µm.</a:t>
+              <a:t>Both panels are Tiles to Pyramid’s own output, at the same place in the same overlap. The stage was about 5 px out; because the tiles are feathered together, that error does not show up as a seam, it shows up as blur — smeared puncta and soft filaments on the left, crisp on the right. Positions were solved once on DAPI and reused unchanged for green and red.</a:t>
             </a:r>
             <a:endParaRPr lang="en-US" sz="1500" dirty="0"/>
           </a:p>
@@ -9711,8 +10274,159 @@
         </p:nvSpPr>
         <p:spPr>
           <a:xfrm>
+            <a:off x="10140696" y="1316736"/>
+            <a:ext cx="1481328" cy="201168"/>
+          </a:xfrm>
+          <a:prstGeom prst="rect">
+            <a:avLst/>
+          </a:prstGeom>
+          <a:noFill/>
+          <a:ln/>
+        </p:spPr>
+        <p:txBody>
+          <a:bodyPr wrap="square" rtlCol="0" anchor="ctr"/>
+          <a:lstStyle/>
+          <a:p>
+            <a:pPr algn="ctr" indent="0" marL="0">
+              <a:buNone/>
+            </a:pPr>
+            <a:r>
+              <a:rPr lang="en-US" sz="1000" b="1" dirty="0">
+                <a:solidFill>
+                  <a:srgbClr val="1F4C86"/>
+                </a:solidFill>
+                <a:latin typeface="Calibri" pitchFamily="34" charset="0"/>
+                <a:ea typeface="Calibri" pitchFamily="34" charset="-122"/>
+                <a:cs typeface="Calibri" pitchFamily="34" charset="-120"/>
+              </a:rPr>
+              <a:t>Tiles to Pyramid</a:t>
+            </a:r>
+            <a:endParaRPr lang="en-US" sz="1000" dirty="0"/>
+          </a:p>
+        </p:txBody>
+      </p:sp>
+      <p:sp>
+        <p:nvSpPr>
+          <p:cNvPr id="6" name="Shape 4"/>
+          <p:cNvSpPr/>
+          <p:nvPr/>
+        </p:nvSpPr>
+        <p:spPr>
+          <a:xfrm>
+            <a:off x="10264140" y="1536192"/>
+            <a:ext cx="1234440" cy="1234440"/>
+          </a:xfrm>
+          <a:prstGeom prst="rect">
+            <a:avLst/>
+          </a:prstGeom>
+          <a:solidFill>
+            <a:srgbClr val="FFFFFF"/>
+          </a:solidFill>
+          <a:ln w="9525">
+            <a:solidFill>
+              <a:srgbClr val="3674C1"/>
+            </a:solidFill>
+            <a:prstDash val="dash"/>
+          </a:ln>
+        </p:spPr>
+      </p:sp>
+      <p:sp>
+        <p:nvSpPr>
+          <p:cNvPr id="7" name="Text 5"/>
+          <p:cNvSpPr/>
+          <p:nvPr/>
+        </p:nvSpPr>
+        <p:spPr>
+          <a:xfrm>
+            <a:off x="10264140" y="1536192"/>
+            <a:ext cx="1234440" cy="1234440"/>
+          </a:xfrm>
+          <a:prstGeom prst="rect">
+            <a:avLst/>
+          </a:prstGeom>
+          <a:noFill/>
+          <a:ln/>
+        </p:spPr>
+        <p:txBody>
+          <a:bodyPr wrap="square" rtlCol="0" anchor="ctr"/>
+          <a:lstStyle/>
+          <a:p>
+            <a:pPr algn="ctr" indent="0" marL="0">
+              <a:buNone/>
+            </a:pPr>
+            <a:r>
+              <a:rPr lang="en-US" sz="1100" dirty="0">
+                <a:solidFill>
+                  <a:srgbClr val="3674C1"/>
+                </a:solidFill>
+                <a:latin typeface="Calibri" pitchFamily="34" charset="0"/>
+                <a:ea typeface="Calibri" pitchFamily="34" charset="-122"/>
+                <a:cs typeface="Calibri" pitchFamily="34" charset="-120"/>
+              </a:rPr>
+              <a:t>QR</a:t>
+            </a:r>
+            <a:endParaRPr lang="en-US" sz="1100" dirty="0"/>
+          </a:p>
+        </p:txBody>
+      </p:sp>
+      <p:sp>
+        <p:nvSpPr>
+          <p:cNvPr id="8" name="Text 6">
+            <a:hlinkClick r:id="rId1" tooltip=""/>
+          </p:cNvPr>
+          <p:cNvSpPr/>
+          <p:nvPr/>
+        </p:nvSpPr>
+        <p:spPr>
+          <a:xfrm>
+            <a:off x="10140696" y="2807208"/>
+            <a:ext cx="1481328" cy="310896"/>
+          </a:xfrm>
+          <a:prstGeom prst="rect">
+            <a:avLst/>
+          </a:prstGeom>
+          <a:noFill/>
+          <a:ln/>
+        </p:spPr>
+        <p:txBody>
+          <a:bodyPr wrap="square" rtlCol="0" anchor="ctr"/>
+          <a:lstStyle/>
+          <a:p>
+            <a:pPr algn="ctr" indent="0" marL="0">
+              <a:buNone/>
+            </a:pPr>
+            <a:r>
+              <a:rPr lang="en-US" sz="750" u="sng" dirty="0">
+                <a:solidFill>
+                  <a:srgbClr val="5A6675"/>
+                </a:solidFill>
+                <a:latin typeface="Calibri" pitchFamily="34" charset="0"/>
+                <a:ea typeface="Calibri" pitchFamily="34" charset="-122"/>
+                <a:cs typeface="Calibri" pitchFamily="34" charset="-120"/>
+                <a:hlinkClick r:id="rId1" invalidUrl="" action="" tgtFrame="" tooltip="" history="1" highlightClick="0" endSnd="0">
+                  <a:extLst>
+                    <a:ext uri="{A12FA001-AC4F-418D-AE19-62706E023703}">
+                      <ahyp:hlinkClr xmlns:ahyp="http://schemas.microsoft.com/office/drawing/2018/hyperlinkcolor" val="tx"/>
+                    </a:ext>
+                  </a:extLst>
+                </a:hlinkClick>
+              </a:rPr>
+              <a:t>github.com/uw-loci/qupath-extension-tiles-to-pyramid</a:t>
+            </a:r>
+            <a:endParaRPr lang="en-US" sz="750" dirty="0"/>
+          </a:p>
+        </p:txBody>
+      </p:sp>
+      <p:sp>
+        <p:nvSpPr>
+          <p:cNvPr id="9" name="Text 7"/>
+          <p:cNvSpPr/>
+          <p:nvPr/>
+        </p:nvSpPr>
+        <p:spPr>
+          <a:xfrm>
             <a:off x="640080" y="1755648"/>
-            <a:ext cx="10963656" cy="4279392"/>
+            <a:ext cx="9226296" cy="4279392"/>
           </a:xfrm>
           <a:prstGeom prst="rect">
             <a:avLst/>
@@ -9847,7 +10561,7 @@
       </p:sp>
       <p:sp>
         <p:nvSpPr>
-          <p:cNvPr id="6" name="Shape 4"/>
+          <p:cNvPr id="10" name="Shape 8"/>
           <p:cNvSpPr/>
           <p:nvPr/>
         </p:nvSpPr>
@@ -9872,7 +10586,7 @@
       </p:sp>
       <p:sp>
         <p:nvSpPr>
-          <p:cNvPr id="7" name="Text 5"/>
+          <p:cNvPr id="11" name="Text 9"/>
           <p:cNvSpPr/>
           <p:nvPr/>
         </p:nvSpPr>
@@ -9911,7 +10625,7 @@
       </p:sp>
       <p:sp>
         <p:nvSpPr>
-          <p:cNvPr id="8" name="Text 6"/>
+          <p:cNvPr id="12" name="Text 10"/>
           <p:cNvSpPr/>
           <p:nvPr/>
         </p:nvSpPr>
@@ -10986,8 +11700,159 @@
         </p:nvSpPr>
         <p:spPr>
           <a:xfrm>
+            <a:off x="10140696" y="1316736"/>
+            <a:ext cx="1481328" cy="201168"/>
+          </a:xfrm>
+          <a:prstGeom prst="rect">
+            <a:avLst/>
+          </a:prstGeom>
+          <a:noFill/>
+          <a:ln/>
+        </p:spPr>
+        <p:txBody>
+          <a:bodyPr wrap="square" rtlCol="0" anchor="ctr"/>
+          <a:lstStyle/>
+          <a:p>
+            <a:pPr algn="ctr" indent="0" marL="0">
+              <a:buNone/>
+            </a:pPr>
+            <a:r>
+              <a:rPr lang="en-US" sz="1000" b="1" dirty="0">
+                <a:solidFill>
+                  <a:srgbClr val="1F4C86"/>
+                </a:solidFill>
+                <a:latin typeface="Calibri" pitchFamily="34" charset="0"/>
+                <a:ea typeface="Calibri" pitchFamily="34" charset="-122"/>
+                <a:cs typeface="Calibri" pitchFamily="34" charset="-120"/>
+              </a:rPr>
+              <a:t>DL Pixel Classifier</a:t>
+            </a:r>
+            <a:endParaRPr lang="en-US" sz="1000" dirty="0"/>
+          </a:p>
+        </p:txBody>
+      </p:sp>
+      <p:sp>
+        <p:nvSpPr>
+          <p:cNvPr id="6" name="Shape 4"/>
+          <p:cNvSpPr/>
+          <p:nvPr/>
+        </p:nvSpPr>
+        <p:spPr>
+          <a:xfrm>
+            <a:off x="10264140" y="1536192"/>
+            <a:ext cx="1234440" cy="1234440"/>
+          </a:xfrm>
+          <a:prstGeom prst="rect">
+            <a:avLst/>
+          </a:prstGeom>
+          <a:solidFill>
+            <a:srgbClr val="FFFFFF"/>
+          </a:solidFill>
+          <a:ln w="9525">
+            <a:solidFill>
+              <a:srgbClr val="3674C1"/>
+            </a:solidFill>
+            <a:prstDash val="dash"/>
+          </a:ln>
+        </p:spPr>
+      </p:sp>
+      <p:sp>
+        <p:nvSpPr>
+          <p:cNvPr id="7" name="Text 5"/>
+          <p:cNvSpPr/>
+          <p:nvPr/>
+        </p:nvSpPr>
+        <p:spPr>
+          <a:xfrm>
+            <a:off x="10264140" y="1536192"/>
+            <a:ext cx="1234440" cy="1234440"/>
+          </a:xfrm>
+          <a:prstGeom prst="rect">
+            <a:avLst/>
+          </a:prstGeom>
+          <a:noFill/>
+          <a:ln/>
+        </p:spPr>
+        <p:txBody>
+          <a:bodyPr wrap="square" rtlCol="0" anchor="ctr"/>
+          <a:lstStyle/>
+          <a:p>
+            <a:pPr algn="ctr" indent="0" marL="0">
+              <a:buNone/>
+            </a:pPr>
+            <a:r>
+              <a:rPr lang="en-US" sz="1100" dirty="0">
+                <a:solidFill>
+                  <a:srgbClr val="3674C1"/>
+                </a:solidFill>
+                <a:latin typeface="Calibri" pitchFamily="34" charset="0"/>
+                <a:ea typeface="Calibri" pitchFamily="34" charset="-122"/>
+                <a:cs typeface="Calibri" pitchFamily="34" charset="-120"/>
+              </a:rPr>
+              <a:t>QR</a:t>
+            </a:r>
+            <a:endParaRPr lang="en-US" sz="1100" dirty="0"/>
+          </a:p>
+        </p:txBody>
+      </p:sp>
+      <p:sp>
+        <p:nvSpPr>
+          <p:cNvPr id="8" name="Text 6">
+            <a:hlinkClick r:id="rId1" tooltip=""/>
+          </p:cNvPr>
+          <p:cNvSpPr/>
+          <p:nvPr/>
+        </p:nvSpPr>
+        <p:spPr>
+          <a:xfrm>
+            <a:off x="10140696" y="2807208"/>
+            <a:ext cx="1481328" cy="310896"/>
+          </a:xfrm>
+          <a:prstGeom prst="rect">
+            <a:avLst/>
+          </a:prstGeom>
+          <a:noFill/>
+          <a:ln/>
+        </p:spPr>
+        <p:txBody>
+          <a:bodyPr wrap="square" rtlCol="0" anchor="ctr"/>
+          <a:lstStyle/>
+          <a:p>
+            <a:pPr algn="ctr" indent="0" marL="0">
+              <a:buNone/>
+            </a:pPr>
+            <a:r>
+              <a:rPr lang="en-US" sz="750" u="sng" dirty="0">
+                <a:solidFill>
+                  <a:srgbClr val="5A6675"/>
+                </a:solidFill>
+                <a:latin typeface="Calibri" pitchFamily="34" charset="0"/>
+                <a:ea typeface="Calibri" pitchFamily="34" charset="-122"/>
+                <a:cs typeface="Calibri" pitchFamily="34" charset="-120"/>
+                <a:hlinkClick r:id="rId1" invalidUrl="" action="" tgtFrame="" tooltip="" history="1" highlightClick="0" endSnd="0">
+                  <a:extLst>
+                    <a:ext uri="{A12FA001-AC4F-418D-AE19-62706E023703}">
+                      <ahyp:hlinkClr xmlns:ahyp="http://schemas.microsoft.com/office/drawing/2018/hyperlinkcolor" val="tx"/>
+                    </a:ext>
+                  </a:extLst>
+                </a:hlinkClick>
+              </a:rPr>
+              <a:t>github.com/uw-loci/qupath-extension-dl-pixel-classifier</a:t>
+            </a:r>
+            <a:endParaRPr lang="en-US" sz="750" dirty="0"/>
+          </a:p>
+        </p:txBody>
+      </p:sp>
+      <p:sp>
+        <p:nvSpPr>
+          <p:cNvPr id="9" name="Text 7"/>
+          <p:cNvSpPr/>
+          <p:nvPr/>
+        </p:nvSpPr>
+        <p:spPr>
+          <a:xfrm>
             <a:off x="640080" y="1755648"/>
-            <a:ext cx="10963656" cy="4279392"/>
+            <a:ext cx="9226296" cy="4279392"/>
           </a:xfrm>
           <a:prstGeom prst="rect">
             <a:avLst/>
@@ -11098,7 +11963,7 @@
       </p:sp>
       <p:sp>
         <p:nvSpPr>
-          <p:cNvPr id="6" name="Text 4"/>
+          <p:cNvPr id="10" name="Text 8"/>
           <p:cNvSpPr/>
           <p:nvPr/>
         </p:nvSpPr>
@@ -11648,8 +12513,310 @@
         </p:nvSpPr>
         <p:spPr>
           <a:xfrm>
+            <a:off x="10140696" y="1316736"/>
+            <a:ext cx="1481328" cy="201168"/>
+          </a:xfrm>
+          <a:prstGeom prst="rect">
+            <a:avLst/>
+          </a:prstGeom>
+          <a:noFill/>
+          <a:ln/>
+        </p:spPr>
+        <p:txBody>
+          <a:bodyPr wrap="square" rtlCol="0" anchor="ctr"/>
+          <a:lstStyle/>
+          <a:p>
+            <a:pPr algn="ctr" indent="0" marL="0">
+              <a:buNone/>
+            </a:pPr>
+            <a:r>
+              <a:rPr lang="en-US" sz="1000" b="1" dirty="0">
+                <a:solidFill>
+                  <a:srgbClr val="1F4C86"/>
+                </a:solidFill>
+                <a:latin typeface="Calibri" pitchFamily="34" charset="0"/>
+                <a:ea typeface="Calibri" pitchFamily="34" charset="-122"/>
+                <a:cs typeface="Calibri" pitchFamily="34" charset="-120"/>
+              </a:rPr>
+              <a:t>QP-CAT</a:t>
+            </a:r>
+            <a:endParaRPr lang="en-US" sz="1000" dirty="0"/>
+          </a:p>
+        </p:txBody>
+      </p:sp>
+      <p:sp>
+        <p:nvSpPr>
+          <p:cNvPr id="6" name="Shape 4"/>
+          <p:cNvSpPr/>
+          <p:nvPr/>
+        </p:nvSpPr>
+        <p:spPr>
+          <a:xfrm>
+            <a:off x="10355580" y="1536192"/>
+            <a:ext cx="1051560" cy="1051560"/>
+          </a:xfrm>
+          <a:prstGeom prst="rect">
+            <a:avLst/>
+          </a:prstGeom>
+          <a:solidFill>
+            <a:srgbClr val="FFFFFF"/>
+          </a:solidFill>
+          <a:ln w="9525">
+            <a:solidFill>
+              <a:srgbClr val="3674C1"/>
+            </a:solidFill>
+            <a:prstDash val="dash"/>
+          </a:ln>
+        </p:spPr>
+      </p:sp>
+      <p:sp>
+        <p:nvSpPr>
+          <p:cNvPr id="7" name="Text 5"/>
+          <p:cNvSpPr/>
+          <p:nvPr/>
+        </p:nvSpPr>
+        <p:spPr>
+          <a:xfrm>
+            <a:off x="10355580" y="1536192"/>
+            <a:ext cx="1051560" cy="1051560"/>
+          </a:xfrm>
+          <a:prstGeom prst="rect">
+            <a:avLst/>
+          </a:prstGeom>
+          <a:noFill/>
+          <a:ln/>
+        </p:spPr>
+        <p:txBody>
+          <a:bodyPr wrap="square" rtlCol="0" anchor="ctr"/>
+          <a:lstStyle/>
+          <a:p>
+            <a:pPr algn="ctr" indent="0" marL="0">
+              <a:buNone/>
+            </a:pPr>
+            <a:r>
+              <a:rPr lang="en-US" sz="1100" dirty="0">
+                <a:solidFill>
+                  <a:srgbClr val="3674C1"/>
+                </a:solidFill>
+                <a:latin typeface="Calibri" pitchFamily="34" charset="0"/>
+                <a:ea typeface="Calibri" pitchFamily="34" charset="-122"/>
+                <a:cs typeface="Calibri" pitchFamily="34" charset="-120"/>
+              </a:rPr>
+              <a:t>QR</a:t>
+            </a:r>
+            <a:endParaRPr lang="en-US" sz="1100" dirty="0"/>
+          </a:p>
+        </p:txBody>
+      </p:sp>
+      <p:sp>
+        <p:nvSpPr>
+          <p:cNvPr id="8" name="Text 6">
+            <a:hlinkClick r:id="rId1" tooltip=""/>
+          </p:cNvPr>
+          <p:cNvSpPr/>
+          <p:nvPr/>
+        </p:nvSpPr>
+        <p:spPr>
+          <a:xfrm>
+            <a:off x="10140696" y="2624328"/>
+            <a:ext cx="1481328" cy="310896"/>
+          </a:xfrm>
+          <a:prstGeom prst="rect">
+            <a:avLst/>
+          </a:prstGeom>
+          <a:noFill/>
+          <a:ln/>
+        </p:spPr>
+        <p:txBody>
+          <a:bodyPr wrap="square" rtlCol="0" anchor="ctr"/>
+          <a:lstStyle/>
+          <a:p>
+            <a:pPr algn="ctr" indent="0" marL="0">
+              <a:buNone/>
+            </a:pPr>
+            <a:r>
+              <a:rPr lang="en-US" sz="750" u="sng" dirty="0">
+                <a:solidFill>
+                  <a:srgbClr val="5A6675"/>
+                </a:solidFill>
+                <a:latin typeface="Calibri" pitchFamily="34" charset="0"/>
+                <a:ea typeface="Calibri" pitchFamily="34" charset="-122"/>
+                <a:cs typeface="Calibri" pitchFamily="34" charset="-120"/>
+                <a:hlinkClick r:id="rId1" invalidUrl="" action="" tgtFrame="" tooltip="" history="1" highlightClick="0" endSnd="0">
+                  <a:extLst>
+                    <a:ext uri="{A12FA001-AC4F-418D-AE19-62706E023703}">
+                      <ahyp:hlinkClr xmlns:ahyp="http://schemas.microsoft.com/office/drawing/2018/hyperlinkcolor" val="tx"/>
+                    </a:ext>
+                  </a:extLst>
+                </a:hlinkClick>
+              </a:rPr>
+              <a:t>github.com/uw-loci/qupath-extension-cell-analysis-tools</a:t>
+            </a:r>
+            <a:endParaRPr lang="en-US" sz="750" dirty="0"/>
+          </a:p>
+        </p:txBody>
+      </p:sp>
+      <p:sp>
+        <p:nvSpPr>
+          <p:cNvPr id="9" name="Text 7"/>
+          <p:cNvSpPr/>
+          <p:nvPr/>
+        </p:nvSpPr>
+        <p:spPr>
+          <a:xfrm>
+            <a:off x="10140696" y="2971800"/>
+            <a:ext cx="1481328" cy="201168"/>
+          </a:xfrm>
+          <a:prstGeom prst="rect">
+            <a:avLst/>
+          </a:prstGeom>
+          <a:noFill/>
+          <a:ln/>
+        </p:spPr>
+        <p:txBody>
+          <a:bodyPr wrap="square" rtlCol="0" anchor="ctr"/>
+          <a:lstStyle/>
+          <a:p>
+            <a:pPr algn="ctr" indent="0" marL="0">
+              <a:buNone/>
+            </a:pPr>
+            <a:r>
+              <a:rPr lang="en-US" sz="1000" b="1" dirty="0">
+                <a:solidFill>
+                  <a:srgbClr val="1F4C86"/>
+                </a:solidFill>
+                <a:latin typeface="Calibri" pitchFamily="34" charset="0"/>
+                <a:ea typeface="Calibri" pitchFamily="34" charset="-122"/>
+                <a:cs typeface="Calibri" pitchFamily="34" charset="-120"/>
+              </a:rPr>
+              <a:t>Cluster 3D Nav</a:t>
+            </a:r>
+            <a:endParaRPr lang="en-US" sz="1000" dirty="0"/>
+          </a:p>
+        </p:txBody>
+      </p:sp>
+      <p:sp>
+        <p:nvSpPr>
+          <p:cNvPr id="10" name="Shape 8"/>
+          <p:cNvSpPr/>
+          <p:nvPr/>
+        </p:nvSpPr>
+        <p:spPr>
+          <a:xfrm>
+            <a:off x="10355580" y="3191256"/>
+            <a:ext cx="1051560" cy="1051560"/>
+          </a:xfrm>
+          <a:prstGeom prst="rect">
+            <a:avLst/>
+          </a:prstGeom>
+          <a:solidFill>
+            <a:srgbClr val="FFFFFF"/>
+          </a:solidFill>
+          <a:ln w="9525">
+            <a:solidFill>
+              <a:srgbClr val="3674C1"/>
+            </a:solidFill>
+            <a:prstDash val="dash"/>
+          </a:ln>
+        </p:spPr>
+      </p:sp>
+      <p:sp>
+        <p:nvSpPr>
+          <p:cNvPr id="11" name="Text 9"/>
+          <p:cNvSpPr/>
+          <p:nvPr/>
+        </p:nvSpPr>
+        <p:spPr>
+          <a:xfrm>
+            <a:off x="10355580" y="3191256"/>
+            <a:ext cx="1051560" cy="1051560"/>
+          </a:xfrm>
+          <a:prstGeom prst="rect">
+            <a:avLst/>
+          </a:prstGeom>
+          <a:noFill/>
+          <a:ln/>
+        </p:spPr>
+        <p:txBody>
+          <a:bodyPr wrap="square" rtlCol="0" anchor="ctr"/>
+          <a:lstStyle/>
+          <a:p>
+            <a:pPr algn="ctr" indent="0" marL="0">
+              <a:buNone/>
+            </a:pPr>
+            <a:r>
+              <a:rPr lang="en-US" sz="1100" dirty="0">
+                <a:solidFill>
+                  <a:srgbClr val="3674C1"/>
+                </a:solidFill>
+                <a:latin typeface="Calibri" pitchFamily="34" charset="0"/>
+                <a:ea typeface="Calibri" pitchFamily="34" charset="-122"/>
+                <a:cs typeface="Calibri" pitchFamily="34" charset="-120"/>
+              </a:rPr>
+              <a:t>QR</a:t>
+            </a:r>
+            <a:endParaRPr lang="en-US" sz="1100" dirty="0"/>
+          </a:p>
+        </p:txBody>
+      </p:sp>
+      <p:sp>
+        <p:nvSpPr>
+          <p:cNvPr id="12" name="Text 10">
+            <a:hlinkClick r:id="rId2" tooltip=""/>
+          </p:cNvPr>
+          <p:cNvSpPr/>
+          <p:nvPr/>
+        </p:nvSpPr>
+        <p:spPr>
+          <a:xfrm>
+            <a:off x="10140696" y="4279392"/>
+            <a:ext cx="1481328" cy="310896"/>
+          </a:xfrm>
+          <a:prstGeom prst="rect">
+            <a:avLst/>
+          </a:prstGeom>
+          <a:noFill/>
+          <a:ln/>
+        </p:spPr>
+        <p:txBody>
+          <a:bodyPr wrap="square" rtlCol="0" anchor="ctr"/>
+          <a:lstStyle/>
+          <a:p>
+            <a:pPr algn="ctr" indent="0" marL="0">
+              <a:buNone/>
+            </a:pPr>
+            <a:r>
+              <a:rPr lang="en-US" sz="750" u="sng" dirty="0">
+                <a:solidFill>
+                  <a:srgbClr val="5A6675"/>
+                </a:solidFill>
+                <a:latin typeface="Calibri" pitchFamily="34" charset="0"/>
+                <a:ea typeface="Calibri" pitchFamily="34" charset="-122"/>
+                <a:cs typeface="Calibri" pitchFamily="34" charset="-120"/>
+                <a:hlinkClick r:id="rId2" invalidUrl="" action="" tgtFrame="" tooltip="" history="1" highlightClick="0" endSnd="0">
+                  <a:extLst>
+                    <a:ext uri="{A12FA001-AC4F-418D-AE19-62706E023703}">
+                      <ahyp:hlinkClr xmlns:ahyp="http://schemas.microsoft.com/office/drawing/2018/hyperlinkcolor" val="tx"/>
+                    </a:ext>
+                  </a:extLst>
+                </a:hlinkClick>
+              </a:rPr>
+              <a:t>github.com/uw-loci/qupath-extension-cluster-3d-navigator</a:t>
+            </a:r>
+            <a:endParaRPr lang="en-US" sz="750" dirty="0"/>
+          </a:p>
+        </p:txBody>
+      </p:sp>
+      <p:sp>
+        <p:nvSpPr>
+          <p:cNvPr id="13" name="Text 11"/>
+          <p:cNvSpPr/>
+          <p:nvPr/>
+        </p:nvSpPr>
+        <p:spPr>
+          <a:xfrm>
             <a:off x="640080" y="1755648"/>
-            <a:ext cx="10963656" cy="4279392"/>
+            <a:ext cx="9226296" cy="4279392"/>
           </a:xfrm>
           <a:prstGeom prst="rect">
             <a:avLst/>
@@ -11784,7 +12951,7 @@
       </p:sp>
       <p:sp>
         <p:nvSpPr>
-          <p:cNvPr id="6" name="Shape 4"/>
+          <p:cNvPr id="14" name="Shape 12"/>
           <p:cNvSpPr/>
           <p:nvPr/>
         </p:nvSpPr>
@@ -11809,7 +12976,7 @@
       </p:sp>
       <p:sp>
         <p:nvSpPr>
-          <p:cNvPr id="7" name="Text 5"/>
+          <p:cNvPr id="15" name="Text 13"/>
           <p:cNvSpPr/>
           <p:nvPr/>
         </p:nvSpPr>
@@ -11848,7 +13015,7 @@
       </p:sp>
       <p:sp>
         <p:nvSpPr>
-          <p:cNvPr id="8" name="Text 6"/>
+          <p:cNvPr id="16" name="Text 14"/>
           <p:cNvSpPr/>
           <p:nvPr/>
         </p:nvSpPr>
@@ -12971,14 +14138,316 @@
       </p:sp>
       <p:sp>
         <p:nvSpPr>
-          <p:cNvPr id="4" name="Shape 2"/>
+          <p:cNvPr id="4" name="Text 2"/>
+          <p:cNvSpPr/>
+          <p:nvPr/>
+        </p:nvSpPr>
+        <p:spPr>
+          <a:xfrm>
+            <a:off x="10140696" y="1280160"/>
+            <a:ext cx="1481328" cy="201168"/>
+          </a:xfrm>
+          <a:prstGeom prst="rect">
+            <a:avLst/>
+          </a:prstGeom>
+          <a:noFill/>
+          <a:ln/>
+        </p:spPr>
+        <p:txBody>
+          <a:bodyPr wrap="square" rtlCol="0" anchor="ctr"/>
+          <a:lstStyle/>
+          <a:p>
+            <a:pPr algn="ctr" indent="0" marL="0">
+              <a:buNone/>
+            </a:pPr>
+            <a:r>
+              <a:rPr lang="en-US" sz="1000" b="1" dirty="0">
+                <a:solidFill>
+                  <a:srgbClr val="1F4C86"/>
+                </a:solidFill>
+                <a:latin typeface="Calibri" pitchFamily="34" charset="0"/>
+                <a:ea typeface="Calibri" pitchFamily="34" charset="-122"/>
+                <a:cs typeface="Calibri" pitchFamily="34" charset="-120"/>
+              </a:rPr>
+              <a:t>Fiber Analysis</a:t>
+            </a:r>
+            <a:endParaRPr lang="en-US" sz="1000" dirty="0"/>
+          </a:p>
+        </p:txBody>
+      </p:sp>
+      <p:sp>
+        <p:nvSpPr>
+          <p:cNvPr id="5" name="Shape 3"/>
+          <p:cNvSpPr/>
+          <p:nvPr/>
+        </p:nvSpPr>
+        <p:spPr>
+          <a:xfrm>
+            <a:off x="10355580" y="1499616"/>
+            <a:ext cx="1051560" cy="1051560"/>
+          </a:xfrm>
+          <a:prstGeom prst="rect">
+            <a:avLst/>
+          </a:prstGeom>
+          <a:solidFill>
+            <a:srgbClr val="FFFFFF"/>
+          </a:solidFill>
+          <a:ln w="9525">
+            <a:solidFill>
+              <a:srgbClr val="3674C1"/>
+            </a:solidFill>
+            <a:prstDash val="dash"/>
+          </a:ln>
+        </p:spPr>
+      </p:sp>
+      <p:sp>
+        <p:nvSpPr>
+          <p:cNvPr id="6" name="Text 4"/>
+          <p:cNvSpPr/>
+          <p:nvPr/>
+        </p:nvSpPr>
+        <p:spPr>
+          <a:xfrm>
+            <a:off x="10355580" y="1499616"/>
+            <a:ext cx="1051560" cy="1051560"/>
+          </a:xfrm>
+          <a:prstGeom prst="rect">
+            <a:avLst/>
+          </a:prstGeom>
+          <a:noFill/>
+          <a:ln/>
+        </p:spPr>
+        <p:txBody>
+          <a:bodyPr wrap="square" rtlCol="0" anchor="ctr"/>
+          <a:lstStyle/>
+          <a:p>
+            <a:pPr algn="ctr" indent="0" marL="0">
+              <a:buNone/>
+            </a:pPr>
+            <a:r>
+              <a:rPr lang="en-US" sz="1100" dirty="0">
+                <a:solidFill>
+                  <a:srgbClr val="3674C1"/>
+                </a:solidFill>
+                <a:latin typeface="Calibri" pitchFamily="34" charset="0"/>
+                <a:ea typeface="Calibri" pitchFamily="34" charset="-122"/>
+                <a:cs typeface="Calibri" pitchFamily="34" charset="-120"/>
+              </a:rPr>
+              <a:t>QR</a:t>
+            </a:r>
+            <a:endParaRPr lang="en-US" sz="1100" dirty="0"/>
+          </a:p>
+        </p:txBody>
+      </p:sp>
+      <p:sp>
+        <p:nvSpPr>
+          <p:cNvPr id="7" name="Text 5">
+            <a:hlinkClick r:id="rId1" tooltip=""/>
+          </p:cNvPr>
+          <p:cNvSpPr/>
+          <p:nvPr/>
+        </p:nvSpPr>
+        <p:spPr>
+          <a:xfrm>
+            <a:off x="10140696" y="2587752"/>
+            <a:ext cx="1481328" cy="310896"/>
+          </a:xfrm>
+          <a:prstGeom prst="rect">
+            <a:avLst/>
+          </a:prstGeom>
+          <a:noFill/>
+          <a:ln/>
+        </p:spPr>
+        <p:txBody>
+          <a:bodyPr wrap="square" rtlCol="0" anchor="ctr"/>
+          <a:lstStyle/>
+          <a:p>
+            <a:pPr algn="ctr" indent="0" marL="0">
+              <a:buNone/>
+            </a:pPr>
+            <a:r>
+              <a:rPr lang="en-US" sz="750" u="sng" dirty="0">
+                <a:solidFill>
+                  <a:srgbClr val="5A6675"/>
+                </a:solidFill>
+                <a:latin typeface="Calibri" pitchFamily="34" charset="0"/>
+                <a:ea typeface="Calibri" pitchFamily="34" charset="-122"/>
+                <a:cs typeface="Calibri" pitchFamily="34" charset="-120"/>
+                <a:hlinkClick r:id="rId1" invalidUrl="" action="" tgtFrame="" tooltip="" history="1" highlightClick="0" endSnd="0">
+                  <a:extLst>
+                    <a:ext uri="{A12FA001-AC4F-418D-AE19-62706E023703}">
+                      <ahyp:hlinkClr xmlns:ahyp="http://schemas.microsoft.com/office/drawing/2018/hyperlinkcolor" val="tx"/>
+                    </a:ext>
+                  </a:extLst>
+                </a:hlinkClick>
+              </a:rPr>
+              <a:t>github.com/uw-loci/qupath-extension-fiber-analysis</a:t>
+            </a:r>
+            <a:endParaRPr lang="en-US" sz="750" dirty="0"/>
+          </a:p>
+        </p:txBody>
+      </p:sp>
+      <p:sp>
+        <p:nvSpPr>
+          <p:cNvPr id="8" name="Text 6"/>
+          <p:cNvSpPr/>
+          <p:nvPr/>
+        </p:nvSpPr>
+        <p:spPr>
+          <a:xfrm>
+            <a:off x="10140696" y="2935224"/>
+            <a:ext cx="1481328" cy="201168"/>
+          </a:xfrm>
+          <a:prstGeom prst="rect">
+            <a:avLst/>
+          </a:prstGeom>
+          <a:noFill/>
+          <a:ln/>
+        </p:spPr>
+        <p:txBody>
+          <a:bodyPr wrap="square" rtlCol="0" anchor="ctr"/>
+          <a:lstStyle/>
+          <a:p>
+            <a:pPr algn="ctr" indent="0" marL="0">
+              <a:buNone/>
+            </a:pPr>
+            <a:r>
+              <a:rPr lang="en-US" sz="1000" b="1" dirty="0">
+                <a:solidFill>
+                  <a:srgbClr val="1F4C86"/>
+                </a:solidFill>
+                <a:latin typeface="Calibri" pitchFamily="34" charset="0"/>
+                <a:ea typeface="Calibri" pitchFamily="34" charset="-122"/>
+                <a:cs typeface="Calibri" pitchFamily="34" charset="-120"/>
+              </a:rPr>
+              <a:t>TME-Quant</a:t>
+            </a:r>
+            <a:endParaRPr lang="en-US" sz="1000" dirty="0"/>
+          </a:p>
+        </p:txBody>
+      </p:sp>
+      <p:sp>
+        <p:nvSpPr>
+          <p:cNvPr id="9" name="Shape 7"/>
+          <p:cNvSpPr/>
+          <p:nvPr/>
+        </p:nvSpPr>
+        <p:spPr>
+          <a:xfrm>
+            <a:off x="10355580" y="3154680"/>
+            <a:ext cx="1051560" cy="1051560"/>
+          </a:xfrm>
+          <a:prstGeom prst="rect">
+            <a:avLst/>
+          </a:prstGeom>
+          <a:solidFill>
+            <a:srgbClr val="FFFFFF"/>
+          </a:solidFill>
+          <a:ln w="9525">
+            <a:solidFill>
+              <a:srgbClr val="3674C1"/>
+            </a:solidFill>
+            <a:prstDash val="dash"/>
+          </a:ln>
+        </p:spPr>
+      </p:sp>
+      <p:sp>
+        <p:nvSpPr>
+          <p:cNvPr id="10" name="Text 8"/>
+          <p:cNvSpPr/>
+          <p:nvPr/>
+        </p:nvSpPr>
+        <p:spPr>
+          <a:xfrm>
+            <a:off x="10355580" y="3154680"/>
+            <a:ext cx="1051560" cy="1051560"/>
+          </a:xfrm>
+          <a:prstGeom prst="rect">
+            <a:avLst/>
+          </a:prstGeom>
+          <a:noFill/>
+          <a:ln/>
+        </p:spPr>
+        <p:txBody>
+          <a:bodyPr wrap="square" rtlCol="0" anchor="ctr"/>
+          <a:lstStyle/>
+          <a:p>
+            <a:pPr algn="ctr" indent="0" marL="0">
+              <a:buNone/>
+            </a:pPr>
+            <a:r>
+              <a:rPr lang="en-US" sz="1100" dirty="0">
+                <a:solidFill>
+                  <a:srgbClr val="3674C1"/>
+                </a:solidFill>
+                <a:latin typeface="Calibri" pitchFamily="34" charset="0"/>
+                <a:ea typeface="Calibri" pitchFamily="34" charset="-122"/>
+                <a:cs typeface="Calibri" pitchFamily="34" charset="-120"/>
+              </a:rPr>
+              <a:t>QR</a:t>
+            </a:r>
+            <a:endParaRPr lang="en-US" sz="1100" dirty="0"/>
+          </a:p>
+        </p:txBody>
+      </p:sp>
+      <p:sp>
+        <p:nvSpPr>
+          <p:cNvPr id="11" name="Text 9">
+            <a:hlinkClick r:id="rId2" tooltip=""/>
+          </p:cNvPr>
+          <p:cNvSpPr/>
+          <p:nvPr/>
+        </p:nvSpPr>
+        <p:spPr>
+          <a:xfrm>
+            <a:off x="10140696" y="4242816"/>
+            <a:ext cx="1481328" cy="310896"/>
+          </a:xfrm>
+          <a:prstGeom prst="rect">
+            <a:avLst/>
+          </a:prstGeom>
+          <a:noFill/>
+          <a:ln/>
+        </p:spPr>
+        <p:txBody>
+          <a:bodyPr wrap="square" rtlCol="0" anchor="ctr"/>
+          <a:lstStyle/>
+          <a:p>
+            <a:pPr algn="ctr" indent="0" marL="0">
+              <a:buNone/>
+            </a:pPr>
+            <a:r>
+              <a:rPr lang="en-US" sz="750" u="sng" dirty="0">
+                <a:solidFill>
+                  <a:srgbClr val="5A6675"/>
+                </a:solidFill>
+                <a:latin typeface="Calibri" pitchFamily="34" charset="0"/>
+                <a:ea typeface="Calibri" pitchFamily="34" charset="-122"/>
+                <a:cs typeface="Calibri" pitchFamily="34" charset="-120"/>
+                <a:hlinkClick r:id="rId2" invalidUrl="" action="" tgtFrame="" tooltip="" history="1" highlightClick="0" endSnd="0">
+                  <a:extLst>
+                    <a:ext uri="{A12FA001-AC4F-418D-AE19-62706E023703}">
+                      <ahyp:hlinkClr xmlns:ahyp="http://schemas.microsoft.com/office/drawing/2018/hyperlinkcolor" val="tx"/>
+                    </a:ext>
+                  </a:extLst>
+                </a:hlinkClick>
+              </a:rPr>
+              <a:t>github.com/MichaelSNelson/qupath-extension-TME-Quant</a:t>
+            </a:r>
+            <a:endParaRPr lang="en-US" sz="750" dirty="0"/>
+          </a:p>
+        </p:txBody>
+      </p:sp>
+      <p:sp>
+        <p:nvSpPr>
+          <p:cNvPr id="12" name="Shape 10"/>
           <p:cNvSpPr/>
           <p:nvPr/>
         </p:nvSpPr>
         <p:spPr>
           <a:xfrm>
             <a:off x="566928" y="1554480"/>
-            <a:ext cx="5298948" cy="530352"/>
+            <a:ext cx="4430268" cy="530352"/>
           </a:xfrm>
           <a:prstGeom prst="rect">
             <a:avLst/>
@@ -12991,14 +14460,14 @@
       </p:sp>
       <p:sp>
         <p:nvSpPr>
-          <p:cNvPr id="5" name="Text 3"/>
+          <p:cNvPr id="13" name="Text 11"/>
           <p:cNvSpPr/>
           <p:nvPr/>
         </p:nvSpPr>
         <p:spPr>
           <a:xfrm>
             <a:off x="731520" y="1554480"/>
-            <a:ext cx="4969764" cy="530352"/>
+            <a:ext cx="4101084" cy="530352"/>
           </a:xfrm>
           <a:prstGeom prst="rect">
             <a:avLst/>
@@ -13030,14 +14499,14 @@
       </p:sp>
       <p:sp>
         <p:nvSpPr>
-          <p:cNvPr id="6" name="Text 4"/>
+          <p:cNvPr id="14" name="Text 12"/>
           <p:cNvSpPr/>
           <p:nvPr/>
         </p:nvSpPr>
         <p:spPr>
           <a:xfrm>
             <a:off x="658368" y="2240280"/>
-            <a:ext cx="5116068" cy="3566160"/>
+            <a:ext cx="4247388" cy="3566160"/>
           </a:xfrm>
           <a:prstGeom prst="rect">
             <a:avLst/>
@@ -13136,14 +14605,14 @@
       </p:sp>
       <p:sp>
         <p:nvSpPr>
-          <p:cNvPr id="7" name="Shape 5"/>
-          <p:cNvSpPr/>
-          <p:nvPr/>
-        </p:nvSpPr>
-        <p:spPr>
-          <a:xfrm>
-            <a:off x="6323076" y="1554480"/>
-            <a:ext cx="5298948" cy="530352"/>
+          <p:cNvPr id="15" name="Shape 13"/>
+          <p:cNvSpPr/>
+          <p:nvPr/>
+        </p:nvSpPr>
+        <p:spPr>
+          <a:xfrm>
+            <a:off x="5454396" y="1554480"/>
+            <a:ext cx="4430268" cy="530352"/>
           </a:xfrm>
           <a:prstGeom prst="rect">
             <a:avLst/>
@@ -13156,14 +14625,14 @@
       </p:sp>
       <p:sp>
         <p:nvSpPr>
-          <p:cNvPr id="8" name="Text 6"/>
-          <p:cNvSpPr/>
-          <p:nvPr/>
-        </p:nvSpPr>
-        <p:spPr>
-          <a:xfrm>
-            <a:off x="6487668" y="1554480"/>
-            <a:ext cx="4969764" cy="530352"/>
+          <p:cNvPr id="16" name="Text 14"/>
+          <p:cNvSpPr/>
+          <p:nvPr/>
+        </p:nvSpPr>
+        <p:spPr>
+          <a:xfrm>
+            <a:off x="5618988" y="1554480"/>
+            <a:ext cx="4101084" cy="530352"/>
           </a:xfrm>
           <a:prstGeom prst="rect">
             <a:avLst/>
@@ -13195,14 +14664,14 @@
       </p:sp>
       <p:sp>
         <p:nvSpPr>
-          <p:cNvPr id="9" name="Text 7"/>
-          <p:cNvSpPr/>
-          <p:nvPr/>
-        </p:nvSpPr>
-        <p:spPr>
-          <a:xfrm>
-            <a:off x="6414516" y="2240280"/>
-            <a:ext cx="5116068" cy="3566160"/>
+          <p:cNvPr id="17" name="Text 15"/>
+          <p:cNvSpPr/>
+          <p:nvPr/>
+        </p:nvSpPr>
+        <p:spPr>
+          <a:xfrm>
+            <a:off x="5545836" y="2240280"/>
+            <a:ext cx="4247388" cy="3566160"/>
           </a:xfrm>
           <a:prstGeom prst="rect">
             <a:avLst/>
@@ -13301,7 +14770,7 @@
       </p:sp>
       <p:sp>
         <p:nvSpPr>
-          <p:cNvPr id="10" name="Text 8"/>
+          <p:cNvPr id="18" name="Text 16"/>
           <p:cNvSpPr/>
           <p:nvPr/>
         </p:nvSpPr>
@@ -14040,8 +15509,159 @@
         </p:nvSpPr>
         <p:spPr>
           <a:xfrm>
+            <a:off x="10140696" y="1280160"/>
+            <a:ext cx="1481328" cy="201168"/>
+          </a:xfrm>
+          <a:prstGeom prst="rect">
+            <a:avLst/>
+          </a:prstGeom>
+          <a:noFill/>
+          <a:ln/>
+        </p:spPr>
+        <p:txBody>
+          <a:bodyPr wrap="square" rtlCol="0" anchor="ctr"/>
+          <a:lstStyle/>
+          <a:p>
+            <a:pPr algn="ctr" indent="0" marL="0">
+              <a:buNone/>
+            </a:pPr>
+            <a:r>
+              <a:rPr lang="en-US" sz="1000" b="1" dirty="0">
+                <a:solidFill>
+                  <a:srgbClr val="1F4C86"/>
+                </a:solidFill>
+                <a:latin typeface="Calibri" pitchFamily="34" charset="0"/>
+                <a:ea typeface="Calibri" pitchFamily="34" charset="-122"/>
+                <a:cs typeface="Calibri" pitchFamily="34" charset="-120"/>
+              </a:rPr>
+              <a:t>QPSC</a:t>
+            </a:r>
+            <a:endParaRPr lang="en-US" sz="1000" dirty="0"/>
+          </a:p>
+        </p:txBody>
+      </p:sp>
+      <p:sp>
+        <p:nvSpPr>
+          <p:cNvPr id="5" name="Shape 3"/>
+          <p:cNvSpPr/>
+          <p:nvPr/>
+        </p:nvSpPr>
+        <p:spPr>
+          <a:xfrm>
+            <a:off x="10264140" y="1499616"/>
+            <a:ext cx="1234440" cy="1234440"/>
+          </a:xfrm>
+          <a:prstGeom prst="rect">
+            <a:avLst/>
+          </a:prstGeom>
+          <a:solidFill>
+            <a:srgbClr val="FFFFFF"/>
+          </a:solidFill>
+          <a:ln w="9525">
+            <a:solidFill>
+              <a:srgbClr val="3674C1"/>
+            </a:solidFill>
+            <a:prstDash val="dash"/>
+          </a:ln>
+        </p:spPr>
+      </p:sp>
+      <p:sp>
+        <p:nvSpPr>
+          <p:cNvPr id="6" name="Text 4"/>
+          <p:cNvSpPr/>
+          <p:nvPr/>
+        </p:nvSpPr>
+        <p:spPr>
+          <a:xfrm>
+            <a:off x="10264140" y="1499616"/>
+            <a:ext cx="1234440" cy="1234440"/>
+          </a:xfrm>
+          <a:prstGeom prst="rect">
+            <a:avLst/>
+          </a:prstGeom>
+          <a:noFill/>
+          <a:ln/>
+        </p:spPr>
+        <p:txBody>
+          <a:bodyPr wrap="square" rtlCol="0" anchor="ctr"/>
+          <a:lstStyle/>
+          <a:p>
+            <a:pPr algn="ctr" indent="0" marL="0">
+              <a:buNone/>
+            </a:pPr>
+            <a:r>
+              <a:rPr lang="en-US" sz="1100" dirty="0">
+                <a:solidFill>
+                  <a:srgbClr val="3674C1"/>
+                </a:solidFill>
+                <a:latin typeface="Calibri" pitchFamily="34" charset="0"/>
+                <a:ea typeface="Calibri" pitchFamily="34" charset="-122"/>
+                <a:cs typeface="Calibri" pitchFamily="34" charset="-120"/>
+              </a:rPr>
+              <a:t>QR</a:t>
+            </a:r>
+            <a:endParaRPr lang="en-US" sz="1100" dirty="0"/>
+          </a:p>
+        </p:txBody>
+      </p:sp>
+      <p:sp>
+        <p:nvSpPr>
+          <p:cNvPr id="7" name="Text 5">
+            <a:hlinkClick r:id="rId1" tooltip=""/>
+          </p:cNvPr>
+          <p:cNvSpPr/>
+          <p:nvPr/>
+        </p:nvSpPr>
+        <p:spPr>
+          <a:xfrm>
+            <a:off x="10140696" y="2770632"/>
+            <a:ext cx="1481328" cy="310896"/>
+          </a:xfrm>
+          <a:prstGeom prst="rect">
+            <a:avLst/>
+          </a:prstGeom>
+          <a:noFill/>
+          <a:ln/>
+        </p:spPr>
+        <p:txBody>
+          <a:bodyPr wrap="square" rtlCol="0" anchor="ctr"/>
+          <a:lstStyle/>
+          <a:p>
+            <a:pPr algn="ctr" indent="0" marL="0">
+              <a:buNone/>
+            </a:pPr>
+            <a:r>
+              <a:rPr lang="en-US" sz="750" u="sng" dirty="0">
+                <a:solidFill>
+                  <a:srgbClr val="5A6675"/>
+                </a:solidFill>
+                <a:latin typeface="Calibri" pitchFamily="34" charset="0"/>
+                <a:ea typeface="Calibri" pitchFamily="34" charset="-122"/>
+                <a:cs typeface="Calibri" pitchFamily="34" charset="-120"/>
+                <a:hlinkClick r:id="rId1" invalidUrl="" action="" tgtFrame="" tooltip="" history="1" highlightClick="0" endSnd="0">
+                  <a:extLst>
+                    <a:ext uri="{A12FA001-AC4F-418D-AE19-62706E023703}">
+                      <ahyp:hlinkClr xmlns:ahyp="http://schemas.microsoft.com/office/drawing/2018/hyperlinkcolor" val="tx"/>
+                    </a:ext>
+                  </a:extLst>
+                </a:hlinkClick>
+              </a:rPr>
+              <a:t>github.com/uw-loci/qupath-extension-qpsc</a:t>
+            </a:r>
+            <a:endParaRPr lang="en-US" sz="750" dirty="0"/>
+          </a:p>
+        </p:txBody>
+      </p:sp>
+      <p:sp>
+        <p:nvSpPr>
+          <p:cNvPr id="8" name="Text 6"/>
+          <p:cNvSpPr/>
+          <p:nvPr/>
+        </p:nvSpPr>
+        <p:spPr>
+          <a:xfrm>
             <a:off x="640080" y="1481328"/>
-            <a:ext cx="10963656" cy="4553712"/>
+            <a:ext cx="9226296" cy="4553712"/>
           </a:xfrm>
           <a:prstGeom prst="rect">
             <a:avLst/>
@@ -14152,7 +15772,7 @@
       </p:sp>
       <p:sp>
         <p:nvSpPr>
-          <p:cNvPr id="5" name="Text 3"/>
+          <p:cNvPr id="9" name="Text 7"/>
           <p:cNvSpPr/>
           <p:nvPr/>
         </p:nvSpPr>
@@ -19076,8 +20696,461 @@
         </p:nvSpPr>
         <p:spPr>
           <a:xfrm>
+            <a:off x="10140696" y="1316736"/>
+            <a:ext cx="1481328" cy="201168"/>
+          </a:xfrm>
+          <a:prstGeom prst="rect">
+            <a:avLst/>
+          </a:prstGeom>
+          <a:noFill/>
+          <a:ln/>
+        </p:spPr>
+        <p:txBody>
+          <a:bodyPr wrap="square" rtlCol="0" anchor="ctr"/>
+          <a:lstStyle/>
+          <a:p>
+            <a:pPr algn="ctr" indent="0" marL="0">
+              <a:buNone/>
+            </a:pPr>
+            <a:r>
+              <a:rPr lang="en-US" sz="1000" b="1" dirty="0">
+                <a:solidFill>
+                  <a:srgbClr val="1F4C86"/>
+                </a:solidFill>
+                <a:latin typeface="Calibri" pitchFamily="34" charset="0"/>
+                <a:ea typeface="Calibri" pitchFamily="34" charset="-122"/>
+                <a:cs typeface="Calibri" pitchFamily="34" charset="-120"/>
+              </a:rPr>
+              <a:t>Dialog Manager</a:t>
+            </a:r>
+            <a:endParaRPr lang="en-US" sz="1000" dirty="0"/>
+          </a:p>
+        </p:txBody>
+      </p:sp>
+      <p:sp>
+        <p:nvSpPr>
+          <p:cNvPr id="6" name="Shape 4"/>
+          <p:cNvSpPr/>
+          <p:nvPr/>
+        </p:nvSpPr>
+        <p:spPr>
+          <a:xfrm>
+            <a:off x="10479024" y="1536192"/>
+            <a:ext cx="804672" cy="804672"/>
+          </a:xfrm>
+          <a:prstGeom prst="rect">
+            <a:avLst/>
+          </a:prstGeom>
+          <a:solidFill>
+            <a:srgbClr val="FFFFFF"/>
+          </a:solidFill>
+          <a:ln w="9525">
+            <a:solidFill>
+              <a:srgbClr val="3674C1"/>
+            </a:solidFill>
+            <a:prstDash val="dash"/>
+          </a:ln>
+        </p:spPr>
+      </p:sp>
+      <p:sp>
+        <p:nvSpPr>
+          <p:cNvPr id="7" name="Text 5"/>
+          <p:cNvSpPr/>
+          <p:nvPr/>
+        </p:nvSpPr>
+        <p:spPr>
+          <a:xfrm>
+            <a:off x="10479024" y="1536192"/>
+            <a:ext cx="804672" cy="804672"/>
+          </a:xfrm>
+          <a:prstGeom prst="rect">
+            <a:avLst/>
+          </a:prstGeom>
+          <a:noFill/>
+          <a:ln/>
+        </p:spPr>
+        <p:txBody>
+          <a:bodyPr wrap="square" rtlCol="0" anchor="ctr"/>
+          <a:lstStyle/>
+          <a:p>
+            <a:pPr algn="ctr" indent="0" marL="0">
+              <a:buNone/>
+            </a:pPr>
+            <a:r>
+              <a:rPr lang="en-US" sz="1100" dirty="0">
+                <a:solidFill>
+                  <a:srgbClr val="3674C1"/>
+                </a:solidFill>
+                <a:latin typeface="Calibri" pitchFamily="34" charset="0"/>
+                <a:ea typeface="Calibri" pitchFamily="34" charset="-122"/>
+                <a:cs typeface="Calibri" pitchFamily="34" charset="-120"/>
+              </a:rPr>
+              <a:t>QR</a:t>
+            </a:r>
+            <a:endParaRPr lang="en-US" sz="1100" dirty="0"/>
+          </a:p>
+        </p:txBody>
+      </p:sp>
+      <p:sp>
+        <p:nvSpPr>
+          <p:cNvPr id="8" name="Text 6">
+            <a:hlinkClick r:id="rId1" tooltip=""/>
+          </p:cNvPr>
+          <p:cNvSpPr/>
+          <p:nvPr/>
+        </p:nvSpPr>
+        <p:spPr>
+          <a:xfrm>
+            <a:off x="10140696" y="2377440"/>
+            <a:ext cx="1481328" cy="310896"/>
+          </a:xfrm>
+          <a:prstGeom prst="rect">
+            <a:avLst/>
+          </a:prstGeom>
+          <a:noFill/>
+          <a:ln/>
+        </p:spPr>
+        <p:txBody>
+          <a:bodyPr wrap="square" rtlCol="0" anchor="ctr"/>
+          <a:lstStyle/>
+          <a:p>
+            <a:pPr algn="ctr" indent="0" marL="0">
+              <a:buNone/>
+            </a:pPr>
+            <a:r>
+              <a:rPr lang="en-US" sz="750" u="sng" dirty="0">
+                <a:solidFill>
+                  <a:srgbClr val="5A6675"/>
+                </a:solidFill>
+                <a:latin typeface="Calibri" pitchFamily="34" charset="0"/>
+                <a:ea typeface="Calibri" pitchFamily="34" charset="-122"/>
+                <a:cs typeface="Calibri" pitchFamily="34" charset="-120"/>
+                <a:hlinkClick r:id="rId1" invalidUrl="" action="" tgtFrame="" tooltip="" history="1" highlightClick="0" endSnd="0">
+                  <a:extLst>
+                    <a:ext uri="{A12FA001-AC4F-418D-AE19-62706E023703}">
+                      <ahyp:hlinkClr xmlns:ahyp="http://schemas.microsoft.com/office/drawing/2018/hyperlinkcolor" val="tx"/>
+                    </a:ext>
+                  </a:extLst>
+                </a:hlinkClick>
+              </a:rPr>
+              <a:t>github.com/uw-loci/qupath-extension-dialog-manager</a:t>
+            </a:r>
+            <a:endParaRPr lang="en-US" sz="750" dirty="0"/>
+          </a:p>
+        </p:txBody>
+      </p:sp>
+      <p:sp>
+        <p:nvSpPr>
+          <p:cNvPr id="9" name="Text 7"/>
+          <p:cNvSpPr/>
+          <p:nvPr/>
+        </p:nvSpPr>
+        <p:spPr>
+          <a:xfrm>
+            <a:off x="10140696" y="2651760"/>
+            <a:ext cx="1481328" cy="201168"/>
+          </a:xfrm>
+          <a:prstGeom prst="rect">
+            <a:avLst/>
+          </a:prstGeom>
+          <a:noFill/>
+          <a:ln/>
+        </p:spPr>
+        <p:txBody>
+          <a:bodyPr wrap="square" rtlCol="0" anchor="ctr"/>
+          <a:lstStyle/>
+          <a:p>
+            <a:pPr algn="ctr" indent="0" marL="0">
+              <a:buNone/>
+            </a:pPr>
+            <a:r>
+              <a:rPr lang="en-US" sz="1000" b="1" dirty="0">
+                <a:solidFill>
+                  <a:srgbClr val="1F4C86"/>
+                </a:solidFill>
+                <a:latin typeface="Calibri" pitchFamily="34" charset="0"/>
+                <a:ea typeface="Calibri" pitchFamily="34" charset="-122"/>
+                <a:cs typeface="Calibri" pitchFamily="34" charset="-120"/>
+              </a:rPr>
+              <a:t>Channel Names</a:t>
+            </a:r>
+            <a:endParaRPr lang="en-US" sz="1000" dirty="0"/>
+          </a:p>
+        </p:txBody>
+      </p:sp>
+      <p:sp>
+        <p:nvSpPr>
+          <p:cNvPr id="10" name="Shape 8"/>
+          <p:cNvSpPr/>
+          <p:nvPr/>
+        </p:nvSpPr>
+        <p:spPr>
+          <a:xfrm>
+            <a:off x="10479024" y="2871216"/>
+            <a:ext cx="804672" cy="804672"/>
+          </a:xfrm>
+          <a:prstGeom prst="rect">
+            <a:avLst/>
+          </a:prstGeom>
+          <a:solidFill>
+            <a:srgbClr val="FFFFFF"/>
+          </a:solidFill>
+          <a:ln w="9525">
+            <a:solidFill>
+              <a:srgbClr val="3674C1"/>
+            </a:solidFill>
+            <a:prstDash val="dash"/>
+          </a:ln>
+        </p:spPr>
+      </p:sp>
+      <p:sp>
+        <p:nvSpPr>
+          <p:cNvPr id="11" name="Text 9"/>
+          <p:cNvSpPr/>
+          <p:nvPr/>
+        </p:nvSpPr>
+        <p:spPr>
+          <a:xfrm>
+            <a:off x="10479024" y="2871216"/>
+            <a:ext cx="804672" cy="804672"/>
+          </a:xfrm>
+          <a:prstGeom prst="rect">
+            <a:avLst/>
+          </a:prstGeom>
+          <a:noFill/>
+          <a:ln/>
+        </p:spPr>
+        <p:txBody>
+          <a:bodyPr wrap="square" rtlCol="0" anchor="ctr"/>
+          <a:lstStyle/>
+          <a:p>
+            <a:pPr algn="ctr" indent="0" marL="0">
+              <a:buNone/>
+            </a:pPr>
+            <a:r>
+              <a:rPr lang="en-US" sz="1100" dirty="0">
+                <a:solidFill>
+                  <a:srgbClr val="3674C1"/>
+                </a:solidFill>
+                <a:latin typeface="Calibri" pitchFamily="34" charset="0"/>
+                <a:ea typeface="Calibri" pitchFamily="34" charset="-122"/>
+                <a:cs typeface="Calibri" pitchFamily="34" charset="-120"/>
+              </a:rPr>
+              <a:t>QR</a:t>
+            </a:r>
+            <a:endParaRPr lang="en-US" sz="1100" dirty="0"/>
+          </a:p>
+        </p:txBody>
+      </p:sp>
+      <p:sp>
+        <p:nvSpPr>
+          <p:cNvPr id="12" name="Text 10">
+            <a:hlinkClick r:id="rId2" tooltip=""/>
+          </p:cNvPr>
+          <p:cNvSpPr/>
+          <p:nvPr/>
+        </p:nvSpPr>
+        <p:spPr>
+          <a:xfrm>
+            <a:off x="10140696" y="3712464"/>
+            <a:ext cx="1481328" cy="310896"/>
+          </a:xfrm>
+          <a:prstGeom prst="rect">
+            <a:avLst/>
+          </a:prstGeom>
+          <a:noFill/>
+          <a:ln/>
+        </p:spPr>
+        <p:txBody>
+          <a:bodyPr wrap="square" rtlCol="0" anchor="ctr"/>
+          <a:lstStyle/>
+          <a:p>
+            <a:pPr algn="ctr" indent="0" marL="0">
+              <a:buNone/>
+            </a:pPr>
+            <a:r>
+              <a:rPr lang="en-US" sz="750" u="sng" dirty="0">
+                <a:solidFill>
+                  <a:srgbClr val="5A6675"/>
+                </a:solidFill>
+                <a:latin typeface="Calibri" pitchFamily="34" charset="0"/>
+                <a:ea typeface="Calibri" pitchFamily="34" charset="-122"/>
+                <a:cs typeface="Calibri" pitchFamily="34" charset="-120"/>
+                <a:hlinkClick r:id="rId2" invalidUrl="" action="" tgtFrame="" tooltip="" history="1" highlightClick="0" endSnd="0">
+                  <a:extLst>
+                    <a:ext uri="{A12FA001-AC4F-418D-AE19-62706E023703}">
+                      <ahyp:hlinkClr xmlns:ahyp="http://schemas.microsoft.com/office/drawing/2018/hyperlinkcolor" val="tx"/>
+                    </a:ext>
+                  </a:extLst>
+                </a:hlinkClick>
+              </a:rPr>
+              <a:t>github.com/uw-loci/qupath-extension-channel-names-viewer</a:t>
+            </a:r>
+            <a:endParaRPr lang="en-US" sz="750" dirty="0"/>
+          </a:p>
+        </p:txBody>
+      </p:sp>
+      <p:sp>
+        <p:nvSpPr>
+          <p:cNvPr id="13" name="Text 11"/>
+          <p:cNvSpPr/>
+          <p:nvPr/>
+        </p:nvSpPr>
+        <p:spPr>
+          <a:xfrm>
+            <a:off x="10140696" y="3986784"/>
+            <a:ext cx="1481328" cy="201168"/>
+          </a:xfrm>
+          <a:prstGeom prst="rect">
+            <a:avLst/>
+          </a:prstGeom>
+          <a:noFill/>
+          <a:ln/>
+        </p:spPr>
+        <p:txBody>
+          <a:bodyPr wrap="square" rtlCol="0" anchor="ctr"/>
+          <a:lstStyle/>
+          <a:p>
+            <a:pPr algn="ctr" indent="0" marL="0">
+              <a:buNone/>
+            </a:pPr>
+            <a:r>
+              <a:rPr lang="en-US" sz="1000" b="1" dirty="0">
+                <a:solidFill>
+                  <a:srgbClr val="1F4C86"/>
+                </a:solidFill>
+                <a:latin typeface="Calibri" pitchFamily="34" charset="0"/>
+                <a:ea typeface="Calibri" pitchFamily="34" charset="-122"/>
+                <a:cs typeface="Calibri" pitchFamily="34" charset="-120"/>
+              </a:rPr>
+              <a:t>Classify Subset</a:t>
+            </a:r>
+            <a:endParaRPr lang="en-US" sz="1000" dirty="0"/>
+          </a:p>
+        </p:txBody>
+      </p:sp>
+      <p:sp>
+        <p:nvSpPr>
+          <p:cNvPr id="14" name="Shape 12"/>
+          <p:cNvSpPr/>
+          <p:nvPr/>
+        </p:nvSpPr>
+        <p:spPr>
+          <a:xfrm>
+            <a:off x="10479024" y="4206240"/>
+            <a:ext cx="804672" cy="804672"/>
+          </a:xfrm>
+          <a:prstGeom prst="rect">
+            <a:avLst/>
+          </a:prstGeom>
+          <a:solidFill>
+            <a:srgbClr val="FFFFFF"/>
+          </a:solidFill>
+          <a:ln w="9525">
+            <a:solidFill>
+              <a:srgbClr val="3674C1"/>
+            </a:solidFill>
+            <a:prstDash val="dash"/>
+          </a:ln>
+        </p:spPr>
+      </p:sp>
+      <p:sp>
+        <p:nvSpPr>
+          <p:cNvPr id="15" name="Text 13"/>
+          <p:cNvSpPr/>
+          <p:nvPr/>
+        </p:nvSpPr>
+        <p:spPr>
+          <a:xfrm>
+            <a:off x="10479024" y="4206240"/>
+            <a:ext cx="804672" cy="804672"/>
+          </a:xfrm>
+          <a:prstGeom prst="rect">
+            <a:avLst/>
+          </a:prstGeom>
+          <a:noFill/>
+          <a:ln/>
+        </p:spPr>
+        <p:txBody>
+          <a:bodyPr wrap="square" rtlCol="0" anchor="ctr"/>
+          <a:lstStyle/>
+          <a:p>
+            <a:pPr algn="ctr" indent="0" marL="0">
+              <a:buNone/>
+            </a:pPr>
+            <a:r>
+              <a:rPr lang="en-US" sz="1100" dirty="0">
+                <a:solidFill>
+                  <a:srgbClr val="3674C1"/>
+                </a:solidFill>
+                <a:latin typeface="Calibri" pitchFamily="34" charset="0"/>
+                <a:ea typeface="Calibri" pitchFamily="34" charset="-122"/>
+                <a:cs typeface="Calibri" pitchFamily="34" charset="-120"/>
+              </a:rPr>
+              <a:t>QR</a:t>
+            </a:r>
+            <a:endParaRPr lang="en-US" sz="1100" dirty="0"/>
+          </a:p>
+        </p:txBody>
+      </p:sp>
+      <p:sp>
+        <p:nvSpPr>
+          <p:cNvPr id="16" name="Text 14">
+            <a:hlinkClick r:id="rId3" tooltip=""/>
+          </p:cNvPr>
+          <p:cNvSpPr/>
+          <p:nvPr/>
+        </p:nvSpPr>
+        <p:spPr>
+          <a:xfrm>
+            <a:off x="10140696" y="5047488"/>
+            <a:ext cx="1481328" cy="310896"/>
+          </a:xfrm>
+          <a:prstGeom prst="rect">
+            <a:avLst/>
+          </a:prstGeom>
+          <a:noFill/>
+          <a:ln/>
+        </p:spPr>
+        <p:txBody>
+          <a:bodyPr wrap="square" rtlCol="0" anchor="ctr"/>
+          <a:lstStyle/>
+          <a:p>
+            <a:pPr algn="ctr" indent="0" marL="0">
+              <a:buNone/>
+            </a:pPr>
+            <a:r>
+              <a:rPr lang="en-US" sz="750" u="sng" dirty="0">
+                <a:solidFill>
+                  <a:srgbClr val="5A6675"/>
+                </a:solidFill>
+                <a:latin typeface="Calibri" pitchFamily="34" charset="0"/>
+                <a:ea typeface="Calibri" pitchFamily="34" charset="-122"/>
+                <a:cs typeface="Calibri" pitchFamily="34" charset="-120"/>
+                <a:hlinkClick r:id="rId3" invalidUrl="" action="" tgtFrame="" tooltip="" history="1" highlightClick="0" endSnd="0">
+                  <a:extLst>
+                    <a:ext uri="{A12FA001-AC4F-418D-AE19-62706E023703}">
+                      <ahyp:hlinkClr xmlns:ahyp="http://schemas.microsoft.com/office/drawing/2018/hyperlinkcolor" val="tx"/>
+                    </a:ext>
+                  </a:extLst>
+                </a:hlinkClick>
+              </a:rPr>
+              <a:t>github.com/uw-loci/qupath-extension-classify-object-subset</a:t>
+            </a:r>
+            <a:endParaRPr lang="en-US" sz="750" dirty="0"/>
+          </a:p>
+        </p:txBody>
+      </p:sp>
+      <p:sp>
+        <p:nvSpPr>
+          <p:cNvPr id="17" name="Text 15"/>
+          <p:cNvSpPr/>
+          <p:nvPr/>
+        </p:nvSpPr>
+        <p:spPr>
+          <a:xfrm>
             <a:off x="640080" y="1755648"/>
-            <a:ext cx="10963656" cy="4279392"/>
+            <a:ext cx="9226296" cy="4279392"/>
           </a:xfrm>
           <a:prstGeom prst="rect">
             <a:avLst/>
@@ -19188,7 +21261,7 @@
       </p:sp>
       <p:sp>
         <p:nvSpPr>
-          <p:cNvPr id="6" name="Shape 4"/>
+          <p:cNvPr id="18" name="Shape 16"/>
           <p:cNvSpPr/>
           <p:nvPr/>
         </p:nvSpPr>
@@ -19213,7 +21286,7 @@
       </p:sp>
       <p:sp>
         <p:nvSpPr>
-          <p:cNvPr id="7" name="Text 5"/>
+          <p:cNvPr id="19" name="Text 17"/>
           <p:cNvSpPr/>
           <p:nvPr/>
         </p:nvSpPr>
@@ -19252,7 +21325,7 @@
       </p:sp>
       <p:sp>
         <p:nvSpPr>
-          <p:cNvPr id="8" name="Text 6"/>
+          <p:cNvPr id="20" name="Text 18"/>
           <p:cNvSpPr/>
           <p:nvPr/>
         </p:nvSpPr>
@@ -19427,8 +21500,310 @@
         </p:nvSpPr>
         <p:spPr>
           <a:xfrm>
+            <a:off x="10140696" y="1316736"/>
+            <a:ext cx="1481328" cy="201168"/>
+          </a:xfrm>
+          <a:prstGeom prst="rect">
+            <a:avLst/>
+          </a:prstGeom>
+          <a:noFill/>
+          <a:ln/>
+        </p:spPr>
+        <p:txBody>
+          <a:bodyPr wrap="square" rtlCol="0" anchor="ctr"/>
+          <a:lstStyle/>
+          <a:p>
+            <a:pPr algn="ctr" indent="0" marL="0">
+              <a:buNone/>
+            </a:pPr>
+            <a:r>
+              <a:rPr lang="en-US" sz="1000" b="1" dirty="0">
+                <a:solidFill>
+                  <a:srgbClr val="1F4C86"/>
+                </a:solidFill>
+                <a:latin typeface="Calibri" pitchFamily="34" charset="0"/>
+                <a:ea typeface="Calibri" pitchFamily="34" charset="-122"/>
+                <a:cs typeface="Calibri" pitchFamily="34" charset="-120"/>
+              </a:rPr>
+              <a:t>Wizard Wand</a:t>
+            </a:r>
+            <a:endParaRPr lang="en-US" sz="1000" dirty="0"/>
+          </a:p>
+        </p:txBody>
+      </p:sp>
+      <p:sp>
+        <p:nvSpPr>
+          <p:cNvPr id="6" name="Shape 4"/>
+          <p:cNvSpPr/>
+          <p:nvPr/>
+        </p:nvSpPr>
+        <p:spPr>
+          <a:xfrm>
+            <a:off x="10355580" y="1536192"/>
+            <a:ext cx="1051560" cy="1051560"/>
+          </a:xfrm>
+          <a:prstGeom prst="rect">
+            <a:avLst/>
+          </a:prstGeom>
+          <a:solidFill>
+            <a:srgbClr val="FFFFFF"/>
+          </a:solidFill>
+          <a:ln w="9525">
+            <a:solidFill>
+              <a:srgbClr val="3674C1"/>
+            </a:solidFill>
+            <a:prstDash val="dash"/>
+          </a:ln>
+        </p:spPr>
+      </p:sp>
+      <p:sp>
+        <p:nvSpPr>
+          <p:cNvPr id="7" name="Text 5"/>
+          <p:cNvSpPr/>
+          <p:nvPr/>
+        </p:nvSpPr>
+        <p:spPr>
+          <a:xfrm>
+            <a:off x="10355580" y="1536192"/>
+            <a:ext cx="1051560" cy="1051560"/>
+          </a:xfrm>
+          <a:prstGeom prst="rect">
+            <a:avLst/>
+          </a:prstGeom>
+          <a:noFill/>
+          <a:ln/>
+        </p:spPr>
+        <p:txBody>
+          <a:bodyPr wrap="square" rtlCol="0" anchor="ctr"/>
+          <a:lstStyle/>
+          <a:p>
+            <a:pPr algn="ctr" indent="0" marL="0">
+              <a:buNone/>
+            </a:pPr>
+            <a:r>
+              <a:rPr lang="en-US" sz="1100" dirty="0">
+                <a:solidFill>
+                  <a:srgbClr val="3674C1"/>
+                </a:solidFill>
+                <a:latin typeface="Calibri" pitchFamily="34" charset="0"/>
+                <a:ea typeface="Calibri" pitchFamily="34" charset="-122"/>
+                <a:cs typeface="Calibri" pitchFamily="34" charset="-120"/>
+              </a:rPr>
+              <a:t>QR</a:t>
+            </a:r>
+            <a:endParaRPr lang="en-US" sz="1100" dirty="0"/>
+          </a:p>
+        </p:txBody>
+      </p:sp>
+      <p:sp>
+        <p:nvSpPr>
+          <p:cNvPr id="8" name="Text 6">
+            <a:hlinkClick r:id="rId1" tooltip=""/>
+          </p:cNvPr>
+          <p:cNvSpPr/>
+          <p:nvPr/>
+        </p:nvSpPr>
+        <p:spPr>
+          <a:xfrm>
+            <a:off x="10140696" y="2624328"/>
+            <a:ext cx="1481328" cy="310896"/>
+          </a:xfrm>
+          <a:prstGeom prst="rect">
+            <a:avLst/>
+          </a:prstGeom>
+          <a:noFill/>
+          <a:ln/>
+        </p:spPr>
+        <p:txBody>
+          <a:bodyPr wrap="square" rtlCol="0" anchor="ctr"/>
+          <a:lstStyle/>
+          <a:p>
+            <a:pPr algn="ctr" indent="0" marL="0">
+              <a:buNone/>
+            </a:pPr>
+            <a:r>
+              <a:rPr lang="en-US" sz="750" u="sng" dirty="0">
+                <a:solidFill>
+                  <a:srgbClr val="5A6675"/>
+                </a:solidFill>
+                <a:latin typeface="Calibri" pitchFamily="34" charset="0"/>
+                <a:ea typeface="Calibri" pitchFamily="34" charset="-122"/>
+                <a:cs typeface="Calibri" pitchFamily="34" charset="-120"/>
+                <a:hlinkClick r:id="rId1" invalidUrl="" action="" tgtFrame="" tooltip="" history="1" highlightClick="0" endSnd="0">
+                  <a:extLst>
+                    <a:ext uri="{A12FA001-AC4F-418D-AE19-62706E023703}">
+                      <ahyp:hlinkClr xmlns:ahyp="http://schemas.microsoft.com/office/drawing/2018/hyperlinkcolor" val="tx"/>
+                    </a:ext>
+                  </a:extLst>
+                </a:hlinkClick>
+              </a:rPr>
+              <a:t>github.com/uw-loci/qupath-extension-wizard-wand</a:t>
+            </a:r>
+            <a:endParaRPr lang="en-US" sz="750" dirty="0"/>
+          </a:p>
+        </p:txBody>
+      </p:sp>
+      <p:sp>
+        <p:nvSpPr>
+          <p:cNvPr id="9" name="Text 7"/>
+          <p:cNvSpPr/>
+          <p:nvPr/>
+        </p:nvSpPr>
+        <p:spPr>
+          <a:xfrm>
+            <a:off x="10140696" y="2971800"/>
+            <a:ext cx="1481328" cy="201168"/>
+          </a:xfrm>
+          <a:prstGeom prst="rect">
+            <a:avLst/>
+          </a:prstGeom>
+          <a:noFill/>
+          <a:ln/>
+        </p:spPr>
+        <p:txBody>
+          <a:bodyPr wrap="square" rtlCol="0" anchor="ctr"/>
+          <a:lstStyle/>
+          <a:p>
+            <a:pPr algn="ctr" indent="0" marL="0">
+              <a:buNone/>
+            </a:pPr>
+            <a:r>
+              <a:rPr lang="en-US" sz="1000" b="1" dirty="0">
+                <a:solidFill>
+                  <a:srgbClr val="1F4C86"/>
+                </a:solidFill>
+                <a:latin typeface="Calibri" pitchFamily="34" charset="0"/>
+                <a:ea typeface="Calibri" pitchFamily="34" charset="-122"/>
+                <a:cs typeface="Calibri" pitchFamily="34" charset="-120"/>
+              </a:rPr>
+              <a:t>Polyline Wand</a:t>
+            </a:r>
+            <a:endParaRPr lang="en-US" sz="1000" dirty="0"/>
+          </a:p>
+        </p:txBody>
+      </p:sp>
+      <p:sp>
+        <p:nvSpPr>
+          <p:cNvPr id="10" name="Shape 8"/>
+          <p:cNvSpPr/>
+          <p:nvPr/>
+        </p:nvSpPr>
+        <p:spPr>
+          <a:xfrm>
+            <a:off x="10355580" y="3191256"/>
+            <a:ext cx="1051560" cy="1051560"/>
+          </a:xfrm>
+          <a:prstGeom prst="rect">
+            <a:avLst/>
+          </a:prstGeom>
+          <a:solidFill>
+            <a:srgbClr val="FFFFFF"/>
+          </a:solidFill>
+          <a:ln w="9525">
+            <a:solidFill>
+              <a:srgbClr val="3674C1"/>
+            </a:solidFill>
+            <a:prstDash val="dash"/>
+          </a:ln>
+        </p:spPr>
+      </p:sp>
+      <p:sp>
+        <p:nvSpPr>
+          <p:cNvPr id="11" name="Text 9"/>
+          <p:cNvSpPr/>
+          <p:nvPr/>
+        </p:nvSpPr>
+        <p:spPr>
+          <a:xfrm>
+            <a:off x="10355580" y="3191256"/>
+            <a:ext cx="1051560" cy="1051560"/>
+          </a:xfrm>
+          <a:prstGeom prst="rect">
+            <a:avLst/>
+          </a:prstGeom>
+          <a:noFill/>
+          <a:ln/>
+        </p:spPr>
+        <p:txBody>
+          <a:bodyPr wrap="square" rtlCol="0" anchor="ctr"/>
+          <a:lstStyle/>
+          <a:p>
+            <a:pPr algn="ctr" indent="0" marL="0">
+              <a:buNone/>
+            </a:pPr>
+            <a:r>
+              <a:rPr lang="en-US" sz="1100" dirty="0">
+                <a:solidFill>
+                  <a:srgbClr val="3674C1"/>
+                </a:solidFill>
+                <a:latin typeface="Calibri" pitchFamily="34" charset="0"/>
+                <a:ea typeface="Calibri" pitchFamily="34" charset="-122"/>
+                <a:cs typeface="Calibri" pitchFamily="34" charset="-120"/>
+              </a:rPr>
+              <a:t>QR</a:t>
+            </a:r>
+            <a:endParaRPr lang="en-US" sz="1100" dirty="0"/>
+          </a:p>
+        </p:txBody>
+      </p:sp>
+      <p:sp>
+        <p:nvSpPr>
+          <p:cNvPr id="12" name="Text 10">
+            <a:hlinkClick r:id="rId2" tooltip=""/>
+          </p:cNvPr>
+          <p:cNvSpPr/>
+          <p:nvPr/>
+        </p:nvSpPr>
+        <p:spPr>
+          <a:xfrm>
+            <a:off x="10140696" y="4279392"/>
+            <a:ext cx="1481328" cy="310896"/>
+          </a:xfrm>
+          <a:prstGeom prst="rect">
+            <a:avLst/>
+          </a:prstGeom>
+          <a:noFill/>
+          <a:ln/>
+        </p:spPr>
+        <p:txBody>
+          <a:bodyPr wrap="square" rtlCol="0" anchor="ctr"/>
+          <a:lstStyle/>
+          <a:p>
+            <a:pPr algn="ctr" indent="0" marL="0">
+              <a:buNone/>
+            </a:pPr>
+            <a:r>
+              <a:rPr lang="en-US" sz="750" u="sng" dirty="0">
+                <a:solidFill>
+                  <a:srgbClr val="5A6675"/>
+                </a:solidFill>
+                <a:latin typeface="Calibri" pitchFamily="34" charset="0"/>
+                <a:ea typeface="Calibri" pitchFamily="34" charset="-122"/>
+                <a:cs typeface="Calibri" pitchFamily="34" charset="-120"/>
+                <a:hlinkClick r:id="rId2" invalidUrl="" action="" tgtFrame="" tooltip="" history="1" highlightClick="0" endSnd="0">
+                  <a:extLst>
+                    <a:ext uri="{A12FA001-AC4F-418D-AE19-62706E023703}">
+                      <ahyp:hlinkClr xmlns:ahyp="http://schemas.microsoft.com/office/drawing/2018/hyperlinkcolor" val="tx"/>
+                    </a:ext>
+                  </a:extLst>
+                </a:hlinkClick>
+              </a:rPr>
+              <a:t>github.com/uw-loci/qupath-extension-polyline-wand</a:t>
+            </a:r>
+            <a:endParaRPr lang="en-US" sz="750" dirty="0"/>
+          </a:p>
+        </p:txBody>
+      </p:sp>
+      <p:sp>
+        <p:nvSpPr>
+          <p:cNvPr id="13" name="Text 11"/>
+          <p:cNvSpPr/>
+          <p:nvPr/>
+        </p:nvSpPr>
+        <p:spPr>
+          <a:xfrm>
             <a:off x="640080" y="1755648"/>
-            <a:ext cx="10963656" cy="4279392"/>
+            <a:ext cx="9226296" cy="4279392"/>
           </a:xfrm>
           <a:prstGeom prst="rect">
             <a:avLst/>
@@ -19563,7 +21938,7 @@
       </p:sp>
       <p:sp>
         <p:nvSpPr>
-          <p:cNvPr id="6" name="Shape 4"/>
+          <p:cNvPr id="14" name="Shape 12"/>
           <p:cNvSpPr/>
           <p:nvPr/>
         </p:nvSpPr>
@@ -19588,7 +21963,7 @@
       </p:sp>
       <p:sp>
         <p:nvSpPr>
-          <p:cNvPr id="7" name="Text 5"/>
+          <p:cNvPr id="15" name="Text 13"/>
           <p:cNvSpPr/>
           <p:nvPr/>
         </p:nvSpPr>
@@ -19627,7 +22002,7 @@
       </p:sp>
       <p:sp>
         <p:nvSpPr>
-          <p:cNvPr id="8" name="Text 6"/>
+          <p:cNvPr id="16" name="Text 14"/>
           <p:cNvSpPr/>
           <p:nvPr/>
         </p:nvSpPr>

--- a/I2K_2026_QuPath_Extensions.pptx
+++ b/I2K_2026_QuPath_Extensions.pptx
@@ -7742,7 +7742,7 @@
                 <a:ea typeface="Calibri" pitchFamily="34" charset="-122"/>
                 <a:cs typeface="Calibri" pitchFamily="34" charset="-120"/>
               </a:rPr>
-              <a:t>Sorting by a recognised column makes the bad reads stand out as outliers.</a:t>
+              <a:t>Sorting by a recognized column makes the bad reads stand out as outliers.</a:t>
             </a:r>
             <a:endParaRPr lang="en-US" sz="1600" dirty="0"/>
           </a:p>
@@ -8845,7 +8845,7 @@
                 <a:ea typeface="Calibri" pitchFamily="34" charset="-122"/>
                 <a:cs typeface="Calibri" pitchFamily="34" charset="-120"/>
               </a:rPr>
-              <a:t>Each tile is a separate exposure. The stage moved between them, and every neighbouring pair was told to share about 10% of its width so there is common tissue to match on.</a:t>
+              <a:t>Each tile is a separate exposure. The stage moved between them, and every neighboring pair was told to share about 10% of its width so there is common tissue to match on.</a:t>
             </a:r>
             <a:endParaRPr lang="en-US" sz="1500" dirty="0"/>
           </a:p>
@@ -9406,7 +9406,7 @@
                 <a:ea typeface="Calibri" pitchFamily="34" charset="-122"/>
                 <a:cs typeface="Calibri" pitchFamily="34" charset="-120"/>
               </a:rPr>
-              <a:t>Kristin Gallik, whose concept and scripts the Confusion Matrix grew from.  ·  Pete Bankhead and the QuPath team.  ·  CT-FIRE, CurveAlign, TACS and TWOMBLI for the fibre work.  ·  CytoMAP and QuBaLab for bringing clustering into QuPath.  ·  QUAREP-LiMi for the reporting standards.  ·  The image.sc community, where several of these features were first requested.
+              <a:t>Kristin Gallik, whose concept and scripts the Confusion Matrix grew from.  ·  Pete Bankhead and the QuPath team.  ·  CT-FIRE, CurveAlign, TACS and TWOMBLI for the fiber work.  ·  CytoMAP and QuBaLab for bringing clustering into QuPath.  ·  QUAREP-LiMi for the reporting standards.  ·  The image.sc community, where several of these features were first requested.
 </a:t>
             </a:r>
             <a:pPr indent="0" marL="0">
@@ -9965,7 +9965,7 @@
                 <a:ea typeface="Calibri" pitchFamily="34" charset="-122"/>
                 <a:cs typeface="Calibri" pitchFamily="34" charset="-120"/>
               </a:rPr>
-              <a:t>All four, placed on the recorded coordinates alone. Every neighbouring pair now shares a strip.</a:t>
+              <a:t>All four, placed on the recorded coordinates alone. Every neighboring pair now shares a strip.</a:t>
             </a:r>
             <a:endParaRPr lang="en-US" sz="1500" dirty="0"/>
           </a:p>
@@ -10429,7 +10429,7 @@
                 <a:ea typeface="Calibri" pitchFamily="34" charset="-122"/>
                 <a:cs typeface="Calibri" pitchFamily="34" charset="-120"/>
               </a:rPr>
-              <a:t>As acquired: neighbouring tiles share a strip of the same tissue (shaded)</a:t>
+              <a:t>As acquired: neighboring tiles share a strip of the same tissue (shaded)</a:t>
             </a:r>
             <a:endParaRPr lang="en-US" sz="1700" dirty="0"/>
           </a:p>
@@ -10555,7 +10555,7 @@
                 <a:ea typeface="Calibri" pitchFamily="34" charset="-122"/>
                 <a:cs typeface="Calibri" pitchFamily="34" charset="-120"/>
               </a:rPr>
-              <a:t>Pancreatic cancer, polarised light. The stage recorded this tile about 5 px (0.9 µm) away from where it really was — the worst of 17 seams in this grid, which ran to a 2.2 px median. Registration measured that from the overlap and closed every seam to under a pixel. It is a tick-box: left off, tiles go where the stage said.</a:t>
+              <a:t>Pancreatic cancer, polarized light. The stage recorded this tile about 5 px (0.9 µm) away from where it really was — the worst of 17 seams in this grid, which ran to a 2.2 px median. Registration measured that from the overlap and closed every seam to under a pixel. It is a tick-box: left off, tiles go where the stage said.</a:t>
             </a:r>
             <a:endParaRPr lang="en-US" sz="1500" dirty="0"/>
           </a:p>
@@ -10945,7 +10945,7 @@
                 <a:ea typeface="Calibri" pitchFamily="34" charset="-122"/>
                 <a:cs typeface="Calibri" pitchFamily="34" charset="-120"/>
               </a:rPr>
-              <a:t>A spanning tree would keep 99 of the 180 neighbour edges on a 10×10 grid and throw away 81, so nothing is ever asked to close a loop</a:t>
+              <a:t>A spanning tree would keep 99 of the 180 neighbor edges on a 10×10 grid and throw away 81, so nothing is ever asked to close a loop</a:t>
             </a:r>
             <a:endParaRPr lang="en-US" sz="2000" dirty="0"/>
           </a:p>
@@ -12150,7 +12150,7 @@
                 <a:ea typeface="Calibri" pitchFamily="34" charset="-122"/>
                 <a:cs typeface="Calibri" pitchFamily="34" charset="-120"/>
               </a:rPr>
-              <a:t>For when the built-in classifier is not enough: subtle textures, classes that differ by architecture rather than colour.</a:t>
+              <a:t>For when the built-in classifier is not enough: subtle textures, classes that differ by architecture rather than color.</a:t>
             </a:r>
             <a:endParaRPr lang="en-US" sz="1700" dirty="0"/>
           </a:p>
@@ -12395,7 +12395,7 @@
                 <a:ea typeface="Calibri" pitchFamily="34" charset="-122"/>
                 <a:cs typeface="Calibri" pitchFamily="34" charset="-120"/>
               </a:rPr>
-              <a:t>Brightfield and multi-channel fluorescence, with channel selection and intensity normalisation</a:t>
+              <a:t>Brightfield and multi-channel fluorescence, with channel selection and intensity normalization</a:t>
             </a:r>
             <a:endParaRPr lang="en-US" sz="2000" dirty="0"/>
           </a:p>
@@ -13081,7 +13081,7 @@
                 <a:ea typeface="Calibri" pitchFamily="34" charset="-122"/>
                 <a:cs typeface="Calibri" pitchFamily="34" charset="-120"/>
               </a:rPr>
-              <a:t>Three are demonstrated but not practised — I will say why each time; two more were Sara McArdle’s session yesterday</a:t>
+              <a:t>Three are demonstrated but not practiced — I will say why each time; two more were Sara McArdle’s session yesterday</a:t>
             </a:r>
             <a:endParaRPr lang="en-US" sz="2000" dirty="0"/>
           </a:p>
@@ -13734,7 +13734,7 @@
                 <a:ea typeface="Calibri" pitchFamily="34" charset="-122"/>
                 <a:cs typeface="Calibri" pitchFamily="34" charset="-120"/>
               </a:rPr>
-              <a:t>Label a small subset by hand and have the rest of the project labelled for you — no object classifier involved</a:t>
+              <a:t>Label a small subset by hand and have the rest of the project labeled for you — no object classifier involved</a:t>
             </a:r>
             <a:endParaRPr lang="en-US" sz="2000" dirty="0"/>
           </a:p>
@@ -14223,7 +14223,7 @@
                 <a:ea typeface="Trebuchet MS" pitchFamily="34" charset="-122"/>
                 <a:cs typeface="Trebuchet MS" pitchFamily="34" charset="-120"/>
               </a:rPr>
-              <a:t>Why fibre architecture</a:t>
+              <a:t>Why fiber architecture</a:t>
             </a:r>
             <a:endParaRPr lang="en-US" sz="3000" dirty="0"/>
           </a:p>
@@ -14376,7 +14376,7 @@
                 <a:ea typeface="Calibri" pitchFamily="34" charset="-122"/>
                 <a:cs typeface="Calibri" pitchFamily="34" charset="-120"/>
               </a:rPr>
-              <a:t>In breast pathology, straightened fibres running perpendicular to the tumour boundary act as tracks for invading cells</a:t>
+              <a:t>In breast pathology, straightened fibers running perpendicular to the tumor boundary act as tracks for invading cells</a:t>
             </a:r>
             <a:endParaRPr lang="en-US" sz="2000" dirty="0"/>
           </a:p>
@@ -15019,7 +15019,7 @@
                 <a:ea typeface="Calibri" pitchFamily="34" charset="-122"/>
                 <a:cs typeface="Calibri" pitchFamily="34" charset="-120"/>
               </a:rPr>
-              <a:t>Straightness: wavy versus straightened fibres, per window and per ROI</a:t>
+              <a:t>Straightness: wavy versus straightened fibers, per window and per ROI</a:t>
             </a:r>
             <a:endParaRPr lang="en-US" sz="1800" dirty="0"/>
           </a:p>
@@ -15061,7 +15061,7 @@
                 <a:ea typeface="Calibri" pitchFamily="34" charset="-122"/>
                 <a:cs typeface="Calibri" pitchFamily="34" charset="-120"/>
               </a:rPr>
-              <a:t>Texture: the information fibre-tracing misses entirely</a:t>
+              <a:t>Texture: the information fiber-tracing misses entirely</a:t>
             </a:r>
             <a:endParaRPr lang="en-US" sz="1800" dirty="0"/>
           </a:p>
@@ -15120,7 +15120,7 @@
                 <a:ea typeface="Trebuchet MS" pitchFamily="34" charset="-122"/>
                 <a:cs typeface="Trebuchet MS" pitchFamily="34" charset="-120"/>
               </a:rPr>
-              <a:t>TME-Quant — trace the fibres</a:t>
+              <a:t>TME-Quant — trace the fibers</a:t>
             </a:r>
             <a:endParaRPr lang="en-US" sz="2000" dirty="0"/>
           </a:p>
@@ -15163,7 +15163,7 @@
                 <a:ea typeface="Calibri" pitchFamily="34" charset="-122"/>
                 <a:cs typeface="Calibri" pitchFamily="34" charset="-120"/>
               </a:rPr>
-              <a:t>Individual fibres extracted and committed back as objects</a:t>
+              <a:t>Individual fibers extracted and committed back as objects</a:t>
             </a:r>
             <a:endParaRPr lang="en-US" sz="1800" dirty="0"/>
           </a:p>
@@ -15205,7 +15205,7 @@
                 <a:ea typeface="Calibri" pitchFamily="34" charset="-122"/>
                 <a:cs typeface="Calibri" pitchFamily="34" charset="-120"/>
               </a:rPr>
-              <a:t>Trace a few real fibres yourself, and it tunes its own parameters to match</a:t>
+              <a:t>Trace a few real fibers yourself, and it tunes its own parameters to match</a:t>
             </a:r>
             <a:endParaRPr lang="en-US" sz="1800" dirty="0"/>
           </a:p>
@@ -15226,7 +15226,7 @@
                 <a:ea typeface="Calibri" pitchFamily="34" charset="-122"/>
                 <a:cs typeface="Calibri" pitchFamily="34" charset="-120"/>
               </a:rPr>
-              <a:t>Fibres classified by orientation relative to a tumour boundary</a:t>
+              <a:t>Fibers classified by orientation relative to a tumor boundary</a:t>
             </a:r>
             <a:endParaRPr lang="en-US" sz="1800" dirty="0"/>
           </a:p>
@@ -16404,7 +16404,7 @@
                 <a:ea typeface="Calibri" pitchFamily="34" charset="-122"/>
                 <a:cs typeface="Calibri" pitchFamily="34" charset="-120"/>
               </a:rPr>
-              <a:t>The region you analysed is the region you acquire at high resolution</a:t>
+              <a:t>The region you analyzed is the region you acquire at high resolution</a:t>
             </a:r>
             <a:endParaRPr lang="en-US" sz="2000" dirty="0"/>
           </a:p>
@@ -17360,7 +17360,7 @@
                 <a:ea typeface="Calibri" pitchFamily="34" charset="-122"/>
                 <a:cs typeface="Calibri" pitchFamily="34" charset="-120"/>
               </a:rPr>
-              <a:t>Already fixed: QPSC, the Confusion Matrix and the fibre tools are shown regardless — and Channel Names Viewer and Classify Object Subset were covered in Sara McArdle’s session yesterday.
+              <a:t>Already fixed: QPSC, the Confusion Matrix and the fiber tools are shown regardless — and Channel Names Viewer and Classify Object Subset were covered in Sara McArdle’s session yesterday.
 </a:t>
             </a:r>
             <a:pPr indent="0" marL="0">
@@ -18698,7 +18698,7 @@
                 <a:ea typeface="Calibri" pitchFamily="34" charset="-122"/>
                 <a:cs typeface="Calibri" pitchFamily="34" charset="-120"/>
               </a:rPr>
-              <a:t>GUI behaviour — nothing catches a dialog opening off-screen except a human</a:t>
+              <a:t>GUI behavior — nothing catches a dialog opening off-screen except a human</a:t>
             </a:r>
             <a:endParaRPr lang="en-US" sz="1800" dirty="0"/>
           </a:p>
@@ -19255,7 +19255,7 @@
                 <a:ea typeface="Calibri" pitchFamily="34" charset="-122"/>
                 <a:cs typeface="Calibri" pitchFamily="34" charset="-120"/>
               </a:rPr>
-              <a:t>Normalisation statistics sampled across the image, or reused from training, so every tile is scaled the same way</a:t>
+              <a:t>Normalization statistics sampled across the image, or reused from training, so every tile is scaled the same way</a:t>
             </a:r>
             <a:endParaRPr lang="en-US" sz="2000" dirty="0"/>
           </a:p>
@@ -19606,7 +19606,7 @@
                 <a:ea typeface="Calibri" pitchFamily="34" charset="-122"/>
                 <a:cs typeface="Calibri" pitchFamily="34" charset="-120"/>
               </a:rPr>
-              <a:t>Unsupervised clustering · rule-based marker gating · propagation from a small hand-labelled subset · applying an existing classifier to a chosen subset instead of everything</a:t>
+              <a:t>Unsupervised clustering · rule-based marker gating · propagation from a small hand-labeled subset · applying an existing classifier to a chosen subset instead of everything</a:t>
             </a:r>
             <a:endParaRPr lang="en-US" sz="2000" dirty="0"/>
           </a:p>
@@ -21693,7 +21693,7 @@
                 <a:ea typeface="Calibri" pitchFamily="34" charset="-122"/>
                 <a:cs typeface="Calibri" pitchFamily="34" charset="-120"/>
               </a:rPr>
-              <a:t>Channel Names Viewer — a floating, colour-coded legend of the selected channels, so you are not re-reading the brightness dialog to find out which is which</a:t>
+              <a:t>Channel Names Viewer — a floating, color-coded legend of the selected channels, so you are not re-reading the brightness dialog to find out which is which</a:t>
             </a:r>
             <a:endParaRPr lang="en-US" sz="2000" dirty="0"/>
           </a:p>
@@ -22322,7 +22322,7 @@
                 <a:ea typeface="Calibri" pitchFamily="34" charset="-122"/>
                 <a:cs typeface="Calibri" pitchFamily="34" charset="-120"/>
               </a:rPr>
-              <a:t>Four colour-space modes: grayscale, RGB, subtle stain differences, or selecting by hue</a:t>
+              <a:t>Four color-space modes: grayscale, RGB, subtle stain differences, or selecting by hue</a:t>
             </a:r>
             <a:endParaRPr lang="en-US" sz="2000" dirty="0"/>
           </a:p>
@@ -22394,7 +22394,7 @@
                 <a:ea typeface="Calibri" pitchFamily="34" charset="-122"/>
                 <a:cs typeface="Calibri" pitchFamily="34" charset="-120"/>
               </a:rPr>
-              <a:t>Push a traced boundary outward, erase backwards from an endpoint, or cut one polyline in two — both halves keep class, name and colour</a:t>
+              <a:t>Push a traced boundary outward, erase backwards from an endpoint, or cut one polyline in two — both halves keep class, name and color</a:t>
             </a:r>
             <a:endParaRPr lang="en-US" sz="2000" dirty="0"/>
           </a:p>
@@ -22760,7 +22760,7 @@
                 <a:ea typeface="Calibri" pitchFamily="34" charset="-122"/>
                 <a:cs typeface="Calibri" pitchFamily="34" charset="-120"/>
               </a:rPr>
-              <a:t>Scissors mode — cut one polyline in two, both halves keeping class, name and colour</a:t>
+              <a:t>Scissors mode — cut one polyline in two, both halves keeping class, name and color</a:t>
             </a:r>
             <a:endParaRPr lang="en-US" sz="2000" dirty="0"/>
           </a:p>
